--- a/presentation.pptx
+++ b/presentation.pptx
@@ -111,6 +111,659 @@
     </a:lvl9pPr>
   </p:defaultTextStyle>
 </p:presentation>
+</file>
+
+<file path=ppt/charts/chart1.xml><?xml version="1.0" encoding="utf-8"?>
+<c:chartSpace xmlns:c="http://schemas.openxmlformats.org/drawingml/2006/chart" xmlns:a="http://schemas.openxmlformats.org/drawingml/2006/main" xmlns:r="http://schemas.openxmlformats.org/officeDocument/2006/relationships">
+  <c:date1904 val="0"/>
+  <c:roundedCorners val="1"/>
+  <c:chart>
+    <c:title>
+      <c:tx>
+        <c:rich>
+          <a:bodyPr/>
+          <a:lstStyle/>
+          <a:p>
+            <a:pPr>
+              <a:defRPr sz="1800" b="0" i="0" u="none" strike="noStrike">
+                <a:solidFill>
+                  <a:srgbClr val="2C2B29"/>
+                </a:solidFill>
+                <a:latin typeface="Georgia"/>
+              </a:defRPr>
+            </a:pPr>
+            <a:r>
+              <a:rPr sz="1800" b="0" i="0" u="none" strike="noStrike">
+                <a:solidFill>
+                  <a:srgbClr val="2C2B29"/>
+                </a:solidFill>
+                <a:latin typeface="Georgia"/>
+              </a:rPr>
+              <a:t>Inference Acceleration (x Baseline)</a:t>
+            </a:r>
+          </a:p>
+        </c:rich>
+      </c:tx>
+      <c:layout/>
+      <c:overlay val="0"/>
+    </c:title>
+    <c:autoTitleDeleted val="0"/>
+    <c:plotArea>
+      <c:layout/>
+      <c:barChart>
+        <c:barDir val="col"/>
+        <c:grouping val="clustered"/>
+        <c:varyColors val="0"/>
+        <c:ser>
+          <c:idx val="0"/>
+          <c:order val="0"/>
+          <c:tx>
+            <c:strRef>
+              <c:f>Sheet1!$B$1</c:f>
+              <c:strCache>
+                <c:ptCount val="1"/>
+                <c:pt idx="0">
+                  <c:v>Inference Acceleration (x Baseline)</c:v>
+                </c:pt>
+              </c:strCache>
+            </c:strRef>
+          </c:tx>
+          <c:spPr>
+            <a:solidFill>
+              <a:srgbClr val="8B0000"/>
+            </a:solidFill>
+            <a:effectLst/>
+          </c:spPr>
+          <c:invertIfNegative val="0"/>
+          <c:dLbls>
+            <c:numFmt formatCode="#,##0" sourceLinked="0"/>
+            <c:txPr>
+              <a:bodyPr/>
+              <a:lstStyle/>
+              <a:p>
+                <a:pPr>
+                  <a:defRPr b="0" i="0" strike="noStrike" sz="1200" u="none">
+                    <a:solidFill>
+                      <a:srgbClr val="000000"/>
+                    </a:solidFill>
+                    <a:latin typeface="Arial"/>
+                  </a:defRPr>
+                </a:pPr>
+              </a:p>
+            </c:txPr>
+            <c:showLegendKey val="0"/>
+            <c:showVal val="0"/>
+            <c:showCatName val="0"/>
+            <c:showSerName val="0"/>
+            <c:showPercent val="0"/>
+            <c:showBubbleSize val="0"/>
+            <c:showLeaderLines val="0"/>
+          </c:dLbls>
+          <c:dPt>
+            <c:idx val="0"/>
+            <c:invertIfNegative val="0"/>
+            <c:bubble3D val="0"/>
+            <c:spPr>
+              <a:solidFill>
+                <a:srgbClr val="8b0000"/>
+              </a:solidFill>
+              <a:effectLst/>
+            </c:spPr>
+          </c:dPt>
+          <c:dPt>
+            <c:idx val="1"/>
+            <c:invertIfNegative val="0"/>
+            <c:bubble3D val="0"/>
+            <c:spPr>
+              <a:solidFill>
+                <a:srgbClr val="c29b38"/>
+              </a:solidFill>
+              <a:effectLst/>
+            </c:spPr>
+          </c:dPt>
+          <c:dPt>
+            <c:idx val="2"/>
+            <c:invertIfNegative val="0"/>
+            <c:bubble3D val="0"/>
+            <c:spPr>
+              <a:solidFill>
+                <a:srgbClr val="1c3f60"/>
+              </a:solidFill>
+              <a:effectLst/>
+            </c:spPr>
+          </c:dPt>
+          <c:dPt>
+            <c:idx val="3"/>
+            <c:invertIfNegative val="0"/>
+            <c:bubble3D val="0"/>
+            <c:spPr>
+              <a:solidFill>
+                <a:srgbClr val="2e7d32"/>
+              </a:solidFill>
+              <a:effectLst/>
+            </c:spPr>
+          </c:dPt>
+          <c:cat>
+            <c:multiLvlStrRef>
+              <c:f>Sheet1!$A$2:$A$5</c:f>
+              <c:multiLvlStrCache>
+                <c:ptCount val="4"/>
+                <c:lvl>
+                  <c:pt idx="0">
+                    <c:v>ResNet-50</c:v>
+                  </c:pt>
+                  <c:pt idx="1">
+                    <c:v>BERT-Large</c:v>
+                  </c:pt>
+                  <c:pt idx="2">
+                    <c:v>LLaMA-7B</c:v>
+                  </c:pt>
+                  <c:pt idx="3">
+                    <c:v>QuantumNet</c:v>
+                  </c:pt>
+                </c:lvl>
+              </c:multiLvlStrCache>
+            </c:multiLvlStrRef>
+          </c:cat>
+          <c:val>
+            <c:numRef>
+              <c:f>Sheet1!$B$2:$B$5</c:f>
+              <c:numCache>
+                <c:formatCode>General</c:formatCode>
+                <c:ptCount val="4"/>
+                <c:pt idx="0">
+                  <c:v>3.2</c:v>
+                </c:pt>
+                <c:pt idx="1">
+                  <c:v>5.8</c:v>
+                </c:pt>
+                <c:pt idx="2">
+                  <c:v>8.4</c:v>
+                </c:pt>
+                <c:pt idx="3">
+                  <c:v>14.1</c:v>
+                </c:pt>
+              </c:numCache>
+            </c:numRef>
+          </c:val>
+        </c:ser>
+        <c:dLbls>
+          <c:numFmt formatCode="#,##0" sourceLinked="0"/>
+          <c:txPr>
+            <a:bodyPr/>
+            <a:lstStyle/>
+            <a:p>
+              <a:pPr>
+                <a:defRPr b="0" i="0" strike="noStrike" sz="1200" u="none">
+                  <a:solidFill>
+                    <a:srgbClr val="000000"/>
+                  </a:solidFill>
+                  <a:latin typeface="Arial"/>
+                </a:defRPr>
+              </a:pPr>
+            </a:p>
+          </c:txPr>
+          <c:showLegendKey val="0"/>
+          <c:showVal val="0"/>
+          <c:showCatName val="0"/>
+          <c:showSerName val="0"/>
+          <c:showPercent val="0"/>
+          <c:showBubbleSize val="0"/>
+          <c:showLeaderLines val="0"/>
+        </c:dLbls>
+        <c:gapWidth val="150"/>
+        <c:overlap val="0"/>
+        <c:axId val="2094734554"/>
+        <c:axId val="2094734552"/>
+        <c:axId val="2094734556"/>
+      </c:barChart>
+      <c:catAx>
+        <c:axId val="2094734554"/>
+        <c:scaling>
+          <c:orientation val="minMax"/>
+        </c:scaling>
+        <c:delete val="0"/>
+        <c:axPos val="b"/>
+        <c:numFmt formatCode="General" sourceLinked="1"/>
+        <c:majorTickMark val="out"/>
+        <c:minorTickMark val="none"/>
+        <c:tickLblPos val="low"/>
+        <c:spPr>
+          <a:ln w="12700" cap="flat">
+            <a:solidFill>
+              <a:srgbClr val="888888"/>
+            </a:solidFill>
+            <a:prstDash val="solid"/>
+            <a:round/>
+          </a:ln>
+        </c:spPr>
+        <c:txPr>
+          <a:bodyPr/>
+          <a:lstStyle/>
+          <a:p>
+            <a:pPr>
+              <a:defRPr sz="1200" b="0" i="0" u="none" strike="noStrike">
+                <a:solidFill>
+                  <a:srgbClr val="000000"/>
+                </a:solidFill>
+                <a:latin typeface="Arial"/>
+              </a:defRPr>
+            </a:pPr>
+            <a:endParaRPr lang="en-US"/>
+          </a:p>
+        </c:txPr>
+        <c:crossAx val="2094734552"/>
+        <c:crosses val="autoZero"/>
+        <c:auto val="1"/>
+        <c:lblAlgn val="ctr"/>
+        <c:noMultiLvlLbl val="1"/>
+      </c:catAx>
+      <c:valAx>
+        <c:axId val="2094734552"/>
+        <c:scaling>
+          <c:orientation val="minMax"/>
+        </c:scaling>
+        <c:delete val="0"/>
+        <c:axPos val="l"/>
+        <c:majorGridlines>
+          <c:spPr>
+            <a:ln w="12700" cap="flat">
+              <a:solidFill>
+                <a:srgbClr val="888888"/>
+              </a:solidFill>
+              <a:prstDash val="solid"/>
+              <a:round/>
+            </a:ln>
+          </c:spPr>
+        </c:majorGridlines>
+        <c:numFmt formatCode="General" sourceLinked="0"/>
+        <c:majorTickMark val="out"/>
+        <c:minorTickMark val="none"/>
+        <c:tickLblPos val="nextTo"/>
+        <c:spPr>
+          <a:ln w="12700" cap="flat">
+            <a:solidFill>
+              <a:srgbClr val="888888"/>
+            </a:solidFill>
+            <a:prstDash val="solid"/>
+            <a:round/>
+          </a:ln>
+        </c:spPr>
+        <c:txPr>
+          <a:bodyPr/>
+          <a:lstStyle/>
+          <a:p>
+            <a:pPr>
+              <a:defRPr sz="1200" b="0" i="0" u="none" strike="noStrike">
+                <a:solidFill>
+                  <a:srgbClr val="000000"/>
+                </a:solidFill>
+                <a:latin typeface="Arial"/>
+              </a:defRPr>
+            </a:pPr>
+            <a:endParaRPr lang="en-US"/>
+          </a:p>
+        </c:txPr>
+        <c:crossAx val="2094734554"/>
+        <c:crosses val="autoZero"/>
+        <c:crossBetween val="between"/>
+      </c:valAx>
+      <c:spPr>
+        <a:noFill/>
+        <a:ln>
+          <a:noFill/>
+        </a:ln>
+        <a:effectLst/>
+      </c:spPr>
+    </c:plotArea>
+    <c:legend>
+      <c:legendPos val="b"/>
+      <c:overlay val="0"/>
+      <c:txPr>
+        <a:bodyPr/>
+        <a:lstStyle/>
+        <a:p>
+          <a:pPr>
+            <a:defRPr>
+              <a:solidFill>
+                <a:srgbClr val="6B6862"/>
+              </a:solidFill>
+            </a:defRPr>
+          </a:pPr>
+          <a:endParaRPr lang="en-US"/>
+        </a:p>
+      </c:txPr>
+    </c:legend>
+    <c:plotVisOnly val="1"/>
+    <c:dispBlanksAs val="span"/>
+  </c:chart>
+  <c:spPr>
+    <a:noFill/>
+    <a:ln>
+      <a:noFill/>
+    </a:ln>
+    <a:effectLst/>
+  </c:spPr>
+  <c:externalData r:id="rId1">
+    <c:autoUpdate val="0"/>
+  </c:externalData>
+</c:chartSpace>
+</file>
+
+<file path=ppt/charts/chart2.xml><?xml version="1.0" encoding="utf-8"?>
+<c:chartSpace xmlns:c="http://schemas.openxmlformats.org/drawingml/2006/chart" xmlns:a="http://schemas.openxmlformats.org/drawingml/2006/main" xmlns:r="http://schemas.openxmlformats.org/officeDocument/2006/relationships">
+  <c:date1904 val="0"/>
+  <c:roundedCorners val="1"/>
+  <c:chart>
+    <c:title>
+      <c:tx>
+        <c:rich>
+          <a:bodyPr/>
+          <a:lstStyle/>
+          <a:p>
+            <a:pPr>
+              <a:defRPr sz="1800" b="0" i="0" u="none" strike="noStrike">
+                <a:solidFill>
+                  <a:srgbClr val="2C2B29"/>
+                </a:solidFill>
+                <a:latin typeface="Georgia"/>
+              </a:defRPr>
+            </a:pPr>
+            <a:r>
+              <a:rPr sz="1800" b="0" i="0" u="none" strike="noStrike">
+                <a:solidFill>
+                  <a:srgbClr val="2C2B29"/>
+                </a:solidFill>
+                <a:latin typeface="Georgia"/>
+              </a:rPr>
+              <a:t>Cluster Resource Utilization</a:t>
+            </a:r>
+          </a:p>
+        </c:rich>
+      </c:tx>
+      <c:layout/>
+      <c:overlay val="0"/>
+    </c:title>
+    <c:autoTitleDeleted val="0"/>
+    <c:plotArea>
+      <c:layout/>
+      <c:doughnutChart>
+        <c:varyColors val="1"/>
+        <c:ser>
+          <c:idx val="0"/>
+          <c:order val="0"/>
+          <c:tx>
+            <c:strRef>
+              <c:f>Sheet1!$B$1</c:f>
+              <c:strCache>
+                <c:ptCount val="1"/>
+                <c:pt idx="0">
+                  <c:v>Cluster Resource Utilization</c:v>
+                </c:pt>
+              </c:strCache>
+            </c:strRef>
+          </c:tx>
+          <c:spPr>
+            <a:solidFill>
+              <a:schemeClr val="accent1"/>
+            </a:solidFill>
+            <a:ln w="9525" cap="flat">
+              <a:solidFill>
+                <a:srgbClr val="F9F9F9"/>
+              </a:solidFill>
+              <a:prstDash val="solid"/>
+              <a:round/>
+            </a:ln>
+            <a:effectLst/>
+          </c:spPr>
+          <c:dPt>
+            <c:idx val="0"/>
+            <c:bubble3D val="0"/>
+            <c:spPr>
+              <a:solidFill>
+                <a:srgbClr val="8B0000"/>
+              </a:solidFill>
+              <a:effectLst/>
+            </c:spPr>
+          </c:dPt>
+          <c:dPt>
+            <c:idx val="1"/>
+            <c:bubble3D val="0"/>
+            <c:spPr>
+              <a:solidFill>
+                <a:srgbClr val="C29B38"/>
+              </a:solidFill>
+              <a:effectLst/>
+            </c:spPr>
+          </c:dPt>
+          <c:dPt>
+            <c:idx val="2"/>
+            <c:bubble3D val="0"/>
+            <c:spPr>
+              <a:solidFill>
+                <a:srgbClr val="1C3F60"/>
+              </a:solidFill>
+              <a:effectLst/>
+            </c:spPr>
+          </c:dPt>
+          <c:dPt>
+            <c:idx val="3"/>
+            <c:bubble3D val="0"/>
+            <c:spPr>
+              <a:solidFill>
+                <a:srgbClr val="2E7D32"/>
+              </a:solidFill>
+              <a:effectLst/>
+            </c:spPr>
+          </c:dPt>
+          <c:dLbls>
+            <c:dLbl>
+              <c:idx val="0"/>
+              <c:numFmt formatCode="General" sourceLinked="0"/>
+              <c:spPr/>
+              <c:txPr>
+                <a:bodyPr/>
+                <a:lstStyle/>
+                <a:p>
+                  <a:pPr>
+                    <a:defRPr sz="1200" b="0" i="0" u="none" strike="noStrike">
+                      <a:solidFill>
+                        <a:srgbClr val="000000"/>
+                      </a:solidFill>
+                      <a:latin typeface="Arial"/>
+                    </a:defRPr>
+                  </a:pPr>
+                </a:p>
+              </c:txPr>
+              <c:showLegendKey val="0"/>
+              <c:showVal val="0"/>
+              <c:showCatName val="0"/>
+              <c:showSerName val="0"/>
+              <c:showPercent val="0"/>
+              <c:showBubbleSize val="0"/>
+            </c:dLbl>
+            <c:dLbl>
+              <c:idx val="1"/>
+              <c:numFmt formatCode="General" sourceLinked="0"/>
+              <c:spPr/>
+              <c:txPr>
+                <a:bodyPr/>
+                <a:lstStyle/>
+                <a:p>
+                  <a:pPr>
+                    <a:defRPr sz="1200" b="0" i="0" u="none" strike="noStrike">
+                      <a:solidFill>
+                        <a:srgbClr val="000000"/>
+                      </a:solidFill>
+                      <a:latin typeface="Arial"/>
+                    </a:defRPr>
+                  </a:pPr>
+                </a:p>
+              </c:txPr>
+              <c:showLegendKey val="0"/>
+              <c:showVal val="0"/>
+              <c:showCatName val="0"/>
+              <c:showSerName val="0"/>
+              <c:showPercent val="0"/>
+              <c:showBubbleSize val="0"/>
+            </c:dLbl>
+            <c:dLbl>
+              <c:idx val="2"/>
+              <c:numFmt formatCode="General" sourceLinked="0"/>
+              <c:spPr/>
+              <c:txPr>
+                <a:bodyPr/>
+                <a:lstStyle/>
+                <a:p>
+                  <a:pPr>
+                    <a:defRPr sz="1200" b="0" i="0" u="none" strike="noStrike">
+                      <a:solidFill>
+                        <a:srgbClr val="000000"/>
+                      </a:solidFill>
+                      <a:latin typeface="Arial"/>
+                    </a:defRPr>
+                  </a:pPr>
+                </a:p>
+              </c:txPr>
+              <c:showLegendKey val="0"/>
+              <c:showVal val="0"/>
+              <c:showCatName val="0"/>
+              <c:showSerName val="0"/>
+              <c:showPercent val="0"/>
+              <c:showBubbleSize val="0"/>
+            </c:dLbl>
+            <c:dLbl>
+              <c:idx val="3"/>
+              <c:numFmt formatCode="General" sourceLinked="0"/>
+              <c:spPr/>
+              <c:txPr>
+                <a:bodyPr/>
+                <a:lstStyle/>
+                <a:p>
+                  <a:pPr>
+                    <a:defRPr sz="1200" b="0" i="0" u="none" strike="noStrike">
+                      <a:solidFill>
+                        <a:srgbClr val="000000"/>
+                      </a:solidFill>
+                      <a:latin typeface="Arial"/>
+                    </a:defRPr>
+                  </a:pPr>
+                </a:p>
+              </c:txPr>
+              <c:showLegendKey val="0"/>
+              <c:showVal val="0"/>
+              <c:showCatName val="0"/>
+              <c:showSerName val="0"/>
+              <c:showPercent val="0"/>
+              <c:showBubbleSize val="0"/>
+            </c:dLbl>
+            <c:numFmt formatCode="General" sourceLinked="0"/>
+            <c:txPr>
+              <a:bodyPr/>
+              <a:lstStyle/>
+              <a:p>
+                <a:pPr>
+                  <a:defRPr sz="1800" b="0" i="0" u="none" strike="noStrike">
+                    <a:solidFill>
+                      <a:srgbClr val="000000"/>
+                    </a:solidFill>
+                    <a:latin typeface="Arial"/>
+                  </a:defRPr>
+                </a:pPr>
+              </a:p>
+            </c:txPr>
+            <c:showLegendKey val="0"/>
+            <c:showVal val="0"/>
+            <c:showCatName val="1"/>
+            <c:showSerName val="0"/>
+            <c:showPercent val="1"/>
+            <c:showBubbleSize val="0"/>
+            <c:showLeaderLines val="0"/>
+          </c:dLbls>
+          <c:cat>
+            <c:strRef>
+              <c:f>Sheet1!$A$2:$A$5</c:f>
+              <c:strCache>
+                <c:ptCount val="4"/>
+                <c:pt idx="0">
+                  <c:v>Tensor Cores</c:v>
+                </c:pt>
+                <c:pt idx="1">
+                  <c:v>Ingestion Mesh</c:v>
+                </c:pt>
+                <c:pt idx="2">
+                  <c:v>Vector DB</c:v>
+                </c:pt>
+                <c:pt idx="3">
+                  <c:v>Reserve</c:v>
+                </c:pt>
+              </c:strCache>
+            </c:strRef>
+          </c:cat>
+          <c:val>
+            <c:numRef>
+              <c:f>Sheet1!$B$2:$B$5</c:f>
+              <c:numCache>
+                <c:ptCount val="4"/>
+                <c:pt idx="0">
+                  <c:v>50</c:v>
+                </c:pt>
+                <c:pt idx="1">
+                  <c:v>25</c:v>
+                </c:pt>
+                <c:pt idx="2">
+                  <c:v>15</c:v>
+                </c:pt>
+                <c:pt idx="3">
+                  <c:v>10</c:v>
+                </c:pt>
+              </c:numCache>
+            </c:numRef>
+          </c:val>
+        </c:ser>
+        <c:firstSliceAng val="0"/>
+        <c:holeSize val="50"/>
+      </c:doughnutChart>
+      <c:spPr>
+        <a:noFill/>
+        <a:ln>
+          <a:noFill/>
+        </a:ln>
+        <a:effectLst/>
+      </c:spPr>
+    </c:plotArea>
+    <c:legend>
+      <c:legendPos val="b"/>
+      <c:overlay val="0"/>
+      <c:txPr>
+        <a:bodyPr/>
+        <a:lstStyle/>
+        <a:p>
+          <a:pPr>
+            <a:defRPr>
+              <a:solidFill>
+                <a:srgbClr val="6B6862"/>
+              </a:solidFill>
+            </a:defRPr>
+          </a:pPr>
+          <a:endParaRPr lang="en-US"/>
+        </a:p>
+      </c:txPr>
+    </c:legend>
+    <c:plotVisOnly val="1"/>
+    <c:dispBlanksAs val="span"/>
+  </c:chart>
+  <c:spPr>
+    <a:noFill/>
+    <a:ln>
+      <a:noFill/>
+    </a:ln>
+    <a:effectLst/>
+  </c:spPr>
+  <c:externalData r:id="rId1">
+    <c:autoUpdate val="0"/>
+  </c:externalData>
+</c:chartSpace>
 </file>
 
 <file path=ppt/notesMasters/notesMaster1.xml><?xml version="1.0" encoding="utf-8"?>
@@ -1456,7 +2109,7 @@
         </p:nvSpPr>
         <p:spPr>
           <a:xfrm>
-            <a:off x="406390" y="1181100"/>
+            <a:off x="406390" y="1155700"/>
             <a:ext cx="11378916" cy="320040"/>
           </a:xfrm>
           <a:prstGeom prst="rect">
@@ -1495,7 +2148,7 @@
         </p:nvSpPr>
         <p:spPr>
           <a:xfrm>
-            <a:off x="406390" y="1546860"/>
+            <a:off x="406390" y="1521460"/>
             <a:ext cx="11378916" cy="822960"/>
           </a:xfrm>
           <a:prstGeom prst="rect">
@@ -1534,7 +2187,7 @@
         </p:nvSpPr>
         <p:spPr>
           <a:xfrm>
-            <a:off x="406390" y="2415540"/>
+            <a:off x="406390" y="2390140"/>
             <a:ext cx="11378916" cy="548640"/>
           </a:xfrm>
           <a:prstGeom prst="rect">
@@ -1573,12 +2226,12 @@
         </p:nvSpPr>
         <p:spPr>
           <a:xfrm>
-            <a:off x="406390" y="1765300"/>
-            <a:ext cx="2286000" cy="347472"/>
+            <a:off x="406390" y="2508250"/>
+            <a:ext cx="2286000" cy="285750"/>
           </a:xfrm>
           <a:prstGeom prst="roundRect">
             <a:avLst>
-              <a:gd name="adj" fmla="val 39474"/>
+              <a:gd name="adj" fmla="val 48000"/>
             </a:avLst>
           </a:prstGeom>
           <a:solidFill>
@@ -1600,8 +2253,8 @@
         </p:nvSpPr>
         <p:spPr>
           <a:xfrm>
-            <a:off x="406390" y="1765300"/>
-            <a:ext cx="2286000" cy="347472"/>
+            <a:off x="406390" y="2508250"/>
+            <a:ext cx="2286000" cy="285750"/>
           </a:xfrm>
           <a:prstGeom prst="rect">
             <a:avLst/>
@@ -1628,6 +2281,45 @@
               <a:t>V2.4 PRODUCTION SPECIFICATION</a:t>
             </a:r>
             <a:endParaRPr lang="en-US" sz="1000" dirty="0"/>
+          </a:p>
+        </p:txBody>
+      </p:sp>
+      <p:sp>
+        <p:nvSpPr>
+          <p:cNvPr id="8" name="Text 6"/>
+          <p:cNvSpPr/>
+          <p:nvPr/>
+        </p:nvSpPr>
+        <p:spPr>
+          <a:xfrm>
+            <a:off x="457200" y="6492240"/>
+            <a:ext cx="11277295" cy="228600"/>
+          </a:xfrm>
+          <a:prstGeom prst="rect">
+            <a:avLst/>
+          </a:prstGeom>
+          <a:noFill/>
+          <a:ln/>
+        </p:spPr>
+        <p:txBody>
+          <a:bodyPr wrap="square" rtlCol="0" anchor="ctr"/>
+          <a:lstStyle/>
+          <a:p>
+            <a:pPr indent="0" marL="0">
+              <a:buNone/>
+            </a:pPr>
+            <a:r>
+              <a:rPr lang="en-US" sz="900" b="1" dirty="0">
+                <a:solidFill>
+                  <a:srgbClr val="6B6862"/>
+                </a:solidFill>
+                <a:latin typeface="Georgia" pitchFamily="34" charset="0"/>
+                <a:ea typeface="Georgia" pitchFamily="34" charset="-122"/>
+                <a:cs typeface="Georgia" pitchFamily="34" charset="-120"/>
+              </a:rPr>
+              <a:t>YUMIA V0.1.26 • CONFIDENTIAL</a:t>
+            </a:r>
+            <a:endParaRPr lang="en-US" sz="900" dirty="0"/>
           </a:p>
         </p:txBody>
       </p:sp>
@@ -1710,7 +2402,7 @@
         </p:nvSpPr>
         <p:spPr>
           <a:xfrm>
-            <a:off x="406390" y="1181100"/>
+            <a:off x="406390" y="1155700"/>
             <a:ext cx="11378916" cy="457200"/>
           </a:xfrm>
           <a:prstGeom prst="rect">
@@ -1749,12 +2441,12 @@
         </p:nvSpPr>
         <p:spPr>
           <a:xfrm>
-            <a:off x="406390" y="1775460"/>
-            <a:ext cx="5552298" cy="277114"/>
+            <a:off x="406390" y="1750060"/>
+            <a:ext cx="5552298" cy="308864"/>
           </a:xfrm>
           <a:prstGeom prst="roundRect">
             <a:avLst>
-              <a:gd name="adj" fmla="val 26398"/>
+              <a:gd name="adj" fmla="val 23684"/>
             </a:avLst>
           </a:prstGeom>
           <a:solidFill>
@@ -1776,7 +2468,7 @@
         </p:nvSpPr>
         <p:spPr>
           <a:xfrm>
-            <a:off x="516118" y="1749425"/>
+            <a:off x="516118" y="1739900"/>
             <a:ext cx="329184" cy="329184"/>
           </a:xfrm>
           <a:prstGeom prst="roundRect">
@@ -1798,7 +2490,7 @@
         </p:nvSpPr>
         <p:spPr>
           <a:xfrm>
-            <a:off x="516118" y="1749425"/>
+            <a:off x="516118" y="1739900"/>
             <a:ext cx="329184" cy="329184"/>
           </a:xfrm>
           <a:prstGeom prst="rect">
@@ -1837,8 +2529,8 @@
         </p:nvSpPr>
         <p:spPr>
           <a:xfrm>
-            <a:off x="909310" y="1830324"/>
-            <a:ext cx="4957938" cy="167386"/>
+            <a:off x="909310" y="1804924"/>
+            <a:ext cx="4957938" cy="199136"/>
           </a:xfrm>
           <a:prstGeom prst="rect">
             <a:avLst/>
@@ -1876,12 +2568,12 @@
         </p:nvSpPr>
         <p:spPr>
           <a:xfrm>
-            <a:off x="6233008" y="1775460"/>
-            <a:ext cx="5552298" cy="277114"/>
+            <a:off x="6233008" y="1750060"/>
+            <a:ext cx="5552298" cy="308864"/>
           </a:xfrm>
           <a:prstGeom prst="roundRect">
             <a:avLst>
-              <a:gd name="adj" fmla="val 26398"/>
+              <a:gd name="adj" fmla="val 23684"/>
             </a:avLst>
           </a:prstGeom>
           <a:solidFill>
@@ -1903,7 +2595,7 @@
         </p:nvSpPr>
         <p:spPr>
           <a:xfrm>
-            <a:off x="6342736" y="1749425"/>
+            <a:off x="6342736" y="1739900"/>
             <a:ext cx="329184" cy="329184"/>
           </a:xfrm>
           <a:prstGeom prst="roundRect">
@@ -1925,7 +2617,7 @@
         </p:nvSpPr>
         <p:spPr>
           <a:xfrm>
-            <a:off x="6342736" y="1749425"/>
+            <a:off x="6342736" y="1739900"/>
             <a:ext cx="329184" cy="329184"/>
           </a:xfrm>
           <a:prstGeom prst="rect">
@@ -1964,8 +2656,8 @@
         </p:nvSpPr>
         <p:spPr>
           <a:xfrm>
-            <a:off x="6735928" y="1830324"/>
-            <a:ext cx="4957938" cy="167386"/>
+            <a:off x="6735928" y="1804924"/>
+            <a:ext cx="4957938" cy="199136"/>
           </a:xfrm>
           <a:prstGeom prst="rect">
             <a:avLst/>
@@ -2003,12 +2695,12 @@
         </p:nvSpPr>
         <p:spPr>
           <a:xfrm>
-            <a:off x="406390" y="2162302"/>
-            <a:ext cx="5552298" cy="277114"/>
+            <a:off x="406390" y="2168652"/>
+            <a:ext cx="5552298" cy="308864"/>
           </a:xfrm>
           <a:prstGeom prst="roundRect">
             <a:avLst>
-              <a:gd name="adj" fmla="val 26398"/>
+              <a:gd name="adj" fmla="val 23684"/>
             </a:avLst>
           </a:prstGeom>
           <a:solidFill>
@@ -2030,7 +2722,7 @@
         </p:nvSpPr>
         <p:spPr>
           <a:xfrm>
-            <a:off x="516118" y="2136267"/>
+            <a:off x="516118" y="2158492"/>
             <a:ext cx="329184" cy="329184"/>
           </a:xfrm>
           <a:prstGeom prst="roundRect">
@@ -2052,7 +2744,7 @@
         </p:nvSpPr>
         <p:spPr>
           <a:xfrm>
-            <a:off x="516118" y="2136267"/>
+            <a:off x="516118" y="2158492"/>
             <a:ext cx="329184" cy="329184"/>
           </a:xfrm>
           <a:prstGeom prst="rect">
@@ -2091,8 +2783,8 @@
         </p:nvSpPr>
         <p:spPr>
           <a:xfrm>
-            <a:off x="909310" y="2217166"/>
-            <a:ext cx="4957938" cy="167386"/>
+            <a:off x="909310" y="2223516"/>
+            <a:ext cx="4957938" cy="199136"/>
           </a:xfrm>
           <a:prstGeom prst="rect">
             <a:avLst/>
@@ -2130,12 +2822,12 @@
         </p:nvSpPr>
         <p:spPr>
           <a:xfrm>
-            <a:off x="6233008" y="2162302"/>
-            <a:ext cx="5552298" cy="277114"/>
+            <a:off x="6233008" y="2168652"/>
+            <a:ext cx="5552298" cy="308864"/>
           </a:xfrm>
           <a:prstGeom prst="roundRect">
             <a:avLst>
-              <a:gd name="adj" fmla="val 26398"/>
+              <a:gd name="adj" fmla="val 23684"/>
             </a:avLst>
           </a:prstGeom>
           <a:solidFill>
@@ -2157,7 +2849,7 @@
         </p:nvSpPr>
         <p:spPr>
           <a:xfrm>
-            <a:off x="6342736" y="2136267"/>
+            <a:off x="6342736" y="2158492"/>
             <a:ext cx="329184" cy="329184"/>
           </a:xfrm>
           <a:prstGeom prst="roundRect">
@@ -2179,7 +2871,7 @@
         </p:nvSpPr>
         <p:spPr>
           <a:xfrm>
-            <a:off x="6342736" y="2136267"/>
+            <a:off x="6342736" y="2158492"/>
             <a:ext cx="329184" cy="329184"/>
           </a:xfrm>
           <a:prstGeom prst="rect">
@@ -2218,8 +2910,8 @@
         </p:nvSpPr>
         <p:spPr>
           <a:xfrm>
-            <a:off x="6735928" y="2217166"/>
-            <a:ext cx="4957938" cy="167386"/>
+            <a:off x="6735928" y="2223516"/>
+            <a:ext cx="4957938" cy="199136"/>
           </a:xfrm>
           <a:prstGeom prst="rect">
             <a:avLst/>
@@ -2257,12 +2949,12 @@
         </p:nvSpPr>
         <p:spPr>
           <a:xfrm>
-            <a:off x="406390" y="2549144"/>
-            <a:ext cx="5552298" cy="277114"/>
+            <a:off x="406390" y="2587244"/>
+            <a:ext cx="5552298" cy="308864"/>
           </a:xfrm>
           <a:prstGeom prst="roundRect">
             <a:avLst>
-              <a:gd name="adj" fmla="val 26398"/>
+              <a:gd name="adj" fmla="val 23684"/>
             </a:avLst>
           </a:prstGeom>
           <a:solidFill>
@@ -2284,7 +2976,7 @@
         </p:nvSpPr>
         <p:spPr>
           <a:xfrm>
-            <a:off x="516118" y="2523109"/>
+            <a:off x="516118" y="2577084"/>
             <a:ext cx="329184" cy="329184"/>
           </a:xfrm>
           <a:prstGeom prst="roundRect">
@@ -2306,7 +2998,7 @@
         </p:nvSpPr>
         <p:spPr>
           <a:xfrm>
-            <a:off x="516118" y="2523109"/>
+            <a:off x="516118" y="2577084"/>
             <a:ext cx="329184" cy="329184"/>
           </a:xfrm>
           <a:prstGeom prst="rect">
@@ -2345,8 +3037,8 @@
         </p:nvSpPr>
         <p:spPr>
           <a:xfrm>
-            <a:off x="909310" y="2604008"/>
-            <a:ext cx="4957938" cy="167386"/>
+            <a:off x="909310" y="2642108"/>
+            <a:ext cx="4957938" cy="199136"/>
           </a:xfrm>
           <a:prstGeom prst="rect">
             <a:avLst/>
@@ -2384,12 +3076,12 @@
         </p:nvSpPr>
         <p:spPr>
           <a:xfrm>
-            <a:off x="6233008" y="2549144"/>
-            <a:ext cx="5552298" cy="277114"/>
+            <a:off x="6233008" y="2587244"/>
+            <a:ext cx="5552298" cy="308864"/>
           </a:xfrm>
           <a:prstGeom prst="roundRect">
             <a:avLst>
-              <a:gd name="adj" fmla="val 26398"/>
+              <a:gd name="adj" fmla="val 23684"/>
             </a:avLst>
           </a:prstGeom>
           <a:solidFill>
@@ -2411,7 +3103,7 @@
         </p:nvSpPr>
         <p:spPr>
           <a:xfrm>
-            <a:off x="6342736" y="2523109"/>
+            <a:off x="6342736" y="2577084"/>
             <a:ext cx="329184" cy="329184"/>
           </a:xfrm>
           <a:prstGeom prst="roundRect">
@@ -2433,7 +3125,7 @@
         </p:nvSpPr>
         <p:spPr>
           <a:xfrm>
-            <a:off x="6342736" y="2523109"/>
+            <a:off x="6342736" y="2577084"/>
             <a:ext cx="329184" cy="329184"/>
           </a:xfrm>
           <a:prstGeom prst="rect">
@@ -2472,8 +3164,8 @@
         </p:nvSpPr>
         <p:spPr>
           <a:xfrm>
-            <a:off x="6735928" y="2604008"/>
-            <a:ext cx="4957938" cy="167386"/>
+            <a:off x="6735928" y="2642108"/>
+            <a:ext cx="4957938" cy="199136"/>
           </a:xfrm>
           <a:prstGeom prst="rect">
             <a:avLst/>
@@ -2511,12 +3203,12 @@
         </p:nvSpPr>
         <p:spPr>
           <a:xfrm>
-            <a:off x="406390" y="2935986"/>
-            <a:ext cx="5552298" cy="277114"/>
+            <a:off x="406390" y="3005836"/>
+            <a:ext cx="5552298" cy="308864"/>
           </a:xfrm>
           <a:prstGeom prst="roundRect">
             <a:avLst>
-              <a:gd name="adj" fmla="val 26398"/>
+              <a:gd name="adj" fmla="val 23684"/>
             </a:avLst>
           </a:prstGeom>
           <a:solidFill>
@@ -2538,7 +3230,7 @@
         </p:nvSpPr>
         <p:spPr>
           <a:xfrm>
-            <a:off x="516118" y="2909951"/>
+            <a:off x="516118" y="2995676"/>
             <a:ext cx="329184" cy="329184"/>
           </a:xfrm>
           <a:prstGeom prst="roundRect">
@@ -2560,7 +3252,7 @@
         </p:nvSpPr>
         <p:spPr>
           <a:xfrm>
-            <a:off x="516118" y="2909951"/>
+            <a:off x="516118" y="2995676"/>
             <a:ext cx="329184" cy="329184"/>
           </a:xfrm>
           <a:prstGeom prst="rect">
@@ -2599,8 +3291,8 @@
         </p:nvSpPr>
         <p:spPr>
           <a:xfrm>
-            <a:off x="909310" y="2990850"/>
-            <a:ext cx="4957938" cy="167386"/>
+            <a:off x="909310" y="3060700"/>
+            <a:ext cx="4957938" cy="199136"/>
           </a:xfrm>
           <a:prstGeom prst="rect">
             <a:avLst/>
@@ -2627,6 +3319,45 @@
               <a:t>Implementation &amp; Runtime Kernel</a:t>
             </a:r>
             <a:endParaRPr lang="en-US" sz="1300" dirty="0"/>
+          </a:p>
+        </p:txBody>
+      </p:sp>
+      <p:sp>
+        <p:nvSpPr>
+          <p:cNvPr id="32" name="Text 30"/>
+          <p:cNvSpPr/>
+          <p:nvPr/>
+        </p:nvSpPr>
+        <p:spPr>
+          <a:xfrm>
+            <a:off x="457200" y="6492240"/>
+            <a:ext cx="11277295" cy="228600"/>
+          </a:xfrm>
+          <a:prstGeom prst="rect">
+            <a:avLst/>
+          </a:prstGeom>
+          <a:noFill/>
+          <a:ln/>
+        </p:spPr>
+        <p:txBody>
+          <a:bodyPr wrap="square" rtlCol="0" anchor="ctr"/>
+          <a:lstStyle/>
+          <a:p>
+            <a:pPr indent="0" marL="0">
+              <a:buNone/>
+            </a:pPr>
+            <a:r>
+              <a:rPr lang="en-US" sz="900" b="1" dirty="0">
+                <a:solidFill>
+                  <a:srgbClr val="6B6862"/>
+                </a:solidFill>
+                <a:latin typeface="Georgia" pitchFamily="34" charset="0"/>
+                <a:ea typeface="Georgia" pitchFamily="34" charset="-122"/>
+                <a:cs typeface="Georgia" pitchFamily="34" charset="-120"/>
+              </a:rPr>
+              <a:t>YUMIA V0.1.26 • CONFIDENTIAL</a:t>
+            </a:r>
+            <a:endParaRPr lang="en-US" sz="900" dirty="0"/>
           </a:p>
         </p:txBody>
       </p:sp>
@@ -2709,7 +3440,7 @@
         </p:nvSpPr>
         <p:spPr>
           <a:xfrm>
-            <a:off x="406390" y="1181100"/>
+            <a:off x="406390" y="1155700"/>
             <a:ext cx="11378916" cy="444500"/>
           </a:xfrm>
           <a:prstGeom prst="rect">
@@ -2748,7 +3479,7 @@
         </p:nvSpPr>
         <p:spPr>
           <a:xfrm>
-            <a:off x="1862619" y="2019300"/>
+            <a:off x="1862619" y="2794000"/>
             <a:ext cx="1024443" cy="9144"/>
           </a:xfrm>
           <a:prstGeom prst="line">
@@ -2772,7 +3503,7 @@
         </p:nvSpPr>
         <p:spPr>
           <a:xfrm>
-            <a:off x="4343290" y="2019300"/>
+            <a:off x="4343290" y="2794000"/>
             <a:ext cx="1024443" cy="9144"/>
           </a:xfrm>
           <a:prstGeom prst="line">
@@ -2796,7 +3527,7 @@
         </p:nvSpPr>
         <p:spPr>
           <a:xfrm>
-            <a:off x="4489752" y="1882140"/>
+            <a:off x="4489752" y="2656840"/>
             <a:ext cx="731520" cy="274320"/>
           </a:xfrm>
           <a:prstGeom prst="rect">
@@ -2832,7 +3563,7 @@
         </p:nvSpPr>
         <p:spPr>
           <a:xfrm>
-            <a:off x="6823962" y="2019300"/>
+            <a:off x="6823962" y="2794000"/>
             <a:ext cx="1024443" cy="9144"/>
           </a:xfrm>
           <a:prstGeom prst="line">
@@ -2856,7 +3587,7 @@
         </p:nvSpPr>
         <p:spPr>
           <a:xfrm>
-            <a:off x="6970423" y="1882140"/>
+            <a:off x="6970423" y="2656840"/>
             <a:ext cx="731520" cy="274320"/>
           </a:xfrm>
           <a:prstGeom prst="rect">
@@ -2892,8 +3623,8 @@
         </p:nvSpPr>
         <p:spPr>
           <a:xfrm flipV="1">
-            <a:off x="9304634" y="1809750"/>
-            <a:ext cx="1024443" cy="209550"/>
+            <a:off x="9304634" y="2075180"/>
+            <a:ext cx="1024443" cy="718820"/>
           </a:xfrm>
           <a:prstGeom prst="line">
             <a:avLst/>
@@ -2916,8 +3647,8 @@
         </p:nvSpPr>
         <p:spPr>
           <a:xfrm>
-            <a:off x="9304634" y="2019300"/>
-            <a:ext cx="1024443" cy="209550"/>
+            <a:off x="9304634" y="2794000"/>
+            <a:ext cx="1024443" cy="718820"/>
           </a:xfrm>
           <a:prstGeom prst="line">
             <a:avLst/>
@@ -2940,7 +3671,7 @@
         </p:nvSpPr>
         <p:spPr>
           <a:xfrm>
-            <a:off x="9451095" y="1986915"/>
+            <a:off x="9451095" y="3016250"/>
             <a:ext cx="731520" cy="274320"/>
           </a:xfrm>
           <a:prstGeom prst="rect">
@@ -2976,12 +3707,12 @@
         </p:nvSpPr>
         <p:spPr>
           <a:xfrm>
-            <a:off x="406390" y="2038350"/>
-            <a:ext cx="1456229" cy="-38100"/>
+            <a:off x="406390" y="2496820"/>
+            <a:ext cx="1456229" cy="594360"/>
           </a:xfrm>
           <a:prstGeom prst="roundRect">
             <a:avLst>
-              <a:gd name="adj" fmla="val -192000"/>
+              <a:gd name="adj" fmla="val 12308"/>
             </a:avLst>
           </a:prstGeom>
           <a:solidFill>
@@ -3003,8 +3734,8 @@
         </p:nvSpPr>
         <p:spPr>
           <a:xfrm>
-            <a:off x="452110" y="2084070"/>
-            <a:ext cx="1364789" cy="91440"/>
+            <a:off x="452110" y="2542540"/>
+            <a:ext cx="1364789" cy="502920"/>
           </a:xfrm>
           <a:prstGeom prst="rect">
             <a:avLst/>
@@ -3042,12 +3773,12 @@
         </p:nvSpPr>
         <p:spPr>
           <a:xfrm>
-            <a:off x="2887062" y="2038350"/>
-            <a:ext cx="1456229" cy="-38100"/>
+            <a:off x="2887062" y="2496820"/>
+            <a:ext cx="1456229" cy="594360"/>
           </a:xfrm>
           <a:prstGeom prst="roundRect">
             <a:avLst>
-              <a:gd name="adj" fmla="val -192000"/>
+              <a:gd name="adj" fmla="val 12308"/>
             </a:avLst>
           </a:prstGeom>
           <a:solidFill>
@@ -3069,8 +3800,8 @@
         </p:nvSpPr>
         <p:spPr>
           <a:xfrm>
-            <a:off x="2932782" y="2084070"/>
-            <a:ext cx="1364789" cy="91440"/>
+            <a:off x="2932782" y="2542540"/>
+            <a:ext cx="1364789" cy="502920"/>
           </a:xfrm>
           <a:prstGeom prst="rect">
             <a:avLst/>
@@ -3108,12 +3839,12 @@
         </p:nvSpPr>
         <p:spPr>
           <a:xfrm>
-            <a:off x="5367733" y="2038350"/>
-            <a:ext cx="1456229" cy="-38100"/>
+            <a:off x="5367733" y="2496820"/>
+            <a:ext cx="1456229" cy="594360"/>
           </a:xfrm>
           <a:prstGeom prst="roundRect">
             <a:avLst>
-              <a:gd name="adj" fmla="val -192000"/>
+              <a:gd name="adj" fmla="val 12308"/>
             </a:avLst>
           </a:prstGeom>
           <a:solidFill>
@@ -3135,8 +3866,8 @@
         </p:nvSpPr>
         <p:spPr>
           <a:xfrm>
-            <a:off x="5413453" y="2084070"/>
-            <a:ext cx="1364789" cy="91440"/>
+            <a:off x="5413453" y="2542540"/>
+            <a:ext cx="1364789" cy="502920"/>
           </a:xfrm>
           <a:prstGeom prst="rect">
             <a:avLst/>
@@ -3174,12 +3905,12 @@
         </p:nvSpPr>
         <p:spPr>
           <a:xfrm>
-            <a:off x="7848405" y="2038350"/>
-            <a:ext cx="1456229" cy="-38100"/>
+            <a:off x="7848405" y="2496820"/>
+            <a:ext cx="1456229" cy="594360"/>
           </a:xfrm>
           <a:prstGeom prst="roundRect">
             <a:avLst>
-              <a:gd name="adj" fmla="val -192000"/>
+              <a:gd name="adj" fmla="val 12308"/>
             </a:avLst>
           </a:prstGeom>
           <a:solidFill>
@@ -3201,8 +3932,8 @@
         </p:nvSpPr>
         <p:spPr>
           <a:xfrm>
-            <a:off x="7894125" y="2084070"/>
-            <a:ext cx="1364789" cy="91440"/>
+            <a:off x="7894125" y="2542540"/>
+            <a:ext cx="1364789" cy="502920"/>
           </a:xfrm>
           <a:prstGeom prst="rect">
             <a:avLst/>
@@ -3240,12 +3971,12 @@
         </p:nvSpPr>
         <p:spPr>
           <a:xfrm>
-            <a:off x="10329077" y="1828800"/>
-            <a:ext cx="1456229" cy="-38100"/>
+            <a:off x="10329077" y="1778000"/>
+            <a:ext cx="1456229" cy="594360"/>
           </a:xfrm>
           <a:prstGeom prst="can">
             <a:avLst>
-              <a:gd name="adj" fmla="val -192000"/>
+              <a:gd name="adj" fmla="val 12308"/>
             </a:avLst>
           </a:prstGeom>
           <a:solidFill>
@@ -3267,8 +3998,8 @@
         </p:nvSpPr>
         <p:spPr>
           <a:xfrm>
-            <a:off x="10374797" y="1874520"/>
-            <a:ext cx="1364789" cy="91440"/>
+            <a:off x="10374797" y="1823720"/>
+            <a:ext cx="1364789" cy="502920"/>
           </a:xfrm>
           <a:prstGeom prst="rect">
             <a:avLst/>
@@ -3306,12 +4037,12 @@
         </p:nvSpPr>
         <p:spPr>
           <a:xfrm>
-            <a:off x="10329077" y="2247900"/>
-            <a:ext cx="1456229" cy="-38100"/>
+            <a:off x="10329077" y="3215640"/>
+            <a:ext cx="1456229" cy="594360"/>
           </a:xfrm>
           <a:prstGeom prst="can">
             <a:avLst>
-              <a:gd name="adj" fmla="val -192000"/>
+              <a:gd name="adj" fmla="val 12308"/>
             </a:avLst>
           </a:prstGeom>
           <a:solidFill>
@@ -3333,8 +4064,8 @@
         </p:nvSpPr>
         <p:spPr>
           <a:xfrm>
-            <a:off x="10374797" y="2293620"/>
-            <a:ext cx="1364789" cy="91440"/>
+            <a:off x="10374797" y="3261360"/>
+            <a:ext cx="1364789" cy="502920"/>
           </a:xfrm>
           <a:prstGeom prst="rect">
             <a:avLst/>
@@ -3361,6 +4092,45 @@
               <a:t>Redis Semantic Cache</a:t>
             </a:r>
             <a:endParaRPr lang="en-US" sz="1100" dirty="0"/>
+          </a:p>
+        </p:txBody>
+      </p:sp>
+      <p:sp>
+        <p:nvSpPr>
+          <p:cNvPr id="24" name="Text 22"/>
+          <p:cNvSpPr/>
+          <p:nvPr/>
+        </p:nvSpPr>
+        <p:spPr>
+          <a:xfrm>
+            <a:off x="457200" y="6492240"/>
+            <a:ext cx="11277295" cy="228600"/>
+          </a:xfrm>
+          <a:prstGeom prst="rect">
+            <a:avLst/>
+          </a:prstGeom>
+          <a:noFill/>
+          <a:ln/>
+        </p:spPr>
+        <p:txBody>
+          <a:bodyPr wrap="square" rtlCol="0" anchor="ctr"/>
+          <a:lstStyle/>
+          <a:p>
+            <a:pPr indent="0" marL="0">
+              <a:buNone/>
+            </a:pPr>
+            <a:r>
+              <a:rPr lang="en-US" sz="900" b="1" dirty="0">
+                <a:solidFill>
+                  <a:srgbClr val="6B6862"/>
+                </a:solidFill>
+                <a:latin typeface="Georgia" pitchFamily="34" charset="0"/>
+                <a:ea typeface="Georgia" pitchFamily="34" charset="-122"/>
+                <a:cs typeface="Georgia" pitchFamily="34" charset="-120"/>
+              </a:rPr>
+              <a:t>YUMIA V0.1.26 • CONFIDENTIAL</a:t>
+            </a:r>
+            <a:endParaRPr lang="en-US" sz="900" dirty="0"/>
           </a:p>
         </p:txBody>
       </p:sp>
@@ -3443,7 +4213,7 @@
         </p:nvSpPr>
         <p:spPr>
           <a:xfrm>
-            <a:off x="406390" y="1181100"/>
+            <a:off x="406390" y="1155700"/>
             <a:ext cx="11378916" cy="444500"/>
           </a:xfrm>
           <a:prstGeom prst="rect">
@@ -3471,6 +4241,509 @@
               <a:t>Measured Benchmarks Across Compute Clusters</a:t>
             </a:r>
             <a:endParaRPr lang="en-US" sz="3400" dirty="0"/>
+          </a:p>
+        </p:txBody>
+      </p:sp>
+      <p:sp>
+        <p:nvSpPr>
+          <p:cNvPr id="4" name="Shape 2"/>
+          <p:cNvSpPr/>
+          <p:nvPr/>
+        </p:nvSpPr>
+        <p:spPr>
+          <a:xfrm>
+            <a:off x="406390" y="1778000"/>
+            <a:ext cx="5600560" cy="2120900"/>
+          </a:xfrm>
+          <a:prstGeom prst="roundRect">
+            <a:avLst>
+              <a:gd name="adj" fmla="val 3449"/>
+            </a:avLst>
+          </a:prstGeom>
+          <a:solidFill>
+            <a:srgbClr val="F5F2EB"/>
+          </a:solidFill>
+          <a:ln w="19050">
+            <a:solidFill>
+              <a:srgbClr val="2E7D32"/>
+            </a:solidFill>
+            <a:prstDash val="solid"/>
+          </a:ln>
+        </p:spPr>
+      </p:sp>
+      <p:sp>
+        <p:nvSpPr>
+          <p:cNvPr id="5" name="Shape 3"/>
+          <p:cNvSpPr/>
+          <p:nvPr/>
+        </p:nvSpPr>
+        <p:spPr>
+          <a:xfrm>
+            <a:off x="424678" y="1814576"/>
+            <a:ext cx="54864" cy="2047748"/>
+          </a:xfrm>
+          <a:prstGeom prst="roundRect">
+            <a:avLst>
+              <a:gd name="adj" fmla="val 50000"/>
+            </a:avLst>
+          </a:prstGeom>
+          <a:solidFill>
+            <a:srgbClr val="2E7D32"/>
+          </a:solidFill>
+          <a:ln/>
+        </p:spPr>
+      </p:sp>
+      <p:sp>
+        <p:nvSpPr>
+          <p:cNvPr id="6" name="Text 4"/>
+          <p:cNvSpPr/>
+          <p:nvPr/>
+        </p:nvSpPr>
+        <p:spPr>
+          <a:xfrm>
+            <a:off x="634990" y="1942592"/>
+            <a:ext cx="5143360" cy="320040"/>
+          </a:xfrm>
+          <a:prstGeom prst="rect">
+            <a:avLst/>
+          </a:prstGeom>
+          <a:noFill/>
+          <a:ln/>
+        </p:spPr>
+        <p:txBody>
+          <a:bodyPr wrap="square" rtlCol="0" anchor="ctr"/>
+          <a:lstStyle/>
+          <a:p>
+            <a:pPr indent="0" marL="0">
+              <a:buNone/>
+            </a:pPr>
+            <a:r>
+              <a:rPr lang="en-US" sz="2000" b="1" dirty="0">
+                <a:solidFill>
+                  <a:srgbClr val="2E7D32"/>
+                </a:solidFill>
+                <a:latin typeface="Georgia" pitchFamily="34" charset="0"/>
+                <a:ea typeface="Georgia" pitchFamily="34" charset="-122"/>
+                <a:cs typeface="Georgia" pitchFamily="34" charset="-120"/>
+              </a:rPr>
+              <a:t>Inference Latency</a:t>
+            </a:r>
+            <a:endParaRPr lang="en-US" sz="2000" dirty="0"/>
+          </a:p>
+        </p:txBody>
+      </p:sp>
+      <p:sp>
+        <p:nvSpPr>
+          <p:cNvPr id="7" name="Shape 5"/>
+          <p:cNvSpPr/>
+          <p:nvPr/>
+        </p:nvSpPr>
+        <p:spPr>
+          <a:xfrm>
+            <a:off x="609585" y="2362200"/>
+            <a:ext cx="5194170" cy="825500"/>
+          </a:xfrm>
+          <a:prstGeom prst="roundRect">
+            <a:avLst>
+              <a:gd name="adj" fmla="val 8862"/>
+            </a:avLst>
+          </a:prstGeom>
+          <a:solidFill>
+            <a:srgbClr val="F5F2EB"/>
+          </a:solidFill>
+          <a:ln w="19050">
+            <a:solidFill>
+              <a:srgbClr val="2E7D32"/>
+            </a:solidFill>
+            <a:prstDash val="solid"/>
+          </a:ln>
+        </p:spPr>
+      </p:sp>
+      <p:sp>
+        <p:nvSpPr>
+          <p:cNvPr id="8" name="Text 6"/>
+          <p:cNvSpPr/>
+          <p:nvPr/>
+        </p:nvSpPr>
+        <p:spPr>
+          <a:xfrm>
+            <a:off x="701025" y="2453640"/>
+            <a:ext cx="5011290" cy="201168"/>
+          </a:xfrm>
+          <a:prstGeom prst="rect">
+            <a:avLst/>
+          </a:prstGeom>
+          <a:noFill/>
+          <a:ln/>
+        </p:spPr>
+        <p:txBody>
+          <a:bodyPr wrap="square" rtlCol="0" anchor="ctr"/>
+          <a:lstStyle/>
+          <a:p>
+            <a:pPr algn="ctr" indent="0" marL="0">
+              <a:buNone/>
+            </a:pPr>
+            <a:r>
+              <a:rPr lang="en-US" sz="1000" b="1" dirty="0">
+                <a:solidFill>
+                  <a:srgbClr val="6B6862"/>
+                </a:solidFill>
+                <a:latin typeface="Georgia" pitchFamily="34" charset="0"/>
+                <a:ea typeface="Georgia" pitchFamily="34" charset="-122"/>
+                <a:cs typeface="Georgia" pitchFamily="34" charset="-120"/>
+              </a:rPr>
+              <a:t>BENCHMARKED SPEEDUP</a:t>
+            </a:r>
+            <a:endParaRPr lang="en-US" sz="1000" dirty="0"/>
+          </a:p>
+        </p:txBody>
+      </p:sp>
+      <p:sp>
+        <p:nvSpPr>
+          <p:cNvPr id="9" name="Text 7"/>
+          <p:cNvSpPr/>
+          <p:nvPr/>
+        </p:nvSpPr>
+        <p:spPr>
+          <a:xfrm>
+            <a:off x="701025" y="2673096"/>
+            <a:ext cx="5011290" cy="402336"/>
+          </a:xfrm>
+          <a:prstGeom prst="rect">
+            <a:avLst/>
+          </a:prstGeom>
+          <a:noFill/>
+          <a:ln/>
+        </p:spPr>
+        <p:txBody>
+          <a:bodyPr wrap="square" rtlCol="0" anchor="ctr"/>
+          <a:lstStyle/>
+          <a:p>
+            <a:pPr algn="ctr" indent="0" marL="0">
+              <a:buNone/>
+            </a:pPr>
+            <a:r>
+              <a:rPr lang="en-US" sz="2600" b="1" dirty="0">
+                <a:solidFill>
+                  <a:srgbClr val="2E7D32"/>
+                </a:solidFill>
+                <a:latin typeface="Georgia" pitchFamily="34" charset="0"/>
+                <a:ea typeface="Georgia" pitchFamily="34" charset="-122"/>
+                <a:cs typeface="Georgia" pitchFamily="34" charset="-120"/>
+              </a:rPr>
+              <a:t>1.42ms</a:t>
+            </a:r>
+            <a:endParaRPr lang="en-US" sz="2600" dirty="0"/>
+          </a:p>
+        </p:txBody>
+      </p:sp>
+      <p:sp>
+        <p:nvSpPr>
+          <p:cNvPr id="10" name="Text 8"/>
+          <p:cNvSpPr/>
+          <p:nvPr/>
+        </p:nvSpPr>
+        <p:spPr>
+          <a:xfrm>
+            <a:off x="609585" y="3365500"/>
+            <a:ext cx="5194170" cy="254000"/>
+          </a:xfrm>
+          <a:prstGeom prst="rect">
+            <a:avLst/>
+          </a:prstGeom>
+          <a:noFill/>
+          <a:ln/>
+        </p:spPr>
+        <p:txBody>
+          <a:bodyPr wrap="square" lIns="0" tIns="0" rIns="0" bIns="0" rtlCol="0" anchor="t"/>
+          <a:lstStyle/>
+          <a:p>
+            <a:pPr algn="l" indent="0" marL="0">
+              <a:buNone/>
+            </a:pPr>
+            <a:r>
+              <a:rPr lang="en-US" sz="1800" dirty="0">
+                <a:solidFill>
+                  <a:srgbClr val="2C2B29"/>
+                </a:solidFill>
+                <a:latin typeface="Georgia" pitchFamily="34" charset="0"/>
+                <a:ea typeface="Georgia" pitchFamily="34" charset="-122"/>
+                <a:cs typeface="Georgia" pitchFamily="34" charset="-120"/>
+              </a:rPr>
+              <a:t>End-to-end latency reduction under heavy concurrent load.</a:t>
+            </a:r>
+            <a:endParaRPr lang="en-US" sz="1800" dirty="0"/>
+          </a:p>
+        </p:txBody>
+      </p:sp>
+      <p:sp>
+        <p:nvSpPr>
+          <p:cNvPr id="11" name="Shape 9"/>
+          <p:cNvSpPr/>
+          <p:nvPr/>
+        </p:nvSpPr>
+        <p:spPr>
+          <a:xfrm>
+            <a:off x="6184745" y="1778000"/>
+            <a:ext cx="5600560" cy="2324100"/>
+          </a:xfrm>
+          <a:prstGeom prst="roundRect">
+            <a:avLst>
+              <a:gd name="adj" fmla="val 3148"/>
+            </a:avLst>
+          </a:prstGeom>
+          <a:solidFill>
+            <a:srgbClr val="F5F2EB"/>
+          </a:solidFill>
+          <a:ln w="19050">
+            <a:solidFill>
+              <a:srgbClr val="C29B38"/>
+            </a:solidFill>
+            <a:prstDash val="solid"/>
+          </a:ln>
+        </p:spPr>
+      </p:sp>
+      <p:sp>
+        <p:nvSpPr>
+          <p:cNvPr id="12" name="Shape 10"/>
+          <p:cNvSpPr/>
+          <p:nvPr/>
+        </p:nvSpPr>
+        <p:spPr>
+          <a:xfrm>
+            <a:off x="6203033" y="1814576"/>
+            <a:ext cx="54864" cy="2250948"/>
+          </a:xfrm>
+          <a:prstGeom prst="roundRect">
+            <a:avLst>
+              <a:gd name="adj" fmla="val 50000"/>
+            </a:avLst>
+          </a:prstGeom>
+          <a:solidFill>
+            <a:srgbClr val="C29B38"/>
+          </a:solidFill>
+          <a:ln/>
+        </p:spPr>
+      </p:sp>
+      <p:sp>
+        <p:nvSpPr>
+          <p:cNvPr id="13" name="Text 11"/>
+          <p:cNvSpPr/>
+          <p:nvPr/>
+        </p:nvSpPr>
+        <p:spPr>
+          <a:xfrm>
+            <a:off x="6413345" y="1942592"/>
+            <a:ext cx="5143360" cy="320040"/>
+          </a:xfrm>
+          <a:prstGeom prst="rect">
+            <a:avLst/>
+          </a:prstGeom>
+          <a:noFill/>
+          <a:ln/>
+        </p:spPr>
+        <p:txBody>
+          <a:bodyPr wrap="square" rtlCol="0" anchor="ctr"/>
+          <a:lstStyle/>
+          <a:p>
+            <a:pPr indent="0" marL="0">
+              <a:buNone/>
+            </a:pPr>
+            <a:r>
+              <a:rPr lang="en-US" sz="2000" b="1" dirty="0">
+                <a:solidFill>
+                  <a:srgbClr val="C29B38"/>
+                </a:solidFill>
+                <a:latin typeface="Georgia" pitchFamily="34" charset="0"/>
+                <a:ea typeface="Georgia" pitchFamily="34" charset="-122"/>
+                <a:cs typeface="Georgia" pitchFamily="34" charset="-120"/>
+              </a:rPr>
+              <a:t>Throughput Capacity</a:t>
+            </a:r>
+            <a:endParaRPr lang="en-US" sz="2000" dirty="0"/>
+          </a:p>
+        </p:txBody>
+      </p:sp>
+      <p:sp>
+        <p:nvSpPr>
+          <p:cNvPr id="14" name="Shape 12"/>
+          <p:cNvSpPr/>
+          <p:nvPr/>
+        </p:nvSpPr>
+        <p:spPr>
+          <a:xfrm>
+            <a:off x="6387940" y="2362200"/>
+            <a:ext cx="5194170" cy="825500"/>
+          </a:xfrm>
+          <a:prstGeom prst="roundRect">
+            <a:avLst>
+              <a:gd name="adj" fmla="val 8862"/>
+            </a:avLst>
+          </a:prstGeom>
+          <a:solidFill>
+            <a:srgbClr val="F5F2EB"/>
+          </a:solidFill>
+          <a:ln w="19050">
+            <a:solidFill>
+              <a:srgbClr val="C29B38"/>
+            </a:solidFill>
+            <a:prstDash val="solid"/>
+          </a:ln>
+        </p:spPr>
+      </p:sp>
+      <p:sp>
+        <p:nvSpPr>
+          <p:cNvPr id="15" name="Text 13"/>
+          <p:cNvSpPr/>
+          <p:nvPr/>
+        </p:nvSpPr>
+        <p:spPr>
+          <a:xfrm>
+            <a:off x="6479380" y="2453640"/>
+            <a:ext cx="5011290" cy="201168"/>
+          </a:xfrm>
+          <a:prstGeom prst="rect">
+            <a:avLst/>
+          </a:prstGeom>
+          <a:noFill/>
+          <a:ln/>
+        </p:spPr>
+        <p:txBody>
+          <a:bodyPr wrap="square" rtlCol="0" anchor="ctr"/>
+          <a:lstStyle/>
+          <a:p>
+            <a:pPr algn="ctr" indent="0" marL="0">
+              <a:buNone/>
+            </a:pPr>
+            <a:r>
+              <a:rPr lang="en-US" sz="1000" b="1" dirty="0">
+                <a:solidFill>
+                  <a:srgbClr val="6B6862"/>
+                </a:solidFill>
+                <a:latin typeface="Georgia" pitchFamily="34" charset="0"/>
+                <a:ea typeface="Georgia" pitchFamily="34" charset="-122"/>
+                <a:cs typeface="Georgia" pitchFamily="34" charset="-120"/>
+              </a:rPr>
+              <a:t>BENCHMARKED SPEEDUP</a:t>
+            </a:r>
+            <a:endParaRPr lang="en-US" sz="1000" dirty="0"/>
+          </a:p>
+        </p:txBody>
+      </p:sp>
+      <p:sp>
+        <p:nvSpPr>
+          <p:cNvPr id="16" name="Text 14"/>
+          <p:cNvSpPr/>
+          <p:nvPr/>
+        </p:nvSpPr>
+        <p:spPr>
+          <a:xfrm>
+            <a:off x="6479380" y="2673096"/>
+            <a:ext cx="5011290" cy="402336"/>
+          </a:xfrm>
+          <a:prstGeom prst="rect">
+            <a:avLst/>
+          </a:prstGeom>
+          <a:noFill/>
+          <a:ln/>
+        </p:spPr>
+        <p:txBody>
+          <a:bodyPr wrap="square" rtlCol="0" anchor="ctr"/>
+          <a:lstStyle/>
+          <a:p>
+            <a:pPr algn="ctr" indent="0" marL="0">
+              <a:buNone/>
+            </a:pPr>
+            <a:r>
+              <a:rPr lang="en-US" sz="2600" b="1" dirty="0">
+                <a:solidFill>
+                  <a:srgbClr val="C29B38"/>
+                </a:solidFill>
+                <a:latin typeface="Georgia" pitchFamily="34" charset="0"/>
+                <a:ea typeface="Georgia" pitchFamily="34" charset="-122"/>
+                <a:cs typeface="Georgia" pitchFamily="34" charset="-120"/>
+              </a:rPr>
+              <a:t>450k op/s</a:t>
+            </a:r>
+            <a:endParaRPr lang="en-US" sz="2600" dirty="0"/>
+          </a:p>
+        </p:txBody>
+      </p:sp>
+      <p:sp>
+        <p:nvSpPr>
+          <p:cNvPr id="17" name="Text 15"/>
+          <p:cNvSpPr/>
+          <p:nvPr/>
+        </p:nvSpPr>
+        <p:spPr>
+          <a:xfrm>
+            <a:off x="6387940" y="3365500"/>
+            <a:ext cx="5194170" cy="457200"/>
+          </a:xfrm>
+          <a:prstGeom prst="rect">
+            <a:avLst/>
+          </a:prstGeom>
+          <a:noFill/>
+          <a:ln/>
+        </p:spPr>
+        <p:txBody>
+          <a:bodyPr wrap="square" lIns="0" tIns="0" rIns="0" bIns="0" rtlCol="0" anchor="t"/>
+          <a:lstStyle/>
+          <a:p>
+            <a:pPr algn="l" indent="0" marL="0">
+              <a:buNone/>
+            </a:pPr>
+            <a:r>
+              <a:rPr lang="en-US" sz="1800" dirty="0">
+                <a:solidFill>
+                  <a:srgbClr val="2C2B29"/>
+                </a:solidFill>
+                <a:latin typeface="Georgia" pitchFamily="34" charset="0"/>
+                <a:ea typeface="Georgia" pitchFamily="34" charset="-122"/>
+                <a:cs typeface="Georgia" pitchFamily="34" charset="-120"/>
+              </a:rPr>
+              <a:t>Peak distributed operations sustained without buffer degradation.</a:t>
+            </a:r>
+            <a:endParaRPr lang="en-US" sz="1800" dirty="0"/>
+          </a:p>
+        </p:txBody>
+      </p:sp>
+      <p:sp>
+        <p:nvSpPr>
+          <p:cNvPr id="18" name="Text 16"/>
+          <p:cNvSpPr/>
+          <p:nvPr/>
+        </p:nvSpPr>
+        <p:spPr>
+          <a:xfrm>
+            <a:off x="457200" y="6492240"/>
+            <a:ext cx="11277295" cy="228600"/>
+          </a:xfrm>
+          <a:prstGeom prst="rect">
+            <a:avLst/>
+          </a:prstGeom>
+          <a:noFill/>
+          <a:ln/>
+        </p:spPr>
+        <p:txBody>
+          <a:bodyPr wrap="square" rtlCol="0" anchor="ctr"/>
+          <a:lstStyle/>
+          <a:p>
+            <a:pPr indent="0" marL="0">
+              <a:buNone/>
+            </a:pPr>
+            <a:r>
+              <a:rPr lang="en-US" sz="900" b="1" dirty="0">
+                <a:solidFill>
+                  <a:srgbClr val="6B6862"/>
+                </a:solidFill>
+                <a:latin typeface="Georgia" pitchFamily="34" charset="0"/>
+                <a:ea typeface="Georgia" pitchFamily="34" charset="-122"/>
+                <a:cs typeface="Georgia" pitchFamily="34" charset="-120"/>
+              </a:rPr>
+              <a:t>YUMIA V0.1.26 • CONFIDENTIAL</a:t>
+            </a:r>
+            <a:endParaRPr lang="en-US" sz="900" dirty="0"/>
           </a:p>
         </p:txBody>
       </p:sp>
@@ -3553,7 +4826,7 @@
         </p:nvSpPr>
         <p:spPr>
           <a:xfrm>
-            <a:off x="406390" y="1181100"/>
+            <a:off x="406390" y="1155700"/>
             <a:ext cx="11378916" cy="444500"/>
           </a:xfrm>
           <a:prstGeom prst="rect">
@@ -3592,12 +4865,12 @@
         </p:nvSpPr>
         <p:spPr>
           <a:xfrm>
-            <a:off x="406390" y="1828800"/>
-            <a:ext cx="5506578" cy="381000"/>
+            <a:off x="406390" y="1778000"/>
+            <a:ext cx="5506578" cy="2336800"/>
           </a:xfrm>
           <a:prstGeom prst="roundRect">
             <a:avLst>
-              <a:gd name="adj" fmla="val 24000"/>
+              <a:gd name="adj" fmla="val 3913"/>
             </a:avLst>
           </a:prstGeom>
           <a:solidFill>
@@ -3619,7 +4892,7 @@
         </p:nvSpPr>
         <p:spPr>
           <a:xfrm>
-            <a:off x="543550" y="1965960"/>
+            <a:off x="543550" y="1915160"/>
             <a:ext cx="5232258" cy="365760"/>
           </a:xfrm>
           <a:prstGeom prst="rect">
@@ -3658,12 +4931,12 @@
         </p:nvSpPr>
         <p:spPr>
           <a:xfrm>
-            <a:off x="6278728" y="1828800"/>
-            <a:ext cx="5506578" cy="381000"/>
+            <a:off x="6278728" y="1778000"/>
+            <a:ext cx="5506578" cy="2336800"/>
           </a:xfrm>
           <a:prstGeom prst="roundRect">
             <a:avLst>
-              <a:gd name="adj" fmla="val 24000"/>
+              <a:gd name="adj" fmla="val 3913"/>
             </a:avLst>
           </a:prstGeom>
           <a:solidFill>
@@ -3685,7 +4958,7 @@
         </p:nvSpPr>
         <p:spPr>
           <a:xfrm>
-            <a:off x="6415888" y="1965960"/>
+            <a:off x="6415888" y="1915160"/>
             <a:ext cx="5232258" cy="365760"/>
           </a:xfrm>
           <a:prstGeom prst="rect">
@@ -3724,7 +4997,7 @@
         </p:nvSpPr>
         <p:spPr>
           <a:xfrm>
-            <a:off x="5958688" y="1854708"/>
+            <a:off x="5958688" y="2781808"/>
             <a:ext cx="274320" cy="274320"/>
           </a:xfrm>
           <a:prstGeom prst="roundRect">
@@ -3746,7 +5019,7 @@
         </p:nvSpPr>
         <p:spPr>
           <a:xfrm>
-            <a:off x="5958688" y="1854708"/>
+            <a:off x="5958688" y="2781808"/>
             <a:ext cx="274320" cy="274320"/>
           </a:xfrm>
           <a:prstGeom prst="rect">
@@ -3785,7 +5058,427 @@
         </p:nvSpPr>
         <p:spPr>
           <a:xfrm>
-            <a:off x="406390" y="2413000"/>
+            <a:off x="558786" y="2216150"/>
+            <a:ext cx="2286000" cy="285750"/>
+          </a:xfrm>
+          <a:prstGeom prst="roundRect">
+            <a:avLst>
+              <a:gd name="adj" fmla="val 48000"/>
+            </a:avLst>
+          </a:prstGeom>
+          <a:solidFill>
+            <a:srgbClr val="F5F2EB"/>
+          </a:solidFill>
+          <a:ln w="19050">
+            <a:solidFill>
+              <a:srgbClr val="E65100"/>
+            </a:solidFill>
+            <a:prstDash val="solid"/>
+          </a:ln>
+        </p:spPr>
+      </p:sp>
+      <p:sp>
+        <p:nvSpPr>
+          <p:cNvPr id="11" name="Text 9"/>
+          <p:cNvSpPr/>
+          <p:nvPr/>
+        </p:nvSpPr>
+        <p:spPr>
+          <a:xfrm>
+            <a:off x="558786" y="2216150"/>
+            <a:ext cx="2286000" cy="285750"/>
+          </a:xfrm>
+          <a:prstGeom prst="rect">
+            <a:avLst/>
+          </a:prstGeom>
+          <a:noFill/>
+          <a:ln/>
+        </p:spPr>
+        <p:txBody>
+          <a:bodyPr wrap="square" rtlCol="0" anchor="ctr"/>
+          <a:lstStyle/>
+          <a:p>
+            <a:pPr algn="ctr" indent="0" marL="0">
+              <a:buNone/>
+            </a:pPr>
+            <a:r>
+              <a:rPr lang="en-US" sz="1000" b="1" dirty="0">
+                <a:solidFill>
+                  <a:srgbClr val="E65100"/>
+                </a:solidFill>
+                <a:latin typeface="Georgia" pitchFamily="34" charset="0"/>
+                <a:ea typeface="Georgia" pitchFamily="34" charset="-122"/>
+                <a:cs typeface="Georgia" pitchFamily="34" charset="-120"/>
+              </a:rPr>
+              <a:t>LEGACY INFRASTRUCTURE</a:t>
+            </a:r>
+            <a:endParaRPr lang="en-US" sz="1000" dirty="0"/>
+          </a:p>
+        </p:txBody>
+      </p:sp>
+      <p:sp>
+        <p:nvSpPr>
+          <p:cNvPr id="12" name="Text 10"/>
+          <p:cNvSpPr/>
+          <p:nvPr/>
+        </p:nvSpPr>
+        <p:spPr>
+          <a:xfrm>
+            <a:off x="558786" y="2590800"/>
+            <a:ext cx="5295768" cy="457200"/>
+          </a:xfrm>
+          <a:prstGeom prst="rect">
+            <a:avLst/>
+          </a:prstGeom>
+          <a:noFill/>
+          <a:ln/>
+        </p:spPr>
+        <p:txBody>
+          <a:bodyPr wrap="square" lIns="0" tIns="0" rIns="0" bIns="0" rtlCol="0" anchor="t"/>
+          <a:lstStyle/>
+          <a:p>
+            <a:pPr algn="l" indent="0" marL="0">
+              <a:buNone/>
+            </a:pPr>
+            <a:r>
+              <a:rPr lang="en-US" sz="1800" dirty="0">
+                <a:solidFill>
+                  <a:srgbClr val="2C2B29"/>
+                </a:solidFill>
+                <a:latin typeface="Georgia" pitchFamily="34" charset="0"/>
+                <a:ea typeface="Georgia" pitchFamily="34" charset="-122"/>
+                <a:cs typeface="Georgia" pitchFamily="34" charset="-120"/>
+              </a:rPr>
+              <a:t>Linear memory scaling with quadratic communication overhead during multi-node synchronization.</a:t>
+            </a:r>
+            <a:endParaRPr lang="en-US" sz="1800" dirty="0"/>
+          </a:p>
+        </p:txBody>
+      </p:sp>
+      <p:sp>
+        <p:nvSpPr>
+          <p:cNvPr id="13" name="Shape 11"/>
+          <p:cNvSpPr/>
+          <p:nvPr/>
+        </p:nvSpPr>
+        <p:spPr>
+          <a:xfrm>
+            <a:off x="558786" y="3136900"/>
+            <a:ext cx="5295768" cy="825500"/>
+          </a:xfrm>
+          <a:prstGeom prst="roundRect">
+            <a:avLst>
+              <a:gd name="adj" fmla="val 8862"/>
+            </a:avLst>
+          </a:prstGeom>
+          <a:solidFill>
+            <a:srgbClr val="F5F2EB"/>
+          </a:solidFill>
+          <a:ln w="19050">
+            <a:solidFill>
+              <a:srgbClr val="E65100"/>
+            </a:solidFill>
+            <a:prstDash val="solid"/>
+          </a:ln>
+        </p:spPr>
+      </p:sp>
+      <p:sp>
+        <p:nvSpPr>
+          <p:cNvPr id="14" name="Text 12"/>
+          <p:cNvSpPr/>
+          <p:nvPr/>
+        </p:nvSpPr>
+        <p:spPr>
+          <a:xfrm>
+            <a:off x="650226" y="3228340"/>
+            <a:ext cx="5112888" cy="201168"/>
+          </a:xfrm>
+          <a:prstGeom prst="rect">
+            <a:avLst/>
+          </a:prstGeom>
+          <a:noFill/>
+          <a:ln/>
+        </p:spPr>
+        <p:txBody>
+          <a:bodyPr wrap="square" rtlCol="0" anchor="ctr"/>
+          <a:lstStyle/>
+          <a:p>
+            <a:pPr algn="ctr" indent="0" marL="0">
+              <a:buNone/>
+            </a:pPr>
+            <a:r>
+              <a:rPr lang="en-US" sz="1000" b="1" dirty="0">
+                <a:solidFill>
+                  <a:srgbClr val="6B6862"/>
+                </a:solidFill>
+                <a:latin typeface="Georgia" pitchFamily="34" charset="0"/>
+                <a:ea typeface="Georgia" pitchFamily="34" charset="-122"/>
+                <a:cs typeface="Georgia" pitchFamily="34" charset="-120"/>
+              </a:rPr>
+              <a:t>AVG CONVERGENCE TIME</a:t>
+            </a:r>
+            <a:endParaRPr lang="en-US" sz="1000" dirty="0"/>
+          </a:p>
+        </p:txBody>
+      </p:sp>
+      <p:sp>
+        <p:nvSpPr>
+          <p:cNvPr id="15" name="Text 13"/>
+          <p:cNvSpPr/>
+          <p:nvPr/>
+        </p:nvSpPr>
+        <p:spPr>
+          <a:xfrm>
+            <a:off x="650226" y="3447796"/>
+            <a:ext cx="5112888" cy="402336"/>
+          </a:xfrm>
+          <a:prstGeom prst="rect">
+            <a:avLst/>
+          </a:prstGeom>
+          <a:noFill/>
+          <a:ln/>
+        </p:spPr>
+        <p:txBody>
+          <a:bodyPr wrap="square" rtlCol="0" anchor="ctr"/>
+          <a:lstStyle/>
+          <a:p>
+            <a:pPr algn="ctr" indent="0" marL="0">
+              <a:buNone/>
+            </a:pPr>
+            <a:r>
+              <a:rPr lang="en-US" sz="2600" b="1" dirty="0">
+                <a:solidFill>
+                  <a:srgbClr val="E65100"/>
+                </a:solidFill>
+                <a:latin typeface="Georgia" pitchFamily="34" charset="0"/>
+                <a:ea typeface="Georgia" pitchFamily="34" charset="-122"/>
+                <a:cs typeface="Georgia" pitchFamily="34" charset="-120"/>
+              </a:rPr>
+              <a:t>68ms</a:t>
+            </a:r>
+            <a:endParaRPr lang="en-US" sz="2600" dirty="0"/>
+          </a:p>
+        </p:txBody>
+      </p:sp>
+      <p:sp>
+        <p:nvSpPr>
+          <p:cNvPr id="16" name="Shape 14"/>
+          <p:cNvSpPr/>
+          <p:nvPr/>
+        </p:nvSpPr>
+        <p:spPr>
+          <a:xfrm>
+            <a:off x="6337142" y="2216150"/>
+            <a:ext cx="2286000" cy="285750"/>
+          </a:xfrm>
+          <a:prstGeom prst="roundRect">
+            <a:avLst>
+              <a:gd name="adj" fmla="val 48000"/>
+            </a:avLst>
+          </a:prstGeom>
+          <a:solidFill>
+            <a:srgbClr val="F5F2EB"/>
+          </a:solidFill>
+          <a:ln w="19050">
+            <a:solidFill>
+              <a:srgbClr val="2E7D32"/>
+            </a:solidFill>
+            <a:prstDash val="solid"/>
+          </a:ln>
+        </p:spPr>
+      </p:sp>
+      <p:sp>
+        <p:nvSpPr>
+          <p:cNvPr id="17" name="Text 15"/>
+          <p:cNvSpPr/>
+          <p:nvPr/>
+        </p:nvSpPr>
+        <p:spPr>
+          <a:xfrm>
+            <a:off x="6337142" y="2216150"/>
+            <a:ext cx="2286000" cy="285750"/>
+          </a:xfrm>
+          <a:prstGeom prst="rect">
+            <a:avLst/>
+          </a:prstGeom>
+          <a:noFill/>
+          <a:ln/>
+        </p:spPr>
+        <p:txBody>
+          <a:bodyPr wrap="square" rtlCol="0" anchor="ctr"/>
+          <a:lstStyle/>
+          <a:p>
+            <a:pPr algn="ctr" indent="0" marL="0">
+              <a:buNone/>
+            </a:pPr>
+            <a:r>
+              <a:rPr lang="en-US" sz="1000" b="1" dirty="0">
+                <a:solidFill>
+                  <a:srgbClr val="2E7D32"/>
+                </a:solidFill>
+                <a:latin typeface="Georgia" pitchFamily="34" charset="0"/>
+                <a:ea typeface="Georgia" pitchFamily="34" charset="-122"/>
+                <a:cs typeface="Georgia" pitchFamily="34" charset="-120"/>
+              </a:rPr>
+              <a:t>DISTRIBUTED TENSOR CORE</a:t>
+            </a:r>
+            <a:endParaRPr lang="en-US" sz="1000" dirty="0"/>
+          </a:p>
+        </p:txBody>
+      </p:sp>
+      <p:sp>
+        <p:nvSpPr>
+          <p:cNvPr id="18" name="Text 16"/>
+          <p:cNvSpPr/>
+          <p:nvPr/>
+        </p:nvSpPr>
+        <p:spPr>
+          <a:xfrm>
+            <a:off x="6337142" y="2590800"/>
+            <a:ext cx="5295768" cy="457200"/>
+          </a:xfrm>
+          <a:prstGeom prst="rect">
+            <a:avLst/>
+          </a:prstGeom>
+          <a:noFill/>
+          <a:ln/>
+        </p:spPr>
+        <p:txBody>
+          <a:bodyPr wrap="square" lIns="0" tIns="0" rIns="0" bIns="0" rtlCol="0" anchor="t"/>
+          <a:lstStyle/>
+          <a:p>
+            <a:pPr algn="l" indent="0" marL="0">
+              <a:buNone/>
+            </a:pPr>
+            <a:r>
+              <a:rPr lang="en-US" sz="1800" dirty="0">
+                <a:solidFill>
+                  <a:srgbClr val="2C2B29"/>
+                </a:solidFill>
+                <a:latin typeface="Georgia" pitchFamily="34" charset="0"/>
+                <a:ea typeface="Georgia" pitchFamily="34" charset="-122"/>
+                <a:cs typeface="Georgia" pitchFamily="34" charset="-120"/>
+              </a:rPr>
+              <a:t>Logarithmic latency scaling leveraging quantum sparse tensor compression.</a:t>
+            </a:r>
+            <a:endParaRPr lang="en-US" sz="1800" dirty="0"/>
+          </a:p>
+        </p:txBody>
+      </p:sp>
+      <p:sp>
+        <p:nvSpPr>
+          <p:cNvPr id="19" name="Shape 17"/>
+          <p:cNvSpPr/>
+          <p:nvPr/>
+        </p:nvSpPr>
+        <p:spPr>
+          <a:xfrm>
+            <a:off x="6337142" y="3136900"/>
+            <a:ext cx="5295768" cy="825500"/>
+          </a:xfrm>
+          <a:prstGeom prst="roundRect">
+            <a:avLst>
+              <a:gd name="adj" fmla="val 8862"/>
+            </a:avLst>
+          </a:prstGeom>
+          <a:solidFill>
+            <a:srgbClr val="F5F2EB"/>
+          </a:solidFill>
+          <a:ln w="19050">
+            <a:solidFill>
+              <a:srgbClr val="2E7D32"/>
+            </a:solidFill>
+            <a:prstDash val="solid"/>
+          </a:ln>
+        </p:spPr>
+      </p:sp>
+      <p:sp>
+        <p:nvSpPr>
+          <p:cNvPr id="20" name="Text 18"/>
+          <p:cNvSpPr/>
+          <p:nvPr/>
+        </p:nvSpPr>
+        <p:spPr>
+          <a:xfrm>
+            <a:off x="6428582" y="3228340"/>
+            <a:ext cx="5112888" cy="201168"/>
+          </a:xfrm>
+          <a:prstGeom prst="rect">
+            <a:avLst/>
+          </a:prstGeom>
+          <a:noFill/>
+          <a:ln/>
+        </p:spPr>
+        <p:txBody>
+          <a:bodyPr wrap="square" rtlCol="0" anchor="ctr"/>
+          <a:lstStyle/>
+          <a:p>
+            <a:pPr algn="ctr" indent="0" marL="0">
+              <a:buNone/>
+            </a:pPr>
+            <a:r>
+              <a:rPr lang="en-US" sz="1000" b="1" dirty="0">
+                <a:solidFill>
+                  <a:srgbClr val="6B6862"/>
+                </a:solidFill>
+                <a:latin typeface="Georgia" pitchFamily="34" charset="0"/>
+                <a:ea typeface="Georgia" pitchFamily="34" charset="-122"/>
+                <a:cs typeface="Georgia" pitchFamily="34" charset="-120"/>
+              </a:rPr>
+              <a:t>AVG CONVERGENCE TIME</a:t>
+            </a:r>
+            <a:endParaRPr lang="en-US" sz="1000" dirty="0"/>
+          </a:p>
+        </p:txBody>
+      </p:sp>
+      <p:sp>
+        <p:nvSpPr>
+          <p:cNvPr id="21" name="Text 19"/>
+          <p:cNvSpPr/>
+          <p:nvPr/>
+        </p:nvSpPr>
+        <p:spPr>
+          <a:xfrm>
+            <a:off x="6428582" y="3447796"/>
+            <a:ext cx="5112888" cy="402336"/>
+          </a:xfrm>
+          <a:prstGeom prst="rect">
+            <a:avLst/>
+          </a:prstGeom>
+          <a:noFill/>
+          <a:ln/>
+        </p:spPr>
+        <p:txBody>
+          <a:bodyPr wrap="square" rtlCol="0" anchor="ctr"/>
+          <a:lstStyle/>
+          <a:p>
+            <a:pPr algn="ctr" indent="0" marL="0">
+              <a:buNone/>
+            </a:pPr>
+            <a:r>
+              <a:rPr lang="en-US" sz="2600" b="1" dirty="0">
+                <a:solidFill>
+                  <a:srgbClr val="2E7D32"/>
+                </a:solidFill>
+                <a:latin typeface="Georgia" pitchFamily="34" charset="0"/>
+                <a:ea typeface="Georgia" pitchFamily="34" charset="-122"/>
+                <a:cs typeface="Georgia" pitchFamily="34" charset="-120"/>
+              </a:rPr>
+              <a:t>4.1ms</a:t>
+            </a:r>
+            <a:endParaRPr lang="en-US" sz="2600" dirty="0"/>
+          </a:p>
+        </p:txBody>
+      </p:sp>
+      <p:sp>
+        <p:nvSpPr>
+          <p:cNvPr id="22" name="Shape 20"/>
+          <p:cNvSpPr/>
+          <p:nvPr/>
+        </p:nvSpPr>
+        <p:spPr>
+          <a:xfrm>
+            <a:off x="406390" y="4292600"/>
             <a:ext cx="11378916" cy="571500"/>
           </a:xfrm>
           <a:prstGeom prst="roundRect">
@@ -3806,13 +5499,13 @@
       </p:sp>
       <p:sp>
         <p:nvSpPr>
-          <p:cNvPr id="11" name="Shape 9"/>
-          <p:cNvSpPr/>
-          <p:nvPr/>
-        </p:nvSpPr>
-        <p:spPr>
-          <a:xfrm>
-            <a:off x="406390" y="2413000"/>
+          <p:cNvPr id="23" name="Shape 21"/>
+          <p:cNvSpPr/>
+          <p:nvPr/>
+        </p:nvSpPr>
+        <p:spPr>
+          <a:xfrm>
+            <a:off x="406390" y="4292600"/>
             <a:ext cx="54864" cy="571500"/>
           </a:xfrm>
           <a:prstGeom prst="rect">
@@ -3831,13 +5524,13 @@
       </p:sp>
       <p:sp>
         <p:nvSpPr>
-          <p:cNvPr id="12" name="Text 10"/>
-          <p:cNvSpPr/>
-          <p:nvPr/>
-        </p:nvSpPr>
-        <p:spPr>
-          <a:xfrm>
-            <a:off x="543550" y="2413000"/>
+          <p:cNvPr id="24" name="Text 22"/>
+          <p:cNvSpPr/>
+          <p:nvPr/>
+        </p:nvSpPr>
+        <p:spPr>
+          <a:xfrm>
+            <a:off x="543550" y="4292600"/>
             <a:ext cx="11104596" cy="571500"/>
           </a:xfrm>
           <a:prstGeom prst="rect">
@@ -3865,6 +5558,45 @@
               <a:t>\mathcal{L}(\theta) = \mathbb{E}_{x \sim \mathcal{D}} \left[ \| f_\theta(x) - y \|_2^2 \right] + \lambda \sum_{i=1}^N \Omega(W_i)</a:t>
             </a:r>
             <a:endParaRPr lang="en-US" sz="2000" dirty="0"/>
+          </a:p>
+        </p:txBody>
+      </p:sp>
+      <p:sp>
+        <p:nvSpPr>
+          <p:cNvPr id="25" name="Text 23"/>
+          <p:cNvSpPr/>
+          <p:nvPr/>
+        </p:nvSpPr>
+        <p:spPr>
+          <a:xfrm>
+            <a:off x="457200" y="6492240"/>
+            <a:ext cx="11277295" cy="228600"/>
+          </a:xfrm>
+          <a:prstGeom prst="rect">
+            <a:avLst/>
+          </a:prstGeom>
+          <a:noFill/>
+          <a:ln/>
+        </p:spPr>
+        <p:txBody>
+          <a:bodyPr wrap="square" rtlCol="0" anchor="ctr"/>
+          <a:lstStyle/>
+          <a:p>
+            <a:pPr indent="0" marL="0">
+              <a:buNone/>
+            </a:pPr>
+            <a:r>
+              <a:rPr lang="en-US" sz="900" b="1" dirty="0">
+                <a:solidFill>
+                  <a:srgbClr val="6B6862"/>
+                </a:solidFill>
+                <a:latin typeface="Georgia" pitchFamily="34" charset="0"/>
+                <a:ea typeface="Georgia" pitchFamily="34" charset="-122"/>
+                <a:cs typeface="Georgia" pitchFamily="34" charset="-120"/>
+              </a:rPr>
+              <a:t>YUMIA V0.1.26 • CONFIDENTIAL</a:t>
+            </a:r>
+            <a:endParaRPr lang="en-US" sz="900" dirty="0"/>
           </a:p>
         </p:txBody>
       </p:sp>
@@ -3947,7 +5679,7 @@
         </p:nvSpPr>
         <p:spPr>
           <a:xfrm>
-            <a:off x="406390" y="1181100"/>
+            <a:off x="406390" y="1155700"/>
             <a:ext cx="11378916" cy="444500"/>
           </a:xfrm>
           <a:prstGeom prst="rect">
@@ -3975,6 +5707,77 @@
               <a:t>Resource Allocation &amp; Workload Distribution</a:t>
             </a:r>
             <a:endParaRPr lang="en-US" sz="3400" dirty="0"/>
+          </a:p>
+        </p:txBody>
+      </p:sp>
+      <p:graphicFrame>
+        <p:nvGraphicFramePr>
+          <p:cNvPr id="4" name="Chart 0" descr=""/>
+          <p:cNvGraphicFramePr/>
+          <p:nvPr/>
+        </p:nvGraphicFramePr>
+        <p:xfrm>
+          <a:off x="406390" y="1778000"/>
+          <a:ext cx="5600560" cy="1778000"/>
+        </p:xfrm>
+        <a:graphic xmlns:a="http://schemas.openxmlformats.org/drawingml/2006/main">
+          <a:graphicData uri="http://schemas.openxmlformats.org/drawingml/2006/chart">
+            <c:chart xmlns:c="http://schemas.openxmlformats.org/drawingml/2006/chart" r:id="rId1"/>
+          </a:graphicData>
+        </a:graphic>
+      </p:graphicFrame>
+      <p:graphicFrame>
+        <p:nvGraphicFramePr>
+          <p:cNvPr id="5" name="Chart 1" descr=""/>
+          <p:cNvGraphicFramePr/>
+          <p:nvPr/>
+        </p:nvGraphicFramePr>
+        <p:xfrm>
+          <a:off x="6184745" y="1778000"/>
+          <a:ext cx="5600560" cy="1778000"/>
+        </p:xfrm>
+        <a:graphic xmlns:a="http://schemas.openxmlformats.org/drawingml/2006/main">
+          <a:graphicData uri="http://schemas.openxmlformats.org/drawingml/2006/chart">
+            <c:chart xmlns:c="http://schemas.openxmlformats.org/drawingml/2006/chart" r:id="rId2"/>
+          </a:graphicData>
+        </a:graphic>
+      </p:graphicFrame>
+      <p:sp>
+        <p:nvSpPr>
+          <p:cNvPr id="6" name="Text 2"/>
+          <p:cNvSpPr/>
+          <p:nvPr/>
+        </p:nvSpPr>
+        <p:spPr>
+          <a:xfrm>
+            <a:off x="457200" y="6492240"/>
+            <a:ext cx="11277295" cy="228600"/>
+          </a:xfrm>
+          <a:prstGeom prst="rect">
+            <a:avLst/>
+          </a:prstGeom>
+          <a:noFill/>
+          <a:ln/>
+        </p:spPr>
+        <p:txBody>
+          <a:bodyPr wrap="square" rtlCol="0" anchor="ctr"/>
+          <a:lstStyle/>
+          <a:p>
+            <a:pPr indent="0" marL="0">
+              <a:buNone/>
+            </a:pPr>
+            <a:r>
+              <a:rPr lang="en-US" sz="900" b="1" dirty="0">
+                <a:solidFill>
+                  <a:srgbClr val="6B6862"/>
+                </a:solidFill>
+                <a:latin typeface="Georgia" pitchFamily="34" charset="0"/>
+                <a:ea typeface="Georgia" pitchFamily="34" charset="-122"/>
+                <a:cs typeface="Georgia" pitchFamily="34" charset="-120"/>
+              </a:rPr>
+              <a:t>YUMIA V0.1.26 • CONFIDENTIAL</a:t>
+            </a:r>
+            <a:endParaRPr lang="en-US" sz="900" dirty="0"/>
           </a:p>
         </p:txBody>
       </p:sp>
@@ -4057,7 +5860,7 @@
         </p:nvSpPr>
         <p:spPr>
           <a:xfrm>
-            <a:off x="406390" y="1181100"/>
+            <a:off x="406390" y="1155700"/>
             <a:ext cx="11378916" cy="444500"/>
           </a:xfrm>
           <a:prstGeom prst="rect">
@@ -4096,8 +5899,8 @@
         </p:nvSpPr>
         <p:spPr>
           <a:xfrm>
-            <a:off x="406390" y="1828800"/>
-            <a:ext cx="6705432" cy="838200"/>
+            <a:off x="406390" y="1778000"/>
+            <a:ext cx="6720672" cy="838200"/>
           </a:xfrm>
           <a:prstGeom prst="roundRect">
             <a:avLst>
@@ -4123,8 +5926,8 @@
         </p:nvSpPr>
         <p:spPr>
           <a:xfrm>
-            <a:off x="589270" y="1965960"/>
-            <a:ext cx="6339672" cy="563880"/>
+            <a:off x="589270" y="1915160"/>
+            <a:ext cx="6354912" cy="563880"/>
           </a:xfrm>
           <a:prstGeom prst="rect">
             <a:avLst/>
@@ -4196,12 +5999,12 @@
         </p:nvSpPr>
         <p:spPr>
           <a:xfrm>
-            <a:off x="7315017" y="1828800"/>
-            <a:ext cx="4470288" cy="381000"/>
+            <a:off x="7304857" y="1778000"/>
+            <a:ext cx="4480448" cy="831850"/>
           </a:xfrm>
           <a:prstGeom prst="roundRect">
             <a:avLst>
-              <a:gd name="adj" fmla="val 19200"/>
+              <a:gd name="adj" fmla="val 8794"/>
             </a:avLst>
           </a:prstGeom>
           <a:solidFill>
@@ -4223,8 +6026,8 @@
         </p:nvSpPr>
         <p:spPr>
           <a:xfrm>
-            <a:off x="7452177" y="1901952"/>
-            <a:ext cx="4195968" cy="274320"/>
+            <a:off x="7442017" y="1851152"/>
+            <a:ext cx="4206128" cy="274320"/>
           </a:xfrm>
           <a:prstGeom prst="rect">
             <a:avLst/>
@@ -4262,8 +6065,8 @@
         </p:nvSpPr>
         <p:spPr>
           <a:xfrm>
-            <a:off x="7452177" y="2221992"/>
-            <a:ext cx="4195968" cy="-85344"/>
+            <a:off x="7442017" y="2171192"/>
+            <a:ext cx="4206128" cy="365506"/>
           </a:xfrm>
           <a:prstGeom prst="rect">
             <a:avLst/>
@@ -4301,12 +6104,12 @@
         </p:nvSpPr>
         <p:spPr>
           <a:xfrm>
-            <a:off x="7315017" y="2413000"/>
-            <a:ext cx="2011680" cy="347472"/>
+            <a:off x="7304857" y="2787650"/>
+            <a:ext cx="2011680" cy="285750"/>
           </a:xfrm>
           <a:prstGeom prst="roundRect">
             <a:avLst>
-              <a:gd name="adj" fmla="val 39474"/>
+              <a:gd name="adj" fmla="val 48000"/>
             </a:avLst>
           </a:prstGeom>
           <a:solidFill>
@@ -4328,8 +6131,8 @@
         </p:nvSpPr>
         <p:spPr>
           <a:xfrm>
-            <a:off x="7315017" y="2413000"/>
-            <a:ext cx="2011680" cy="347472"/>
+            <a:off x="7304857" y="2787650"/>
+            <a:ext cx="2011680" cy="285750"/>
           </a:xfrm>
           <a:prstGeom prst="rect">
             <a:avLst/>
@@ -4367,12 +6170,12 @@
         </p:nvSpPr>
         <p:spPr>
           <a:xfrm>
-            <a:off x="7315017" y="2997200"/>
-            <a:ext cx="2231136" cy="347472"/>
+            <a:off x="7304857" y="3251200"/>
+            <a:ext cx="2231136" cy="285750"/>
           </a:xfrm>
           <a:prstGeom prst="roundRect">
             <a:avLst>
-              <a:gd name="adj" fmla="val 39474"/>
+              <a:gd name="adj" fmla="val 48000"/>
             </a:avLst>
           </a:prstGeom>
           <a:solidFill>
@@ -4394,8 +6197,8 @@
         </p:nvSpPr>
         <p:spPr>
           <a:xfrm>
-            <a:off x="7315017" y="2997200"/>
-            <a:ext cx="2231136" cy="347472"/>
+            <a:off x="7304857" y="3251200"/>
+            <a:ext cx="2231136" cy="285750"/>
           </a:xfrm>
           <a:prstGeom prst="rect">
             <a:avLst/>
@@ -4422,6 +6225,45 @@
               <a:t>WCAG AAA VERIFIED</a:t>
             </a:r>
             <a:endParaRPr lang="en-US" sz="1000" dirty="0"/>
+          </a:p>
+        </p:txBody>
+      </p:sp>
+      <p:sp>
+        <p:nvSpPr>
+          <p:cNvPr id="13" name="Text 11"/>
+          <p:cNvSpPr/>
+          <p:nvPr/>
+        </p:nvSpPr>
+        <p:spPr>
+          <a:xfrm>
+            <a:off x="457200" y="6492240"/>
+            <a:ext cx="11277295" cy="228600"/>
+          </a:xfrm>
+          <a:prstGeom prst="rect">
+            <a:avLst/>
+          </a:prstGeom>
+          <a:noFill/>
+          <a:ln/>
+        </p:spPr>
+        <p:txBody>
+          <a:bodyPr wrap="square" rtlCol="0" anchor="ctr"/>
+          <a:lstStyle/>
+          <a:p>
+            <a:pPr indent="0" marL="0">
+              <a:buNone/>
+            </a:pPr>
+            <a:r>
+              <a:rPr lang="en-US" sz="900" b="1" dirty="0">
+                <a:solidFill>
+                  <a:srgbClr val="6B6862"/>
+                </a:solidFill>
+                <a:latin typeface="Georgia" pitchFamily="34" charset="0"/>
+                <a:ea typeface="Georgia" pitchFamily="34" charset="-122"/>
+                <a:cs typeface="Georgia" pitchFamily="34" charset="-120"/>
+              </a:rPr>
+              <a:t>YUMIA V0.1.26 • CONFIDENTIAL</a:t>
+            </a:r>
+            <a:endParaRPr lang="en-US" sz="900" dirty="0"/>
           </a:p>
         </p:txBody>
       </p:sp>

--- a/presentation.pptx
+++ b/presentation.pptx
@@ -3521,14 +3521,41 @@
       </p:sp>
       <p:sp>
         <p:nvSpPr>
-          <p:cNvPr id="6" name="Text 4"/>
-          <p:cNvSpPr/>
-          <p:nvPr/>
-        </p:nvSpPr>
-        <p:spPr>
-          <a:xfrm>
-            <a:off x="4489752" y="2656840"/>
-            <a:ext cx="731520" cy="274320"/>
+          <p:cNvPr id="6" name="Shape 4"/>
+          <p:cNvSpPr/>
+          <p:nvPr/>
+        </p:nvSpPr>
+        <p:spPr>
+          <a:xfrm>
+            <a:off x="4485180" y="2675128"/>
+            <a:ext cx="740664" cy="237744"/>
+          </a:xfrm>
+          <a:prstGeom prst="roundRect">
+            <a:avLst>
+              <a:gd name="adj" fmla="val 23077"/>
+            </a:avLst>
+          </a:prstGeom>
+          <a:solidFill>
+            <a:srgbClr val="F5F2EB"/>
+          </a:solidFill>
+          <a:ln w="12700">
+            <a:solidFill>
+              <a:srgbClr val="E0DACD"/>
+            </a:solidFill>
+            <a:prstDash val="solid"/>
+          </a:ln>
+        </p:spPr>
+      </p:sp>
+      <p:sp>
+        <p:nvSpPr>
+          <p:cNvPr id="7" name="Text 5"/>
+          <p:cNvSpPr/>
+          <p:nvPr/>
+        </p:nvSpPr>
+        <p:spPr>
+          <a:xfrm>
+            <a:off x="4485180" y="2675128"/>
+            <a:ext cx="740664" cy="237744"/>
           </a:xfrm>
           <a:prstGeom prst="rect">
             <a:avLst/>
@@ -3544,10 +3571,13 @@
               <a:buNone/>
             </a:pPr>
             <a:r>
-              <a:rPr lang="en-US" sz="900" dirty="0">
+              <a:rPr lang="en-US" sz="900" b="1" dirty="0">
                 <a:solidFill>
                   <a:srgbClr val="6B6862"/>
                 </a:solidFill>
+                <a:latin typeface="Georgia" pitchFamily="34" charset="0"/>
+                <a:ea typeface="Georgia" pitchFamily="34" charset="-122"/>
+                <a:cs typeface="Georgia" pitchFamily="34" charset="-120"/>
               </a:rPr>
               <a:t>TLS 1.3</a:t>
             </a:r>
@@ -3557,7 +3587,7 @@
       </p:sp>
       <p:sp>
         <p:nvSpPr>
-          <p:cNvPr id="7" name="Shape 5"/>
+          <p:cNvPr id="8" name="Shape 6"/>
           <p:cNvSpPr/>
           <p:nvPr/>
         </p:nvSpPr>
@@ -3581,14 +3611,41 @@
       </p:sp>
       <p:sp>
         <p:nvSpPr>
-          <p:cNvPr id="8" name="Text 6"/>
-          <p:cNvSpPr/>
-          <p:nvPr/>
-        </p:nvSpPr>
-        <p:spPr>
-          <a:xfrm>
-            <a:off x="6970423" y="2656840"/>
-            <a:ext cx="731520" cy="274320"/>
+          <p:cNvPr id="9" name="Shape 7"/>
+          <p:cNvSpPr/>
+          <p:nvPr/>
+        </p:nvSpPr>
+        <p:spPr>
+          <a:xfrm>
+            <a:off x="6709819" y="2675128"/>
+            <a:ext cx="1252728" cy="237744"/>
+          </a:xfrm>
+          <a:prstGeom prst="roundRect">
+            <a:avLst>
+              <a:gd name="adj" fmla="val 23077"/>
+            </a:avLst>
+          </a:prstGeom>
+          <a:solidFill>
+            <a:srgbClr val="F5F2EB"/>
+          </a:solidFill>
+          <a:ln w="12700">
+            <a:solidFill>
+              <a:srgbClr val="E0DACD"/>
+            </a:solidFill>
+            <a:prstDash val="solid"/>
+          </a:ln>
+        </p:spPr>
+      </p:sp>
+      <p:sp>
+        <p:nvSpPr>
+          <p:cNvPr id="10" name="Text 8"/>
+          <p:cNvSpPr/>
+          <p:nvPr/>
+        </p:nvSpPr>
+        <p:spPr>
+          <a:xfrm>
+            <a:off x="6709819" y="2675128"/>
+            <a:ext cx="1252728" cy="237744"/>
           </a:xfrm>
           <a:prstGeom prst="rect">
             <a:avLst/>
@@ -3604,10 +3661,13 @@
               <a:buNone/>
             </a:pPr>
             <a:r>
-              <a:rPr lang="en-US" sz="900" dirty="0">
+              <a:rPr lang="en-US" sz="900" b="1" dirty="0">
                 <a:solidFill>
                   <a:srgbClr val="6B6862"/>
                 </a:solidFill>
+                <a:latin typeface="Georgia" pitchFamily="34" charset="0"/>
+                <a:ea typeface="Georgia" pitchFamily="34" charset="-122"/>
+                <a:cs typeface="Georgia" pitchFamily="34" charset="-120"/>
               </a:rPr>
               <a:t>gRPC Streaming</a:t>
             </a:r>
@@ -3617,7 +3677,7 @@
       </p:sp>
       <p:sp>
         <p:nvSpPr>
-          <p:cNvPr id="9" name="Shape 7"/>
+          <p:cNvPr id="11" name="Shape 9"/>
           <p:cNvSpPr/>
           <p:nvPr/>
         </p:nvSpPr>
@@ -3641,7 +3701,7 @@
       </p:sp>
       <p:sp>
         <p:nvSpPr>
-          <p:cNvPr id="10" name="Shape 8"/>
+          <p:cNvPr id="12" name="Shape 10"/>
           <p:cNvSpPr/>
           <p:nvPr/>
         </p:nvSpPr>
@@ -3665,14 +3725,41 @@
       </p:sp>
       <p:sp>
         <p:nvSpPr>
-          <p:cNvPr id="11" name="Text 9"/>
-          <p:cNvSpPr/>
-          <p:nvPr/>
-        </p:nvSpPr>
-        <p:spPr>
-          <a:xfrm>
-            <a:off x="9451095" y="3016250"/>
-            <a:ext cx="731520" cy="274320"/>
+          <p:cNvPr id="13" name="Shape 11"/>
+          <p:cNvSpPr/>
+          <p:nvPr/>
+        </p:nvSpPr>
+        <p:spPr>
+          <a:xfrm>
+            <a:off x="9373371" y="3034538"/>
+            <a:ext cx="886968" cy="237744"/>
+          </a:xfrm>
+          <a:prstGeom prst="roundRect">
+            <a:avLst>
+              <a:gd name="adj" fmla="val 23077"/>
+            </a:avLst>
+          </a:prstGeom>
+          <a:solidFill>
+            <a:srgbClr val="F5F2EB"/>
+          </a:solidFill>
+          <a:ln w="12700">
+            <a:solidFill>
+              <a:srgbClr val="E0DACD"/>
+            </a:solidFill>
+            <a:prstDash val="solid"/>
+          </a:ln>
+        </p:spPr>
+      </p:sp>
+      <p:sp>
+        <p:nvSpPr>
+          <p:cNvPr id="14" name="Text 12"/>
+          <p:cNvSpPr/>
+          <p:nvPr/>
+        </p:nvSpPr>
+        <p:spPr>
+          <a:xfrm>
+            <a:off x="9373371" y="3034538"/>
+            <a:ext cx="886968" cy="237744"/>
           </a:xfrm>
           <a:prstGeom prst="rect">
             <a:avLst/>
@@ -3688,10 +3775,13 @@
               <a:buNone/>
             </a:pPr>
             <a:r>
-              <a:rPr lang="en-US" sz="900" dirty="0">
+              <a:rPr lang="en-US" sz="900" b="1" dirty="0">
                 <a:solidFill>
                   <a:srgbClr val="6B6862"/>
                 </a:solidFill>
+                <a:latin typeface="Georgia" pitchFamily="34" charset="0"/>
+                <a:ea typeface="Georgia" pitchFamily="34" charset="-122"/>
+                <a:cs typeface="Georgia" pitchFamily="34" charset="-120"/>
               </a:rPr>
               <a:t>Hot Cache</a:t>
             </a:r>
@@ -3701,7 +3791,7 @@
       </p:sp>
       <p:sp>
         <p:nvSpPr>
-          <p:cNvPr id="12" name="Shape 10"/>
+          <p:cNvPr id="15" name="Shape 13"/>
           <p:cNvSpPr/>
           <p:nvPr/>
         </p:nvSpPr>
@@ -3728,14 +3818,14 @@
       </p:sp>
       <p:sp>
         <p:nvSpPr>
-          <p:cNvPr id="13" name="Text 11"/>
-          <p:cNvSpPr/>
-          <p:nvPr/>
-        </p:nvSpPr>
-        <p:spPr>
-          <a:xfrm>
-            <a:off x="452110" y="2542540"/>
-            <a:ext cx="1364789" cy="502920"/>
+          <p:cNvPr id="16" name="Text 14"/>
+          <p:cNvSpPr/>
+          <p:nvPr/>
+        </p:nvSpPr>
+        <p:spPr>
+          <a:xfrm>
+            <a:off x="461254" y="2551684"/>
+            <a:ext cx="1346501" cy="484632"/>
           </a:xfrm>
           <a:prstGeom prst="rect">
             <a:avLst/>
@@ -3767,7 +3857,7 @@
       </p:sp>
       <p:sp>
         <p:nvSpPr>
-          <p:cNvPr id="14" name="Shape 12"/>
+          <p:cNvPr id="17" name="Shape 15"/>
           <p:cNvSpPr/>
           <p:nvPr/>
         </p:nvSpPr>
@@ -3794,14 +3884,14 @@
       </p:sp>
       <p:sp>
         <p:nvSpPr>
-          <p:cNvPr id="15" name="Text 13"/>
-          <p:cNvSpPr/>
-          <p:nvPr/>
-        </p:nvSpPr>
-        <p:spPr>
-          <a:xfrm>
-            <a:off x="2932782" y="2542540"/>
-            <a:ext cx="1364789" cy="502920"/>
+          <p:cNvPr id="18" name="Text 16"/>
+          <p:cNvSpPr/>
+          <p:nvPr/>
+        </p:nvSpPr>
+        <p:spPr>
+          <a:xfrm>
+            <a:off x="2941926" y="2551684"/>
+            <a:ext cx="1346501" cy="484632"/>
           </a:xfrm>
           <a:prstGeom prst="rect">
             <a:avLst/>
@@ -3833,7 +3923,7 @@
       </p:sp>
       <p:sp>
         <p:nvSpPr>
-          <p:cNvPr id="16" name="Shape 14"/>
+          <p:cNvPr id="19" name="Shape 17"/>
           <p:cNvSpPr/>
           <p:nvPr/>
         </p:nvSpPr>
@@ -3860,14 +3950,14 @@
       </p:sp>
       <p:sp>
         <p:nvSpPr>
-          <p:cNvPr id="17" name="Text 15"/>
-          <p:cNvSpPr/>
-          <p:nvPr/>
-        </p:nvSpPr>
-        <p:spPr>
-          <a:xfrm>
-            <a:off x="5413453" y="2542540"/>
-            <a:ext cx="1364789" cy="502920"/>
+          <p:cNvPr id="20" name="Text 18"/>
+          <p:cNvSpPr/>
+          <p:nvPr/>
+        </p:nvSpPr>
+        <p:spPr>
+          <a:xfrm>
+            <a:off x="5422597" y="2551684"/>
+            <a:ext cx="1346501" cy="484632"/>
           </a:xfrm>
           <a:prstGeom prst="rect">
             <a:avLst/>
@@ -3899,7 +3989,7 @@
       </p:sp>
       <p:sp>
         <p:nvSpPr>
-          <p:cNvPr id="18" name="Shape 16"/>
+          <p:cNvPr id="21" name="Shape 19"/>
           <p:cNvSpPr/>
           <p:nvPr/>
         </p:nvSpPr>
@@ -3926,14 +4016,14 @@
       </p:sp>
       <p:sp>
         <p:nvSpPr>
-          <p:cNvPr id="19" name="Text 17"/>
-          <p:cNvSpPr/>
-          <p:nvPr/>
-        </p:nvSpPr>
-        <p:spPr>
-          <a:xfrm>
-            <a:off x="7894125" y="2542540"/>
-            <a:ext cx="1364789" cy="502920"/>
+          <p:cNvPr id="22" name="Text 20"/>
+          <p:cNvSpPr/>
+          <p:nvPr/>
+        </p:nvSpPr>
+        <p:spPr>
+          <a:xfrm>
+            <a:off x="7903269" y="2551684"/>
+            <a:ext cx="1346501" cy="484632"/>
           </a:xfrm>
           <a:prstGeom prst="rect">
             <a:avLst/>
@@ -3949,7 +4039,7 @@
               <a:buNone/>
             </a:pPr>
             <a:r>
-              <a:rPr lang="en-US" sz="1100" b="1" dirty="0">
+              <a:rPr lang="en-US" sz="1000" b="1" dirty="0">
                 <a:solidFill>
                   <a:srgbClr val="2C2B29"/>
                 </a:solidFill>
@@ -3959,13 +4049,13 @@
               </a:rPr>
               <a:t>Quantum Tensor Cores</a:t>
             </a:r>
-            <a:endParaRPr lang="en-US" sz="1100" dirty="0"/>
-          </a:p>
-        </p:txBody>
-      </p:sp>
-      <p:sp>
-        <p:nvSpPr>
-          <p:cNvPr id="20" name="Shape 18"/>
+            <a:endParaRPr lang="en-US" sz="1000" dirty="0"/>
+          </a:p>
+        </p:txBody>
+      </p:sp>
+      <p:sp>
+        <p:nvSpPr>
+          <p:cNvPr id="23" name="Shape 21"/>
           <p:cNvSpPr/>
           <p:nvPr/>
         </p:nvSpPr>
@@ -3992,14 +4082,39 @@
       </p:sp>
       <p:sp>
         <p:nvSpPr>
-          <p:cNvPr id="21" name="Text 19"/>
-          <p:cNvSpPr/>
-          <p:nvPr/>
-        </p:nvSpPr>
-        <p:spPr>
-          <a:xfrm>
-            <a:off x="10374797" y="1823720"/>
-            <a:ext cx="1364789" cy="502920"/>
+          <p:cNvPr id="24" name="Shape 22"/>
+          <p:cNvSpPr/>
+          <p:nvPr/>
+        </p:nvSpPr>
+        <p:spPr>
+          <a:xfrm>
+            <a:off x="10466237" y="1869440"/>
+            <a:ext cx="1181909" cy="18288"/>
+          </a:xfrm>
+          <a:prstGeom prst="rect">
+            <a:avLst/>
+          </a:prstGeom>
+          <a:solidFill>
+            <a:srgbClr val="8B0000"/>
+          </a:solidFill>
+          <a:ln w="12700">
+            <a:solidFill>
+              <a:srgbClr val="8B0000"/>
+            </a:solidFill>
+            <a:prstDash val="solid"/>
+          </a:ln>
+        </p:spPr>
+      </p:sp>
+      <p:sp>
+        <p:nvSpPr>
+          <p:cNvPr id="25" name="Text 23"/>
+          <p:cNvSpPr/>
+          <p:nvPr/>
+        </p:nvSpPr>
+        <p:spPr>
+          <a:xfrm>
+            <a:off x="10383941" y="1832864"/>
+            <a:ext cx="1346501" cy="484632"/>
           </a:xfrm>
           <a:prstGeom prst="rect">
             <a:avLst/>
@@ -4015,7 +4130,7 @@
               <a:buNone/>
             </a:pPr>
             <a:r>
-              <a:rPr lang="en-US" sz="1100" b="1" dirty="0">
+              <a:rPr lang="en-US" sz="1000" b="1" dirty="0">
                 <a:solidFill>
                   <a:srgbClr val="2C2B29"/>
                 </a:solidFill>
@@ -4025,13 +4140,13 @@
               </a:rPr>
               <a:t>Vector Knowledge Base</a:t>
             </a:r>
-            <a:endParaRPr lang="en-US" sz="1100" dirty="0"/>
-          </a:p>
-        </p:txBody>
-      </p:sp>
-      <p:sp>
-        <p:nvSpPr>
-          <p:cNvPr id="22" name="Shape 20"/>
+            <a:endParaRPr lang="en-US" sz="1000" dirty="0"/>
+          </a:p>
+        </p:txBody>
+      </p:sp>
+      <p:sp>
+        <p:nvSpPr>
+          <p:cNvPr id="26" name="Shape 24"/>
           <p:cNvSpPr/>
           <p:nvPr/>
         </p:nvSpPr>
@@ -4058,14 +4173,39 @@
       </p:sp>
       <p:sp>
         <p:nvSpPr>
-          <p:cNvPr id="23" name="Text 21"/>
-          <p:cNvSpPr/>
-          <p:nvPr/>
-        </p:nvSpPr>
-        <p:spPr>
-          <a:xfrm>
-            <a:off x="10374797" y="3261360"/>
-            <a:ext cx="1364789" cy="502920"/>
+          <p:cNvPr id="27" name="Shape 25"/>
+          <p:cNvSpPr/>
+          <p:nvPr/>
+        </p:nvSpPr>
+        <p:spPr>
+          <a:xfrm>
+            <a:off x="10466237" y="3307080"/>
+            <a:ext cx="1181909" cy="18288"/>
+          </a:xfrm>
+          <a:prstGeom prst="rect">
+            <a:avLst/>
+          </a:prstGeom>
+          <a:solidFill>
+            <a:srgbClr val="2E7D32"/>
+          </a:solidFill>
+          <a:ln w="12700">
+            <a:solidFill>
+              <a:srgbClr val="2E7D32"/>
+            </a:solidFill>
+            <a:prstDash val="solid"/>
+          </a:ln>
+        </p:spPr>
+      </p:sp>
+      <p:sp>
+        <p:nvSpPr>
+          <p:cNvPr id="28" name="Text 26"/>
+          <p:cNvSpPr/>
+          <p:nvPr/>
+        </p:nvSpPr>
+        <p:spPr>
+          <a:xfrm>
+            <a:off x="10383941" y="3270504"/>
+            <a:ext cx="1346501" cy="484632"/>
           </a:xfrm>
           <a:prstGeom prst="rect">
             <a:avLst/>
@@ -4081,7 +4221,7 @@
               <a:buNone/>
             </a:pPr>
             <a:r>
-              <a:rPr lang="en-US" sz="1100" b="1" dirty="0">
+              <a:rPr lang="en-US" sz="1000" b="1" dirty="0">
                 <a:solidFill>
                   <a:srgbClr val="2C2B29"/>
                 </a:solidFill>
@@ -4091,13 +4231,13 @@
               </a:rPr>
               <a:t>Redis Semantic Cache</a:t>
             </a:r>
-            <a:endParaRPr lang="en-US" sz="1100" dirty="0"/>
-          </a:p>
-        </p:txBody>
-      </p:sp>
-      <p:sp>
-        <p:nvSpPr>
-          <p:cNvPr id="24" name="Text 22"/>
+            <a:endParaRPr lang="en-US" sz="1000" dirty="0"/>
+          </a:p>
+        </p:txBody>
+      </p:sp>
+      <p:sp>
+        <p:nvSpPr>
+          <p:cNvPr id="29" name="Text 27"/>
           <p:cNvSpPr/>
           <p:nvPr/>
         </p:nvSpPr>
@@ -5904,13 +6044,13 @@
           </a:xfrm>
           <a:prstGeom prst="roundRect">
             <a:avLst>
-              <a:gd name="adj" fmla="val 5455"/>
+              <a:gd name="adj" fmla="val 8727"/>
             </a:avLst>
           </a:prstGeom>
           <a:solidFill>
             <a:srgbClr val="2C2B29"/>
           </a:solidFill>
-          <a:ln w="12700">
+          <a:ln w="19050">
             <a:solidFill>
               <a:srgbClr val="E0DACD"/>
             </a:solidFill>
@@ -5920,14 +6060,89 @@
       </p:sp>
       <p:sp>
         <p:nvSpPr>
-          <p:cNvPr id="5" name="Text 3"/>
-          <p:cNvSpPr/>
-          <p:nvPr/>
-        </p:nvSpPr>
-        <p:spPr>
-          <a:xfrm>
-            <a:off x="589270" y="1915160"/>
-            <a:ext cx="6354912" cy="563880"/>
+          <p:cNvPr id="5" name="Shape 3"/>
+          <p:cNvSpPr/>
+          <p:nvPr/>
+        </p:nvSpPr>
+        <p:spPr>
+          <a:xfrm>
+            <a:off x="543550" y="1887728"/>
+            <a:ext cx="91440" cy="91440"/>
+          </a:xfrm>
+          <a:prstGeom prst="ellipse">
+            <a:avLst/>
+          </a:prstGeom>
+          <a:solidFill>
+            <a:srgbClr val="EF4444"/>
+          </a:solidFill>
+          <a:ln w="12700">
+            <a:solidFill>
+              <a:srgbClr val="EF4444"/>
+            </a:solidFill>
+            <a:prstDash val="solid"/>
+          </a:ln>
+        </p:spPr>
+      </p:sp>
+      <p:sp>
+        <p:nvSpPr>
+          <p:cNvPr id="6" name="Shape 4"/>
+          <p:cNvSpPr/>
+          <p:nvPr/>
+        </p:nvSpPr>
+        <p:spPr>
+          <a:xfrm>
+            <a:off x="680710" y="1887728"/>
+            <a:ext cx="91440" cy="91440"/>
+          </a:xfrm>
+          <a:prstGeom prst="ellipse">
+            <a:avLst/>
+          </a:prstGeom>
+          <a:solidFill>
+            <a:srgbClr val="F59E0B"/>
+          </a:solidFill>
+          <a:ln w="12700">
+            <a:solidFill>
+              <a:srgbClr val="F59E0B"/>
+            </a:solidFill>
+            <a:prstDash val="solid"/>
+          </a:ln>
+        </p:spPr>
+      </p:sp>
+      <p:sp>
+        <p:nvSpPr>
+          <p:cNvPr id="7" name="Shape 5"/>
+          <p:cNvSpPr/>
+          <p:nvPr/>
+        </p:nvSpPr>
+        <p:spPr>
+          <a:xfrm>
+            <a:off x="817870" y="1887728"/>
+            <a:ext cx="91440" cy="91440"/>
+          </a:xfrm>
+          <a:prstGeom prst="ellipse">
+            <a:avLst/>
+          </a:prstGeom>
+          <a:solidFill>
+            <a:srgbClr val="10B981"/>
+          </a:solidFill>
+          <a:ln w="12700">
+            <a:solidFill>
+              <a:srgbClr val="10B981"/>
+            </a:solidFill>
+            <a:prstDash val="solid"/>
+          </a:ln>
+        </p:spPr>
+      </p:sp>
+      <p:sp>
+        <p:nvSpPr>
+          <p:cNvPr id="8" name="Text 6"/>
+          <p:cNvSpPr/>
+          <p:nvPr/>
+        </p:nvSpPr>
+        <p:spPr>
+          <a:xfrm>
+            <a:off x="589270" y="2070608"/>
+            <a:ext cx="6354912" cy="472440"/>
           </a:xfrm>
           <a:prstGeom prst="rect">
             <a:avLst/>
@@ -5943,7 +6158,7 @@
               <a:buNone/>
             </a:pPr>
             <a:r>
-              <a:rPr lang="en-US" sz="1300" dirty="0">
+              <a:rPr lang="en-US" sz="1150" dirty="0">
                 <a:solidFill>
                   <a:srgbClr val="F5F2EB"/>
                 </a:solidFill>
@@ -5953,14 +6168,14 @@
               </a:rPr>
               <a:t>import { YumiaCompiler, createEngine } from '@yumiamd/core';</a:t>
             </a:r>
-            <a:endParaRPr lang="en-US" sz="1300" dirty="0"/>
+            <a:endParaRPr lang="en-US" sz="1150" dirty="0"/>
           </a:p>
           <a:p>
             <a:pPr indent="0" marL="0">
               <a:buNone/>
             </a:pPr>
             <a:r>
-              <a:rPr lang="en-US" sz="1300" dirty="0">
+              <a:rPr lang="en-US" sz="1150" dirty="0">
                 <a:solidFill>
                   <a:srgbClr val="F5F2EB"/>
                 </a:solidFill>
@@ -5970,14 +6185,14 @@
               </a:rPr>
               <a:t>const engine = createEngine({ target: 'multi-target' });</a:t>
             </a:r>
-            <a:endParaRPr lang="en-US" sz="1300" dirty="0"/>
+            <a:endParaRPr lang="en-US" sz="1150" dirty="0"/>
           </a:p>
           <a:p>
             <a:pPr indent="0" marL="0">
               <a:buNone/>
             </a:pPr>
             <a:r>
-              <a:rPr lang="en-US" sz="1300" dirty="0">
+              <a:rPr lang="en-US" sz="1150" dirty="0">
                 <a:solidFill>
                   <a:srgbClr val="F5F2EB"/>
                 </a:solidFill>
@@ -5987,13 +6202,13 @@
               </a:rPr>
               <a:t>const result = await engine.compile('presentation.yumia');</a:t>
             </a:r>
-            <a:endParaRPr lang="en-US" sz="1300" dirty="0"/>
-          </a:p>
-        </p:txBody>
-      </p:sp>
-      <p:sp>
-        <p:nvSpPr>
-          <p:cNvPr id="6" name="Shape 4"/>
+            <a:endParaRPr lang="en-US" sz="1150" dirty="0"/>
+          </a:p>
+        </p:txBody>
+      </p:sp>
+      <p:sp>
+        <p:nvSpPr>
+          <p:cNvPr id="9" name="Shape 7"/>
           <p:cNvSpPr/>
           <p:nvPr/>
         </p:nvSpPr>
@@ -6020,7 +6235,7 @@
       </p:sp>
       <p:sp>
         <p:nvSpPr>
-          <p:cNvPr id="7" name="Text 5"/>
+          <p:cNvPr id="10" name="Text 8"/>
           <p:cNvSpPr/>
           <p:nvPr/>
         </p:nvSpPr>
@@ -6059,7 +6274,7 @@
       </p:sp>
       <p:sp>
         <p:nvSpPr>
-          <p:cNvPr id="8" name="Text 6"/>
+          <p:cNvPr id="11" name="Text 9"/>
           <p:cNvSpPr/>
           <p:nvPr/>
         </p:nvSpPr>
@@ -6098,7 +6313,7 @@
       </p:sp>
       <p:sp>
         <p:nvSpPr>
-          <p:cNvPr id="9" name="Shape 7"/>
+          <p:cNvPr id="12" name="Shape 10"/>
           <p:cNvSpPr/>
           <p:nvPr/>
         </p:nvSpPr>
@@ -6125,7 +6340,7 @@
       </p:sp>
       <p:sp>
         <p:nvSpPr>
-          <p:cNvPr id="10" name="Text 8"/>
+          <p:cNvPr id="13" name="Text 11"/>
           <p:cNvSpPr/>
           <p:nvPr/>
         </p:nvSpPr>
@@ -6164,7 +6379,7 @@
       </p:sp>
       <p:sp>
         <p:nvSpPr>
-          <p:cNvPr id="11" name="Shape 9"/>
+          <p:cNvPr id="14" name="Shape 12"/>
           <p:cNvSpPr/>
           <p:nvPr/>
         </p:nvSpPr>
@@ -6191,7 +6406,7 @@
       </p:sp>
       <p:sp>
         <p:nvSpPr>
-          <p:cNvPr id="12" name="Text 10"/>
+          <p:cNvPr id="15" name="Text 13"/>
           <p:cNvSpPr/>
           <p:nvPr/>
         </p:nvSpPr>
@@ -6230,7 +6445,7 @@
       </p:sp>
       <p:sp>
         <p:nvSpPr>
-          <p:cNvPr id="13" name="Text 11"/>
+          <p:cNvPr id="16" name="Text 14"/>
           <p:cNvSpPr/>
           <p:nvPr/>
         </p:nvSpPr>

--- a/presentation.pptx
+++ b/presentation.pptx
@@ -2071,23 +2071,23 @@
         <p:spPr>
           <a:xfrm>
             <a:off x="406390" y="406400"/>
-            <a:ext cx="11378916" cy="571500"/>
-          </a:xfrm>
-          <a:prstGeom prst="rect">
-            <a:avLst/>
-          </a:prstGeom>
-          <a:noFill/>
-          <a:ln/>
-        </p:spPr>
-        <p:txBody>
-          <a:bodyPr wrap="square" lIns="0" tIns="0" rIns="0" bIns="0" rtlCol="0" anchor="ctr"/>
-          <a:lstStyle/>
-          <a:p>
-            <a:pPr algn="l" indent="0" marL="0">
-              <a:buNone/>
-            </a:pPr>
-            <a:r>
-              <a:rPr lang="en-US" sz="4200" b="1" dirty="0">
+            <a:ext cx="11378916" cy="320040"/>
+          </a:xfrm>
+          <a:prstGeom prst="rect">
+            <a:avLst/>
+          </a:prstGeom>
+          <a:noFill/>
+          <a:ln/>
+        </p:spPr>
+        <p:txBody>
+          <a:bodyPr wrap="square" rtlCol="0" anchor="ctr"/>
+          <a:lstStyle/>
+          <a:p>
+            <a:pPr algn="ctr" indent="0" marL="0">
+              <a:buNone/>
+            </a:pPr>
+            <a:r>
+              <a:rPr lang="en-US" sz="1100" b="1" dirty="0">
                 <a:solidFill>
                   <a:srgbClr val="8B0000"/>
                 </a:solidFill>
@@ -2095,9 +2095,9 @@
                 <a:ea typeface="Georgia" pitchFamily="34" charset="-122"/>
                 <a:cs typeface="Georgia" pitchFamily="34" charset="-120"/>
               </a:rPr>
-              <a:t>Research Overview</a:t>
-            </a:r>
-            <a:endParaRPr lang="en-US" sz="4200" dirty="0"/>
+              <a:t>COMPUTER SCIENCE &amp; SYSTEMS LAB</a:t>
+            </a:r>
+            <a:endParaRPr lang="en-US" sz="1100" dirty="0"/>
           </a:p>
         </p:txBody>
       </p:sp>
@@ -2109,8 +2109,8 @@
         </p:nvSpPr>
         <p:spPr>
           <a:xfrm>
-            <a:off x="406390" y="1155700"/>
-            <a:ext cx="11378916" cy="320040"/>
+            <a:off x="406390" y="790448"/>
+            <a:ext cx="11378916" cy="640080"/>
           </a:xfrm>
           <a:prstGeom prst="rect">
             <a:avLst/>
@@ -2126,17 +2126,17 @@
               <a:buNone/>
             </a:pPr>
             <a:r>
-              <a:rPr lang="en-US" sz="1100" b="1" dirty="0">
-                <a:solidFill>
-                  <a:srgbClr val="8B0000"/>
+              <a:rPr lang="en-US" sz="3300" b="1" dirty="0">
+                <a:solidFill>
+                  <a:srgbClr val="2C2B29"/>
                 </a:solidFill>
                 <a:latin typeface="Georgia" pitchFamily="34" charset="0"/>
                 <a:ea typeface="Georgia" pitchFamily="34" charset="-122"/>
                 <a:cs typeface="Georgia" pitchFamily="34" charset="-120"/>
               </a:rPr>
-              <a:t>COMPUTER SCIENCE &amp; SYSTEMS LAB</a:t>
-            </a:r>
-            <a:endParaRPr lang="en-US" sz="1100" dirty="0"/>
+              <a:t>Quantum Neural Architecture</a:t>
+            </a:r>
+            <a:endParaRPr lang="en-US" sz="3300" dirty="0"/>
           </a:p>
         </p:txBody>
       </p:sp>
@@ -2148,8 +2148,8 @@
         </p:nvSpPr>
         <p:spPr>
           <a:xfrm>
-            <a:off x="406390" y="1521460"/>
-            <a:ext cx="11378916" cy="822960"/>
+            <a:off x="406390" y="1503680"/>
+            <a:ext cx="11378916" cy="640080"/>
           </a:xfrm>
           <a:prstGeom prst="rect">
             <a:avLst/>
@@ -2165,53 +2165,14 @@
               <a:buNone/>
             </a:pPr>
             <a:r>
-              <a:rPr lang="en-US" sz="3200" b="1" dirty="0">
-                <a:solidFill>
-                  <a:srgbClr val="2C2B29"/>
+              <a:rPr lang="en-US" sz="1600" dirty="0">
+                <a:solidFill>
+                  <a:srgbClr val="6B6862"/>
                 </a:solidFill>
                 <a:latin typeface="Georgia" pitchFamily="34" charset="0"/>
                 <a:ea typeface="Georgia" pitchFamily="34" charset="-122"/>
                 <a:cs typeface="Georgia" pitchFamily="34" charset="-120"/>
               </a:rPr>
-              <a:t>Quantum Neural Architecture</a:t>
-            </a:r>
-            <a:endParaRPr lang="en-US" sz="3200" dirty="0"/>
-          </a:p>
-        </p:txBody>
-      </p:sp>
-      <p:sp>
-        <p:nvSpPr>
-          <p:cNvPr id="5" name="Text 3"/>
-          <p:cNvSpPr/>
-          <p:nvPr/>
-        </p:nvSpPr>
-        <p:spPr>
-          <a:xfrm>
-            <a:off x="406390" y="2390140"/>
-            <a:ext cx="11378916" cy="548640"/>
-          </a:xfrm>
-          <a:prstGeom prst="rect">
-            <a:avLst/>
-          </a:prstGeom>
-          <a:noFill/>
-          <a:ln/>
-        </p:spPr>
-        <p:txBody>
-          <a:bodyPr wrap="square" rtlCol="0" anchor="ctr"/>
-          <a:lstStyle/>
-          <a:p>
-            <a:pPr algn="ctr" indent="0" marL="0">
-              <a:buNone/>
-            </a:pPr>
-            <a:r>
-              <a:rPr lang="en-US" sz="1600" dirty="0">
-                <a:solidFill>
-                  <a:srgbClr val="6B6862"/>
-                </a:solidFill>
-                <a:latin typeface="Georgia" pitchFamily="34" charset="0"/>
-                <a:ea typeface="Georgia" pitchFamily="34" charset="-122"/>
-                <a:cs typeface="Georgia" pitchFamily="34" charset="-120"/>
-              </a:rPr>
               <a:t>Formal Specification of Hybrid Classical-Quantum Distributed Ingestion &amp; Vector Processing Pipelines</a:t>
             </a:r>
             <a:endParaRPr lang="en-US" sz="1600" dirty="0"/>
@@ -2220,14 +2181,14 @@
       </p:sp>
       <p:sp>
         <p:nvSpPr>
-          <p:cNvPr id="6" name="Shape 4"/>
-          <p:cNvSpPr/>
-          <p:nvPr/>
-        </p:nvSpPr>
-        <p:spPr>
-          <a:xfrm>
-            <a:off x="406390" y="2508250"/>
-            <a:ext cx="2286000" cy="285750"/>
+          <p:cNvPr id="5" name="Shape 3"/>
+          <p:cNvSpPr/>
+          <p:nvPr/>
+        </p:nvSpPr>
+        <p:spPr>
+          <a:xfrm>
+            <a:off x="4495648" y="1943100"/>
+            <a:ext cx="3200400" cy="285750"/>
           </a:xfrm>
           <a:prstGeom prst="roundRect">
             <a:avLst>
@@ -2247,14 +2208,14 @@
       </p:sp>
       <p:sp>
         <p:nvSpPr>
-          <p:cNvPr id="7" name="Text 5"/>
-          <p:cNvSpPr/>
-          <p:nvPr/>
-        </p:nvSpPr>
-        <p:spPr>
-          <a:xfrm>
-            <a:off x="406390" y="2508250"/>
-            <a:ext cx="2286000" cy="285750"/>
+          <p:cNvPr id="6" name="Text 4"/>
+          <p:cNvSpPr/>
+          <p:nvPr/>
+        </p:nvSpPr>
+        <p:spPr>
+          <a:xfrm>
+            <a:off x="4495648" y="1943100"/>
+            <a:ext cx="3200400" cy="285750"/>
           </a:xfrm>
           <a:prstGeom prst="rect">
             <a:avLst/>
@@ -2286,7 +2247,7 @@
       </p:sp>
       <p:sp>
         <p:nvSpPr>
-          <p:cNvPr id="8" name="Text 6"/>
+          <p:cNvPr id="7" name="Text 5"/>
           <p:cNvSpPr/>
           <p:nvPr/>
         </p:nvSpPr>
@@ -2442,11 +2403,11 @@
         <p:spPr>
           <a:xfrm>
             <a:off x="406390" y="1750060"/>
-            <a:ext cx="5552298" cy="308864"/>
+            <a:ext cx="5552298" cy="448395"/>
           </a:xfrm>
           <a:prstGeom prst="roundRect">
             <a:avLst>
-              <a:gd name="adj" fmla="val 23684"/>
+              <a:gd name="adj" fmla="val 16314"/>
             </a:avLst>
           </a:prstGeom>
           <a:solidFill>
@@ -2468,7 +2429,7 @@
         </p:nvSpPr>
         <p:spPr>
           <a:xfrm>
-            <a:off x="516118" y="1739900"/>
+            <a:off x="516118" y="1809665"/>
             <a:ext cx="329184" cy="329184"/>
           </a:xfrm>
           <a:prstGeom prst="roundRect">
@@ -2490,7 +2451,7 @@
         </p:nvSpPr>
         <p:spPr>
           <a:xfrm>
-            <a:off x="516118" y="1739900"/>
+            <a:off x="516118" y="1809665"/>
             <a:ext cx="329184" cy="329184"/>
           </a:xfrm>
           <a:prstGeom prst="rect">
@@ -2515,7 +2476,7 @@
                 <a:ea typeface="Georgia" pitchFamily="34" charset="-122"/>
                 <a:cs typeface="Georgia" pitchFamily="34" charset="-120"/>
               </a:rPr>
-              <a:t>1</a:t>
+              <a:t>2</a:t>
             </a:r>
             <a:endParaRPr lang="en-US" sz="1100" dirty="0"/>
           </a:p>
@@ -2530,7 +2491,7 @@
         <p:spPr>
           <a:xfrm>
             <a:off x="909310" y="1804924"/>
-            <a:ext cx="4957938" cy="199136"/>
+            <a:ext cx="4957938" cy="338667"/>
           </a:xfrm>
           <a:prstGeom prst="rect">
             <a:avLst/>
@@ -2554,7 +2515,7 @@
                 <a:ea typeface="Georgia" pitchFamily="34" charset="-122"/>
                 <a:cs typeface="Georgia" pitchFamily="34" charset="-120"/>
               </a:rPr>
-              <a:t>Research Overview</a:t>
+              <a:t>Agenda &amp; Table of Contents</a:t>
             </a:r>
             <a:endParaRPr lang="en-US" sz="1300" dirty="0"/>
           </a:p>
@@ -2569,11 +2530,11 @@
         <p:spPr>
           <a:xfrm>
             <a:off x="6233008" y="1750060"/>
-            <a:ext cx="5552298" cy="308864"/>
+            <a:ext cx="5552298" cy="448395"/>
           </a:xfrm>
           <a:prstGeom prst="roundRect">
             <a:avLst>
-              <a:gd name="adj" fmla="val 23684"/>
+              <a:gd name="adj" fmla="val 16314"/>
             </a:avLst>
           </a:prstGeom>
           <a:solidFill>
@@ -2595,7 +2556,7 @@
         </p:nvSpPr>
         <p:spPr>
           <a:xfrm>
-            <a:off x="6342736" y="1739900"/>
+            <a:off x="6342736" y="1809665"/>
             <a:ext cx="329184" cy="329184"/>
           </a:xfrm>
           <a:prstGeom prst="roundRect">
@@ -2617,7 +2578,7 @@
         </p:nvSpPr>
         <p:spPr>
           <a:xfrm>
-            <a:off x="6342736" y="1739900"/>
+            <a:off x="6342736" y="1809665"/>
             <a:ext cx="329184" cy="329184"/>
           </a:xfrm>
           <a:prstGeom prst="rect">
@@ -2642,7 +2603,7 @@
                 <a:ea typeface="Georgia" pitchFamily="34" charset="-122"/>
                 <a:cs typeface="Georgia" pitchFamily="34" charset="-120"/>
               </a:rPr>
-              <a:t>2</a:t>
+              <a:t>3</a:t>
             </a:r>
             <a:endParaRPr lang="en-US" sz="1100" dirty="0"/>
           </a:p>
@@ -2657,7 +2618,7 @@
         <p:spPr>
           <a:xfrm>
             <a:off x="6735928" y="1804924"/>
-            <a:ext cx="4957938" cy="199136"/>
+            <a:ext cx="4957938" cy="338667"/>
           </a:xfrm>
           <a:prstGeom prst="rect">
             <a:avLst/>
@@ -2681,7 +2642,7 @@
                 <a:ea typeface="Georgia" pitchFamily="34" charset="-122"/>
                 <a:cs typeface="Georgia" pitchFamily="34" charset="-120"/>
               </a:rPr>
-              <a:t>Agenda &amp; Table of Contents</a:t>
+              <a:t>System Topology &amp; Neural Dispatch</a:t>
             </a:r>
             <a:endParaRPr lang="en-US" sz="1300" dirty="0"/>
           </a:p>
@@ -2695,12 +2656,12 @@
         </p:nvSpPr>
         <p:spPr>
           <a:xfrm>
-            <a:off x="406390" y="2168652"/>
-            <a:ext cx="5552298" cy="308864"/>
+            <a:off x="406390" y="2308183"/>
+            <a:ext cx="5552298" cy="448395"/>
           </a:xfrm>
           <a:prstGeom prst="roundRect">
             <a:avLst>
-              <a:gd name="adj" fmla="val 23684"/>
+              <a:gd name="adj" fmla="val 16314"/>
             </a:avLst>
           </a:prstGeom>
           <a:solidFill>
@@ -2722,7 +2683,7 @@
         </p:nvSpPr>
         <p:spPr>
           <a:xfrm>
-            <a:off x="516118" y="2158492"/>
+            <a:off x="516118" y="2367788"/>
             <a:ext cx="329184" cy="329184"/>
           </a:xfrm>
           <a:prstGeom prst="roundRect">
@@ -2744,7 +2705,7 @@
         </p:nvSpPr>
         <p:spPr>
           <a:xfrm>
-            <a:off x="516118" y="2158492"/>
+            <a:off x="516118" y="2367788"/>
             <a:ext cx="329184" cy="329184"/>
           </a:xfrm>
           <a:prstGeom prst="rect">
@@ -2769,7 +2730,7 @@
                 <a:ea typeface="Georgia" pitchFamily="34" charset="-122"/>
                 <a:cs typeface="Georgia" pitchFamily="34" charset="-120"/>
               </a:rPr>
-              <a:t>3</a:t>
+              <a:t>4</a:t>
             </a:r>
             <a:endParaRPr lang="en-US" sz="1100" dirty="0"/>
           </a:p>
@@ -2783,8 +2744,8 @@
         </p:nvSpPr>
         <p:spPr>
           <a:xfrm>
-            <a:off x="909310" y="2223516"/>
-            <a:ext cx="4957938" cy="199136"/>
+            <a:off x="909310" y="2363047"/>
+            <a:ext cx="4957938" cy="338667"/>
           </a:xfrm>
           <a:prstGeom prst="rect">
             <a:avLst/>
@@ -2808,7 +2769,7 @@
                 <a:ea typeface="Georgia" pitchFamily="34" charset="-122"/>
                 <a:cs typeface="Georgia" pitchFamily="34" charset="-120"/>
               </a:rPr>
-              <a:t>System Topology &amp; Neural Dispatch</a:t>
+              <a:t>Empirical Performance Evaluation</a:t>
             </a:r>
             <a:endParaRPr lang="en-US" sz="1300" dirty="0"/>
           </a:p>
@@ -2822,12 +2783,12 @@
         </p:nvSpPr>
         <p:spPr>
           <a:xfrm>
-            <a:off x="6233008" y="2168652"/>
-            <a:ext cx="5552298" cy="308864"/>
+            <a:off x="6233008" y="2308183"/>
+            <a:ext cx="5552298" cy="448395"/>
           </a:xfrm>
           <a:prstGeom prst="roundRect">
             <a:avLst>
-              <a:gd name="adj" fmla="val 23684"/>
+              <a:gd name="adj" fmla="val 16314"/>
             </a:avLst>
           </a:prstGeom>
           <a:solidFill>
@@ -2849,7 +2810,7 @@
         </p:nvSpPr>
         <p:spPr>
           <a:xfrm>
-            <a:off x="6342736" y="2158492"/>
+            <a:off x="6342736" y="2367788"/>
             <a:ext cx="329184" cy="329184"/>
           </a:xfrm>
           <a:prstGeom prst="roundRect">
@@ -2871,7 +2832,7 @@
         </p:nvSpPr>
         <p:spPr>
           <a:xfrm>
-            <a:off x="6342736" y="2158492"/>
+            <a:off x="6342736" y="2367788"/>
             <a:ext cx="329184" cy="329184"/>
           </a:xfrm>
           <a:prstGeom prst="rect">
@@ -2896,7 +2857,7 @@
                 <a:ea typeface="Georgia" pitchFamily="34" charset="-122"/>
                 <a:cs typeface="Georgia" pitchFamily="34" charset="-120"/>
               </a:rPr>
-              <a:t>4</a:t>
+              <a:t>5</a:t>
             </a:r>
             <a:endParaRPr lang="en-US" sz="1100" dirty="0"/>
           </a:p>
@@ -2910,8 +2871,8 @@
         </p:nvSpPr>
         <p:spPr>
           <a:xfrm>
-            <a:off x="6735928" y="2223516"/>
-            <a:ext cx="4957938" cy="199136"/>
+            <a:off x="6735928" y="2363047"/>
+            <a:ext cx="4957938" cy="338667"/>
           </a:xfrm>
           <a:prstGeom prst="rect">
             <a:avLst/>
@@ -2935,7 +2896,7 @@
                 <a:ea typeface="Georgia" pitchFamily="34" charset="-122"/>
                 <a:cs typeface="Georgia" pitchFamily="34" charset="-120"/>
               </a:rPr>
-              <a:t>Empirical Performance Evaluation</a:t>
+              <a:t>Comparative Analysis &amp; Mathematical Model</a:t>
             </a:r>
             <a:endParaRPr lang="en-US" sz="1300" dirty="0"/>
           </a:p>
@@ -2949,12 +2910,12 @@
         </p:nvSpPr>
         <p:spPr>
           <a:xfrm>
-            <a:off x="406390" y="2587244"/>
-            <a:ext cx="5552298" cy="308864"/>
+            <a:off x="406390" y="2866305"/>
+            <a:ext cx="5552298" cy="448395"/>
           </a:xfrm>
           <a:prstGeom prst="roundRect">
             <a:avLst>
-              <a:gd name="adj" fmla="val 23684"/>
+              <a:gd name="adj" fmla="val 16314"/>
             </a:avLst>
           </a:prstGeom>
           <a:solidFill>
@@ -2976,7 +2937,7 @@
         </p:nvSpPr>
         <p:spPr>
           <a:xfrm>
-            <a:off x="516118" y="2577084"/>
+            <a:off x="516118" y="2925911"/>
             <a:ext cx="329184" cy="329184"/>
           </a:xfrm>
           <a:prstGeom prst="roundRect">
@@ -2998,7 +2959,7 @@
         </p:nvSpPr>
         <p:spPr>
           <a:xfrm>
-            <a:off x="516118" y="2577084"/>
+            <a:off x="516118" y="2925911"/>
             <a:ext cx="329184" cy="329184"/>
           </a:xfrm>
           <a:prstGeom prst="rect">
@@ -3023,7 +2984,7 @@
                 <a:ea typeface="Georgia" pitchFamily="34" charset="-122"/>
                 <a:cs typeface="Georgia" pitchFamily="34" charset="-120"/>
               </a:rPr>
-              <a:t>5</a:t>
+              <a:t>6</a:t>
             </a:r>
             <a:endParaRPr lang="en-US" sz="1100" dirty="0"/>
           </a:p>
@@ -3037,8 +2998,8 @@
         </p:nvSpPr>
         <p:spPr>
           <a:xfrm>
-            <a:off x="909310" y="2642108"/>
-            <a:ext cx="4957938" cy="199136"/>
+            <a:off x="909310" y="2921169"/>
+            <a:ext cx="4957938" cy="338667"/>
           </a:xfrm>
           <a:prstGeom prst="rect">
             <a:avLst/>
@@ -3062,7 +3023,7 @@
                 <a:ea typeface="Georgia" pitchFamily="34" charset="-122"/>
                 <a:cs typeface="Georgia" pitchFamily="34" charset="-120"/>
               </a:rPr>
-              <a:t>Comparative Analysis &amp; Mathematical Model</a:t>
+              <a:t>Cluster Analytics &amp; Telemetry</a:t>
             </a:r>
             <a:endParaRPr lang="en-US" sz="1300" dirty="0"/>
           </a:p>
@@ -3076,12 +3037,12 @@
         </p:nvSpPr>
         <p:spPr>
           <a:xfrm>
-            <a:off x="6233008" y="2587244"/>
-            <a:ext cx="5552298" cy="308864"/>
+            <a:off x="6233008" y="2866305"/>
+            <a:ext cx="5552298" cy="448395"/>
           </a:xfrm>
           <a:prstGeom prst="roundRect">
             <a:avLst>
-              <a:gd name="adj" fmla="val 23684"/>
+              <a:gd name="adj" fmla="val 16314"/>
             </a:avLst>
           </a:prstGeom>
           <a:solidFill>
@@ -3103,7 +3064,7 @@
         </p:nvSpPr>
         <p:spPr>
           <a:xfrm>
-            <a:off x="6342736" y="2577084"/>
+            <a:off x="6342736" y="2925911"/>
             <a:ext cx="329184" cy="329184"/>
           </a:xfrm>
           <a:prstGeom prst="roundRect">
@@ -3125,7 +3086,7 @@
         </p:nvSpPr>
         <p:spPr>
           <a:xfrm>
-            <a:off x="6342736" y="2577084"/>
+            <a:off x="6342736" y="2925911"/>
             <a:ext cx="329184" cy="329184"/>
           </a:xfrm>
           <a:prstGeom prst="rect">
@@ -3150,7 +3111,7 @@
                 <a:ea typeface="Georgia" pitchFamily="34" charset="-122"/>
                 <a:cs typeface="Georgia" pitchFamily="34" charset="-120"/>
               </a:rPr>
-              <a:t>6</a:t>
+              <a:t>7</a:t>
             </a:r>
             <a:endParaRPr lang="en-US" sz="1100" dirty="0"/>
           </a:p>
@@ -3164,8 +3125,8 @@
         </p:nvSpPr>
         <p:spPr>
           <a:xfrm>
-            <a:off x="6735928" y="2642108"/>
-            <a:ext cx="4957938" cy="199136"/>
+            <a:off x="6735928" y="2921169"/>
+            <a:ext cx="4957938" cy="338667"/>
           </a:xfrm>
           <a:prstGeom prst="rect">
             <a:avLst/>
@@ -3189,7 +3150,7 @@
                 <a:ea typeface="Georgia" pitchFamily="34" charset="-122"/>
                 <a:cs typeface="Georgia" pitchFamily="34" charset="-120"/>
               </a:rPr>
-              <a:t>Cluster Analytics &amp; Telemetry</a:t>
+              <a:t>Implementation &amp; Runtime Kernel</a:t>
             </a:r>
             <a:endParaRPr lang="en-US" sz="1300" dirty="0"/>
           </a:p>
@@ -3197,134 +3158,7 @@
       </p:sp>
       <p:sp>
         <p:nvSpPr>
-          <p:cNvPr id="28" name="Shape 26"/>
-          <p:cNvSpPr/>
-          <p:nvPr/>
-        </p:nvSpPr>
-        <p:spPr>
-          <a:xfrm>
-            <a:off x="406390" y="3005836"/>
-            <a:ext cx="5552298" cy="308864"/>
-          </a:xfrm>
-          <a:prstGeom prst="roundRect">
-            <a:avLst>
-              <a:gd name="adj" fmla="val 23684"/>
-            </a:avLst>
-          </a:prstGeom>
-          <a:solidFill>
-            <a:srgbClr val="F5F2EB"/>
-          </a:solidFill>
-          <a:ln w="12700">
-            <a:solidFill>
-              <a:srgbClr val="E0DACD"/>
-            </a:solidFill>
-            <a:prstDash val="solid"/>
-          </a:ln>
-        </p:spPr>
-      </p:sp>
-      <p:sp>
-        <p:nvSpPr>
-          <p:cNvPr id="29" name="Shape 27"/>
-          <p:cNvSpPr/>
-          <p:nvPr/>
-        </p:nvSpPr>
-        <p:spPr>
-          <a:xfrm>
-            <a:off x="516118" y="2995676"/>
-            <a:ext cx="329184" cy="329184"/>
-          </a:xfrm>
-          <a:prstGeom prst="roundRect">
-            <a:avLst>
-              <a:gd name="adj" fmla="val 22222"/>
-            </a:avLst>
-          </a:prstGeom>
-          <a:solidFill>
-            <a:srgbClr val="8B0000"/>
-          </a:solidFill>
-          <a:ln/>
-        </p:spPr>
-      </p:sp>
-      <p:sp>
-        <p:nvSpPr>
-          <p:cNvPr id="30" name="Text 28"/>
-          <p:cNvSpPr/>
-          <p:nvPr/>
-        </p:nvSpPr>
-        <p:spPr>
-          <a:xfrm>
-            <a:off x="516118" y="2995676"/>
-            <a:ext cx="329184" cy="329184"/>
-          </a:xfrm>
-          <a:prstGeom prst="rect">
-            <a:avLst/>
-          </a:prstGeom>
-          <a:noFill/>
-          <a:ln/>
-        </p:spPr>
-        <p:txBody>
-          <a:bodyPr wrap="square" rtlCol="0" anchor="ctr"/>
-          <a:lstStyle/>
-          <a:p>
-            <a:pPr algn="ctr" indent="0" marL="0">
-              <a:buNone/>
-            </a:pPr>
-            <a:r>
-              <a:rPr lang="en-US" sz="1100" b="1" dirty="0">
-                <a:solidFill>
-                  <a:srgbClr val="000000"/>
-                </a:solidFill>
-                <a:latin typeface="Georgia" pitchFamily="34" charset="0"/>
-                <a:ea typeface="Georgia" pitchFamily="34" charset="-122"/>
-                <a:cs typeface="Georgia" pitchFamily="34" charset="-120"/>
-              </a:rPr>
-              <a:t>7</a:t>
-            </a:r>
-            <a:endParaRPr lang="en-US" sz="1100" dirty="0"/>
-          </a:p>
-        </p:txBody>
-      </p:sp>
-      <p:sp>
-        <p:nvSpPr>
-          <p:cNvPr id="31" name="Text 29"/>
-          <p:cNvSpPr/>
-          <p:nvPr/>
-        </p:nvSpPr>
-        <p:spPr>
-          <a:xfrm>
-            <a:off x="909310" y="3060700"/>
-            <a:ext cx="4957938" cy="199136"/>
-          </a:xfrm>
-          <a:prstGeom prst="rect">
-            <a:avLst/>
-          </a:prstGeom>
-          <a:noFill/>
-          <a:ln/>
-        </p:spPr>
-        <p:txBody>
-          <a:bodyPr wrap="square" lIns="0" tIns="0" rIns="0" bIns="0" rtlCol="0" anchor="ctr"/>
-          <a:lstStyle/>
-          <a:p>
-            <a:pPr indent="0" marL="0">
-              <a:buNone/>
-            </a:pPr>
-            <a:r>
-              <a:rPr lang="en-US" sz="1300" b="1" dirty="0">
-                <a:solidFill>
-                  <a:srgbClr val="2C2B29"/>
-                </a:solidFill>
-                <a:latin typeface="Georgia" pitchFamily="34" charset="0"/>
-                <a:ea typeface="Georgia" pitchFamily="34" charset="-122"/>
-                <a:cs typeface="Georgia" pitchFamily="34" charset="-120"/>
-              </a:rPr>
-              <a:t>Implementation &amp; Runtime Kernel</a:t>
-            </a:r>
-            <a:endParaRPr lang="en-US" sz="1300" dirty="0"/>
-          </a:p>
-        </p:txBody>
-      </p:sp>
-      <p:sp>
-        <p:nvSpPr>
-          <p:cNvPr id="32" name="Text 30"/>
+          <p:cNvPr id="28" name="Text 26"/>
           <p:cNvSpPr/>
           <p:nvPr/>
         </p:nvSpPr>
@@ -5198,8 +5032,8 @@
         </p:nvSpPr>
         <p:spPr>
           <a:xfrm>
-            <a:off x="558786" y="2216150"/>
-            <a:ext cx="2286000" cy="285750"/>
+            <a:off x="1876218" y="2216150"/>
+            <a:ext cx="2660904" cy="285750"/>
           </a:xfrm>
           <a:prstGeom prst="roundRect">
             <a:avLst>
@@ -5225,8 +5059,8 @@
         </p:nvSpPr>
         <p:spPr>
           <a:xfrm>
-            <a:off x="558786" y="2216150"/>
-            <a:ext cx="2286000" cy="285750"/>
+            <a:off x="1876218" y="2216150"/>
+            <a:ext cx="2660904" cy="285750"/>
           </a:xfrm>
           <a:prstGeom prst="rect">
             <a:avLst/>
@@ -5408,8 +5242,8 @@
         </p:nvSpPr>
         <p:spPr>
           <a:xfrm>
-            <a:off x="6337142" y="2216150"/>
-            <a:ext cx="2286000" cy="285750"/>
+            <a:off x="7553989" y="2216150"/>
+            <a:ext cx="2862072" cy="285750"/>
           </a:xfrm>
           <a:prstGeom prst="roundRect">
             <a:avLst>
@@ -5435,8 +5269,8 @@
         </p:nvSpPr>
         <p:spPr>
           <a:xfrm>
-            <a:off x="6337142" y="2216150"/>
-            <a:ext cx="2286000" cy="285750"/>
+            <a:off x="7553989" y="2216150"/>
+            <a:ext cx="2862072" cy="285750"/>
           </a:xfrm>
           <a:prstGeom prst="rect">
             <a:avLst/>
@@ -6319,8 +6153,8 @@
         </p:nvSpPr>
         <p:spPr>
           <a:xfrm>
-            <a:off x="7304857" y="2787650"/>
-            <a:ext cx="2011680" cy="285750"/>
+            <a:off x="8516381" y="2787650"/>
+            <a:ext cx="2057400" cy="285750"/>
           </a:xfrm>
           <a:prstGeom prst="roundRect">
             <a:avLst>
@@ -6346,8 +6180,8 @@
         </p:nvSpPr>
         <p:spPr>
           <a:xfrm>
-            <a:off x="7304857" y="2787650"/>
-            <a:ext cx="2011680" cy="285750"/>
+            <a:off x="8516381" y="2787650"/>
+            <a:ext cx="2057400" cy="285750"/>
           </a:xfrm>
           <a:prstGeom prst="rect">
             <a:avLst/>
@@ -6385,8 +6219,8 @@
         </p:nvSpPr>
         <p:spPr>
           <a:xfrm>
-            <a:off x="7304857" y="3251200"/>
-            <a:ext cx="2231136" cy="285750"/>
+            <a:off x="8415797" y="3251200"/>
+            <a:ext cx="2258568" cy="285750"/>
           </a:xfrm>
           <a:prstGeom prst="roundRect">
             <a:avLst>
@@ -6412,8 +6246,8 @@
         </p:nvSpPr>
         <p:spPr>
           <a:xfrm>
-            <a:off x="7304857" y="3251200"/>
-            <a:ext cx="2231136" cy="285750"/>
+            <a:off x="8415797" y="3251200"/>
+            <a:ext cx="2258568" cy="285750"/>
           </a:xfrm>
           <a:prstGeom prst="rect">
             <a:avLst/>

--- a/presentation.pptx
+++ b/presentation.pptx
@@ -12,9 +12,12 @@
     <p:sldId id="260" r:id="rId6"/>
     <p:sldId id="261" r:id="rId7"/>
     <p:sldId id="262" r:id="rId8"/>
+    <p:sldId id="263" r:id="rId9"/>
+    <p:sldId id="264" r:id="rId10"/>
+    <p:sldId id="265" r:id="rId11"/>
   </p:sldIdLst>
   <p:notesMasterIdLst>
-    <p:notesMasterId r:id="rId9"/>
+    <p:notesMasterId r:id="rId12"/>
   </p:notesMasterIdLst>
   <p:sldSz cx="12191695" cy="6858000"/>
   <p:notesSz cx="6858000" cy="12191695"/>
@@ -766,6 +769,408 @@
 </c:chartSpace>
 </file>
 
+<file path=ppt/charts/chart3.xml><?xml version="1.0" encoding="utf-8"?>
+<c:chartSpace xmlns:c="http://schemas.openxmlformats.org/drawingml/2006/chart" xmlns:a="http://schemas.openxmlformats.org/drawingml/2006/main" xmlns:r="http://schemas.openxmlformats.org/officeDocument/2006/relationships">
+  <c:date1904 val="0"/>
+  <c:roundedCorners val="1"/>
+  <c:chart>
+    <c:title>
+      <c:tx>
+        <c:rich>
+          <a:bodyPr/>
+          <a:lstStyle/>
+          <a:p>
+            <a:pPr>
+              <a:defRPr sz="1800" b="0" i="0" u="none" strike="noStrike">
+                <a:solidFill>
+                  <a:srgbClr val="2C2B29"/>
+                </a:solidFill>
+                <a:latin typeface="Georgia"/>
+              </a:defRPr>
+            </a:pPr>
+            <a:r>
+              <a:rPr sz="1800" b="0" i="0" u="none" strike="noStrike">
+                <a:solidFill>
+                  <a:srgbClr val="2C2B29"/>
+                </a:solidFill>
+                <a:latin typeface="Georgia"/>
+              </a:rPr>
+              <a:t>Bandwidth Ingestion (GB/s)</a:t>
+            </a:r>
+          </a:p>
+        </c:rich>
+      </c:tx>
+      <c:layout/>
+      <c:overlay val="0"/>
+    </c:title>
+    <c:autoTitleDeleted val="0"/>
+    <c:plotArea>
+      <c:layout/>
+      <c:areaChart>
+        <c:varyColors val="0"/>
+        <c:ser>
+          <c:idx val="0"/>
+          <c:order val="0"/>
+          <c:tx>
+            <c:strRef>
+              <c:f>Sheet1!$B$1</c:f>
+              <c:strCache>
+                <c:ptCount val="1"/>
+                <c:pt idx="0">
+                  <c:v>Ingress</c:v>
+                </c:pt>
+              </c:strCache>
+            </c:strRef>
+          </c:tx>
+          <c:spPr>
+            <a:solidFill>
+              <a:srgbClr val="8B0000"/>
+            </a:solidFill>
+            <a:effectLst/>
+          </c:spPr>
+          <c:invertIfNegative val="0"/>
+          <c:dLbls>
+            <c:numFmt formatCode="#,##0" sourceLinked="0"/>
+            <c:txPr>
+              <a:bodyPr/>
+              <a:lstStyle/>
+              <a:p>
+                <a:pPr>
+                  <a:defRPr b="0" i="0" strike="noStrike" sz="1200" u="none">
+                    <a:solidFill>
+                      <a:srgbClr val="000000"/>
+                    </a:solidFill>
+                    <a:latin typeface="Arial"/>
+                  </a:defRPr>
+                </a:pPr>
+              </a:p>
+            </c:txPr>
+            <c:showLegendKey val="0"/>
+            <c:showVal val="0"/>
+            <c:showCatName val="0"/>
+            <c:showSerName val="0"/>
+            <c:showPercent val="0"/>
+            <c:showBubbleSize val="0"/>
+            <c:showLeaderLines val="0"/>
+          </c:dLbls>
+          <c:cat>
+            <c:multiLvlStrRef>
+              <c:f>Sheet1!$A$2:$A$7</c:f>
+              <c:multiLvlStrCache>
+                <c:ptCount val="6"/>
+                <c:lvl>
+                  <c:pt idx="0">
+                    <c:v>00:00</c:v>
+                  </c:pt>
+                  <c:pt idx="1">
+                    <c:v>04:00</c:v>
+                  </c:pt>
+                  <c:pt idx="2">
+                    <c:v>08:00</c:v>
+                  </c:pt>
+                  <c:pt idx="3">
+                    <c:v>12:00</c:v>
+                  </c:pt>
+                  <c:pt idx="4">
+                    <c:v>16:00</c:v>
+                  </c:pt>
+                  <c:pt idx="5">
+                    <c:v>20:00</c:v>
+                  </c:pt>
+                </c:lvl>
+              </c:multiLvlStrCache>
+            </c:multiLvlStrRef>
+          </c:cat>
+          <c:val>
+            <c:numRef>
+              <c:f>Sheet1!$B$2:$B$7</c:f>
+              <c:numCache>
+                <c:formatCode>General</c:formatCode>
+                <c:ptCount val="6"/>
+                <c:pt idx="0">
+                  <c:v>14</c:v>
+                </c:pt>
+                <c:pt idx="1">
+                  <c:v>22</c:v>
+                </c:pt>
+                <c:pt idx="2">
+                  <c:v>58</c:v>
+                </c:pt>
+                <c:pt idx="3">
+                  <c:v>92</c:v>
+                </c:pt>
+                <c:pt idx="4">
+                  <c:v>74</c:v>
+                </c:pt>
+                <c:pt idx="5">
+                  <c:v>38</c:v>
+                </c:pt>
+              </c:numCache>
+            </c:numRef>
+          </c:val>
+        </c:ser>
+        <c:ser>
+          <c:idx val="1"/>
+          <c:order val="1"/>
+          <c:tx>
+            <c:strRef>
+              <c:f>Sheet1!$C$1</c:f>
+              <c:strCache>
+                <c:ptCount val="1"/>
+                <c:pt idx="0">
+                  <c:v>Egress</c:v>
+                </c:pt>
+              </c:strCache>
+            </c:strRef>
+          </c:tx>
+          <c:spPr>
+            <a:solidFill>
+              <a:srgbClr val="C29B38"/>
+            </a:solidFill>
+            <a:effectLst/>
+          </c:spPr>
+          <c:invertIfNegative val="0"/>
+          <c:dLbls>
+            <c:numFmt formatCode="#,##0" sourceLinked="0"/>
+            <c:txPr>
+              <a:bodyPr/>
+              <a:lstStyle/>
+              <a:p>
+                <a:pPr>
+                  <a:defRPr b="0" i="0" strike="noStrike" sz="1200" u="none">
+                    <a:solidFill>
+                      <a:srgbClr val="000000"/>
+                    </a:solidFill>
+                    <a:latin typeface="Arial"/>
+                  </a:defRPr>
+                </a:pPr>
+              </a:p>
+            </c:txPr>
+            <c:showLegendKey val="0"/>
+            <c:showVal val="0"/>
+            <c:showCatName val="0"/>
+            <c:showSerName val="0"/>
+            <c:showPercent val="0"/>
+            <c:showBubbleSize val="0"/>
+            <c:showLeaderLines val="0"/>
+          </c:dLbls>
+          <c:cat>
+            <c:multiLvlStrRef>
+              <c:f>Sheet1!$A$2:$A$7</c:f>
+              <c:multiLvlStrCache>
+                <c:ptCount val="6"/>
+                <c:lvl>
+                  <c:pt idx="0">
+                    <c:v>00:00</c:v>
+                  </c:pt>
+                  <c:pt idx="1">
+                    <c:v>04:00</c:v>
+                  </c:pt>
+                  <c:pt idx="2">
+                    <c:v>08:00</c:v>
+                  </c:pt>
+                  <c:pt idx="3">
+                    <c:v>12:00</c:v>
+                  </c:pt>
+                  <c:pt idx="4">
+                    <c:v>16:00</c:v>
+                  </c:pt>
+                  <c:pt idx="5">
+                    <c:v>20:00</c:v>
+                  </c:pt>
+                </c:lvl>
+              </c:multiLvlStrCache>
+            </c:multiLvlStrRef>
+          </c:cat>
+          <c:val>
+            <c:numRef>
+              <c:f>Sheet1!$C$2:$C$7</c:f>
+              <c:numCache>
+                <c:formatCode>General</c:formatCode>
+                <c:ptCount val="6"/>
+                <c:pt idx="0">
+                  <c:v>9</c:v>
+                </c:pt>
+                <c:pt idx="1">
+                  <c:v>14</c:v>
+                </c:pt>
+                <c:pt idx="2">
+                  <c:v>32</c:v>
+                </c:pt>
+                <c:pt idx="3">
+                  <c:v>64</c:v>
+                </c:pt>
+                <c:pt idx="4">
+                  <c:v>48</c:v>
+                </c:pt>
+                <c:pt idx="5">
+                  <c:v>26</c:v>
+                </c:pt>
+              </c:numCache>
+            </c:numRef>
+          </c:val>
+        </c:ser>
+        <c:dLbls>
+          <c:numFmt formatCode="#,##0" sourceLinked="0"/>
+          <c:txPr>
+            <a:bodyPr/>
+            <a:lstStyle/>
+            <a:p>
+              <a:pPr>
+                <a:defRPr b="0" i="0" strike="noStrike" sz="1200" u="none">
+                  <a:solidFill>
+                    <a:srgbClr val="000000"/>
+                  </a:solidFill>
+                  <a:latin typeface="Arial"/>
+                </a:defRPr>
+              </a:pPr>
+            </a:p>
+          </c:txPr>
+          <c:showLegendKey val="0"/>
+          <c:showVal val="0"/>
+          <c:showCatName val="0"/>
+          <c:showSerName val="0"/>
+          <c:showPercent val="0"/>
+          <c:showBubbleSize val="0"/>
+          <c:showLeaderLines val="0"/>
+        </c:dLbls>
+        <c:axId val="2094734554"/>
+        <c:axId val="2094734552"/>
+        <c:axId val="2094734556"/>
+      </c:areaChart>
+      <c:catAx>
+        <c:axId val="2094734554"/>
+        <c:scaling>
+          <c:orientation val="minMax"/>
+        </c:scaling>
+        <c:delete val="0"/>
+        <c:axPos val="b"/>
+        <c:numFmt formatCode="General" sourceLinked="1"/>
+        <c:majorTickMark val="out"/>
+        <c:minorTickMark val="none"/>
+        <c:tickLblPos val="low"/>
+        <c:spPr>
+          <a:ln w="12700" cap="flat">
+            <a:solidFill>
+              <a:srgbClr val="888888"/>
+            </a:solidFill>
+            <a:prstDash val="solid"/>
+            <a:round/>
+          </a:ln>
+        </c:spPr>
+        <c:txPr>
+          <a:bodyPr/>
+          <a:lstStyle/>
+          <a:p>
+            <a:pPr>
+              <a:defRPr sz="1200" b="0" i="0" u="none" strike="noStrike">
+                <a:solidFill>
+                  <a:srgbClr val="000000"/>
+                </a:solidFill>
+                <a:latin typeface="Arial"/>
+              </a:defRPr>
+            </a:pPr>
+            <a:endParaRPr lang="en-US"/>
+          </a:p>
+        </c:txPr>
+        <c:crossAx val="2094734552"/>
+        <c:crosses val="autoZero"/>
+        <c:auto val="1"/>
+        <c:lblAlgn val="ctr"/>
+        <c:noMultiLvlLbl val="1"/>
+      </c:catAx>
+      <c:valAx>
+        <c:axId val="2094734552"/>
+        <c:scaling>
+          <c:orientation val="minMax"/>
+        </c:scaling>
+        <c:delete val="0"/>
+        <c:axPos val="l"/>
+        <c:majorGridlines>
+          <c:spPr>
+            <a:ln w="12700" cap="flat">
+              <a:solidFill>
+                <a:srgbClr val="888888"/>
+              </a:solidFill>
+              <a:prstDash val="solid"/>
+              <a:round/>
+            </a:ln>
+          </c:spPr>
+        </c:majorGridlines>
+        <c:numFmt formatCode="General" sourceLinked="0"/>
+        <c:majorTickMark val="out"/>
+        <c:minorTickMark val="none"/>
+        <c:tickLblPos val="nextTo"/>
+        <c:spPr>
+          <a:ln w="12700" cap="flat">
+            <a:solidFill>
+              <a:srgbClr val="888888"/>
+            </a:solidFill>
+            <a:prstDash val="solid"/>
+            <a:round/>
+          </a:ln>
+        </c:spPr>
+        <c:txPr>
+          <a:bodyPr/>
+          <a:lstStyle/>
+          <a:p>
+            <a:pPr>
+              <a:defRPr sz="1200" b="0" i="0" u="none" strike="noStrike">
+                <a:solidFill>
+                  <a:srgbClr val="000000"/>
+                </a:solidFill>
+                <a:latin typeface="Arial"/>
+              </a:defRPr>
+            </a:pPr>
+            <a:endParaRPr lang="en-US"/>
+          </a:p>
+        </c:txPr>
+        <c:crossAx val="2094734554"/>
+        <c:crosses val="autoZero"/>
+        <c:crossBetween val="between"/>
+      </c:valAx>
+      <c:spPr>
+        <a:noFill/>
+        <a:ln>
+          <a:noFill/>
+        </a:ln>
+        <a:effectLst/>
+      </c:spPr>
+    </c:plotArea>
+    <c:legend>
+      <c:legendPos val="b"/>
+      <c:overlay val="0"/>
+      <c:txPr>
+        <a:bodyPr/>
+        <a:lstStyle/>
+        <a:p>
+          <a:pPr>
+            <a:defRPr>
+              <a:solidFill>
+                <a:srgbClr val="6B6862"/>
+              </a:solidFill>
+            </a:defRPr>
+          </a:pPr>
+          <a:endParaRPr lang="en-US"/>
+        </a:p>
+      </c:txPr>
+    </c:legend>
+    <c:plotVisOnly val="1"/>
+    <c:dispBlanksAs val="span"/>
+  </c:chart>
+  <c:spPr>
+    <a:noFill/>
+    <a:ln>
+      <a:noFill/>
+    </a:ln>
+    <a:effectLst/>
+  </c:spPr>
+  <c:externalData r:id="rId1">
+    <c:autoUpdate val="0"/>
+  </c:externalData>
+</c:chartSpace>
+</file>
+
 <file path=ppt/notesMasters/notesMaster1.xml><?xml version="1.0" encoding="utf-8"?>
 <p:notesMaster xmlns:a="http://schemas.openxmlformats.org/drawingml/2006/main" xmlns:r="http://schemas.openxmlformats.org/officeDocument/2006/relationships" xmlns:p="http://schemas.openxmlformats.org/presentationml/2006/main">
   <p:cSld>
@@ -1203,6 +1608,94 @@
 </p:notes>
 </file>
 
+<file path=ppt/notesSlides/notesSlide10.xml><?xml version="1.0" encoding="utf-8"?>
+<p:notes xmlns:a="http://schemas.openxmlformats.org/drawingml/2006/main" xmlns:r="http://schemas.openxmlformats.org/officeDocument/2006/relationships" xmlns:p="http://schemas.openxmlformats.org/presentationml/2006/main">
+  <p:cSld>
+    <p:spTree>
+      <p:nvGrpSpPr>
+        <p:cNvPr id="1" name=""/>
+        <p:cNvGrpSpPr/>
+        <p:nvPr/>
+      </p:nvGrpSpPr>
+      <p:grpSpPr>
+        <a:xfrm>
+          <a:off x="0" y="0"/>
+          <a:ext cx="0" cy="0"/>
+          <a:chOff x="0" y="0"/>
+          <a:chExt cx="0" cy="0"/>
+        </a:xfrm>
+      </p:grpSpPr>
+      <p:sp>
+        <p:nvSpPr>
+          <p:cNvPr id="2" name="Slide Image Placeholder 1"/>
+          <p:cNvSpPr>
+            <a:spLocks noGrp="1" noRot="1" noChangeAspect="1"/>
+          </p:cNvSpPr>
+          <p:nvPr>
+            <p:ph type="sldImg"/>
+          </p:nvPr>
+        </p:nvSpPr>
+        <p:spPr/>
+      </p:sp>
+      <p:sp>
+        <p:nvSpPr>
+          <p:cNvPr id="3" name="Notes Placeholder 2"/>
+          <p:cNvSpPr>
+            <a:spLocks noGrp="1"/>
+          </p:cNvSpPr>
+          <p:nvPr>
+            <p:ph type="body" idx="1"/>
+          </p:nvPr>
+        </p:nvSpPr>
+        <p:spPr/>
+        <p:txBody>
+          <a:bodyPr/>
+          <a:lstStyle/>
+          <a:p>
+            <a:r>
+              <a:rPr lang="en-US" dirty="0"/>
+              <a:t/>
+            </a:r>
+            <a:endParaRPr lang="en-US" dirty="0"/>
+          </a:p>
+        </p:txBody>
+      </p:sp>
+      <p:sp>
+        <p:nvSpPr>
+          <p:cNvPr id="4" name="Slide Number Placeholder 3"/>
+          <p:cNvSpPr>
+            <a:spLocks noGrp="1"/>
+          </p:cNvSpPr>
+          <p:nvPr>
+            <p:ph type="sldNum" sz="quarter" idx="10"/>
+          </p:nvPr>
+        </p:nvSpPr>
+        <p:spPr/>
+        <p:txBody>
+          <a:bodyPr/>
+          <a:lstStyle/>
+          <a:p>
+            <a:fld id="{F7021451-1387-4CA6-816F-3879F97B5CBC}" type="slidenum">
+              <a:rPr lang="en-US"/>
+              <a:t>10</a:t>
+            </a:fld>
+            <a:endParaRPr lang="en-US"/>
+          </a:p>
+        </p:txBody>
+      </p:sp>
+    </p:spTree>
+    <p:extLst>
+      <p:ext uri="{BB962C8B-B14F-4D97-AF65-F5344CB8AC3E}">
+        <p14:creationId xmlns:p14="http://schemas.microsoft.com/office/powerpoint/2010/main" val="1024086991"/>
+      </p:ext>
+    </p:extLst>
+  </p:cSld>
+  <p:clrMapOvr>
+    <a:masterClrMapping/>
+  </p:clrMapOvr>
+</p:notes>
+</file>
+
 <file path=ppt/notesSlides/notesSlide2.xml><?xml version="1.0" encoding="utf-8"?>
 <p:notes xmlns:a="http://schemas.openxmlformats.org/drawingml/2006/main" xmlns:r="http://schemas.openxmlformats.org/officeDocument/2006/relationships" xmlns:p="http://schemas.openxmlformats.org/presentationml/2006/main">
   <p:cSld>
@@ -1713,6 +2206,182 @@
             <a:fld id="{F7021451-1387-4CA6-816F-3879F97B5CBC}" type="slidenum">
               <a:rPr lang="en-US"/>
               <a:t>7</a:t>
+            </a:fld>
+            <a:endParaRPr lang="en-US"/>
+          </a:p>
+        </p:txBody>
+      </p:sp>
+    </p:spTree>
+    <p:extLst>
+      <p:ext uri="{BB962C8B-B14F-4D97-AF65-F5344CB8AC3E}">
+        <p14:creationId xmlns:p14="http://schemas.microsoft.com/office/powerpoint/2010/main" val="1024086991"/>
+      </p:ext>
+    </p:extLst>
+  </p:cSld>
+  <p:clrMapOvr>
+    <a:masterClrMapping/>
+  </p:clrMapOvr>
+</p:notes>
+</file>
+
+<file path=ppt/notesSlides/notesSlide8.xml><?xml version="1.0" encoding="utf-8"?>
+<p:notes xmlns:a="http://schemas.openxmlformats.org/drawingml/2006/main" xmlns:r="http://schemas.openxmlformats.org/officeDocument/2006/relationships" xmlns:p="http://schemas.openxmlformats.org/presentationml/2006/main">
+  <p:cSld>
+    <p:spTree>
+      <p:nvGrpSpPr>
+        <p:cNvPr id="1" name=""/>
+        <p:cNvGrpSpPr/>
+        <p:nvPr/>
+      </p:nvGrpSpPr>
+      <p:grpSpPr>
+        <a:xfrm>
+          <a:off x="0" y="0"/>
+          <a:ext cx="0" cy="0"/>
+          <a:chOff x="0" y="0"/>
+          <a:chExt cx="0" cy="0"/>
+        </a:xfrm>
+      </p:grpSpPr>
+      <p:sp>
+        <p:nvSpPr>
+          <p:cNvPr id="2" name="Slide Image Placeholder 1"/>
+          <p:cNvSpPr>
+            <a:spLocks noGrp="1" noRot="1" noChangeAspect="1"/>
+          </p:cNvSpPr>
+          <p:nvPr>
+            <p:ph type="sldImg"/>
+          </p:nvPr>
+        </p:nvSpPr>
+        <p:spPr/>
+      </p:sp>
+      <p:sp>
+        <p:nvSpPr>
+          <p:cNvPr id="3" name="Notes Placeholder 2"/>
+          <p:cNvSpPr>
+            <a:spLocks noGrp="1"/>
+          </p:cNvSpPr>
+          <p:nvPr>
+            <p:ph type="body" idx="1"/>
+          </p:nvPr>
+        </p:nvSpPr>
+        <p:spPr/>
+        <p:txBody>
+          <a:bodyPr/>
+          <a:lstStyle/>
+          <a:p>
+            <a:r>
+              <a:rPr lang="en-US" dirty="0"/>
+              <a:t/>
+            </a:r>
+            <a:endParaRPr lang="en-US" dirty="0"/>
+          </a:p>
+        </p:txBody>
+      </p:sp>
+      <p:sp>
+        <p:nvSpPr>
+          <p:cNvPr id="4" name="Slide Number Placeholder 3"/>
+          <p:cNvSpPr>
+            <a:spLocks noGrp="1"/>
+          </p:cNvSpPr>
+          <p:nvPr>
+            <p:ph type="sldNum" sz="quarter" idx="10"/>
+          </p:nvPr>
+        </p:nvSpPr>
+        <p:spPr/>
+        <p:txBody>
+          <a:bodyPr/>
+          <a:lstStyle/>
+          <a:p>
+            <a:fld id="{F7021451-1387-4CA6-816F-3879F97B5CBC}" type="slidenum">
+              <a:rPr lang="en-US"/>
+              <a:t>8</a:t>
+            </a:fld>
+            <a:endParaRPr lang="en-US"/>
+          </a:p>
+        </p:txBody>
+      </p:sp>
+    </p:spTree>
+    <p:extLst>
+      <p:ext uri="{BB962C8B-B14F-4D97-AF65-F5344CB8AC3E}">
+        <p14:creationId xmlns:p14="http://schemas.microsoft.com/office/powerpoint/2010/main" val="1024086991"/>
+      </p:ext>
+    </p:extLst>
+  </p:cSld>
+  <p:clrMapOvr>
+    <a:masterClrMapping/>
+  </p:clrMapOvr>
+</p:notes>
+</file>
+
+<file path=ppt/notesSlides/notesSlide9.xml><?xml version="1.0" encoding="utf-8"?>
+<p:notes xmlns:a="http://schemas.openxmlformats.org/drawingml/2006/main" xmlns:r="http://schemas.openxmlformats.org/officeDocument/2006/relationships" xmlns:p="http://schemas.openxmlformats.org/presentationml/2006/main">
+  <p:cSld>
+    <p:spTree>
+      <p:nvGrpSpPr>
+        <p:cNvPr id="1" name=""/>
+        <p:cNvGrpSpPr/>
+        <p:nvPr/>
+      </p:nvGrpSpPr>
+      <p:grpSpPr>
+        <a:xfrm>
+          <a:off x="0" y="0"/>
+          <a:ext cx="0" cy="0"/>
+          <a:chOff x="0" y="0"/>
+          <a:chExt cx="0" cy="0"/>
+        </a:xfrm>
+      </p:grpSpPr>
+      <p:sp>
+        <p:nvSpPr>
+          <p:cNvPr id="2" name="Slide Image Placeholder 1"/>
+          <p:cNvSpPr>
+            <a:spLocks noGrp="1" noRot="1" noChangeAspect="1"/>
+          </p:cNvSpPr>
+          <p:nvPr>
+            <p:ph type="sldImg"/>
+          </p:nvPr>
+        </p:nvSpPr>
+        <p:spPr/>
+      </p:sp>
+      <p:sp>
+        <p:nvSpPr>
+          <p:cNvPr id="3" name="Notes Placeholder 2"/>
+          <p:cNvSpPr>
+            <a:spLocks noGrp="1"/>
+          </p:cNvSpPr>
+          <p:nvPr>
+            <p:ph type="body" idx="1"/>
+          </p:nvPr>
+        </p:nvSpPr>
+        <p:spPr/>
+        <p:txBody>
+          <a:bodyPr/>
+          <a:lstStyle/>
+          <a:p>
+            <a:r>
+              <a:rPr lang="en-US" dirty="0"/>
+              <a:t/>
+            </a:r>
+            <a:endParaRPr lang="en-US" dirty="0"/>
+          </a:p>
+        </p:txBody>
+      </p:sp>
+      <p:sp>
+        <p:nvSpPr>
+          <p:cNvPr id="4" name="Slide Number Placeholder 3"/>
+          <p:cNvSpPr>
+            <a:spLocks noGrp="1"/>
+          </p:cNvSpPr>
+          <p:nvPr>
+            <p:ph type="sldNum" sz="quarter" idx="10"/>
+          </p:nvPr>
+        </p:nvSpPr>
+        <p:spPr/>
+        <p:txBody>
+          <a:bodyPr/>
+          <a:lstStyle/>
+          <a:p>
+            <a:fld id="{F7021451-1387-4CA6-816F-3879F97B5CBC}" type="slidenum">
+              <a:rPr lang="en-US"/>
+              <a:t>9</a:t>
             </a:fld>
             <a:endParaRPr lang="en-US"/>
           </a:p>
@@ -2292,6 +2961,852 @@
 </p:sld>
 </file>
 
+<file path=ppt/slides/slide10.xml><?xml version="1.0" encoding="utf-8"?>
+<p:sld xmlns:a="http://schemas.openxmlformats.org/drawingml/2006/main" xmlns:r="http://schemas.openxmlformats.org/officeDocument/2006/relationships" xmlns:p="http://schemas.openxmlformats.org/presentationml/2006/main">
+  <p:cSld name="Slide 10">
+    <p:bg>
+      <p:bgPr>
+        <a:solidFill>
+          <a:srgbClr val="FCFBF7"/>
+        </a:solidFill>
+      </p:bgPr>
+    </p:bg>
+    <p:spTree>
+      <p:nvGrpSpPr>
+        <p:cNvPr id="1" name=""/>
+        <p:cNvGrpSpPr/>
+        <p:nvPr/>
+      </p:nvGrpSpPr>
+      <p:grpSpPr>
+        <a:xfrm>
+          <a:off x="0" y="0"/>
+          <a:ext cx="0" cy="0"/>
+          <a:chOff x="0" y="0"/>
+          <a:chExt cx="0" cy="0"/>
+        </a:xfrm>
+      </p:grpSpPr>
+      <p:sp>
+        <p:nvSpPr>
+          <p:cNvPr id="2" name="Text 0"/>
+          <p:cNvSpPr/>
+          <p:nvPr/>
+        </p:nvSpPr>
+        <p:spPr>
+          <a:xfrm>
+            <a:off x="406390" y="406400"/>
+            <a:ext cx="11378916" cy="571500"/>
+          </a:xfrm>
+          <a:prstGeom prst="rect">
+            <a:avLst/>
+          </a:prstGeom>
+          <a:noFill/>
+          <a:ln/>
+        </p:spPr>
+        <p:txBody>
+          <a:bodyPr wrap="square" lIns="0" tIns="0" rIns="0" bIns="0" rtlCol="0" anchor="ctr"/>
+          <a:lstStyle/>
+          <a:p>
+            <a:pPr algn="l" indent="0" marL="0">
+              <a:buNone/>
+            </a:pPr>
+            <a:r>
+              <a:rPr lang="en-US" sz="4200" b="1" dirty="0">
+                <a:solidFill>
+                  <a:srgbClr val="8B0000"/>
+                </a:solidFill>
+                <a:latin typeface="Georgia" pitchFamily="34" charset="0"/>
+                <a:ea typeface="Georgia" pitchFamily="34" charset="-122"/>
+                <a:cs typeface="Georgia" pitchFamily="34" charset="-120"/>
+              </a:rPr>
+              <a:t>Object Model &amp; Core Domain Contracts</a:t>
+            </a:r>
+            <a:endParaRPr lang="en-US" sz="4200" dirty="0"/>
+          </a:p>
+        </p:txBody>
+      </p:sp>
+      <p:sp>
+        <p:nvSpPr>
+          <p:cNvPr id="3" name="Text 1"/>
+          <p:cNvSpPr/>
+          <p:nvPr/>
+        </p:nvSpPr>
+        <p:spPr>
+          <a:xfrm>
+            <a:off x="406390" y="1155700"/>
+            <a:ext cx="11378916" cy="444500"/>
+          </a:xfrm>
+          <a:prstGeom prst="rect">
+            <a:avLst/>
+          </a:prstGeom>
+          <a:noFill/>
+          <a:ln/>
+        </p:spPr>
+        <p:txBody>
+          <a:bodyPr wrap="square" lIns="0" tIns="0" rIns="0" bIns="0" rtlCol="0" anchor="ctr"/>
+          <a:lstStyle/>
+          <a:p>
+            <a:pPr algn="l" indent="0" marL="0">
+              <a:buNone/>
+            </a:pPr>
+            <a:r>
+              <a:rPr lang="en-US" sz="3400" b="1" dirty="0">
+                <a:solidFill>
+                  <a:srgbClr val="2C2B29"/>
+                </a:solidFill>
+                <a:latin typeface="Georgia" pitchFamily="34" charset="0"/>
+                <a:ea typeface="Georgia" pitchFamily="34" charset="-122"/>
+                <a:cs typeface="Georgia" pitchFamily="34" charset="-120"/>
+              </a:rPr>
+              <a:t>Compiler &amp; Tensor Architecture Hierarchy</a:t>
+            </a:r>
+            <a:endParaRPr lang="en-US" sz="3400" dirty="0"/>
+          </a:p>
+        </p:txBody>
+      </p:sp>
+      <p:sp>
+        <p:nvSpPr>
+          <p:cNvPr id="4" name="Shape 2"/>
+          <p:cNvSpPr/>
+          <p:nvPr/>
+        </p:nvSpPr>
+        <p:spPr>
+          <a:xfrm>
+            <a:off x="406390" y="1778000"/>
+            <a:ext cx="3640572" cy="1524000"/>
+          </a:xfrm>
+          <a:prstGeom prst="roundRect">
+            <a:avLst>
+              <a:gd name="adj" fmla="val 3600"/>
+            </a:avLst>
+          </a:prstGeom>
+          <a:solidFill>
+            <a:srgbClr val="F5F2EB"/>
+          </a:solidFill>
+          <a:ln w="19050">
+            <a:solidFill>
+              <a:srgbClr val="E0DACD"/>
+            </a:solidFill>
+            <a:prstDash val="solid"/>
+          </a:ln>
+        </p:spPr>
+      </p:sp>
+      <p:sp>
+        <p:nvSpPr>
+          <p:cNvPr id="5" name="Shape 3"/>
+          <p:cNvSpPr/>
+          <p:nvPr/>
+        </p:nvSpPr>
+        <p:spPr>
+          <a:xfrm>
+            <a:off x="406390" y="1778000"/>
+            <a:ext cx="3640572" cy="402336"/>
+          </a:xfrm>
+          <a:prstGeom prst="roundRect">
+            <a:avLst>
+              <a:gd name="adj" fmla="val 13636"/>
+            </a:avLst>
+          </a:prstGeom>
+          <a:solidFill>
+            <a:srgbClr val="C29B38"/>
+          </a:solidFill>
+          <a:ln w="12700">
+            <a:solidFill>
+              <a:srgbClr val="C29B38"/>
+            </a:solidFill>
+            <a:prstDash val="solid"/>
+          </a:ln>
+        </p:spPr>
+      </p:sp>
+      <p:sp>
+        <p:nvSpPr>
+          <p:cNvPr id="6" name="Text 4"/>
+          <p:cNvSpPr/>
+          <p:nvPr/>
+        </p:nvSpPr>
+        <p:spPr>
+          <a:xfrm>
+            <a:off x="452110" y="1796288"/>
+            <a:ext cx="3549132" cy="365760"/>
+          </a:xfrm>
+          <a:prstGeom prst="rect">
+            <a:avLst/>
+          </a:prstGeom>
+          <a:noFill/>
+          <a:ln/>
+        </p:spPr>
+        <p:txBody>
+          <a:bodyPr wrap="square" rtlCol="0" anchor="ctr"/>
+          <a:lstStyle/>
+          <a:p>
+            <a:pPr algn="ctr" indent="0" marL="0">
+              <a:buNone/>
+            </a:pPr>
+            <a:r>
+              <a:rPr lang="en-US" sz="950" b="1" dirty="0">
+                <a:solidFill>
+                  <a:srgbClr val="FFFFFF"/>
+                </a:solidFill>
+                <a:latin typeface="Georgia" pitchFamily="34" charset="0"/>
+                <a:ea typeface="Georgia" pitchFamily="34" charset="-122"/>
+                <a:cs typeface="Georgia" pitchFamily="34" charset="-120"/>
+              </a:rPr>
+              <a:t>&lt;&lt;interface&gt;&gt;</a:t>
+            </a:r>
+            <a:endParaRPr lang="en-US" sz="950" dirty="0"/>
+          </a:p>
+          <a:p>
+            <a:pPr algn="ctr" indent="0" marL="0">
+              <a:buNone/>
+            </a:pPr>
+            <a:r>
+              <a:rPr lang="en-US" sz="950" b="1" dirty="0">
+                <a:solidFill>
+                  <a:srgbClr val="FFFFFF"/>
+                </a:solidFill>
+                <a:latin typeface="Georgia" pitchFamily="34" charset="0"/>
+                <a:ea typeface="Georgia" pitchFamily="34" charset="-122"/>
+                <a:cs typeface="Georgia" pitchFamily="34" charset="-120"/>
+              </a:rPr>
+              <a:t>INeuralKernel</a:t>
+            </a:r>
+            <a:endParaRPr lang="en-US" sz="950" dirty="0"/>
+          </a:p>
+        </p:txBody>
+      </p:sp>
+      <p:sp>
+        <p:nvSpPr>
+          <p:cNvPr id="7" name="Text 5"/>
+          <p:cNvSpPr/>
+          <p:nvPr/>
+        </p:nvSpPr>
+        <p:spPr>
+          <a:xfrm>
+            <a:off x="497830" y="2235200"/>
+            <a:ext cx="3457692" cy="338328"/>
+          </a:xfrm>
+          <a:prstGeom prst="rect">
+            <a:avLst/>
+          </a:prstGeom>
+          <a:noFill/>
+          <a:ln/>
+        </p:spPr>
+        <p:txBody>
+          <a:bodyPr wrap="square" rtlCol="0" anchor="t"/>
+          <a:lstStyle/>
+          <a:p>
+            <a:pPr algn="l" indent="0" marL="0">
+              <a:buNone/>
+            </a:pPr>
+            <a:r>
+              <a:rPr lang="en-US" sz="800" dirty="0">
+                <a:solidFill>
+                  <a:srgbClr val="6B6862"/>
+                </a:solidFill>
+                <a:latin typeface="Consolas" pitchFamily="34" charset="0"/>
+                <a:ea typeface="Consolas" pitchFamily="34" charset="-122"/>
+                <a:cs typeface="Consolas" pitchFamily="34" charset="-120"/>
+              </a:rPr>
+              <a:t>+ executeTensor(ctx: Context): TensorResult</a:t>
+            </a:r>
+            <a:endParaRPr lang="en-US" sz="800" dirty="0"/>
+          </a:p>
+          <a:p>
+            <a:pPr algn="l" indent="0" marL="0">
+              <a:buNone/>
+            </a:pPr>
+            <a:r>
+              <a:rPr lang="en-US" sz="800" dirty="0">
+                <a:solidFill>
+                  <a:srgbClr val="6B6862"/>
+                </a:solidFill>
+                <a:latin typeface="Consolas" pitchFamily="34" charset="0"/>
+                <a:ea typeface="Consolas" pitchFamily="34" charset="-122"/>
+                <a:cs typeface="Consolas" pitchFamily="34" charset="-120"/>
+              </a:rPr>
+              <a:t>+ syncGradients(): void</a:t>
+            </a:r>
+            <a:endParaRPr lang="en-US" sz="800" dirty="0"/>
+          </a:p>
+        </p:txBody>
+      </p:sp>
+      <p:sp>
+        <p:nvSpPr>
+          <p:cNvPr id="8" name="Shape 6"/>
+          <p:cNvSpPr/>
+          <p:nvPr/>
+        </p:nvSpPr>
+        <p:spPr>
+          <a:xfrm>
+            <a:off x="4275562" y="1778000"/>
+            <a:ext cx="3640572" cy="1524000"/>
+          </a:xfrm>
+          <a:prstGeom prst="roundRect">
+            <a:avLst>
+              <a:gd name="adj" fmla="val 3600"/>
+            </a:avLst>
+          </a:prstGeom>
+          <a:solidFill>
+            <a:srgbClr val="F5F2EB"/>
+          </a:solidFill>
+          <a:ln w="19050">
+            <a:solidFill>
+              <a:srgbClr val="E0DACD"/>
+            </a:solidFill>
+            <a:prstDash val="solid"/>
+          </a:ln>
+        </p:spPr>
+      </p:sp>
+      <p:sp>
+        <p:nvSpPr>
+          <p:cNvPr id="9" name="Shape 7"/>
+          <p:cNvSpPr/>
+          <p:nvPr/>
+        </p:nvSpPr>
+        <p:spPr>
+          <a:xfrm>
+            <a:off x="4275562" y="1778000"/>
+            <a:ext cx="3640572" cy="310896"/>
+          </a:xfrm>
+          <a:prstGeom prst="roundRect">
+            <a:avLst>
+              <a:gd name="adj" fmla="val 17647"/>
+            </a:avLst>
+          </a:prstGeom>
+          <a:solidFill>
+            <a:srgbClr val="8B0000"/>
+          </a:solidFill>
+          <a:ln w="12700">
+            <a:solidFill>
+              <a:srgbClr val="8B0000"/>
+            </a:solidFill>
+            <a:prstDash val="solid"/>
+          </a:ln>
+        </p:spPr>
+      </p:sp>
+      <p:sp>
+        <p:nvSpPr>
+          <p:cNvPr id="10" name="Text 8"/>
+          <p:cNvSpPr/>
+          <p:nvPr/>
+        </p:nvSpPr>
+        <p:spPr>
+          <a:xfrm>
+            <a:off x="4321282" y="1796288"/>
+            <a:ext cx="3549132" cy="274320"/>
+          </a:xfrm>
+          <a:prstGeom prst="rect">
+            <a:avLst/>
+          </a:prstGeom>
+          <a:noFill/>
+          <a:ln/>
+        </p:spPr>
+        <p:txBody>
+          <a:bodyPr wrap="square" rtlCol="0" anchor="ctr"/>
+          <a:lstStyle/>
+          <a:p>
+            <a:pPr algn="ctr" indent="0" marL="0">
+              <a:buNone/>
+            </a:pPr>
+            <a:r>
+              <a:rPr lang="en-US" sz="950" b="1" dirty="0">
+                <a:solidFill>
+                  <a:srgbClr val="FFFFFF"/>
+                </a:solidFill>
+                <a:latin typeface="Georgia" pitchFamily="34" charset="0"/>
+                <a:ea typeface="Georgia" pitchFamily="34" charset="-122"/>
+                <a:cs typeface="Georgia" pitchFamily="34" charset="-120"/>
+              </a:rPr>
+              <a:t>QuantumCore</a:t>
+            </a:r>
+            <a:endParaRPr lang="en-US" sz="950" dirty="0"/>
+          </a:p>
+        </p:txBody>
+      </p:sp>
+      <p:sp>
+        <p:nvSpPr>
+          <p:cNvPr id="11" name="Text 9"/>
+          <p:cNvSpPr/>
+          <p:nvPr/>
+        </p:nvSpPr>
+        <p:spPr>
+          <a:xfrm>
+            <a:off x="4367002" y="2143760"/>
+            <a:ext cx="3457692" cy="338328"/>
+          </a:xfrm>
+          <a:prstGeom prst="rect">
+            <a:avLst/>
+          </a:prstGeom>
+          <a:noFill/>
+          <a:ln/>
+        </p:spPr>
+        <p:txBody>
+          <a:bodyPr wrap="square" rtlCol="0" anchor="t"/>
+          <a:lstStyle/>
+          <a:p>
+            <a:pPr algn="l" indent="0" marL="0">
+              <a:buNone/>
+            </a:pPr>
+            <a:r>
+              <a:rPr lang="en-US" sz="800" dirty="0">
+                <a:solidFill>
+                  <a:srgbClr val="2C2B29"/>
+                </a:solidFill>
+                <a:latin typeface="Consolas" pitchFamily="34" charset="0"/>
+                <a:ea typeface="Consolas" pitchFamily="34" charset="-122"/>
+                <a:cs typeface="Consolas" pitchFamily="34" charset="-120"/>
+              </a:rPr>
+              <a:t>+ stateVector: ComplexMatrix</a:t>
+            </a:r>
+            <a:endParaRPr lang="en-US" sz="800" dirty="0"/>
+          </a:p>
+          <a:p>
+            <a:pPr algn="l" indent="0" marL="0">
+              <a:buNone/>
+            </a:pPr>
+            <a:r>
+              <a:rPr lang="en-US" sz="800" dirty="0">
+                <a:solidFill>
+                  <a:srgbClr val="2C2B29"/>
+                </a:solidFill>
+                <a:latin typeface="Consolas" pitchFamily="34" charset="0"/>
+                <a:ea typeface="Consolas" pitchFamily="34" charset="-122"/>
+                <a:cs typeface="Consolas" pitchFamily="34" charset="-120"/>
+              </a:rPr>
+              <a:t>- qubitCount: number</a:t>
+            </a:r>
+            <a:endParaRPr lang="en-US" sz="800" dirty="0"/>
+          </a:p>
+        </p:txBody>
+      </p:sp>
+      <p:sp>
+        <p:nvSpPr>
+          <p:cNvPr id="12" name="Shape 10"/>
+          <p:cNvSpPr/>
+          <p:nvPr/>
+        </p:nvSpPr>
+        <p:spPr>
+          <a:xfrm>
+            <a:off x="4275562" y="2482088"/>
+            <a:ext cx="3640572" cy="9144"/>
+          </a:xfrm>
+          <a:prstGeom prst="line">
+            <a:avLst/>
+          </a:prstGeom>
+          <a:noFill/>
+          <a:ln w="12700">
+            <a:solidFill>
+              <a:srgbClr val="E0DACD"/>
+            </a:solidFill>
+            <a:prstDash val="solid"/>
+          </a:ln>
+        </p:spPr>
+      </p:sp>
+      <p:sp>
+        <p:nvSpPr>
+          <p:cNvPr id="13" name="Text 11"/>
+          <p:cNvSpPr/>
+          <p:nvPr/>
+        </p:nvSpPr>
+        <p:spPr>
+          <a:xfrm>
+            <a:off x="4367002" y="2527808"/>
+            <a:ext cx="3457692" cy="192024"/>
+          </a:xfrm>
+          <a:prstGeom prst="rect">
+            <a:avLst/>
+          </a:prstGeom>
+          <a:noFill/>
+          <a:ln/>
+        </p:spPr>
+        <p:txBody>
+          <a:bodyPr wrap="square" rtlCol="0" anchor="t"/>
+          <a:lstStyle/>
+          <a:p>
+            <a:pPr algn="l" indent="0" marL="0">
+              <a:buNone/>
+            </a:pPr>
+            <a:r>
+              <a:rPr lang="en-US" sz="800" dirty="0">
+                <a:solidFill>
+                  <a:srgbClr val="6B6862"/>
+                </a:solidFill>
+                <a:latin typeface="Consolas" pitchFamily="34" charset="0"/>
+                <a:ea typeface="Consolas" pitchFamily="34" charset="-122"/>
+                <a:cs typeface="Consolas" pitchFamily="34" charset="-120"/>
+              </a:rPr>
+              <a:t>+ executeTensor(ctx: Context): TensorResult</a:t>
+            </a:r>
+            <a:endParaRPr lang="en-US" sz="800" dirty="0"/>
+          </a:p>
+        </p:txBody>
+      </p:sp>
+      <p:sp>
+        <p:nvSpPr>
+          <p:cNvPr id="14" name="Shape 12"/>
+          <p:cNvSpPr/>
+          <p:nvPr/>
+        </p:nvSpPr>
+        <p:spPr>
+          <a:xfrm>
+            <a:off x="8144734" y="1778000"/>
+            <a:ext cx="3640572" cy="1524000"/>
+          </a:xfrm>
+          <a:prstGeom prst="roundRect">
+            <a:avLst>
+              <a:gd name="adj" fmla="val 3600"/>
+            </a:avLst>
+          </a:prstGeom>
+          <a:solidFill>
+            <a:srgbClr val="F5F2EB"/>
+          </a:solidFill>
+          <a:ln w="19050">
+            <a:solidFill>
+              <a:srgbClr val="E0DACD"/>
+            </a:solidFill>
+            <a:prstDash val="solid"/>
+          </a:ln>
+        </p:spPr>
+      </p:sp>
+      <p:sp>
+        <p:nvSpPr>
+          <p:cNvPr id="15" name="Shape 13"/>
+          <p:cNvSpPr/>
+          <p:nvPr/>
+        </p:nvSpPr>
+        <p:spPr>
+          <a:xfrm>
+            <a:off x="8144734" y="1778000"/>
+            <a:ext cx="3640572" cy="310896"/>
+          </a:xfrm>
+          <a:prstGeom prst="roundRect">
+            <a:avLst>
+              <a:gd name="adj" fmla="val 17647"/>
+            </a:avLst>
+          </a:prstGeom>
+          <a:solidFill>
+            <a:srgbClr val="8B0000"/>
+          </a:solidFill>
+          <a:ln w="12700">
+            <a:solidFill>
+              <a:srgbClr val="8B0000"/>
+            </a:solidFill>
+            <a:prstDash val="solid"/>
+          </a:ln>
+        </p:spPr>
+      </p:sp>
+      <p:sp>
+        <p:nvSpPr>
+          <p:cNvPr id="16" name="Text 14"/>
+          <p:cNvSpPr/>
+          <p:nvPr/>
+        </p:nvSpPr>
+        <p:spPr>
+          <a:xfrm>
+            <a:off x="8190454" y="1796288"/>
+            <a:ext cx="3549132" cy="274320"/>
+          </a:xfrm>
+          <a:prstGeom prst="rect">
+            <a:avLst/>
+          </a:prstGeom>
+          <a:noFill/>
+          <a:ln/>
+        </p:spPr>
+        <p:txBody>
+          <a:bodyPr wrap="square" rtlCol="0" anchor="ctr"/>
+          <a:lstStyle/>
+          <a:p>
+            <a:pPr algn="ctr" indent="0" marL="0">
+              <a:buNone/>
+            </a:pPr>
+            <a:r>
+              <a:rPr lang="en-US" sz="950" b="1" dirty="0">
+                <a:solidFill>
+                  <a:srgbClr val="FFFFFF"/>
+                </a:solidFill>
+                <a:latin typeface="Georgia" pitchFamily="34" charset="0"/>
+                <a:ea typeface="Georgia" pitchFamily="34" charset="-122"/>
+                <a:cs typeface="Georgia" pitchFamily="34" charset="-120"/>
+              </a:rPr>
+              <a:t>DispatchEngine</a:t>
+            </a:r>
+            <a:endParaRPr lang="en-US" sz="950" dirty="0"/>
+          </a:p>
+        </p:txBody>
+      </p:sp>
+      <p:sp>
+        <p:nvSpPr>
+          <p:cNvPr id="17" name="Text 15"/>
+          <p:cNvSpPr/>
+          <p:nvPr/>
+        </p:nvSpPr>
+        <p:spPr>
+          <a:xfrm>
+            <a:off x="8236174" y="2143760"/>
+            <a:ext cx="3457692" cy="192024"/>
+          </a:xfrm>
+          <a:prstGeom prst="rect">
+            <a:avLst/>
+          </a:prstGeom>
+          <a:noFill/>
+          <a:ln/>
+        </p:spPr>
+        <p:txBody>
+          <a:bodyPr wrap="square" rtlCol="0" anchor="t"/>
+          <a:lstStyle/>
+          <a:p>
+            <a:pPr algn="l" indent="0" marL="0">
+              <a:buNone/>
+            </a:pPr>
+            <a:r>
+              <a:rPr lang="en-US" sz="800" dirty="0">
+                <a:solidFill>
+                  <a:srgbClr val="2C2B29"/>
+                </a:solidFill>
+                <a:latin typeface="Consolas" pitchFamily="34" charset="0"/>
+                <a:ea typeface="Consolas" pitchFamily="34" charset="-122"/>
+                <a:cs typeface="Consolas" pitchFamily="34" charset="-120"/>
+              </a:rPr>
+              <a:t>- kernel: INeuralKernel</a:t>
+            </a:r>
+            <a:endParaRPr lang="en-US" sz="800" dirty="0"/>
+          </a:p>
+        </p:txBody>
+      </p:sp>
+      <p:sp>
+        <p:nvSpPr>
+          <p:cNvPr id="18" name="Shape 16"/>
+          <p:cNvSpPr/>
+          <p:nvPr/>
+        </p:nvSpPr>
+        <p:spPr>
+          <a:xfrm>
+            <a:off x="8144734" y="2335784"/>
+            <a:ext cx="3640572" cy="9144"/>
+          </a:xfrm>
+          <a:prstGeom prst="line">
+            <a:avLst/>
+          </a:prstGeom>
+          <a:noFill/>
+          <a:ln w="12700">
+            <a:solidFill>
+              <a:srgbClr val="E0DACD"/>
+            </a:solidFill>
+            <a:prstDash val="solid"/>
+          </a:ln>
+        </p:spPr>
+      </p:sp>
+      <p:sp>
+        <p:nvSpPr>
+          <p:cNvPr id="19" name="Text 17"/>
+          <p:cNvSpPr/>
+          <p:nvPr/>
+        </p:nvSpPr>
+        <p:spPr>
+          <a:xfrm>
+            <a:off x="8236174" y="2381504"/>
+            <a:ext cx="3457692" cy="192024"/>
+          </a:xfrm>
+          <a:prstGeom prst="rect">
+            <a:avLst/>
+          </a:prstGeom>
+          <a:noFill/>
+          <a:ln/>
+        </p:spPr>
+        <p:txBody>
+          <a:bodyPr wrap="square" rtlCol="0" anchor="t"/>
+          <a:lstStyle/>
+          <a:p>
+            <a:pPr algn="l" indent="0" marL="0">
+              <a:buNone/>
+            </a:pPr>
+            <a:r>
+              <a:rPr lang="en-US" sz="800" dirty="0">
+                <a:solidFill>
+                  <a:srgbClr val="6B6862"/>
+                </a:solidFill>
+                <a:latin typeface="Consolas" pitchFamily="34" charset="0"/>
+                <a:ea typeface="Consolas" pitchFamily="34" charset="-122"/>
+                <a:cs typeface="Consolas" pitchFamily="34" charset="-120"/>
+              </a:rPr>
+              <a:t>+ schedule(batch: IngestionBatch): void</a:t>
+            </a:r>
+            <a:endParaRPr lang="en-US" sz="800" dirty="0"/>
+          </a:p>
+        </p:txBody>
+      </p:sp>
+      <p:sp>
+        <p:nvSpPr>
+          <p:cNvPr id="20" name="Shape 18"/>
+          <p:cNvSpPr/>
+          <p:nvPr/>
+        </p:nvSpPr>
+        <p:spPr>
+          <a:xfrm flipH="1" flipV="1">
+            <a:off x="2226676" y="1778000"/>
+            <a:ext cx="3869172" cy="1524000"/>
+          </a:xfrm>
+          <a:prstGeom prst="line">
+            <a:avLst/>
+          </a:prstGeom>
+          <a:noFill/>
+          <a:ln w="19050">
+            <a:solidFill>
+              <a:srgbClr val="C29B38"/>
+            </a:solidFill>
+            <a:prstDash val="dash"/>
+            <a:tailEnd type="triangle"/>
+          </a:ln>
+        </p:spPr>
+      </p:sp>
+      <p:sp>
+        <p:nvSpPr>
+          <p:cNvPr id="21" name="Text 19"/>
+          <p:cNvSpPr/>
+          <p:nvPr/>
+        </p:nvSpPr>
+        <p:spPr>
+          <a:xfrm>
+            <a:off x="3704062" y="2430272"/>
+            <a:ext cx="914400" cy="219456"/>
+          </a:xfrm>
+          <a:prstGeom prst="rect">
+            <a:avLst/>
+          </a:prstGeom>
+          <a:noFill/>
+          <a:ln/>
+        </p:spPr>
+        <p:txBody>
+          <a:bodyPr wrap="square" rtlCol="0" anchor="ctr"/>
+          <a:lstStyle/>
+          <a:p>
+            <a:pPr algn="ctr" indent="0" marL="0">
+              <a:buNone/>
+            </a:pPr>
+            <a:r>
+              <a:rPr lang="en-US" sz="800" dirty="0">
+                <a:solidFill>
+                  <a:srgbClr val="6B6862"/>
+                </a:solidFill>
+                <a:latin typeface="Georgia" pitchFamily="34" charset="0"/>
+                <a:ea typeface="Georgia" pitchFamily="34" charset="-122"/>
+                <a:cs typeface="Georgia" pitchFamily="34" charset="-120"/>
+              </a:rPr>
+              <a:t>implements</a:t>
+            </a:r>
+            <a:endParaRPr lang="en-US" sz="800" dirty="0"/>
+          </a:p>
+        </p:txBody>
+      </p:sp>
+      <p:sp>
+        <p:nvSpPr>
+          <p:cNvPr id="22" name="Shape 20"/>
+          <p:cNvSpPr/>
+          <p:nvPr/>
+        </p:nvSpPr>
+        <p:spPr>
+          <a:xfrm flipH="1" flipV="1">
+            <a:off x="2226676" y="1778000"/>
+            <a:ext cx="7738344" cy="1524000"/>
+          </a:xfrm>
+          <a:prstGeom prst="line">
+            <a:avLst/>
+          </a:prstGeom>
+          <a:noFill/>
+          <a:ln w="19050">
+            <a:solidFill>
+              <a:srgbClr val="C29B38"/>
+            </a:solidFill>
+            <a:prstDash val="solid"/>
+            <a:tailEnd type="triangle"/>
+          </a:ln>
+        </p:spPr>
+      </p:sp>
+      <p:sp>
+        <p:nvSpPr>
+          <p:cNvPr id="23" name="Text 21"/>
+          <p:cNvSpPr/>
+          <p:nvPr/>
+        </p:nvSpPr>
+        <p:spPr>
+          <a:xfrm>
+            <a:off x="5638648" y="2430272"/>
+            <a:ext cx="914400" cy="219456"/>
+          </a:xfrm>
+          <a:prstGeom prst="rect">
+            <a:avLst/>
+          </a:prstGeom>
+          <a:noFill/>
+          <a:ln/>
+        </p:spPr>
+        <p:txBody>
+          <a:bodyPr wrap="square" rtlCol="0" anchor="ctr"/>
+          <a:lstStyle/>
+          <a:p>
+            <a:pPr algn="ctr" indent="0" marL="0">
+              <a:buNone/>
+            </a:pPr>
+            <a:r>
+              <a:rPr lang="en-US" sz="800" dirty="0">
+                <a:solidFill>
+                  <a:srgbClr val="6B6862"/>
+                </a:solidFill>
+                <a:latin typeface="Georgia" pitchFamily="34" charset="0"/>
+                <a:ea typeface="Georgia" pitchFamily="34" charset="-122"/>
+                <a:cs typeface="Georgia" pitchFamily="34" charset="-120"/>
+              </a:rPr>
+              <a:t>orchestrates</a:t>
+            </a:r>
+            <a:endParaRPr lang="en-US" sz="800" dirty="0"/>
+          </a:p>
+        </p:txBody>
+      </p:sp>
+      <p:sp>
+        <p:nvSpPr>
+          <p:cNvPr id="24" name="Text 22"/>
+          <p:cNvSpPr/>
+          <p:nvPr/>
+        </p:nvSpPr>
+        <p:spPr>
+          <a:xfrm>
+            <a:off x="457200" y="6492240"/>
+            <a:ext cx="11277295" cy="228600"/>
+          </a:xfrm>
+          <a:prstGeom prst="rect">
+            <a:avLst/>
+          </a:prstGeom>
+          <a:noFill/>
+          <a:ln/>
+        </p:spPr>
+        <p:txBody>
+          <a:bodyPr wrap="square" rtlCol="0" anchor="ctr"/>
+          <a:lstStyle/>
+          <a:p>
+            <a:pPr indent="0" marL="0">
+              <a:buNone/>
+            </a:pPr>
+            <a:r>
+              <a:rPr lang="en-US" sz="900" b="1" dirty="0">
+                <a:solidFill>
+                  <a:srgbClr val="6B6862"/>
+                </a:solidFill>
+                <a:latin typeface="Georgia" pitchFamily="34" charset="0"/>
+                <a:ea typeface="Georgia" pitchFamily="34" charset="-122"/>
+                <a:cs typeface="Georgia" pitchFamily="34" charset="-120"/>
+              </a:rPr>
+              <a:t>YUMIA V0.1.26 • CONFIDENTIAL</a:t>
+            </a:r>
+            <a:endParaRPr lang="en-US" sz="900" dirty="0"/>
+          </a:p>
+        </p:txBody>
+      </p:sp>
+    </p:spTree>
+  </p:cSld>
+  <p:clrMapOvr>
+    <a:masterClrMapping/>
+  </p:clrMapOvr>
+</p:sld>
+</file>
+
 <file path=ppt/slides/slide2.xml><?xml version="1.0" encoding="utf-8"?>
 <p:sld xmlns:a="http://schemas.openxmlformats.org/drawingml/2006/main" xmlns:r="http://schemas.openxmlformats.org/officeDocument/2006/relationships" xmlns:p="http://schemas.openxmlformats.org/presentationml/2006/main">
   <p:cSld name="Slide 2">
@@ -2403,11 +3918,11 @@
         <p:spPr>
           <a:xfrm>
             <a:off x="406390" y="1750060"/>
-            <a:ext cx="5552298" cy="448395"/>
+            <a:ext cx="5552298" cy="225146"/>
           </a:xfrm>
           <a:prstGeom prst="roundRect">
             <a:avLst>
-              <a:gd name="adj" fmla="val 16314"/>
+              <a:gd name="adj" fmla="val 32491"/>
             </a:avLst>
           </a:prstGeom>
           <a:solidFill>
@@ -2429,7 +3944,7 @@
         </p:nvSpPr>
         <p:spPr>
           <a:xfrm>
-            <a:off x="516118" y="1809665"/>
+            <a:off x="516118" y="1698041"/>
             <a:ext cx="329184" cy="329184"/>
           </a:xfrm>
           <a:prstGeom prst="roundRect">
@@ -2451,7 +3966,7 @@
         </p:nvSpPr>
         <p:spPr>
           <a:xfrm>
-            <a:off x="516118" y="1809665"/>
+            <a:off x="516118" y="1698041"/>
             <a:ext cx="329184" cy="329184"/>
           </a:xfrm>
           <a:prstGeom prst="rect">
@@ -2491,7 +4006,7 @@
         <p:spPr>
           <a:xfrm>
             <a:off x="909310" y="1804924"/>
-            <a:ext cx="4957938" cy="338667"/>
+            <a:ext cx="4957938" cy="115418"/>
           </a:xfrm>
           <a:prstGeom prst="rect">
             <a:avLst/>
@@ -2530,11 +4045,11 @@
         <p:spPr>
           <a:xfrm>
             <a:off x="6233008" y="1750060"/>
-            <a:ext cx="5552298" cy="448395"/>
+            <a:ext cx="5552298" cy="225146"/>
           </a:xfrm>
           <a:prstGeom prst="roundRect">
             <a:avLst>
-              <a:gd name="adj" fmla="val 16314"/>
+              <a:gd name="adj" fmla="val 32491"/>
             </a:avLst>
           </a:prstGeom>
           <a:solidFill>
@@ -2556,7 +4071,7 @@
         </p:nvSpPr>
         <p:spPr>
           <a:xfrm>
-            <a:off x="6342736" y="1809665"/>
+            <a:off x="6342736" y="1698041"/>
             <a:ext cx="329184" cy="329184"/>
           </a:xfrm>
           <a:prstGeom prst="roundRect">
@@ -2578,7 +4093,7 @@
         </p:nvSpPr>
         <p:spPr>
           <a:xfrm>
-            <a:off x="6342736" y="1809665"/>
+            <a:off x="6342736" y="1698041"/>
             <a:ext cx="329184" cy="329184"/>
           </a:xfrm>
           <a:prstGeom prst="rect">
@@ -2618,7 +4133,7 @@
         <p:spPr>
           <a:xfrm>
             <a:off x="6735928" y="1804924"/>
-            <a:ext cx="4957938" cy="338667"/>
+            <a:ext cx="4957938" cy="115418"/>
           </a:xfrm>
           <a:prstGeom prst="rect">
             <a:avLst/>
@@ -2656,12 +4171,12 @@
         </p:nvSpPr>
         <p:spPr>
           <a:xfrm>
-            <a:off x="406390" y="2308183"/>
-            <a:ext cx="5552298" cy="448395"/>
+            <a:off x="406390" y="2084934"/>
+            <a:ext cx="5552298" cy="225146"/>
           </a:xfrm>
           <a:prstGeom prst="roundRect">
             <a:avLst>
-              <a:gd name="adj" fmla="val 16314"/>
+              <a:gd name="adj" fmla="val 32491"/>
             </a:avLst>
           </a:prstGeom>
           <a:solidFill>
@@ -2683,7 +4198,7 @@
         </p:nvSpPr>
         <p:spPr>
           <a:xfrm>
-            <a:off x="516118" y="2367788"/>
+            <a:off x="516118" y="2032914"/>
             <a:ext cx="329184" cy="329184"/>
           </a:xfrm>
           <a:prstGeom prst="roundRect">
@@ -2705,7 +4220,7 @@
         </p:nvSpPr>
         <p:spPr>
           <a:xfrm>
-            <a:off x="516118" y="2367788"/>
+            <a:off x="516118" y="2032914"/>
             <a:ext cx="329184" cy="329184"/>
           </a:xfrm>
           <a:prstGeom prst="rect">
@@ -2744,8 +4259,8 @@
         </p:nvSpPr>
         <p:spPr>
           <a:xfrm>
-            <a:off x="909310" y="2363047"/>
-            <a:ext cx="4957938" cy="338667"/>
+            <a:off x="909310" y="2139798"/>
+            <a:ext cx="4957938" cy="115418"/>
           </a:xfrm>
           <a:prstGeom prst="rect">
             <a:avLst/>
@@ -2783,12 +4298,12 @@
         </p:nvSpPr>
         <p:spPr>
           <a:xfrm>
-            <a:off x="6233008" y="2308183"/>
-            <a:ext cx="5552298" cy="448395"/>
+            <a:off x="6233008" y="2084934"/>
+            <a:ext cx="5552298" cy="225146"/>
           </a:xfrm>
           <a:prstGeom prst="roundRect">
             <a:avLst>
-              <a:gd name="adj" fmla="val 16314"/>
+              <a:gd name="adj" fmla="val 32491"/>
             </a:avLst>
           </a:prstGeom>
           <a:solidFill>
@@ -2810,7 +4325,7 @@
         </p:nvSpPr>
         <p:spPr>
           <a:xfrm>
-            <a:off x="6342736" y="2367788"/>
+            <a:off x="6342736" y="2032914"/>
             <a:ext cx="329184" cy="329184"/>
           </a:xfrm>
           <a:prstGeom prst="roundRect">
@@ -2832,7 +4347,7 @@
         </p:nvSpPr>
         <p:spPr>
           <a:xfrm>
-            <a:off x="6342736" y="2367788"/>
+            <a:off x="6342736" y="2032914"/>
             <a:ext cx="329184" cy="329184"/>
           </a:xfrm>
           <a:prstGeom prst="rect">
@@ -2871,8 +4386,8 @@
         </p:nvSpPr>
         <p:spPr>
           <a:xfrm>
-            <a:off x="6735928" y="2363047"/>
-            <a:ext cx="4957938" cy="338667"/>
+            <a:off x="6735928" y="2139798"/>
+            <a:ext cx="4957938" cy="115418"/>
           </a:xfrm>
           <a:prstGeom prst="rect">
             <a:avLst/>
@@ -2910,12 +4425,12 @@
         </p:nvSpPr>
         <p:spPr>
           <a:xfrm>
-            <a:off x="406390" y="2866305"/>
-            <a:ext cx="5552298" cy="448395"/>
+            <a:off x="406390" y="2419807"/>
+            <a:ext cx="5552298" cy="225146"/>
           </a:xfrm>
           <a:prstGeom prst="roundRect">
             <a:avLst>
-              <a:gd name="adj" fmla="val 16314"/>
+              <a:gd name="adj" fmla="val 32491"/>
             </a:avLst>
           </a:prstGeom>
           <a:solidFill>
@@ -2937,7 +4452,7 @@
         </p:nvSpPr>
         <p:spPr>
           <a:xfrm>
-            <a:off x="516118" y="2925911"/>
+            <a:off x="516118" y="2367788"/>
             <a:ext cx="329184" cy="329184"/>
           </a:xfrm>
           <a:prstGeom prst="roundRect">
@@ -2959,7 +4474,7 @@
         </p:nvSpPr>
         <p:spPr>
           <a:xfrm>
-            <a:off x="516118" y="2925911"/>
+            <a:off x="516118" y="2367788"/>
             <a:ext cx="329184" cy="329184"/>
           </a:xfrm>
           <a:prstGeom prst="rect">
@@ -2998,8 +4513,8 @@
         </p:nvSpPr>
         <p:spPr>
           <a:xfrm>
-            <a:off x="909310" y="2921169"/>
-            <a:ext cx="4957938" cy="338667"/>
+            <a:off x="909310" y="2474671"/>
+            <a:ext cx="4957938" cy="115418"/>
           </a:xfrm>
           <a:prstGeom prst="rect">
             <a:avLst/>
@@ -3037,12 +4552,12 @@
         </p:nvSpPr>
         <p:spPr>
           <a:xfrm>
-            <a:off x="6233008" y="2866305"/>
-            <a:ext cx="5552298" cy="448395"/>
+            <a:off x="6233008" y="2419807"/>
+            <a:ext cx="5552298" cy="225146"/>
           </a:xfrm>
           <a:prstGeom prst="roundRect">
             <a:avLst>
-              <a:gd name="adj" fmla="val 16314"/>
+              <a:gd name="adj" fmla="val 32491"/>
             </a:avLst>
           </a:prstGeom>
           <a:solidFill>
@@ -3064,7 +4579,7 @@
         </p:nvSpPr>
         <p:spPr>
           <a:xfrm>
-            <a:off x="6342736" y="2925911"/>
+            <a:off x="6342736" y="2367788"/>
             <a:ext cx="329184" cy="329184"/>
           </a:xfrm>
           <a:prstGeom prst="roundRect">
@@ -3086,7 +4601,7 @@
         </p:nvSpPr>
         <p:spPr>
           <a:xfrm>
-            <a:off x="6342736" y="2925911"/>
+            <a:off x="6342736" y="2367788"/>
             <a:ext cx="329184" cy="329184"/>
           </a:xfrm>
           <a:prstGeom prst="rect">
@@ -3125,8 +4640,8 @@
         </p:nvSpPr>
         <p:spPr>
           <a:xfrm>
-            <a:off x="6735928" y="2921169"/>
-            <a:ext cx="4957938" cy="338667"/>
+            <a:off x="6735928" y="2474671"/>
+            <a:ext cx="4957938" cy="115418"/>
           </a:xfrm>
           <a:prstGeom prst="rect">
             <a:avLst/>
@@ -3158,7 +4673,388 @@
       </p:sp>
       <p:sp>
         <p:nvSpPr>
-          <p:cNvPr id="28" name="Text 26"/>
+          <p:cNvPr id="28" name="Shape 26"/>
+          <p:cNvSpPr/>
+          <p:nvPr/>
+        </p:nvSpPr>
+        <p:spPr>
+          <a:xfrm>
+            <a:off x="406390" y="2754681"/>
+            <a:ext cx="5552298" cy="225146"/>
+          </a:xfrm>
+          <a:prstGeom prst="roundRect">
+            <a:avLst>
+              <a:gd name="adj" fmla="val 32491"/>
+            </a:avLst>
+          </a:prstGeom>
+          <a:solidFill>
+            <a:srgbClr val="F5F2EB"/>
+          </a:solidFill>
+          <a:ln w="12700">
+            <a:solidFill>
+              <a:srgbClr val="E0DACD"/>
+            </a:solidFill>
+            <a:prstDash val="solid"/>
+          </a:ln>
+        </p:spPr>
+      </p:sp>
+      <p:sp>
+        <p:nvSpPr>
+          <p:cNvPr id="29" name="Shape 27"/>
+          <p:cNvSpPr/>
+          <p:nvPr/>
+        </p:nvSpPr>
+        <p:spPr>
+          <a:xfrm>
+            <a:off x="516118" y="2702662"/>
+            <a:ext cx="329184" cy="329184"/>
+          </a:xfrm>
+          <a:prstGeom prst="roundRect">
+            <a:avLst>
+              <a:gd name="adj" fmla="val 22222"/>
+            </a:avLst>
+          </a:prstGeom>
+          <a:solidFill>
+            <a:srgbClr val="8B0000"/>
+          </a:solidFill>
+          <a:ln/>
+        </p:spPr>
+      </p:sp>
+      <p:sp>
+        <p:nvSpPr>
+          <p:cNvPr id="30" name="Text 28"/>
+          <p:cNvSpPr/>
+          <p:nvPr/>
+        </p:nvSpPr>
+        <p:spPr>
+          <a:xfrm>
+            <a:off x="516118" y="2702662"/>
+            <a:ext cx="329184" cy="329184"/>
+          </a:xfrm>
+          <a:prstGeom prst="rect">
+            <a:avLst/>
+          </a:prstGeom>
+          <a:noFill/>
+          <a:ln/>
+        </p:spPr>
+        <p:txBody>
+          <a:bodyPr wrap="square" rtlCol="0" anchor="ctr"/>
+          <a:lstStyle/>
+          <a:p>
+            <a:pPr algn="ctr" indent="0" marL="0">
+              <a:buNone/>
+            </a:pPr>
+            <a:r>
+              <a:rPr lang="en-US" sz="1100" b="1" dirty="0">
+                <a:solidFill>
+                  <a:srgbClr val="000000"/>
+                </a:solidFill>
+                <a:latin typeface="Georgia" pitchFamily="34" charset="0"/>
+                <a:ea typeface="Georgia" pitchFamily="34" charset="-122"/>
+                <a:cs typeface="Georgia" pitchFamily="34" charset="-120"/>
+              </a:rPr>
+              <a:t>8</a:t>
+            </a:r>
+            <a:endParaRPr lang="en-US" sz="1100" dirty="0"/>
+          </a:p>
+        </p:txBody>
+      </p:sp>
+      <p:sp>
+        <p:nvSpPr>
+          <p:cNvPr id="31" name="Text 29"/>
+          <p:cNvSpPr/>
+          <p:nvPr/>
+        </p:nvSpPr>
+        <p:spPr>
+          <a:xfrm>
+            <a:off x="909310" y="2809545"/>
+            <a:ext cx="4957938" cy="115418"/>
+          </a:xfrm>
+          <a:prstGeom prst="rect">
+            <a:avLst/>
+          </a:prstGeom>
+          <a:noFill/>
+          <a:ln/>
+        </p:spPr>
+        <p:txBody>
+          <a:bodyPr wrap="square" lIns="0" tIns="0" rIns="0" bIns="0" rtlCol="0" anchor="ctr"/>
+          <a:lstStyle/>
+          <a:p>
+            <a:pPr indent="0" marL="0">
+              <a:buNone/>
+            </a:pPr>
+            <a:r>
+              <a:rPr lang="en-US" sz="1300" b="1" dirty="0">
+                <a:solidFill>
+                  <a:srgbClr val="2C2B29"/>
+                </a:solidFill>
+                <a:latin typeface="Georgia" pitchFamily="34" charset="0"/>
+                <a:ea typeface="Georgia" pitchFamily="34" charset="-122"/>
+                <a:cs typeface="Georgia" pitchFamily="34" charset="-120"/>
+              </a:rPr>
+              <a:t>Protocol Handshake &amp; Sequence Verification</a:t>
+            </a:r>
+            <a:endParaRPr lang="en-US" sz="1300" dirty="0"/>
+          </a:p>
+        </p:txBody>
+      </p:sp>
+      <p:sp>
+        <p:nvSpPr>
+          <p:cNvPr id="32" name="Shape 30"/>
+          <p:cNvSpPr/>
+          <p:nvPr/>
+        </p:nvSpPr>
+        <p:spPr>
+          <a:xfrm>
+            <a:off x="6233008" y="2754681"/>
+            <a:ext cx="5552298" cy="225146"/>
+          </a:xfrm>
+          <a:prstGeom prst="roundRect">
+            <a:avLst>
+              <a:gd name="adj" fmla="val 32491"/>
+            </a:avLst>
+          </a:prstGeom>
+          <a:solidFill>
+            <a:srgbClr val="F5F2EB"/>
+          </a:solidFill>
+          <a:ln w="12700">
+            <a:solidFill>
+              <a:srgbClr val="E0DACD"/>
+            </a:solidFill>
+            <a:prstDash val="solid"/>
+          </a:ln>
+        </p:spPr>
+      </p:sp>
+      <p:sp>
+        <p:nvSpPr>
+          <p:cNvPr id="33" name="Shape 31"/>
+          <p:cNvSpPr/>
+          <p:nvPr/>
+        </p:nvSpPr>
+        <p:spPr>
+          <a:xfrm>
+            <a:off x="6342736" y="2702662"/>
+            <a:ext cx="329184" cy="329184"/>
+          </a:xfrm>
+          <a:prstGeom prst="roundRect">
+            <a:avLst>
+              <a:gd name="adj" fmla="val 22222"/>
+            </a:avLst>
+          </a:prstGeom>
+          <a:solidFill>
+            <a:srgbClr val="8B0000"/>
+          </a:solidFill>
+          <a:ln/>
+        </p:spPr>
+      </p:sp>
+      <p:sp>
+        <p:nvSpPr>
+          <p:cNvPr id="34" name="Text 32"/>
+          <p:cNvSpPr/>
+          <p:nvPr/>
+        </p:nvSpPr>
+        <p:spPr>
+          <a:xfrm>
+            <a:off x="6342736" y="2702662"/>
+            <a:ext cx="329184" cy="329184"/>
+          </a:xfrm>
+          <a:prstGeom prst="rect">
+            <a:avLst/>
+          </a:prstGeom>
+          <a:noFill/>
+          <a:ln/>
+        </p:spPr>
+        <p:txBody>
+          <a:bodyPr wrap="square" rtlCol="0" anchor="ctr"/>
+          <a:lstStyle/>
+          <a:p>
+            <a:pPr algn="ctr" indent="0" marL="0">
+              <a:buNone/>
+            </a:pPr>
+            <a:r>
+              <a:rPr lang="en-US" sz="1100" b="1" dirty="0">
+                <a:solidFill>
+                  <a:srgbClr val="000000"/>
+                </a:solidFill>
+                <a:latin typeface="Georgia" pitchFamily="34" charset="0"/>
+                <a:ea typeface="Georgia" pitchFamily="34" charset="-122"/>
+                <a:cs typeface="Georgia" pitchFamily="34" charset="-120"/>
+              </a:rPr>
+              <a:t>9</a:t>
+            </a:r>
+            <a:endParaRPr lang="en-US" sz="1100" dirty="0"/>
+          </a:p>
+        </p:txBody>
+      </p:sp>
+      <p:sp>
+        <p:nvSpPr>
+          <p:cNvPr id="35" name="Text 33"/>
+          <p:cNvSpPr/>
+          <p:nvPr/>
+        </p:nvSpPr>
+        <p:spPr>
+          <a:xfrm>
+            <a:off x="6735928" y="2809545"/>
+            <a:ext cx="4957938" cy="115418"/>
+          </a:xfrm>
+          <a:prstGeom prst="rect">
+            <a:avLst/>
+          </a:prstGeom>
+          <a:noFill/>
+          <a:ln/>
+        </p:spPr>
+        <p:txBody>
+          <a:bodyPr wrap="square" lIns="0" tIns="0" rIns="0" bIns="0" rtlCol="0" anchor="ctr"/>
+          <a:lstStyle/>
+          <a:p>
+            <a:pPr indent="0" marL="0">
+              <a:buNone/>
+            </a:pPr>
+            <a:r>
+              <a:rPr lang="en-US" sz="1300" b="1" dirty="0">
+                <a:solidFill>
+                  <a:srgbClr val="2C2B29"/>
+                </a:solidFill>
+                <a:latin typeface="Georgia" pitchFamily="34" charset="0"/>
+                <a:ea typeface="Georgia" pitchFamily="34" charset="-122"/>
+                <a:cs typeface="Georgia" pitchFamily="34" charset="-120"/>
+              </a:rPr>
+              <a:t>Multi-Dimensional Capabilities &amp; Realtime SLA</a:t>
+            </a:r>
+            <a:endParaRPr lang="en-US" sz="1300" dirty="0"/>
+          </a:p>
+        </p:txBody>
+      </p:sp>
+      <p:sp>
+        <p:nvSpPr>
+          <p:cNvPr id="36" name="Shape 34"/>
+          <p:cNvSpPr/>
+          <p:nvPr/>
+        </p:nvSpPr>
+        <p:spPr>
+          <a:xfrm>
+            <a:off x="406390" y="3089554"/>
+            <a:ext cx="5552298" cy="225146"/>
+          </a:xfrm>
+          <a:prstGeom prst="roundRect">
+            <a:avLst>
+              <a:gd name="adj" fmla="val 32491"/>
+            </a:avLst>
+          </a:prstGeom>
+          <a:solidFill>
+            <a:srgbClr val="F5F2EB"/>
+          </a:solidFill>
+          <a:ln w="12700">
+            <a:solidFill>
+              <a:srgbClr val="E0DACD"/>
+            </a:solidFill>
+            <a:prstDash val="solid"/>
+          </a:ln>
+        </p:spPr>
+      </p:sp>
+      <p:sp>
+        <p:nvSpPr>
+          <p:cNvPr id="37" name="Shape 35"/>
+          <p:cNvSpPr/>
+          <p:nvPr/>
+        </p:nvSpPr>
+        <p:spPr>
+          <a:xfrm>
+            <a:off x="516118" y="3037535"/>
+            <a:ext cx="329184" cy="329184"/>
+          </a:xfrm>
+          <a:prstGeom prst="roundRect">
+            <a:avLst>
+              <a:gd name="adj" fmla="val 22222"/>
+            </a:avLst>
+          </a:prstGeom>
+          <a:solidFill>
+            <a:srgbClr val="8B0000"/>
+          </a:solidFill>
+          <a:ln/>
+        </p:spPr>
+      </p:sp>
+      <p:sp>
+        <p:nvSpPr>
+          <p:cNvPr id="38" name="Text 36"/>
+          <p:cNvSpPr/>
+          <p:nvPr/>
+        </p:nvSpPr>
+        <p:spPr>
+          <a:xfrm>
+            <a:off x="516118" y="3037535"/>
+            <a:ext cx="329184" cy="329184"/>
+          </a:xfrm>
+          <a:prstGeom prst="rect">
+            <a:avLst/>
+          </a:prstGeom>
+          <a:noFill/>
+          <a:ln/>
+        </p:spPr>
+        <p:txBody>
+          <a:bodyPr wrap="square" rtlCol="0" anchor="ctr"/>
+          <a:lstStyle/>
+          <a:p>
+            <a:pPr algn="ctr" indent="0" marL="0">
+              <a:buNone/>
+            </a:pPr>
+            <a:r>
+              <a:rPr lang="en-US" sz="1100" b="1" dirty="0">
+                <a:solidFill>
+                  <a:srgbClr val="000000"/>
+                </a:solidFill>
+                <a:latin typeface="Georgia" pitchFamily="34" charset="0"/>
+                <a:ea typeface="Georgia" pitchFamily="34" charset="-122"/>
+                <a:cs typeface="Georgia" pitchFamily="34" charset="-120"/>
+              </a:rPr>
+              <a:t>10</a:t>
+            </a:r>
+            <a:endParaRPr lang="en-US" sz="1100" dirty="0"/>
+          </a:p>
+        </p:txBody>
+      </p:sp>
+      <p:sp>
+        <p:nvSpPr>
+          <p:cNvPr id="39" name="Text 37"/>
+          <p:cNvSpPr/>
+          <p:nvPr/>
+        </p:nvSpPr>
+        <p:spPr>
+          <a:xfrm>
+            <a:off x="909310" y="3144418"/>
+            <a:ext cx="4957938" cy="115418"/>
+          </a:xfrm>
+          <a:prstGeom prst="rect">
+            <a:avLst/>
+          </a:prstGeom>
+          <a:noFill/>
+          <a:ln/>
+        </p:spPr>
+        <p:txBody>
+          <a:bodyPr wrap="square" lIns="0" tIns="0" rIns="0" bIns="0" rtlCol="0" anchor="ctr"/>
+          <a:lstStyle/>
+          <a:p>
+            <a:pPr indent="0" marL="0">
+              <a:buNone/>
+            </a:pPr>
+            <a:r>
+              <a:rPr lang="en-US" sz="1300" b="1" dirty="0">
+                <a:solidFill>
+                  <a:srgbClr val="2C2B29"/>
+                </a:solidFill>
+                <a:latin typeface="Georgia" pitchFamily="34" charset="0"/>
+                <a:ea typeface="Georgia" pitchFamily="34" charset="-122"/>
+                <a:cs typeface="Georgia" pitchFamily="34" charset="-120"/>
+              </a:rPr>
+              <a:t>Object Model &amp; Core Domain Contracts</a:t>
+            </a:r>
+            <a:endParaRPr lang="en-US" sz="1300" dirty="0"/>
+          </a:p>
+        </p:txBody>
+      </p:sp>
+      <p:sp>
+        <p:nvSpPr>
+          <p:cNvPr id="40" name="Text 38"/>
           <p:cNvSpPr/>
           <p:nvPr/>
         </p:nvSpPr>
@@ -5692,7 +7588,7 @@
         </p:nvGraphicFramePr>
         <p:xfrm>
           <a:off x="406390" y="1778000"/>
-          <a:ext cx="5600560" cy="1778000"/>
+          <a:ext cx="5600560" cy="1968500"/>
         </p:xfrm>
         <a:graphic xmlns:a="http://schemas.openxmlformats.org/drawingml/2006/main">
           <a:graphicData uri="http://schemas.openxmlformats.org/drawingml/2006/chart">
@@ -5708,7 +7604,7 @@
         </p:nvGraphicFramePr>
         <p:xfrm>
           <a:off x="6184745" y="1778000"/>
-          <a:ext cx="5600560" cy="1778000"/>
+          <a:ext cx="5600560" cy="1968500"/>
         </p:xfrm>
         <a:graphic xmlns:a="http://schemas.openxmlformats.org/drawingml/2006/main">
           <a:graphicData uri="http://schemas.openxmlformats.org/drawingml/2006/chart">
@@ -6280,6 +8176,1554 @@
       <p:sp>
         <p:nvSpPr>
           <p:cNvPr id="16" name="Text 14"/>
+          <p:cNvSpPr/>
+          <p:nvPr/>
+        </p:nvSpPr>
+        <p:spPr>
+          <a:xfrm>
+            <a:off x="457200" y="6492240"/>
+            <a:ext cx="11277295" cy="228600"/>
+          </a:xfrm>
+          <a:prstGeom prst="rect">
+            <a:avLst/>
+          </a:prstGeom>
+          <a:noFill/>
+          <a:ln/>
+        </p:spPr>
+        <p:txBody>
+          <a:bodyPr wrap="square" rtlCol="0" anchor="ctr"/>
+          <a:lstStyle/>
+          <a:p>
+            <a:pPr indent="0" marL="0">
+              <a:buNone/>
+            </a:pPr>
+            <a:r>
+              <a:rPr lang="en-US" sz="900" b="1" dirty="0">
+                <a:solidFill>
+                  <a:srgbClr val="6B6862"/>
+                </a:solidFill>
+                <a:latin typeface="Georgia" pitchFamily="34" charset="0"/>
+                <a:ea typeface="Georgia" pitchFamily="34" charset="-122"/>
+                <a:cs typeface="Georgia" pitchFamily="34" charset="-120"/>
+              </a:rPr>
+              <a:t>YUMIA V0.1.26 • CONFIDENTIAL</a:t>
+            </a:r>
+            <a:endParaRPr lang="en-US" sz="900" dirty="0"/>
+          </a:p>
+        </p:txBody>
+      </p:sp>
+    </p:spTree>
+  </p:cSld>
+  <p:clrMapOvr>
+    <a:masterClrMapping/>
+  </p:clrMapOvr>
+</p:sld>
+</file>
+
+<file path=ppt/slides/slide8.xml><?xml version="1.0" encoding="utf-8"?>
+<p:sld xmlns:a="http://schemas.openxmlformats.org/drawingml/2006/main" xmlns:r="http://schemas.openxmlformats.org/officeDocument/2006/relationships" xmlns:p="http://schemas.openxmlformats.org/presentationml/2006/main">
+  <p:cSld name="Slide 8">
+    <p:bg>
+      <p:bgPr>
+        <a:solidFill>
+          <a:srgbClr val="FCFBF7"/>
+        </a:solidFill>
+      </p:bgPr>
+    </p:bg>
+    <p:spTree>
+      <p:nvGrpSpPr>
+        <p:cNvPr id="1" name=""/>
+        <p:cNvGrpSpPr/>
+        <p:nvPr/>
+      </p:nvGrpSpPr>
+      <p:grpSpPr>
+        <a:xfrm>
+          <a:off x="0" y="0"/>
+          <a:ext cx="0" cy="0"/>
+          <a:chOff x="0" y="0"/>
+          <a:chExt cx="0" cy="0"/>
+        </a:xfrm>
+      </p:grpSpPr>
+      <p:sp>
+        <p:nvSpPr>
+          <p:cNvPr id="2" name="Text 0"/>
+          <p:cNvSpPr/>
+          <p:nvPr/>
+        </p:nvSpPr>
+        <p:spPr>
+          <a:xfrm>
+            <a:off x="406390" y="406400"/>
+            <a:ext cx="11378916" cy="571500"/>
+          </a:xfrm>
+          <a:prstGeom prst="rect">
+            <a:avLst/>
+          </a:prstGeom>
+          <a:noFill/>
+          <a:ln/>
+        </p:spPr>
+        <p:txBody>
+          <a:bodyPr wrap="square" lIns="0" tIns="0" rIns="0" bIns="0" rtlCol="0" anchor="ctr"/>
+          <a:lstStyle/>
+          <a:p>
+            <a:pPr algn="l" indent="0" marL="0">
+              <a:buNone/>
+            </a:pPr>
+            <a:r>
+              <a:rPr lang="en-US" sz="4200" b="1" dirty="0">
+                <a:solidFill>
+                  <a:srgbClr val="8B0000"/>
+                </a:solidFill>
+                <a:latin typeface="Georgia" pitchFamily="34" charset="0"/>
+                <a:ea typeface="Georgia" pitchFamily="34" charset="-122"/>
+                <a:cs typeface="Georgia" pitchFamily="34" charset="-120"/>
+              </a:rPr>
+              <a:t>Protocol Handshake &amp; Sequence Verification</a:t>
+            </a:r>
+            <a:endParaRPr lang="en-US" sz="4200" dirty="0"/>
+          </a:p>
+        </p:txBody>
+      </p:sp>
+      <p:sp>
+        <p:nvSpPr>
+          <p:cNvPr id="3" name="Text 1"/>
+          <p:cNvSpPr/>
+          <p:nvPr/>
+        </p:nvSpPr>
+        <p:spPr>
+          <a:xfrm>
+            <a:off x="406390" y="1155700"/>
+            <a:ext cx="11378916" cy="444500"/>
+          </a:xfrm>
+          <a:prstGeom prst="rect">
+            <a:avLst/>
+          </a:prstGeom>
+          <a:noFill/>
+          <a:ln/>
+        </p:spPr>
+        <p:txBody>
+          <a:bodyPr wrap="square" lIns="0" tIns="0" rIns="0" bIns="0" rtlCol="0" anchor="ctr"/>
+          <a:lstStyle/>
+          <a:p>
+            <a:pPr algn="l" indent="0" marL="0">
+              <a:buNone/>
+            </a:pPr>
+            <a:r>
+              <a:rPr lang="en-US" sz="3400" b="1" dirty="0">
+                <a:solidFill>
+                  <a:srgbClr val="2C2B29"/>
+                </a:solidFill>
+                <a:latin typeface="Georgia" pitchFamily="34" charset="0"/>
+                <a:ea typeface="Georgia" pitchFamily="34" charset="-122"/>
+                <a:cs typeface="Georgia" pitchFamily="34" charset="-120"/>
+              </a:rPr>
+              <a:t>Cryptographic Key &amp; State Negotiation</a:t>
+            </a:r>
+            <a:endParaRPr lang="en-US" sz="3400" dirty="0"/>
+          </a:p>
+        </p:txBody>
+      </p:sp>
+      <p:sp>
+        <p:nvSpPr>
+          <p:cNvPr id="4" name="Shape 2"/>
+          <p:cNvSpPr/>
+          <p:nvPr/>
+        </p:nvSpPr>
+        <p:spPr>
+          <a:xfrm>
+            <a:off x="1229350" y="2280920"/>
+            <a:ext cx="9144" cy="1830070"/>
+          </a:xfrm>
+          <a:prstGeom prst="line">
+            <a:avLst/>
+          </a:prstGeom>
+          <a:noFill/>
+          <a:ln w="19050">
+            <a:solidFill>
+              <a:srgbClr val="E0DACD"/>
+            </a:solidFill>
+            <a:prstDash val="dash"/>
+          </a:ln>
+        </p:spPr>
+      </p:sp>
+      <p:sp>
+        <p:nvSpPr>
+          <p:cNvPr id="5" name="Shape 3"/>
+          <p:cNvSpPr/>
+          <p:nvPr/>
+        </p:nvSpPr>
+        <p:spPr>
+          <a:xfrm>
+            <a:off x="589270" y="1869440"/>
+            <a:ext cx="1280160" cy="411480"/>
+          </a:xfrm>
+          <a:prstGeom prst="roundRect">
+            <a:avLst>
+              <a:gd name="adj" fmla="val 13333"/>
+            </a:avLst>
+          </a:prstGeom>
+          <a:solidFill>
+            <a:srgbClr val="C29B38"/>
+          </a:solidFill>
+          <a:ln w="19050">
+            <a:solidFill>
+              <a:srgbClr val="8B0000"/>
+            </a:solidFill>
+            <a:prstDash val="solid"/>
+          </a:ln>
+        </p:spPr>
+      </p:sp>
+      <p:sp>
+        <p:nvSpPr>
+          <p:cNvPr id="6" name="Text 4"/>
+          <p:cNvSpPr/>
+          <p:nvPr/>
+        </p:nvSpPr>
+        <p:spPr>
+          <a:xfrm>
+            <a:off x="634990" y="1906016"/>
+            <a:ext cx="1188720" cy="338328"/>
+          </a:xfrm>
+          <a:prstGeom prst="rect">
+            <a:avLst/>
+          </a:prstGeom>
+          <a:noFill/>
+          <a:ln/>
+        </p:spPr>
+        <p:txBody>
+          <a:bodyPr wrap="square" rtlCol="0" anchor="ctr"/>
+          <a:lstStyle/>
+          <a:p>
+            <a:pPr algn="ctr" indent="0" marL="0">
+              <a:buNone/>
+            </a:pPr>
+            <a:r>
+              <a:rPr lang="en-US" sz="1000" b="1" dirty="0">
+                <a:solidFill>
+                  <a:srgbClr val="FFFFFF"/>
+                </a:solidFill>
+                <a:latin typeface="Georgia" pitchFamily="34" charset="0"/>
+                <a:ea typeface="Georgia" pitchFamily="34" charset="-122"/>
+                <a:cs typeface="Georgia" pitchFamily="34" charset="-120"/>
+              </a:rPr>
+              <a:t>Client Node</a:t>
+            </a:r>
+            <a:endParaRPr lang="en-US" sz="1000" dirty="0"/>
+          </a:p>
+        </p:txBody>
+      </p:sp>
+      <p:sp>
+        <p:nvSpPr>
+          <p:cNvPr id="7" name="Shape 5"/>
+          <p:cNvSpPr/>
+          <p:nvPr/>
+        </p:nvSpPr>
+        <p:spPr>
+          <a:xfrm>
+            <a:off x="4473682" y="2280920"/>
+            <a:ext cx="9144" cy="1830070"/>
+          </a:xfrm>
+          <a:prstGeom prst="line">
+            <a:avLst/>
+          </a:prstGeom>
+          <a:noFill/>
+          <a:ln w="19050">
+            <a:solidFill>
+              <a:srgbClr val="E0DACD"/>
+            </a:solidFill>
+            <a:prstDash val="dash"/>
+          </a:ln>
+        </p:spPr>
+      </p:sp>
+      <p:sp>
+        <p:nvSpPr>
+          <p:cNvPr id="8" name="Shape 6"/>
+          <p:cNvSpPr/>
+          <p:nvPr/>
+        </p:nvSpPr>
+        <p:spPr>
+          <a:xfrm>
+            <a:off x="3833602" y="1869440"/>
+            <a:ext cx="1280160" cy="411480"/>
+          </a:xfrm>
+          <a:prstGeom prst="roundRect">
+            <a:avLst>
+              <a:gd name="adj" fmla="val 13333"/>
+            </a:avLst>
+          </a:prstGeom>
+          <a:solidFill>
+            <a:srgbClr val="F5F2EB"/>
+          </a:solidFill>
+          <a:ln w="19050">
+            <a:solidFill>
+              <a:srgbClr val="8B0000"/>
+            </a:solidFill>
+            <a:prstDash val="solid"/>
+          </a:ln>
+        </p:spPr>
+      </p:sp>
+      <p:sp>
+        <p:nvSpPr>
+          <p:cNvPr id="9" name="Text 7"/>
+          <p:cNvSpPr/>
+          <p:nvPr/>
+        </p:nvSpPr>
+        <p:spPr>
+          <a:xfrm>
+            <a:off x="3879322" y="1906016"/>
+            <a:ext cx="1188720" cy="338328"/>
+          </a:xfrm>
+          <a:prstGeom prst="rect">
+            <a:avLst/>
+          </a:prstGeom>
+          <a:noFill/>
+          <a:ln/>
+        </p:spPr>
+        <p:txBody>
+          <a:bodyPr wrap="square" rtlCol="0" anchor="ctr"/>
+          <a:lstStyle/>
+          <a:p>
+            <a:pPr algn="ctr" indent="0" marL="0">
+              <a:buNone/>
+            </a:pPr>
+            <a:r>
+              <a:rPr lang="en-US" sz="900" b="1" dirty="0">
+                <a:solidFill>
+                  <a:srgbClr val="2C2B29"/>
+                </a:solidFill>
+                <a:latin typeface="Georgia" pitchFamily="34" charset="0"/>
+                <a:ea typeface="Georgia" pitchFamily="34" charset="-122"/>
+                <a:cs typeface="Georgia" pitchFamily="34" charset="-120"/>
+              </a:rPr>
+              <a:t>API Mesh Gateway</a:t>
+            </a:r>
+            <a:endParaRPr lang="en-US" sz="900" dirty="0"/>
+          </a:p>
+        </p:txBody>
+      </p:sp>
+      <p:sp>
+        <p:nvSpPr>
+          <p:cNvPr id="10" name="Shape 8"/>
+          <p:cNvSpPr/>
+          <p:nvPr/>
+        </p:nvSpPr>
+        <p:spPr>
+          <a:xfrm>
+            <a:off x="7718014" y="2280920"/>
+            <a:ext cx="9144" cy="1830070"/>
+          </a:xfrm>
+          <a:prstGeom prst="line">
+            <a:avLst/>
+          </a:prstGeom>
+          <a:noFill/>
+          <a:ln w="19050">
+            <a:solidFill>
+              <a:srgbClr val="E0DACD"/>
+            </a:solidFill>
+            <a:prstDash val="dash"/>
+          </a:ln>
+        </p:spPr>
+      </p:sp>
+      <p:sp>
+        <p:nvSpPr>
+          <p:cNvPr id="11" name="Shape 9"/>
+          <p:cNvSpPr/>
+          <p:nvPr/>
+        </p:nvSpPr>
+        <p:spPr>
+          <a:xfrm>
+            <a:off x="7077934" y="1869440"/>
+            <a:ext cx="1280160" cy="411480"/>
+          </a:xfrm>
+          <a:prstGeom prst="roundRect">
+            <a:avLst>
+              <a:gd name="adj" fmla="val 13333"/>
+            </a:avLst>
+          </a:prstGeom>
+          <a:solidFill>
+            <a:srgbClr val="F5F2EB"/>
+          </a:solidFill>
+          <a:ln w="19050">
+            <a:solidFill>
+              <a:srgbClr val="8B0000"/>
+            </a:solidFill>
+            <a:prstDash val="solid"/>
+          </a:ln>
+        </p:spPr>
+      </p:sp>
+      <p:sp>
+        <p:nvSpPr>
+          <p:cNvPr id="12" name="Text 10"/>
+          <p:cNvSpPr/>
+          <p:nvPr/>
+        </p:nvSpPr>
+        <p:spPr>
+          <a:xfrm>
+            <a:off x="7123654" y="1906016"/>
+            <a:ext cx="1188720" cy="338328"/>
+          </a:xfrm>
+          <a:prstGeom prst="rect">
+            <a:avLst/>
+          </a:prstGeom>
+          <a:noFill/>
+          <a:ln/>
+        </p:spPr>
+        <p:txBody>
+          <a:bodyPr wrap="square" rtlCol="0" anchor="ctr"/>
+          <a:lstStyle/>
+          <a:p>
+            <a:pPr algn="ctr" indent="0" marL="0">
+              <a:buNone/>
+            </a:pPr>
+            <a:r>
+              <a:rPr lang="en-US" sz="900" b="1" dirty="0">
+                <a:solidFill>
+                  <a:srgbClr val="2C2B29"/>
+                </a:solidFill>
+                <a:latin typeface="Georgia" pitchFamily="34" charset="0"/>
+                <a:ea typeface="Georgia" pitchFamily="34" charset="-122"/>
+                <a:cs typeface="Georgia" pitchFamily="34" charset="-120"/>
+              </a:rPr>
+              <a:t>Identity Authority</a:t>
+            </a:r>
+            <a:endParaRPr lang="en-US" sz="900" dirty="0"/>
+          </a:p>
+        </p:txBody>
+      </p:sp>
+      <p:sp>
+        <p:nvSpPr>
+          <p:cNvPr id="13" name="Shape 11"/>
+          <p:cNvSpPr/>
+          <p:nvPr/>
+        </p:nvSpPr>
+        <p:spPr>
+          <a:xfrm>
+            <a:off x="10962345" y="2280920"/>
+            <a:ext cx="9144" cy="1830070"/>
+          </a:xfrm>
+          <a:prstGeom prst="line">
+            <a:avLst/>
+          </a:prstGeom>
+          <a:noFill/>
+          <a:ln w="19050">
+            <a:solidFill>
+              <a:srgbClr val="E0DACD"/>
+            </a:solidFill>
+            <a:prstDash val="dash"/>
+          </a:ln>
+        </p:spPr>
+      </p:sp>
+      <p:sp>
+        <p:nvSpPr>
+          <p:cNvPr id="14" name="Shape 12"/>
+          <p:cNvSpPr/>
+          <p:nvPr/>
+        </p:nvSpPr>
+        <p:spPr>
+          <a:xfrm>
+            <a:off x="10322265" y="1869440"/>
+            <a:ext cx="1280160" cy="411480"/>
+          </a:xfrm>
+          <a:prstGeom prst="roundRect">
+            <a:avLst>
+              <a:gd name="adj" fmla="val 13333"/>
+            </a:avLst>
+          </a:prstGeom>
+          <a:solidFill>
+            <a:srgbClr val="F5F2EB"/>
+          </a:solidFill>
+          <a:ln w="19050">
+            <a:solidFill>
+              <a:srgbClr val="8B0000"/>
+            </a:solidFill>
+            <a:prstDash val="solid"/>
+          </a:ln>
+        </p:spPr>
+      </p:sp>
+      <p:sp>
+        <p:nvSpPr>
+          <p:cNvPr id="15" name="Text 13"/>
+          <p:cNvSpPr/>
+          <p:nvPr/>
+        </p:nvSpPr>
+        <p:spPr>
+          <a:xfrm>
+            <a:off x="10367985" y="1906016"/>
+            <a:ext cx="1188720" cy="338328"/>
+          </a:xfrm>
+          <a:prstGeom prst="rect">
+            <a:avLst/>
+          </a:prstGeom>
+          <a:noFill/>
+          <a:ln/>
+        </p:spPr>
+        <p:txBody>
+          <a:bodyPr wrap="square" rtlCol="0" anchor="ctr"/>
+          <a:lstStyle/>
+          <a:p>
+            <a:pPr algn="ctr" indent="0" marL="0">
+              <a:buNone/>
+            </a:pPr>
+            <a:r>
+              <a:rPr lang="en-US" sz="1000" b="1" dirty="0">
+                <a:solidFill>
+                  <a:srgbClr val="2C2B29"/>
+                </a:solidFill>
+                <a:latin typeface="Georgia" pitchFamily="34" charset="0"/>
+                <a:ea typeface="Georgia" pitchFamily="34" charset="-122"/>
+                <a:cs typeface="Georgia" pitchFamily="34" charset="-120"/>
+              </a:rPr>
+              <a:t>HSM Vault</a:t>
+            </a:r>
+            <a:endParaRPr lang="en-US" sz="1000" dirty="0"/>
+          </a:p>
+        </p:txBody>
+      </p:sp>
+      <p:sp>
+        <p:nvSpPr>
+          <p:cNvPr id="16" name="Shape 14"/>
+          <p:cNvSpPr/>
+          <p:nvPr/>
+        </p:nvSpPr>
+        <p:spPr>
+          <a:xfrm>
+            <a:off x="1229350" y="2463800"/>
+            <a:ext cx="3244332" cy="9144"/>
+          </a:xfrm>
+          <a:prstGeom prst="line">
+            <a:avLst/>
+          </a:prstGeom>
+          <a:noFill/>
+          <a:ln w="25400">
+            <a:solidFill>
+              <a:srgbClr val="8B0000"/>
+            </a:solidFill>
+            <a:prstDash val="solid"/>
+            <a:tailEnd type="triangle"/>
+          </a:ln>
+        </p:spPr>
+      </p:sp>
+      <p:sp>
+        <p:nvSpPr>
+          <p:cNvPr id="17" name="Shape 15"/>
+          <p:cNvSpPr/>
+          <p:nvPr/>
+        </p:nvSpPr>
+        <p:spPr>
+          <a:xfrm>
+            <a:off x="1845676" y="2244344"/>
+            <a:ext cx="2011680" cy="201168"/>
+          </a:xfrm>
+          <a:prstGeom prst="roundRect">
+            <a:avLst>
+              <a:gd name="adj" fmla="val 18182"/>
+            </a:avLst>
+          </a:prstGeom>
+          <a:solidFill>
+            <a:srgbClr val="F5F2EB"/>
+          </a:solidFill>
+          <a:ln w="12700">
+            <a:solidFill>
+              <a:srgbClr val="E0DACD"/>
+            </a:solidFill>
+            <a:prstDash val="solid"/>
+          </a:ln>
+        </p:spPr>
+      </p:sp>
+      <p:sp>
+        <p:nvSpPr>
+          <p:cNvPr id="18" name="Text 16"/>
+          <p:cNvSpPr/>
+          <p:nvPr/>
+        </p:nvSpPr>
+        <p:spPr>
+          <a:xfrm>
+            <a:off x="1845676" y="2244344"/>
+            <a:ext cx="2011680" cy="201168"/>
+          </a:xfrm>
+          <a:prstGeom prst="rect">
+            <a:avLst/>
+          </a:prstGeom>
+          <a:noFill/>
+          <a:ln/>
+        </p:spPr>
+        <p:txBody>
+          <a:bodyPr wrap="square" rtlCol="0" anchor="ctr"/>
+          <a:lstStyle/>
+          <a:p>
+            <a:pPr algn="ctr" indent="0" marL="0">
+              <a:buNone/>
+            </a:pPr>
+            <a:r>
+              <a:rPr lang="en-US" sz="850" b="1" dirty="0">
+                <a:solidFill>
+                  <a:srgbClr val="2C2B29"/>
+                </a:solidFill>
+                <a:latin typeface="Georgia" pitchFamily="34" charset="0"/>
+                <a:ea typeface="Georgia" pitchFamily="34" charset="-122"/>
+                <a:cs typeface="Georgia" pitchFamily="34" charset="-120"/>
+              </a:rPr>
+              <a:t>Secure TLS Request + PKCE</a:t>
+            </a:r>
+            <a:endParaRPr lang="en-US" sz="850" dirty="0"/>
+          </a:p>
+        </p:txBody>
+      </p:sp>
+      <p:sp>
+        <p:nvSpPr>
+          <p:cNvPr id="19" name="Shape 17"/>
+          <p:cNvSpPr/>
+          <p:nvPr/>
+        </p:nvSpPr>
+        <p:spPr>
+          <a:xfrm>
+            <a:off x="4473682" y="2723092"/>
+            <a:ext cx="3244332" cy="9144"/>
+          </a:xfrm>
+          <a:prstGeom prst="line">
+            <a:avLst/>
+          </a:prstGeom>
+          <a:noFill/>
+          <a:ln w="25400">
+            <a:solidFill>
+              <a:srgbClr val="8B0000"/>
+            </a:solidFill>
+            <a:prstDash val="solid"/>
+            <a:tailEnd type="triangle"/>
+          </a:ln>
+        </p:spPr>
+      </p:sp>
+      <p:sp>
+        <p:nvSpPr>
+          <p:cNvPr id="20" name="Shape 18"/>
+          <p:cNvSpPr/>
+          <p:nvPr/>
+        </p:nvSpPr>
+        <p:spPr>
+          <a:xfrm>
+            <a:off x="5309464" y="2503636"/>
+            <a:ext cx="1572768" cy="201168"/>
+          </a:xfrm>
+          <a:prstGeom prst="roundRect">
+            <a:avLst>
+              <a:gd name="adj" fmla="val 18182"/>
+            </a:avLst>
+          </a:prstGeom>
+          <a:solidFill>
+            <a:srgbClr val="F5F2EB"/>
+          </a:solidFill>
+          <a:ln w="12700">
+            <a:solidFill>
+              <a:srgbClr val="E0DACD"/>
+            </a:solidFill>
+            <a:prstDash val="solid"/>
+          </a:ln>
+        </p:spPr>
+      </p:sp>
+      <p:sp>
+        <p:nvSpPr>
+          <p:cNvPr id="21" name="Text 19"/>
+          <p:cNvSpPr/>
+          <p:nvPr/>
+        </p:nvSpPr>
+        <p:spPr>
+          <a:xfrm>
+            <a:off x="5309464" y="2503636"/>
+            <a:ext cx="1572768" cy="201168"/>
+          </a:xfrm>
+          <a:prstGeom prst="rect">
+            <a:avLst/>
+          </a:prstGeom>
+          <a:noFill/>
+          <a:ln/>
+        </p:spPr>
+        <p:txBody>
+          <a:bodyPr wrap="square" rtlCol="0" anchor="ctr"/>
+          <a:lstStyle/>
+          <a:p>
+            <a:pPr algn="ctr" indent="0" marL="0">
+              <a:buNone/>
+            </a:pPr>
+            <a:r>
+              <a:rPr lang="en-US" sz="850" b="1" dirty="0">
+                <a:solidFill>
+                  <a:srgbClr val="2C2B29"/>
+                </a:solidFill>
+                <a:latin typeface="Georgia" pitchFamily="34" charset="0"/>
+                <a:ea typeface="Georgia" pitchFamily="34" charset="-122"/>
+                <a:cs typeface="Georgia" pitchFamily="34" charset="-120"/>
+              </a:rPr>
+              <a:t>/oauth/v2/handshake</a:t>
+            </a:r>
+            <a:endParaRPr lang="en-US" sz="850" dirty="0"/>
+          </a:p>
+        </p:txBody>
+      </p:sp>
+      <p:sp>
+        <p:nvSpPr>
+          <p:cNvPr id="22" name="Shape 20"/>
+          <p:cNvSpPr/>
+          <p:nvPr/>
+        </p:nvSpPr>
+        <p:spPr>
+          <a:xfrm>
+            <a:off x="7718014" y="2982383"/>
+            <a:ext cx="3244332" cy="9144"/>
+          </a:xfrm>
+          <a:prstGeom prst="line">
+            <a:avLst/>
+          </a:prstGeom>
+          <a:noFill/>
+          <a:ln w="25400">
+            <a:solidFill>
+              <a:srgbClr val="8B0000"/>
+            </a:solidFill>
+            <a:prstDash val="solid"/>
+            <a:tailEnd type="triangle"/>
+          </a:ln>
+        </p:spPr>
+      </p:sp>
+      <p:sp>
+        <p:nvSpPr>
+          <p:cNvPr id="23" name="Shape 21"/>
+          <p:cNvSpPr/>
+          <p:nvPr/>
+        </p:nvSpPr>
+        <p:spPr>
+          <a:xfrm>
+            <a:off x="8590371" y="2762927"/>
+            <a:ext cx="1499616" cy="201168"/>
+          </a:xfrm>
+          <a:prstGeom prst="roundRect">
+            <a:avLst>
+              <a:gd name="adj" fmla="val 18182"/>
+            </a:avLst>
+          </a:prstGeom>
+          <a:solidFill>
+            <a:srgbClr val="F5F2EB"/>
+          </a:solidFill>
+          <a:ln w="12700">
+            <a:solidFill>
+              <a:srgbClr val="E0DACD"/>
+            </a:solidFill>
+            <a:prstDash val="solid"/>
+          </a:ln>
+        </p:spPr>
+      </p:sp>
+      <p:sp>
+        <p:nvSpPr>
+          <p:cNvPr id="24" name="Text 22"/>
+          <p:cNvSpPr/>
+          <p:nvPr/>
+        </p:nvSpPr>
+        <p:spPr>
+          <a:xfrm>
+            <a:off x="8590371" y="2762927"/>
+            <a:ext cx="1499616" cy="201168"/>
+          </a:xfrm>
+          <a:prstGeom prst="rect">
+            <a:avLst/>
+          </a:prstGeom>
+          <a:noFill/>
+          <a:ln/>
+        </p:spPr>
+        <p:txBody>
+          <a:bodyPr wrap="square" rtlCol="0" anchor="ctr"/>
+          <a:lstStyle/>
+          <a:p>
+            <a:pPr algn="ctr" indent="0" marL="0">
+              <a:buNone/>
+            </a:pPr>
+            <a:r>
+              <a:rPr lang="en-US" sz="850" b="1" dirty="0">
+                <a:solidFill>
+                  <a:srgbClr val="2C2B29"/>
+                </a:solidFill>
+                <a:latin typeface="Georgia" pitchFamily="34" charset="0"/>
+                <a:ea typeface="Georgia" pitchFamily="34" charset="-122"/>
+                <a:cs typeface="Georgia" pitchFamily="34" charset="-120"/>
+              </a:rPr>
+              <a:t>Fetch Session Keys</a:t>
+            </a:r>
+            <a:endParaRPr lang="en-US" sz="850" dirty="0"/>
+          </a:p>
+        </p:txBody>
+      </p:sp>
+      <p:sp>
+        <p:nvSpPr>
+          <p:cNvPr id="25" name="Shape 23"/>
+          <p:cNvSpPr/>
+          <p:nvPr/>
+        </p:nvSpPr>
+        <p:spPr>
+          <a:xfrm flipH="1">
+            <a:off x="7718014" y="3241675"/>
+            <a:ext cx="3244332" cy="9144"/>
+          </a:xfrm>
+          <a:prstGeom prst="line">
+            <a:avLst/>
+          </a:prstGeom>
+          <a:noFill/>
+          <a:ln w="25400">
+            <a:solidFill>
+              <a:srgbClr val="C29B38"/>
+            </a:solidFill>
+            <a:prstDash val="dash"/>
+            <a:tailEnd type="triangle"/>
+          </a:ln>
+        </p:spPr>
+      </p:sp>
+      <p:sp>
+        <p:nvSpPr>
+          <p:cNvPr id="26" name="Shape 24"/>
+          <p:cNvSpPr/>
+          <p:nvPr/>
+        </p:nvSpPr>
+        <p:spPr>
+          <a:xfrm>
+            <a:off x="8626947" y="3022219"/>
+            <a:ext cx="1426464" cy="201168"/>
+          </a:xfrm>
+          <a:prstGeom prst="roundRect">
+            <a:avLst>
+              <a:gd name="adj" fmla="val 18182"/>
+            </a:avLst>
+          </a:prstGeom>
+          <a:solidFill>
+            <a:srgbClr val="F5F2EB"/>
+          </a:solidFill>
+          <a:ln w="12700">
+            <a:solidFill>
+              <a:srgbClr val="E0DACD"/>
+            </a:solidFill>
+            <a:prstDash val="solid"/>
+          </a:ln>
+        </p:spPr>
+      </p:sp>
+      <p:sp>
+        <p:nvSpPr>
+          <p:cNvPr id="27" name="Text 25"/>
+          <p:cNvSpPr/>
+          <p:nvPr/>
+        </p:nvSpPr>
+        <p:spPr>
+          <a:xfrm>
+            <a:off x="8626947" y="3022219"/>
+            <a:ext cx="1426464" cy="201168"/>
+          </a:xfrm>
+          <a:prstGeom prst="rect">
+            <a:avLst/>
+          </a:prstGeom>
+          <a:noFill/>
+          <a:ln/>
+        </p:spPr>
+        <p:txBody>
+          <a:bodyPr wrap="square" rtlCol="0" anchor="ctr"/>
+          <a:lstStyle/>
+          <a:p>
+            <a:pPr algn="ctr" indent="0" marL="0">
+              <a:buNone/>
+            </a:pPr>
+            <a:r>
+              <a:rPr lang="en-US" sz="850" b="1" dirty="0">
+                <a:solidFill>
+                  <a:srgbClr val="2C2B29"/>
+                </a:solidFill>
+                <a:latin typeface="Georgia" pitchFamily="34" charset="0"/>
+                <a:ea typeface="Georgia" pitchFamily="34" charset="-122"/>
+                <a:cs typeface="Georgia" pitchFamily="34" charset="-120"/>
+              </a:rPr>
+              <a:t>Ephemeral Keypair</a:t>
+            </a:r>
+            <a:endParaRPr lang="en-US" sz="850" dirty="0"/>
+          </a:p>
+        </p:txBody>
+      </p:sp>
+      <p:sp>
+        <p:nvSpPr>
+          <p:cNvPr id="28" name="Shape 26"/>
+          <p:cNvSpPr/>
+          <p:nvPr/>
+        </p:nvSpPr>
+        <p:spPr>
+          <a:xfrm flipH="1">
+            <a:off x="4473682" y="3500967"/>
+            <a:ext cx="3244332" cy="9144"/>
+          </a:xfrm>
+          <a:prstGeom prst="line">
+            <a:avLst/>
+          </a:prstGeom>
+          <a:noFill/>
+          <a:ln w="25400">
+            <a:solidFill>
+              <a:srgbClr val="C29B38"/>
+            </a:solidFill>
+            <a:prstDash val="dash"/>
+            <a:tailEnd type="triangle"/>
+          </a:ln>
+        </p:spPr>
+      </p:sp>
+      <p:sp>
+        <p:nvSpPr>
+          <p:cNvPr id="29" name="Shape 27"/>
+          <p:cNvSpPr/>
+          <p:nvPr/>
+        </p:nvSpPr>
+        <p:spPr>
+          <a:xfrm>
+            <a:off x="5053432" y="3281511"/>
+            <a:ext cx="2084832" cy="201168"/>
+          </a:xfrm>
+          <a:prstGeom prst="roundRect">
+            <a:avLst>
+              <a:gd name="adj" fmla="val 18182"/>
+            </a:avLst>
+          </a:prstGeom>
+          <a:solidFill>
+            <a:srgbClr val="F5F2EB"/>
+          </a:solidFill>
+          <a:ln w="12700">
+            <a:solidFill>
+              <a:srgbClr val="E0DACD"/>
+            </a:solidFill>
+            <a:prstDash val="solid"/>
+          </a:ln>
+        </p:spPr>
+      </p:sp>
+      <p:sp>
+        <p:nvSpPr>
+          <p:cNvPr id="30" name="Text 28"/>
+          <p:cNvSpPr/>
+          <p:nvPr/>
+        </p:nvSpPr>
+        <p:spPr>
+          <a:xfrm>
+            <a:off x="5053432" y="3281511"/>
+            <a:ext cx="2084832" cy="201168"/>
+          </a:xfrm>
+          <a:prstGeom prst="rect">
+            <a:avLst/>
+          </a:prstGeom>
+          <a:noFill/>
+          <a:ln/>
+        </p:spPr>
+        <p:txBody>
+          <a:bodyPr wrap="square" rtlCol="0" anchor="ctr"/>
+          <a:lstStyle/>
+          <a:p>
+            <a:pPr algn="ctr" indent="0" marL="0">
+              <a:buNone/>
+            </a:pPr>
+            <a:r>
+              <a:rPr lang="en-US" sz="850" b="1" dirty="0">
+                <a:solidFill>
+                  <a:srgbClr val="2C2B29"/>
+                </a:solidFill>
+                <a:latin typeface="Georgia" pitchFamily="34" charset="0"/>
+                <a:ea typeface="Georgia" pitchFamily="34" charset="-122"/>
+                <a:cs typeface="Georgia" pitchFamily="34" charset="-120"/>
+              </a:rPr>
+              <a:t>Verified Token &amp; Signature</a:t>
+            </a:r>
+            <a:endParaRPr lang="en-US" sz="850" dirty="0"/>
+          </a:p>
+        </p:txBody>
+      </p:sp>
+      <p:sp>
+        <p:nvSpPr>
+          <p:cNvPr id="31" name="Shape 29"/>
+          <p:cNvSpPr/>
+          <p:nvPr/>
+        </p:nvSpPr>
+        <p:spPr>
+          <a:xfrm flipH="1">
+            <a:off x="1229350" y="3760258"/>
+            <a:ext cx="3244332" cy="9144"/>
+          </a:xfrm>
+          <a:prstGeom prst="line">
+            <a:avLst/>
+          </a:prstGeom>
+          <a:noFill/>
+          <a:ln w="25400">
+            <a:solidFill>
+              <a:srgbClr val="C29B38"/>
+            </a:solidFill>
+            <a:prstDash val="dash"/>
+            <a:tailEnd type="triangle"/>
+          </a:ln>
+        </p:spPr>
+      </p:sp>
+      <p:sp>
+        <p:nvSpPr>
+          <p:cNvPr id="32" name="Shape 30"/>
+          <p:cNvSpPr/>
+          <p:nvPr/>
+        </p:nvSpPr>
+        <p:spPr>
+          <a:xfrm>
+            <a:off x="2101708" y="3540802"/>
+            <a:ext cx="1499616" cy="201168"/>
+          </a:xfrm>
+          <a:prstGeom prst="roundRect">
+            <a:avLst>
+              <a:gd name="adj" fmla="val 18182"/>
+            </a:avLst>
+          </a:prstGeom>
+          <a:solidFill>
+            <a:srgbClr val="F5F2EB"/>
+          </a:solidFill>
+          <a:ln w="12700">
+            <a:solidFill>
+              <a:srgbClr val="E0DACD"/>
+            </a:solidFill>
+            <a:prstDash val="solid"/>
+          </a:ln>
+        </p:spPr>
+      </p:sp>
+      <p:sp>
+        <p:nvSpPr>
+          <p:cNvPr id="33" name="Text 31"/>
+          <p:cNvSpPr/>
+          <p:nvPr/>
+        </p:nvSpPr>
+        <p:spPr>
+          <a:xfrm>
+            <a:off x="2101708" y="3540802"/>
+            <a:ext cx="1499616" cy="201168"/>
+          </a:xfrm>
+          <a:prstGeom prst="rect">
+            <a:avLst/>
+          </a:prstGeom>
+          <a:noFill/>
+          <a:ln/>
+        </p:spPr>
+        <p:txBody>
+          <a:bodyPr wrap="square" rtlCol="0" anchor="ctr"/>
+          <a:lstStyle/>
+          <a:p>
+            <a:pPr algn="ctr" indent="0" marL="0">
+              <a:buNone/>
+            </a:pPr>
+            <a:r>
+              <a:rPr lang="en-US" sz="850" b="1" dirty="0">
+                <a:solidFill>
+                  <a:srgbClr val="2C2B29"/>
+                </a:solidFill>
+                <a:latin typeface="Georgia" pitchFamily="34" charset="0"/>
+                <a:ea typeface="Georgia" pitchFamily="34" charset="-122"/>
+                <a:cs typeface="Georgia" pitchFamily="34" charset="-120"/>
+              </a:rPr>
+              <a:t>200 OK + JWT Proof</a:t>
+            </a:r>
+            <a:endParaRPr lang="en-US" sz="850" dirty="0"/>
+          </a:p>
+        </p:txBody>
+      </p:sp>
+      <p:sp>
+        <p:nvSpPr>
+          <p:cNvPr id="34" name="Shape 32"/>
+          <p:cNvSpPr/>
+          <p:nvPr/>
+        </p:nvSpPr>
+        <p:spPr>
+          <a:xfrm>
+            <a:off x="7169374" y="3836670"/>
+            <a:ext cx="1097280" cy="320040"/>
+          </a:xfrm>
+          <a:prstGeom prst="roundRect">
+            <a:avLst>
+              <a:gd name="adj" fmla="val 11429"/>
+            </a:avLst>
+          </a:prstGeom>
+          <a:solidFill>
+            <a:srgbClr val="E65100"/>
+          </a:solidFill>
+          <a:ln w="12700">
+            <a:solidFill>
+              <a:srgbClr val="E0DACD"/>
+            </a:solidFill>
+            <a:prstDash val="solid"/>
+          </a:ln>
+        </p:spPr>
+      </p:sp>
+      <p:sp>
+        <p:nvSpPr>
+          <p:cNvPr id="35" name="Text 33"/>
+          <p:cNvSpPr/>
+          <p:nvPr/>
+        </p:nvSpPr>
+        <p:spPr>
+          <a:xfrm>
+            <a:off x="7215094" y="3873246"/>
+            <a:ext cx="1005840" cy="246888"/>
+          </a:xfrm>
+          <a:prstGeom prst="rect">
+            <a:avLst/>
+          </a:prstGeom>
+          <a:noFill/>
+          <a:ln/>
+        </p:spPr>
+        <p:txBody>
+          <a:bodyPr wrap="square" rtlCol="0" anchor="ctr"/>
+          <a:lstStyle/>
+          <a:p>
+            <a:pPr algn="ctr" indent="0" marL="0">
+              <a:buNone/>
+            </a:pPr>
+            <a:r>
+              <a:rPr lang="en-US" sz="800" b="1" dirty="0">
+                <a:solidFill>
+                  <a:srgbClr val="000000"/>
+                </a:solidFill>
+                <a:latin typeface="Georgia" pitchFamily="34" charset="0"/>
+                <a:ea typeface="Georgia" pitchFamily="34" charset="-122"/>
+                <a:cs typeface="Georgia" pitchFamily="34" charset="-120"/>
+              </a:rPr>
+              <a:t>Token validity window: 3600s</a:t>
+            </a:r>
+            <a:endParaRPr lang="en-US" sz="800" dirty="0"/>
+          </a:p>
+        </p:txBody>
+      </p:sp>
+      <p:sp>
+        <p:nvSpPr>
+          <p:cNvPr id="36" name="Text 34"/>
+          <p:cNvSpPr/>
+          <p:nvPr/>
+        </p:nvSpPr>
+        <p:spPr>
+          <a:xfrm>
+            <a:off x="457200" y="6492240"/>
+            <a:ext cx="11277295" cy="228600"/>
+          </a:xfrm>
+          <a:prstGeom prst="rect">
+            <a:avLst/>
+          </a:prstGeom>
+          <a:noFill/>
+          <a:ln/>
+        </p:spPr>
+        <p:txBody>
+          <a:bodyPr wrap="square" rtlCol="0" anchor="ctr"/>
+          <a:lstStyle/>
+          <a:p>
+            <a:pPr indent="0" marL="0">
+              <a:buNone/>
+            </a:pPr>
+            <a:r>
+              <a:rPr lang="en-US" sz="900" b="1" dirty="0">
+                <a:solidFill>
+                  <a:srgbClr val="6B6862"/>
+                </a:solidFill>
+                <a:latin typeface="Georgia" pitchFamily="34" charset="0"/>
+                <a:ea typeface="Georgia" pitchFamily="34" charset="-122"/>
+                <a:cs typeface="Georgia" pitchFamily="34" charset="-120"/>
+              </a:rPr>
+              <a:t>YUMIA V0.1.26 • CONFIDENTIAL</a:t>
+            </a:r>
+            <a:endParaRPr lang="en-US" sz="900" dirty="0"/>
+          </a:p>
+        </p:txBody>
+      </p:sp>
+    </p:spTree>
+  </p:cSld>
+  <p:clrMapOvr>
+    <a:masterClrMapping/>
+  </p:clrMapOvr>
+</p:sld>
+</file>
+
+<file path=ppt/slides/slide9.xml><?xml version="1.0" encoding="utf-8"?>
+<p:sld xmlns:a="http://schemas.openxmlformats.org/drawingml/2006/main" xmlns:r="http://schemas.openxmlformats.org/officeDocument/2006/relationships" xmlns:p="http://schemas.openxmlformats.org/presentationml/2006/main">
+  <p:cSld name="Slide 9">
+    <p:bg>
+      <p:bgPr>
+        <a:solidFill>
+          <a:srgbClr val="FCFBF7"/>
+        </a:solidFill>
+      </p:bgPr>
+    </p:bg>
+    <p:spTree>
+      <p:nvGrpSpPr>
+        <p:cNvPr id="1" name=""/>
+        <p:cNvGrpSpPr/>
+        <p:nvPr/>
+      </p:nvGrpSpPr>
+      <p:grpSpPr>
+        <a:xfrm>
+          <a:off x="0" y="0"/>
+          <a:ext cx="0" cy="0"/>
+          <a:chOff x="0" y="0"/>
+          <a:chExt cx="0" cy="0"/>
+        </a:xfrm>
+      </p:grpSpPr>
+      <p:sp>
+        <p:nvSpPr>
+          <p:cNvPr id="2" name="Text 0"/>
+          <p:cNvSpPr/>
+          <p:nvPr/>
+        </p:nvSpPr>
+        <p:spPr>
+          <a:xfrm>
+            <a:off x="406390" y="406400"/>
+            <a:ext cx="11378916" cy="571500"/>
+          </a:xfrm>
+          <a:prstGeom prst="rect">
+            <a:avLst/>
+          </a:prstGeom>
+          <a:noFill/>
+          <a:ln/>
+        </p:spPr>
+        <p:txBody>
+          <a:bodyPr wrap="square" lIns="0" tIns="0" rIns="0" bIns="0" rtlCol="0" anchor="ctr"/>
+          <a:lstStyle/>
+          <a:p>
+            <a:pPr algn="l" indent="0" marL="0">
+              <a:buNone/>
+            </a:pPr>
+            <a:r>
+              <a:rPr lang="en-US" sz="4200" b="1" dirty="0">
+                <a:solidFill>
+                  <a:srgbClr val="8B0000"/>
+                </a:solidFill>
+                <a:latin typeface="Georgia" pitchFamily="34" charset="0"/>
+                <a:ea typeface="Georgia" pitchFamily="34" charset="-122"/>
+                <a:cs typeface="Georgia" pitchFamily="34" charset="-120"/>
+              </a:rPr>
+              <a:t>Multi-Dimensional Capabilities &amp; Realtime SLA</a:t>
+            </a:r>
+            <a:endParaRPr lang="en-US" sz="4200" dirty="0"/>
+          </a:p>
+        </p:txBody>
+      </p:sp>
+      <p:sp>
+        <p:nvSpPr>
+          <p:cNvPr id="3" name="Text 1"/>
+          <p:cNvSpPr/>
+          <p:nvPr/>
+        </p:nvSpPr>
+        <p:spPr>
+          <a:xfrm>
+            <a:off x="406390" y="1155700"/>
+            <a:ext cx="11378916" cy="444500"/>
+          </a:xfrm>
+          <a:prstGeom prst="rect">
+            <a:avLst/>
+          </a:prstGeom>
+          <a:noFill/>
+          <a:ln/>
+        </p:spPr>
+        <p:txBody>
+          <a:bodyPr wrap="square" lIns="0" tIns="0" rIns="0" bIns="0" rtlCol="0" anchor="ctr"/>
+          <a:lstStyle/>
+          <a:p>
+            <a:pPr algn="l" indent="0" marL="0">
+              <a:buNone/>
+            </a:pPr>
+            <a:r>
+              <a:rPr lang="en-US" sz="3400" b="1" dirty="0">
+                <a:solidFill>
+                  <a:srgbClr val="2C2B29"/>
+                </a:solidFill>
+                <a:latin typeface="Georgia" pitchFamily="34" charset="0"/>
+                <a:ea typeface="Georgia" pitchFamily="34" charset="-122"/>
+                <a:cs typeface="Georgia" pitchFamily="34" charset="-120"/>
+              </a:rPr>
+              <a:t>Dynamic Telemetry &amp; Capability Radar</a:t>
+            </a:r>
+            <a:endParaRPr lang="en-US" sz="3400" dirty="0"/>
+          </a:p>
+        </p:txBody>
+      </p:sp>
+      <p:sp>
+        <p:nvSpPr>
+          <p:cNvPr id="4" name="Shape 2"/>
+          <p:cNvSpPr/>
+          <p:nvPr/>
+        </p:nvSpPr>
+        <p:spPr>
+          <a:xfrm>
+            <a:off x="406390" y="1778000"/>
+            <a:ext cx="5600560" cy="2222500"/>
+          </a:xfrm>
+          <a:prstGeom prst="roundRect">
+            <a:avLst>
+              <a:gd name="adj" fmla="val 4114"/>
+            </a:avLst>
+          </a:prstGeom>
+          <a:solidFill>
+            <a:srgbClr val="F5F2EB"/>
+          </a:solidFill>
+          <a:ln w="12700">
+            <a:solidFill>
+              <a:srgbClr val="E0DACD"/>
+            </a:solidFill>
+            <a:prstDash val="solid"/>
+          </a:ln>
+        </p:spPr>
+      </p:sp>
+      <p:sp>
+        <p:nvSpPr>
+          <p:cNvPr id="5" name="Text 3"/>
+          <p:cNvSpPr/>
+          <p:nvPr/>
+        </p:nvSpPr>
+        <p:spPr>
+          <a:xfrm>
+            <a:off x="406390" y="1887728"/>
+            <a:ext cx="5600560" cy="320040"/>
+          </a:xfrm>
+          <a:prstGeom prst="rect">
+            <a:avLst/>
+          </a:prstGeom>
+          <a:noFill/>
+          <a:ln/>
+        </p:spPr>
+        <p:txBody>
+          <a:bodyPr wrap="square" rtlCol="0" anchor="ctr"/>
+          <a:lstStyle/>
+          <a:p>
+            <a:pPr algn="ctr" indent="0" marL="0">
+              <a:buNone/>
+            </a:pPr>
+            <a:r>
+              <a:rPr lang="en-US" sz="1400" b="1" dirty="0">
+                <a:solidFill>
+                  <a:srgbClr val="8B0000"/>
+                </a:solidFill>
+                <a:latin typeface="Georgia" pitchFamily="34" charset="0"/>
+                <a:ea typeface="Georgia" pitchFamily="34" charset="-122"/>
+                <a:cs typeface="Georgia" pitchFamily="34" charset="-120"/>
+              </a:rPr>
+              <a:t>Engine Capability Radar</a:t>
+            </a:r>
+            <a:endParaRPr lang="en-US" sz="1400" dirty="0"/>
+          </a:p>
+        </p:txBody>
+      </p:sp>
+      <p:sp>
+        <p:nvSpPr>
+          <p:cNvPr id="6" name="Text 4"/>
+          <p:cNvSpPr/>
+          <p:nvPr/>
+        </p:nvSpPr>
+        <p:spPr>
+          <a:xfrm>
+            <a:off x="589270" y="2235200"/>
+            <a:ext cx="5234800" cy="1673860"/>
+          </a:xfrm>
+          <a:prstGeom prst="rect">
+            <a:avLst/>
+          </a:prstGeom>
+          <a:noFill/>
+          <a:ln/>
+        </p:spPr>
+        <p:txBody>
+          <a:bodyPr wrap="square" rtlCol="0" anchor="ctr"/>
+          <a:lstStyle/>
+          <a:p>
+            <a:pPr algn="ctr" indent="0" marL="0">
+              <a:buNone/>
+            </a:pPr>
+            <a:r>
+              <a:rPr lang="en-US" sz="1200" b="1" dirty="0">
+                <a:solidFill>
+                  <a:srgbClr val="2C2B29"/>
+                </a:solidFill>
+                <a:latin typeface="Georgia" pitchFamily="34" charset="0"/>
+                <a:ea typeface="Georgia" pitchFamily="34" charset="-122"/>
+                <a:cs typeface="Georgia" pitchFamily="34" charset="-120"/>
+              </a:rPr>
+              <a:t>[RADAR ASSESSMENT]</a:t>
+            </a:r>
+            <a:endParaRPr lang="en-US" sz="1200" dirty="0"/>
+          </a:p>
+          <a:p>
+            <a:pPr algn="ctr" indent="0" marL="0">
+              <a:buNone/>
+            </a:pPr>
+            <a:endParaRPr lang="en-US" sz="1200" dirty="0"/>
+          </a:p>
+          <a:p>
+            <a:pPr algn="ctr" indent="0" marL="0">
+              <a:buNone/>
+            </a:pPr>
+            <a:r>
+              <a:rPr lang="en-US" sz="1200" b="1" dirty="0">
+                <a:solidFill>
+                  <a:srgbClr val="2C2B29"/>
+                </a:solidFill>
+                <a:latin typeface="Georgia" pitchFamily="34" charset="0"/>
+                <a:ea typeface="Georgia" pitchFamily="34" charset="-122"/>
+                <a:cs typeface="Georgia" pitchFamily="34" charset="-120"/>
+              </a:rPr>
+              <a:t>Throughput: 96   •   Low Latency: 92   •   Scalability: 98   •   Memory Efficiency: 90   •   Resilience: 95</a:t>
+            </a:r>
+            <a:endParaRPr lang="en-US" sz="1200" dirty="0"/>
+          </a:p>
+        </p:txBody>
+      </p:sp>
+      <p:sp>
+        <p:nvSpPr>
+          <p:cNvPr id="7" name="Shape 5"/>
+          <p:cNvSpPr/>
+          <p:nvPr/>
+        </p:nvSpPr>
+        <p:spPr>
+          <a:xfrm>
+            <a:off x="6184745" y="1778000"/>
+            <a:ext cx="5600560" cy="1587500"/>
+          </a:xfrm>
+          <a:prstGeom prst="roundRect">
+            <a:avLst>
+              <a:gd name="adj" fmla="val 5760"/>
+            </a:avLst>
+          </a:prstGeom>
+          <a:solidFill>
+            <a:srgbClr val="F5F2EB"/>
+          </a:solidFill>
+          <a:ln w="12700">
+            <a:solidFill>
+              <a:srgbClr val="E0DACD"/>
+            </a:solidFill>
+            <a:prstDash val="solid"/>
+          </a:ln>
+        </p:spPr>
+      </p:sp>
+      <p:sp>
+        <p:nvSpPr>
+          <p:cNvPr id="8" name="Text 6"/>
+          <p:cNvSpPr/>
+          <p:nvPr/>
+        </p:nvSpPr>
+        <p:spPr>
+          <a:xfrm>
+            <a:off x="6184745" y="1915160"/>
+            <a:ext cx="5600560" cy="320040"/>
+          </a:xfrm>
+          <a:prstGeom prst="rect">
+            <a:avLst/>
+          </a:prstGeom>
+          <a:noFill/>
+          <a:ln/>
+        </p:spPr>
+        <p:txBody>
+          <a:bodyPr wrap="square" rtlCol="0" anchor="ctr"/>
+          <a:lstStyle/>
+          <a:p>
+            <a:pPr algn="ctr" indent="0" marL="0">
+              <a:buNone/>
+            </a:pPr>
+            <a:r>
+              <a:rPr lang="en-US" sz="1400" b="1" dirty="0">
+                <a:solidFill>
+                  <a:srgbClr val="8B0000"/>
+                </a:solidFill>
+                <a:latin typeface="Georgia" pitchFamily="34" charset="0"/>
+                <a:ea typeface="Georgia" pitchFamily="34" charset="-122"/>
+                <a:cs typeface="Georgia" pitchFamily="34" charset="-120"/>
+              </a:rPr>
+              <a:t>Real-time Cluster SLA</a:t>
+            </a:r>
+            <a:endParaRPr lang="en-US" sz="1400" dirty="0"/>
+          </a:p>
+        </p:txBody>
+      </p:sp>
+      <p:sp>
+        <p:nvSpPr>
+          <p:cNvPr id="9" name="Text 7"/>
+          <p:cNvSpPr/>
+          <p:nvPr/>
+        </p:nvSpPr>
+        <p:spPr>
+          <a:xfrm>
+            <a:off x="6184745" y="2235200"/>
+            <a:ext cx="5600560" cy="731520"/>
+          </a:xfrm>
+          <a:prstGeom prst="rect">
+            <a:avLst/>
+          </a:prstGeom>
+          <a:noFill/>
+          <a:ln/>
+        </p:spPr>
+        <p:txBody>
+          <a:bodyPr wrap="square" rtlCol="0" anchor="ctr"/>
+          <a:lstStyle/>
+          <a:p>
+            <a:pPr algn="ctr" indent="0" marL="0">
+              <a:buNone/>
+            </a:pPr>
+            <a:r>
+              <a:rPr lang="en-US" sz="3600" b="1" dirty="0">
+                <a:solidFill>
+                  <a:srgbClr val="2C2B29"/>
+                </a:solidFill>
+                <a:latin typeface="Georgia" pitchFamily="34" charset="0"/>
+                <a:ea typeface="Georgia" pitchFamily="34" charset="-122"/>
+                <a:cs typeface="Georgia" pitchFamily="34" charset="-120"/>
+              </a:rPr>
+              <a:t>99.98%</a:t>
+            </a:r>
+            <a:endParaRPr lang="en-US" sz="3600" dirty="0"/>
+          </a:p>
+        </p:txBody>
+      </p:sp>
+      <p:sp>
+        <p:nvSpPr>
+          <p:cNvPr id="10" name="Text 8"/>
+          <p:cNvSpPr/>
+          <p:nvPr/>
+        </p:nvSpPr>
+        <p:spPr>
+          <a:xfrm>
+            <a:off x="6184745" y="2966720"/>
+            <a:ext cx="5600560" cy="274320"/>
+          </a:xfrm>
+          <a:prstGeom prst="rect">
+            <a:avLst/>
+          </a:prstGeom>
+          <a:noFill/>
+          <a:ln/>
+        </p:spPr>
+        <p:txBody>
+          <a:bodyPr wrap="square" rtlCol="0" anchor="ctr"/>
+          <a:lstStyle/>
+          <a:p>
+            <a:pPr algn="ctr" indent="0" marL="0">
+              <a:buNone/>
+            </a:pPr>
+            <a:r>
+              <a:rPr lang="en-US" sz="1200" dirty="0">
+                <a:solidFill>
+                  <a:srgbClr val="6B6862"/>
+                </a:solidFill>
+                <a:latin typeface="Georgia" pitchFamily="34" charset="0"/>
+                <a:ea typeface="Georgia" pitchFamily="34" charset="-122"/>
+                <a:cs typeface="Georgia" pitchFamily="34" charset="-120"/>
+              </a:rPr>
+              <a:t>High Availability Uptime</a:t>
+            </a:r>
+            <a:endParaRPr lang="en-US" sz="1200" dirty="0"/>
+          </a:p>
+        </p:txBody>
+      </p:sp>
+      <p:graphicFrame>
+        <p:nvGraphicFramePr>
+          <p:cNvPr id="11" name="Chart 0" descr=""/>
+          <p:cNvGraphicFramePr/>
+          <p:nvPr/>
+        </p:nvGraphicFramePr>
+        <p:xfrm>
+          <a:off x="6184745" y="3543300"/>
+          <a:ext cx="5600560" cy="1968500"/>
+        </p:xfrm>
+        <a:graphic xmlns:a="http://schemas.openxmlformats.org/drawingml/2006/main">
+          <a:graphicData uri="http://schemas.openxmlformats.org/drawingml/2006/chart">
+            <c:chart xmlns:c="http://schemas.openxmlformats.org/drawingml/2006/chart" r:id="rId1"/>
+          </a:graphicData>
+        </a:graphic>
+      </p:graphicFrame>
+      <p:sp>
+        <p:nvSpPr>
+          <p:cNvPr id="12" name="Text 9"/>
           <p:cNvSpPr/>
           <p:nvPr/>
         </p:nvSpPr>

--- a/presentation.pptx
+++ b/presentation.pptx
@@ -9044,14 +9044,53 @@
       </p:sp>
       <p:sp>
         <p:nvSpPr>
-          <p:cNvPr id="4" name="Shape 2"/>
-          <p:cNvSpPr/>
-          <p:nvPr/>
-        </p:nvSpPr>
-        <p:spPr>
-          <a:xfrm>
-            <a:off x="2052310" y="1890486"/>
-            <a:ext cx="1598412" cy="903514"/>
+          <p:cNvPr id="4" name="Text 2"/>
+          <p:cNvSpPr/>
+          <p:nvPr/>
+        </p:nvSpPr>
+        <p:spPr>
+          <a:xfrm>
+            <a:off x="406390" y="1778000"/>
+            <a:ext cx="11378916" cy="256032"/>
+          </a:xfrm>
+          <a:prstGeom prst="rect">
+            <a:avLst/>
+          </a:prstGeom>
+          <a:noFill/>
+          <a:ln/>
+        </p:spPr>
+        <p:txBody>
+          <a:bodyPr wrap="square" rtlCol="0" anchor="ctr"/>
+          <a:lstStyle/>
+          <a:p>
+            <a:pPr algn="ctr" indent="0" marL="0">
+              <a:buNone/>
+            </a:pPr>
+            <a:r>
+              <a:rPr lang="en-US" sz="1200" b="1" dirty="0">
+                <a:solidFill>
+                  <a:srgbClr val="FF2E88"/>
+                </a:solidFill>
+                <a:latin typeface="Trebuchet MS" pitchFamily="34" charset="0"/>
+                <a:ea typeface="Trebuchet MS" pitchFamily="34" charset="-122"/>
+                <a:cs typeface="Trebuchet MS" pitchFamily="34" charset="-120"/>
+              </a:rPr>
+              <a:t>Flusso di Trasformazione Multi-Target</a:t>
+            </a:r>
+            <a:endParaRPr lang="en-US" sz="1200" dirty="0"/>
+          </a:p>
+        </p:txBody>
+      </p:sp>
+      <p:sp>
+        <p:nvSpPr>
+          <p:cNvPr id="5" name="Shape 3"/>
+          <p:cNvSpPr/>
+          <p:nvPr/>
+        </p:nvSpPr>
+        <p:spPr>
+          <a:xfrm>
+            <a:off x="4869778" y="2191868"/>
+            <a:ext cx="188626" cy="1091336"/>
           </a:xfrm>
           <a:prstGeom prst="line">
             <a:avLst/>
@@ -9068,14 +9107,14 @@
       </p:sp>
       <p:sp>
         <p:nvSpPr>
-          <p:cNvPr id="5" name="Shape 3"/>
-          <p:cNvSpPr/>
-          <p:nvPr/>
-        </p:nvSpPr>
-        <p:spPr>
-          <a:xfrm>
-            <a:off x="5296642" y="2794000"/>
-            <a:ext cx="1598412" cy="9144"/>
+          <p:cNvPr id="6" name="Shape 4"/>
+          <p:cNvSpPr/>
+          <p:nvPr/>
+        </p:nvSpPr>
+        <p:spPr>
+          <a:xfrm>
+            <a:off x="6001535" y="3283204"/>
+            <a:ext cx="188626" cy="9144"/>
           </a:xfrm>
           <a:prstGeom prst="line">
             <a:avLst/>
@@ -9092,14 +9131,14 @@
       </p:sp>
       <p:sp>
         <p:nvSpPr>
-          <p:cNvPr id="6" name="Shape 4"/>
+          <p:cNvPr id="7" name="Shape 5"/>
           <p:cNvSpPr/>
           <p:nvPr/>
         </p:nvSpPr>
         <p:spPr>
           <a:xfrm flipV="1">
-            <a:off x="8540974" y="2492829"/>
-            <a:ext cx="1598412" cy="301171"/>
+            <a:off x="7133291" y="2919425"/>
+            <a:ext cx="188626" cy="363779"/>
           </a:xfrm>
           <a:prstGeom prst="line">
             <a:avLst/>
@@ -9116,14 +9155,14 @@
       </p:sp>
       <p:sp>
         <p:nvSpPr>
-          <p:cNvPr id="7" name="Shape 5"/>
-          <p:cNvSpPr/>
-          <p:nvPr/>
-        </p:nvSpPr>
-        <p:spPr>
-          <a:xfrm>
-            <a:off x="8540974" y="2794000"/>
-            <a:ext cx="1598412" cy="9144"/>
+          <p:cNvPr id="8" name="Shape 6"/>
+          <p:cNvSpPr/>
+          <p:nvPr/>
+        </p:nvSpPr>
+        <p:spPr>
+          <a:xfrm>
+            <a:off x="7133291" y="3283204"/>
+            <a:ext cx="188626" cy="9144"/>
           </a:xfrm>
           <a:prstGeom prst="line">
             <a:avLst/>
@@ -9140,14 +9179,14 @@
       </p:sp>
       <p:sp>
         <p:nvSpPr>
-          <p:cNvPr id="8" name="Shape 6"/>
-          <p:cNvSpPr/>
-          <p:nvPr/>
-        </p:nvSpPr>
-        <p:spPr>
-          <a:xfrm>
-            <a:off x="8540974" y="2794000"/>
-            <a:ext cx="1598412" cy="301171"/>
+          <p:cNvPr id="9" name="Shape 7"/>
+          <p:cNvSpPr/>
+          <p:nvPr/>
+        </p:nvSpPr>
+        <p:spPr>
+          <a:xfrm>
+            <a:off x="7133291" y="3283204"/>
+            <a:ext cx="188626" cy="363779"/>
           </a:xfrm>
           <a:prstGeom prst="line">
             <a:avLst/>
@@ -9164,18 +9203,18 @@
       </p:sp>
       <p:sp>
         <p:nvSpPr>
-          <p:cNvPr id="9" name="Shape 7"/>
-          <p:cNvSpPr/>
-          <p:nvPr/>
-        </p:nvSpPr>
-        <p:spPr>
-          <a:xfrm>
-            <a:off x="406390" y="1778000"/>
-            <a:ext cx="1645920" cy="224971"/>
+          <p:cNvPr id="10" name="Shape 8"/>
+          <p:cNvSpPr/>
+          <p:nvPr/>
+        </p:nvSpPr>
+        <p:spPr>
+          <a:xfrm>
+            <a:off x="3926648" y="2070608"/>
+            <a:ext cx="943130" cy="242519"/>
           </a:xfrm>
           <a:prstGeom prst="roundRect">
             <a:avLst>
-              <a:gd name="adj" fmla="val 32516"/>
+              <a:gd name="adj" fmla="val 30163"/>
             </a:avLst>
           </a:prstGeom>
           <a:solidFill>
@@ -9191,14 +9230,14 @@
       </p:sp>
       <p:sp>
         <p:nvSpPr>
-          <p:cNvPr id="10" name="Text 8"/>
-          <p:cNvSpPr/>
-          <p:nvPr/>
-        </p:nvSpPr>
-        <p:spPr>
-          <a:xfrm>
-            <a:off x="461254" y="1832864"/>
-            <a:ext cx="1536192" cy="115243"/>
+          <p:cNvPr id="11" name="Text 9"/>
+          <p:cNvSpPr/>
+          <p:nvPr/>
+        </p:nvSpPr>
+        <p:spPr>
+          <a:xfrm>
+            <a:off x="3981512" y="2125472"/>
+            <a:ext cx="833402" cy="132791"/>
           </a:xfrm>
           <a:prstGeom prst="rect">
             <a:avLst/>
@@ -9222,7 +9261,7 @@
                 <a:ea typeface="Trebuchet MS" pitchFamily="34" charset="-122"/>
                 <a:cs typeface="Trebuchet MS" pitchFamily="34" charset="-120"/>
               </a:rPr>
-              <a:t>Sorgente Yumia</a:t>
+              <a:t>Sorgente Yu…</a:t>
             </a:r>
             <a:endParaRPr lang="en-US" sz="1100" dirty="0"/>
           </a:p>
@@ -9230,18 +9269,18 @@
       </p:sp>
       <p:sp>
         <p:nvSpPr>
-          <p:cNvPr id="11" name="Shape 9"/>
-          <p:cNvSpPr/>
-          <p:nvPr/>
-        </p:nvSpPr>
-        <p:spPr>
-          <a:xfrm>
-            <a:off x="3650722" y="2681514"/>
-            <a:ext cx="1645920" cy="224971"/>
+          <p:cNvPr id="12" name="Shape 10"/>
+          <p:cNvSpPr/>
+          <p:nvPr/>
+        </p:nvSpPr>
+        <p:spPr>
+          <a:xfrm>
+            <a:off x="5058404" y="3161944"/>
+            <a:ext cx="943130" cy="242519"/>
           </a:xfrm>
           <a:prstGeom prst="roundRect">
             <a:avLst>
-              <a:gd name="adj" fmla="val 32516"/>
+              <a:gd name="adj" fmla="val 30163"/>
             </a:avLst>
           </a:prstGeom>
           <a:solidFill>
@@ -9257,14 +9296,14 @@
       </p:sp>
       <p:sp>
         <p:nvSpPr>
-          <p:cNvPr id="12" name="Text 10"/>
-          <p:cNvSpPr/>
-          <p:nvPr/>
-        </p:nvSpPr>
-        <p:spPr>
-          <a:xfrm>
-            <a:off x="3705586" y="2736378"/>
-            <a:ext cx="1536192" cy="115243"/>
+          <p:cNvPr id="13" name="Text 11"/>
+          <p:cNvSpPr/>
+          <p:nvPr/>
+        </p:nvSpPr>
+        <p:spPr>
+          <a:xfrm>
+            <a:off x="5113268" y="3216808"/>
+            <a:ext cx="833402" cy="132791"/>
           </a:xfrm>
           <a:prstGeom prst="rect">
             <a:avLst/>
@@ -9288,7 +9327,7 @@
                 <a:ea typeface="Trebuchet MS" pitchFamily="34" charset="-122"/>
                 <a:cs typeface="Trebuchet MS" pitchFamily="34" charset="-120"/>
               </a:rPr>
-              <a:t>AST Semantico</a:t>
+              <a:t>AST Semanti…</a:t>
             </a:r>
             <a:endParaRPr lang="en-US" sz="1100" dirty="0"/>
           </a:p>
@@ -9296,18 +9335,18 @@
       </p:sp>
       <p:sp>
         <p:nvSpPr>
-          <p:cNvPr id="13" name="Shape 11"/>
-          <p:cNvSpPr/>
-          <p:nvPr/>
-        </p:nvSpPr>
-        <p:spPr>
-          <a:xfrm>
-            <a:off x="6895054" y="2681514"/>
-            <a:ext cx="1645920" cy="224971"/>
+          <p:cNvPr id="14" name="Shape 12"/>
+          <p:cNvSpPr/>
+          <p:nvPr/>
+        </p:nvSpPr>
+        <p:spPr>
+          <a:xfrm>
+            <a:off x="6190161" y="3161944"/>
+            <a:ext cx="943130" cy="242519"/>
           </a:xfrm>
           <a:prstGeom prst="roundRect">
             <a:avLst>
-              <a:gd name="adj" fmla="val 32516"/>
+              <a:gd name="adj" fmla="val 30163"/>
             </a:avLst>
           </a:prstGeom>
           <a:solidFill>
@@ -9323,14 +9362,14 @@
       </p:sp>
       <p:sp>
         <p:nvSpPr>
-          <p:cNvPr id="14" name="Text 12"/>
-          <p:cNvSpPr/>
-          <p:nvPr/>
-        </p:nvSpPr>
-        <p:spPr>
-          <a:xfrm>
-            <a:off x="6949918" y="2736378"/>
-            <a:ext cx="1536192" cy="115243"/>
+          <p:cNvPr id="15" name="Text 13"/>
+          <p:cNvSpPr/>
+          <p:nvPr/>
+        </p:nvSpPr>
+        <p:spPr>
+          <a:xfrm>
+            <a:off x="6245025" y="3216808"/>
+            <a:ext cx="833402" cy="132791"/>
           </a:xfrm>
           <a:prstGeom prst="rect">
             <a:avLst/>
@@ -9354,7 +9393,7 @@
                 <a:ea typeface="Trebuchet MS" pitchFamily="34" charset="-122"/>
                 <a:cs typeface="Trebuchet MS" pitchFamily="34" charset="-120"/>
               </a:rPr>
-              <a:t>Design System</a:t>
+              <a:t>Design Syst…</a:t>
             </a:r>
             <a:endParaRPr lang="en-US" sz="1100" dirty="0"/>
           </a:p>
@@ -9362,18 +9401,18 @@
       </p:sp>
       <p:sp>
         <p:nvSpPr>
-          <p:cNvPr id="15" name="Shape 13"/>
-          <p:cNvSpPr/>
-          <p:nvPr/>
-        </p:nvSpPr>
-        <p:spPr>
-          <a:xfrm>
-            <a:off x="10139385" y="2380343"/>
-            <a:ext cx="1645920" cy="224971"/>
+          <p:cNvPr id="16" name="Shape 14"/>
+          <p:cNvSpPr/>
+          <p:nvPr/>
+        </p:nvSpPr>
+        <p:spPr>
+          <a:xfrm>
+            <a:off x="7321917" y="2798166"/>
+            <a:ext cx="943130" cy="242519"/>
           </a:xfrm>
           <a:prstGeom prst="roundRect">
             <a:avLst>
-              <a:gd name="adj" fmla="val 32516"/>
+              <a:gd name="adj" fmla="val 30163"/>
             </a:avLst>
           </a:prstGeom>
           <a:solidFill>
@@ -9389,14 +9428,14 @@
       </p:sp>
       <p:sp>
         <p:nvSpPr>
-          <p:cNvPr id="16" name="Text 14"/>
-          <p:cNvSpPr/>
-          <p:nvPr/>
-        </p:nvSpPr>
-        <p:spPr>
-          <a:xfrm>
-            <a:off x="10194249" y="2435207"/>
-            <a:ext cx="1536192" cy="115243"/>
+          <p:cNvPr id="17" name="Text 15"/>
+          <p:cNvSpPr/>
+          <p:nvPr/>
+        </p:nvSpPr>
+        <p:spPr>
+          <a:xfrm>
+            <a:off x="7376781" y="2853030"/>
+            <a:ext cx="833402" cy="132791"/>
           </a:xfrm>
           <a:prstGeom prst="rect">
             <a:avLst/>
@@ -9420,7 +9459,7 @@
                 <a:ea typeface="Trebuchet MS" pitchFamily="34" charset="-122"/>
                 <a:cs typeface="Trebuchet MS" pitchFamily="34" charset="-120"/>
               </a:rPr>
-              <a:t>HTML Interattivo</a:t>
+              <a:t>HTML Intera…</a:t>
             </a:r>
             <a:endParaRPr lang="en-US" sz="1100" dirty="0"/>
           </a:p>
@@ -9428,18 +9467,18 @@
       </p:sp>
       <p:sp>
         <p:nvSpPr>
-          <p:cNvPr id="17" name="Shape 15"/>
-          <p:cNvSpPr/>
-          <p:nvPr/>
-        </p:nvSpPr>
-        <p:spPr>
-          <a:xfrm>
-            <a:off x="10139385" y="2681514"/>
-            <a:ext cx="1645920" cy="224971"/>
+          <p:cNvPr id="18" name="Shape 16"/>
+          <p:cNvSpPr/>
+          <p:nvPr/>
+        </p:nvSpPr>
+        <p:spPr>
+          <a:xfrm>
+            <a:off x="7321917" y="3161944"/>
+            <a:ext cx="943130" cy="242519"/>
           </a:xfrm>
           <a:prstGeom prst="roundRect">
             <a:avLst>
-              <a:gd name="adj" fmla="val 32516"/>
+              <a:gd name="adj" fmla="val 30163"/>
             </a:avLst>
           </a:prstGeom>
           <a:solidFill>
@@ -9455,14 +9494,14 @@
       </p:sp>
       <p:sp>
         <p:nvSpPr>
-          <p:cNvPr id="18" name="Text 16"/>
-          <p:cNvSpPr/>
-          <p:nvPr/>
-        </p:nvSpPr>
-        <p:spPr>
-          <a:xfrm>
-            <a:off x="10194249" y="2736378"/>
-            <a:ext cx="1536192" cy="115243"/>
+          <p:cNvPr id="19" name="Text 17"/>
+          <p:cNvSpPr/>
+          <p:nvPr/>
+        </p:nvSpPr>
+        <p:spPr>
+          <a:xfrm>
+            <a:off x="7376781" y="3216808"/>
+            <a:ext cx="833402" cy="132791"/>
           </a:xfrm>
           <a:prstGeom prst="rect">
             <a:avLst/>
@@ -9486,7 +9525,7 @@
                 <a:ea typeface="Trebuchet MS" pitchFamily="34" charset="-122"/>
                 <a:cs typeface="Trebuchet MS" pitchFamily="34" charset="-120"/>
               </a:rPr>
-              <a:t>PowerPoint PPTX</a:t>
+              <a:t>PowerPoint …</a:t>
             </a:r>
             <a:endParaRPr lang="en-US" sz="1100" dirty="0"/>
           </a:p>
@@ -9494,18 +9533,18 @@
       </p:sp>
       <p:sp>
         <p:nvSpPr>
-          <p:cNvPr id="19" name="Shape 17"/>
-          <p:cNvSpPr/>
-          <p:nvPr/>
-        </p:nvSpPr>
-        <p:spPr>
-          <a:xfrm>
-            <a:off x="10139385" y="2982686"/>
-            <a:ext cx="1645920" cy="224971"/>
+          <p:cNvPr id="20" name="Shape 18"/>
+          <p:cNvSpPr/>
+          <p:nvPr/>
+        </p:nvSpPr>
+        <p:spPr>
+          <a:xfrm>
+            <a:off x="7321917" y="3525723"/>
+            <a:ext cx="943130" cy="242519"/>
           </a:xfrm>
           <a:prstGeom prst="roundRect">
             <a:avLst>
-              <a:gd name="adj" fmla="val 32516"/>
+              <a:gd name="adj" fmla="val 30163"/>
             </a:avLst>
           </a:prstGeom>
           <a:solidFill>
@@ -9521,14 +9560,14 @@
       </p:sp>
       <p:sp>
         <p:nvSpPr>
-          <p:cNvPr id="20" name="Text 18"/>
-          <p:cNvSpPr/>
-          <p:nvPr/>
-        </p:nvSpPr>
-        <p:spPr>
-          <a:xfrm>
-            <a:off x="10194249" y="3037550"/>
-            <a:ext cx="1536192" cy="115243"/>
+          <p:cNvPr id="21" name="Text 19"/>
+          <p:cNvSpPr/>
+          <p:nvPr/>
+        </p:nvSpPr>
+        <p:spPr>
+          <a:xfrm>
+            <a:off x="7376781" y="3580587"/>
+            <a:ext cx="833402" cy="132791"/>
           </a:xfrm>
           <a:prstGeom prst="rect">
             <a:avLst/>
@@ -9552,7 +9591,7 @@
                 <a:ea typeface="Trebuchet MS" pitchFamily="34" charset="-122"/>
                 <a:cs typeface="Trebuchet MS" pitchFamily="34" charset="-120"/>
               </a:rPr>
-              <a:t>PDF Vettoriale</a:t>
+              <a:t>PDF Vettori…</a:t>
             </a:r>
             <a:endParaRPr lang="en-US" sz="1100" dirty="0"/>
           </a:p>
@@ -9560,18 +9599,18 @@
       </p:sp>
       <p:sp>
         <p:nvSpPr>
-          <p:cNvPr id="21" name="Shape 19"/>
-          <p:cNvSpPr/>
-          <p:nvPr/>
-        </p:nvSpPr>
-        <p:spPr>
-          <a:xfrm>
-            <a:off x="406390" y="2079171"/>
-            <a:ext cx="1645920" cy="224971"/>
+          <p:cNvPr id="22" name="Shape 20"/>
+          <p:cNvSpPr/>
+          <p:nvPr/>
+        </p:nvSpPr>
+        <p:spPr>
+          <a:xfrm>
+            <a:off x="3926648" y="2434387"/>
+            <a:ext cx="943130" cy="242519"/>
           </a:xfrm>
           <a:prstGeom prst="roundRect">
             <a:avLst>
-              <a:gd name="adj" fmla="val 32516"/>
+              <a:gd name="adj" fmla="val 30163"/>
             </a:avLst>
           </a:prstGeom>
           <a:solidFill>
@@ -9587,14 +9626,14 @@
       </p:sp>
       <p:sp>
         <p:nvSpPr>
-          <p:cNvPr id="22" name="Text 20"/>
-          <p:cNvSpPr/>
-          <p:nvPr/>
-        </p:nvSpPr>
-        <p:spPr>
-          <a:xfrm>
-            <a:off x="461254" y="2134035"/>
-            <a:ext cx="1536192" cy="115243"/>
+          <p:cNvPr id="23" name="Text 21"/>
+          <p:cNvSpPr/>
+          <p:nvPr/>
+        </p:nvSpPr>
+        <p:spPr>
+          <a:xfrm>
+            <a:off x="3981512" y="2489251"/>
+            <a:ext cx="833402" cy="132791"/>
           </a:xfrm>
           <a:prstGeom prst="rect">
             <a:avLst/>
@@ -9626,18 +9665,18 @@
       </p:sp>
       <p:sp>
         <p:nvSpPr>
-          <p:cNvPr id="23" name="Shape 21"/>
-          <p:cNvSpPr/>
-          <p:nvPr/>
-        </p:nvSpPr>
-        <p:spPr>
-          <a:xfrm>
-            <a:off x="406390" y="2380343"/>
-            <a:ext cx="1645920" cy="224971"/>
+          <p:cNvPr id="24" name="Shape 22"/>
+          <p:cNvSpPr/>
+          <p:nvPr/>
+        </p:nvSpPr>
+        <p:spPr>
+          <a:xfrm>
+            <a:off x="3926648" y="2798166"/>
+            <a:ext cx="943130" cy="242519"/>
           </a:xfrm>
           <a:prstGeom prst="roundRect">
             <a:avLst>
-              <a:gd name="adj" fmla="val 32516"/>
+              <a:gd name="adj" fmla="val 30163"/>
             </a:avLst>
           </a:prstGeom>
           <a:solidFill>
@@ -9653,14 +9692,14 @@
       </p:sp>
       <p:sp>
         <p:nvSpPr>
-          <p:cNvPr id="24" name="Text 22"/>
-          <p:cNvSpPr/>
-          <p:nvPr/>
-        </p:nvSpPr>
-        <p:spPr>
-          <a:xfrm>
-            <a:off x="461254" y="2435207"/>
-            <a:ext cx="1536192" cy="115243"/>
+          <p:cNvPr id="25" name="Text 23"/>
+          <p:cNvSpPr/>
+          <p:nvPr/>
+        </p:nvSpPr>
+        <p:spPr>
+          <a:xfrm>
+            <a:off x="3981512" y="2853030"/>
+            <a:ext cx="833402" cy="132791"/>
           </a:xfrm>
           <a:prstGeom prst="rect">
             <a:avLst/>
@@ -9692,18 +9731,18 @@
       </p:sp>
       <p:sp>
         <p:nvSpPr>
-          <p:cNvPr id="25" name="Shape 23"/>
-          <p:cNvSpPr/>
-          <p:nvPr/>
-        </p:nvSpPr>
-        <p:spPr>
-          <a:xfrm>
-            <a:off x="406390" y="2681514"/>
-            <a:ext cx="1645920" cy="224971"/>
+          <p:cNvPr id="26" name="Shape 24"/>
+          <p:cNvSpPr/>
+          <p:nvPr/>
+        </p:nvSpPr>
+        <p:spPr>
+          <a:xfrm>
+            <a:off x="3926648" y="3161944"/>
+            <a:ext cx="943130" cy="242519"/>
           </a:xfrm>
           <a:prstGeom prst="roundRect">
             <a:avLst>
-              <a:gd name="adj" fmla="val 32516"/>
+              <a:gd name="adj" fmla="val 30163"/>
             </a:avLst>
           </a:prstGeom>
           <a:solidFill>
@@ -9719,14 +9758,14 @@
       </p:sp>
       <p:sp>
         <p:nvSpPr>
-          <p:cNvPr id="26" name="Text 24"/>
-          <p:cNvSpPr/>
-          <p:nvPr/>
-        </p:nvSpPr>
-        <p:spPr>
-          <a:xfrm>
-            <a:off x="461254" y="2736378"/>
-            <a:ext cx="1536192" cy="115243"/>
+          <p:cNvPr id="27" name="Text 25"/>
+          <p:cNvSpPr/>
+          <p:nvPr/>
+        </p:nvSpPr>
+        <p:spPr>
+          <a:xfrm>
+            <a:off x="3981512" y="3216808"/>
+            <a:ext cx="833402" cy="132791"/>
           </a:xfrm>
           <a:prstGeom prst="rect">
             <a:avLst/>
@@ -9758,18 +9797,18 @@
       </p:sp>
       <p:sp>
         <p:nvSpPr>
-          <p:cNvPr id="27" name="Shape 25"/>
-          <p:cNvSpPr/>
-          <p:nvPr/>
-        </p:nvSpPr>
-        <p:spPr>
-          <a:xfrm>
-            <a:off x="406390" y="2982686"/>
-            <a:ext cx="1645920" cy="224971"/>
+          <p:cNvPr id="28" name="Shape 26"/>
+          <p:cNvSpPr/>
+          <p:nvPr/>
+        </p:nvSpPr>
+        <p:spPr>
+          <a:xfrm>
+            <a:off x="3926648" y="3525723"/>
+            <a:ext cx="943130" cy="242519"/>
           </a:xfrm>
           <a:prstGeom prst="roundRect">
             <a:avLst>
-              <a:gd name="adj" fmla="val 32516"/>
+              <a:gd name="adj" fmla="val 30163"/>
             </a:avLst>
           </a:prstGeom>
           <a:solidFill>
@@ -9785,14 +9824,14 @@
       </p:sp>
       <p:sp>
         <p:nvSpPr>
-          <p:cNvPr id="28" name="Text 26"/>
-          <p:cNvSpPr/>
-          <p:nvPr/>
-        </p:nvSpPr>
-        <p:spPr>
-          <a:xfrm>
-            <a:off x="461254" y="3037550"/>
-            <a:ext cx="1536192" cy="115243"/>
+          <p:cNvPr id="29" name="Text 27"/>
+          <p:cNvSpPr/>
+          <p:nvPr/>
+        </p:nvSpPr>
+        <p:spPr>
+          <a:xfrm>
+            <a:off x="3981512" y="3580587"/>
+            <a:ext cx="833402" cy="132791"/>
           </a:xfrm>
           <a:prstGeom prst="rect">
             <a:avLst/>
@@ -9824,18 +9863,18 @@
       </p:sp>
       <p:sp>
         <p:nvSpPr>
-          <p:cNvPr id="29" name="Shape 27"/>
-          <p:cNvSpPr/>
-          <p:nvPr/>
-        </p:nvSpPr>
-        <p:spPr>
-          <a:xfrm>
-            <a:off x="406390" y="3283857"/>
-            <a:ext cx="1645920" cy="224971"/>
+          <p:cNvPr id="30" name="Shape 28"/>
+          <p:cNvSpPr/>
+          <p:nvPr/>
+        </p:nvSpPr>
+        <p:spPr>
+          <a:xfrm>
+            <a:off x="3926648" y="3889502"/>
+            <a:ext cx="943130" cy="242519"/>
           </a:xfrm>
           <a:prstGeom prst="roundRect">
             <a:avLst>
-              <a:gd name="adj" fmla="val 32516"/>
+              <a:gd name="adj" fmla="val 30163"/>
             </a:avLst>
           </a:prstGeom>
           <a:solidFill>
@@ -9851,14 +9890,14 @@
       </p:sp>
       <p:sp>
         <p:nvSpPr>
-          <p:cNvPr id="30" name="Text 28"/>
-          <p:cNvSpPr/>
-          <p:nvPr/>
-        </p:nvSpPr>
-        <p:spPr>
-          <a:xfrm>
-            <a:off x="461254" y="3338721"/>
-            <a:ext cx="1536192" cy="115243"/>
+          <p:cNvPr id="31" name="Text 29"/>
+          <p:cNvSpPr/>
+          <p:nvPr/>
+        </p:nvSpPr>
+        <p:spPr>
+          <a:xfrm>
+            <a:off x="3981512" y="3944366"/>
+            <a:ext cx="833402" cy="132791"/>
           </a:xfrm>
           <a:prstGeom prst="rect">
             <a:avLst/>
@@ -9890,18 +9929,18 @@
       </p:sp>
       <p:sp>
         <p:nvSpPr>
-          <p:cNvPr id="31" name="Shape 29"/>
-          <p:cNvSpPr/>
-          <p:nvPr/>
-        </p:nvSpPr>
-        <p:spPr>
-          <a:xfrm>
-            <a:off x="406390" y="3585029"/>
-            <a:ext cx="1645920" cy="224971"/>
+          <p:cNvPr id="32" name="Shape 30"/>
+          <p:cNvSpPr/>
+          <p:nvPr/>
+        </p:nvSpPr>
+        <p:spPr>
+          <a:xfrm>
+            <a:off x="3926648" y="4253281"/>
+            <a:ext cx="943130" cy="242519"/>
           </a:xfrm>
           <a:prstGeom prst="roundRect">
             <a:avLst>
-              <a:gd name="adj" fmla="val 32516"/>
+              <a:gd name="adj" fmla="val 30163"/>
             </a:avLst>
           </a:prstGeom>
           <a:solidFill>
@@ -9917,14 +9956,14 @@
       </p:sp>
       <p:sp>
         <p:nvSpPr>
-          <p:cNvPr id="32" name="Text 30"/>
-          <p:cNvSpPr/>
-          <p:nvPr/>
-        </p:nvSpPr>
-        <p:spPr>
-          <a:xfrm>
-            <a:off x="461254" y="3639893"/>
-            <a:ext cx="1536192" cy="115243"/>
+          <p:cNvPr id="33" name="Text 31"/>
+          <p:cNvSpPr/>
+          <p:nvPr/>
+        </p:nvSpPr>
+        <p:spPr>
+          <a:xfrm>
+            <a:off x="3981512" y="4308145"/>
+            <a:ext cx="833402" cy="132791"/>
           </a:xfrm>
           <a:prstGeom prst="rect">
             <a:avLst/>
@@ -9956,13 +9995,13 @@
       </p:sp>
       <p:sp>
         <p:nvSpPr>
-          <p:cNvPr id="33" name="Shape 31"/>
-          <p:cNvSpPr/>
-          <p:nvPr/>
-        </p:nvSpPr>
-        <p:spPr>
-          <a:xfrm>
-            <a:off x="406390" y="3987800"/>
+          <p:cNvPr id="34" name="Shape 32"/>
+          <p:cNvSpPr/>
+          <p:nvPr/>
+        </p:nvSpPr>
+        <p:spPr>
+          <a:xfrm>
+            <a:off x="406390" y="4673600"/>
             <a:ext cx="11378916" cy="831850"/>
           </a:xfrm>
           <a:prstGeom prst="roundRect">
@@ -9983,13 +10022,13 @@
       </p:sp>
       <p:sp>
         <p:nvSpPr>
-          <p:cNvPr id="34" name="Text 32"/>
-          <p:cNvSpPr/>
-          <p:nvPr/>
-        </p:nvSpPr>
-        <p:spPr>
-          <a:xfrm>
-            <a:off x="543550" y="4060952"/>
+          <p:cNvPr id="35" name="Text 33"/>
+          <p:cNvSpPr/>
+          <p:nvPr/>
+        </p:nvSpPr>
+        <p:spPr>
+          <a:xfrm>
+            <a:off x="543550" y="4746752"/>
             <a:ext cx="11104596" cy="274320"/>
           </a:xfrm>
           <a:prstGeom prst="rect">
@@ -10022,13 +10061,13 @@
       </p:sp>
       <p:sp>
         <p:nvSpPr>
-          <p:cNvPr id="35" name="Text 33"/>
-          <p:cNvSpPr/>
-          <p:nvPr/>
-        </p:nvSpPr>
-        <p:spPr>
-          <a:xfrm>
-            <a:off x="543550" y="4380992"/>
+          <p:cNvPr id="36" name="Text 34"/>
+          <p:cNvSpPr/>
+          <p:nvPr/>
+        </p:nvSpPr>
+        <p:spPr>
+          <a:xfrm>
+            <a:off x="543550" y="5066792"/>
             <a:ext cx="11104596" cy="365506"/>
           </a:xfrm>
           <a:prstGeom prst="rect">
@@ -10061,7 +10100,7 @@
       </p:sp>
       <p:sp>
         <p:nvSpPr>
-          <p:cNvPr id="36" name="Text 34"/>
+          <p:cNvPr id="37" name="Text 35"/>
           <p:cNvSpPr/>
           <p:nvPr/>
         </p:nvSpPr>
@@ -10210,14 +10249,53 @@
       </p:sp>
       <p:sp>
         <p:nvSpPr>
-          <p:cNvPr id="4" name="Shape 2"/>
-          <p:cNvSpPr/>
-          <p:nvPr/>
-        </p:nvSpPr>
-        <p:spPr>
-          <a:xfrm>
-            <a:off x="1619914" y="1890486"/>
-            <a:ext cx="819554" cy="903514"/>
+          <p:cNvPr id="4" name="Text 2"/>
+          <p:cNvSpPr/>
+          <p:nvPr/>
+        </p:nvSpPr>
+        <p:spPr>
+          <a:xfrm>
+            <a:off x="406390" y="1778000"/>
+            <a:ext cx="11378916" cy="256032"/>
+          </a:xfrm>
+          <a:prstGeom prst="rect">
+            <a:avLst/>
+          </a:prstGeom>
+          <a:noFill/>
+          <a:ln/>
+        </p:spPr>
+        <p:txBody>
+          <a:bodyPr wrap="square" rtlCol="0" anchor="ctr"/>
+          <a:lstStyle/>
+          <a:p>
+            <a:pPr algn="ctr" indent="0" marL="0">
+              <a:buNone/>
+            </a:pPr>
+            <a:r>
+              <a:rPr lang="en-US" sz="1200" b="1" dirty="0">
+                <a:solidFill>
+                  <a:srgbClr val="FF2E88"/>
+                </a:solidFill>
+                <a:latin typeface="Trebuchet MS" pitchFamily="34" charset="0"/>
+                <a:ea typeface="Trebuchet MS" pitchFamily="34" charset="-122"/>
+                <a:cs typeface="Trebuchet MS" pitchFamily="34" charset="-120"/>
+              </a:rPr>
+              <a:t>Pipeline di Compilazione Deterministica</a:t>
+            </a:r>
+            <a:endParaRPr lang="en-US" sz="1200" dirty="0"/>
+          </a:p>
+        </p:txBody>
+      </p:sp>
+      <p:sp>
+        <p:nvSpPr>
+          <p:cNvPr id="5" name="Shape 3"/>
+          <p:cNvSpPr/>
+          <p:nvPr/>
+        </p:nvSpPr>
+        <p:spPr>
+          <a:xfrm>
+            <a:off x="3782933" y="2191868"/>
+            <a:ext cx="188626" cy="1091336"/>
           </a:xfrm>
           <a:prstGeom prst="line">
             <a:avLst/>
@@ -10234,14 +10312,14 @@
       </p:sp>
       <p:sp>
         <p:nvSpPr>
-          <p:cNvPr id="5" name="Shape 3"/>
-          <p:cNvSpPr/>
-          <p:nvPr/>
-        </p:nvSpPr>
-        <p:spPr>
-          <a:xfrm>
-            <a:off x="3652992" y="2794000"/>
-            <a:ext cx="819554" cy="9144"/>
+          <p:cNvPr id="6" name="Shape 4"/>
+          <p:cNvSpPr/>
+          <p:nvPr/>
+        </p:nvSpPr>
+        <p:spPr>
+          <a:xfrm>
+            <a:off x="4892234" y="3283204"/>
+            <a:ext cx="188626" cy="9144"/>
           </a:xfrm>
           <a:prstGeom prst="line">
             <a:avLst/>
@@ -10258,14 +10336,14 @@
       </p:sp>
       <p:sp>
         <p:nvSpPr>
-          <p:cNvPr id="6" name="Shape 4"/>
-          <p:cNvSpPr/>
-          <p:nvPr/>
-        </p:nvSpPr>
-        <p:spPr>
-          <a:xfrm>
-            <a:off x="5686070" y="2794000"/>
-            <a:ext cx="819554" cy="9144"/>
+          <p:cNvPr id="7" name="Shape 5"/>
+          <p:cNvSpPr/>
+          <p:nvPr/>
+        </p:nvSpPr>
+        <p:spPr>
+          <a:xfrm>
+            <a:off x="6001535" y="3283204"/>
+            <a:ext cx="188626" cy="9144"/>
           </a:xfrm>
           <a:prstGeom prst="line">
             <a:avLst/>
@@ -10282,14 +10360,14 @@
       </p:sp>
       <p:sp>
         <p:nvSpPr>
-          <p:cNvPr id="7" name="Shape 5"/>
-          <p:cNvSpPr/>
-          <p:nvPr/>
-        </p:nvSpPr>
-        <p:spPr>
-          <a:xfrm>
-            <a:off x="7719149" y="2794000"/>
-            <a:ext cx="819554" cy="9144"/>
+          <p:cNvPr id="8" name="Shape 6"/>
+          <p:cNvSpPr/>
+          <p:nvPr/>
+        </p:nvSpPr>
+        <p:spPr>
+          <a:xfrm>
+            <a:off x="7110835" y="3283204"/>
+            <a:ext cx="188626" cy="9144"/>
           </a:xfrm>
           <a:prstGeom prst="line">
             <a:avLst/>
@@ -10306,14 +10384,14 @@
       </p:sp>
       <p:sp>
         <p:nvSpPr>
-          <p:cNvPr id="8" name="Shape 6"/>
-          <p:cNvSpPr/>
-          <p:nvPr/>
-        </p:nvSpPr>
-        <p:spPr>
-          <a:xfrm>
-            <a:off x="9752227" y="2794000"/>
-            <a:ext cx="819554" cy="9144"/>
+          <p:cNvPr id="9" name="Shape 7"/>
+          <p:cNvSpPr/>
+          <p:nvPr/>
+        </p:nvSpPr>
+        <p:spPr>
+          <a:xfrm>
+            <a:off x="8220136" y="3283204"/>
+            <a:ext cx="188626" cy="9144"/>
           </a:xfrm>
           <a:prstGeom prst="line">
             <a:avLst/>
@@ -10330,18 +10408,18 @@
       </p:sp>
       <p:sp>
         <p:nvSpPr>
-          <p:cNvPr id="9" name="Shape 7"/>
-          <p:cNvSpPr/>
-          <p:nvPr/>
-        </p:nvSpPr>
-        <p:spPr>
-          <a:xfrm>
-            <a:off x="406390" y="1778000"/>
-            <a:ext cx="1213524" cy="224971"/>
+          <p:cNvPr id="10" name="Shape 8"/>
+          <p:cNvSpPr/>
+          <p:nvPr/>
+        </p:nvSpPr>
+        <p:spPr>
+          <a:xfrm>
+            <a:off x="2862258" y="2070608"/>
+            <a:ext cx="920675" cy="242519"/>
           </a:xfrm>
           <a:prstGeom prst="roundRect">
             <a:avLst>
-              <a:gd name="adj" fmla="val 32516"/>
+              <a:gd name="adj" fmla="val 30163"/>
             </a:avLst>
           </a:prstGeom>
           <a:solidFill>
@@ -10357,14 +10435,14 @@
       </p:sp>
       <p:sp>
         <p:nvSpPr>
-          <p:cNvPr id="10" name="Text 8"/>
-          <p:cNvSpPr/>
-          <p:nvPr/>
-        </p:nvSpPr>
-        <p:spPr>
-          <a:xfrm>
-            <a:off x="461254" y="1832864"/>
-            <a:ext cx="1103796" cy="115243"/>
+          <p:cNvPr id="11" name="Text 9"/>
+          <p:cNvSpPr/>
+          <p:nvPr/>
+        </p:nvSpPr>
+        <p:spPr>
+          <a:xfrm>
+            <a:off x="2917122" y="2125472"/>
+            <a:ext cx="810947" cy="132791"/>
           </a:xfrm>
           <a:prstGeom prst="rect">
             <a:avLst/>
@@ -10396,18 +10474,18 @@
       </p:sp>
       <p:sp>
         <p:nvSpPr>
-          <p:cNvPr id="11" name="Shape 9"/>
-          <p:cNvSpPr/>
-          <p:nvPr/>
-        </p:nvSpPr>
-        <p:spPr>
-          <a:xfrm>
-            <a:off x="2439468" y="2681514"/>
-            <a:ext cx="1213524" cy="224971"/>
+          <p:cNvPr id="12" name="Shape 10"/>
+          <p:cNvSpPr/>
+          <p:nvPr/>
+        </p:nvSpPr>
+        <p:spPr>
+          <a:xfrm>
+            <a:off x="3971559" y="3161944"/>
+            <a:ext cx="920675" cy="242519"/>
           </a:xfrm>
           <a:prstGeom prst="roundRect">
             <a:avLst>
-              <a:gd name="adj" fmla="val 32516"/>
+              <a:gd name="adj" fmla="val 30163"/>
             </a:avLst>
           </a:prstGeom>
           <a:solidFill>
@@ -10423,14 +10501,14 @@
       </p:sp>
       <p:sp>
         <p:nvSpPr>
-          <p:cNvPr id="12" name="Text 10"/>
-          <p:cNvSpPr/>
-          <p:nvPr/>
-        </p:nvSpPr>
-        <p:spPr>
-          <a:xfrm>
-            <a:off x="2494332" y="2736378"/>
-            <a:ext cx="1103796" cy="115243"/>
+          <p:cNvPr id="13" name="Text 11"/>
+          <p:cNvSpPr/>
+          <p:nvPr/>
+        </p:nvSpPr>
+        <p:spPr>
+          <a:xfrm>
+            <a:off x="4026423" y="3216808"/>
+            <a:ext cx="810947" cy="132791"/>
           </a:xfrm>
           <a:prstGeom prst="rect">
             <a:avLst/>
@@ -10462,18 +10540,18 @@
       </p:sp>
       <p:sp>
         <p:nvSpPr>
-          <p:cNvPr id="13" name="Shape 11"/>
-          <p:cNvSpPr/>
-          <p:nvPr/>
-        </p:nvSpPr>
-        <p:spPr>
-          <a:xfrm>
-            <a:off x="4472546" y="2681514"/>
-            <a:ext cx="1213524" cy="224971"/>
+          <p:cNvPr id="14" name="Shape 12"/>
+          <p:cNvSpPr/>
+          <p:nvPr/>
+        </p:nvSpPr>
+        <p:spPr>
+          <a:xfrm>
+            <a:off x="5080860" y="3161944"/>
+            <a:ext cx="920675" cy="242519"/>
           </a:xfrm>
           <a:prstGeom prst="roundRect">
             <a:avLst>
-              <a:gd name="adj" fmla="val 32516"/>
+              <a:gd name="adj" fmla="val 30163"/>
             </a:avLst>
           </a:prstGeom>
           <a:solidFill>
@@ -10489,14 +10567,14 @@
       </p:sp>
       <p:sp>
         <p:nvSpPr>
-          <p:cNvPr id="14" name="Text 12"/>
-          <p:cNvSpPr/>
-          <p:nvPr/>
-        </p:nvSpPr>
-        <p:spPr>
-          <a:xfrm>
-            <a:off x="4527410" y="2736378"/>
-            <a:ext cx="1103796" cy="115243"/>
+          <p:cNvPr id="15" name="Text 13"/>
+          <p:cNvSpPr/>
+          <p:nvPr/>
+        </p:nvSpPr>
+        <p:spPr>
+          <a:xfrm>
+            <a:off x="5135724" y="3216808"/>
+            <a:ext cx="810947" cy="132791"/>
           </a:xfrm>
           <a:prstGeom prst="rect">
             <a:avLst/>
@@ -10520,7 +10598,7 @@
                 <a:ea typeface="Trebuchet MS" pitchFamily="34" charset="-122"/>
                 <a:cs typeface="Trebuchet MS" pitchFamily="34" charset="-120"/>
               </a:rPr>
-              <a:t>Design Linter</a:t>
+              <a:t>Design Lint…</a:t>
             </a:r>
             <a:endParaRPr lang="en-US" sz="1100" dirty="0"/>
           </a:p>
@@ -10528,18 +10606,18 @@
       </p:sp>
       <p:sp>
         <p:nvSpPr>
-          <p:cNvPr id="15" name="Shape 13"/>
-          <p:cNvSpPr/>
-          <p:nvPr/>
-        </p:nvSpPr>
-        <p:spPr>
-          <a:xfrm>
-            <a:off x="6505625" y="2681514"/>
-            <a:ext cx="1213524" cy="224971"/>
+          <p:cNvPr id="16" name="Shape 14"/>
+          <p:cNvSpPr/>
+          <p:nvPr/>
+        </p:nvSpPr>
+        <p:spPr>
+          <a:xfrm>
+            <a:off x="6190161" y="3161944"/>
+            <a:ext cx="920675" cy="242519"/>
           </a:xfrm>
           <a:prstGeom prst="roundRect">
             <a:avLst>
-              <a:gd name="adj" fmla="val 32516"/>
+              <a:gd name="adj" fmla="val 30163"/>
             </a:avLst>
           </a:prstGeom>
           <a:solidFill>
@@ -10555,14 +10633,14 @@
       </p:sp>
       <p:sp>
         <p:nvSpPr>
-          <p:cNvPr id="16" name="Text 14"/>
-          <p:cNvSpPr/>
-          <p:nvPr/>
-        </p:nvSpPr>
-        <p:spPr>
-          <a:xfrm>
-            <a:off x="6560489" y="2736378"/>
-            <a:ext cx="1103796" cy="115243"/>
+          <p:cNvPr id="17" name="Text 15"/>
+          <p:cNvSpPr/>
+          <p:nvPr/>
+        </p:nvSpPr>
+        <p:spPr>
+          <a:xfrm>
+            <a:off x="6245025" y="3216808"/>
+            <a:ext cx="810947" cy="132791"/>
           </a:xfrm>
           <a:prstGeom prst="rect">
             <a:avLst/>
@@ -10594,18 +10672,18 @@
       </p:sp>
       <p:sp>
         <p:nvSpPr>
-          <p:cNvPr id="17" name="Shape 15"/>
-          <p:cNvSpPr/>
-          <p:nvPr/>
-        </p:nvSpPr>
-        <p:spPr>
-          <a:xfrm>
-            <a:off x="8538703" y="2681514"/>
-            <a:ext cx="1213524" cy="224971"/>
+          <p:cNvPr id="18" name="Shape 16"/>
+          <p:cNvSpPr/>
+          <p:nvPr/>
+        </p:nvSpPr>
+        <p:spPr>
+          <a:xfrm>
+            <a:off x="7299461" y="3161944"/>
+            <a:ext cx="920675" cy="242519"/>
           </a:xfrm>
           <a:prstGeom prst="roundRect">
             <a:avLst>
-              <a:gd name="adj" fmla="val 32516"/>
+              <a:gd name="adj" fmla="val 30163"/>
             </a:avLst>
           </a:prstGeom>
           <a:solidFill>
@@ -10621,14 +10699,14 @@
       </p:sp>
       <p:sp>
         <p:nvSpPr>
-          <p:cNvPr id="18" name="Text 16"/>
-          <p:cNvSpPr/>
-          <p:nvPr/>
-        </p:nvSpPr>
-        <p:spPr>
-          <a:xfrm>
-            <a:off x="8593567" y="2736378"/>
-            <a:ext cx="1103796" cy="115243"/>
+          <p:cNvPr id="19" name="Text 17"/>
+          <p:cNvSpPr/>
+          <p:nvPr/>
+        </p:nvSpPr>
+        <p:spPr>
+          <a:xfrm>
+            <a:off x="7354325" y="3216808"/>
+            <a:ext cx="810947" cy="132791"/>
           </a:xfrm>
           <a:prstGeom prst="rect">
             <a:avLst/>
@@ -10652,7 +10730,7 @@
                 <a:ea typeface="Trebuchet MS" pitchFamily="34" charset="-122"/>
                 <a:cs typeface="Trebuchet MS" pitchFamily="34" charset="-120"/>
               </a:rPr>
-              <a:t>Layout Engine</a:t>
+              <a:t>Layout Engi…</a:t>
             </a:r>
             <a:endParaRPr lang="en-US" sz="1100" dirty="0"/>
           </a:p>
@@ -10660,18 +10738,18 @@
       </p:sp>
       <p:sp>
         <p:nvSpPr>
-          <p:cNvPr id="19" name="Shape 17"/>
-          <p:cNvSpPr/>
-          <p:nvPr/>
-        </p:nvSpPr>
-        <p:spPr>
-          <a:xfrm>
-            <a:off x="10571781" y="2681514"/>
-            <a:ext cx="1213524" cy="224971"/>
+          <p:cNvPr id="20" name="Shape 18"/>
+          <p:cNvSpPr/>
+          <p:nvPr/>
+        </p:nvSpPr>
+        <p:spPr>
+          <a:xfrm>
+            <a:off x="8408762" y="3161944"/>
+            <a:ext cx="920675" cy="242519"/>
           </a:xfrm>
           <a:prstGeom prst="roundRect">
             <a:avLst>
-              <a:gd name="adj" fmla="val 32516"/>
+              <a:gd name="adj" fmla="val 30163"/>
             </a:avLst>
           </a:prstGeom>
           <a:solidFill>
@@ -10687,14 +10765,14 @@
       </p:sp>
       <p:sp>
         <p:nvSpPr>
-          <p:cNvPr id="20" name="Text 18"/>
-          <p:cNvSpPr/>
-          <p:nvPr/>
-        </p:nvSpPr>
-        <p:spPr>
-          <a:xfrm>
-            <a:off x="10626645" y="2736378"/>
-            <a:ext cx="1103796" cy="115243"/>
+          <p:cNvPr id="21" name="Text 19"/>
+          <p:cNvSpPr/>
+          <p:nvPr/>
+        </p:nvSpPr>
+        <p:spPr>
+          <a:xfrm>
+            <a:off x="8463626" y="3216808"/>
+            <a:ext cx="810947" cy="132791"/>
           </a:xfrm>
           <a:prstGeom prst="rect">
             <a:avLst/>
@@ -10718,7 +10796,7 @@
                 <a:ea typeface="Trebuchet MS" pitchFamily="34" charset="-122"/>
                 <a:cs typeface="Trebuchet MS" pitchFamily="34" charset="-120"/>
               </a:rPr>
-              <a:t>Renderer Multipli</a:t>
+              <a:t>Renderer Mu…</a:t>
             </a:r>
             <a:endParaRPr lang="en-US" sz="1100" dirty="0"/>
           </a:p>
@@ -10726,18 +10804,18 @@
       </p:sp>
       <p:sp>
         <p:nvSpPr>
-          <p:cNvPr id="21" name="Shape 19"/>
-          <p:cNvSpPr/>
-          <p:nvPr/>
-        </p:nvSpPr>
-        <p:spPr>
-          <a:xfrm>
-            <a:off x="406390" y="2079171"/>
-            <a:ext cx="1213524" cy="224971"/>
+          <p:cNvPr id="22" name="Shape 20"/>
+          <p:cNvSpPr/>
+          <p:nvPr/>
+        </p:nvSpPr>
+        <p:spPr>
+          <a:xfrm>
+            <a:off x="2862258" y="2434387"/>
+            <a:ext cx="920675" cy="242519"/>
           </a:xfrm>
           <a:prstGeom prst="roundRect">
             <a:avLst>
-              <a:gd name="adj" fmla="val 32516"/>
+              <a:gd name="adj" fmla="val 30163"/>
             </a:avLst>
           </a:prstGeom>
           <a:solidFill>
@@ -10753,14 +10831,14 @@
       </p:sp>
       <p:sp>
         <p:nvSpPr>
-          <p:cNvPr id="22" name="Text 20"/>
-          <p:cNvSpPr/>
-          <p:nvPr/>
-        </p:nvSpPr>
-        <p:spPr>
-          <a:xfrm>
-            <a:off x="461254" y="2134035"/>
-            <a:ext cx="1103796" cy="115243"/>
+          <p:cNvPr id="23" name="Text 21"/>
+          <p:cNvSpPr/>
+          <p:nvPr/>
+        </p:nvSpPr>
+        <p:spPr>
+          <a:xfrm>
+            <a:off x="2917122" y="2489251"/>
+            <a:ext cx="810947" cy="132791"/>
           </a:xfrm>
           <a:prstGeom prst="rect">
             <a:avLst/>
@@ -10792,18 +10870,18 @@
       </p:sp>
       <p:sp>
         <p:nvSpPr>
-          <p:cNvPr id="23" name="Shape 21"/>
-          <p:cNvSpPr/>
-          <p:nvPr/>
-        </p:nvSpPr>
-        <p:spPr>
-          <a:xfrm>
-            <a:off x="406390" y="2380343"/>
-            <a:ext cx="1213524" cy="224971"/>
+          <p:cNvPr id="24" name="Shape 22"/>
+          <p:cNvSpPr/>
+          <p:nvPr/>
+        </p:nvSpPr>
+        <p:spPr>
+          <a:xfrm>
+            <a:off x="2862258" y="2798166"/>
+            <a:ext cx="920675" cy="242519"/>
           </a:xfrm>
           <a:prstGeom prst="roundRect">
             <a:avLst>
-              <a:gd name="adj" fmla="val 32516"/>
+              <a:gd name="adj" fmla="val 30163"/>
             </a:avLst>
           </a:prstGeom>
           <a:solidFill>
@@ -10819,14 +10897,14 @@
       </p:sp>
       <p:sp>
         <p:nvSpPr>
-          <p:cNvPr id="24" name="Text 22"/>
-          <p:cNvSpPr/>
-          <p:nvPr/>
-        </p:nvSpPr>
-        <p:spPr>
-          <a:xfrm>
-            <a:off x="461254" y="2435207"/>
-            <a:ext cx="1103796" cy="115243"/>
+          <p:cNvPr id="25" name="Text 23"/>
+          <p:cNvSpPr/>
+          <p:nvPr/>
+        </p:nvSpPr>
+        <p:spPr>
+          <a:xfrm>
+            <a:off x="2917122" y="2853030"/>
+            <a:ext cx="810947" cy="132791"/>
           </a:xfrm>
           <a:prstGeom prst="rect">
             <a:avLst/>
@@ -10858,18 +10936,18 @@
       </p:sp>
       <p:sp>
         <p:nvSpPr>
-          <p:cNvPr id="25" name="Shape 23"/>
-          <p:cNvSpPr/>
-          <p:nvPr/>
-        </p:nvSpPr>
-        <p:spPr>
-          <a:xfrm>
-            <a:off x="406390" y="2681514"/>
-            <a:ext cx="1213524" cy="224971"/>
+          <p:cNvPr id="26" name="Shape 24"/>
+          <p:cNvSpPr/>
+          <p:nvPr/>
+        </p:nvSpPr>
+        <p:spPr>
+          <a:xfrm>
+            <a:off x="2862258" y="3161944"/>
+            <a:ext cx="920675" cy="242519"/>
           </a:xfrm>
           <a:prstGeom prst="roundRect">
             <a:avLst>
-              <a:gd name="adj" fmla="val 32516"/>
+              <a:gd name="adj" fmla="val 30163"/>
             </a:avLst>
           </a:prstGeom>
           <a:solidFill>
@@ -10885,14 +10963,14 @@
       </p:sp>
       <p:sp>
         <p:nvSpPr>
-          <p:cNvPr id="26" name="Text 24"/>
-          <p:cNvSpPr/>
-          <p:nvPr/>
-        </p:nvSpPr>
-        <p:spPr>
-          <a:xfrm>
-            <a:off x="461254" y="2736378"/>
-            <a:ext cx="1103796" cy="115243"/>
+          <p:cNvPr id="27" name="Text 25"/>
+          <p:cNvSpPr/>
+          <p:nvPr/>
+        </p:nvSpPr>
+        <p:spPr>
+          <a:xfrm>
+            <a:off x="2917122" y="3216808"/>
+            <a:ext cx="810947" cy="132791"/>
           </a:xfrm>
           <a:prstGeom prst="rect">
             <a:avLst/>
@@ -10924,18 +11002,18 @@
       </p:sp>
       <p:sp>
         <p:nvSpPr>
-          <p:cNvPr id="27" name="Shape 25"/>
-          <p:cNvSpPr/>
-          <p:nvPr/>
-        </p:nvSpPr>
-        <p:spPr>
-          <a:xfrm>
-            <a:off x="406390" y="2982686"/>
-            <a:ext cx="1213524" cy="224971"/>
+          <p:cNvPr id="28" name="Shape 26"/>
+          <p:cNvSpPr/>
+          <p:nvPr/>
+        </p:nvSpPr>
+        <p:spPr>
+          <a:xfrm>
+            <a:off x="2862258" y="3525723"/>
+            <a:ext cx="920675" cy="242519"/>
           </a:xfrm>
           <a:prstGeom prst="roundRect">
             <a:avLst>
-              <a:gd name="adj" fmla="val 32516"/>
+              <a:gd name="adj" fmla="val 30163"/>
             </a:avLst>
           </a:prstGeom>
           <a:solidFill>
@@ -10951,14 +11029,14 @@
       </p:sp>
       <p:sp>
         <p:nvSpPr>
-          <p:cNvPr id="28" name="Text 26"/>
-          <p:cNvSpPr/>
-          <p:nvPr/>
-        </p:nvSpPr>
-        <p:spPr>
-          <a:xfrm>
-            <a:off x="461254" y="3037550"/>
-            <a:ext cx="1103796" cy="115243"/>
+          <p:cNvPr id="29" name="Text 27"/>
+          <p:cNvSpPr/>
+          <p:nvPr/>
+        </p:nvSpPr>
+        <p:spPr>
+          <a:xfrm>
+            <a:off x="2917122" y="3580587"/>
+            <a:ext cx="810947" cy="132791"/>
           </a:xfrm>
           <a:prstGeom prst="rect">
             <a:avLst/>
@@ -10990,18 +11068,18 @@
       </p:sp>
       <p:sp>
         <p:nvSpPr>
-          <p:cNvPr id="29" name="Shape 27"/>
-          <p:cNvSpPr/>
-          <p:nvPr/>
-        </p:nvSpPr>
-        <p:spPr>
-          <a:xfrm>
-            <a:off x="406390" y="3283857"/>
-            <a:ext cx="1213524" cy="224971"/>
+          <p:cNvPr id="30" name="Shape 28"/>
+          <p:cNvSpPr/>
+          <p:nvPr/>
+        </p:nvSpPr>
+        <p:spPr>
+          <a:xfrm>
+            <a:off x="2862258" y="3889502"/>
+            <a:ext cx="920675" cy="242519"/>
           </a:xfrm>
           <a:prstGeom prst="roundRect">
             <a:avLst>
-              <a:gd name="adj" fmla="val 32516"/>
+              <a:gd name="adj" fmla="val 30163"/>
             </a:avLst>
           </a:prstGeom>
           <a:solidFill>
@@ -11017,14 +11095,14 @@
       </p:sp>
       <p:sp>
         <p:nvSpPr>
-          <p:cNvPr id="30" name="Text 28"/>
-          <p:cNvSpPr/>
-          <p:nvPr/>
-        </p:nvSpPr>
-        <p:spPr>
-          <a:xfrm>
-            <a:off x="461254" y="3338721"/>
-            <a:ext cx="1103796" cy="115243"/>
+          <p:cNvPr id="31" name="Text 29"/>
+          <p:cNvSpPr/>
+          <p:nvPr/>
+        </p:nvSpPr>
+        <p:spPr>
+          <a:xfrm>
+            <a:off x="2917122" y="3944366"/>
+            <a:ext cx="810947" cy="132791"/>
           </a:xfrm>
           <a:prstGeom prst="rect">
             <a:avLst/>
@@ -11056,18 +11134,18 @@
       </p:sp>
       <p:sp>
         <p:nvSpPr>
-          <p:cNvPr id="31" name="Shape 29"/>
-          <p:cNvSpPr/>
-          <p:nvPr/>
-        </p:nvSpPr>
-        <p:spPr>
-          <a:xfrm>
-            <a:off x="406390" y="3585029"/>
-            <a:ext cx="1213524" cy="224971"/>
+          <p:cNvPr id="32" name="Shape 30"/>
+          <p:cNvSpPr/>
+          <p:nvPr/>
+        </p:nvSpPr>
+        <p:spPr>
+          <a:xfrm>
+            <a:off x="2862258" y="4253281"/>
+            <a:ext cx="920675" cy="242519"/>
           </a:xfrm>
           <a:prstGeom prst="roundRect">
             <a:avLst>
-              <a:gd name="adj" fmla="val 32516"/>
+              <a:gd name="adj" fmla="val 30163"/>
             </a:avLst>
           </a:prstGeom>
           <a:solidFill>
@@ -11083,14 +11161,14 @@
       </p:sp>
       <p:sp>
         <p:nvSpPr>
-          <p:cNvPr id="32" name="Text 30"/>
-          <p:cNvSpPr/>
-          <p:nvPr/>
-        </p:nvSpPr>
-        <p:spPr>
-          <a:xfrm>
-            <a:off x="461254" y="3639893"/>
-            <a:ext cx="1103796" cy="115243"/>
+          <p:cNvPr id="33" name="Text 31"/>
+          <p:cNvSpPr/>
+          <p:nvPr/>
+        </p:nvSpPr>
+        <p:spPr>
+          <a:xfrm>
+            <a:off x="2917122" y="4308145"/>
+            <a:ext cx="810947" cy="132791"/>
           </a:xfrm>
           <a:prstGeom prst="rect">
             <a:avLst/>
@@ -11122,13 +11200,13 @@
       </p:sp>
       <p:sp>
         <p:nvSpPr>
-          <p:cNvPr id="33" name="Shape 31"/>
-          <p:cNvSpPr/>
-          <p:nvPr/>
-        </p:nvSpPr>
-        <p:spPr>
-          <a:xfrm>
-            <a:off x="406390" y="3987800"/>
+          <p:cNvPr id="34" name="Shape 32"/>
+          <p:cNvSpPr/>
+          <p:nvPr/>
+        </p:nvSpPr>
+        <p:spPr>
+          <a:xfrm>
+            <a:off x="406390" y="4673600"/>
             <a:ext cx="11378916" cy="831850"/>
           </a:xfrm>
           <a:prstGeom prst="roundRect">
@@ -11149,13 +11227,13 @@
       </p:sp>
       <p:sp>
         <p:nvSpPr>
-          <p:cNvPr id="34" name="Text 32"/>
-          <p:cNvSpPr/>
-          <p:nvPr/>
-        </p:nvSpPr>
-        <p:spPr>
-          <a:xfrm>
-            <a:off x="543550" y="4060952"/>
+          <p:cNvPr id="35" name="Text 33"/>
+          <p:cNvSpPr/>
+          <p:nvPr/>
+        </p:nvSpPr>
+        <p:spPr>
+          <a:xfrm>
+            <a:off x="543550" y="4746752"/>
             <a:ext cx="11104596" cy="274320"/>
           </a:xfrm>
           <a:prstGeom prst="rect">
@@ -11188,13 +11266,13 @@
       </p:sp>
       <p:sp>
         <p:nvSpPr>
-          <p:cNvPr id="35" name="Text 33"/>
-          <p:cNvSpPr/>
-          <p:nvPr/>
-        </p:nvSpPr>
-        <p:spPr>
-          <a:xfrm>
-            <a:off x="543550" y="4380992"/>
+          <p:cNvPr id="36" name="Text 34"/>
+          <p:cNvSpPr/>
+          <p:nvPr/>
+        </p:nvSpPr>
+        <p:spPr>
+          <a:xfrm>
+            <a:off x="543550" y="5066792"/>
             <a:ext cx="11104596" cy="365506"/>
           </a:xfrm>
           <a:prstGeom prst="rect">
@@ -11227,7 +11305,7 @@
       </p:sp>
       <p:sp>
         <p:nvSpPr>
-          <p:cNvPr id="36" name="Text 34"/>
+          <p:cNvPr id="37" name="Text 35"/>
           <p:cNvSpPr/>
           <p:nvPr/>
         </p:nvSpPr>

--- a/presentation.pptx
+++ b/presentation.pptx
@@ -2152,41 +2152,14 @@
       </p:grpSpPr>
       <p:sp>
         <p:nvSpPr>
-          <p:cNvPr id="2" name="Shape 0"/>
-          <p:cNvSpPr/>
-          <p:nvPr/>
-        </p:nvSpPr>
-        <p:spPr>
-          <a:xfrm>
-            <a:off x="5067148" y="680720"/>
-            <a:ext cx="2057400" cy="292608"/>
-          </a:xfrm>
-          <a:prstGeom prst="roundRect">
-            <a:avLst>
-              <a:gd name="adj" fmla="val 50000"/>
-            </a:avLst>
-          </a:prstGeom>
-          <a:solidFill>
-            <a:srgbClr val="151522"/>
-          </a:solidFill>
-          <a:ln w="19050">
-            <a:solidFill>
-              <a:srgbClr val="FF2E88"/>
-            </a:solidFill>
-            <a:prstDash val="solid"/>
-          </a:ln>
-        </p:spPr>
-      </p:sp>
-      <p:sp>
-        <p:nvSpPr>
-          <p:cNvPr id="3" name="Text 1"/>
-          <p:cNvSpPr/>
-          <p:nvPr/>
-        </p:nvSpPr>
-        <p:spPr>
-          <a:xfrm>
-            <a:off x="5067148" y="680720"/>
-            <a:ext cx="2057400" cy="292608"/>
+          <p:cNvPr id="2" name="Text 0"/>
+          <p:cNvSpPr/>
+          <p:nvPr/>
+        </p:nvSpPr>
+        <p:spPr>
+          <a:xfrm>
+            <a:off x="406390" y="406400"/>
+            <a:ext cx="11378916" cy="320040"/>
           </a:xfrm>
           <a:prstGeom prst="rect">
             <a:avLst/>
@@ -2202,7 +2175,7 @@
               <a:buNone/>
             </a:pPr>
             <a:r>
-              <a:rPr lang="en-US" sz="1000" b="1" dirty="0">
+              <a:rPr lang="en-US" sz="1100" b="1" dirty="0">
                 <a:solidFill>
                   <a:srgbClr val="FF2E88"/>
                 </a:solidFill>
@@ -2210,21 +2183,21 @@
                 <a:ea typeface="Trebuchet MS" pitchFamily="34" charset="-122"/>
                 <a:cs typeface="Trebuchet MS" pitchFamily="34" charset="-120"/>
               </a:rPr>
-              <a:t>DESIGN COMPILER</a:t>
-            </a:r>
-            <a:endParaRPr lang="en-US" sz="1000" dirty="0"/>
-          </a:p>
-        </p:txBody>
-      </p:sp>
-      <p:sp>
-        <p:nvSpPr>
-          <p:cNvPr id="4" name="Text 2"/>
-          <p:cNvSpPr/>
-          <p:nvPr/>
-        </p:nvSpPr>
-        <p:spPr>
-          <a:xfrm>
-            <a:off x="406390" y="1119632"/>
+              <a:t>[CLASSE / CORSO] • [DATA DELLA PRESENTAZIONE]</a:t>
+            </a:r>
+            <a:endParaRPr lang="en-US" sz="1100" dirty="0"/>
+          </a:p>
+        </p:txBody>
+      </p:sp>
+      <p:sp>
+        <p:nvSpPr>
+          <p:cNvPr id="3" name="Text 1"/>
+          <p:cNvSpPr/>
+          <p:nvPr/>
+        </p:nvSpPr>
+        <p:spPr>
+          <a:xfrm>
+            <a:off x="406390" y="790448"/>
             <a:ext cx="11378916" cy="640080"/>
           </a:xfrm>
           <a:prstGeom prst="rect">
@@ -2241,7 +2214,7 @@
               <a:buNone/>
             </a:pPr>
             <a:r>
-              <a:rPr lang="en-US" sz="4200" b="1" dirty="0">
+              <a:rPr lang="en-US" sz="3300" b="1" dirty="0">
                 <a:solidFill>
                   <a:srgbClr val="FFFFFF"/>
                 </a:solidFill>
@@ -2251,20 +2224,20 @@
               </a:rPr>
               <a:t>Yumia</a:t>
             </a:r>
-            <a:endParaRPr lang="en-US" sz="4200" dirty="0"/>
-          </a:p>
-        </p:txBody>
-      </p:sp>
-      <p:sp>
-        <p:nvSpPr>
-          <p:cNvPr id="5" name="Text 3"/>
-          <p:cNvSpPr/>
-          <p:nvPr/>
-        </p:nvSpPr>
-        <p:spPr>
-          <a:xfrm>
-            <a:off x="406390" y="1832864"/>
-            <a:ext cx="11378916" cy="347472"/>
+            <a:endParaRPr lang="en-US" sz="3300" dirty="0"/>
+          </a:p>
+        </p:txBody>
+      </p:sp>
+      <p:sp>
+        <p:nvSpPr>
+          <p:cNvPr id="4" name="Text 2"/>
+          <p:cNvSpPr/>
+          <p:nvPr/>
+        </p:nvSpPr>
+        <p:spPr>
+          <a:xfrm>
+            <a:off x="406390" y="1503680"/>
+            <a:ext cx="11378916" cy="365760"/>
           </a:xfrm>
           <a:prstGeom prst="rect">
             <a:avLst/>
@@ -2280,7 +2253,7 @@
               <a:buNone/>
             </a:pPr>
             <a:r>
-              <a:rPr lang="en-US" sz="1400" dirty="0">
+              <a:rPr lang="en-US" sz="1600" dirty="0">
                 <a:solidFill>
                   <a:srgbClr val="A7A7B5"/>
                 </a:solidFill>
@@ -2290,91 +2263,52 @@
               </a:rPr>
               <a:t>Un linguaggio dichiarativo per documenti visivi</a:t>
             </a:r>
-            <a:endParaRPr lang="en-US" sz="1400" dirty="0"/>
-          </a:p>
-        </p:txBody>
-      </p:sp>
-      <p:sp>
-        <p:nvSpPr>
-          <p:cNvPr id="6" name="Text 4"/>
-          <p:cNvSpPr/>
-          <p:nvPr/>
-        </p:nvSpPr>
-        <p:spPr>
-          <a:xfrm>
-            <a:off x="406390" y="2290064"/>
-            <a:ext cx="11378916" cy="274320"/>
-          </a:xfrm>
-          <a:prstGeom prst="rect">
-            <a:avLst/>
-          </a:prstGeom>
-          <a:noFill/>
-          <a:ln/>
-        </p:spPr>
-        <p:txBody>
-          <a:bodyPr wrap="square" rtlCol="0" anchor="ctr"/>
-          <a:lstStyle/>
-          <a:p>
-            <a:pPr algn="ctr" indent="0" marL="0">
-              <a:buNone/>
-            </a:pPr>
-            <a:r>
-              <a:rPr lang="en-US" sz="1200" dirty="0">
-                <a:solidFill>
-                  <a:srgbClr val="A7A7B5"/>
+            <a:endParaRPr lang="en-US" sz="1600" dirty="0"/>
+          </a:p>
+        </p:txBody>
+      </p:sp>
+      <p:sp>
+        <p:nvSpPr>
+          <p:cNvPr id="5" name="Text 3"/>
+          <p:cNvSpPr/>
+          <p:nvPr/>
+        </p:nvSpPr>
+        <p:spPr>
+          <a:xfrm>
+            <a:off x="406390" y="1727200"/>
+            <a:ext cx="11378916" cy="254000"/>
+          </a:xfrm>
+          <a:prstGeom prst="rect">
+            <a:avLst/>
+          </a:prstGeom>
+          <a:noFill/>
+          <a:ln/>
+        </p:spPr>
+        <p:txBody>
+          <a:bodyPr wrap="square" lIns="0" tIns="0" rIns="0" bIns="0" rtlCol="0" anchor="t"/>
+          <a:lstStyle/>
+          <a:p>
+            <a:pPr algn="l" indent="0" marL="0">
+              <a:buNone/>
+            </a:pPr>
+            <a:r>
+              <a:rPr lang="en-US" sz="1800" dirty="0">
+                <a:solidFill>
+                  <a:srgbClr val="FFFFFF"/>
                 </a:solidFill>
                 <a:latin typeface="Segoe UI" pitchFamily="34" charset="0"/>
                 <a:ea typeface="Segoe UI" pitchFamily="34" charset="-122"/>
                 <a:cs typeface="Segoe UI" pitchFamily="34" charset="-120"/>
               </a:rPr>
-              <a:t>[Classe / Corso] • [Data della presentazione]</a:t>
-            </a:r>
-            <a:endParaRPr lang="en-US" sz="1200" dirty="0"/>
-          </a:p>
-        </p:txBody>
-      </p:sp>
-      <p:sp>
-        <p:nvSpPr>
-          <p:cNvPr id="7" name="Text 5"/>
-          <p:cNvSpPr/>
-          <p:nvPr/>
-        </p:nvSpPr>
-        <p:spPr>
-          <a:xfrm>
-            <a:off x="406390" y="1727200"/>
-            <a:ext cx="11378916" cy="254000"/>
-          </a:xfrm>
-          <a:prstGeom prst="rect">
-            <a:avLst/>
-          </a:prstGeom>
-          <a:noFill/>
-          <a:ln/>
-        </p:spPr>
-        <p:txBody>
-          <a:bodyPr wrap="square" lIns="0" tIns="0" rIns="0" bIns="0" rtlCol="0" anchor="t"/>
-          <a:lstStyle/>
-          <a:p>
-            <a:pPr algn="ctr" indent="0" marL="0">
-              <a:buNone/>
-            </a:pPr>
-            <a:r>
-              <a:rPr lang="en-US" sz="1300" dirty="0">
-                <a:solidFill>
-                  <a:srgbClr val="FFFFFF"/>
-                </a:solidFill>
-                <a:latin typeface="Segoe UI" pitchFamily="34" charset="0"/>
-                <a:ea typeface="Segoe UI" pitchFamily="34" charset="-122"/>
-                <a:cs typeface="Segoe UI" pitchFamily="34" charset="-120"/>
-              </a:rPr>
-              <a:t>[Nome e Cognome]</a:t>
-            </a:r>
-            <a:endParaRPr lang="en-US" sz="1300" dirty="0"/>
-          </a:p>
-        </p:txBody>
-      </p:sp>
-      <p:sp>
-        <p:nvSpPr>
-          <p:cNvPr id="8" name="Text 6"/>
+              <a:t>[Nome e Cognome]" align="center</a:t>
+            </a:r>
+            <a:endParaRPr lang="en-US" sz="1800" dirty="0"/>
+          </a:p>
+        </p:txBody>
+      </p:sp>
+      <p:sp>
+        <p:nvSpPr>
+          <p:cNvPr id="6" name="Text 4"/>
           <p:cNvSpPr/>
           <p:nvPr/>
         </p:nvSpPr>
@@ -2461,14 +2395,14 @@
           <a:ln/>
         </p:spPr>
         <p:txBody>
-          <a:bodyPr wrap="square" lIns="0" tIns="0" rIns="0" bIns="0" rtlCol="0" anchor="t"/>
+          <a:bodyPr wrap="square" lIns="0" tIns="0" rIns="0" bIns="0" rtlCol="0" anchor="ctr"/>
           <a:lstStyle/>
           <a:p>
             <a:pPr algn="l" indent="0" marL="0">
               <a:buNone/>
             </a:pPr>
             <a:r>
-              <a:rPr lang="en-US" sz="3300" b="1" dirty="0">
+              <a:rPr lang="en-US" sz="4600" b="1" dirty="0">
                 <a:solidFill>
                   <a:srgbClr val="FF2E88"/>
                 </a:solidFill>
@@ -2478,7 +2412,7 @@
               </a:rPr>
               <a:t>CLI e Workflow di Sviluppo</a:t>
             </a:r>
-            <a:endParaRPr lang="en-US" sz="3300" dirty="0"/>
+            <a:endParaRPr lang="en-US" sz="4600" dirty="0"/>
           </a:p>
         </p:txBody>
       </p:sp>
@@ -2500,14 +2434,14 @@
           <a:ln/>
         </p:spPr>
         <p:txBody>
-          <a:bodyPr wrap="square" lIns="0" tIns="0" rIns="0" bIns="0" rtlCol="0" anchor="t"/>
+          <a:bodyPr wrap="square" lIns="0" tIns="0" rIns="0" bIns="0" rtlCol="0" anchor="ctr"/>
           <a:lstStyle/>
           <a:p>
             <a:pPr algn="l" indent="0" marL="0">
               <a:buNone/>
             </a:pPr>
             <a:r>
-              <a:rPr lang="en-US" sz="2700" b="1" dirty="0">
+              <a:rPr lang="en-US" sz="3800" b="1" dirty="0">
                 <a:solidFill>
                   <a:srgbClr val="FFFFFF"/>
                 </a:solidFill>
@@ -2517,7 +2451,7 @@
               </a:rPr>
               <a:t>L'esperienza di sviluppo pensata per sviluppatori e CI/CD</a:t>
             </a:r>
-            <a:endParaRPr lang="en-US" sz="2700" dirty="0"/>
+            <a:endParaRPr lang="en-US" sz="3800" dirty="0"/>
           </a:p>
         </p:txBody>
       </p:sp>
@@ -2578,8 +2512,8 @@
         </p:nvSpPr>
         <p:spPr>
           <a:xfrm>
-            <a:off x="634990" y="1887728"/>
-            <a:ext cx="3217241" cy="274320"/>
+            <a:off x="634990" y="1942592"/>
+            <a:ext cx="3217241" cy="320040"/>
           </a:xfrm>
           <a:prstGeom prst="rect">
             <a:avLst/>
@@ -2595,7 +2529,7 @@
               <a:buNone/>
             </a:pPr>
             <a:r>
-              <a:rPr lang="en-US" sz="1600" b="1" dirty="0">
+              <a:rPr lang="en-US" sz="2000" b="1" dirty="0">
                 <a:solidFill>
                   <a:srgbClr val="FF2E88"/>
                 </a:solidFill>
@@ -2605,7 +2539,7 @@
               </a:rPr>
               <a:t>1. Scrittura &amp; Validazione</a:t>
             </a:r>
-            <a:endParaRPr lang="en-US" sz="1600" dirty="0"/>
+            <a:endParaRPr lang="en-US" sz="2000" dirty="0"/>
           </a:p>
         </p:txBody>
       </p:sp>
@@ -2824,8 +2758,8 @@
         </p:nvSpPr>
         <p:spPr>
           <a:xfrm>
-            <a:off x="4487227" y="1887728"/>
-            <a:ext cx="3217241" cy="274320"/>
+            <a:off x="4487227" y="1942592"/>
+            <a:ext cx="3217241" cy="320040"/>
           </a:xfrm>
           <a:prstGeom prst="rect">
             <a:avLst/>
@@ -2841,7 +2775,7 @@
               <a:buNone/>
             </a:pPr>
             <a:r>
-              <a:rPr lang="en-US" sz="1600" b="1" dirty="0">
+              <a:rPr lang="en-US" sz="2000" b="1" dirty="0">
                 <a:solidFill>
                   <a:srgbClr val="7B61FF"/>
                 </a:solidFill>
@@ -2851,7 +2785,7 @@
               </a:rPr>
               <a:t>2. Live Dev &amp; Audit</a:t>
             </a:r>
-            <a:endParaRPr lang="en-US" sz="1600" dirty="0"/>
+            <a:endParaRPr lang="en-US" sz="2000" dirty="0"/>
           </a:p>
         </p:txBody>
       </p:sp>
@@ -3070,8 +3004,8 @@
         </p:nvSpPr>
         <p:spPr>
           <a:xfrm>
-            <a:off x="8339464" y="1887728"/>
-            <a:ext cx="3217241" cy="274320"/>
+            <a:off x="8339464" y="1942592"/>
+            <a:ext cx="3217241" cy="320040"/>
           </a:xfrm>
           <a:prstGeom prst="rect">
             <a:avLst/>
@@ -3087,7 +3021,7 @@
               <a:buNone/>
             </a:pPr>
             <a:r>
-              <a:rPr lang="en-US" sz="1600" b="1" dirty="0">
+              <a:rPr lang="en-US" sz="2000" b="1" dirty="0">
                 <a:solidFill>
                   <a:srgbClr val="00FF9F"/>
                 </a:solidFill>
@@ -3097,7 +3031,7 @@
               </a:rPr>
               <a:t>3. Build &amp; Deploy</a:t>
             </a:r>
-            <a:endParaRPr lang="en-US" sz="1600" dirty="0"/>
+            <a:endParaRPr lang="en-US" sz="2000" dirty="0"/>
           </a:p>
         </p:txBody>
       </p:sp>
@@ -3453,14 +3387,14 @@
           <a:ln/>
         </p:spPr>
         <p:txBody>
-          <a:bodyPr wrap="square" lIns="0" tIns="0" rIns="0" bIns="0" rtlCol="0" anchor="t"/>
+          <a:bodyPr wrap="square" lIns="0" tIns="0" rIns="0" bIns="0" rtlCol="0" anchor="ctr"/>
           <a:lstStyle/>
           <a:p>
             <a:pPr algn="l" indent="0" marL="0">
               <a:buNone/>
             </a:pPr>
             <a:r>
-              <a:rPr lang="en-US" sz="3300" b="1" dirty="0">
+              <a:rPr lang="en-US" sz="4600" b="1" dirty="0">
                 <a:solidFill>
                   <a:srgbClr val="FF2E88"/>
                 </a:solidFill>
@@ -3470,7 +3404,7 @@
               </a:rPr>
               <a:t>Yumia e Intelligenza Artificiale</a:t>
             </a:r>
-            <a:endParaRPr lang="en-US" sz="3300" dirty="0"/>
+            <a:endParaRPr lang="en-US" sz="4600" dirty="0"/>
           </a:p>
         </p:txBody>
       </p:sp>
@@ -3492,14 +3426,14 @@
           <a:ln/>
         </p:spPr>
         <p:txBody>
-          <a:bodyPr wrap="square" lIns="0" tIns="0" rIns="0" bIns="0" rtlCol="0" anchor="t"/>
+          <a:bodyPr wrap="square" lIns="0" tIns="0" rIns="0" bIns="0" rtlCol="0" anchor="ctr"/>
           <a:lstStyle/>
           <a:p>
             <a:pPr algn="l" indent="0" marL="0">
               <a:buNone/>
             </a:pPr>
             <a:r>
-              <a:rPr lang="en-US" sz="2700" b="1" dirty="0">
+              <a:rPr lang="en-US" sz="3800" b="1" dirty="0">
                 <a:solidFill>
                   <a:srgbClr val="FFFFFF"/>
                 </a:solidFill>
@@ -3509,7 +3443,7 @@
               </a:rPr>
               <a:t>Perché i linguaggi dichiarativi semantici superano l'HTML grezzo</a:t>
             </a:r>
-            <a:endParaRPr lang="en-US" sz="2700" dirty="0"/>
+            <a:endParaRPr lang="en-US" sz="3800" dirty="0"/>
           </a:p>
         </p:txBody>
       </p:sp>
@@ -3797,7 +3731,7 @@
               <a:buNone/>
             </a:pPr>
             <a:r>
-              <a:rPr lang="en-US" sz="1300" dirty="0">
+              <a:rPr lang="en-US" sz="1800" dirty="0">
                 <a:solidFill>
                   <a:srgbClr val="FFFFFF"/>
                 </a:solidFill>
@@ -3807,7 +3741,7 @@
               </a:rPr>
               <a:t>• Allucinazioni di coordinate pixel e layout rotti</a:t>
             </a:r>
-            <a:endParaRPr lang="en-US" sz="1300" dirty="0"/>
+            <a:endParaRPr lang="en-US" sz="1800" dirty="0"/>
           </a:p>
         </p:txBody>
       </p:sp>
@@ -3836,7 +3770,7 @@
               <a:buNone/>
             </a:pPr>
             <a:r>
-              <a:rPr lang="en-US" sz="1300" dirty="0">
+              <a:rPr lang="en-US" sz="1800" dirty="0">
                 <a:solidFill>
                   <a:srgbClr val="FFFFFF"/>
                 </a:solidFill>
@@ -3846,7 +3780,7 @@
               </a:rPr>
               <a:t>• Codice verboso con rischio di sintassi non valida</a:t>
             </a:r>
-            <a:endParaRPr lang="en-US" sz="1300" dirty="0"/>
+            <a:endParaRPr lang="en-US" sz="1800" dirty="0"/>
           </a:p>
         </p:txBody>
       </p:sp>
@@ -3875,7 +3809,7 @@
               <a:buNone/>
             </a:pPr>
             <a:r>
-              <a:rPr lang="en-US" sz="1300" dirty="0">
+              <a:rPr lang="en-US" sz="1800" dirty="0">
                 <a:solidFill>
                   <a:srgbClr val="FFFFFF"/>
                 </a:solidFill>
@@ -3885,7 +3819,7 @@
               </a:rPr>
               <a:t>• Difficile da vincolare a un design system coerente</a:t>
             </a:r>
-            <a:endParaRPr lang="en-US" sz="1300" dirty="0"/>
+            <a:endParaRPr lang="en-US" sz="1800" dirty="0"/>
           </a:p>
         </p:txBody>
       </p:sp>
@@ -3914,7 +3848,7 @@
               <a:buNone/>
             </a:pPr>
             <a:r>
-              <a:rPr lang="en-US" sz="1300" dirty="0">
+              <a:rPr lang="en-US" sz="1800" dirty="0">
                 <a:solidFill>
                   <a:srgbClr val="FFFFFF"/>
                 </a:solidFill>
@@ -3924,7 +3858,7 @@
               </a:rPr>
               <a:t>• Revisione manuale complessa per l'utente</a:t>
             </a:r>
-            <a:endParaRPr lang="en-US" sz="1300" dirty="0"/>
+            <a:endParaRPr lang="en-US" sz="1800" dirty="0"/>
           </a:p>
         </p:txBody>
       </p:sp>
@@ -4019,7 +3953,7 @@
               <a:buNone/>
             </a:pPr>
             <a:r>
-              <a:rPr lang="en-US" sz="1300" dirty="0">
+              <a:rPr lang="en-US" sz="1800" dirty="0">
                 <a:solidFill>
                   <a:srgbClr val="FFFFFF"/>
                 </a:solidFill>
@@ -4029,7 +3963,7 @@
               </a:rPr>
               <a:t>• Generazione guidata da JSON Schema (yumia schema)</a:t>
             </a:r>
-            <a:endParaRPr lang="en-US" sz="1300" dirty="0"/>
+            <a:endParaRPr lang="en-US" sz="1800" dirty="0"/>
           </a:p>
         </p:txBody>
       </p:sp>
@@ -4058,7 +3992,7 @@
               <a:buNone/>
             </a:pPr>
             <a:r>
-              <a:rPr lang="en-US" sz="1300" dirty="0">
+              <a:rPr lang="en-US" sz="1800" dirty="0">
                 <a:solidFill>
                   <a:srgbClr val="FFFFFF"/>
                 </a:solidFill>
@@ -4068,7 +4002,7 @@
               </a:rPr>
               <a:t>• Sintassi concisa focalizzata sul contenuto semantico</a:t>
             </a:r>
-            <a:endParaRPr lang="en-US" sz="1300" dirty="0"/>
+            <a:endParaRPr lang="en-US" sz="1800" dirty="0"/>
           </a:p>
         </p:txBody>
       </p:sp>
@@ -4097,7 +4031,7 @@
               <a:buNone/>
             </a:pPr>
             <a:r>
-              <a:rPr lang="en-US" sz="1300" dirty="0">
+              <a:rPr lang="en-US" sz="1800" dirty="0">
                 <a:solidFill>
                   <a:srgbClr val="FFFFFF"/>
                 </a:solidFill>
@@ -4107,7 +4041,7 @@
               </a:rPr>
               <a:t>• Il motore garantisce allineamenti e layout perfetti</a:t>
             </a:r>
-            <a:endParaRPr lang="en-US" sz="1300" dirty="0"/>
+            <a:endParaRPr lang="en-US" sz="1800" dirty="0"/>
           </a:p>
         </p:txBody>
       </p:sp>
@@ -4136,7 +4070,7 @@
               <a:buNone/>
             </a:pPr>
             <a:r>
-              <a:rPr lang="en-US" sz="1300" dirty="0">
+              <a:rPr lang="en-US" sz="1800" dirty="0">
                 <a:solidFill>
                   <a:srgbClr val="FFFFFF"/>
                 </a:solidFill>
@@ -4146,7 +4080,7 @@
               </a:rPr>
               <a:t>• Validazione deterministica automatica post-generazione</a:t>
             </a:r>
-            <a:endParaRPr lang="en-US" sz="1300" dirty="0"/>
+            <a:endParaRPr lang="en-US" sz="1800" dirty="0"/>
           </a:p>
         </p:txBody>
       </p:sp>
@@ -4239,14 +4173,14 @@
           <a:ln/>
         </p:spPr>
         <p:txBody>
-          <a:bodyPr wrap="square" lIns="0" tIns="0" rIns="0" bIns="0" rtlCol="0" anchor="t"/>
+          <a:bodyPr wrap="square" lIns="0" tIns="0" rIns="0" bIns="0" rtlCol="0" anchor="ctr"/>
           <a:lstStyle/>
           <a:p>
             <a:pPr algn="l" indent="0" marL="0">
               <a:buNone/>
             </a:pPr>
             <a:r>
-              <a:rPr lang="en-US" sz="3300" b="1" dirty="0">
+              <a:rPr lang="en-US" sz="4600" b="1" dirty="0">
                 <a:solidFill>
                   <a:srgbClr val="FF2E88"/>
                 </a:solidFill>
@@ -4256,7 +4190,7 @@
               </a:rPr>
               <a:t>Funzionalità e Componenti Avanzati</a:t>
             </a:r>
-            <a:endParaRPr lang="en-US" sz="3300" dirty="0"/>
+            <a:endParaRPr lang="en-US" sz="4600" dirty="0"/>
           </a:p>
         </p:txBody>
       </p:sp>
@@ -4278,14 +4212,14 @@
           <a:ln/>
         </p:spPr>
         <p:txBody>
-          <a:bodyPr wrap="square" lIns="0" tIns="0" rIns="0" bIns="0" rtlCol="0" anchor="t"/>
+          <a:bodyPr wrap="square" lIns="0" tIns="0" rIns="0" bIns="0" rtlCol="0" anchor="ctr"/>
           <a:lstStyle/>
           <a:p>
             <a:pPr algn="l" indent="0" marL="0">
               <a:buNone/>
             </a:pPr>
             <a:r>
-              <a:rPr lang="en-US" sz="2700" b="1" dirty="0">
+              <a:rPr lang="en-US" sz="3800" b="1" dirty="0">
                 <a:solidFill>
                   <a:srgbClr val="FFFFFF"/>
                 </a:solidFill>
@@ -4295,7 +4229,7 @@
               </a:rPr>
               <a:t>Un ricco ecosistema integrato senza dipendenze esterne</a:t>
             </a:r>
-            <a:endParaRPr lang="en-US" sz="2700" dirty="0"/>
+            <a:endParaRPr lang="en-US" sz="3800" dirty="0"/>
           </a:p>
         </p:txBody>
       </p:sp>
@@ -4356,8 +4290,8 @@
         </p:nvSpPr>
         <p:spPr>
           <a:xfrm>
-            <a:off x="634990" y="1887728"/>
-            <a:ext cx="3217241" cy="274320"/>
+            <a:off x="634990" y="1942592"/>
+            <a:ext cx="3217241" cy="320040"/>
           </a:xfrm>
           <a:prstGeom prst="rect">
             <a:avLst/>
@@ -4373,7 +4307,7 @@
               <a:buNone/>
             </a:pPr>
             <a:r>
-              <a:rPr lang="en-US" sz="1600" b="1" dirty="0">
+              <a:rPr lang="en-US" sz="2000" b="1" dirty="0">
                 <a:solidFill>
                   <a:srgbClr val="FF2E88"/>
                 </a:solidFill>
@@ -4383,7 +4317,7 @@
               </a:rPr>
               <a:t>Icon Provider Multipli</a:t>
             </a:r>
-            <a:endParaRPr lang="en-US" sz="1600" dirty="0"/>
+            <a:endParaRPr lang="en-US" sz="2000" dirty="0"/>
           </a:p>
         </p:txBody>
       </p:sp>
@@ -4412,7 +4346,7 @@
               <a:buNone/>
             </a:pPr>
             <a:r>
-              <a:rPr lang="en-US" sz="1300" dirty="0">
+              <a:rPr lang="en-US" sz="1800" dirty="0">
                 <a:solidFill>
                   <a:srgbClr val="FFFFFF"/>
                 </a:solidFill>
@@ -4422,7 +4356,7 @@
               </a:rPr>
               <a:t>Supporto nativo a oltre 10.000 icone da Lucide, Material, Tabler e FontAwesome.</a:t>
             </a:r>
-            <a:endParaRPr lang="en-US" sz="1300" dirty="0"/>
+            <a:endParaRPr lang="en-US" sz="1800" dirty="0"/>
           </a:p>
         </p:txBody>
       </p:sp>
@@ -4483,8 +4417,8 @@
         </p:nvSpPr>
         <p:spPr>
           <a:xfrm>
-            <a:off x="4487227" y="1887728"/>
-            <a:ext cx="3217241" cy="274320"/>
+            <a:off x="4487227" y="1942592"/>
+            <a:ext cx="3217241" cy="320040"/>
           </a:xfrm>
           <a:prstGeom prst="rect">
             <a:avLst/>
@@ -4500,7 +4434,7 @@
               <a:buNone/>
             </a:pPr>
             <a:r>
-              <a:rPr lang="en-US" sz="1600" b="1" dirty="0">
+              <a:rPr lang="en-US" sz="2000" b="1" dirty="0">
                 <a:solidFill>
                   <a:srgbClr val="7B61FF"/>
                 </a:solidFill>
@@ -4510,7 +4444,7 @@
               </a:rPr>
               <a:t>Diagrammi Integrati</a:t>
             </a:r>
-            <a:endParaRPr lang="en-US" sz="1600" dirty="0"/>
+            <a:endParaRPr lang="en-US" sz="2000" dirty="0"/>
           </a:p>
         </p:txBody>
       </p:sp>
@@ -4539,7 +4473,7 @@
               <a:buNone/>
             </a:pPr>
             <a:r>
-              <a:rPr lang="en-US" sz="1300" dirty="0">
+              <a:rPr lang="en-US" sz="1800" dirty="0">
                 <a:solidFill>
                   <a:srgbClr val="FFFFFF"/>
                 </a:solidFill>
@@ -4549,7 +4483,7 @@
               </a:rPr>
               <a:t>Flowchart direzionali, Sequence diagram, architetture e diagrammi di classi UML.</a:t>
             </a:r>
-            <a:endParaRPr lang="en-US" sz="1300" dirty="0"/>
+            <a:endParaRPr lang="en-US" sz="1800" dirty="0"/>
           </a:p>
         </p:txBody>
       </p:sp>
@@ -4610,8 +4544,8 @@
         </p:nvSpPr>
         <p:spPr>
           <a:xfrm>
-            <a:off x="8339464" y="1887728"/>
-            <a:ext cx="3217241" cy="274320"/>
+            <a:off x="8339464" y="1942592"/>
+            <a:ext cx="3217241" cy="320040"/>
           </a:xfrm>
           <a:prstGeom prst="rect">
             <a:avLst/>
@@ -4627,7 +4561,7 @@
               <a:buNone/>
             </a:pPr>
             <a:r>
-              <a:rPr lang="en-US" sz="1600" b="1" dirty="0">
+              <a:rPr lang="en-US" sz="2000" b="1" dirty="0">
                 <a:solidFill>
                   <a:srgbClr val="FFE600"/>
                 </a:solidFill>
@@ -4637,7 +4571,7 @@
               </a:rPr>
               <a:t>Grafici &amp; Timeline</a:t>
             </a:r>
-            <a:endParaRPr lang="en-US" sz="1600" dirty="0"/>
+            <a:endParaRPr lang="en-US" sz="2000" dirty="0"/>
           </a:p>
         </p:txBody>
       </p:sp>
@@ -4666,7 +4600,7 @@
               <a:buNone/>
             </a:pPr>
             <a:r>
-              <a:rPr lang="en-US" sz="1300" dirty="0">
+              <a:rPr lang="en-US" sz="1800" dirty="0">
                 <a:solidFill>
                   <a:srgbClr val="FFFFFF"/>
                 </a:solidFill>
@@ -4676,7 +4610,7 @@
               </a:rPr>
               <a:t>Grafici a barre, ciambella, radar, gauge e timeline storiche generate nativamente.</a:t>
             </a:r>
-            <a:endParaRPr lang="en-US" sz="1300" dirty="0"/>
+            <a:endParaRPr lang="en-US" sz="1800" dirty="0"/>
           </a:p>
         </p:txBody>
       </p:sp>
@@ -4737,8 +4671,8 @@
         </p:nvSpPr>
         <p:spPr>
           <a:xfrm>
-            <a:off x="634990" y="3614928"/>
-            <a:ext cx="3217241" cy="274320"/>
+            <a:off x="634990" y="3669792"/>
+            <a:ext cx="3217241" cy="320040"/>
           </a:xfrm>
           <a:prstGeom prst="rect">
             <a:avLst/>
@@ -4754,7 +4688,7 @@
               <a:buNone/>
             </a:pPr>
             <a:r>
-              <a:rPr lang="en-US" sz="1600" b="1" dirty="0">
+              <a:rPr lang="en-US" sz="2000" b="1" dirty="0">
                 <a:solidFill>
                   <a:srgbClr val="00F0FF"/>
                 </a:solidFill>
@@ -4764,7 +4698,7 @@
               </a:rPr>
               <a:t>Componenti &amp; Macro</a:t>
             </a:r>
-            <a:endParaRPr lang="en-US" sz="1600" dirty="0"/>
+            <a:endParaRPr lang="en-US" sz="2000" dirty="0"/>
           </a:p>
         </p:txBody>
       </p:sp>
@@ -4793,7 +4727,7 @@
               <a:buNone/>
             </a:pPr>
             <a:r>
-              <a:rPr lang="en-US" sz="1300" dirty="0">
+              <a:rPr lang="en-US" sz="1800" dirty="0">
                 <a:solidFill>
                   <a:srgbClr val="FFFFFF"/>
                 </a:solidFill>
@@ -4803,7 +4737,7 @@
               </a:rPr>
               <a:t>Creazione di blocchi riutilizzabili parametrici con la direttiva component.</a:t>
             </a:r>
-            <a:endParaRPr lang="en-US" sz="1300" dirty="0"/>
+            <a:endParaRPr lang="en-US" sz="1800" dirty="0"/>
           </a:p>
         </p:txBody>
       </p:sp>
@@ -4864,8 +4798,8 @@
         </p:nvSpPr>
         <p:spPr>
           <a:xfrm>
-            <a:off x="4487227" y="3614928"/>
-            <a:ext cx="3217241" cy="274320"/>
+            <a:off x="4487227" y="3669792"/>
+            <a:ext cx="3217241" cy="320040"/>
           </a:xfrm>
           <a:prstGeom prst="rect">
             <a:avLst/>
@@ -4881,7 +4815,7 @@
               <a:buNone/>
             </a:pPr>
             <a:r>
-              <a:rPr lang="en-US" sz="1600" b="1" dirty="0">
+              <a:rPr lang="en-US" sz="2000" b="1" dirty="0">
                 <a:solidFill>
                   <a:srgbClr val="00FF9F"/>
                 </a:solidFill>
@@ -4891,7 +4825,7 @@
               </a:rPr>
               <a:t>Data Binding </a:t>
             </a:r>
-            <a:endParaRPr lang="en-US" sz="1600" dirty="0"/>
+            <a:endParaRPr lang="en-US" sz="2000" dirty="0"/>
           </a:p>
         </p:txBody>
       </p:sp>
@@ -4920,7 +4854,7 @@
               <a:buNone/>
             </a:pPr>
             <a:r>
-              <a:rPr lang="en-US" sz="1300" dirty="0">
+              <a:rPr lang="en-US" sz="1800" dirty="0">
                 <a:solidFill>
                   <a:srgbClr val="FFFFFF"/>
                 </a:solidFill>
@@ -4930,7 +4864,7 @@
               </a:rPr>
               <a:t>Iterazione dinamica su dataset JSON o CSV per reportistica automatica.</a:t>
             </a:r>
-            <a:endParaRPr lang="en-US" sz="1300" dirty="0"/>
+            <a:endParaRPr lang="en-US" sz="1800" dirty="0"/>
           </a:p>
         </p:txBody>
       </p:sp>
@@ -4991,8 +4925,8 @@
         </p:nvSpPr>
         <p:spPr>
           <a:xfrm>
-            <a:off x="8339464" y="3614928"/>
-            <a:ext cx="3217241" cy="274320"/>
+            <a:off x="8339464" y="3669792"/>
+            <a:ext cx="3217241" cy="320040"/>
           </a:xfrm>
           <a:prstGeom prst="rect">
             <a:avLst/>
@@ -5008,7 +4942,7 @@
               <a:buNone/>
             </a:pPr>
             <a:r>
-              <a:rPr lang="en-US" sz="1600" b="1" dirty="0">
+              <a:rPr lang="en-US" sz="2000" b="1" dirty="0">
                 <a:solidFill>
                   <a:srgbClr val="FF0055"/>
                 </a:solidFill>
@@ -5018,7 +4952,7 @@
               </a:rPr>
               <a:t>Formule Matematiche</a:t>
             </a:r>
-            <a:endParaRPr lang="en-US" sz="1600" dirty="0"/>
+            <a:endParaRPr lang="en-US" sz="2000" dirty="0"/>
           </a:p>
         </p:txBody>
       </p:sp>
@@ -5047,7 +4981,7 @@
               <a:buNone/>
             </a:pPr>
             <a:r>
-              <a:rPr lang="en-US" sz="1300" dirty="0">
+              <a:rPr lang="en-US" sz="1800" dirty="0">
                 <a:solidFill>
                   <a:srgbClr val="FFFFFF"/>
                 </a:solidFill>
@@ -5057,7 +4991,7 @@
               </a:rPr>
               <a:t>Rendering di formule scientifiche complesse in sintassi LaTeX / KaTeX.</a:t>
             </a:r>
-            <a:endParaRPr lang="en-US" sz="1300" dirty="0"/>
+            <a:endParaRPr lang="en-US" sz="1800" dirty="0"/>
           </a:p>
         </p:txBody>
       </p:sp>
@@ -5150,14 +5084,14 @@
           <a:ln/>
         </p:spPr>
         <p:txBody>
-          <a:bodyPr wrap="square" lIns="0" tIns="0" rIns="0" bIns="0" rtlCol="0" anchor="t"/>
+          <a:bodyPr wrap="square" lIns="0" tIns="0" rIns="0" bIns="0" rtlCol="0" anchor="ctr"/>
           <a:lstStyle/>
           <a:p>
             <a:pPr algn="l" indent="0" marL="0">
               <a:buNone/>
             </a:pPr>
             <a:r>
-              <a:rPr lang="en-US" sz="3300" b="1" dirty="0">
+              <a:rPr lang="en-US" sz="4600" b="1" dirty="0">
                 <a:solidFill>
                   <a:srgbClr val="FF2E88"/>
                 </a:solidFill>
@@ -5167,7 +5101,7 @@
               </a:rPr>
               <a:t>Compatibilità e Percorso di Migrazione</a:t>
             </a:r>
-            <a:endParaRPr lang="en-US" sz="3300" dirty="0"/>
+            <a:endParaRPr lang="en-US" sz="4600" dirty="0"/>
           </a:p>
         </p:txBody>
       </p:sp>
@@ -5189,14 +5123,14 @@
           <a:ln/>
         </p:spPr>
         <p:txBody>
-          <a:bodyPr wrap="square" lIns="0" tIns="0" rIns="0" bIns="0" rtlCol="0" anchor="t"/>
+          <a:bodyPr wrap="square" lIns="0" tIns="0" rIns="0" bIns="0" rtlCol="0" anchor="ctr"/>
           <a:lstStyle/>
           <a:p>
             <a:pPr algn="l" indent="0" marL="0">
               <a:buNone/>
             </a:pPr>
             <a:r>
-              <a:rPr lang="en-US" sz="2700" b="1" dirty="0">
+              <a:rPr lang="en-US" sz="3800" b="1" dirty="0">
                 <a:solidFill>
                   <a:srgbClr val="FFFFFF"/>
                 </a:solidFill>
@@ -5206,7 +5140,7 @@
               </a:rPr>
               <a:t>Continuità garantita tra ecosistema Markdown e Native DSL</a:t>
             </a:r>
-            <a:endParaRPr lang="en-US" sz="2700" dirty="0"/>
+            <a:endParaRPr lang="en-US" sz="3800" dirty="0"/>
           </a:p>
         </p:txBody>
       </p:sp>
@@ -5267,8 +5201,8 @@
         </p:nvSpPr>
         <p:spPr>
           <a:xfrm>
-            <a:off x="634990" y="1887728"/>
-            <a:ext cx="5143360" cy="274320"/>
+            <a:off x="634990" y="1942592"/>
+            <a:ext cx="5143360" cy="320040"/>
           </a:xfrm>
           <a:prstGeom prst="rect">
             <a:avLst/>
@@ -5284,7 +5218,7 @@
               <a:buNone/>
             </a:pPr>
             <a:r>
-              <a:rPr lang="en-US" sz="1600" b="1" dirty="0">
+              <a:rPr lang="en-US" sz="2000" b="1" dirty="0">
                 <a:solidFill>
                   <a:srgbClr val="FF2E88"/>
                 </a:solidFill>
@@ -5294,7 +5228,7 @@
               </a:rPr>
               <a:t>Markdown Yumia (.yumia.md)</a:t>
             </a:r>
-            <a:endParaRPr lang="en-US" sz="1600" dirty="0"/>
+            <a:endParaRPr lang="en-US" sz="2000" dirty="0"/>
           </a:p>
         </p:txBody>
       </p:sp>
@@ -5464,7 +5398,7 @@
               <a:buNone/>
             </a:pPr>
             <a:r>
-              <a:rPr lang="en-US" sz="1300" dirty="0">
+              <a:rPr lang="en-US" sz="1800" dirty="0">
                 <a:solidFill>
                   <a:srgbClr val="FFFFFF"/>
                 </a:solidFill>
@@ -5474,7 +5408,7 @@
               </a:rPr>
               <a:t>Compatibile con lettori Markdown standard, esteso tramite direttive semantiche.</a:t>
             </a:r>
-            <a:endParaRPr lang="en-US" sz="1300" dirty="0"/>
+            <a:endParaRPr lang="en-US" sz="1800" dirty="0"/>
           </a:p>
         </p:txBody>
       </p:sp>
@@ -5535,8 +5469,8 @@
         </p:nvSpPr>
         <p:spPr>
           <a:xfrm>
-            <a:off x="6413345" y="1887728"/>
-            <a:ext cx="5143360" cy="274320"/>
+            <a:off x="6413345" y="1942592"/>
+            <a:ext cx="5143360" cy="320040"/>
           </a:xfrm>
           <a:prstGeom prst="rect">
             <a:avLst/>
@@ -5552,7 +5486,7 @@
               <a:buNone/>
             </a:pPr>
             <a:r>
-              <a:rPr lang="en-US" sz="1600" b="1" dirty="0">
+              <a:rPr lang="en-US" sz="2000" b="1" dirty="0">
                 <a:solidFill>
                   <a:srgbClr val="00FF9F"/>
                 </a:solidFill>
@@ -5562,7 +5496,7 @@
               </a:rPr>
               <a:t>Native Yumia (.yumia)</a:t>
             </a:r>
-            <a:endParaRPr lang="en-US" sz="1600" dirty="0"/>
+            <a:endParaRPr lang="en-US" sz="2000" dirty="0"/>
           </a:p>
         </p:txBody>
       </p:sp>
@@ -5732,7 +5666,7 @@
               <a:buNone/>
             </a:pPr>
             <a:r>
-              <a:rPr lang="en-US" sz="1300" dirty="0">
+              <a:rPr lang="en-US" sz="1800" dirty="0">
                 <a:solidFill>
                   <a:srgbClr val="FFFFFF"/>
                 </a:solidFill>
@@ -5742,7 +5676,7 @@
               </a:rPr>
               <a:t>Sintassi nativa più concisa, pulita e ottimizzata per i Design Compiler.</a:t>
             </a:r>
-            <a:endParaRPr lang="en-US" sz="1300" dirty="0"/>
+            <a:endParaRPr lang="en-US" sz="1800" dirty="0"/>
           </a:p>
         </p:txBody>
       </p:sp>
@@ -5940,14 +5874,14 @@
           <a:ln/>
         </p:spPr>
         <p:txBody>
-          <a:bodyPr wrap="square" lIns="0" tIns="0" rIns="0" bIns="0" rtlCol="0" anchor="t"/>
+          <a:bodyPr wrap="square" lIns="0" tIns="0" rIns="0" bIns="0" rtlCol="0" anchor="ctr"/>
           <a:lstStyle/>
           <a:p>
             <a:pPr algn="l" indent="0" marL="0">
               <a:buNone/>
             </a:pPr>
             <a:r>
-              <a:rPr lang="en-US" sz="3300" b="1" dirty="0">
+              <a:rPr lang="en-US" sz="4600" b="1" dirty="0">
                 <a:solidFill>
                   <a:srgbClr val="FF2E88"/>
                 </a:solidFill>
@@ -5957,7 +5891,7 @@
               </a:rPr>
               <a:t>Vantaggi, Limiti e Sviluppi Futuri</a:t>
             </a:r>
-            <a:endParaRPr lang="en-US" sz="3300" dirty="0"/>
+            <a:endParaRPr lang="en-US" sz="4600" dirty="0"/>
           </a:p>
         </p:txBody>
       </p:sp>
@@ -5979,14 +5913,14 @@
           <a:ln/>
         </p:spPr>
         <p:txBody>
-          <a:bodyPr wrap="square" lIns="0" tIns="0" rIns="0" bIns="0" rtlCol="0" anchor="t"/>
+          <a:bodyPr wrap="square" lIns="0" tIns="0" rIns="0" bIns="0" rtlCol="0" anchor="ctr"/>
           <a:lstStyle/>
           <a:p>
             <a:pPr algn="l" indent="0" marL="0">
               <a:buNone/>
             </a:pPr>
             <a:r>
-              <a:rPr lang="en-US" sz="2700" b="1" dirty="0">
+              <a:rPr lang="en-US" sz="3800" b="1" dirty="0">
                 <a:solidFill>
                   <a:srgbClr val="FFFFFF"/>
                 </a:solidFill>
@@ -5996,7 +5930,7 @@
               </a:rPr>
               <a:t>Valutazione dello stato attuale e roadmap del progetto</a:t>
             </a:r>
-            <a:endParaRPr lang="en-US" sz="2700" dirty="0"/>
+            <a:endParaRPr lang="en-US" sz="3800" dirty="0"/>
           </a:p>
         </p:txBody>
       </p:sp>
@@ -6057,8 +5991,8 @@
         </p:nvSpPr>
         <p:spPr>
           <a:xfrm>
-            <a:off x="634990" y="1887728"/>
-            <a:ext cx="3217241" cy="274320"/>
+            <a:off x="634990" y="1942592"/>
+            <a:ext cx="3217241" cy="320040"/>
           </a:xfrm>
           <a:prstGeom prst="rect">
             <a:avLst/>
@@ -6074,7 +6008,7 @@
               <a:buNone/>
             </a:pPr>
             <a:r>
-              <a:rPr lang="en-US" sz="1600" b="1" dirty="0">
+              <a:rPr lang="en-US" sz="2000" b="1" dirty="0">
                 <a:solidFill>
                   <a:srgbClr val="00FF9F"/>
                 </a:solidFill>
@@ -6084,7 +6018,7 @@
               </a:rPr>
               <a:t>Vantaggi Attuali</a:t>
             </a:r>
-            <a:endParaRPr lang="en-US" sz="1600" dirty="0"/>
+            <a:endParaRPr lang="en-US" sz="2000" dirty="0"/>
           </a:p>
         </p:txBody>
       </p:sp>
@@ -6113,7 +6047,7 @@
               <a:buNone/>
             </a:pPr>
             <a:r>
-              <a:rPr lang="en-US" sz="1300" dirty="0">
+              <a:rPr lang="en-US" sz="1800" dirty="0">
                 <a:solidFill>
                   <a:srgbClr val="FFFFFF"/>
                 </a:solidFill>
@@ -6123,7 +6057,7 @@
               </a:rPr>
               <a:t>• Sorgente 100% versionabile con Git</a:t>
             </a:r>
-            <a:endParaRPr lang="en-US" sz="1300" dirty="0"/>
+            <a:endParaRPr lang="en-US" sz="1800" dirty="0"/>
           </a:p>
         </p:txBody>
       </p:sp>
@@ -6152,7 +6086,7 @@
               <a:buNone/>
             </a:pPr>
             <a:r>
-              <a:rPr lang="en-US" sz="1300" dirty="0">
+              <a:rPr lang="en-US" sz="1800" dirty="0">
                 <a:solidFill>
                   <a:srgbClr val="FFFFFF"/>
                 </a:solidFill>
@@ -6162,7 +6096,7 @@
               </a:rPr>
               <a:t>• Tre output compilati da un unico file</a:t>
             </a:r>
-            <a:endParaRPr lang="en-US" sz="1300" dirty="0"/>
+            <a:endParaRPr lang="en-US" sz="1800" dirty="0"/>
           </a:p>
         </p:txBody>
       </p:sp>
@@ -6191,7 +6125,7 @@
               <a:buNone/>
             </a:pPr>
             <a:r>
-              <a:rPr lang="en-US" sz="1300" dirty="0">
+              <a:rPr lang="en-US" sz="1800" dirty="0">
                 <a:solidFill>
                   <a:srgbClr val="FFFFFF"/>
                 </a:solidFill>
@@ -6201,7 +6135,7 @@
               </a:rPr>
               <a:t>• Layout e gerarchia visiva garantiti</a:t>
             </a:r>
-            <a:endParaRPr lang="en-US" sz="1300" dirty="0"/>
+            <a:endParaRPr lang="en-US" sz="1800" dirty="0"/>
           </a:p>
         </p:txBody>
       </p:sp>
@@ -6230,7 +6164,7 @@
               <a:buNone/>
             </a:pPr>
             <a:r>
-              <a:rPr lang="en-US" sz="1300" dirty="0">
+              <a:rPr lang="en-US" sz="1800" dirty="0">
                 <a:solidFill>
                   <a:srgbClr val="FFFFFF"/>
                 </a:solidFill>
@@ -6240,7 +6174,7 @@
               </a:rPr>
               <a:t>• Linter automatico per design e WCAG</a:t>
             </a:r>
-            <a:endParaRPr lang="en-US" sz="1300" dirty="0"/>
+            <a:endParaRPr lang="en-US" sz="1800" dirty="0"/>
           </a:p>
         </p:txBody>
       </p:sp>
@@ -6269,7 +6203,7 @@
               <a:buNone/>
             </a:pPr>
             <a:r>
-              <a:rPr lang="en-US" sz="1300" dirty="0">
+              <a:rPr lang="en-US" sz="1800" dirty="0">
                 <a:solidFill>
                   <a:srgbClr val="FFFFFF"/>
                 </a:solidFill>
@@ -6279,7 +6213,7 @@
               </a:rPr>
               <a:t>• Integrazione nativa con workflow AI</a:t>
             </a:r>
-            <a:endParaRPr lang="en-US" sz="1300" dirty="0"/>
+            <a:endParaRPr lang="en-US" sz="1800" dirty="0"/>
           </a:p>
         </p:txBody>
       </p:sp>
@@ -6340,8 +6274,8 @@
         </p:nvSpPr>
         <p:spPr>
           <a:xfrm>
-            <a:off x="4487227" y="1887728"/>
-            <a:ext cx="3217241" cy="274320"/>
+            <a:off x="4487227" y="1942592"/>
+            <a:ext cx="3217241" cy="320040"/>
           </a:xfrm>
           <a:prstGeom prst="rect">
             <a:avLst/>
@@ -6357,7 +6291,7 @@
               <a:buNone/>
             </a:pPr>
             <a:r>
-              <a:rPr lang="en-US" sz="1600" b="1" dirty="0">
+              <a:rPr lang="en-US" sz="2000" b="1" dirty="0">
                 <a:solidFill>
                   <a:srgbClr val="FFE600"/>
                 </a:solidFill>
@@ -6367,7 +6301,7 @@
               </a:rPr>
               <a:t>Aspetti da Consolidare</a:t>
             </a:r>
-            <a:endParaRPr lang="en-US" sz="1600" dirty="0"/>
+            <a:endParaRPr lang="en-US" sz="2000" dirty="0"/>
           </a:p>
         </p:txBody>
       </p:sp>
@@ -6396,7 +6330,7 @@
               <a:buNone/>
             </a:pPr>
             <a:r>
-              <a:rPr lang="en-US" sz="1300" dirty="0">
+              <a:rPr lang="en-US" sz="1800" dirty="0">
                 <a:solidFill>
                   <a:srgbClr val="FFFFFF"/>
                 </a:solidFill>
@@ -6406,7 +6340,7 @@
               </a:rPr>
               <a:t>• Parità totale di rendering su edge case</a:t>
             </a:r>
-            <a:endParaRPr lang="en-US" sz="1300" dirty="0"/>
+            <a:endParaRPr lang="en-US" sz="1800" dirty="0"/>
           </a:p>
         </p:txBody>
       </p:sp>
@@ -6435,7 +6369,7 @@
               <a:buNone/>
             </a:pPr>
             <a:r>
-              <a:rPr lang="en-US" sz="1300" dirty="0">
+              <a:rPr lang="en-US" sz="1800" dirty="0">
                 <a:solidFill>
                   <a:srgbClr val="FFFFFF"/>
                 </a:solidFill>
@@ -6445,7 +6379,7 @@
               </a:rPr>
               <a:t>• Estensione della copertura dei test</a:t>
             </a:r>
-            <a:endParaRPr lang="en-US" sz="1300" dirty="0"/>
+            <a:endParaRPr lang="en-US" sz="1800" dirty="0"/>
           </a:p>
         </p:txBody>
       </p:sp>
@@ -6474,7 +6408,7 @@
               <a:buNone/>
             </a:pPr>
             <a:r>
-              <a:rPr lang="en-US" sz="1300" dirty="0">
+              <a:rPr lang="en-US" sz="1800" dirty="0">
                 <a:solidFill>
                   <a:srgbClr val="FFFFFF"/>
                 </a:solidFill>
@@ -6484,7 +6418,7 @@
               </a:rPr>
               <a:t>• Supporto a font e asset esterni complessi</a:t>
             </a:r>
-            <a:endParaRPr lang="en-US" sz="1300" dirty="0"/>
+            <a:endParaRPr lang="en-US" sz="1800" dirty="0"/>
           </a:p>
         </p:txBody>
       </p:sp>
@@ -6513,7 +6447,7 @@
               <a:buNone/>
             </a:pPr>
             <a:r>
-              <a:rPr lang="en-US" sz="1300" dirty="0">
+              <a:rPr lang="en-US" sz="1800" dirty="0">
                 <a:solidFill>
                   <a:srgbClr val="FFFFFF"/>
                 </a:solidFill>
@@ -6523,7 +6457,7 @@
               </a:rPr>
               <a:t>• Documentazione di scenari avanzati</a:t>
             </a:r>
-            <a:endParaRPr lang="en-US" sz="1300" dirty="0"/>
+            <a:endParaRPr lang="en-US" sz="1800" dirty="0"/>
           </a:p>
         </p:txBody>
       </p:sp>
@@ -6584,8 +6518,8 @@
         </p:nvSpPr>
         <p:spPr>
           <a:xfrm>
-            <a:off x="8339464" y="1887728"/>
-            <a:ext cx="3217241" cy="274320"/>
+            <a:off x="8339464" y="1942592"/>
+            <a:ext cx="3217241" cy="320040"/>
           </a:xfrm>
           <a:prstGeom prst="rect">
             <a:avLst/>
@@ -6601,7 +6535,7 @@
               <a:buNone/>
             </a:pPr>
             <a:r>
-              <a:rPr lang="en-US" sz="1600" b="1" dirty="0">
+              <a:rPr lang="en-US" sz="2000" b="1" dirty="0">
                 <a:solidFill>
                   <a:srgbClr val="FF2E88"/>
                 </a:solidFill>
@@ -6611,7 +6545,7 @@
               </a:rPr>
               <a:t>Sviluppi Futuri</a:t>
             </a:r>
-            <a:endParaRPr lang="en-US" sz="1600" dirty="0"/>
+            <a:endParaRPr lang="en-US" sz="2000" dirty="0"/>
           </a:p>
         </p:txBody>
       </p:sp>
@@ -6640,7 +6574,7 @@
               <a:buNone/>
             </a:pPr>
             <a:r>
-              <a:rPr lang="en-US" sz="1300" dirty="0">
+              <a:rPr lang="en-US" sz="1800" dirty="0">
                 <a:solidFill>
                   <a:srgbClr val="FFFFFF"/>
                 </a:solidFill>
@@ -6650,7 +6584,7 @@
               </a:rPr>
               <a:t>• Editor visuale WYSIWYG bidirezionale</a:t>
             </a:r>
-            <a:endParaRPr lang="en-US" sz="1300" dirty="0"/>
+            <a:endParaRPr lang="en-US" sz="1800" dirty="0"/>
           </a:p>
         </p:txBody>
       </p:sp>
@@ -6679,7 +6613,7 @@
               <a:buNone/>
             </a:pPr>
             <a:r>
-              <a:rPr lang="en-US" sz="1300" dirty="0">
+              <a:rPr lang="en-US" sz="1800" dirty="0">
                 <a:solidFill>
                   <a:srgbClr val="FFFFFF"/>
                 </a:solidFill>
@@ -6689,7 +6623,7 @@
               </a:rPr>
               <a:t>• Collaborazione in tempo reale su browser</a:t>
             </a:r>
-            <a:endParaRPr lang="en-US" sz="1300" dirty="0"/>
+            <a:endParaRPr lang="en-US" sz="1800" dirty="0"/>
           </a:p>
         </p:txBody>
       </p:sp>
@@ -6718,7 +6652,7 @@
               <a:buNone/>
             </a:pPr>
             <a:r>
-              <a:rPr lang="en-US" sz="1300" dirty="0">
+              <a:rPr lang="en-US" sz="1800" dirty="0">
                 <a:solidFill>
                   <a:srgbClr val="FFFFFF"/>
                 </a:solidFill>
@@ -6728,7 +6662,7 @@
               </a:rPr>
               <a:t>• Integrazione con modelli LLM in locale</a:t>
             </a:r>
-            <a:endParaRPr lang="en-US" sz="1300" dirty="0"/>
+            <a:endParaRPr lang="en-US" sz="1800" dirty="0"/>
           </a:p>
         </p:txBody>
       </p:sp>
@@ -6757,7 +6691,7 @@
               <a:buNone/>
             </a:pPr>
             <a:r>
-              <a:rPr lang="en-US" sz="1300" dirty="0">
+              <a:rPr lang="en-US" sz="1800" dirty="0">
                 <a:solidFill>
                   <a:srgbClr val="FFFFFF"/>
                 </a:solidFill>
@@ -6767,7 +6701,7 @@
               </a:rPr>
               <a:t>• Plugin per VS Code ed estensioni IDE</a:t>
             </a:r>
-            <a:endParaRPr lang="en-US" sz="1300" dirty="0"/>
+            <a:endParaRPr lang="en-US" sz="1800" dirty="0"/>
           </a:p>
         </p:txBody>
       </p:sp>
@@ -6844,18 +6778,96 @@
       </p:grpSpPr>
       <p:sp>
         <p:nvSpPr>
-          <p:cNvPr id="2" name="Shape 0"/>
-          <p:cNvSpPr/>
-          <p:nvPr/>
-        </p:nvSpPr>
-        <p:spPr>
-          <a:xfrm>
-            <a:off x="5117440" y="680720"/>
-            <a:ext cx="1956816" cy="292608"/>
+          <p:cNvPr id="2" name="Text 0"/>
+          <p:cNvSpPr/>
+          <p:nvPr/>
+        </p:nvSpPr>
+        <p:spPr>
+          <a:xfrm>
+            <a:off x="406390" y="406400"/>
+            <a:ext cx="11378916" cy="1060704"/>
+          </a:xfrm>
+          <a:prstGeom prst="rect">
+            <a:avLst/>
+          </a:prstGeom>
+          <a:noFill/>
+          <a:ln/>
+        </p:spPr>
+        <p:txBody>
+          <a:bodyPr wrap="square" rtlCol="0" anchor="ctr"/>
+          <a:lstStyle/>
+          <a:p>
+            <a:pPr algn="ctr" indent="0" marL="0">
+              <a:buNone/>
+            </a:pPr>
+            <a:r>
+              <a:rPr lang="en-US" sz="2900" b="1" dirty="0">
+                <a:solidFill>
+                  <a:srgbClr val="FFFFFF"/>
+                </a:solidFill>
+                <a:latin typeface="Trebuchet MS" pitchFamily="34" charset="0"/>
+                <a:ea typeface="Trebuchet MS" pitchFamily="34" charset="-122"/>
+                <a:cs typeface="Trebuchet MS" pitchFamily="34" charset="-120"/>
+              </a:rPr>
+              <a:t>Descrivere ciò che si vuole comunicare,</a:t>
+            </a:r>
+            <a:endParaRPr lang="en-US" sz="2900" dirty="0"/>
+          </a:p>
+        </p:txBody>
+      </p:sp>
+      <p:sp>
+        <p:nvSpPr>
+          <p:cNvPr id="3" name="Text 1"/>
+          <p:cNvSpPr/>
+          <p:nvPr/>
+        </p:nvSpPr>
+        <p:spPr>
+          <a:xfrm>
+            <a:off x="406390" y="1540256"/>
+            <a:ext cx="11378916" cy="365760"/>
+          </a:xfrm>
+          <a:prstGeom prst="rect">
+            <a:avLst/>
+          </a:prstGeom>
+          <a:noFill/>
+          <a:ln/>
+        </p:spPr>
+        <p:txBody>
+          <a:bodyPr wrap="square" rtlCol="0" anchor="ctr"/>
+          <a:lstStyle/>
+          <a:p>
+            <a:pPr algn="ctr" indent="0" marL="0">
+              <a:buNone/>
+            </a:pPr>
+            <a:r>
+              <a:rPr lang="en-US" sz="1600" dirty="0">
+                <a:solidFill>
+                  <a:srgbClr val="A7A7B5"/>
+                </a:solidFill>
+                <a:latin typeface="Segoe UI" pitchFamily="34" charset="0"/>
+                <a:ea typeface="Segoe UI" pitchFamily="34" charset="-122"/>
+                <a:cs typeface="Segoe UI" pitchFamily="34" charset="-120"/>
+              </a:rPr>
+              <a:t>lasciare al compilatore il compito di comporlo.</a:t>
+            </a:r>
+            <a:endParaRPr lang="en-US" sz="1600" dirty="0"/>
+          </a:p>
+        </p:txBody>
+      </p:sp>
+      <p:sp>
+        <p:nvSpPr>
+          <p:cNvPr id="4" name="Shape 2"/>
+          <p:cNvSpPr/>
+          <p:nvPr/>
+        </p:nvSpPr>
+        <p:spPr>
+          <a:xfrm>
+            <a:off x="406390" y="1600200"/>
+            <a:ext cx="3674441" cy="1320800"/>
           </a:xfrm>
           <a:prstGeom prst="roundRect">
             <a:avLst>
-              <a:gd name="adj" fmla="val 50000"/>
+              <a:gd name="adj" fmla="val 5538"/>
             </a:avLst>
           </a:prstGeom>
           <a:solidFill>
@@ -6871,151 +6883,7 @@
       </p:sp>
       <p:sp>
         <p:nvSpPr>
-          <p:cNvPr id="3" name="Text 1"/>
-          <p:cNvSpPr/>
-          <p:nvPr/>
-        </p:nvSpPr>
-        <p:spPr>
-          <a:xfrm>
-            <a:off x="5117440" y="680720"/>
-            <a:ext cx="1956816" cy="292608"/>
-          </a:xfrm>
-          <a:prstGeom prst="rect">
-            <a:avLst/>
-          </a:prstGeom>
-          <a:noFill/>
-          <a:ln/>
-        </p:spPr>
-        <p:txBody>
-          <a:bodyPr wrap="square" rtlCol="0" anchor="ctr"/>
-          <a:lstStyle/>
-          <a:p>
-            <a:pPr algn="ctr" indent="0" marL="0">
-              <a:buNone/>
-            </a:pPr>
-            <a:r>
-              <a:rPr lang="en-US" sz="1000" b="1" dirty="0">
-                <a:solidFill>
-                  <a:srgbClr val="FF2E88"/>
-                </a:solidFill>
-                <a:latin typeface="Trebuchet MS" pitchFamily="34" charset="0"/>
-                <a:ea typeface="Trebuchet MS" pitchFamily="34" charset="-122"/>
-                <a:cs typeface="Trebuchet MS" pitchFamily="34" charset="-120"/>
-              </a:rPr>
-              <a:t>DESIGN AS CODE</a:t>
-            </a:r>
-            <a:endParaRPr lang="en-US" sz="1000" dirty="0"/>
-          </a:p>
-        </p:txBody>
-      </p:sp>
-      <p:sp>
-        <p:nvSpPr>
-          <p:cNvPr id="4" name="Text 2"/>
-          <p:cNvSpPr/>
-          <p:nvPr/>
-        </p:nvSpPr>
-        <p:spPr>
-          <a:xfrm>
-            <a:off x="406390" y="1119632"/>
-            <a:ext cx="11378916" cy="1097280"/>
-          </a:xfrm>
-          <a:prstGeom prst="rect">
-            <a:avLst/>
-          </a:prstGeom>
-          <a:noFill/>
-          <a:ln/>
-        </p:spPr>
-        <p:txBody>
-          <a:bodyPr wrap="square" rtlCol="0" anchor="ctr"/>
-          <a:lstStyle/>
-          <a:p>
-            <a:pPr algn="ctr" indent="0" marL="0">
-              <a:buNone/>
-            </a:pPr>
-            <a:r>
-              <a:rPr lang="en-US" sz="3600" b="1" dirty="0">
-                <a:solidFill>
-                  <a:srgbClr val="FFFFFF"/>
-                </a:solidFill>
-                <a:latin typeface="Trebuchet MS" pitchFamily="34" charset="0"/>
-                <a:ea typeface="Trebuchet MS" pitchFamily="34" charset="-122"/>
-                <a:cs typeface="Trebuchet MS" pitchFamily="34" charset="-120"/>
-              </a:rPr>
-              <a:t>Descrivere ciò che si vuole comunicare,</a:t>
-            </a:r>
-            <a:endParaRPr lang="en-US" sz="3600" dirty="0"/>
-          </a:p>
-        </p:txBody>
-      </p:sp>
-      <p:sp>
-        <p:nvSpPr>
-          <p:cNvPr id="5" name="Text 3"/>
-          <p:cNvSpPr/>
-          <p:nvPr/>
-        </p:nvSpPr>
-        <p:spPr>
-          <a:xfrm>
-            <a:off x="406390" y="2290064"/>
-            <a:ext cx="11378916" cy="347472"/>
-          </a:xfrm>
-          <a:prstGeom prst="rect">
-            <a:avLst/>
-          </a:prstGeom>
-          <a:noFill/>
-          <a:ln/>
-        </p:spPr>
-        <p:txBody>
-          <a:bodyPr wrap="square" rtlCol="0" anchor="ctr"/>
-          <a:lstStyle/>
-          <a:p>
-            <a:pPr algn="ctr" indent="0" marL="0">
-              <a:buNone/>
-            </a:pPr>
-            <a:r>
-              <a:rPr lang="en-US" sz="1400" dirty="0">
-                <a:solidFill>
-                  <a:srgbClr val="A7A7B5"/>
-                </a:solidFill>
-                <a:latin typeface="Segoe UI" pitchFamily="34" charset="0"/>
-                <a:ea typeface="Segoe UI" pitchFamily="34" charset="-122"/>
-                <a:cs typeface="Segoe UI" pitchFamily="34" charset="-120"/>
-              </a:rPr>
-              <a:t>lasciare al compilatore il compito di comporlo.</a:t>
-            </a:r>
-            <a:endParaRPr lang="en-US" sz="1400" dirty="0"/>
-          </a:p>
-        </p:txBody>
-      </p:sp>
-      <p:sp>
-        <p:nvSpPr>
-          <p:cNvPr id="6" name="Shape 4"/>
-          <p:cNvSpPr/>
-          <p:nvPr/>
-        </p:nvSpPr>
-        <p:spPr>
-          <a:xfrm>
-            <a:off x="406390" y="1600200"/>
-            <a:ext cx="3674441" cy="1320800"/>
-          </a:xfrm>
-          <a:prstGeom prst="roundRect">
-            <a:avLst>
-              <a:gd name="adj" fmla="val 5538"/>
-            </a:avLst>
-          </a:prstGeom>
-          <a:solidFill>
-            <a:srgbClr val="151522"/>
-          </a:solidFill>
-          <a:ln w="19050">
-            <a:solidFill>
-              <a:srgbClr val="FF2E88"/>
-            </a:solidFill>
-            <a:prstDash val="solid"/>
-          </a:ln>
-        </p:spPr>
-      </p:sp>
-      <p:sp>
-        <p:nvSpPr>
-          <p:cNvPr id="7" name="Shape 5"/>
+          <p:cNvPr id="5" name="Shape 3"/>
           <p:cNvSpPr/>
           <p:nvPr/>
         </p:nvSpPr>
@@ -7037,14 +6905,14 @@
       </p:sp>
       <p:sp>
         <p:nvSpPr>
-          <p:cNvPr id="8" name="Text 6"/>
-          <p:cNvSpPr/>
-          <p:nvPr/>
-        </p:nvSpPr>
-        <p:spPr>
-          <a:xfrm>
-            <a:off x="634990" y="1709928"/>
-            <a:ext cx="3217241" cy="274320"/>
+          <p:cNvPr id="6" name="Text 4"/>
+          <p:cNvSpPr/>
+          <p:nvPr/>
+        </p:nvSpPr>
+        <p:spPr>
+          <a:xfrm>
+            <a:off x="634990" y="1764792"/>
+            <a:ext cx="3217241" cy="320040"/>
           </a:xfrm>
           <a:prstGeom prst="rect">
             <a:avLst/>
@@ -7060,7 +6928,7 @@
               <a:buNone/>
             </a:pPr>
             <a:r>
-              <a:rPr lang="en-US" sz="1600" b="1" dirty="0">
+              <a:rPr lang="en-US" sz="2000" b="1" dirty="0">
                 <a:solidFill>
                   <a:srgbClr val="FF2E88"/>
                 </a:solidFill>
@@ -7070,13 +6938,13 @@
               </a:rPr>
               <a:t>1. Separazione</a:t>
             </a:r>
-            <a:endParaRPr lang="en-US" sz="1600" dirty="0"/>
-          </a:p>
-        </p:txBody>
-      </p:sp>
-      <p:sp>
-        <p:nvSpPr>
-          <p:cNvPr id="9" name="Text 7"/>
+            <a:endParaRPr lang="en-US" sz="2000" dirty="0"/>
+          </a:p>
+        </p:txBody>
+      </p:sp>
+      <p:sp>
+        <p:nvSpPr>
+          <p:cNvPr id="7" name="Text 5"/>
           <p:cNvSpPr/>
           <p:nvPr/>
         </p:nvSpPr>
@@ -7099,7 +6967,7 @@
               <a:buNone/>
             </a:pPr>
             <a:r>
-              <a:rPr lang="en-US" sz="1300" dirty="0">
+              <a:rPr lang="en-US" sz="1800" dirty="0">
                 <a:solidFill>
                   <a:srgbClr val="FFFFFF"/>
                 </a:solidFill>
@@ -7109,13 +6977,13 @@
               </a:rPr>
               <a:t>Il contenuto è completamente disaccoppiato dalle coordinate grafiche.</a:t>
             </a:r>
-            <a:endParaRPr lang="en-US" sz="1300" dirty="0"/>
-          </a:p>
-        </p:txBody>
-      </p:sp>
-      <p:sp>
-        <p:nvSpPr>
-          <p:cNvPr id="10" name="Shape 8"/>
+            <a:endParaRPr lang="en-US" sz="1800" dirty="0"/>
+          </a:p>
+        </p:txBody>
+      </p:sp>
+      <p:sp>
+        <p:nvSpPr>
+          <p:cNvPr id="8" name="Shape 6"/>
           <p:cNvSpPr/>
           <p:nvPr/>
         </p:nvSpPr>
@@ -7142,7 +7010,7 @@
       </p:sp>
       <p:sp>
         <p:nvSpPr>
-          <p:cNvPr id="11" name="Shape 9"/>
+          <p:cNvPr id="9" name="Shape 7"/>
           <p:cNvSpPr/>
           <p:nvPr/>
         </p:nvSpPr>
@@ -7164,14 +7032,14 @@
       </p:sp>
       <p:sp>
         <p:nvSpPr>
-          <p:cNvPr id="12" name="Text 10"/>
-          <p:cNvSpPr/>
-          <p:nvPr/>
-        </p:nvSpPr>
-        <p:spPr>
-          <a:xfrm>
-            <a:off x="4487227" y="1709928"/>
-            <a:ext cx="3217241" cy="274320"/>
+          <p:cNvPr id="10" name="Text 8"/>
+          <p:cNvSpPr/>
+          <p:nvPr/>
+        </p:nvSpPr>
+        <p:spPr>
+          <a:xfrm>
+            <a:off x="4487227" y="1764792"/>
+            <a:ext cx="3217241" cy="320040"/>
           </a:xfrm>
           <a:prstGeom prst="rect">
             <a:avLst/>
@@ -7187,7 +7055,7 @@
               <a:buNone/>
             </a:pPr>
             <a:r>
-              <a:rPr lang="en-US" sz="1600" b="1" dirty="0">
+              <a:rPr lang="en-US" sz="2000" b="1" dirty="0">
                 <a:solidFill>
                   <a:srgbClr val="7B61FF"/>
                 </a:solidFill>
@@ -7197,13 +7065,13 @@
               </a:rPr>
               <a:t>2. Flessibilità</a:t>
             </a:r>
-            <a:endParaRPr lang="en-US" sz="1600" dirty="0"/>
-          </a:p>
-        </p:txBody>
-      </p:sp>
-      <p:sp>
-        <p:nvSpPr>
-          <p:cNvPr id="13" name="Text 11"/>
+            <a:endParaRPr lang="en-US" sz="2000" dirty="0"/>
+          </a:p>
+        </p:txBody>
+      </p:sp>
+      <p:sp>
+        <p:nvSpPr>
+          <p:cNvPr id="11" name="Text 9"/>
           <p:cNvSpPr/>
           <p:nvPr/>
         </p:nvSpPr>
@@ -7226,7 +7094,7 @@
               <a:buNone/>
             </a:pPr>
             <a:r>
-              <a:rPr lang="en-US" sz="1300" dirty="0">
+              <a:rPr lang="en-US" sz="1800" dirty="0">
                 <a:solidFill>
                   <a:srgbClr val="FFFFFF"/>
                 </a:solidFill>
@@ -7236,13 +7104,13 @@
               </a:rPr>
               <a:t>Un singolo sorgente produce Web interattivo, PowerPoint nativo e PDF.</a:t>
             </a:r>
-            <a:endParaRPr lang="en-US" sz="1300" dirty="0"/>
-          </a:p>
-        </p:txBody>
-      </p:sp>
-      <p:sp>
-        <p:nvSpPr>
-          <p:cNvPr id="14" name="Shape 12"/>
+            <a:endParaRPr lang="en-US" sz="1800" dirty="0"/>
+          </a:p>
+        </p:txBody>
+      </p:sp>
+      <p:sp>
+        <p:nvSpPr>
+          <p:cNvPr id="12" name="Shape 10"/>
           <p:cNvSpPr/>
           <p:nvPr/>
         </p:nvSpPr>
@@ -7269,7 +7137,7 @@
       </p:sp>
       <p:sp>
         <p:nvSpPr>
-          <p:cNvPr id="15" name="Shape 13"/>
+          <p:cNvPr id="13" name="Shape 11"/>
           <p:cNvSpPr/>
           <p:nvPr/>
         </p:nvSpPr>
@@ -7291,14 +7159,14 @@
       </p:sp>
       <p:sp>
         <p:nvSpPr>
-          <p:cNvPr id="16" name="Text 14"/>
-          <p:cNvSpPr/>
-          <p:nvPr/>
-        </p:nvSpPr>
-        <p:spPr>
-          <a:xfrm>
-            <a:off x="8339464" y="1709928"/>
-            <a:ext cx="3217241" cy="274320"/>
+          <p:cNvPr id="14" name="Text 12"/>
+          <p:cNvSpPr/>
+          <p:nvPr/>
+        </p:nvSpPr>
+        <p:spPr>
+          <a:xfrm>
+            <a:off x="8339464" y="1764792"/>
+            <a:ext cx="3217241" cy="320040"/>
           </a:xfrm>
           <a:prstGeom prst="rect">
             <a:avLst/>
@@ -7314,7 +7182,7 @@
               <a:buNone/>
             </a:pPr>
             <a:r>
-              <a:rPr lang="en-US" sz="1600" b="1" dirty="0">
+              <a:rPr lang="en-US" sz="2000" b="1" dirty="0">
                 <a:solidFill>
                   <a:srgbClr val="00FF9F"/>
                 </a:solidFill>
@@ -7324,13 +7192,13 @@
               </a:rPr>
               <a:t>3. Futuro</a:t>
             </a:r>
-            <a:endParaRPr lang="en-US" sz="1600" dirty="0"/>
-          </a:p>
-        </p:txBody>
-      </p:sp>
-      <p:sp>
-        <p:nvSpPr>
-          <p:cNvPr id="17" name="Text 15"/>
+            <a:endParaRPr lang="en-US" sz="2000" dirty="0"/>
+          </a:p>
+        </p:txBody>
+      </p:sp>
+      <p:sp>
+        <p:nvSpPr>
+          <p:cNvPr id="15" name="Text 13"/>
           <p:cNvSpPr/>
           <p:nvPr/>
         </p:nvSpPr>
@@ -7353,7 +7221,7 @@
               <a:buNone/>
             </a:pPr>
             <a:r>
-              <a:rPr lang="en-US" sz="1300" dirty="0">
+              <a:rPr lang="en-US" sz="1800" dirty="0">
                 <a:solidFill>
                   <a:srgbClr val="FFFFFF"/>
                 </a:solidFill>
@@ -7363,13 +7231,13 @@
               </a:rPr>
               <a:t>Un ponte naturale tra sviluppatori, designer e intelligenza artificiale.</a:t>
             </a:r>
-            <a:endParaRPr lang="en-US" sz="1300" dirty="0"/>
-          </a:p>
-        </p:txBody>
-      </p:sp>
-      <p:sp>
-        <p:nvSpPr>
-          <p:cNvPr id="18" name="Shape 16"/>
+            <a:endParaRPr lang="en-US" sz="1800" dirty="0"/>
+          </a:p>
+        </p:txBody>
+      </p:sp>
+      <p:sp>
+        <p:nvSpPr>
+          <p:cNvPr id="16" name="Shape 14"/>
           <p:cNvSpPr/>
           <p:nvPr/>
         </p:nvSpPr>
@@ -7396,7 +7264,7 @@
       </p:sp>
       <p:sp>
         <p:nvSpPr>
-          <p:cNvPr id="19" name="Text 17"/>
+          <p:cNvPr id="17" name="Text 15"/>
           <p:cNvSpPr/>
           <p:nvPr/>
         </p:nvSpPr>
@@ -7435,7 +7303,7 @@
       </p:sp>
       <p:sp>
         <p:nvSpPr>
-          <p:cNvPr id="20" name="Text 18"/>
+          <p:cNvPr id="18" name="Text 16"/>
           <p:cNvSpPr/>
           <p:nvPr/>
         </p:nvSpPr>
@@ -7474,7 +7342,7 @@
       </p:sp>
       <p:sp>
         <p:nvSpPr>
-          <p:cNvPr id="21" name="Text 19"/>
+          <p:cNvPr id="19" name="Text 17"/>
           <p:cNvSpPr/>
           <p:nvPr/>
         </p:nvSpPr>
@@ -7561,14 +7429,14 @@
           <a:ln/>
         </p:spPr>
         <p:txBody>
-          <a:bodyPr wrap="square" lIns="0" tIns="0" rIns="0" bIns="0" rtlCol="0" anchor="t"/>
+          <a:bodyPr wrap="square" lIns="0" tIns="0" rIns="0" bIns="0" rtlCol="0" anchor="ctr"/>
           <a:lstStyle/>
           <a:p>
             <a:pPr algn="l" indent="0" marL="0">
               <a:buNone/>
             </a:pPr>
             <a:r>
-              <a:rPr lang="en-US" sz="3300" b="1" dirty="0">
+              <a:rPr lang="en-US" sz="4600" b="1" dirty="0">
                 <a:solidFill>
                   <a:srgbClr val="FF2E88"/>
                 </a:solidFill>
@@ -7578,7 +7446,7 @@
               </a:rPr>
               <a:t>Il problema delle presentazioni tecniche</a:t>
             </a:r>
-            <a:endParaRPr lang="en-US" sz="3300" dirty="0"/>
+            <a:endParaRPr lang="en-US" sz="4600" dirty="0"/>
           </a:p>
         </p:txBody>
       </p:sp>
@@ -7600,14 +7468,14 @@
           <a:ln/>
         </p:spPr>
         <p:txBody>
-          <a:bodyPr wrap="square" lIns="0" tIns="0" rIns="0" bIns="0" rtlCol="0" anchor="t"/>
+          <a:bodyPr wrap="square" lIns="0" tIns="0" rIns="0" bIns="0" rtlCol="0" anchor="ctr"/>
           <a:lstStyle/>
           <a:p>
             <a:pPr algn="l" indent="0" marL="0">
               <a:buNone/>
             </a:pPr>
             <a:r>
-              <a:rPr lang="en-US" sz="2700" b="1" dirty="0">
+              <a:rPr lang="en-US" sz="3800" b="1" dirty="0">
                 <a:solidFill>
                   <a:srgbClr val="FFFFFF"/>
                 </a:solidFill>
@@ -7617,7 +7485,7 @@
               </a:rPr>
               <a:t>Perché creare slide tecniche è complesso e inefficiente</a:t>
             </a:r>
-            <a:endParaRPr lang="en-US" sz="2700" dirty="0"/>
+            <a:endParaRPr lang="en-US" sz="3800" dirty="0"/>
           </a:p>
         </p:txBody>
       </p:sp>
@@ -7905,7 +7773,7 @@
               <a:buNone/>
             </a:pPr>
             <a:r>
-              <a:rPr lang="en-US" sz="1300" dirty="0">
+              <a:rPr lang="en-US" sz="1800" dirty="0">
                 <a:solidFill>
                   <a:srgbClr val="FFFFFF"/>
                 </a:solidFill>
@@ -7915,7 +7783,7 @@
               </a:rPr>
               <a:t>• Disposizione manuale di box di testo e forme</a:t>
             </a:r>
-            <a:endParaRPr lang="en-US" sz="1300" dirty="0"/>
+            <a:endParaRPr lang="en-US" sz="1800" dirty="0"/>
           </a:p>
         </p:txBody>
       </p:sp>
@@ -7944,7 +7812,7 @@
               <a:buNone/>
             </a:pPr>
             <a:r>
-              <a:rPr lang="en-US" sz="1300" dirty="0">
+              <a:rPr lang="en-US" sz="1800" dirty="0">
                 <a:solidFill>
                   <a:srgbClr val="FFFFFF"/>
                 </a:solidFill>
@@ -7954,7 +7822,7 @@
               </a:rPr>
               <a:t>• Formattazione incoerente che degrada nel tempo</a:t>
             </a:r>
-            <a:endParaRPr lang="en-US" sz="1300" dirty="0"/>
+            <a:endParaRPr lang="en-US" sz="1800" dirty="0"/>
           </a:p>
         </p:txBody>
       </p:sp>
@@ -7983,7 +7851,7 @@
               <a:buNone/>
             </a:pPr>
             <a:r>
-              <a:rPr lang="en-US" sz="1300" dirty="0">
+              <a:rPr lang="en-US" sz="1800" dirty="0">
                 <a:solidFill>
                   <a:srgbClr val="FFFFFF"/>
                 </a:solidFill>
@@ -7993,7 +7861,7 @@
               </a:rPr>
               <a:t>• File binari opachi non versionabili con Git</a:t>
             </a:r>
-            <a:endParaRPr lang="en-US" sz="1300" dirty="0"/>
+            <a:endParaRPr lang="en-US" sz="1800" dirty="0"/>
           </a:p>
         </p:txBody>
       </p:sp>
@@ -8022,7 +7890,7 @@
               <a:buNone/>
             </a:pPr>
             <a:r>
-              <a:rPr lang="en-US" sz="1300" dirty="0">
+              <a:rPr lang="en-US" sz="1800" dirty="0">
                 <a:solidFill>
                   <a:srgbClr val="FFFFFF"/>
                 </a:solidFill>
@@ -8032,7 +7900,7 @@
               </a:rPr>
               <a:t>• Rischio costante di disallineamenti tra formati</a:t>
             </a:r>
-            <a:endParaRPr lang="en-US" sz="1300" dirty="0"/>
+            <a:endParaRPr lang="en-US" sz="1800" dirty="0"/>
           </a:p>
         </p:txBody>
       </p:sp>
@@ -8127,7 +7995,7 @@
               <a:buNone/>
             </a:pPr>
             <a:r>
-              <a:rPr lang="en-US" sz="1300" dirty="0">
+              <a:rPr lang="en-US" sz="1800" dirty="0">
                 <a:solidFill>
                   <a:srgbClr val="FFFFFF"/>
                 </a:solidFill>
@@ -8137,7 +8005,7 @@
               </a:rPr>
               <a:t>• Zero riutilizzabilità tra documentazione e slide</a:t>
             </a:r>
-            <a:endParaRPr lang="en-US" sz="1300" dirty="0"/>
+            <a:endParaRPr lang="en-US" sz="1800" dirty="0"/>
           </a:p>
         </p:txBody>
       </p:sp>
@@ -8166,7 +8034,7 @@
               <a:buNone/>
             </a:pPr>
             <a:r>
-              <a:rPr lang="en-US" sz="1300" dirty="0">
+              <a:rPr lang="en-US" sz="1800" dirty="0">
                 <a:solidFill>
                   <a:srgbClr val="FFFFFF"/>
                 </a:solidFill>
@@ -8176,7 +8044,7 @@
               </a:rPr>
               <a:t>• Frammentazione tra Markdown, HTML e PPTX</a:t>
             </a:r>
-            <a:endParaRPr lang="en-US" sz="1300" dirty="0"/>
+            <a:endParaRPr lang="en-US" sz="1800" dirty="0"/>
           </a:p>
         </p:txBody>
       </p:sp>
@@ -8205,7 +8073,7 @@
               <a:buNone/>
             </a:pPr>
             <a:r>
-              <a:rPr lang="en-US" sz="1300" dirty="0">
+              <a:rPr lang="en-US" sz="1800" dirty="0">
                 <a:solidFill>
                   <a:srgbClr val="FFFFFF"/>
                 </a:solidFill>
@@ -8215,7 +8083,7 @@
               </a:rPr>
               <a:t>• Gli LLM faticano a generare layout geometrici stabili</a:t>
             </a:r>
-            <a:endParaRPr lang="en-US" sz="1300" dirty="0"/>
+            <a:endParaRPr lang="en-US" sz="1800" dirty="0"/>
           </a:p>
         </p:txBody>
       </p:sp>
@@ -8244,7 +8112,7 @@
               <a:buNone/>
             </a:pPr>
             <a:r>
-              <a:rPr lang="en-US" sz="1300" dirty="0">
+              <a:rPr lang="en-US" sz="1800" dirty="0">
                 <a:solidFill>
                   <a:srgbClr val="FFFFFF"/>
                 </a:solidFill>
@@ -8254,7 +8122,7 @@
               </a:rPr>
               <a:t>• Nessun test automatico di qualità visiva</a:t>
             </a:r>
-            <a:endParaRPr lang="en-US" sz="1300" dirty="0"/>
+            <a:endParaRPr lang="en-US" sz="1800" dirty="0"/>
           </a:p>
         </p:txBody>
       </p:sp>
@@ -8347,14 +8215,14 @@
           <a:ln/>
         </p:spPr>
         <p:txBody>
-          <a:bodyPr wrap="square" lIns="0" tIns="0" rIns="0" bIns="0" rtlCol="0" anchor="t"/>
+          <a:bodyPr wrap="square" lIns="0" tIns="0" rIns="0" bIns="0" rtlCol="0" anchor="ctr"/>
           <a:lstStyle/>
           <a:p>
             <a:pPr algn="l" indent="0" marL="0">
               <a:buNone/>
             </a:pPr>
             <a:r>
-              <a:rPr lang="en-US" sz="3300" b="1" dirty="0">
+              <a:rPr lang="en-US" sz="4600" b="1" dirty="0">
                 <a:solidFill>
                   <a:srgbClr val="FF2E88"/>
                 </a:solidFill>
@@ -8364,7 +8232,7 @@
               </a:rPr>
               <a:t>La soluzione: Il Design Compiler</a:t>
             </a:r>
-            <a:endParaRPr lang="en-US" sz="3300" dirty="0"/>
+            <a:endParaRPr lang="en-US" sz="4600" dirty="0"/>
           </a:p>
         </p:txBody>
       </p:sp>
@@ -8386,14 +8254,14 @@
           <a:ln/>
         </p:spPr>
         <p:txBody>
-          <a:bodyPr wrap="square" lIns="0" tIns="0" rIns="0" bIns="0" rtlCol="0" anchor="t"/>
+          <a:bodyPr wrap="square" lIns="0" tIns="0" rIns="0" bIns="0" rtlCol="0" anchor="ctr"/>
           <a:lstStyle/>
           <a:p>
             <a:pPr algn="l" indent="0" marL="0">
               <a:buNone/>
             </a:pPr>
             <a:r>
-              <a:rPr lang="en-US" sz="2700" b="1" dirty="0">
+              <a:rPr lang="en-US" sz="3800" b="1" dirty="0">
                 <a:solidFill>
                   <a:srgbClr val="FFFFFF"/>
                 </a:solidFill>
@@ -8403,7 +8271,7 @@
               </a:rPr>
               <a:t>Dall'intento comunicativo alla composizione automatica</a:t>
             </a:r>
-            <a:endParaRPr lang="en-US" sz="2700" dirty="0"/>
+            <a:endParaRPr lang="en-US" sz="3800" dirty="0"/>
           </a:p>
         </p:txBody>
       </p:sp>
@@ -8464,8 +8332,8 @@
         </p:nvSpPr>
         <p:spPr>
           <a:xfrm>
-            <a:off x="634990" y="1887728"/>
-            <a:ext cx="3217241" cy="274320"/>
+            <a:off x="634990" y="1942592"/>
+            <a:ext cx="3217241" cy="320040"/>
           </a:xfrm>
           <a:prstGeom prst="rect">
             <a:avLst/>
@@ -8481,7 +8349,7 @@
               <a:buNone/>
             </a:pPr>
             <a:r>
-              <a:rPr lang="en-US" sz="1600" b="1" dirty="0">
+              <a:rPr lang="en-US" sz="2000" b="1" dirty="0">
                 <a:solidFill>
                   <a:srgbClr val="FF2E88"/>
                 </a:solidFill>
@@ -8491,7 +8359,7 @@
               </a:rPr>
               <a:t>Intento vs Geometria</a:t>
             </a:r>
-            <a:endParaRPr lang="en-US" sz="1600" dirty="0"/>
+            <a:endParaRPr lang="en-US" sz="2000" dirty="0"/>
           </a:p>
         </p:txBody>
       </p:sp>
@@ -8520,7 +8388,7 @@
               <a:buNone/>
             </a:pPr>
             <a:r>
-              <a:rPr lang="en-US" sz="1300" dirty="0">
+              <a:rPr lang="en-US" sz="1800" dirty="0">
                 <a:solidFill>
                   <a:srgbClr val="FFFFFF"/>
                 </a:solidFill>
@@ -8530,7 +8398,7 @@
               </a:rPr>
               <a:t>Non diciamo al computer 'disegna un rettangolo a coordinate (x,y)', ma 'crea una Card per evidenziare una funzionalità'.</a:t>
             </a:r>
-            <a:endParaRPr lang="en-US" sz="1300" dirty="0"/>
+            <a:endParaRPr lang="en-US" sz="1800" dirty="0"/>
           </a:p>
         </p:txBody>
       </p:sp>
@@ -8591,8 +8459,8 @@
         </p:nvSpPr>
         <p:spPr>
           <a:xfrm>
-            <a:off x="4487227" y="1887728"/>
-            <a:ext cx="3217241" cy="274320"/>
+            <a:off x="4487227" y="1942592"/>
+            <a:ext cx="3217241" cy="320040"/>
           </a:xfrm>
           <a:prstGeom prst="rect">
             <a:avLst/>
@@ -8608,7 +8476,7 @@
               <a:buNone/>
             </a:pPr>
             <a:r>
-              <a:rPr lang="en-US" sz="1600" b="1" dirty="0">
+              <a:rPr lang="en-US" sz="2000" b="1" dirty="0">
                 <a:solidFill>
                   <a:srgbClr val="7B61FF"/>
                 </a:solidFill>
@@ -8618,7 +8486,7 @@
               </a:rPr>
               <a:t>Componenti Semantici</a:t>
             </a:r>
-            <a:endParaRPr lang="en-US" sz="1600" dirty="0"/>
+            <a:endParaRPr lang="en-US" sz="2000" dirty="0"/>
           </a:p>
         </p:txBody>
       </p:sp>
@@ -8647,7 +8515,7 @@
               <a:buNone/>
             </a:pPr>
             <a:r>
-              <a:rPr lang="en-US" sz="1300" dirty="0">
+              <a:rPr lang="en-US" sz="1800" dirty="0">
                 <a:solidFill>
                   <a:srgbClr val="FFFFFF"/>
                 </a:solidFill>
@@ -8657,7 +8525,7 @@
               </a:rPr>
               <a:t>Primitive di alto livello: hero, metric, card, grid, compare, timeline, chart e diagram.</a:t>
             </a:r>
-            <a:endParaRPr lang="en-US" sz="1300" dirty="0"/>
+            <a:endParaRPr lang="en-US" sz="1800" dirty="0"/>
           </a:p>
         </p:txBody>
       </p:sp>
@@ -8718,8 +8586,8 @@
         </p:nvSpPr>
         <p:spPr>
           <a:xfrm>
-            <a:off x="8339464" y="1887728"/>
-            <a:ext cx="3217241" cy="274320"/>
+            <a:off x="8339464" y="1942592"/>
+            <a:ext cx="3217241" cy="320040"/>
           </a:xfrm>
           <a:prstGeom prst="rect">
             <a:avLst/>
@@ -8735,7 +8603,7 @@
               <a:buNone/>
             </a:pPr>
             <a:r>
-              <a:rPr lang="en-US" sz="1600" b="1" dirty="0">
+              <a:rPr lang="en-US" sz="2000" b="1" dirty="0">
                 <a:solidFill>
                   <a:srgbClr val="00FF9F"/>
                 </a:solidFill>
@@ -8745,7 +8613,7 @@
               </a:rPr>
               <a:t>Layout Deterministico</a:t>
             </a:r>
-            <a:endParaRPr lang="en-US" sz="1600" dirty="0"/>
+            <a:endParaRPr lang="en-US" sz="2000" dirty="0"/>
           </a:p>
         </p:txBody>
       </p:sp>
@@ -8774,7 +8642,7 @@
               <a:buNone/>
             </a:pPr>
             <a:r>
-              <a:rPr lang="en-US" sz="1300" dirty="0">
+              <a:rPr lang="en-US" sz="1800" dirty="0">
                 <a:solidFill>
                   <a:srgbClr val="FFFFFF"/>
                 </a:solidFill>
@@ -8784,7 +8652,7 @@
               </a:rPr>
               <a:t>Un motore di calcolo automatico distribuisce spazi, gap, contrasti e gerarchie visive senza overflow.</a:t>
             </a:r>
-            <a:endParaRPr lang="en-US" sz="1300" dirty="0"/>
+            <a:endParaRPr lang="en-US" sz="1800" dirty="0"/>
           </a:p>
         </p:txBody>
       </p:sp>
@@ -8982,14 +8850,14 @@
           <a:ln/>
         </p:spPr>
         <p:txBody>
-          <a:bodyPr wrap="square" lIns="0" tIns="0" rIns="0" bIns="0" rtlCol="0" anchor="t"/>
+          <a:bodyPr wrap="square" lIns="0" tIns="0" rIns="0" bIns="0" rtlCol="0" anchor="ctr"/>
           <a:lstStyle/>
           <a:p>
             <a:pPr algn="l" indent="0" marL="0">
               <a:buNone/>
             </a:pPr>
             <a:r>
-              <a:rPr lang="en-US" sz="3300" b="1" dirty="0">
+              <a:rPr lang="en-US" sz="4600" b="1" dirty="0">
                 <a:solidFill>
                   <a:srgbClr val="FF2E88"/>
                 </a:solidFill>
@@ -8999,7 +8867,7 @@
               </a:rPr>
               <a:t>Un'unica sorgente, più formati</a:t>
             </a:r>
-            <a:endParaRPr lang="en-US" sz="3300" dirty="0"/>
+            <a:endParaRPr lang="en-US" sz="4600" dirty="0"/>
           </a:p>
         </p:txBody>
       </p:sp>
@@ -9021,14 +8889,14 @@
           <a:ln/>
         </p:spPr>
         <p:txBody>
-          <a:bodyPr wrap="square" lIns="0" tIns="0" rIns="0" bIns="0" rtlCol="0" anchor="t"/>
+          <a:bodyPr wrap="square" lIns="0" tIns="0" rIns="0" bIns="0" rtlCol="0" anchor="ctr"/>
           <a:lstStyle/>
           <a:p>
             <a:pPr algn="l" indent="0" marL="0">
               <a:buNone/>
             </a:pPr>
             <a:r>
-              <a:rPr lang="en-US" sz="2700" b="1" dirty="0">
+              <a:rPr lang="en-US" sz="3800" b="1" dirty="0">
                 <a:solidFill>
                   <a:srgbClr val="FFFFFF"/>
                 </a:solidFill>
@@ -9038,59 +8906,20 @@
               </a:rPr>
               <a:t>Compilazione Multi-Target da una Singola Sorgente</a:t>
             </a:r>
-            <a:endParaRPr lang="en-US" sz="2700" dirty="0"/>
-          </a:p>
-        </p:txBody>
-      </p:sp>
-      <p:sp>
-        <p:nvSpPr>
-          <p:cNvPr id="4" name="Text 2"/>
-          <p:cNvSpPr/>
-          <p:nvPr/>
-        </p:nvSpPr>
-        <p:spPr>
-          <a:xfrm>
-            <a:off x="406390" y="1778000"/>
-            <a:ext cx="11378916" cy="256032"/>
-          </a:xfrm>
-          <a:prstGeom prst="rect">
-            <a:avLst/>
-          </a:prstGeom>
-          <a:noFill/>
-          <a:ln/>
-        </p:spPr>
-        <p:txBody>
-          <a:bodyPr wrap="square" rtlCol="0" anchor="ctr"/>
-          <a:lstStyle/>
-          <a:p>
-            <a:pPr algn="ctr" indent="0" marL="0">
-              <a:buNone/>
-            </a:pPr>
-            <a:r>
-              <a:rPr lang="en-US" sz="1200" b="1" dirty="0">
-                <a:solidFill>
-                  <a:srgbClr val="FF2E88"/>
-                </a:solidFill>
-                <a:latin typeface="Trebuchet MS" pitchFamily="34" charset="0"/>
-                <a:ea typeface="Trebuchet MS" pitchFamily="34" charset="-122"/>
-                <a:cs typeface="Trebuchet MS" pitchFamily="34" charset="-120"/>
-              </a:rPr>
-              <a:t>Flusso di Trasformazione Multi-Target</a:t>
-            </a:r>
-            <a:endParaRPr lang="en-US" sz="1200" dirty="0"/>
-          </a:p>
-        </p:txBody>
-      </p:sp>
-      <p:sp>
-        <p:nvSpPr>
-          <p:cNvPr id="5" name="Shape 3"/>
-          <p:cNvSpPr/>
-          <p:nvPr/>
-        </p:nvSpPr>
-        <p:spPr>
-          <a:xfrm>
-            <a:off x="4869778" y="2191868"/>
-            <a:ext cx="188626" cy="1091336"/>
+            <a:endParaRPr lang="en-US" sz="3800" dirty="0"/>
+          </a:p>
+        </p:txBody>
+      </p:sp>
+      <p:sp>
+        <p:nvSpPr>
+          <p:cNvPr id="4" name="Shape 2"/>
+          <p:cNvSpPr/>
+          <p:nvPr/>
+        </p:nvSpPr>
+        <p:spPr>
+          <a:xfrm>
+            <a:off x="2052310" y="1890486"/>
+            <a:ext cx="1598412" cy="903514"/>
           </a:xfrm>
           <a:prstGeom prst="line">
             <a:avLst/>
@@ -9107,14 +8936,14 @@
       </p:sp>
       <p:sp>
         <p:nvSpPr>
-          <p:cNvPr id="6" name="Shape 4"/>
-          <p:cNvSpPr/>
-          <p:nvPr/>
-        </p:nvSpPr>
-        <p:spPr>
-          <a:xfrm>
-            <a:off x="6001535" y="3283204"/>
-            <a:ext cx="188626" cy="9144"/>
+          <p:cNvPr id="5" name="Shape 3"/>
+          <p:cNvSpPr/>
+          <p:nvPr/>
+        </p:nvSpPr>
+        <p:spPr>
+          <a:xfrm>
+            <a:off x="5296642" y="2794000"/>
+            <a:ext cx="1598412" cy="9144"/>
           </a:xfrm>
           <a:prstGeom prst="line">
             <a:avLst/>
@@ -9131,14 +8960,14 @@
       </p:sp>
       <p:sp>
         <p:nvSpPr>
-          <p:cNvPr id="7" name="Shape 5"/>
+          <p:cNvPr id="6" name="Shape 4"/>
           <p:cNvSpPr/>
           <p:nvPr/>
         </p:nvSpPr>
         <p:spPr>
           <a:xfrm flipV="1">
-            <a:off x="7133291" y="2919425"/>
-            <a:ext cx="188626" cy="363779"/>
+            <a:off x="8540974" y="2492829"/>
+            <a:ext cx="1598412" cy="301171"/>
           </a:xfrm>
           <a:prstGeom prst="line">
             <a:avLst/>
@@ -9155,14 +8984,14 @@
       </p:sp>
       <p:sp>
         <p:nvSpPr>
-          <p:cNvPr id="8" name="Shape 6"/>
-          <p:cNvSpPr/>
-          <p:nvPr/>
-        </p:nvSpPr>
-        <p:spPr>
-          <a:xfrm>
-            <a:off x="7133291" y="3283204"/>
-            <a:ext cx="188626" cy="9144"/>
+          <p:cNvPr id="7" name="Shape 5"/>
+          <p:cNvSpPr/>
+          <p:nvPr/>
+        </p:nvSpPr>
+        <p:spPr>
+          <a:xfrm>
+            <a:off x="8540974" y="2794000"/>
+            <a:ext cx="1598412" cy="9144"/>
           </a:xfrm>
           <a:prstGeom prst="line">
             <a:avLst/>
@@ -9179,14 +9008,14 @@
       </p:sp>
       <p:sp>
         <p:nvSpPr>
-          <p:cNvPr id="9" name="Shape 7"/>
-          <p:cNvSpPr/>
-          <p:nvPr/>
-        </p:nvSpPr>
-        <p:spPr>
-          <a:xfrm>
-            <a:off x="7133291" y="3283204"/>
-            <a:ext cx="188626" cy="363779"/>
+          <p:cNvPr id="8" name="Shape 6"/>
+          <p:cNvSpPr/>
+          <p:nvPr/>
+        </p:nvSpPr>
+        <p:spPr>
+          <a:xfrm>
+            <a:off x="8540974" y="2794000"/>
+            <a:ext cx="1598412" cy="301171"/>
           </a:xfrm>
           <a:prstGeom prst="line">
             <a:avLst/>
@@ -9203,18 +9032,18 @@
       </p:sp>
       <p:sp>
         <p:nvSpPr>
-          <p:cNvPr id="10" name="Shape 8"/>
-          <p:cNvSpPr/>
-          <p:nvPr/>
-        </p:nvSpPr>
-        <p:spPr>
-          <a:xfrm>
-            <a:off x="3926648" y="2070608"/>
-            <a:ext cx="943130" cy="242519"/>
+          <p:cNvPr id="9" name="Shape 7"/>
+          <p:cNvSpPr/>
+          <p:nvPr/>
+        </p:nvSpPr>
+        <p:spPr>
+          <a:xfrm>
+            <a:off x="406390" y="1778000"/>
+            <a:ext cx="1645920" cy="224971"/>
           </a:xfrm>
           <a:prstGeom prst="roundRect">
             <a:avLst>
-              <a:gd name="adj" fmla="val 30163"/>
+              <a:gd name="adj" fmla="val 32516"/>
             </a:avLst>
           </a:prstGeom>
           <a:solidFill>
@@ -9230,14 +9059,14 @@
       </p:sp>
       <p:sp>
         <p:nvSpPr>
-          <p:cNvPr id="11" name="Text 9"/>
-          <p:cNvSpPr/>
-          <p:nvPr/>
-        </p:nvSpPr>
-        <p:spPr>
-          <a:xfrm>
-            <a:off x="3981512" y="2125472"/>
-            <a:ext cx="833402" cy="132791"/>
+          <p:cNvPr id="10" name="Text 8"/>
+          <p:cNvSpPr/>
+          <p:nvPr/>
+        </p:nvSpPr>
+        <p:spPr>
+          <a:xfrm>
+            <a:off x="461254" y="1832864"/>
+            <a:ext cx="1536192" cy="115243"/>
           </a:xfrm>
           <a:prstGeom prst="rect">
             <a:avLst/>
@@ -9261,7 +9090,7 @@
                 <a:ea typeface="Trebuchet MS" pitchFamily="34" charset="-122"/>
                 <a:cs typeface="Trebuchet MS" pitchFamily="34" charset="-120"/>
               </a:rPr>
-              <a:t>Sorgente Yu…</a:t>
+              <a:t>Sorgente Yumia</a:t>
             </a:r>
             <a:endParaRPr lang="en-US" sz="1100" dirty="0"/>
           </a:p>
@@ -9269,18 +9098,18 @@
       </p:sp>
       <p:sp>
         <p:nvSpPr>
-          <p:cNvPr id="12" name="Shape 10"/>
-          <p:cNvSpPr/>
-          <p:nvPr/>
-        </p:nvSpPr>
-        <p:spPr>
-          <a:xfrm>
-            <a:off x="5058404" y="3161944"/>
-            <a:ext cx="943130" cy="242519"/>
+          <p:cNvPr id="11" name="Shape 9"/>
+          <p:cNvSpPr/>
+          <p:nvPr/>
+        </p:nvSpPr>
+        <p:spPr>
+          <a:xfrm>
+            <a:off x="3650722" y="2681514"/>
+            <a:ext cx="1645920" cy="224971"/>
           </a:xfrm>
           <a:prstGeom prst="roundRect">
             <a:avLst>
-              <a:gd name="adj" fmla="val 30163"/>
+              <a:gd name="adj" fmla="val 32516"/>
             </a:avLst>
           </a:prstGeom>
           <a:solidFill>
@@ -9296,14 +9125,14 @@
       </p:sp>
       <p:sp>
         <p:nvSpPr>
-          <p:cNvPr id="13" name="Text 11"/>
-          <p:cNvSpPr/>
-          <p:nvPr/>
-        </p:nvSpPr>
-        <p:spPr>
-          <a:xfrm>
-            <a:off x="5113268" y="3216808"/>
-            <a:ext cx="833402" cy="132791"/>
+          <p:cNvPr id="12" name="Text 10"/>
+          <p:cNvSpPr/>
+          <p:nvPr/>
+        </p:nvSpPr>
+        <p:spPr>
+          <a:xfrm>
+            <a:off x="3705586" y="2736378"/>
+            <a:ext cx="1536192" cy="115243"/>
           </a:xfrm>
           <a:prstGeom prst="rect">
             <a:avLst/>
@@ -9327,7 +9156,7 @@
                 <a:ea typeface="Trebuchet MS" pitchFamily="34" charset="-122"/>
                 <a:cs typeface="Trebuchet MS" pitchFamily="34" charset="-120"/>
               </a:rPr>
-              <a:t>AST Semanti…</a:t>
+              <a:t>AST Semantico</a:t>
             </a:r>
             <a:endParaRPr lang="en-US" sz="1100" dirty="0"/>
           </a:p>
@@ -9335,18 +9164,18 @@
       </p:sp>
       <p:sp>
         <p:nvSpPr>
-          <p:cNvPr id="14" name="Shape 12"/>
-          <p:cNvSpPr/>
-          <p:nvPr/>
-        </p:nvSpPr>
-        <p:spPr>
-          <a:xfrm>
-            <a:off x="6190161" y="3161944"/>
-            <a:ext cx="943130" cy="242519"/>
+          <p:cNvPr id="13" name="Shape 11"/>
+          <p:cNvSpPr/>
+          <p:nvPr/>
+        </p:nvSpPr>
+        <p:spPr>
+          <a:xfrm>
+            <a:off x="6895054" y="2681514"/>
+            <a:ext cx="1645920" cy="224971"/>
           </a:xfrm>
           <a:prstGeom prst="roundRect">
             <a:avLst>
-              <a:gd name="adj" fmla="val 30163"/>
+              <a:gd name="adj" fmla="val 32516"/>
             </a:avLst>
           </a:prstGeom>
           <a:solidFill>
@@ -9362,14 +9191,14 @@
       </p:sp>
       <p:sp>
         <p:nvSpPr>
-          <p:cNvPr id="15" name="Text 13"/>
-          <p:cNvSpPr/>
-          <p:nvPr/>
-        </p:nvSpPr>
-        <p:spPr>
-          <a:xfrm>
-            <a:off x="6245025" y="3216808"/>
-            <a:ext cx="833402" cy="132791"/>
+          <p:cNvPr id="14" name="Text 12"/>
+          <p:cNvSpPr/>
+          <p:nvPr/>
+        </p:nvSpPr>
+        <p:spPr>
+          <a:xfrm>
+            <a:off x="6949918" y="2736378"/>
+            <a:ext cx="1536192" cy="115243"/>
           </a:xfrm>
           <a:prstGeom prst="rect">
             <a:avLst/>
@@ -9393,7 +9222,7 @@
                 <a:ea typeface="Trebuchet MS" pitchFamily="34" charset="-122"/>
                 <a:cs typeface="Trebuchet MS" pitchFamily="34" charset="-120"/>
               </a:rPr>
-              <a:t>Design Syst…</a:t>
+              <a:t>Design System</a:t>
             </a:r>
             <a:endParaRPr lang="en-US" sz="1100" dirty="0"/>
           </a:p>
@@ -9401,18 +9230,18 @@
       </p:sp>
       <p:sp>
         <p:nvSpPr>
-          <p:cNvPr id="16" name="Shape 14"/>
-          <p:cNvSpPr/>
-          <p:nvPr/>
-        </p:nvSpPr>
-        <p:spPr>
-          <a:xfrm>
-            <a:off x="7321917" y="2798166"/>
-            <a:ext cx="943130" cy="242519"/>
+          <p:cNvPr id="15" name="Shape 13"/>
+          <p:cNvSpPr/>
+          <p:nvPr/>
+        </p:nvSpPr>
+        <p:spPr>
+          <a:xfrm>
+            <a:off x="10139385" y="2380343"/>
+            <a:ext cx="1645920" cy="224971"/>
           </a:xfrm>
           <a:prstGeom prst="roundRect">
             <a:avLst>
-              <a:gd name="adj" fmla="val 30163"/>
+              <a:gd name="adj" fmla="val 32516"/>
             </a:avLst>
           </a:prstGeom>
           <a:solidFill>
@@ -9428,14 +9257,14 @@
       </p:sp>
       <p:sp>
         <p:nvSpPr>
-          <p:cNvPr id="17" name="Text 15"/>
-          <p:cNvSpPr/>
-          <p:nvPr/>
-        </p:nvSpPr>
-        <p:spPr>
-          <a:xfrm>
-            <a:off x="7376781" y="2853030"/>
-            <a:ext cx="833402" cy="132791"/>
+          <p:cNvPr id="16" name="Text 14"/>
+          <p:cNvSpPr/>
+          <p:nvPr/>
+        </p:nvSpPr>
+        <p:spPr>
+          <a:xfrm>
+            <a:off x="10194249" y="2435207"/>
+            <a:ext cx="1536192" cy="115243"/>
           </a:xfrm>
           <a:prstGeom prst="rect">
             <a:avLst/>
@@ -9459,7 +9288,7 @@
                 <a:ea typeface="Trebuchet MS" pitchFamily="34" charset="-122"/>
                 <a:cs typeface="Trebuchet MS" pitchFamily="34" charset="-120"/>
               </a:rPr>
-              <a:t>HTML Intera…</a:t>
+              <a:t>HTML Interattivo</a:t>
             </a:r>
             <a:endParaRPr lang="en-US" sz="1100" dirty="0"/>
           </a:p>
@@ -9467,18 +9296,18 @@
       </p:sp>
       <p:sp>
         <p:nvSpPr>
-          <p:cNvPr id="18" name="Shape 16"/>
-          <p:cNvSpPr/>
-          <p:nvPr/>
-        </p:nvSpPr>
-        <p:spPr>
-          <a:xfrm>
-            <a:off x="7321917" y="3161944"/>
-            <a:ext cx="943130" cy="242519"/>
+          <p:cNvPr id="17" name="Shape 15"/>
+          <p:cNvSpPr/>
+          <p:nvPr/>
+        </p:nvSpPr>
+        <p:spPr>
+          <a:xfrm>
+            <a:off x="10139385" y="2681514"/>
+            <a:ext cx="1645920" cy="224971"/>
           </a:xfrm>
           <a:prstGeom prst="roundRect">
             <a:avLst>
-              <a:gd name="adj" fmla="val 30163"/>
+              <a:gd name="adj" fmla="val 32516"/>
             </a:avLst>
           </a:prstGeom>
           <a:solidFill>
@@ -9494,14 +9323,14 @@
       </p:sp>
       <p:sp>
         <p:nvSpPr>
-          <p:cNvPr id="19" name="Text 17"/>
-          <p:cNvSpPr/>
-          <p:nvPr/>
-        </p:nvSpPr>
-        <p:spPr>
-          <a:xfrm>
-            <a:off x="7376781" y="3216808"/>
-            <a:ext cx="833402" cy="132791"/>
+          <p:cNvPr id="18" name="Text 16"/>
+          <p:cNvSpPr/>
+          <p:nvPr/>
+        </p:nvSpPr>
+        <p:spPr>
+          <a:xfrm>
+            <a:off x="10194249" y="2736378"/>
+            <a:ext cx="1536192" cy="115243"/>
           </a:xfrm>
           <a:prstGeom prst="rect">
             <a:avLst/>
@@ -9525,7 +9354,7 @@
                 <a:ea typeface="Trebuchet MS" pitchFamily="34" charset="-122"/>
                 <a:cs typeface="Trebuchet MS" pitchFamily="34" charset="-120"/>
               </a:rPr>
-              <a:t>PowerPoint …</a:t>
+              <a:t>PowerPoint PPTX</a:t>
             </a:r>
             <a:endParaRPr lang="en-US" sz="1100" dirty="0"/>
           </a:p>
@@ -9533,18 +9362,18 @@
       </p:sp>
       <p:sp>
         <p:nvSpPr>
-          <p:cNvPr id="20" name="Shape 18"/>
-          <p:cNvSpPr/>
-          <p:nvPr/>
-        </p:nvSpPr>
-        <p:spPr>
-          <a:xfrm>
-            <a:off x="7321917" y="3525723"/>
-            <a:ext cx="943130" cy="242519"/>
+          <p:cNvPr id="19" name="Shape 17"/>
+          <p:cNvSpPr/>
+          <p:nvPr/>
+        </p:nvSpPr>
+        <p:spPr>
+          <a:xfrm>
+            <a:off x="10139385" y="2982686"/>
+            <a:ext cx="1645920" cy="224971"/>
           </a:xfrm>
           <a:prstGeom prst="roundRect">
             <a:avLst>
-              <a:gd name="adj" fmla="val 30163"/>
+              <a:gd name="adj" fmla="val 32516"/>
             </a:avLst>
           </a:prstGeom>
           <a:solidFill>
@@ -9560,14 +9389,14 @@
       </p:sp>
       <p:sp>
         <p:nvSpPr>
-          <p:cNvPr id="21" name="Text 19"/>
-          <p:cNvSpPr/>
-          <p:nvPr/>
-        </p:nvSpPr>
-        <p:spPr>
-          <a:xfrm>
-            <a:off x="7376781" y="3580587"/>
-            <a:ext cx="833402" cy="132791"/>
+          <p:cNvPr id="20" name="Text 18"/>
+          <p:cNvSpPr/>
+          <p:nvPr/>
+        </p:nvSpPr>
+        <p:spPr>
+          <a:xfrm>
+            <a:off x="10194249" y="3037550"/>
+            <a:ext cx="1536192" cy="115243"/>
           </a:xfrm>
           <a:prstGeom prst="rect">
             <a:avLst/>
@@ -9591,7 +9420,7 @@
                 <a:ea typeface="Trebuchet MS" pitchFamily="34" charset="-122"/>
                 <a:cs typeface="Trebuchet MS" pitchFamily="34" charset="-120"/>
               </a:rPr>
-              <a:t>PDF Vettori…</a:t>
+              <a:t>PDF Vettoriale</a:t>
             </a:r>
             <a:endParaRPr lang="en-US" sz="1100" dirty="0"/>
           </a:p>
@@ -9599,18 +9428,18 @@
       </p:sp>
       <p:sp>
         <p:nvSpPr>
-          <p:cNvPr id="22" name="Shape 20"/>
-          <p:cNvSpPr/>
-          <p:nvPr/>
-        </p:nvSpPr>
-        <p:spPr>
-          <a:xfrm>
-            <a:off x="3926648" y="2434387"/>
-            <a:ext cx="943130" cy="242519"/>
+          <p:cNvPr id="21" name="Shape 19"/>
+          <p:cNvSpPr/>
+          <p:nvPr/>
+        </p:nvSpPr>
+        <p:spPr>
+          <a:xfrm>
+            <a:off x="406390" y="2079171"/>
+            <a:ext cx="1645920" cy="224971"/>
           </a:xfrm>
           <a:prstGeom prst="roundRect">
             <a:avLst>
-              <a:gd name="adj" fmla="val 30163"/>
+              <a:gd name="adj" fmla="val 32516"/>
             </a:avLst>
           </a:prstGeom>
           <a:solidFill>
@@ -9626,14 +9455,14 @@
       </p:sp>
       <p:sp>
         <p:nvSpPr>
-          <p:cNvPr id="23" name="Text 21"/>
-          <p:cNvSpPr/>
-          <p:nvPr/>
-        </p:nvSpPr>
-        <p:spPr>
-          <a:xfrm>
-            <a:off x="3981512" y="2489251"/>
-            <a:ext cx="833402" cy="132791"/>
+          <p:cNvPr id="22" name="Text 20"/>
+          <p:cNvSpPr/>
+          <p:nvPr/>
+        </p:nvSpPr>
+        <p:spPr>
+          <a:xfrm>
+            <a:off x="461254" y="2134035"/>
+            <a:ext cx="1536192" cy="115243"/>
           </a:xfrm>
           <a:prstGeom prst="rect">
             <a:avLst/>
@@ -9665,18 +9494,18 @@
       </p:sp>
       <p:sp>
         <p:nvSpPr>
-          <p:cNvPr id="24" name="Shape 22"/>
-          <p:cNvSpPr/>
-          <p:nvPr/>
-        </p:nvSpPr>
-        <p:spPr>
-          <a:xfrm>
-            <a:off x="3926648" y="2798166"/>
-            <a:ext cx="943130" cy="242519"/>
+          <p:cNvPr id="23" name="Shape 21"/>
+          <p:cNvSpPr/>
+          <p:nvPr/>
+        </p:nvSpPr>
+        <p:spPr>
+          <a:xfrm>
+            <a:off x="406390" y="2380343"/>
+            <a:ext cx="1645920" cy="224971"/>
           </a:xfrm>
           <a:prstGeom prst="roundRect">
             <a:avLst>
-              <a:gd name="adj" fmla="val 30163"/>
+              <a:gd name="adj" fmla="val 32516"/>
             </a:avLst>
           </a:prstGeom>
           <a:solidFill>
@@ -9692,14 +9521,14 @@
       </p:sp>
       <p:sp>
         <p:nvSpPr>
-          <p:cNvPr id="25" name="Text 23"/>
-          <p:cNvSpPr/>
-          <p:nvPr/>
-        </p:nvSpPr>
-        <p:spPr>
-          <a:xfrm>
-            <a:off x="3981512" y="2853030"/>
-            <a:ext cx="833402" cy="132791"/>
+          <p:cNvPr id="24" name="Text 22"/>
+          <p:cNvSpPr/>
+          <p:nvPr/>
+        </p:nvSpPr>
+        <p:spPr>
+          <a:xfrm>
+            <a:off x="461254" y="2435207"/>
+            <a:ext cx="1536192" cy="115243"/>
           </a:xfrm>
           <a:prstGeom prst="rect">
             <a:avLst/>
@@ -9731,18 +9560,18 @@
       </p:sp>
       <p:sp>
         <p:nvSpPr>
-          <p:cNvPr id="26" name="Shape 24"/>
-          <p:cNvSpPr/>
-          <p:nvPr/>
-        </p:nvSpPr>
-        <p:spPr>
-          <a:xfrm>
-            <a:off x="3926648" y="3161944"/>
-            <a:ext cx="943130" cy="242519"/>
+          <p:cNvPr id="25" name="Shape 23"/>
+          <p:cNvSpPr/>
+          <p:nvPr/>
+        </p:nvSpPr>
+        <p:spPr>
+          <a:xfrm>
+            <a:off x="406390" y="2681514"/>
+            <a:ext cx="1645920" cy="224971"/>
           </a:xfrm>
           <a:prstGeom prst="roundRect">
             <a:avLst>
-              <a:gd name="adj" fmla="val 30163"/>
+              <a:gd name="adj" fmla="val 32516"/>
             </a:avLst>
           </a:prstGeom>
           <a:solidFill>
@@ -9758,14 +9587,14 @@
       </p:sp>
       <p:sp>
         <p:nvSpPr>
-          <p:cNvPr id="27" name="Text 25"/>
-          <p:cNvSpPr/>
-          <p:nvPr/>
-        </p:nvSpPr>
-        <p:spPr>
-          <a:xfrm>
-            <a:off x="3981512" y="3216808"/>
-            <a:ext cx="833402" cy="132791"/>
+          <p:cNvPr id="26" name="Text 24"/>
+          <p:cNvSpPr/>
+          <p:nvPr/>
+        </p:nvSpPr>
+        <p:spPr>
+          <a:xfrm>
+            <a:off x="461254" y="2736378"/>
+            <a:ext cx="1536192" cy="115243"/>
           </a:xfrm>
           <a:prstGeom prst="rect">
             <a:avLst/>
@@ -9797,18 +9626,18 @@
       </p:sp>
       <p:sp>
         <p:nvSpPr>
-          <p:cNvPr id="28" name="Shape 26"/>
-          <p:cNvSpPr/>
-          <p:nvPr/>
-        </p:nvSpPr>
-        <p:spPr>
-          <a:xfrm>
-            <a:off x="3926648" y="3525723"/>
-            <a:ext cx="943130" cy="242519"/>
+          <p:cNvPr id="27" name="Shape 25"/>
+          <p:cNvSpPr/>
+          <p:nvPr/>
+        </p:nvSpPr>
+        <p:spPr>
+          <a:xfrm>
+            <a:off x="406390" y="2982686"/>
+            <a:ext cx="1645920" cy="224971"/>
           </a:xfrm>
           <a:prstGeom prst="roundRect">
             <a:avLst>
-              <a:gd name="adj" fmla="val 30163"/>
+              <a:gd name="adj" fmla="val 32516"/>
             </a:avLst>
           </a:prstGeom>
           <a:solidFill>
@@ -9824,14 +9653,14 @@
       </p:sp>
       <p:sp>
         <p:nvSpPr>
-          <p:cNvPr id="29" name="Text 27"/>
-          <p:cNvSpPr/>
-          <p:nvPr/>
-        </p:nvSpPr>
-        <p:spPr>
-          <a:xfrm>
-            <a:off x="3981512" y="3580587"/>
-            <a:ext cx="833402" cy="132791"/>
+          <p:cNvPr id="28" name="Text 26"/>
+          <p:cNvSpPr/>
+          <p:nvPr/>
+        </p:nvSpPr>
+        <p:spPr>
+          <a:xfrm>
+            <a:off x="461254" y="3037550"/>
+            <a:ext cx="1536192" cy="115243"/>
           </a:xfrm>
           <a:prstGeom prst="rect">
             <a:avLst/>
@@ -9863,18 +9692,18 @@
       </p:sp>
       <p:sp>
         <p:nvSpPr>
-          <p:cNvPr id="30" name="Shape 28"/>
-          <p:cNvSpPr/>
-          <p:nvPr/>
-        </p:nvSpPr>
-        <p:spPr>
-          <a:xfrm>
-            <a:off x="3926648" y="3889502"/>
-            <a:ext cx="943130" cy="242519"/>
+          <p:cNvPr id="29" name="Shape 27"/>
+          <p:cNvSpPr/>
+          <p:nvPr/>
+        </p:nvSpPr>
+        <p:spPr>
+          <a:xfrm>
+            <a:off x="406390" y="3283857"/>
+            <a:ext cx="1645920" cy="224971"/>
           </a:xfrm>
           <a:prstGeom prst="roundRect">
             <a:avLst>
-              <a:gd name="adj" fmla="val 30163"/>
+              <a:gd name="adj" fmla="val 32516"/>
             </a:avLst>
           </a:prstGeom>
           <a:solidFill>
@@ -9890,14 +9719,14 @@
       </p:sp>
       <p:sp>
         <p:nvSpPr>
-          <p:cNvPr id="31" name="Text 29"/>
-          <p:cNvSpPr/>
-          <p:nvPr/>
-        </p:nvSpPr>
-        <p:spPr>
-          <a:xfrm>
-            <a:off x="3981512" y="3944366"/>
-            <a:ext cx="833402" cy="132791"/>
+          <p:cNvPr id="30" name="Text 28"/>
+          <p:cNvSpPr/>
+          <p:nvPr/>
+        </p:nvSpPr>
+        <p:spPr>
+          <a:xfrm>
+            <a:off x="461254" y="3338721"/>
+            <a:ext cx="1536192" cy="115243"/>
           </a:xfrm>
           <a:prstGeom prst="rect">
             <a:avLst/>
@@ -9929,18 +9758,18 @@
       </p:sp>
       <p:sp>
         <p:nvSpPr>
-          <p:cNvPr id="32" name="Shape 30"/>
-          <p:cNvSpPr/>
-          <p:nvPr/>
-        </p:nvSpPr>
-        <p:spPr>
-          <a:xfrm>
-            <a:off x="3926648" y="4253281"/>
-            <a:ext cx="943130" cy="242519"/>
+          <p:cNvPr id="31" name="Shape 29"/>
+          <p:cNvSpPr/>
+          <p:nvPr/>
+        </p:nvSpPr>
+        <p:spPr>
+          <a:xfrm>
+            <a:off x="406390" y="3585029"/>
+            <a:ext cx="1645920" cy="224971"/>
           </a:xfrm>
           <a:prstGeom prst="roundRect">
             <a:avLst>
-              <a:gd name="adj" fmla="val 30163"/>
+              <a:gd name="adj" fmla="val 32516"/>
             </a:avLst>
           </a:prstGeom>
           <a:solidFill>
@@ -9956,14 +9785,14 @@
       </p:sp>
       <p:sp>
         <p:nvSpPr>
-          <p:cNvPr id="33" name="Text 31"/>
-          <p:cNvSpPr/>
-          <p:nvPr/>
-        </p:nvSpPr>
-        <p:spPr>
-          <a:xfrm>
-            <a:off x="3981512" y="4308145"/>
-            <a:ext cx="833402" cy="132791"/>
+          <p:cNvPr id="32" name="Text 30"/>
+          <p:cNvSpPr/>
+          <p:nvPr/>
+        </p:nvSpPr>
+        <p:spPr>
+          <a:xfrm>
+            <a:off x="461254" y="3639893"/>
+            <a:ext cx="1536192" cy="115243"/>
           </a:xfrm>
           <a:prstGeom prst="rect">
             <a:avLst/>
@@ -9995,13 +9824,13 @@
       </p:sp>
       <p:sp>
         <p:nvSpPr>
-          <p:cNvPr id="34" name="Shape 32"/>
-          <p:cNvSpPr/>
-          <p:nvPr/>
-        </p:nvSpPr>
-        <p:spPr>
-          <a:xfrm>
-            <a:off x="406390" y="4673600"/>
+          <p:cNvPr id="33" name="Shape 31"/>
+          <p:cNvSpPr/>
+          <p:nvPr/>
+        </p:nvSpPr>
+        <p:spPr>
+          <a:xfrm>
+            <a:off x="406390" y="3987800"/>
             <a:ext cx="11378916" cy="831850"/>
           </a:xfrm>
           <a:prstGeom prst="roundRect">
@@ -10022,13 +9851,13 @@
       </p:sp>
       <p:sp>
         <p:nvSpPr>
-          <p:cNvPr id="35" name="Text 33"/>
-          <p:cNvSpPr/>
-          <p:nvPr/>
-        </p:nvSpPr>
-        <p:spPr>
-          <a:xfrm>
-            <a:off x="543550" y="4746752"/>
+          <p:cNvPr id="34" name="Text 32"/>
+          <p:cNvSpPr/>
+          <p:nvPr/>
+        </p:nvSpPr>
+        <p:spPr>
+          <a:xfrm>
+            <a:off x="543550" y="4060952"/>
             <a:ext cx="11104596" cy="274320"/>
           </a:xfrm>
           <a:prstGeom prst="rect">
@@ -10061,13 +9890,13 @@
       </p:sp>
       <p:sp>
         <p:nvSpPr>
-          <p:cNvPr id="36" name="Text 34"/>
-          <p:cNvSpPr/>
-          <p:nvPr/>
-        </p:nvSpPr>
-        <p:spPr>
-          <a:xfrm>
-            <a:off x="543550" y="5066792"/>
+          <p:cNvPr id="35" name="Text 33"/>
+          <p:cNvSpPr/>
+          <p:nvPr/>
+        </p:nvSpPr>
+        <p:spPr>
+          <a:xfrm>
+            <a:off x="543550" y="4380992"/>
             <a:ext cx="11104596" cy="365506"/>
           </a:xfrm>
           <a:prstGeom prst="rect">
@@ -10100,7 +9929,7 @@
       </p:sp>
       <p:sp>
         <p:nvSpPr>
-          <p:cNvPr id="37" name="Text 35"/>
+          <p:cNvPr id="36" name="Text 34"/>
           <p:cNvSpPr/>
           <p:nvPr/>
         </p:nvSpPr>
@@ -10187,14 +10016,14 @@
           <a:ln/>
         </p:spPr>
         <p:txBody>
-          <a:bodyPr wrap="square" lIns="0" tIns="0" rIns="0" bIns="0" rtlCol="0" anchor="t"/>
+          <a:bodyPr wrap="square" lIns="0" tIns="0" rIns="0" bIns="0" rtlCol="0" anchor="ctr"/>
           <a:lstStyle/>
           <a:p>
             <a:pPr algn="l" indent="0" marL="0">
               <a:buNone/>
             </a:pPr>
             <a:r>
-              <a:rPr lang="en-US" sz="3300" b="1" dirty="0">
+              <a:rPr lang="en-US" sz="4600" b="1" dirty="0">
                 <a:solidFill>
                   <a:srgbClr val="FF2E88"/>
                 </a:solidFill>
@@ -10204,7 +10033,7 @@
               </a:rPr>
               <a:t>Architettura della Pipeline</a:t>
             </a:r>
-            <a:endParaRPr lang="en-US" sz="3300" dirty="0"/>
+            <a:endParaRPr lang="en-US" sz="4600" dirty="0"/>
           </a:p>
         </p:txBody>
       </p:sp>
@@ -10226,14 +10055,14 @@
           <a:ln/>
         </p:spPr>
         <p:txBody>
-          <a:bodyPr wrap="square" lIns="0" tIns="0" rIns="0" bIns="0" rtlCol="0" anchor="t"/>
+          <a:bodyPr wrap="square" lIns="0" tIns="0" rIns="0" bIns="0" rtlCol="0" anchor="ctr"/>
           <a:lstStyle/>
           <a:p>
             <a:pPr algn="l" indent="0" marL="0">
               <a:buNone/>
             </a:pPr>
             <a:r>
-              <a:rPr lang="en-US" sz="2700" b="1" dirty="0">
+              <a:rPr lang="en-US" sz="3800" b="1" dirty="0">
                 <a:solidFill>
                   <a:srgbClr val="FFFFFF"/>
                 </a:solidFill>
@@ -10243,59 +10072,20 @@
               </a:rPr>
               <a:t>Dalla sintassi al rendering finale: la pipeline a 7 stadi</a:t>
             </a:r>
-            <a:endParaRPr lang="en-US" sz="2700" dirty="0"/>
-          </a:p>
-        </p:txBody>
-      </p:sp>
-      <p:sp>
-        <p:nvSpPr>
-          <p:cNvPr id="4" name="Text 2"/>
-          <p:cNvSpPr/>
-          <p:nvPr/>
-        </p:nvSpPr>
-        <p:spPr>
-          <a:xfrm>
-            <a:off x="406390" y="1778000"/>
-            <a:ext cx="11378916" cy="256032"/>
-          </a:xfrm>
-          <a:prstGeom prst="rect">
-            <a:avLst/>
-          </a:prstGeom>
-          <a:noFill/>
-          <a:ln/>
-        </p:spPr>
-        <p:txBody>
-          <a:bodyPr wrap="square" rtlCol="0" anchor="ctr"/>
-          <a:lstStyle/>
-          <a:p>
-            <a:pPr algn="ctr" indent="0" marL="0">
-              <a:buNone/>
-            </a:pPr>
-            <a:r>
-              <a:rPr lang="en-US" sz="1200" b="1" dirty="0">
-                <a:solidFill>
-                  <a:srgbClr val="FF2E88"/>
-                </a:solidFill>
-                <a:latin typeface="Trebuchet MS" pitchFamily="34" charset="0"/>
-                <a:ea typeface="Trebuchet MS" pitchFamily="34" charset="-122"/>
-                <a:cs typeface="Trebuchet MS" pitchFamily="34" charset="-120"/>
-              </a:rPr>
-              <a:t>Pipeline di Compilazione Deterministica</a:t>
-            </a:r>
-            <a:endParaRPr lang="en-US" sz="1200" dirty="0"/>
-          </a:p>
-        </p:txBody>
-      </p:sp>
-      <p:sp>
-        <p:nvSpPr>
-          <p:cNvPr id="5" name="Shape 3"/>
-          <p:cNvSpPr/>
-          <p:nvPr/>
-        </p:nvSpPr>
-        <p:spPr>
-          <a:xfrm>
-            <a:off x="3782933" y="2191868"/>
-            <a:ext cx="188626" cy="1091336"/>
+            <a:endParaRPr lang="en-US" sz="3800" dirty="0"/>
+          </a:p>
+        </p:txBody>
+      </p:sp>
+      <p:sp>
+        <p:nvSpPr>
+          <p:cNvPr id="4" name="Shape 2"/>
+          <p:cNvSpPr/>
+          <p:nvPr/>
+        </p:nvSpPr>
+        <p:spPr>
+          <a:xfrm>
+            <a:off x="1619914" y="1890486"/>
+            <a:ext cx="819554" cy="903514"/>
           </a:xfrm>
           <a:prstGeom prst="line">
             <a:avLst/>
@@ -10312,14 +10102,14 @@
       </p:sp>
       <p:sp>
         <p:nvSpPr>
-          <p:cNvPr id="6" name="Shape 4"/>
-          <p:cNvSpPr/>
-          <p:nvPr/>
-        </p:nvSpPr>
-        <p:spPr>
-          <a:xfrm>
-            <a:off x="4892234" y="3283204"/>
-            <a:ext cx="188626" cy="9144"/>
+          <p:cNvPr id="5" name="Shape 3"/>
+          <p:cNvSpPr/>
+          <p:nvPr/>
+        </p:nvSpPr>
+        <p:spPr>
+          <a:xfrm>
+            <a:off x="3652992" y="2794000"/>
+            <a:ext cx="819554" cy="9144"/>
           </a:xfrm>
           <a:prstGeom prst="line">
             <a:avLst/>
@@ -10336,14 +10126,14 @@
       </p:sp>
       <p:sp>
         <p:nvSpPr>
-          <p:cNvPr id="7" name="Shape 5"/>
-          <p:cNvSpPr/>
-          <p:nvPr/>
-        </p:nvSpPr>
-        <p:spPr>
-          <a:xfrm>
-            <a:off x="6001535" y="3283204"/>
-            <a:ext cx="188626" cy="9144"/>
+          <p:cNvPr id="6" name="Shape 4"/>
+          <p:cNvSpPr/>
+          <p:nvPr/>
+        </p:nvSpPr>
+        <p:spPr>
+          <a:xfrm>
+            <a:off x="5686070" y="2794000"/>
+            <a:ext cx="819554" cy="9144"/>
           </a:xfrm>
           <a:prstGeom prst="line">
             <a:avLst/>
@@ -10360,14 +10150,14 @@
       </p:sp>
       <p:sp>
         <p:nvSpPr>
-          <p:cNvPr id="8" name="Shape 6"/>
-          <p:cNvSpPr/>
-          <p:nvPr/>
-        </p:nvSpPr>
-        <p:spPr>
-          <a:xfrm>
-            <a:off x="7110835" y="3283204"/>
-            <a:ext cx="188626" cy="9144"/>
+          <p:cNvPr id="7" name="Shape 5"/>
+          <p:cNvSpPr/>
+          <p:nvPr/>
+        </p:nvSpPr>
+        <p:spPr>
+          <a:xfrm>
+            <a:off x="7719149" y="2794000"/>
+            <a:ext cx="819554" cy="9144"/>
           </a:xfrm>
           <a:prstGeom prst="line">
             <a:avLst/>
@@ -10384,14 +10174,14 @@
       </p:sp>
       <p:sp>
         <p:nvSpPr>
-          <p:cNvPr id="9" name="Shape 7"/>
-          <p:cNvSpPr/>
-          <p:nvPr/>
-        </p:nvSpPr>
-        <p:spPr>
-          <a:xfrm>
-            <a:off x="8220136" y="3283204"/>
-            <a:ext cx="188626" cy="9144"/>
+          <p:cNvPr id="8" name="Shape 6"/>
+          <p:cNvSpPr/>
+          <p:nvPr/>
+        </p:nvSpPr>
+        <p:spPr>
+          <a:xfrm>
+            <a:off x="9752227" y="2794000"/>
+            <a:ext cx="819554" cy="9144"/>
           </a:xfrm>
           <a:prstGeom prst="line">
             <a:avLst/>
@@ -10408,18 +10198,18 @@
       </p:sp>
       <p:sp>
         <p:nvSpPr>
-          <p:cNvPr id="10" name="Shape 8"/>
-          <p:cNvSpPr/>
-          <p:nvPr/>
-        </p:nvSpPr>
-        <p:spPr>
-          <a:xfrm>
-            <a:off x="2862258" y="2070608"/>
-            <a:ext cx="920675" cy="242519"/>
+          <p:cNvPr id="9" name="Shape 7"/>
+          <p:cNvSpPr/>
+          <p:nvPr/>
+        </p:nvSpPr>
+        <p:spPr>
+          <a:xfrm>
+            <a:off x="406390" y="1778000"/>
+            <a:ext cx="1213524" cy="224971"/>
           </a:xfrm>
           <a:prstGeom prst="roundRect">
             <a:avLst>
-              <a:gd name="adj" fmla="val 30163"/>
+              <a:gd name="adj" fmla="val 32516"/>
             </a:avLst>
           </a:prstGeom>
           <a:solidFill>
@@ -10435,14 +10225,14 @@
       </p:sp>
       <p:sp>
         <p:nvSpPr>
-          <p:cNvPr id="11" name="Text 9"/>
-          <p:cNvSpPr/>
-          <p:nvPr/>
-        </p:nvSpPr>
-        <p:spPr>
-          <a:xfrm>
-            <a:off x="2917122" y="2125472"/>
-            <a:ext cx="810947" cy="132791"/>
+          <p:cNvPr id="10" name="Text 8"/>
+          <p:cNvSpPr/>
+          <p:nvPr/>
+        </p:nvSpPr>
+        <p:spPr>
+          <a:xfrm>
+            <a:off x="461254" y="1832864"/>
+            <a:ext cx="1103796" cy="115243"/>
           </a:xfrm>
           <a:prstGeom prst="rect">
             <a:avLst/>
@@ -10474,18 +10264,18 @@
       </p:sp>
       <p:sp>
         <p:nvSpPr>
-          <p:cNvPr id="12" name="Shape 10"/>
-          <p:cNvSpPr/>
-          <p:nvPr/>
-        </p:nvSpPr>
-        <p:spPr>
-          <a:xfrm>
-            <a:off x="3971559" y="3161944"/>
-            <a:ext cx="920675" cy="242519"/>
+          <p:cNvPr id="11" name="Shape 9"/>
+          <p:cNvSpPr/>
+          <p:nvPr/>
+        </p:nvSpPr>
+        <p:spPr>
+          <a:xfrm>
+            <a:off x="2439468" y="2681514"/>
+            <a:ext cx="1213524" cy="224971"/>
           </a:xfrm>
           <a:prstGeom prst="roundRect">
             <a:avLst>
-              <a:gd name="adj" fmla="val 30163"/>
+              <a:gd name="adj" fmla="val 32516"/>
             </a:avLst>
           </a:prstGeom>
           <a:solidFill>
@@ -10501,14 +10291,14 @@
       </p:sp>
       <p:sp>
         <p:nvSpPr>
-          <p:cNvPr id="13" name="Text 11"/>
-          <p:cNvSpPr/>
-          <p:nvPr/>
-        </p:nvSpPr>
-        <p:spPr>
-          <a:xfrm>
-            <a:off x="4026423" y="3216808"/>
-            <a:ext cx="810947" cy="132791"/>
+          <p:cNvPr id="12" name="Text 10"/>
+          <p:cNvSpPr/>
+          <p:nvPr/>
+        </p:nvSpPr>
+        <p:spPr>
+          <a:xfrm>
+            <a:off x="2494332" y="2736378"/>
+            <a:ext cx="1103796" cy="115243"/>
           </a:xfrm>
           <a:prstGeom prst="rect">
             <a:avLst/>
@@ -10540,18 +10330,18 @@
       </p:sp>
       <p:sp>
         <p:nvSpPr>
-          <p:cNvPr id="14" name="Shape 12"/>
-          <p:cNvSpPr/>
-          <p:nvPr/>
-        </p:nvSpPr>
-        <p:spPr>
-          <a:xfrm>
-            <a:off x="5080860" y="3161944"/>
-            <a:ext cx="920675" cy="242519"/>
+          <p:cNvPr id="13" name="Shape 11"/>
+          <p:cNvSpPr/>
+          <p:nvPr/>
+        </p:nvSpPr>
+        <p:spPr>
+          <a:xfrm>
+            <a:off x="4472546" y="2681514"/>
+            <a:ext cx="1213524" cy="224971"/>
           </a:xfrm>
           <a:prstGeom prst="roundRect">
             <a:avLst>
-              <a:gd name="adj" fmla="val 30163"/>
+              <a:gd name="adj" fmla="val 32516"/>
             </a:avLst>
           </a:prstGeom>
           <a:solidFill>
@@ -10567,14 +10357,14 @@
       </p:sp>
       <p:sp>
         <p:nvSpPr>
-          <p:cNvPr id="15" name="Text 13"/>
-          <p:cNvSpPr/>
-          <p:nvPr/>
-        </p:nvSpPr>
-        <p:spPr>
-          <a:xfrm>
-            <a:off x="5135724" y="3216808"/>
-            <a:ext cx="810947" cy="132791"/>
+          <p:cNvPr id="14" name="Text 12"/>
+          <p:cNvSpPr/>
+          <p:nvPr/>
+        </p:nvSpPr>
+        <p:spPr>
+          <a:xfrm>
+            <a:off x="4527410" y="2736378"/>
+            <a:ext cx="1103796" cy="115243"/>
           </a:xfrm>
           <a:prstGeom prst="rect">
             <a:avLst/>
@@ -10598,7 +10388,7 @@
                 <a:ea typeface="Trebuchet MS" pitchFamily="34" charset="-122"/>
                 <a:cs typeface="Trebuchet MS" pitchFamily="34" charset="-120"/>
               </a:rPr>
-              <a:t>Design Lint…</a:t>
+              <a:t>Design Linter</a:t>
             </a:r>
             <a:endParaRPr lang="en-US" sz="1100" dirty="0"/>
           </a:p>
@@ -10606,18 +10396,18 @@
       </p:sp>
       <p:sp>
         <p:nvSpPr>
-          <p:cNvPr id="16" name="Shape 14"/>
-          <p:cNvSpPr/>
-          <p:nvPr/>
-        </p:nvSpPr>
-        <p:spPr>
-          <a:xfrm>
-            <a:off x="6190161" y="3161944"/>
-            <a:ext cx="920675" cy="242519"/>
+          <p:cNvPr id="15" name="Shape 13"/>
+          <p:cNvSpPr/>
+          <p:nvPr/>
+        </p:nvSpPr>
+        <p:spPr>
+          <a:xfrm>
+            <a:off x="6505625" y="2681514"/>
+            <a:ext cx="1213524" cy="224971"/>
           </a:xfrm>
           <a:prstGeom prst="roundRect">
             <a:avLst>
-              <a:gd name="adj" fmla="val 30163"/>
+              <a:gd name="adj" fmla="val 32516"/>
             </a:avLst>
           </a:prstGeom>
           <a:solidFill>
@@ -10633,14 +10423,14 @@
       </p:sp>
       <p:sp>
         <p:nvSpPr>
-          <p:cNvPr id="17" name="Text 15"/>
-          <p:cNvSpPr/>
-          <p:nvPr/>
-        </p:nvSpPr>
-        <p:spPr>
-          <a:xfrm>
-            <a:off x="6245025" y="3216808"/>
-            <a:ext cx="810947" cy="132791"/>
+          <p:cNvPr id="16" name="Text 14"/>
+          <p:cNvSpPr/>
+          <p:nvPr/>
+        </p:nvSpPr>
+        <p:spPr>
+          <a:xfrm>
+            <a:off x="6560489" y="2736378"/>
+            <a:ext cx="1103796" cy="115243"/>
           </a:xfrm>
           <a:prstGeom prst="rect">
             <a:avLst/>
@@ -10672,18 +10462,18 @@
       </p:sp>
       <p:sp>
         <p:nvSpPr>
-          <p:cNvPr id="18" name="Shape 16"/>
-          <p:cNvSpPr/>
-          <p:nvPr/>
-        </p:nvSpPr>
-        <p:spPr>
-          <a:xfrm>
-            <a:off x="7299461" y="3161944"/>
-            <a:ext cx="920675" cy="242519"/>
+          <p:cNvPr id="17" name="Shape 15"/>
+          <p:cNvSpPr/>
+          <p:nvPr/>
+        </p:nvSpPr>
+        <p:spPr>
+          <a:xfrm>
+            <a:off x="8538703" y="2681514"/>
+            <a:ext cx="1213524" cy="224971"/>
           </a:xfrm>
           <a:prstGeom prst="roundRect">
             <a:avLst>
-              <a:gd name="adj" fmla="val 30163"/>
+              <a:gd name="adj" fmla="val 32516"/>
             </a:avLst>
           </a:prstGeom>
           <a:solidFill>
@@ -10699,14 +10489,14 @@
       </p:sp>
       <p:sp>
         <p:nvSpPr>
-          <p:cNvPr id="19" name="Text 17"/>
-          <p:cNvSpPr/>
-          <p:nvPr/>
-        </p:nvSpPr>
-        <p:spPr>
-          <a:xfrm>
-            <a:off x="7354325" y="3216808"/>
-            <a:ext cx="810947" cy="132791"/>
+          <p:cNvPr id="18" name="Text 16"/>
+          <p:cNvSpPr/>
+          <p:nvPr/>
+        </p:nvSpPr>
+        <p:spPr>
+          <a:xfrm>
+            <a:off x="8593567" y="2736378"/>
+            <a:ext cx="1103796" cy="115243"/>
           </a:xfrm>
           <a:prstGeom prst="rect">
             <a:avLst/>
@@ -10730,7 +10520,7 @@
                 <a:ea typeface="Trebuchet MS" pitchFamily="34" charset="-122"/>
                 <a:cs typeface="Trebuchet MS" pitchFamily="34" charset="-120"/>
               </a:rPr>
-              <a:t>Layout Engi…</a:t>
+              <a:t>Layout Engine</a:t>
             </a:r>
             <a:endParaRPr lang="en-US" sz="1100" dirty="0"/>
           </a:p>
@@ -10738,18 +10528,18 @@
       </p:sp>
       <p:sp>
         <p:nvSpPr>
-          <p:cNvPr id="20" name="Shape 18"/>
-          <p:cNvSpPr/>
-          <p:nvPr/>
-        </p:nvSpPr>
-        <p:spPr>
-          <a:xfrm>
-            <a:off x="8408762" y="3161944"/>
-            <a:ext cx="920675" cy="242519"/>
+          <p:cNvPr id="19" name="Shape 17"/>
+          <p:cNvSpPr/>
+          <p:nvPr/>
+        </p:nvSpPr>
+        <p:spPr>
+          <a:xfrm>
+            <a:off x="10571781" y="2681514"/>
+            <a:ext cx="1213524" cy="224971"/>
           </a:xfrm>
           <a:prstGeom prst="roundRect">
             <a:avLst>
-              <a:gd name="adj" fmla="val 30163"/>
+              <a:gd name="adj" fmla="val 32516"/>
             </a:avLst>
           </a:prstGeom>
           <a:solidFill>
@@ -10765,14 +10555,14 @@
       </p:sp>
       <p:sp>
         <p:nvSpPr>
-          <p:cNvPr id="21" name="Text 19"/>
-          <p:cNvSpPr/>
-          <p:nvPr/>
-        </p:nvSpPr>
-        <p:spPr>
-          <a:xfrm>
-            <a:off x="8463626" y="3216808"/>
-            <a:ext cx="810947" cy="132791"/>
+          <p:cNvPr id="20" name="Text 18"/>
+          <p:cNvSpPr/>
+          <p:nvPr/>
+        </p:nvSpPr>
+        <p:spPr>
+          <a:xfrm>
+            <a:off x="10626645" y="2736378"/>
+            <a:ext cx="1103796" cy="115243"/>
           </a:xfrm>
           <a:prstGeom prst="rect">
             <a:avLst/>
@@ -10796,7 +10586,7 @@
                 <a:ea typeface="Trebuchet MS" pitchFamily="34" charset="-122"/>
                 <a:cs typeface="Trebuchet MS" pitchFamily="34" charset="-120"/>
               </a:rPr>
-              <a:t>Renderer Mu…</a:t>
+              <a:t>Renderer Multipli</a:t>
             </a:r>
             <a:endParaRPr lang="en-US" sz="1100" dirty="0"/>
           </a:p>
@@ -10804,18 +10594,18 @@
       </p:sp>
       <p:sp>
         <p:nvSpPr>
-          <p:cNvPr id="22" name="Shape 20"/>
-          <p:cNvSpPr/>
-          <p:nvPr/>
-        </p:nvSpPr>
-        <p:spPr>
-          <a:xfrm>
-            <a:off x="2862258" y="2434387"/>
-            <a:ext cx="920675" cy="242519"/>
+          <p:cNvPr id="21" name="Shape 19"/>
+          <p:cNvSpPr/>
+          <p:nvPr/>
+        </p:nvSpPr>
+        <p:spPr>
+          <a:xfrm>
+            <a:off x="406390" y="2079171"/>
+            <a:ext cx="1213524" cy="224971"/>
           </a:xfrm>
           <a:prstGeom prst="roundRect">
             <a:avLst>
-              <a:gd name="adj" fmla="val 30163"/>
+              <a:gd name="adj" fmla="val 32516"/>
             </a:avLst>
           </a:prstGeom>
           <a:solidFill>
@@ -10831,14 +10621,14 @@
       </p:sp>
       <p:sp>
         <p:nvSpPr>
-          <p:cNvPr id="23" name="Text 21"/>
-          <p:cNvSpPr/>
-          <p:nvPr/>
-        </p:nvSpPr>
-        <p:spPr>
-          <a:xfrm>
-            <a:off x="2917122" y="2489251"/>
-            <a:ext cx="810947" cy="132791"/>
+          <p:cNvPr id="22" name="Text 20"/>
+          <p:cNvSpPr/>
+          <p:nvPr/>
+        </p:nvSpPr>
+        <p:spPr>
+          <a:xfrm>
+            <a:off x="461254" y="2134035"/>
+            <a:ext cx="1103796" cy="115243"/>
           </a:xfrm>
           <a:prstGeom prst="rect">
             <a:avLst/>
@@ -10870,18 +10660,18 @@
       </p:sp>
       <p:sp>
         <p:nvSpPr>
-          <p:cNvPr id="24" name="Shape 22"/>
-          <p:cNvSpPr/>
-          <p:nvPr/>
-        </p:nvSpPr>
-        <p:spPr>
-          <a:xfrm>
-            <a:off x="2862258" y="2798166"/>
-            <a:ext cx="920675" cy="242519"/>
+          <p:cNvPr id="23" name="Shape 21"/>
+          <p:cNvSpPr/>
+          <p:nvPr/>
+        </p:nvSpPr>
+        <p:spPr>
+          <a:xfrm>
+            <a:off x="406390" y="2380343"/>
+            <a:ext cx="1213524" cy="224971"/>
           </a:xfrm>
           <a:prstGeom prst="roundRect">
             <a:avLst>
-              <a:gd name="adj" fmla="val 30163"/>
+              <a:gd name="adj" fmla="val 32516"/>
             </a:avLst>
           </a:prstGeom>
           <a:solidFill>
@@ -10897,14 +10687,14 @@
       </p:sp>
       <p:sp>
         <p:nvSpPr>
-          <p:cNvPr id="25" name="Text 23"/>
-          <p:cNvSpPr/>
-          <p:nvPr/>
-        </p:nvSpPr>
-        <p:spPr>
-          <a:xfrm>
-            <a:off x="2917122" y="2853030"/>
-            <a:ext cx="810947" cy="132791"/>
+          <p:cNvPr id="24" name="Text 22"/>
+          <p:cNvSpPr/>
+          <p:nvPr/>
+        </p:nvSpPr>
+        <p:spPr>
+          <a:xfrm>
+            <a:off x="461254" y="2435207"/>
+            <a:ext cx="1103796" cy="115243"/>
           </a:xfrm>
           <a:prstGeom prst="rect">
             <a:avLst/>
@@ -10936,18 +10726,18 @@
       </p:sp>
       <p:sp>
         <p:nvSpPr>
-          <p:cNvPr id="26" name="Shape 24"/>
-          <p:cNvSpPr/>
-          <p:nvPr/>
-        </p:nvSpPr>
-        <p:spPr>
-          <a:xfrm>
-            <a:off x="2862258" y="3161944"/>
-            <a:ext cx="920675" cy="242519"/>
+          <p:cNvPr id="25" name="Shape 23"/>
+          <p:cNvSpPr/>
+          <p:nvPr/>
+        </p:nvSpPr>
+        <p:spPr>
+          <a:xfrm>
+            <a:off x="406390" y="2681514"/>
+            <a:ext cx="1213524" cy="224971"/>
           </a:xfrm>
           <a:prstGeom prst="roundRect">
             <a:avLst>
-              <a:gd name="adj" fmla="val 30163"/>
+              <a:gd name="adj" fmla="val 32516"/>
             </a:avLst>
           </a:prstGeom>
           <a:solidFill>
@@ -10963,14 +10753,14 @@
       </p:sp>
       <p:sp>
         <p:nvSpPr>
-          <p:cNvPr id="27" name="Text 25"/>
-          <p:cNvSpPr/>
-          <p:nvPr/>
-        </p:nvSpPr>
-        <p:spPr>
-          <a:xfrm>
-            <a:off x="2917122" y="3216808"/>
-            <a:ext cx="810947" cy="132791"/>
+          <p:cNvPr id="26" name="Text 24"/>
+          <p:cNvSpPr/>
+          <p:nvPr/>
+        </p:nvSpPr>
+        <p:spPr>
+          <a:xfrm>
+            <a:off x="461254" y="2736378"/>
+            <a:ext cx="1103796" cy="115243"/>
           </a:xfrm>
           <a:prstGeom prst="rect">
             <a:avLst/>
@@ -11002,18 +10792,18 @@
       </p:sp>
       <p:sp>
         <p:nvSpPr>
-          <p:cNvPr id="28" name="Shape 26"/>
-          <p:cNvSpPr/>
-          <p:nvPr/>
-        </p:nvSpPr>
-        <p:spPr>
-          <a:xfrm>
-            <a:off x="2862258" y="3525723"/>
-            <a:ext cx="920675" cy="242519"/>
+          <p:cNvPr id="27" name="Shape 25"/>
+          <p:cNvSpPr/>
+          <p:nvPr/>
+        </p:nvSpPr>
+        <p:spPr>
+          <a:xfrm>
+            <a:off x="406390" y="2982686"/>
+            <a:ext cx="1213524" cy="224971"/>
           </a:xfrm>
           <a:prstGeom prst="roundRect">
             <a:avLst>
-              <a:gd name="adj" fmla="val 30163"/>
+              <a:gd name="adj" fmla="val 32516"/>
             </a:avLst>
           </a:prstGeom>
           <a:solidFill>
@@ -11029,14 +10819,14 @@
       </p:sp>
       <p:sp>
         <p:nvSpPr>
-          <p:cNvPr id="29" name="Text 27"/>
-          <p:cNvSpPr/>
-          <p:nvPr/>
-        </p:nvSpPr>
-        <p:spPr>
-          <a:xfrm>
-            <a:off x="2917122" y="3580587"/>
-            <a:ext cx="810947" cy="132791"/>
+          <p:cNvPr id="28" name="Text 26"/>
+          <p:cNvSpPr/>
+          <p:nvPr/>
+        </p:nvSpPr>
+        <p:spPr>
+          <a:xfrm>
+            <a:off x="461254" y="3037550"/>
+            <a:ext cx="1103796" cy="115243"/>
           </a:xfrm>
           <a:prstGeom prst="rect">
             <a:avLst/>
@@ -11068,18 +10858,18 @@
       </p:sp>
       <p:sp>
         <p:nvSpPr>
-          <p:cNvPr id="30" name="Shape 28"/>
-          <p:cNvSpPr/>
-          <p:nvPr/>
-        </p:nvSpPr>
-        <p:spPr>
-          <a:xfrm>
-            <a:off x="2862258" y="3889502"/>
-            <a:ext cx="920675" cy="242519"/>
+          <p:cNvPr id="29" name="Shape 27"/>
+          <p:cNvSpPr/>
+          <p:nvPr/>
+        </p:nvSpPr>
+        <p:spPr>
+          <a:xfrm>
+            <a:off x="406390" y="3283857"/>
+            <a:ext cx="1213524" cy="224971"/>
           </a:xfrm>
           <a:prstGeom prst="roundRect">
             <a:avLst>
-              <a:gd name="adj" fmla="val 30163"/>
+              <a:gd name="adj" fmla="val 32516"/>
             </a:avLst>
           </a:prstGeom>
           <a:solidFill>
@@ -11095,14 +10885,14 @@
       </p:sp>
       <p:sp>
         <p:nvSpPr>
-          <p:cNvPr id="31" name="Text 29"/>
-          <p:cNvSpPr/>
-          <p:nvPr/>
-        </p:nvSpPr>
-        <p:spPr>
-          <a:xfrm>
-            <a:off x="2917122" y="3944366"/>
-            <a:ext cx="810947" cy="132791"/>
+          <p:cNvPr id="30" name="Text 28"/>
+          <p:cNvSpPr/>
+          <p:nvPr/>
+        </p:nvSpPr>
+        <p:spPr>
+          <a:xfrm>
+            <a:off x="461254" y="3338721"/>
+            <a:ext cx="1103796" cy="115243"/>
           </a:xfrm>
           <a:prstGeom prst="rect">
             <a:avLst/>
@@ -11134,18 +10924,18 @@
       </p:sp>
       <p:sp>
         <p:nvSpPr>
-          <p:cNvPr id="32" name="Shape 30"/>
-          <p:cNvSpPr/>
-          <p:nvPr/>
-        </p:nvSpPr>
-        <p:spPr>
-          <a:xfrm>
-            <a:off x="2862258" y="4253281"/>
-            <a:ext cx="920675" cy="242519"/>
+          <p:cNvPr id="31" name="Shape 29"/>
+          <p:cNvSpPr/>
+          <p:nvPr/>
+        </p:nvSpPr>
+        <p:spPr>
+          <a:xfrm>
+            <a:off x="406390" y="3585029"/>
+            <a:ext cx="1213524" cy="224971"/>
           </a:xfrm>
           <a:prstGeom prst="roundRect">
             <a:avLst>
-              <a:gd name="adj" fmla="val 30163"/>
+              <a:gd name="adj" fmla="val 32516"/>
             </a:avLst>
           </a:prstGeom>
           <a:solidFill>
@@ -11161,14 +10951,14 @@
       </p:sp>
       <p:sp>
         <p:nvSpPr>
-          <p:cNvPr id="33" name="Text 31"/>
-          <p:cNvSpPr/>
-          <p:nvPr/>
-        </p:nvSpPr>
-        <p:spPr>
-          <a:xfrm>
-            <a:off x="2917122" y="4308145"/>
-            <a:ext cx="810947" cy="132791"/>
+          <p:cNvPr id="32" name="Text 30"/>
+          <p:cNvSpPr/>
+          <p:nvPr/>
+        </p:nvSpPr>
+        <p:spPr>
+          <a:xfrm>
+            <a:off x="461254" y="3639893"/>
+            <a:ext cx="1103796" cy="115243"/>
           </a:xfrm>
           <a:prstGeom prst="rect">
             <a:avLst/>
@@ -11200,13 +10990,13 @@
       </p:sp>
       <p:sp>
         <p:nvSpPr>
-          <p:cNvPr id="34" name="Shape 32"/>
-          <p:cNvSpPr/>
-          <p:nvPr/>
-        </p:nvSpPr>
-        <p:spPr>
-          <a:xfrm>
-            <a:off x="406390" y="4673600"/>
+          <p:cNvPr id="33" name="Shape 31"/>
+          <p:cNvSpPr/>
+          <p:nvPr/>
+        </p:nvSpPr>
+        <p:spPr>
+          <a:xfrm>
+            <a:off x="406390" y="3987800"/>
             <a:ext cx="11378916" cy="831850"/>
           </a:xfrm>
           <a:prstGeom prst="roundRect">
@@ -11227,13 +11017,13 @@
       </p:sp>
       <p:sp>
         <p:nvSpPr>
-          <p:cNvPr id="35" name="Text 33"/>
-          <p:cNvSpPr/>
-          <p:nvPr/>
-        </p:nvSpPr>
-        <p:spPr>
-          <a:xfrm>
-            <a:off x="543550" y="4746752"/>
+          <p:cNvPr id="34" name="Text 32"/>
+          <p:cNvSpPr/>
+          <p:nvPr/>
+        </p:nvSpPr>
+        <p:spPr>
+          <a:xfrm>
+            <a:off x="543550" y="4060952"/>
             <a:ext cx="11104596" cy="274320"/>
           </a:xfrm>
           <a:prstGeom prst="rect">
@@ -11266,13 +11056,13 @@
       </p:sp>
       <p:sp>
         <p:nvSpPr>
-          <p:cNvPr id="36" name="Text 34"/>
-          <p:cNvSpPr/>
-          <p:nvPr/>
-        </p:nvSpPr>
-        <p:spPr>
-          <a:xfrm>
-            <a:off x="543550" y="5066792"/>
+          <p:cNvPr id="35" name="Text 33"/>
+          <p:cNvSpPr/>
+          <p:nvPr/>
+        </p:nvSpPr>
+        <p:spPr>
+          <a:xfrm>
+            <a:off x="543550" y="4380992"/>
             <a:ext cx="11104596" cy="365506"/>
           </a:xfrm>
           <a:prstGeom prst="rect">
@@ -11305,7 +11095,7 @@
       </p:sp>
       <p:sp>
         <p:nvSpPr>
-          <p:cNvPr id="37" name="Text 35"/>
+          <p:cNvPr id="36" name="Text 34"/>
           <p:cNvSpPr/>
           <p:nvPr/>
         </p:nvSpPr>
@@ -11392,14 +11182,14 @@
           <a:ln/>
         </p:spPr>
         <p:txBody>
-          <a:bodyPr wrap="square" lIns="0" tIns="0" rIns="0" bIns="0" rtlCol="0" anchor="t"/>
+          <a:bodyPr wrap="square" lIns="0" tIns="0" rIns="0" bIns="0" rtlCol="0" anchor="ctr"/>
           <a:lstStyle/>
           <a:p>
             <a:pPr algn="l" indent="0" marL="0">
               <a:buNone/>
             </a:pPr>
             <a:r>
-              <a:rPr lang="en-US" sz="3300" b="1" dirty="0">
+              <a:rPr lang="en-US" sz="4600" b="1" dirty="0">
                 <a:solidFill>
                   <a:srgbClr val="FF2E88"/>
                 </a:solidFill>
@@ -11409,7 +11199,7 @@
               </a:rPr>
               <a:t>L'AST e il Design Intent</a:t>
             </a:r>
-            <a:endParaRPr lang="en-US" sz="3300" dirty="0"/>
+            <a:endParaRPr lang="en-US" sz="4600" dirty="0"/>
           </a:p>
         </p:txBody>
       </p:sp>
@@ -11431,14 +11221,14 @@
           <a:ln/>
         </p:spPr>
         <p:txBody>
-          <a:bodyPr wrap="square" lIns="0" tIns="0" rIns="0" bIns="0" rtlCol="0" anchor="t"/>
+          <a:bodyPr wrap="square" lIns="0" tIns="0" rIns="0" bIns="0" rtlCol="0" anchor="ctr"/>
           <a:lstStyle/>
           <a:p>
             <a:pPr algn="l" indent="0" marL="0">
               <a:buNone/>
             </a:pPr>
             <a:r>
-              <a:rPr lang="en-US" sz="2700" b="1" dirty="0">
+              <a:rPr lang="en-US" sz="3800" b="1" dirty="0">
                 <a:solidFill>
                   <a:srgbClr val="FFFFFF"/>
                 </a:solidFill>
@@ -11448,7 +11238,7 @@
               </a:rPr>
               <a:t>Rappresentazione intermedia del significato e della struttura</a:t>
             </a:r>
-            <a:endParaRPr lang="en-US" sz="2700" dirty="0"/>
+            <a:endParaRPr lang="en-US" sz="3800" dirty="0"/>
           </a:p>
         </p:txBody>
       </p:sp>
@@ -11509,8 +11299,8 @@
         </p:nvSpPr>
         <p:spPr>
           <a:xfrm>
-            <a:off x="634990" y="1887728"/>
-            <a:ext cx="5143360" cy="274320"/>
+            <a:off x="634990" y="1942592"/>
+            <a:ext cx="5143360" cy="320040"/>
           </a:xfrm>
           <a:prstGeom prst="rect">
             <a:avLst/>
@@ -11526,7 +11316,7 @@
               <a:buNone/>
             </a:pPr>
             <a:r>
-              <a:rPr lang="en-US" sz="1600" b="1" dirty="0">
+              <a:rPr lang="en-US" sz="2000" b="1" dirty="0">
                 <a:solidFill>
                   <a:srgbClr val="7B61FF"/>
                 </a:solidFill>
@@ -11536,7 +11326,7 @@
               </a:rPr>
               <a:t>AST: Abstract Syntax Tree</a:t>
             </a:r>
-            <a:endParaRPr lang="en-US" sz="1600" dirty="0"/>
+            <a:endParaRPr lang="en-US" sz="2000" dirty="0"/>
           </a:p>
         </p:txBody>
       </p:sp>
@@ -11565,7 +11355,7 @@
               <a:buNone/>
             </a:pPr>
             <a:r>
-              <a:rPr lang="en-US" sz="1300" dirty="0">
+              <a:rPr lang="en-US" sz="1800" dirty="0">
                 <a:solidFill>
                   <a:srgbClr val="FFFFFF"/>
                 </a:solidFill>
@@ -11575,7 +11365,7 @@
               </a:rPr>
               <a:t>Struttura dati intermedia ad albero che incapsula il contenuto, la gerarchia logica e i vincoli semantici di presentazione.</a:t>
             </a:r>
-            <a:endParaRPr lang="en-US" sz="1300" dirty="0"/>
+            <a:endParaRPr lang="en-US" sz="1800" dirty="0"/>
           </a:p>
         </p:txBody>
       </p:sp>
@@ -11900,8 +11690,8 @@
         </p:nvSpPr>
         <p:spPr>
           <a:xfrm>
-            <a:off x="6413345" y="1887728"/>
-            <a:ext cx="5143360" cy="274320"/>
+            <a:off x="6413345" y="1942592"/>
+            <a:ext cx="5143360" cy="320040"/>
           </a:xfrm>
           <a:prstGeom prst="rect">
             <a:avLst/>
@@ -11917,7 +11707,7 @@
               <a:buNone/>
             </a:pPr>
             <a:r>
-              <a:rPr lang="en-US" sz="1600" b="1" dirty="0">
+              <a:rPr lang="en-US" sz="2000" b="1" dirty="0">
                 <a:solidFill>
                   <a:srgbClr val="FF2E88"/>
                 </a:solidFill>
@@ -11927,7 +11717,7 @@
               </a:rPr>
               <a:t>Componenti Semantici Astratti</a:t>
             </a:r>
-            <a:endParaRPr lang="en-US" sz="1600" dirty="0"/>
+            <a:endParaRPr lang="en-US" sz="2000" dirty="0"/>
           </a:p>
         </p:txBody>
       </p:sp>
@@ -11956,7 +11746,7 @@
               <a:buNone/>
             </a:pPr>
             <a:r>
-              <a:rPr lang="en-US" sz="1300" dirty="0">
+              <a:rPr lang="en-US" sz="1800" dirty="0">
                 <a:solidFill>
                   <a:srgbClr val="FFFFFF"/>
                 </a:solidFill>
@@ -11966,7 +11756,7 @@
               </a:rPr>
               <a:t>• Struttura: Hero, Heading, Paragraph, Columns, Grid</a:t>
             </a:r>
-            <a:endParaRPr lang="en-US" sz="1300" dirty="0"/>
+            <a:endParaRPr lang="en-US" sz="1800" dirty="0"/>
           </a:p>
         </p:txBody>
       </p:sp>
@@ -11995,7 +11785,7 @@
               <a:buNone/>
             </a:pPr>
             <a:r>
-              <a:rPr lang="en-US" sz="1300" dirty="0">
+              <a:rPr lang="en-US" sz="1800" dirty="0">
                 <a:solidFill>
                   <a:srgbClr val="FFFFFF"/>
                 </a:solidFill>
@@ -12005,7 +11795,7 @@
               </a:rPr>
               <a:t>• Dati &amp; Logica: Metric, Card, Compare, Timeline</a:t>
             </a:r>
-            <a:endParaRPr lang="en-US" sz="1300" dirty="0"/>
+            <a:endParaRPr lang="en-US" sz="1800" dirty="0"/>
           </a:p>
         </p:txBody>
       </p:sp>
@@ -12034,7 +11824,7 @@
               <a:buNone/>
             </a:pPr>
             <a:r>
-              <a:rPr lang="en-US" sz="1300" dirty="0">
+              <a:rPr lang="en-US" sz="1800" dirty="0">
                 <a:solidFill>
                   <a:srgbClr val="FFFFFF"/>
                 </a:solidFill>
@@ -12044,7 +11834,7 @@
               </a:rPr>
               <a:t>• Visuali: Diagram, Sequence, Class, Chart, Table</a:t>
             </a:r>
-            <a:endParaRPr lang="en-US" sz="1300" dirty="0"/>
+            <a:endParaRPr lang="en-US" sz="1800" dirty="0"/>
           </a:p>
         </p:txBody>
       </p:sp>
@@ -12073,7 +11863,7 @@
               <a:buNone/>
             </a:pPr>
             <a:r>
-              <a:rPr lang="en-US" sz="1300" dirty="0">
+              <a:rPr lang="en-US" sz="1800" dirty="0">
                 <a:solidFill>
                   <a:srgbClr val="FFFFFF"/>
                 </a:solidFill>
@@ -12083,7 +11873,7 @@
               </a:rPr>
               <a:t>• Annotazioni: Badge, Callout, Math, Notes</a:t>
             </a:r>
-            <a:endParaRPr lang="en-US" sz="1300" dirty="0"/>
+            <a:endParaRPr lang="en-US" sz="1800" dirty="0"/>
           </a:p>
         </p:txBody>
       </p:sp>
@@ -12176,14 +11966,14 @@
           <a:ln/>
         </p:spPr>
         <p:txBody>
-          <a:bodyPr wrap="square" lIns="0" tIns="0" rIns="0" bIns="0" rtlCol="0" anchor="t"/>
+          <a:bodyPr wrap="square" lIns="0" tIns="0" rIns="0" bIns="0" rtlCol="0" anchor="ctr"/>
           <a:lstStyle/>
           <a:p>
             <a:pPr algn="l" indent="0" marL="0">
               <a:buNone/>
             </a:pPr>
             <a:r>
-              <a:rPr lang="en-US" sz="3300" b="1" dirty="0">
+              <a:rPr lang="en-US" sz="4600" b="1" dirty="0">
                 <a:solidFill>
                   <a:srgbClr val="FF2E88"/>
                 </a:solidFill>
@@ -12193,7 +11983,7 @@
               </a:rPr>
               <a:t>Esempio di Codice Native Yumia</a:t>
             </a:r>
-            <a:endParaRPr lang="en-US" sz="3300" dirty="0"/>
+            <a:endParaRPr lang="en-US" sz="4600" dirty="0"/>
           </a:p>
         </p:txBody>
       </p:sp>
@@ -12215,14 +12005,14 @@
           <a:ln/>
         </p:spPr>
         <p:txBody>
-          <a:bodyPr wrap="square" lIns="0" tIns="0" rIns="0" bIns="0" rtlCol="0" anchor="t"/>
+          <a:bodyPr wrap="square" lIns="0" tIns="0" rIns="0" bIns="0" rtlCol="0" anchor="ctr"/>
           <a:lstStyle/>
           <a:p>
             <a:pPr algn="l" indent="0" marL="0">
               <a:buNone/>
             </a:pPr>
             <a:r>
-              <a:rPr lang="en-US" sz="2700" b="1" dirty="0">
+              <a:rPr lang="en-US" sz="3800" b="1" dirty="0">
                 <a:solidFill>
                   <a:srgbClr val="FFFFFF"/>
                 </a:solidFill>
@@ -12232,7 +12022,7 @@
               </a:rPr>
               <a:t>Sintassi pulita, dichiarativa e basata su indentazione</a:t>
             </a:r>
-            <a:endParaRPr lang="en-US" sz="2700" dirty="0"/>
+            <a:endParaRPr lang="en-US" sz="3800" dirty="0"/>
           </a:p>
         </p:txBody>
       </p:sp>
@@ -12570,8 +12360,8 @@
         </p:nvSpPr>
         <p:spPr>
           <a:xfrm>
-            <a:off x="6973401" y="1887728"/>
-            <a:ext cx="4583304" cy="274320"/>
+            <a:off x="6973401" y="1942592"/>
+            <a:ext cx="4583304" cy="320040"/>
           </a:xfrm>
           <a:prstGeom prst="rect">
             <a:avLst/>
@@ -12587,7 +12377,7 @@
               <a:buNone/>
             </a:pPr>
             <a:r>
-              <a:rPr lang="en-US" sz="1600" b="1" dirty="0">
+              <a:rPr lang="en-US" sz="2000" b="1" dirty="0">
                 <a:solidFill>
                   <a:srgbClr val="FF2E88"/>
                 </a:solidFill>
@@ -12597,7 +12387,7 @@
               </a:rPr>
               <a:t>Caratteristiche del linguaggio</a:t>
             </a:r>
-            <a:endParaRPr lang="en-US" sz="1600" dirty="0"/>
+            <a:endParaRPr lang="en-US" sz="2000" dirty="0"/>
           </a:p>
         </p:txBody>
       </p:sp>
@@ -12626,7 +12416,7 @@
               <a:buNone/>
             </a:pPr>
             <a:r>
-              <a:rPr lang="en-US" sz="1300" dirty="0">
+              <a:rPr lang="en-US" sz="1800" dirty="0">
                 <a:solidFill>
                   <a:srgbClr val="FFFFFF"/>
                 </a:solidFill>
@@ -12636,7 +12426,7 @@
               </a:rPr>
               <a:t>• Struttura gerarchica pulita basata sull'indentazione</a:t>
             </a:r>
-            <a:endParaRPr lang="en-US" sz="1300" dirty="0"/>
+            <a:endParaRPr lang="en-US" sz="1800" dirty="0"/>
           </a:p>
         </p:txBody>
       </p:sp>
@@ -12665,7 +12455,7 @@
               <a:buNone/>
             </a:pPr>
             <a:r>
-              <a:rPr lang="en-US" sz="1300" dirty="0">
+              <a:rPr lang="en-US" sz="1800" dirty="0">
                 <a:solidFill>
                   <a:srgbClr val="FFFFFF"/>
                 </a:solidFill>
@@ -12675,7 +12465,7 @@
               </a:rPr>
               <a:t>• Componenti semantici senza CSS a basso livello</a:t>
             </a:r>
-            <a:endParaRPr lang="en-US" sz="1300" dirty="0"/>
+            <a:endParaRPr lang="en-US" sz="1800" dirty="0"/>
           </a:p>
         </p:txBody>
       </p:sp>
@@ -12704,7 +12494,7 @@
               <a:buNone/>
             </a:pPr>
             <a:r>
-              <a:rPr lang="en-US" sz="1300" dirty="0">
+              <a:rPr lang="en-US" sz="1800" dirty="0">
                 <a:solidFill>
                   <a:srgbClr val="FFFFFF"/>
                 </a:solidFill>
@@ -12714,7 +12504,7 @@
               </a:rPr>
               <a:t>• Nessun tag HTML di chiusura o sintassi verbosa</a:t>
             </a:r>
-            <a:endParaRPr lang="en-US" sz="1300" dirty="0"/>
+            <a:endParaRPr lang="en-US" sz="1800" dirty="0"/>
           </a:p>
         </p:txBody>
       </p:sp>
@@ -12743,7 +12533,7 @@
               <a:buNone/>
             </a:pPr>
             <a:r>
-              <a:rPr lang="en-US" sz="1300" dirty="0">
+              <a:rPr lang="en-US" sz="1800" dirty="0">
                 <a:solidFill>
                   <a:srgbClr val="FFFFFF"/>
                 </a:solidFill>
@@ -12753,7 +12543,7 @@
               </a:rPr>
               <a:t>• Perfettamente leggibile e modificabile in qualsiasi editor</a:t>
             </a:r>
-            <a:endParaRPr lang="en-US" sz="1300" dirty="0"/>
+            <a:endParaRPr lang="en-US" sz="1800" dirty="0"/>
           </a:p>
         </p:txBody>
       </p:sp>
@@ -12846,14 +12636,14 @@
           <a:ln/>
         </p:spPr>
         <p:txBody>
-          <a:bodyPr wrap="square" lIns="0" tIns="0" rIns="0" bIns="0" rtlCol="0" anchor="t"/>
+          <a:bodyPr wrap="square" lIns="0" tIns="0" rIns="0" bIns="0" rtlCol="0" anchor="ctr"/>
           <a:lstStyle/>
           <a:p>
             <a:pPr algn="l" indent="0" marL="0">
               <a:buNone/>
             </a:pPr>
             <a:r>
-              <a:rPr lang="en-US" sz="3300" b="1" dirty="0">
+              <a:rPr lang="en-US" sz="4600" b="1" dirty="0">
                 <a:solidFill>
                   <a:srgbClr val="FF2E88"/>
                 </a:solidFill>
@@ -12863,7 +12653,7 @@
               </a:rPr>
               <a:t>I Tre Output Principali</a:t>
             </a:r>
-            <a:endParaRPr lang="en-US" sz="3300" dirty="0"/>
+            <a:endParaRPr lang="en-US" sz="4600" dirty="0"/>
           </a:p>
         </p:txBody>
       </p:sp>
@@ -12885,14 +12675,14 @@
           <a:ln/>
         </p:spPr>
         <p:txBody>
-          <a:bodyPr wrap="square" lIns="0" tIns="0" rIns="0" bIns="0" rtlCol="0" anchor="t"/>
+          <a:bodyPr wrap="square" lIns="0" tIns="0" rIns="0" bIns="0" rtlCol="0" anchor="ctr"/>
           <a:lstStyle/>
           <a:p>
             <a:pPr algn="l" indent="0" marL="0">
               <a:buNone/>
             </a:pPr>
             <a:r>
-              <a:rPr lang="en-US" sz="2700" b="1" dirty="0">
+              <a:rPr lang="en-US" sz="3800" b="1" dirty="0">
                 <a:solidFill>
                   <a:srgbClr val="FFFFFF"/>
                 </a:solidFill>
@@ -12902,7 +12692,7 @@
               </a:rPr>
               <a:t>Generazione nativa e specializzata per ogni ecosistema</a:t>
             </a:r>
-            <a:endParaRPr lang="en-US" sz="2700" dirty="0"/>
+            <a:endParaRPr lang="en-US" sz="3800" dirty="0"/>
           </a:p>
         </p:txBody>
       </p:sp>
@@ -12963,8 +12753,8 @@
         </p:nvSpPr>
         <p:spPr>
           <a:xfrm>
-            <a:off x="634990" y="1887728"/>
-            <a:ext cx="3217241" cy="274320"/>
+            <a:off x="634990" y="1942592"/>
+            <a:ext cx="3217241" cy="320040"/>
           </a:xfrm>
           <a:prstGeom prst="rect">
             <a:avLst/>
@@ -12980,7 +12770,7 @@
               <a:buNone/>
             </a:pPr>
             <a:r>
-              <a:rPr lang="en-US" sz="1600" b="1" dirty="0">
+              <a:rPr lang="en-US" sz="2000" b="1" dirty="0">
                 <a:solidFill>
                   <a:srgbClr val="FF2E88"/>
                 </a:solidFill>
@@ -12990,7 +12780,7 @@
               </a:rPr>
               <a:t>HtmlRenderer</a:t>
             </a:r>
-            <a:endParaRPr lang="en-US" sz="1600" dirty="0"/>
+            <a:endParaRPr lang="en-US" sz="2000" dirty="0"/>
           </a:p>
         </p:txBody>
       </p:sp>
@@ -13019,7 +12809,7 @@
               <a:buNone/>
             </a:pPr>
             <a:r>
-              <a:rPr lang="en-US" sz="1300" dirty="0">
+              <a:rPr lang="en-US" sz="1800" dirty="0">
                 <a:solidFill>
                   <a:srgbClr val="FFFFFF"/>
                 </a:solidFill>
@@ -13029,7 +12819,7 @@
               </a:rPr>
               <a:t>• Presentazione web interattiva SPA</a:t>
             </a:r>
-            <a:endParaRPr lang="en-US" sz="1300" dirty="0"/>
+            <a:endParaRPr lang="en-US" sz="1800" dirty="0"/>
           </a:p>
         </p:txBody>
       </p:sp>
@@ -13058,7 +12848,7 @@
               <a:buNone/>
             </a:pPr>
             <a:r>
-              <a:rPr lang="en-US" sz="1300" dirty="0">
+              <a:rPr lang="en-US" sz="1800" dirty="0">
                 <a:solidFill>
                   <a:srgbClr val="FFFFFF"/>
                 </a:solidFill>
@@ -13068,7 +12858,7 @@
               </a:rPr>
               <a:t>• Navigazione da tastiera e fullscreen</a:t>
             </a:r>
-            <a:endParaRPr lang="en-US" sz="1300" dirty="0"/>
+            <a:endParaRPr lang="en-US" sz="1800" dirty="0"/>
           </a:p>
         </p:txBody>
       </p:sp>
@@ -13097,7 +12887,7 @@
               <a:buNone/>
             </a:pPr>
             <a:r>
-              <a:rPr lang="en-US" sz="1300" dirty="0">
+              <a:rPr lang="en-US" sz="1800" dirty="0">
                 <a:solidFill>
                   <a:srgbClr val="FFFFFF"/>
                 </a:solidFill>
@@ -13107,7 +12897,7 @@
               </a:rPr>
               <a:t>• Modalità Speaker View con note</a:t>
             </a:r>
-            <a:endParaRPr lang="en-US" sz="1300" dirty="0"/>
+            <a:endParaRPr lang="en-US" sz="1800" dirty="0"/>
           </a:p>
         </p:txBody>
       </p:sp>
@@ -13136,7 +12926,7 @@
               <a:buNone/>
             </a:pPr>
             <a:r>
-              <a:rPr lang="en-US" sz="1300" dirty="0">
+              <a:rPr lang="en-US" sz="1800" dirty="0">
                 <a:solidFill>
                   <a:srgbClr val="FFFFFF"/>
                 </a:solidFill>
@@ -13146,7 +12936,7 @@
               </a:rPr>
               <a:t>• Inspector visuale in tempo reale</a:t>
             </a:r>
-            <a:endParaRPr lang="en-US" sz="1300" dirty="0"/>
+            <a:endParaRPr lang="en-US" sz="1800" dirty="0"/>
           </a:p>
         </p:txBody>
       </p:sp>
@@ -13207,8 +12997,8 @@
         </p:nvSpPr>
         <p:spPr>
           <a:xfrm>
-            <a:off x="4487227" y="1887728"/>
-            <a:ext cx="3217241" cy="274320"/>
+            <a:off x="4487227" y="1942592"/>
+            <a:ext cx="3217241" cy="320040"/>
           </a:xfrm>
           <a:prstGeom prst="rect">
             <a:avLst/>
@@ -13224,7 +13014,7 @@
               <a:buNone/>
             </a:pPr>
             <a:r>
-              <a:rPr lang="en-US" sz="1600" b="1" dirty="0">
+              <a:rPr lang="en-US" sz="2000" b="1" dirty="0">
                 <a:solidFill>
                   <a:srgbClr val="7B61FF"/>
                 </a:solidFill>
@@ -13234,7 +13024,7 @@
               </a:rPr>
               <a:t>PptxRenderer</a:t>
             </a:r>
-            <a:endParaRPr lang="en-US" sz="1600" dirty="0"/>
+            <a:endParaRPr lang="en-US" sz="2000" dirty="0"/>
           </a:p>
         </p:txBody>
       </p:sp>
@@ -13263,7 +13053,7 @@
               <a:buNone/>
             </a:pPr>
             <a:r>
-              <a:rPr lang="en-US" sz="1300" dirty="0">
+              <a:rPr lang="en-US" sz="1800" dirty="0">
                 <a:solidFill>
                   <a:srgbClr val="FFFFFF"/>
                 </a:solidFill>
@@ -13273,7 +13063,7 @@
               </a:rPr>
               <a:t>• Forme OpenXML native e testo modificabile</a:t>
             </a:r>
-            <a:endParaRPr lang="en-US" sz="1300" dirty="0"/>
+            <a:endParaRPr lang="en-US" sz="1800" dirty="0"/>
           </a:p>
         </p:txBody>
       </p:sp>
@@ -13302,7 +13092,7 @@
               <a:buNone/>
             </a:pPr>
             <a:r>
-              <a:rPr lang="en-US" sz="1300" dirty="0">
+              <a:rPr lang="en-US" sz="1800" dirty="0">
                 <a:solidFill>
                   <a:srgbClr val="FFFFFF"/>
                 </a:solidFill>
@@ -13312,7 +13102,7 @@
               </a:rPr>
               <a:t>• Tabelle, card e grafici nativi Office</a:t>
             </a:r>
-            <a:endParaRPr lang="en-US" sz="1300" dirty="0"/>
+            <a:endParaRPr lang="en-US" sz="1800" dirty="0"/>
           </a:p>
         </p:txBody>
       </p:sp>
@@ -13341,7 +13131,7 @@
               <a:buNone/>
             </a:pPr>
             <a:r>
-              <a:rPr lang="en-US" sz="1300" dirty="0">
+              <a:rPr lang="en-US" sz="1800" dirty="0">
                 <a:solidFill>
                   <a:srgbClr val="FFFFFF"/>
                 </a:solidFill>
@@ -13351,7 +13141,7 @@
               </a:rPr>
               <a:t>• Zero screenshot o immagini statiche</a:t>
             </a:r>
-            <a:endParaRPr lang="en-US" sz="1300" dirty="0"/>
+            <a:endParaRPr lang="en-US" sz="1800" dirty="0"/>
           </a:p>
         </p:txBody>
       </p:sp>
@@ -13380,7 +13170,7 @@
               <a:buNone/>
             </a:pPr>
             <a:r>
-              <a:rPr lang="en-US" sz="1300" dirty="0">
+              <a:rPr lang="en-US" sz="1800" dirty="0">
                 <a:solidFill>
                   <a:srgbClr val="FFFFFF"/>
                 </a:solidFill>
@@ -13390,7 +13180,7 @@
               </a:rPr>
               <a:t>• Modificabile su PowerPoint / Keynote</a:t>
             </a:r>
-            <a:endParaRPr lang="en-US" sz="1300" dirty="0"/>
+            <a:endParaRPr lang="en-US" sz="1800" dirty="0"/>
           </a:p>
         </p:txBody>
       </p:sp>
@@ -13451,8 +13241,8 @@
         </p:nvSpPr>
         <p:spPr>
           <a:xfrm>
-            <a:off x="8339464" y="1887728"/>
-            <a:ext cx="3217241" cy="274320"/>
+            <a:off x="8339464" y="1942592"/>
+            <a:ext cx="3217241" cy="320040"/>
           </a:xfrm>
           <a:prstGeom prst="rect">
             <a:avLst/>
@@ -13468,7 +13258,7 @@
               <a:buNone/>
             </a:pPr>
             <a:r>
-              <a:rPr lang="en-US" sz="1600" b="1" dirty="0">
+              <a:rPr lang="en-US" sz="2000" b="1" dirty="0">
                 <a:solidFill>
                   <a:srgbClr val="00FF9F"/>
                 </a:solidFill>
@@ -13478,7 +13268,7 @@
               </a:rPr>
               <a:t>PdfRenderer</a:t>
             </a:r>
-            <a:endParaRPr lang="en-US" sz="1600" dirty="0"/>
+            <a:endParaRPr lang="en-US" sz="2000" dirty="0"/>
           </a:p>
         </p:txBody>
       </p:sp>
@@ -13507,7 +13297,7 @@
               <a:buNone/>
             </a:pPr>
             <a:r>
-              <a:rPr lang="en-US" sz="1300" dirty="0">
+              <a:rPr lang="en-US" sz="1800" dirty="0">
                 <a:solidFill>
                   <a:srgbClr val="FFFFFF"/>
                 </a:solidFill>
@@ -13517,7 +13307,7 @@
               </a:rPr>
               <a:t>• Rendering vettoriale ad alta definizione</a:t>
             </a:r>
-            <a:endParaRPr lang="en-US" sz="1300" dirty="0"/>
+            <a:endParaRPr lang="en-US" sz="1800" dirty="0"/>
           </a:p>
         </p:txBody>
       </p:sp>
@@ -13546,7 +13336,7 @@
               <a:buNone/>
             </a:pPr>
             <a:r>
-              <a:rPr lang="en-US" sz="1300" dirty="0">
+              <a:rPr lang="en-US" sz="1800" dirty="0">
                 <a:solidFill>
                   <a:srgbClr val="FFFFFF"/>
                 </a:solidFill>
@@ -13556,7 +13346,7 @@
               </a:rPr>
               <a:t>• Layout e tipografia rigorosamente fissati</a:t>
             </a:r>
-            <a:endParaRPr lang="en-US" sz="1300" dirty="0"/>
+            <a:endParaRPr lang="en-US" sz="1800" dirty="0"/>
           </a:p>
         </p:txBody>
       </p:sp>
@@ -13585,7 +13375,7 @@
               <a:buNone/>
             </a:pPr>
             <a:r>
-              <a:rPr lang="en-US" sz="1300" dirty="0">
+              <a:rPr lang="en-US" sz="1800" dirty="0">
                 <a:solidFill>
                   <a:srgbClr val="FFFFFF"/>
                 </a:solidFill>
@@ -13595,7 +13385,7 @@
               </a:rPr>
               <a:t>• Ideale per dispense, esami e stampa</a:t>
             </a:r>
-            <a:endParaRPr lang="en-US" sz="1300" dirty="0"/>
+            <a:endParaRPr lang="en-US" sz="1800" dirty="0"/>
           </a:p>
         </p:txBody>
       </p:sp>
@@ -13624,7 +13414,7 @@
               <a:buNone/>
             </a:pPr>
             <a:r>
-              <a:rPr lang="en-US" sz="1300" dirty="0">
+              <a:rPr lang="en-US" sz="1800" dirty="0">
                 <a:solidFill>
                   <a:srgbClr val="FFFFFF"/>
                 </a:solidFill>
@@ -13634,7 +13424,7 @@
               </a:rPr>
               <a:t>• Dimensioni del file ottimizzate</a:t>
             </a:r>
-            <a:endParaRPr lang="en-US" sz="1300" dirty="0"/>
+            <a:endParaRPr lang="en-US" sz="1800" dirty="0"/>
           </a:p>
         </p:txBody>
       </p:sp>
@@ -13727,14 +13517,14 @@
           <a:ln/>
         </p:spPr>
         <p:txBody>
-          <a:bodyPr wrap="square" lIns="0" tIns="0" rIns="0" bIns="0" rtlCol="0" anchor="t"/>
+          <a:bodyPr wrap="square" lIns="0" tIns="0" rIns="0" bIns="0" rtlCol="0" anchor="ctr"/>
           <a:lstStyle/>
           <a:p>
             <a:pPr algn="l" indent="0" marL="0">
               <a:buNone/>
             </a:pPr>
             <a:r>
-              <a:rPr lang="en-US" sz="3300" b="1" dirty="0">
+              <a:rPr lang="en-US" sz="4600" b="1" dirty="0">
                 <a:solidFill>
                   <a:srgbClr val="FF2E88"/>
                 </a:solidFill>
@@ -13744,7 +13534,7 @@
               </a:rPr>
               <a:t>Design Linter e Qualità Visiva</a:t>
             </a:r>
-            <a:endParaRPr lang="en-US" sz="3300" dirty="0"/>
+            <a:endParaRPr lang="en-US" sz="4600" dirty="0"/>
           </a:p>
         </p:txBody>
       </p:sp>
@@ -13766,14 +13556,14 @@
           <a:ln/>
         </p:spPr>
         <p:txBody>
-          <a:bodyPr wrap="square" lIns="0" tIns="0" rIns="0" bIns="0" rtlCol="0" anchor="t"/>
+          <a:bodyPr wrap="square" lIns="0" tIns="0" rIns="0" bIns="0" rtlCol="0" anchor="ctr"/>
           <a:lstStyle/>
           <a:p>
             <a:pPr algn="l" indent="0" marL="0">
               <a:buNone/>
             </a:pPr>
             <a:r>
-              <a:rPr lang="en-US" sz="2700" b="1" dirty="0">
+              <a:rPr lang="en-US" sz="3800" b="1" dirty="0">
                 <a:solidFill>
                   <a:srgbClr val="FFFFFF"/>
                 </a:solidFill>
@@ -13783,7 +13573,7 @@
               </a:rPr>
               <a:t>Static Analysis per la leggibilità e l'accessibilità</a:t>
             </a:r>
-            <a:endParaRPr lang="en-US" sz="2700" dirty="0"/>
+            <a:endParaRPr lang="en-US" sz="3800" dirty="0"/>
           </a:p>
         </p:txBody>
       </p:sp>
@@ -13844,8 +13634,8 @@
         </p:nvSpPr>
         <p:spPr>
           <a:xfrm>
-            <a:off x="634990" y="1887728"/>
-            <a:ext cx="5143360" cy="274320"/>
+            <a:off x="634990" y="1942592"/>
+            <a:ext cx="5143360" cy="320040"/>
           </a:xfrm>
           <a:prstGeom prst="rect">
             <a:avLst/>
@@ -13861,7 +13651,7 @@
               <a:buNone/>
             </a:pPr>
             <a:r>
-              <a:rPr lang="en-US" sz="1600" b="1" dirty="0">
+              <a:rPr lang="en-US" sz="2000" b="1" dirty="0">
                 <a:solidFill>
                   <a:srgbClr val="FF2E88"/>
                 </a:solidFill>
@@ -13871,7 +13661,7 @@
               </a:rPr>
               <a:t>Controlli Automatici di Design</a:t>
             </a:r>
-            <a:endParaRPr lang="en-US" sz="1600" dirty="0"/>
+            <a:endParaRPr lang="en-US" sz="2000" dirty="0"/>
           </a:p>
         </p:txBody>
       </p:sp>
@@ -13900,7 +13690,7 @@
               <a:buNone/>
             </a:pPr>
             <a:r>
-              <a:rPr lang="en-US" sz="1300" dirty="0">
+              <a:rPr lang="en-US" sz="1800" dirty="0">
                 <a:solidFill>
                   <a:srgbClr val="FFFFFF"/>
                 </a:solidFill>
@@ -13910,7 +13700,7 @@
               </a:rPr>
               <a:t>• Densità informativa e carico cognitivo</a:t>
             </a:r>
-            <a:endParaRPr lang="en-US" sz="1300" dirty="0"/>
+            <a:endParaRPr lang="en-US" sz="1800" dirty="0"/>
           </a:p>
         </p:txBody>
       </p:sp>
@@ -13939,7 +13729,7 @@
               <a:buNone/>
             </a:pPr>
             <a:r>
-              <a:rPr lang="en-US" sz="1300" dirty="0">
+              <a:rPr lang="en-US" sz="1800" dirty="0">
                 <a:solidFill>
                   <a:srgbClr val="FFFFFF"/>
                 </a:solidFill>
@@ -13949,7 +13739,7 @@
               </a:rPr>
               <a:t>• Verifica slide vuote o incomplete</a:t>
             </a:r>
-            <a:endParaRPr lang="en-US" sz="1300" dirty="0"/>
+            <a:endParaRPr lang="en-US" sz="1800" dirty="0"/>
           </a:p>
         </p:txBody>
       </p:sp>
@@ -13978,7 +13768,7 @@
               <a:buNone/>
             </a:pPr>
             <a:r>
-              <a:rPr lang="en-US" sz="1300" dirty="0">
+              <a:rPr lang="en-US" sz="1800" dirty="0">
                 <a:solidFill>
                   <a:srgbClr val="FFFFFF"/>
                 </a:solidFill>
@@ -13988,7 +13778,7 @@
               </a:rPr>
               <a:t>• Contrasto testo/sfondo secondo standard WCAG</a:t>
             </a:r>
-            <a:endParaRPr lang="en-US" sz="1300" dirty="0"/>
+            <a:endParaRPr lang="en-US" sz="1800" dirty="0"/>
           </a:p>
         </p:txBody>
       </p:sp>
@@ -14017,7 +13807,7 @@
               <a:buNone/>
             </a:pPr>
             <a:r>
-              <a:rPr lang="en-US" sz="1300" dirty="0">
+              <a:rPr lang="en-US" sz="1800" dirty="0">
                 <a:solidFill>
                   <a:srgbClr val="FFFFFF"/>
                 </a:solidFill>
@@ -14027,7 +13817,7 @@
               </a:rPr>
               <a:t>• Rispetto della Safe Area e margini</a:t>
             </a:r>
-            <a:endParaRPr lang="en-US" sz="1300" dirty="0"/>
+            <a:endParaRPr lang="en-US" sz="1800" dirty="0"/>
           </a:p>
         </p:txBody>
       </p:sp>
@@ -14056,7 +13846,7 @@
               <a:buNone/>
             </a:pPr>
             <a:r>
-              <a:rPr lang="en-US" sz="1300" dirty="0">
+              <a:rPr lang="en-US" sz="1800" dirty="0">
                 <a:solidFill>
                   <a:srgbClr val="FFFFFF"/>
                 </a:solidFill>
@@ -14066,7 +13856,7 @@
               </a:rPr>
               <a:t>• Calcolo del Visual Score da 0 a 100</a:t>
             </a:r>
-            <a:endParaRPr lang="en-US" sz="1300" dirty="0"/>
+            <a:endParaRPr lang="en-US" sz="1800" dirty="0"/>
           </a:p>
         </p:txBody>
       </p:sp>
@@ -14127,8 +13917,8 @@
         </p:nvSpPr>
         <p:spPr>
           <a:xfrm>
-            <a:off x="6413345" y="1887728"/>
-            <a:ext cx="5143360" cy="274320"/>
+            <a:off x="6413345" y="1942592"/>
+            <a:ext cx="5143360" cy="320040"/>
           </a:xfrm>
           <a:prstGeom prst="rect">
             <a:avLst/>
@@ -14144,7 +13934,7 @@
               <a:buNone/>
             </a:pPr>
             <a:r>
-              <a:rPr lang="en-US" sz="1600" b="1" dirty="0">
+              <a:rPr lang="en-US" sz="2000" b="1" dirty="0">
                 <a:solidFill>
                   <a:srgbClr val="FFE600"/>
                 </a:solidFill>
@@ -14154,7 +13944,7 @@
               </a:rPr>
               <a:t>Esempio di Diagnostica CLI</a:t>
             </a:r>
-            <a:endParaRPr lang="en-US" sz="1600" dirty="0"/>
+            <a:endParaRPr lang="en-US" sz="2000" dirty="0"/>
           </a:p>
         </p:txBody>
       </p:sp>

--- a/presentation.pptx
+++ b/presentation.pptx
@@ -2152,14 +2152,41 @@
       </p:grpSpPr>
       <p:sp>
         <p:nvSpPr>
-          <p:cNvPr id="2" name="Text 0"/>
-          <p:cNvSpPr/>
-          <p:nvPr/>
-        </p:nvSpPr>
-        <p:spPr>
-          <a:xfrm>
-            <a:off x="406390" y="406400"/>
-            <a:ext cx="11378916" cy="320040"/>
+          <p:cNvPr id="2" name="Shape 0"/>
+          <p:cNvSpPr/>
+          <p:nvPr/>
+        </p:nvSpPr>
+        <p:spPr>
+          <a:xfrm>
+            <a:off x="5067148" y="479552"/>
+            <a:ext cx="2057400" cy="237744"/>
+          </a:xfrm>
+          <a:prstGeom prst="roundRect">
+            <a:avLst>
+              <a:gd name="adj" fmla="val 61538"/>
+            </a:avLst>
+          </a:prstGeom>
+          <a:solidFill>
+            <a:srgbClr val="151522"/>
+          </a:solidFill>
+          <a:ln w="19050">
+            <a:solidFill>
+              <a:srgbClr val="FF2E88"/>
+            </a:solidFill>
+            <a:prstDash val="solid"/>
+          </a:ln>
+        </p:spPr>
+      </p:sp>
+      <p:sp>
+        <p:nvSpPr>
+          <p:cNvPr id="3" name="Text 1"/>
+          <p:cNvSpPr/>
+          <p:nvPr/>
+        </p:nvSpPr>
+        <p:spPr>
+          <a:xfrm>
+            <a:off x="5067148" y="479552"/>
+            <a:ext cx="2057400" cy="237744"/>
           </a:xfrm>
           <a:prstGeom prst="rect">
             <a:avLst/>
@@ -2175,7 +2202,7 @@
               <a:buNone/>
             </a:pPr>
             <a:r>
-              <a:rPr lang="en-US" sz="1100" b="1" dirty="0">
+              <a:rPr lang="en-US" sz="900" b="1" dirty="0">
                 <a:solidFill>
                   <a:srgbClr val="FF2E88"/>
                 </a:solidFill>
@@ -2183,38 +2210,38 @@
                 <a:ea typeface="Trebuchet MS" pitchFamily="34" charset="-122"/>
                 <a:cs typeface="Trebuchet MS" pitchFamily="34" charset="-120"/>
               </a:rPr>
-              <a:t>[CLASSE / CORSO] • [DATA DELLA PRESENTAZIONE]</a:t>
-            </a:r>
-            <a:endParaRPr lang="en-US" sz="1100" dirty="0"/>
-          </a:p>
-        </p:txBody>
-      </p:sp>
-      <p:sp>
-        <p:nvSpPr>
-          <p:cNvPr id="3" name="Text 1"/>
-          <p:cNvSpPr/>
-          <p:nvPr/>
-        </p:nvSpPr>
-        <p:spPr>
-          <a:xfrm>
-            <a:off x="406390" y="790448"/>
-            <a:ext cx="11378916" cy="640080"/>
-          </a:xfrm>
-          <a:prstGeom prst="rect">
-            <a:avLst/>
-          </a:prstGeom>
-          <a:noFill/>
-          <a:ln/>
-        </p:spPr>
-        <p:txBody>
-          <a:bodyPr wrap="square" rtlCol="0" anchor="ctr"/>
+              <a:t>DESIGN COMPILER</a:t>
+            </a:r>
+            <a:endParaRPr lang="en-US" sz="900" dirty="0"/>
+          </a:p>
+        </p:txBody>
+      </p:sp>
+      <p:sp>
+        <p:nvSpPr>
+          <p:cNvPr id="4" name="Text 2"/>
+          <p:cNvSpPr/>
+          <p:nvPr/>
+        </p:nvSpPr>
+        <p:spPr>
+          <a:xfrm>
+            <a:off x="406390" y="808736"/>
+            <a:ext cx="11378916" cy="402336"/>
+          </a:xfrm>
+          <a:prstGeom prst="rect">
+            <a:avLst/>
+          </a:prstGeom>
+          <a:noFill/>
+          <a:ln/>
+        </p:spPr>
+        <p:txBody>
+          <a:bodyPr wrap="square" rtlCol="0" anchor="t"/>
           <a:lstStyle/>
           <a:p>
             <a:pPr algn="ctr" indent="0" marL="0">
               <a:buNone/>
             </a:pPr>
             <a:r>
-              <a:rPr lang="en-US" sz="3300" b="1" dirty="0">
+              <a:rPr lang="en-US" sz="2400" b="1" dirty="0">
                 <a:solidFill>
                   <a:srgbClr val="FFFFFF"/>
                 </a:solidFill>
@@ -2224,36 +2251,36 @@
               </a:rPr>
               <a:t>Yumia</a:t>
             </a:r>
-            <a:endParaRPr lang="en-US" sz="3300" dirty="0"/>
-          </a:p>
-        </p:txBody>
-      </p:sp>
-      <p:sp>
-        <p:nvSpPr>
-          <p:cNvPr id="4" name="Text 2"/>
-          <p:cNvSpPr/>
-          <p:nvPr/>
-        </p:nvSpPr>
-        <p:spPr>
-          <a:xfrm>
-            <a:off x="406390" y="1503680"/>
-            <a:ext cx="11378916" cy="365760"/>
-          </a:xfrm>
-          <a:prstGeom prst="rect">
-            <a:avLst/>
-          </a:prstGeom>
-          <a:noFill/>
-          <a:ln/>
-        </p:spPr>
-        <p:txBody>
-          <a:bodyPr wrap="square" rtlCol="0" anchor="ctr"/>
+            <a:endParaRPr lang="en-US" sz="2400" dirty="0"/>
+          </a:p>
+        </p:txBody>
+      </p:sp>
+      <p:sp>
+        <p:nvSpPr>
+          <p:cNvPr id="5" name="Text 3"/>
+          <p:cNvSpPr/>
+          <p:nvPr/>
+        </p:nvSpPr>
+        <p:spPr>
+          <a:xfrm>
+            <a:off x="406390" y="1247648"/>
+            <a:ext cx="11378916" cy="239776"/>
+          </a:xfrm>
+          <a:prstGeom prst="rect">
+            <a:avLst/>
+          </a:prstGeom>
+          <a:noFill/>
+          <a:ln/>
+        </p:spPr>
+        <p:txBody>
+          <a:bodyPr wrap="square" rtlCol="0" anchor="t"/>
           <a:lstStyle/>
           <a:p>
             <a:pPr algn="ctr" indent="0" marL="0">
               <a:buNone/>
             </a:pPr>
             <a:r>
-              <a:rPr lang="en-US" sz="1600" dirty="0">
+              <a:rPr lang="en-US" sz="1200" dirty="0">
                 <a:solidFill>
                   <a:srgbClr val="A7A7B5"/>
                 </a:solidFill>
@@ -2263,20 +2290,20 @@
               </a:rPr>
               <a:t>Un linguaggio dichiarativo per documenti visivi</a:t>
             </a:r>
-            <a:endParaRPr lang="en-US" sz="1600" dirty="0"/>
-          </a:p>
-        </p:txBody>
-      </p:sp>
-      <p:sp>
-        <p:nvSpPr>
-          <p:cNvPr id="5" name="Text 3"/>
-          <p:cNvSpPr/>
-          <p:nvPr/>
-        </p:nvSpPr>
-        <p:spPr>
-          <a:xfrm>
-            <a:off x="406390" y="1727200"/>
-            <a:ext cx="11378916" cy="254000"/>
+            <a:endParaRPr lang="en-US" sz="1200" dirty="0"/>
+          </a:p>
+        </p:txBody>
+      </p:sp>
+      <p:sp>
+        <p:nvSpPr>
+          <p:cNvPr id="6" name="Text 4"/>
+          <p:cNvSpPr/>
+          <p:nvPr/>
+        </p:nvSpPr>
+        <p:spPr>
+          <a:xfrm>
+            <a:off x="406390" y="1701800"/>
+            <a:ext cx="11378916" cy="368300"/>
           </a:xfrm>
           <a:prstGeom prst="rect">
             <a:avLst/>
@@ -2288,11 +2315,11 @@
           <a:bodyPr wrap="square" lIns="0" tIns="0" rIns="0" bIns="0" rtlCol="0" anchor="t"/>
           <a:lstStyle/>
           <a:p>
-            <a:pPr algn="l" indent="0" marL="0">
-              <a:buNone/>
-            </a:pPr>
-            <a:r>
-              <a:rPr lang="en-US" sz="1800" dirty="0">
+            <a:pPr algn="ctr" indent="0" marL="0">
+              <a:buNone/>
+            </a:pPr>
+            <a:r>
+              <a:rPr lang="en-US" sz="1300" dirty="0">
                 <a:solidFill>
                   <a:srgbClr val="FFFFFF"/>
                 </a:solidFill>
@@ -2300,15 +2327,15 @@
                 <a:ea typeface="Segoe UI" pitchFamily="34" charset="-122"/>
                 <a:cs typeface="Segoe UI" pitchFamily="34" charset="-120"/>
               </a:rPr>
-              <a:t>[Nome e Cognome]" align="center</a:t>
-            </a:r>
-            <a:endParaRPr lang="en-US" sz="1800" dirty="0"/>
-          </a:p>
-        </p:txBody>
-      </p:sp>
-      <p:sp>
-        <p:nvSpPr>
-          <p:cNvPr id="6" name="Text 4"/>
+              <a:t>[Nome e Cognome]</a:t>
+            </a:r>
+            <a:endParaRPr lang="en-US" sz="1300" dirty="0"/>
+          </a:p>
+        </p:txBody>
+      </p:sp>
+      <p:sp>
+        <p:nvSpPr>
+          <p:cNvPr id="7" name="Text 5"/>
           <p:cNvSpPr/>
           <p:nvPr/>
         </p:nvSpPr>
@@ -2386,23 +2413,23 @@
         <p:spPr>
           <a:xfrm>
             <a:off x="406390" y="406400"/>
-            <a:ext cx="11378916" cy="571500"/>
-          </a:xfrm>
-          <a:prstGeom prst="rect">
-            <a:avLst/>
-          </a:prstGeom>
-          <a:noFill/>
-          <a:ln/>
-        </p:spPr>
-        <p:txBody>
-          <a:bodyPr wrap="square" lIns="0" tIns="0" rIns="0" bIns="0" rtlCol="0" anchor="ctr"/>
+            <a:ext cx="11378916" cy="698500"/>
+          </a:xfrm>
+          <a:prstGeom prst="rect">
+            <a:avLst/>
+          </a:prstGeom>
+          <a:noFill/>
+          <a:ln/>
+        </p:spPr>
+        <p:txBody>
+          <a:bodyPr wrap="square" lIns="0" tIns="0" rIns="0" bIns="0" rtlCol="0" anchor="t"/>
           <a:lstStyle/>
           <a:p>
             <a:pPr algn="l" indent="0" marL="0">
               <a:buNone/>
             </a:pPr>
             <a:r>
-              <a:rPr lang="en-US" sz="4600" b="1" dirty="0">
+              <a:rPr lang="en-US" sz="3300" b="1" dirty="0">
                 <a:solidFill>
                   <a:srgbClr val="FF2E88"/>
                 </a:solidFill>
@@ -2412,7 +2439,7 @@
               </a:rPr>
               <a:t>CLI e Workflow di Sviluppo</a:t>
             </a:r>
-            <a:endParaRPr lang="en-US" sz="4600" dirty="0"/>
+            <a:endParaRPr lang="en-US" sz="3300" dirty="0"/>
           </a:p>
         </p:txBody>
       </p:sp>
@@ -2424,24 +2451,24 @@
         </p:nvSpPr>
         <p:spPr>
           <a:xfrm>
-            <a:off x="406390" y="1155700"/>
-            <a:ext cx="11378916" cy="444500"/>
-          </a:xfrm>
-          <a:prstGeom prst="rect">
-            <a:avLst/>
-          </a:prstGeom>
-          <a:noFill/>
-          <a:ln/>
-        </p:spPr>
-        <p:txBody>
-          <a:bodyPr wrap="square" lIns="0" tIns="0" rIns="0" bIns="0" rtlCol="0" anchor="ctr"/>
+            <a:off x="406390" y="1282700"/>
+            <a:ext cx="11378916" cy="558800"/>
+          </a:xfrm>
+          <a:prstGeom prst="rect">
+            <a:avLst/>
+          </a:prstGeom>
+          <a:noFill/>
+          <a:ln/>
+        </p:spPr>
+        <p:txBody>
+          <a:bodyPr wrap="square" lIns="0" tIns="0" rIns="0" bIns="0" rtlCol="0" anchor="t"/>
           <a:lstStyle/>
           <a:p>
             <a:pPr algn="l" indent="0" marL="0">
               <a:buNone/>
             </a:pPr>
             <a:r>
-              <a:rPr lang="en-US" sz="3800" b="1" dirty="0">
+              <a:rPr lang="en-US" sz="2700" b="1" dirty="0">
                 <a:solidFill>
                   <a:srgbClr val="FFFFFF"/>
                 </a:solidFill>
@@ -2451,7 +2478,7 @@
               </a:rPr>
               <a:t>L'esperienza di sviluppo pensata per sviluppatori e CI/CD</a:t>
             </a:r>
-            <a:endParaRPr lang="en-US" sz="3800" dirty="0"/>
+            <a:endParaRPr lang="en-US" sz="2700" dirty="0"/>
           </a:p>
         </p:txBody>
       </p:sp>
@@ -2463,12 +2490,12 @@
         </p:nvSpPr>
         <p:spPr>
           <a:xfrm>
-            <a:off x="406390" y="1778000"/>
-            <a:ext cx="3674441" cy="1524000"/>
+            <a:off x="406390" y="2019300"/>
+            <a:ext cx="3674441" cy="1701800"/>
           </a:xfrm>
           <a:prstGeom prst="roundRect">
             <a:avLst>
-              <a:gd name="adj" fmla="val 4800"/>
+              <a:gd name="adj" fmla="val 4299"/>
             </a:avLst>
           </a:prstGeom>
           <a:solidFill>
@@ -2490,8 +2517,8 @@
         </p:nvSpPr>
         <p:spPr>
           <a:xfrm>
-            <a:off x="424678" y="1814576"/>
-            <a:ext cx="54864" cy="1450848"/>
+            <a:off x="424678" y="2055876"/>
+            <a:ext cx="54864" cy="1628648"/>
           </a:xfrm>
           <a:prstGeom prst="roundRect">
             <a:avLst>
@@ -2512,8 +2539,8 @@
         </p:nvSpPr>
         <p:spPr>
           <a:xfrm>
-            <a:off x="634990" y="1942592"/>
-            <a:ext cx="3217241" cy="320040"/>
+            <a:off x="634990" y="2129028"/>
+            <a:ext cx="3217241" cy="274320"/>
           </a:xfrm>
           <a:prstGeom prst="rect">
             <a:avLst/>
@@ -2529,7 +2556,7 @@
               <a:buNone/>
             </a:pPr>
             <a:r>
-              <a:rPr lang="en-US" sz="2000" b="1" dirty="0">
+              <a:rPr lang="en-US" sz="1600" b="1" dirty="0">
                 <a:solidFill>
                   <a:srgbClr val="FF2E88"/>
                 </a:solidFill>
@@ -2539,7 +2566,7 @@
               </a:rPr>
               <a:t>1. Scrittura &amp; Validazione</a:t>
             </a:r>
-            <a:endParaRPr lang="en-US" sz="2000" dirty="0"/>
+            <a:endParaRPr lang="en-US" sz="1600" dirty="0"/>
           </a:p>
         </p:txBody>
       </p:sp>
@@ -2551,8 +2578,8 @@
         </p:nvSpPr>
         <p:spPr>
           <a:xfrm>
-            <a:off x="609585" y="2362200"/>
-            <a:ext cx="3268052" cy="660400"/>
+            <a:off x="634984" y="2705100"/>
+            <a:ext cx="3217253" cy="660400"/>
           </a:xfrm>
           <a:prstGeom prst="roundRect">
             <a:avLst>
@@ -2578,7 +2605,7 @@
         </p:nvSpPr>
         <p:spPr>
           <a:xfrm>
-            <a:off x="746745" y="2471928"/>
+            <a:off x="772144" y="2814828"/>
             <a:ext cx="91440" cy="91440"/>
           </a:xfrm>
           <a:prstGeom prst="ellipse">
@@ -2603,7 +2630,7 @@
         </p:nvSpPr>
         <p:spPr>
           <a:xfrm>
-            <a:off x="883905" y="2471928"/>
+            <a:off x="909304" y="2814828"/>
             <a:ext cx="91440" cy="91440"/>
           </a:xfrm>
           <a:prstGeom prst="ellipse">
@@ -2628,7 +2655,7 @@
         </p:nvSpPr>
         <p:spPr>
           <a:xfrm>
-            <a:off x="1021065" y="2471928"/>
+            <a:off x="1046464" y="2814828"/>
             <a:ext cx="91440" cy="91440"/>
           </a:xfrm>
           <a:prstGeom prst="ellipse">
@@ -2653,8 +2680,8 @@
         </p:nvSpPr>
         <p:spPr>
           <a:xfrm>
-            <a:off x="792465" y="2654808"/>
-            <a:ext cx="2902292" cy="294640"/>
+            <a:off x="817864" y="2997708"/>
+            <a:ext cx="2851493" cy="294640"/>
           </a:xfrm>
           <a:prstGeom prst="rect">
             <a:avLst/>
@@ -2709,12 +2736,12 @@
         </p:nvSpPr>
         <p:spPr>
           <a:xfrm>
-            <a:off x="4258627" y="1778000"/>
-            <a:ext cx="3674441" cy="1524000"/>
+            <a:off x="4258627" y="2019300"/>
+            <a:ext cx="3674441" cy="1701800"/>
           </a:xfrm>
           <a:prstGeom prst="roundRect">
             <a:avLst>
-              <a:gd name="adj" fmla="val 4800"/>
+              <a:gd name="adj" fmla="val 4299"/>
             </a:avLst>
           </a:prstGeom>
           <a:solidFill>
@@ -2736,8 +2763,8 @@
         </p:nvSpPr>
         <p:spPr>
           <a:xfrm>
-            <a:off x="4276915" y="1814576"/>
-            <a:ext cx="54864" cy="1450848"/>
+            <a:off x="4276915" y="2055876"/>
+            <a:ext cx="54864" cy="1628648"/>
           </a:xfrm>
           <a:prstGeom prst="roundRect">
             <a:avLst>
@@ -2758,8 +2785,8 @@
         </p:nvSpPr>
         <p:spPr>
           <a:xfrm>
-            <a:off x="4487227" y="1942592"/>
-            <a:ext cx="3217241" cy="320040"/>
+            <a:off x="4487227" y="2129028"/>
+            <a:ext cx="3217241" cy="274320"/>
           </a:xfrm>
           <a:prstGeom prst="rect">
             <a:avLst/>
@@ -2775,7 +2802,7 @@
               <a:buNone/>
             </a:pPr>
             <a:r>
-              <a:rPr lang="en-US" sz="2000" b="1" dirty="0">
+              <a:rPr lang="en-US" sz="1600" b="1" dirty="0">
                 <a:solidFill>
                   <a:srgbClr val="7B61FF"/>
                 </a:solidFill>
@@ -2785,7 +2812,7 @@
               </a:rPr>
               <a:t>2. Live Dev &amp; Audit</a:t>
             </a:r>
-            <a:endParaRPr lang="en-US" sz="2000" dirty="0"/>
+            <a:endParaRPr lang="en-US" sz="1600" dirty="0"/>
           </a:p>
         </p:txBody>
       </p:sp>
@@ -2797,8 +2824,8 @@
         </p:nvSpPr>
         <p:spPr>
           <a:xfrm>
-            <a:off x="4461822" y="2362200"/>
-            <a:ext cx="3268052" cy="660400"/>
+            <a:off x="4487221" y="2705100"/>
+            <a:ext cx="3217253" cy="660400"/>
           </a:xfrm>
           <a:prstGeom prst="roundRect">
             <a:avLst>
@@ -2824,7 +2851,7 @@
         </p:nvSpPr>
         <p:spPr>
           <a:xfrm>
-            <a:off x="4598982" y="2471928"/>
+            <a:off x="4624381" y="2814828"/>
             <a:ext cx="91440" cy="91440"/>
           </a:xfrm>
           <a:prstGeom prst="ellipse">
@@ -2849,7 +2876,7 @@
         </p:nvSpPr>
         <p:spPr>
           <a:xfrm>
-            <a:off x="4736142" y="2471928"/>
+            <a:off x="4761541" y="2814828"/>
             <a:ext cx="91440" cy="91440"/>
           </a:xfrm>
           <a:prstGeom prst="ellipse">
@@ -2874,7 +2901,7 @@
         </p:nvSpPr>
         <p:spPr>
           <a:xfrm>
-            <a:off x="4873302" y="2471928"/>
+            <a:off x="4898701" y="2814828"/>
             <a:ext cx="91440" cy="91440"/>
           </a:xfrm>
           <a:prstGeom prst="ellipse">
@@ -2899,8 +2926,8 @@
         </p:nvSpPr>
         <p:spPr>
           <a:xfrm>
-            <a:off x="4644702" y="2654808"/>
-            <a:ext cx="2902292" cy="294640"/>
+            <a:off x="4670101" y="2997708"/>
+            <a:ext cx="2851493" cy="294640"/>
           </a:xfrm>
           <a:prstGeom prst="rect">
             <a:avLst/>
@@ -2955,12 +2982,12 @@
         </p:nvSpPr>
         <p:spPr>
           <a:xfrm>
-            <a:off x="8110864" y="1778000"/>
-            <a:ext cx="3674441" cy="1524000"/>
+            <a:off x="8110864" y="2019300"/>
+            <a:ext cx="3674441" cy="1701800"/>
           </a:xfrm>
           <a:prstGeom prst="roundRect">
             <a:avLst>
-              <a:gd name="adj" fmla="val 4800"/>
+              <a:gd name="adj" fmla="val 4299"/>
             </a:avLst>
           </a:prstGeom>
           <a:solidFill>
@@ -2982,8 +3009,8 @@
         </p:nvSpPr>
         <p:spPr>
           <a:xfrm>
-            <a:off x="8129152" y="1814576"/>
-            <a:ext cx="54864" cy="1450848"/>
+            <a:off x="8129152" y="2055876"/>
+            <a:ext cx="54864" cy="1628648"/>
           </a:xfrm>
           <a:prstGeom prst="roundRect">
             <a:avLst>
@@ -3004,8 +3031,8 @@
         </p:nvSpPr>
         <p:spPr>
           <a:xfrm>
-            <a:off x="8339464" y="1942592"/>
-            <a:ext cx="3217241" cy="320040"/>
+            <a:off x="8339464" y="2129028"/>
+            <a:ext cx="3217241" cy="274320"/>
           </a:xfrm>
           <a:prstGeom prst="rect">
             <a:avLst/>
@@ -3021,7 +3048,7 @@
               <a:buNone/>
             </a:pPr>
             <a:r>
-              <a:rPr lang="en-US" sz="2000" b="1" dirty="0">
+              <a:rPr lang="en-US" sz="1600" b="1" dirty="0">
                 <a:solidFill>
                   <a:srgbClr val="00FF9F"/>
                 </a:solidFill>
@@ -3031,7 +3058,7 @@
               </a:rPr>
               <a:t>3. Build &amp; Deploy</a:t>
             </a:r>
-            <a:endParaRPr lang="en-US" sz="2000" dirty="0"/>
+            <a:endParaRPr lang="en-US" sz="1600" dirty="0"/>
           </a:p>
         </p:txBody>
       </p:sp>
@@ -3043,8 +3070,8 @@
         </p:nvSpPr>
         <p:spPr>
           <a:xfrm>
-            <a:off x="8314059" y="2362200"/>
-            <a:ext cx="3268052" cy="660400"/>
+            <a:off x="8339458" y="2705100"/>
+            <a:ext cx="3217253" cy="660400"/>
           </a:xfrm>
           <a:prstGeom prst="roundRect">
             <a:avLst>
@@ -3070,7 +3097,7 @@
         </p:nvSpPr>
         <p:spPr>
           <a:xfrm>
-            <a:off x="8451219" y="2471928"/>
+            <a:off x="8476618" y="2814828"/>
             <a:ext cx="91440" cy="91440"/>
           </a:xfrm>
           <a:prstGeom prst="ellipse">
@@ -3095,7 +3122,7 @@
         </p:nvSpPr>
         <p:spPr>
           <a:xfrm>
-            <a:off x="8588379" y="2471928"/>
+            <a:off x="8613778" y="2814828"/>
             <a:ext cx="91440" cy="91440"/>
           </a:xfrm>
           <a:prstGeom prst="ellipse">
@@ -3120,7 +3147,7 @@
         </p:nvSpPr>
         <p:spPr>
           <a:xfrm>
-            <a:off x="8725539" y="2471928"/>
+            <a:off x="8750938" y="2814828"/>
             <a:ext cx="91440" cy="91440"/>
           </a:xfrm>
           <a:prstGeom prst="ellipse">
@@ -3145,8 +3172,8 @@
         </p:nvSpPr>
         <p:spPr>
           <a:xfrm>
-            <a:off x="8496939" y="2654808"/>
-            <a:ext cx="2902292" cy="294640"/>
+            <a:off x="8522338" y="2997708"/>
+            <a:ext cx="2851493" cy="294640"/>
           </a:xfrm>
           <a:prstGeom prst="rect">
             <a:avLst/>
@@ -3201,7 +3228,7 @@
         </p:nvSpPr>
         <p:spPr>
           <a:xfrm>
-            <a:off x="406390" y="3657600"/>
+            <a:off x="406390" y="4076700"/>
             <a:ext cx="11378916" cy="654050"/>
           </a:xfrm>
           <a:prstGeom prst="roundRect">
@@ -3228,7 +3255,7 @@
         </p:nvSpPr>
         <p:spPr>
           <a:xfrm>
-            <a:off x="543550" y="3730752"/>
+            <a:off x="543550" y="4149852"/>
             <a:ext cx="11104596" cy="274320"/>
           </a:xfrm>
           <a:prstGeom prst="rect">
@@ -3267,7 +3294,7 @@
         </p:nvSpPr>
         <p:spPr>
           <a:xfrm>
-            <a:off x="543550" y="4050792"/>
+            <a:off x="543550" y="4469892"/>
             <a:ext cx="11104596" cy="187706"/>
           </a:xfrm>
           <a:prstGeom prst="rect">
@@ -3378,23 +3405,23 @@
         <p:spPr>
           <a:xfrm>
             <a:off x="406390" y="406400"/>
-            <a:ext cx="11378916" cy="571500"/>
-          </a:xfrm>
-          <a:prstGeom prst="rect">
-            <a:avLst/>
-          </a:prstGeom>
-          <a:noFill/>
-          <a:ln/>
-        </p:spPr>
-        <p:txBody>
-          <a:bodyPr wrap="square" lIns="0" tIns="0" rIns="0" bIns="0" rtlCol="0" anchor="ctr"/>
+            <a:ext cx="11378916" cy="698500"/>
+          </a:xfrm>
+          <a:prstGeom prst="rect">
+            <a:avLst/>
+          </a:prstGeom>
+          <a:noFill/>
+          <a:ln/>
+        </p:spPr>
+        <p:txBody>
+          <a:bodyPr wrap="square" lIns="0" tIns="0" rIns="0" bIns="0" rtlCol="0" anchor="t"/>
           <a:lstStyle/>
           <a:p>
             <a:pPr algn="l" indent="0" marL="0">
               <a:buNone/>
             </a:pPr>
             <a:r>
-              <a:rPr lang="en-US" sz="4600" b="1" dirty="0">
+              <a:rPr lang="en-US" sz="3300" b="1" dirty="0">
                 <a:solidFill>
                   <a:srgbClr val="FF2E88"/>
                 </a:solidFill>
@@ -3404,7 +3431,7 @@
               </a:rPr>
               <a:t>Yumia e Intelligenza Artificiale</a:t>
             </a:r>
-            <a:endParaRPr lang="en-US" sz="4600" dirty="0"/>
+            <a:endParaRPr lang="en-US" sz="3300" dirty="0"/>
           </a:p>
         </p:txBody>
       </p:sp>
@@ -3416,24 +3443,24 @@
         </p:nvSpPr>
         <p:spPr>
           <a:xfrm>
-            <a:off x="406390" y="1155700"/>
-            <a:ext cx="11378916" cy="444500"/>
-          </a:xfrm>
-          <a:prstGeom prst="rect">
-            <a:avLst/>
-          </a:prstGeom>
-          <a:noFill/>
-          <a:ln/>
-        </p:spPr>
-        <p:txBody>
-          <a:bodyPr wrap="square" lIns="0" tIns="0" rIns="0" bIns="0" rtlCol="0" anchor="ctr"/>
+            <a:off x="406390" y="1282700"/>
+            <a:ext cx="11378916" cy="558800"/>
+          </a:xfrm>
+          <a:prstGeom prst="rect">
+            <a:avLst/>
+          </a:prstGeom>
+          <a:noFill/>
+          <a:ln/>
+        </p:spPr>
+        <p:txBody>
+          <a:bodyPr wrap="square" lIns="0" tIns="0" rIns="0" bIns="0" rtlCol="0" anchor="t"/>
           <a:lstStyle/>
           <a:p>
             <a:pPr algn="l" indent="0" marL="0">
               <a:buNone/>
             </a:pPr>
             <a:r>
-              <a:rPr lang="en-US" sz="3800" b="1" dirty="0">
+              <a:rPr lang="en-US" sz="2700" b="1" dirty="0">
                 <a:solidFill>
                   <a:srgbClr val="FFFFFF"/>
                 </a:solidFill>
@@ -3443,7 +3470,7 @@
               </a:rPr>
               <a:t>Perché i linguaggi dichiarativi semantici superano l'HTML grezzo</a:t>
             </a:r>
-            <a:endParaRPr lang="en-US" sz="3800" dirty="0"/>
+            <a:endParaRPr lang="en-US" sz="2700" dirty="0"/>
           </a:p>
         </p:txBody>
       </p:sp>
@@ -3455,12 +3482,12 @@
         </p:nvSpPr>
         <p:spPr>
           <a:xfrm>
-            <a:off x="406390" y="1778000"/>
-            <a:ext cx="5506578" cy="2247900"/>
+            <a:off x="406390" y="2019300"/>
+            <a:ext cx="5506578" cy="4089400"/>
           </a:xfrm>
           <a:prstGeom prst="roundRect">
             <a:avLst>
-              <a:gd name="adj" fmla="val 4068"/>
+              <a:gd name="adj" fmla="val 2236"/>
             </a:avLst>
           </a:prstGeom>
           <a:solidFill>
@@ -3482,7 +3509,7 @@
         </p:nvSpPr>
         <p:spPr>
           <a:xfrm>
-            <a:off x="543550" y="1915160"/>
+            <a:off x="543550" y="2156460"/>
             <a:ext cx="5232258" cy="365760"/>
           </a:xfrm>
           <a:prstGeom prst="rect">
@@ -3521,12 +3548,12 @@
         </p:nvSpPr>
         <p:spPr>
           <a:xfrm>
-            <a:off x="6278728" y="1778000"/>
-            <a:ext cx="5506578" cy="2247900"/>
+            <a:off x="6278728" y="2019300"/>
+            <a:ext cx="5506578" cy="4089400"/>
           </a:xfrm>
           <a:prstGeom prst="roundRect">
             <a:avLst>
-              <a:gd name="adj" fmla="val 4068"/>
+              <a:gd name="adj" fmla="val 2236"/>
             </a:avLst>
           </a:prstGeom>
           <a:solidFill>
@@ -3548,7 +3575,7 @@
         </p:nvSpPr>
         <p:spPr>
           <a:xfrm>
-            <a:off x="6415888" y="1915160"/>
+            <a:off x="6415888" y="2156460"/>
             <a:ext cx="5232258" cy="365760"/>
           </a:xfrm>
           <a:prstGeom prst="rect">
@@ -3587,7 +3614,7 @@
         </p:nvSpPr>
         <p:spPr>
           <a:xfrm>
-            <a:off x="5958688" y="2737358"/>
+            <a:off x="5958688" y="3899408"/>
             <a:ext cx="274320" cy="274320"/>
           </a:xfrm>
           <a:prstGeom prst="roundRect">
@@ -3609,7 +3636,7 @@
         </p:nvSpPr>
         <p:spPr>
           <a:xfrm>
-            <a:off x="5958688" y="2737358"/>
+            <a:off x="5958688" y="3899408"/>
             <a:ext cx="274320" cy="274320"/>
           </a:xfrm>
           <a:prstGeom prst="rect">
@@ -3648,12 +3675,12 @@
         </p:nvSpPr>
         <p:spPr>
           <a:xfrm>
-            <a:off x="1775634" y="2216150"/>
-            <a:ext cx="2862072" cy="285750"/>
+            <a:off x="1775634" y="2552700"/>
+            <a:ext cx="2862072" cy="330200"/>
           </a:xfrm>
           <a:prstGeom prst="roundRect">
             <a:avLst>
-              <a:gd name="adj" fmla="val 48000"/>
+              <a:gd name="adj" fmla="val 41538"/>
             </a:avLst>
           </a:prstGeom>
           <a:solidFill>
@@ -3675,8 +3702,8 @@
         </p:nvSpPr>
         <p:spPr>
           <a:xfrm>
-            <a:off x="1775634" y="2216150"/>
-            <a:ext cx="2862072" cy="285750"/>
+            <a:off x="1775634" y="2552700"/>
+            <a:ext cx="2862072" cy="330200"/>
           </a:xfrm>
           <a:prstGeom prst="rect">
             <a:avLst/>
@@ -3714,8 +3741,8 @@
         </p:nvSpPr>
         <p:spPr>
           <a:xfrm>
-            <a:off x="558786" y="2590800"/>
-            <a:ext cx="5295768" cy="254000"/>
+            <a:off x="584185" y="2971800"/>
+            <a:ext cx="5244969" cy="673100"/>
           </a:xfrm>
           <a:prstGeom prst="rect">
             <a:avLst/>
@@ -3731,7 +3758,7 @@
               <a:buNone/>
             </a:pPr>
             <a:r>
-              <a:rPr lang="en-US" sz="1800" dirty="0">
+              <a:rPr lang="en-US" sz="1300" dirty="0">
                 <a:solidFill>
                   <a:srgbClr val="FFFFFF"/>
                 </a:solidFill>
@@ -3741,7 +3768,7 @@
               </a:rPr>
               <a:t>• Allucinazioni di coordinate pixel e layout rotti</a:t>
             </a:r>
-            <a:endParaRPr lang="en-US" sz="1800" dirty="0"/>
+            <a:endParaRPr lang="en-US" sz="1300" dirty="0"/>
           </a:p>
         </p:txBody>
       </p:sp>
@@ -3753,8 +3780,8 @@
         </p:nvSpPr>
         <p:spPr>
           <a:xfrm>
-            <a:off x="558786" y="2933700"/>
-            <a:ext cx="5295768" cy="254000"/>
+            <a:off x="584185" y="3733800"/>
+            <a:ext cx="5244969" cy="673100"/>
           </a:xfrm>
           <a:prstGeom prst="rect">
             <a:avLst/>
@@ -3770,7 +3797,7 @@
               <a:buNone/>
             </a:pPr>
             <a:r>
-              <a:rPr lang="en-US" sz="1800" dirty="0">
+              <a:rPr lang="en-US" sz="1300" dirty="0">
                 <a:solidFill>
                   <a:srgbClr val="FFFFFF"/>
                 </a:solidFill>
@@ -3780,7 +3807,7 @@
               </a:rPr>
               <a:t>• Codice verboso con rischio di sintassi non valida</a:t>
             </a:r>
-            <a:endParaRPr lang="en-US" sz="1800" dirty="0"/>
+            <a:endParaRPr lang="en-US" sz="1300" dirty="0"/>
           </a:p>
         </p:txBody>
       </p:sp>
@@ -3792,8 +3819,8 @@
         </p:nvSpPr>
         <p:spPr>
           <a:xfrm>
-            <a:off x="558786" y="3276600"/>
-            <a:ext cx="5295768" cy="254000"/>
+            <a:off x="584185" y="4495800"/>
+            <a:ext cx="5244969" cy="673100"/>
           </a:xfrm>
           <a:prstGeom prst="rect">
             <a:avLst/>
@@ -3809,7 +3836,7 @@
               <a:buNone/>
             </a:pPr>
             <a:r>
-              <a:rPr lang="en-US" sz="1800" dirty="0">
+              <a:rPr lang="en-US" sz="1300" dirty="0">
                 <a:solidFill>
                   <a:srgbClr val="FFFFFF"/>
                 </a:solidFill>
@@ -3819,7 +3846,7 @@
               </a:rPr>
               <a:t>• Difficile da vincolare a un design system coerente</a:t>
             </a:r>
-            <a:endParaRPr lang="en-US" sz="1800" dirty="0"/>
+            <a:endParaRPr lang="en-US" sz="1300" dirty="0"/>
           </a:p>
         </p:txBody>
       </p:sp>
@@ -3831,8 +3858,8 @@
         </p:nvSpPr>
         <p:spPr>
           <a:xfrm>
-            <a:off x="558786" y="3619500"/>
-            <a:ext cx="5295768" cy="254000"/>
+            <a:off x="584185" y="5257800"/>
+            <a:ext cx="5244969" cy="368300"/>
           </a:xfrm>
           <a:prstGeom prst="rect">
             <a:avLst/>
@@ -3848,7 +3875,7 @@
               <a:buNone/>
             </a:pPr>
             <a:r>
-              <a:rPr lang="en-US" sz="1800" dirty="0">
+              <a:rPr lang="en-US" sz="1300" dirty="0">
                 <a:solidFill>
                   <a:srgbClr val="FFFFFF"/>
                 </a:solidFill>
@@ -3858,7 +3885,7 @@
               </a:rPr>
               <a:t>• Revisione manuale complessa per l'utente</a:t>
             </a:r>
-            <a:endParaRPr lang="en-US" sz="1800" dirty="0"/>
+            <a:endParaRPr lang="en-US" sz="1300" dirty="0"/>
           </a:p>
         </p:txBody>
       </p:sp>
@@ -3870,12 +3897,12 @@
         </p:nvSpPr>
         <p:spPr>
           <a:xfrm>
-            <a:off x="7654573" y="2216150"/>
-            <a:ext cx="2660904" cy="285750"/>
+            <a:off x="7654573" y="2552700"/>
+            <a:ext cx="2660904" cy="330200"/>
           </a:xfrm>
           <a:prstGeom prst="roundRect">
             <a:avLst>
-              <a:gd name="adj" fmla="val 48000"/>
+              <a:gd name="adj" fmla="val 41538"/>
             </a:avLst>
           </a:prstGeom>
           <a:solidFill>
@@ -3897,8 +3924,8 @@
         </p:nvSpPr>
         <p:spPr>
           <a:xfrm>
-            <a:off x="7654573" y="2216150"/>
-            <a:ext cx="2660904" cy="285750"/>
+            <a:off x="7654573" y="2552700"/>
+            <a:ext cx="2660904" cy="330200"/>
           </a:xfrm>
           <a:prstGeom prst="rect">
             <a:avLst/>
@@ -3936,8 +3963,8 @@
         </p:nvSpPr>
         <p:spPr>
           <a:xfrm>
-            <a:off x="6337142" y="2590800"/>
-            <a:ext cx="5295768" cy="254000"/>
+            <a:off x="6362541" y="2971800"/>
+            <a:ext cx="5244969" cy="673100"/>
           </a:xfrm>
           <a:prstGeom prst="rect">
             <a:avLst/>
@@ -3953,7 +3980,7 @@
               <a:buNone/>
             </a:pPr>
             <a:r>
-              <a:rPr lang="en-US" sz="1800" dirty="0">
+              <a:rPr lang="en-US" sz="1300" dirty="0">
                 <a:solidFill>
                   <a:srgbClr val="FFFFFF"/>
                 </a:solidFill>
@@ -3963,7 +3990,7 @@
               </a:rPr>
               <a:t>• Generazione guidata da JSON Schema (yumia schema)</a:t>
             </a:r>
-            <a:endParaRPr lang="en-US" sz="1800" dirty="0"/>
+            <a:endParaRPr lang="en-US" sz="1300" dirty="0"/>
           </a:p>
         </p:txBody>
       </p:sp>
@@ -3975,8 +4002,8 @@
         </p:nvSpPr>
         <p:spPr>
           <a:xfrm>
-            <a:off x="6337142" y="2933700"/>
-            <a:ext cx="5295768" cy="254000"/>
+            <a:off x="6362541" y="3733800"/>
+            <a:ext cx="5244969" cy="673100"/>
           </a:xfrm>
           <a:prstGeom prst="rect">
             <a:avLst/>
@@ -3992,7 +4019,7 @@
               <a:buNone/>
             </a:pPr>
             <a:r>
-              <a:rPr lang="en-US" sz="1800" dirty="0">
+              <a:rPr lang="en-US" sz="1300" dirty="0">
                 <a:solidFill>
                   <a:srgbClr val="FFFFFF"/>
                 </a:solidFill>
@@ -4002,7 +4029,7 @@
               </a:rPr>
               <a:t>• Sintassi concisa focalizzata sul contenuto semantico</a:t>
             </a:r>
-            <a:endParaRPr lang="en-US" sz="1800" dirty="0"/>
+            <a:endParaRPr lang="en-US" sz="1300" dirty="0"/>
           </a:p>
         </p:txBody>
       </p:sp>
@@ -4014,8 +4041,8 @@
         </p:nvSpPr>
         <p:spPr>
           <a:xfrm>
-            <a:off x="6337142" y="3276600"/>
-            <a:ext cx="5295768" cy="254000"/>
+            <a:off x="6362541" y="4495800"/>
+            <a:ext cx="5244969" cy="673100"/>
           </a:xfrm>
           <a:prstGeom prst="rect">
             <a:avLst/>
@@ -4031,7 +4058,7 @@
               <a:buNone/>
             </a:pPr>
             <a:r>
-              <a:rPr lang="en-US" sz="1800" dirty="0">
+              <a:rPr lang="en-US" sz="1300" dirty="0">
                 <a:solidFill>
                   <a:srgbClr val="FFFFFF"/>
                 </a:solidFill>
@@ -4041,7 +4068,7 @@
               </a:rPr>
               <a:t>• Il motore garantisce allineamenti e layout perfetti</a:t>
             </a:r>
-            <a:endParaRPr lang="en-US" sz="1800" dirty="0"/>
+            <a:endParaRPr lang="en-US" sz="1300" dirty="0"/>
           </a:p>
         </p:txBody>
       </p:sp>
@@ -4053,8 +4080,8 @@
         </p:nvSpPr>
         <p:spPr>
           <a:xfrm>
-            <a:off x="6337142" y="3619500"/>
-            <a:ext cx="5295768" cy="254000"/>
+            <a:off x="6362541" y="5257800"/>
+            <a:ext cx="5244969" cy="673100"/>
           </a:xfrm>
           <a:prstGeom prst="rect">
             <a:avLst/>
@@ -4070,7 +4097,7 @@
               <a:buNone/>
             </a:pPr>
             <a:r>
-              <a:rPr lang="en-US" sz="1800" dirty="0">
+              <a:rPr lang="en-US" sz="1300" dirty="0">
                 <a:solidFill>
                   <a:srgbClr val="FFFFFF"/>
                 </a:solidFill>
@@ -4080,7 +4107,7 @@
               </a:rPr>
               <a:t>• Validazione deterministica automatica post-generazione</a:t>
             </a:r>
-            <a:endParaRPr lang="en-US" sz="1800" dirty="0"/>
+            <a:endParaRPr lang="en-US" sz="1300" dirty="0"/>
           </a:p>
         </p:txBody>
       </p:sp>
@@ -4164,23 +4191,23 @@
         <p:spPr>
           <a:xfrm>
             <a:off x="406390" y="406400"/>
-            <a:ext cx="11378916" cy="571500"/>
-          </a:xfrm>
-          <a:prstGeom prst="rect">
-            <a:avLst/>
-          </a:prstGeom>
-          <a:noFill/>
-          <a:ln/>
-        </p:spPr>
-        <p:txBody>
-          <a:bodyPr wrap="square" lIns="0" tIns="0" rIns="0" bIns="0" rtlCol="0" anchor="ctr"/>
+            <a:ext cx="11378916" cy="698500"/>
+          </a:xfrm>
+          <a:prstGeom prst="rect">
+            <a:avLst/>
+          </a:prstGeom>
+          <a:noFill/>
+          <a:ln/>
+        </p:spPr>
+        <p:txBody>
+          <a:bodyPr wrap="square" lIns="0" tIns="0" rIns="0" bIns="0" rtlCol="0" anchor="t"/>
           <a:lstStyle/>
           <a:p>
             <a:pPr algn="l" indent="0" marL="0">
               <a:buNone/>
             </a:pPr>
             <a:r>
-              <a:rPr lang="en-US" sz="4600" b="1" dirty="0">
+              <a:rPr lang="en-US" sz="3300" b="1" dirty="0">
                 <a:solidFill>
                   <a:srgbClr val="FF2E88"/>
                 </a:solidFill>
@@ -4190,7 +4217,7 @@
               </a:rPr>
               <a:t>Funzionalità e Componenti Avanzati</a:t>
             </a:r>
-            <a:endParaRPr lang="en-US" sz="4600" dirty="0"/>
+            <a:endParaRPr lang="en-US" sz="3300" dirty="0"/>
           </a:p>
         </p:txBody>
       </p:sp>
@@ -4202,24 +4229,24 @@
         </p:nvSpPr>
         <p:spPr>
           <a:xfrm>
-            <a:off x="406390" y="1155700"/>
-            <a:ext cx="11378916" cy="444500"/>
-          </a:xfrm>
-          <a:prstGeom prst="rect">
-            <a:avLst/>
-          </a:prstGeom>
-          <a:noFill/>
-          <a:ln/>
-        </p:spPr>
-        <p:txBody>
-          <a:bodyPr wrap="square" lIns="0" tIns="0" rIns="0" bIns="0" rtlCol="0" anchor="ctr"/>
+            <a:off x="406390" y="1282700"/>
+            <a:ext cx="11378916" cy="558800"/>
+          </a:xfrm>
+          <a:prstGeom prst="rect">
+            <a:avLst/>
+          </a:prstGeom>
+          <a:noFill/>
+          <a:ln/>
+        </p:spPr>
+        <p:txBody>
+          <a:bodyPr wrap="square" lIns="0" tIns="0" rIns="0" bIns="0" rtlCol="0" anchor="t"/>
           <a:lstStyle/>
           <a:p>
             <a:pPr algn="l" indent="0" marL="0">
               <a:buNone/>
             </a:pPr>
             <a:r>
-              <a:rPr lang="en-US" sz="3800" b="1" dirty="0">
+              <a:rPr lang="en-US" sz="2700" b="1" dirty="0">
                 <a:solidFill>
                   <a:srgbClr val="FFFFFF"/>
                 </a:solidFill>
@@ -4229,7 +4256,7 @@
               </a:rPr>
               <a:t>Un ricco ecosistema integrato senza dipendenze esterne</a:t>
             </a:r>
-            <a:endParaRPr lang="en-US" sz="3800" dirty="0"/>
+            <a:endParaRPr lang="en-US" sz="2700" dirty="0"/>
           </a:p>
         </p:txBody>
       </p:sp>
@@ -4241,12 +4268,12 @@
         </p:nvSpPr>
         <p:spPr>
           <a:xfrm>
-            <a:off x="406390" y="1778000"/>
-            <a:ext cx="3674441" cy="1549400"/>
+            <a:off x="406390" y="2019300"/>
+            <a:ext cx="3674441" cy="2019300"/>
           </a:xfrm>
           <a:prstGeom prst="roundRect">
             <a:avLst>
-              <a:gd name="adj" fmla="val 4721"/>
+              <a:gd name="adj" fmla="val 3623"/>
             </a:avLst>
           </a:prstGeom>
           <a:solidFill>
@@ -4268,8 +4295,8 @@
         </p:nvSpPr>
         <p:spPr>
           <a:xfrm>
-            <a:off x="424678" y="1814576"/>
-            <a:ext cx="54864" cy="1476248"/>
+            <a:off x="424678" y="2055876"/>
+            <a:ext cx="54864" cy="1946148"/>
           </a:xfrm>
           <a:prstGeom prst="roundRect">
             <a:avLst>
@@ -4290,8 +4317,8 @@
         </p:nvSpPr>
         <p:spPr>
           <a:xfrm>
-            <a:off x="634990" y="1942592"/>
-            <a:ext cx="3217241" cy="320040"/>
+            <a:off x="634990" y="2129028"/>
+            <a:ext cx="3217241" cy="274320"/>
           </a:xfrm>
           <a:prstGeom prst="rect">
             <a:avLst/>
@@ -4307,7 +4334,7 @@
               <a:buNone/>
             </a:pPr>
             <a:r>
-              <a:rPr lang="en-US" sz="2000" b="1" dirty="0">
+              <a:rPr lang="en-US" sz="1600" b="1" dirty="0">
                 <a:solidFill>
                   <a:srgbClr val="FF2E88"/>
                 </a:solidFill>
@@ -4317,7 +4344,7 @@
               </a:rPr>
               <a:t>Icon Provider Multipli</a:t>
             </a:r>
-            <a:endParaRPr lang="en-US" sz="2000" dirty="0"/>
+            <a:endParaRPr lang="en-US" sz="1600" dirty="0"/>
           </a:p>
         </p:txBody>
       </p:sp>
@@ -4329,8 +4356,8 @@
         </p:nvSpPr>
         <p:spPr>
           <a:xfrm>
-            <a:off x="609585" y="2362200"/>
-            <a:ext cx="3268052" cy="685800"/>
+            <a:off x="634984" y="2705100"/>
+            <a:ext cx="3217253" cy="977900"/>
           </a:xfrm>
           <a:prstGeom prst="rect">
             <a:avLst/>
@@ -4346,7 +4373,7 @@
               <a:buNone/>
             </a:pPr>
             <a:r>
-              <a:rPr lang="en-US" sz="1800" dirty="0">
+              <a:rPr lang="en-US" sz="1300" dirty="0">
                 <a:solidFill>
                   <a:srgbClr val="FFFFFF"/>
                 </a:solidFill>
@@ -4356,7 +4383,7 @@
               </a:rPr>
               <a:t>Supporto nativo a oltre 10.000 icone da Lucide, Material, Tabler e FontAwesome.</a:t>
             </a:r>
-            <a:endParaRPr lang="en-US" sz="1800" dirty="0"/>
+            <a:endParaRPr lang="en-US" sz="1300" dirty="0"/>
           </a:p>
         </p:txBody>
       </p:sp>
@@ -4368,12 +4395,12 @@
         </p:nvSpPr>
         <p:spPr>
           <a:xfrm>
-            <a:off x="4258627" y="1778000"/>
-            <a:ext cx="3674441" cy="1549400"/>
+            <a:off x="4258627" y="2019300"/>
+            <a:ext cx="3674441" cy="2019300"/>
           </a:xfrm>
           <a:prstGeom prst="roundRect">
             <a:avLst>
-              <a:gd name="adj" fmla="val 4721"/>
+              <a:gd name="adj" fmla="val 3623"/>
             </a:avLst>
           </a:prstGeom>
           <a:solidFill>
@@ -4395,8 +4422,8 @@
         </p:nvSpPr>
         <p:spPr>
           <a:xfrm>
-            <a:off x="4276915" y="1814576"/>
-            <a:ext cx="54864" cy="1476248"/>
+            <a:off x="4276915" y="2055876"/>
+            <a:ext cx="54864" cy="1946148"/>
           </a:xfrm>
           <a:prstGeom prst="roundRect">
             <a:avLst>
@@ -4417,8 +4444,8 @@
         </p:nvSpPr>
         <p:spPr>
           <a:xfrm>
-            <a:off x="4487227" y="1942592"/>
-            <a:ext cx="3217241" cy="320040"/>
+            <a:off x="4487227" y="2129028"/>
+            <a:ext cx="3217241" cy="274320"/>
           </a:xfrm>
           <a:prstGeom prst="rect">
             <a:avLst/>
@@ -4434,7 +4461,7 @@
               <a:buNone/>
             </a:pPr>
             <a:r>
-              <a:rPr lang="en-US" sz="2000" b="1" dirty="0">
+              <a:rPr lang="en-US" sz="1600" b="1" dirty="0">
                 <a:solidFill>
                   <a:srgbClr val="7B61FF"/>
                 </a:solidFill>
@@ -4444,7 +4471,7 @@
               </a:rPr>
               <a:t>Diagrammi Integrati</a:t>
             </a:r>
-            <a:endParaRPr lang="en-US" sz="2000" dirty="0"/>
+            <a:endParaRPr lang="en-US" sz="1600" dirty="0"/>
           </a:p>
         </p:txBody>
       </p:sp>
@@ -4456,8 +4483,8 @@
         </p:nvSpPr>
         <p:spPr>
           <a:xfrm>
-            <a:off x="4461822" y="2362200"/>
-            <a:ext cx="3268052" cy="685800"/>
+            <a:off x="4487221" y="2705100"/>
+            <a:ext cx="3217253" cy="977900"/>
           </a:xfrm>
           <a:prstGeom prst="rect">
             <a:avLst/>
@@ -4473,7 +4500,7 @@
               <a:buNone/>
             </a:pPr>
             <a:r>
-              <a:rPr lang="en-US" sz="1800" dirty="0">
+              <a:rPr lang="en-US" sz="1300" dirty="0">
                 <a:solidFill>
                   <a:srgbClr val="FFFFFF"/>
                 </a:solidFill>
@@ -4483,7 +4510,7 @@
               </a:rPr>
               <a:t>Flowchart direzionali, Sequence diagram, architetture e diagrammi di classi UML.</a:t>
             </a:r>
-            <a:endParaRPr lang="en-US" sz="1800" dirty="0"/>
+            <a:endParaRPr lang="en-US" sz="1300" dirty="0"/>
           </a:p>
         </p:txBody>
       </p:sp>
@@ -4495,12 +4522,12 @@
         </p:nvSpPr>
         <p:spPr>
           <a:xfrm>
-            <a:off x="8110864" y="1778000"/>
-            <a:ext cx="3674441" cy="1549400"/>
+            <a:off x="8110864" y="2019300"/>
+            <a:ext cx="3674441" cy="2019300"/>
           </a:xfrm>
           <a:prstGeom prst="roundRect">
             <a:avLst>
-              <a:gd name="adj" fmla="val 4721"/>
+              <a:gd name="adj" fmla="val 3623"/>
             </a:avLst>
           </a:prstGeom>
           <a:solidFill>
@@ -4522,8 +4549,8 @@
         </p:nvSpPr>
         <p:spPr>
           <a:xfrm>
-            <a:off x="8129152" y="1814576"/>
-            <a:ext cx="54864" cy="1476248"/>
+            <a:off x="8129152" y="2055876"/>
+            <a:ext cx="54864" cy="1946148"/>
           </a:xfrm>
           <a:prstGeom prst="roundRect">
             <a:avLst>
@@ -4544,8 +4571,8 @@
         </p:nvSpPr>
         <p:spPr>
           <a:xfrm>
-            <a:off x="8339464" y="1942592"/>
-            <a:ext cx="3217241" cy="320040"/>
+            <a:off x="8339464" y="2129028"/>
+            <a:ext cx="3217241" cy="274320"/>
           </a:xfrm>
           <a:prstGeom prst="rect">
             <a:avLst/>
@@ -4561,7 +4588,7 @@
               <a:buNone/>
             </a:pPr>
             <a:r>
-              <a:rPr lang="en-US" sz="2000" b="1" dirty="0">
+              <a:rPr lang="en-US" sz="1600" b="1" dirty="0">
                 <a:solidFill>
                   <a:srgbClr val="FFE600"/>
                 </a:solidFill>
@@ -4571,7 +4598,7 @@
               </a:rPr>
               <a:t>Grafici &amp; Timeline</a:t>
             </a:r>
-            <a:endParaRPr lang="en-US" sz="2000" dirty="0"/>
+            <a:endParaRPr lang="en-US" sz="1600" dirty="0"/>
           </a:p>
         </p:txBody>
       </p:sp>
@@ -4583,8 +4610,8 @@
         </p:nvSpPr>
         <p:spPr>
           <a:xfrm>
-            <a:off x="8314059" y="2362200"/>
-            <a:ext cx="3268052" cy="685800"/>
+            <a:off x="8339458" y="2705100"/>
+            <a:ext cx="3217253" cy="977900"/>
           </a:xfrm>
           <a:prstGeom prst="rect">
             <a:avLst/>
@@ -4600,7 +4627,7 @@
               <a:buNone/>
             </a:pPr>
             <a:r>
-              <a:rPr lang="en-US" sz="1800" dirty="0">
+              <a:rPr lang="en-US" sz="1300" dirty="0">
                 <a:solidFill>
                   <a:srgbClr val="FFFFFF"/>
                 </a:solidFill>
@@ -4610,7 +4637,7 @@
               </a:rPr>
               <a:t>Grafici a barre, ciambella, radar, gauge e timeline storiche generate nativamente.</a:t>
             </a:r>
-            <a:endParaRPr lang="en-US" sz="1800" dirty="0"/>
+            <a:endParaRPr lang="en-US" sz="1300" dirty="0"/>
           </a:p>
         </p:txBody>
       </p:sp>
@@ -4622,12 +4649,12 @@
         </p:nvSpPr>
         <p:spPr>
           <a:xfrm>
-            <a:off x="406390" y="3505200"/>
-            <a:ext cx="3674441" cy="1549400"/>
+            <a:off x="406390" y="4216400"/>
+            <a:ext cx="3674441" cy="2019300"/>
           </a:xfrm>
           <a:prstGeom prst="roundRect">
             <a:avLst>
-              <a:gd name="adj" fmla="val 4721"/>
+              <a:gd name="adj" fmla="val 3623"/>
             </a:avLst>
           </a:prstGeom>
           <a:solidFill>
@@ -4649,8 +4676,8 @@
         </p:nvSpPr>
         <p:spPr>
           <a:xfrm>
-            <a:off x="424678" y="3541776"/>
-            <a:ext cx="54864" cy="1476248"/>
+            <a:off x="424678" y="4252976"/>
+            <a:ext cx="54864" cy="1946148"/>
           </a:xfrm>
           <a:prstGeom prst="roundRect">
             <a:avLst>
@@ -4671,8 +4698,8 @@
         </p:nvSpPr>
         <p:spPr>
           <a:xfrm>
-            <a:off x="634990" y="3669792"/>
-            <a:ext cx="3217241" cy="320040"/>
+            <a:off x="634990" y="4326128"/>
+            <a:ext cx="3217241" cy="274320"/>
           </a:xfrm>
           <a:prstGeom prst="rect">
             <a:avLst/>
@@ -4688,7 +4715,7 @@
               <a:buNone/>
             </a:pPr>
             <a:r>
-              <a:rPr lang="en-US" sz="2000" b="1" dirty="0">
+              <a:rPr lang="en-US" sz="1600" b="1" dirty="0">
                 <a:solidFill>
                   <a:srgbClr val="00F0FF"/>
                 </a:solidFill>
@@ -4698,7 +4725,7 @@
               </a:rPr>
               <a:t>Componenti &amp; Macro</a:t>
             </a:r>
-            <a:endParaRPr lang="en-US" sz="2000" dirty="0"/>
+            <a:endParaRPr lang="en-US" sz="1600" dirty="0"/>
           </a:p>
         </p:txBody>
       </p:sp>
@@ -4710,8 +4737,8 @@
         </p:nvSpPr>
         <p:spPr>
           <a:xfrm>
-            <a:off x="609585" y="4089400"/>
-            <a:ext cx="3268052" cy="685800"/>
+            <a:off x="634984" y="4902200"/>
+            <a:ext cx="3217253" cy="977900"/>
           </a:xfrm>
           <a:prstGeom prst="rect">
             <a:avLst/>
@@ -4727,7 +4754,7 @@
               <a:buNone/>
             </a:pPr>
             <a:r>
-              <a:rPr lang="en-US" sz="1800" dirty="0">
+              <a:rPr lang="en-US" sz="1300" dirty="0">
                 <a:solidFill>
                   <a:srgbClr val="FFFFFF"/>
                 </a:solidFill>
@@ -4737,7 +4764,7 @@
               </a:rPr>
               <a:t>Creazione di blocchi riutilizzabili parametrici con la direttiva component.</a:t>
             </a:r>
-            <a:endParaRPr lang="en-US" sz="1800" dirty="0"/>
+            <a:endParaRPr lang="en-US" sz="1300" dirty="0"/>
           </a:p>
         </p:txBody>
       </p:sp>
@@ -4749,12 +4776,12 @@
         </p:nvSpPr>
         <p:spPr>
           <a:xfrm>
-            <a:off x="4258627" y="3505200"/>
-            <a:ext cx="3674441" cy="1320800"/>
+            <a:off x="4258627" y="4216400"/>
+            <a:ext cx="3674441" cy="2019300"/>
           </a:xfrm>
           <a:prstGeom prst="roundRect">
             <a:avLst>
-              <a:gd name="adj" fmla="val 5538"/>
+              <a:gd name="adj" fmla="val 3623"/>
             </a:avLst>
           </a:prstGeom>
           <a:solidFill>
@@ -4776,8 +4803,8 @@
         </p:nvSpPr>
         <p:spPr>
           <a:xfrm>
-            <a:off x="4276915" y="3541776"/>
-            <a:ext cx="54864" cy="1247648"/>
+            <a:off x="4276915" y="4252976"/>
+            <a:ext cx="54864" cy="1946148"/>
           </a:xfrm>
           <a:prstGeom prst="roundRect">
             <a:avLst>
@@ -4798,8 +4825,8 @@
         </p:nvSpPr>
         <p:spPr>
           <a:xfrm>
-            <a:off x="4487227" y="3669792"/>
-            <a:ext cx="3217241" cy="320040"/>
+            <a:off x="4487227" y="4326128"/>
+            <a:ext cx="3217241" cy="274320"/>
           </a:xfrm>
           <a:prstGeom prst="rect">
             <a:avLst/>
@@ -4815,7 +4842,7 @@
               <a:buNone/>
             </a:pPr>
             <a:r>
-              <a:rPr lang="en-US" sz="2000" b="1" dirty="0">
+              <a:rPr lang="en-US" sz="1600" b="1" dirty="0">
                 <a:solidFill>
                   <a:srgbClr val="00FF9F"/>
                 </a:solidFill>
@@ -4825,7 +4852,7 @@
               </a:rPr>
               <a:t>Data Binding </a:t>
             </a:r>
-            <a:endParaRPr lang="en-US" sz="2000" dirty="0"/>
+            <a:endParaRPr lang="en-US" sz="1600" dirty="0"/>
           </a:p>
         </p:txBody>
       </p:sp>
@@ -4837,8 +4864,8 @@
         </p:nvSpPr>
         <p:spPr>
           <a:xfrm>
-            <a:off x="4461822" y="4089400"/>
-            <a:ext cx="3268052" cy="457200"/>
+            <a:off x="4487221" y="4902200"/>
+            <a:ext cx="3217253" cy="977900"/>
           </a:xfrm>
           <a:prstGeom prst="rect">
             <a:avLst/>
@@ -4854,7 +4881,7 @@
               <a:buNone/>
             </a:pPr>
             <a:r>
-              <a:rPr lang="en-US" sz="1800" dirty="0">
+              <a:rPr lang="en-US" sz="1300" dirty="0">
                 <a:solidFill>
                   <a:srgbClr val="FFFFFF"/>
                 </a:solidFill>
@@ -4864,7 +4891,7 @@
               </a:rPr>
               <a:t>Iterazione dinamica su dataset JSON o CSV per reportistica automatica.</a:t>
             </a:r>
-            <a:endParaRPr lang="en-US" sz="1800" dirty="0"/>
+            <a:endParaRPr lang="en-US" sz="1300" dirty="0"/>
           </a:p>
         </p:txBody>
       </p:sp>
@@ -4876,12 +4903,12 @@
         </p:nvSpPr>
         <p:spPr>
           <a:xfrm>
-            <a:off x="8110864" y="3505200"/>
-            <a:ext cx="3674441" cy="1320800"/>
+            <a:off x="8110864" y="4216400"/>
+            <a:ext cx="3674441" cy="2019300"/>
           </a:xfrm>
           <a:prstGeom prst="roundRect">
             <a:avLst>
-              <a:gd name="adj" fmla="val 5538"/>
+              <a:gd name="adj" fmla="val 3623"/>
             </a:avLst>
           </a:prstGeom>
           <a:solidFill>
@@ -4903,8 +4930,8 @@
         </p:nvSpPr>
         <p:spPr>
           <a:xfrm>
-            <a:off x="8129152" y="3541776"/>
-            <a:ext cx="54864" cy="1247648"/>
+            <a:off x="8129152" y="4252976"/>
+            <a:ext cx="54864" cy="1946148"/>
           </a:xfrm>
           <a:prstGeom prst="roundRect">
             <a:avLst>
@@ -4925,8 +4952,8 @@
         </p:nvSpPr>
         <p:spPr>
           <a:xfrm>
-            <a:off x="8339464" y="3669792"/>
-            <a:ext cx="3217241" cy="320040"/>
+            <a:off x="8339464" y="4326128"/>
+            <a:ext cx="3217241" cy="274320"/>
           </a:xfrm>
           <a:prstGeom prst="rect">
             <a:avLst/>
@@ -4942,7 +4969,7 @@
               <a:buNone/>
             </a:pPr>
             <a:r>
-              <a:rPr lang="en-US" sz="2000" b="1" dirty="0">
+              <a:rPr lang="en-US" sz="1600" b="1" dirty="0">
                 <a:solidFill>
                   <a:srgbClr val="FF0055"/>
                 </a:solidFill>
@@ -4952,7 +4979,7 @@
               </a:rPr>
               <a:t>Formule Matematiche</a:t>
             </a:r>
-            <a:endParaRPr lang="en-US" sz="2000" dirty="0"/>
+            <a:endParaRPr lang="en-US" sz="1600" dirty="0"/>
           </a:p>
         </p:txBody>
       </p:sp>
@@ -4964,8 +4991,8 @@
         </p:nvSpPr>
         <p:spPr>
           <a:xfrm>
-            <a:off x="8314059" y="4089400"/>
-            <a:ext cx="3268052" cy="457200"/>
+            <a:off x="8339458" y="4902200"/>
+            <a:ext cx="3217253" cy="977900"/>
           </a:xfrm>
           <a:prstGeom prst="rect">
             <a:avLst/>
@@ -4981,7 +5008,7 @@
               <a:buNone/>
             </a:pPr>
             <a:r>
-              <a:rPr lang="en-US" sz="1800" dirty="0">
+              <a:rPr lang="en-US" sz="1300" dirty="0">
                 <a:solidFill>
                   <a:srgbClr val="FFFFFF"/>
                 </a:solidFill>
@@ -4991,7 +5018,7 @@
               </a:rPr>
               <a:t>Rendering di formule scientifiche complesse in sintassi LaTeX / KaTeX.</a:t>
             </a:r>
-            <a:endParaRPr lang="en-US" sz="1800" dirty="0"/>
+            <a:endParaRPr lang="en-US" sz="1300" dirty="0"/>
           </a:p>
         </p:txBody>
       </p:sp>
@@ -5075,23 +5102,23 @@
         <p:spPr>
           <a:xfrm>
             <a:off x="406390" y="406400"/>
-            <a:ext cx="11378916" cy="571500"/>
-          </a:xfrm>
-          <a:prstGeom prst="rect">
-            <a:avLst/>
-          </a:prstGeom>
-          <a:noFill/>
-          <a:ln/>
-        </p:spPr>
-        <p:txBody>
-          <a:bodyPr wrap="square" lIns="0" tIns="0" rIns="0" bIns="0" rtlCol="0" anchor="ctr"/>
+            <a:ext cx="11378916" cy="698500"/>
+          </a:xfrm>
+          <a:prstGeom prst="rect">
+            <a:avLst/>
+          </a:prstGeom>
+          <a:noFill/>
+          <a:ln/>
+        </p:spPr>
+        <p:txBody>
+          <a:bodyPr wrap="square" lIns="0" tIns="0" rIns="0" bIns="0" rtlCol="0" anchor="t"/>
           <a:lstStyle/>
           <a:p>
             <a:pPr algn="l" indent="0" marL="0">
               <a:buNone/>
             </a:pPr>
             <a:r>
-              <a:rPr lang="en-US" sz="4600" b="1" dirty="0">
+              <a:rPr lang="en-US" sz="3300" b="1" dirty="0">
                 <a:solidFill>
                   <a:srgbClr val="FF2E88"/>
                 </a:solidFill>
@@ -5101,7 +5128,7 @@
               </a:rPr>
               <a:t>Compatibilità e Percorso di Migrazione</a:t>
             </a:r>
-            <a:endParaRPr lang="en-US" sz="4600" dirty="0"/>
+            <a:endParaRPr lang="en-US" sz="3300" dirty="0"/>
           </a:p>
         </p:txBody>
       </p:sp>
@@ -5113,24 +5140,24 @@
         </p:nvSpPr>
         <p:spPr>
           <a:xfrm>
-            <a:off x="406390" y="1155700"/>
-            <a:ext cx="11378916" cy="444500"/>
-          </a:xfrm>
-          <a:prstGeom prst="rect">
-            <a:avLst/>
-          </a:prstGeom>
-          <a:noFill/>
-          <a:ln/>
-        </p:spPr>
-        <p:txBody>
-          <a:bodyPr wrap="square" lIns="0" tIns="0" rIns="0" bIns="0" rtlCol="0" anchor="ctr"/>
+            <a:off x="406390" y="1282700"/>
+            <a:ext cx="11378916" cy="558800"/>
+          </a:xfrm>
+          <a:prstGeom prst="rect">
+            <a:avLst/>
+          </a:prstGeom>
+          <a:noFill/>
+          <a:ln/>
+        </p:spPr>
+        <p:txBody>
+          <a:bodyPr wrap="square" lIns="0" tIns="0" rIns="0" bIns="0" rtlCol="0" anchor="t"/>
           <a:lstStyle/>
           <a:p>
             <a:pPr algn="l" indent="0" marL="0">
               <a:buNone/>
             </a:pPr>
             <a:r>
-              <a:rPr lang="en-US" sz="3800" b="1" dirty="0">
+              <a:rPr lang="en-US" sz="2700" b="1" dirty="0">
                 <a:solidFill>
                   <a:srgbClr val="FFFFFF"/>
                 </a:solidFill>
@@ -5140,7 +5167,7 @@
               </a:rPr>
               <a:t>Continuità garantita tra ecosistema Markdown e Native DSL</a:t>
             </a:r>
-            <a:endParaRPr lang="en-US" sz="3800" dirty="0"/>
+            <a:endParaRPr lang="en-US" sz="2700" dirty="0"/>
           </a:p>
         </p:txBody>
       </p:sp>
@@ -5152,12 +5179,12 @@
         </p:nvSpPr>
         <p:spPr>
           <a:xfrm>
-            <a:off x="406390" y="1778000"/>
-            <a:ext cx="5600560" cy="1346200"/>
+            <a:off x="406390" y="2019300"/>
+            <a:ext cx="5600560" cy="1524000"/>
           </a:xfrm>
           <a:prstGeom prst="roundRect">
             <a:avLst>
-              <a:gd name="adj" fmla="val 5434"/>
+              <a:gd name="adj" fmla="val 4800"/>
             </a:avLst>
           </a:prstGeom>
           <a:solidFill>
@@ -5179,8 +5206,8 @@
         </p:nvSpPr>
         <p:spPr>
           <a:xfrm>
-            <a:off x="424678" y="1814576"/>
-            <a:ext cx="54864" cy="1273048"/>
+            <a:off x="424678" y="2055876"/>
+            <a:ext cx="54864" cy="1450848"/>
           </a:xfrm>
           <a:prstGeom prst="roundRect">
             <a:avLst>
@@ -5201,8 +5228,8 @@
         </p:nvSpPr>
         <p:spPr>
           <a:xfrm>
-            <a:off x="634990" y="1942592"/>
-            <a:ext cx="5143360" cy="320040"/>
+            <a:off x="634990" y="2129028"/>
+            <a:ext cx="5143360" cy="274320"/>
           </a:xfrm>
           <a:prstGeom prst="rect">
             <a:avLst/>
@@ -5218,7 +5245,7 @@
               <a:buNone/>
             </a:pPr>
             <a:r>
-              <a:rPr lang="en-US" sz="2000" b="1" dirty="0">
+              <a:rPr lang="en-US" sz="1600" b="1" dirty="0">
                 <a:solidFill>
                   <a:srgbClr val="FF2E88"/>
                 </a:solidFill>
@@ -5228,7 +5255,7 @@
               </a:rPr>
               <a:t>Markdown Yumia (.yumia.md)</a:t>
             </a:r>
-            <a:endParaRPr lang="en-US" sz="2000" dirty="0"/>
+            <a:endParaRPr lang="en-US" sz="1600" dirty="0"/>
           </a:p>
         </p:txBody>
       </p:sp>
@@ -5240,8 +5267,8 @@
         </p:nvSpPr>
         <p:spPr>
           <a:xfrm>
-            <a:off x="609585" y="2362200"/>
-            <a:ext cx="5194170" cy="482600"/>
+            <a:off x="634984" y="2705100"/>
+            <a:ext cx="5143371" cy="482600"/>
           </a:xfrm>
           <a:prstGeom prst="roundRect">
             <a:avLst>
@@ -5267,7 +5294,7 @@
         </p:nvSpPr>
         <p:spPr>
           <a:xfrm>
-            <a:off x="746745" y="2471928"/>
+            <a:off x="772144" y="2814828"/>
             <a:ext cx="91440" cy="91440"/>
           </a:xfrm>
           <a:prstGeom prst="ellipse">
@@ -5292,7 +5319,7 @@
         </p:nvSpPr>
         <p:spPr>
           <a:xfrm>
-            <a:off x="883905" y="2471928"/>
+            <a:off x="909304" y="2814828"/>
             <a:ext cx="91440" cy="91440"/>
           </a:xfrm>
           <a:prstGeom prst="ellipse">
@@ -5317,7 +5344,7 @@
         </p:nvSpPr>
         <p:spPr>
           <a:xfrm>
-            <a:off x="1021065" y="2471928"/>
+            <a:off x="1046464" y="2814828"/>
             <a:ext cx="91440" cy="91440"/>
           </a:xfrm>
           <a:prstGeom prst="ellipse">
@@ -5342,8 +5369,8 @@
         </p:nvSpPr>
         <p:spPr>
           <a:xfrm>
-            <a:off x="792465" y="2654808"/>
-            <a:ext cx="4828410" cy="116840"/>
+            <a:off x="817864" y="2997708"/>
+            <a:ext cx="4777611" cy="116840"/>
           </a:xfrm>
           <a:prstGeom prst="rect">
             <a:avLst/>
@@ -5381,8 +5408,8 @@
         </p:nvSpPr>
         <p:spPr>
           <a:xfrm>
-            <a:off x="406390" y="3302000"/>
-            <a:ext cx="5600560" cy="457200"/>
+            <a:off x="406390" y="3721100"/>
+            <a:ext cx="5600560" cy="673100"/>
           </a:xfrm>
           <a:prstGeom prst="rect">
             <a:avLst/>
@@ -5398,7 +5425,7 @@
               <a:buNone/>
             </a:pPr>
             <a:r>
-              <a:rPr lang="en-US" sz="1800" dirty="0">
+              <a:rPr lang="en-US" sz="1300" dirty="0">
                 <a:solidFill>
                   <a:srgbClr val="FFFFFF"/>
                 </a:solidFill>
@@ -5408,7 +5435,7 @@
               </a:rPr>
               <a:t>Compatibile con lettori Markdown standard, esteso tramite direttive semantiche.</a:t>
             </a:r>
-            <a:endParaRPr lang="en-US" sz="1800" dirty="0"/>
+            <a:endParaRPr lang="en-US" sz="1300" dirty="0"/>
           </a:p>
         </p:txBody>
       </p:sp>
@@ -5420,12 +5447,12 @@
         </p:nvSpPr>
         <p:spPr>
           <a:xfrm>
-            <a:off x="6184745" y="1778000"/>
-            <a:ext cx="5600560" cy="1346200"/>
+            <a:off x="6184745" y="2019300"/>
+            <a:ext cx="5600560" cy="1524000"/>
           </a:xfrm>
           <a:prstGeom prst="roundRect">
             <a:avLst>
-              <a:gd name="adj" fmla="val 5434"/>
+              <a:gd name="adj" fmla="val 4800"/>
             </a:avLst>
           </a:prstGeom>
           <a:solidFill>
@@ -5447,8 +5474,8 @@
         </p:nvSpPr>
         <p:spPr>
           <a:xfrm>
-            <a:off x="6203033" y="1814576"/>
-            <a:ext cx="54864" cy="1273048"/>
+            <a:off x="6203033" y="2055876"/>
+            <a:ext cx="54864" cy="1450848"/>
           </a:xfrm>
           <a:prstGeom prst="roundRect">
             <a:avLst>
@@ -5469,8 +5496,8 @@
         </p:nvSpPr>
         <p:spPr>
           <a:xfrm>
-            <a:off x="6413345" y="1942592"/>
-            <a:ext cx="5143360" cy="320040"/>
+            <a:off x="6413345" y="2129028"/>
+            <a:ext cx="5143360" cy="274320"/>
           </a:xfrm>
           <a:prstGeom prst="rect">
             <a:avLst/>
@@ -5486,7 +5513,7 @@
               <a:buNone/>
             </a:pPr>
             <a:r>
-              <a:rPr lang="en-US" sz="2000" b="1" dirty="0">
+              <a:rPr lang="en-US" sz="1600" b="1" dirty="0">
                 <a:solidFill>
                   <a:srgbClr val="00FF9F"/>
                 </a:solidFill>
@@ -5496,7 +5523,7 @@
               </a:rPr>
               <a:t>Native Yumia (.yumia)</a:t>
             </a:r>
-            <a:endParaRPr lang="en-US" sz="2000" dirty="0"/>
+            <a:endParaRPr lang="en-US" sz="1600" dirty="0"/>
           </a:p>
         </p:txBody>
       </p:sp>
@@ -5508,8 +5535,8 @@
         </p:nvSpPr>
         <p:spPr>
           <a:xfrm>
-            <a:off x="6387940" y="2362200"/>
-            <a:ext cx="5194170" cy="482600"/>
+            <a:off x="6413340" y="2705100"/>
+            <a:ext cx="5143371" cy="482600"/>
           </a:xfrm>
           <a:prstGeom prst="roundRect">
             <a:avLst>
@@ -5535,7 +5562,7 @@
         </p:nvSpPr>
         <p:spPr>
           <a:xfrm>
-            <a:off x="6525100" y="2471928"/>
+            <a:off x="6550500" y="2814828"/>
             <a:ext cx="91440" cy="91440"/>
           </a:xfrm>
           <a:prstGeom prst="ellipse">
@@ -5560,7 +5587,7 @@
         </p:nvSpPr>
         <p:spPr>
           <a:xfrm>
-            <a:off x="6662260" y="2471928"/>
+            <a:off x="6687660" y="2814828"/>
             <a:ext cx="91440" cy="91440"/>
           </a:xfrm>
           <a:prstGeom prst="ellipse">
@@ -5585,7 +5612,7 @@
         </p:nvSpPr>
         <p:spPr>
           <a:xfrm>
-            <a:off x="6799420" y="2471928"/>
+            <a:off x="6824820" y="2814828"/>
             <a:ext cx="91440" cy="91440"/>
           </a:xfrm>
           <a:prstGeom prst="ellipse">
@@ -5610,8 +5637,8 @@
         </p:nvSpPr>
         <p:spPr>
           <a:xfrm>
-            <a:off x="6570820" y="2654808"/>
-            <a:ext cx="4828410" cy="116840"/>
+            <a:off x="6596220" y="2997708"/>
+            <a:ext cx="4777611" cy="116840"/>
           </a:xfrm>
           <a:prstGeom prst="rect">
             <a:avLst/>
@@ -5649,8 +5676,8 @@
         </p:nvSpPr>
         <p:spPr>
           <a:xfrm>
-            <a:off x="6184745" y="3302000"/>
-            <a:ext cx="5600560" cy="457200"/>
+            <a:off x="6184745" y="3721100"/>
+            <a:ext cx="5600560" cy="673100"/>
           </a:xfrm>
           <a:prstGeom prst="rect">
             <a:avLst/>
@@ -5666,7 +5693,7 @@
               <a:buNone/>
             </a:pPr>
             <a:r>
-              <a:rPr lang="en-US" sz="1800" dirty="0">
+              <a:rPr lang="en-US" sz="1300" dirty="0">
                 <a:solidFill>
                   <a:srgbClr val="FFFFFF"/>
                 </a:solidFill>
@@ -5676,7 +5703,7 @@
               </a:rPr>
               <a:t>Sintassi nativa più concisa, pulita e ottimizzata per i Design Compiler.</a:t>
             </a:r>
-            <a:endParaRPr lang="en-US" sz="1800" dirty="0"/>
+            <a:endParaRPr lang="en-US" sz="1300" dirty="0"/>
           </a:p>
         </p:txBody>
       </p:sp>
@@ -5688,7 +5715,7 @@
         </p:nvSpPr>
         <p:spPr>
           <a:xfrm>
-            <a:off x="406390" y="3937000"/>
+            <a:off x="406390" y="4572000"/>
             <a:ext cx="11378916" cy="831850"/>
           </a:xfrm>
           <a:prstGeom prst="roundRect">
@@ -5715,7 +5742,7 @@
         </p:nvSpPr>
         <p:spPr>
           <a:xfrm>
-            <a:off x="543550" y="4010152"/>
+            <a:off x="543550" y="4645152"/>
             <a:ext cx="11104596" cy="274320"/>
           </a:xfrm>
           <a:prstGeom prst="rect">
@@ -5754,7 +5781,7 @@
         </p:nvSpPr>
         <p:spPr>
           <a:xfrm>
-            <a:off x="543550" y="4330192"/>
+            <a:off x="543550" y="4965192"/>
             <a:ext cx="11104596" cy="365506"/>
           </a:xfrm>
           <a:prstGeom prst="rect">
@@ -5865,23 +5892,23 @@
         <p:spPr>
           <a:xfrm>
             <a:off x="406390" y="406400"/>
-            <a:ext cx="11378916" cy="571500"/>
-          </a:xfrm>
-          <a:prstGeom prst="rect">
-            <a:avLst/>
-          </a:prstGeom>
-          <a:noFill/>
-          <a:ln/>
-        </p:spPr>
-        <p:txBody>
-          <a:bodyPr wrap="square" lIns="0" tIns="0" rIns="0" bIns="0" rtlCol="0" anchor="ctr"/>
+            <a:ext cx="11378916" cy="698500"/>
+          </a:xfrm>
+          <a:prstGeom prst="rect">
+            <a:avLst/>
+          </a:prstGeom>
+          <a:noFill/>
+          <a:ln/>
+        </p:spPr>
+        <p:txBody>
+          <a:bodyPr wrap="square" lIns="0" tIns="0" rIns="0" bIns="0" rtlCol="0" anchor="t"/>
           <a:lstStyle/>
           <a:p>
             <a:pPr algn="l" indent="0" marL="0">
               <a:buNone/>
             </a:pPr>
             <a:r>
-              <a:rPr lang="en-US" sz="4600" b="1" dirty="0">
+              <a:rPr lang="en-US" sz="3300" b="1" dirty="0">
                 <a:solidFill>
                   <a:srgbClr val="FF2E88"/>
                 </a:solidFill>
@@ -5891,7 +5918,7 @@
               </a:rPr>
               <a:t>Vantaggi, Limiti e Sviluppi Futuri</a:t>
             </a:r>
-            <a:endParaRPr lang="en-US" sz="4600" dirty="0"/>
+            <a:endParaRPr lang="en-US" sz="3300" dirty="0"/>
           </a:p>
         </p:txBody>
       </p:sp>
@@ -5903,24 +5930,24 @@
         </p:nvSpPr>
         <p:spPr>
           <a:xfrm>
-            <a:off x="406390" y="1155700"/>
-            <a:ext cx="11378916" cy="444500"/>
-          </a:xfrm>
-          <a:prstGeom prst="rect">
-            <a:avLst/>
-          </a:prstGeom>
-          <a:noFill/>
-          <a:ln/>
-        </p:spPr>
-        <p:txBody>
-          <a:bodyPr wrap="square" lIns="0" tIns="0" rIns="0" bIns="0" rtlCol="0" anchor="ctr"/>
+            <a:off x="406390" y="1282700"/>
+            <a:ext cx="11378916" cy="558800"/>
+          </a:xfrm>
+          <a:prstGeom prst="rect">
+            <a:avLst/>
+          </a:prstGeom>
+          <a:noFill/>
+          <a:ln/>
+        </p:spPr>
+        <p:txBody>
+          <a:bodyPr wrap="square" lIns="0" tIns="0" rIns="0" bIns="0" rtlCol="0" anchor="t"/>
           <a:lstStyle/>
           <a:p>
             <a:pPr algn="l" indent="0" marL="0">
               <a:buNone/>
             </a:pPr>
             <a:r>
-              <a:rPr lang="en-US" sz="3800" b="1" dirty="0">
+              <a:rPr lang="en-US" sz="2700" b="1" dirty="0">
                 <a:solidFill>
                   <a:srgbClr val="FFFFFF"/>
                 </a:solidFill>
@@ -5930,7 +5957,7 @@
               </a:rPr>
               <a:t>Valutazione dello stato attuale e roadmap del progetto</a:t>
             </a:r>
-            <a:endParaRPr lang="en-US" sz="3800" dirty="0"/>
+            <a:endParaRPr lang="en-US" sz="2700" dirty="0"/>
           </a:p>
         </p:txBody>
       </p:sp>
@@ -5942,12 +5969,12 @@
         </p:nvSpPr>
         <p:spPr>
           <a:xfrm>
-            <a:off x="406390" y="1778000"/>
-            <a:ext cx="3674441" cy="3657600"/>
+            <a:off x="406390" y="2019300"/>
+            <a:ext cx="3674441" cy="5118100"/>
           </a:xfrm>
           <a:prstGeom prst="roundRect">
             <a:avLst>
-              <a:gd name="adj" fmla="val 2000"/>
+              <a:gd name="adj" fmla="val 1991"/>
             </a:avLst>
           </a:prstGeom>
           <a:solidFill>
@@ -5969,8 +5996,8 @@
         </p:nvSpPr>
         <p:spPr>
           <a:xfrm>
-            <a:off x="424678" y="1814576"/>
-            <a:ext cx="54864" cy="3584448"/>
+            <a:off x="424678" y="2055876"/>
+            <a:ext cx="54864" cy="5044948"/>
           </a:xfrm>
           <a:prstGeom prst="roundRect">
             <a:avLst>
@@ -5991,8 +6018,8 @@
         </p:nvSpPr>
         <p:spPr>
           <a:xfrm>
-            <a:off x="634990" y="1942592"/>
-            <a:ext cx="3217241" cy="320040"/>
+            <a:off x="634990" y="2129028"/>
+            <a:ext cx="3217241" cy="274320"/>
           </a:xfrm>
           <a:prstGeom prst="rect">
             <a:avLst/>
@@ -6008,7 +6035,7 @@
               <a:buNone/>
             </a:pPr>
             <a:r>
-              <a:rPr lang="en-US" sz="2000" b="1" dirty="0">
+              <a:rPr lang="en-US" sz="1600" b="1" dirty="0">
                 <a:solidFill>
                   <a:srgbClr val="00FF9F"/>
                 </a:solidFill>
@@ -6018,7 +6045,7 @@
               </a:rPr>
               <a:t>Vantaggi Attuali</a:t>
             </a:r>
-            <a:endParaRPr lang="en-US" sz="2000" dirty="0"/>
+            <a:endParaRPr lang="en-US" sz="1600" dirty="0"/>
           </a:p>
         </p:txBody>
       </p:sp>
@@ -6030,8 +6057,8 @@
         </p:nvSpPr>
         <p:spPr>
           <a:xfrm>
-            <a:off x="609585" y="2362200"/>
-            <a:ext cx="3268052" cy="254000"/>
+            <a:off x="634984" y="2705100"/>
+            <a:ext cx="3217253" cy="673100"/>
           </a:xfrm>
           <a:prstGeom prst="rect">
             <a:avLst/>
@@ -6047,7 +6074,7 @@
               <a:buNone/>
             </a:pPr>
             <a:r>
-              <a:rPr lang="en-US" sz="1800" dirty="0">
+              <a:rPr lang="en-US" sz="1300" dirty="0">
                 <a:solidFill>
                   <a:srgbClr val="FFFFFF"/>
                 </a:solidFill>
@@ -6057,7 +6084,7 @@
               </a:rPr>
               <a:t>• Sorgente 100% versionabile con Git</a:t>
             </a:r>
-            <a:endParaRPr lang="en-US" sz="1800" dirty="0"/>
+            <a:endParaRPr lang="en-US" sz="1300" dirty="0"/>
           </a:p>
         </p:txBody>
       </p:sp>
@@ -6069,8 +6096,8 @@
         </p:nvSpPr>
         <p:spPr>
           <a:xfrm>
-            <a:off x="609585" y="2794000"/>
-            <a:ext cx="3268052" cy="457200"/>
+            <a:off x="634984" y="3556000"/>
+            <a:ext cx="3217253" cy="673100"/>
           </a:xfrm>
           <a:prstGeom prst="rect">
             <a:avLst/>
@@ -6086,7 +6113,7 @@
               <a:buNone/>
             </a:pPr>
             <a:r>
-              <a:rPr lang="en-US" sz="1800" dirty="0">
+              <a:rPr lang="en-US" sz="1300" dirty="0">
                 <a:solidFill>
                   <a:srgbClr val="FFFFFF"/>
                 </a:solidFill>
@@ -6096,7 +6123,7 @@
               </a:rPr>
               <a:t>• Tre output compilati da un unico file</a:t>
             </a:r>
-            <a:endParaRPr lang="en-US" sz="1800" dirty="0"/>
+            <a:endParaRPr lang="en-US" sz="1300" dirty="0"/>
           </a:p>
         </p:txBody>
       </p:sp>
@@ -6108,8 +6135,8 @@
         </p:nvSpPr>
         <p:spPr>
           <a:xfrm>
-            <a:off x="609585" y="3429000"/>
-            <a:ext cx="3268052" cy="457200"/>
+            <a:off x="634984" y="4406900"/>
+            <a:ext cx="3217253" cy="673100"/>
           </a:xfrm>
           <a:prstGeom prst="rect">
             <a:avLst/>
@@ -6125,7 +6152,7 @@
               <a:buNone/>
             </a:pPr>
             <a:r>
-              <a:rPr lang="en-US" sz="1800" dirty="0">
+              <a:rPr lang="en-US" sz="1300" dirty="0">
                 <a:solidFill>
                   <a:srgbClr val="FFFFFF"/>
                 </a:solidFill>
@@ -6135,7 +6162,7 @@
               </a:rPr>
               <a:t>• Layout e gerarchia visiva garantiti</a:t>
             </a:r>
-            <a:endParaRPr lang="en-US" sz="1800" dirty="0"/>
+            <a:endParaRPr lang="en-US" sz="1300" dirty="0"/>
           </a:p>
         </p:txBody>
       </p:sp>
@@ -6147,8 +6174,8 @@
         </p:nvSpPr>
         <p:spPr>
           <a:xfrm>
-            <a:off x="609585" y="4064000"/>
-            <a:ext cx="3268052" cy="457200"/>
+            <a:off x="634984" y="5257800"/>
+            <a:ext cx="3217253" cy="673100"/>
           </a:xfrm>
           <a:prstGeom prst="rect">
             <a:avLst/>
@@ -6164,7 +6191,7 @@
               <a:buNone/>
             </a:pPr>
             <a:r>
-              <a:rPr lang="en-US" sz="1800" dirty="0">
+              <a:rPr lang="en-US" sz="1300" dirty="0">
                 <a:solidFill>
                   <a:srgbClr val="FFFFFF"/>
                 </a:solidFill>
@@ -6174,7 +6201,7 @@
               </a:rPr>
               <a:t>• Linter automatico per design e WCAG</a:t>
             </a:r>
-            <a:endParaRPr lang="en-US" sz="1800" dirty="0"/>
+            <a:endParaRPr lang="en-US" sz="1300" dirty="0"/>
           </a:p>
         </p:txBody>
       </p:sp>
@@ -6186,8 +6213,8 @@
         </p:nvSpPr>
         <p:spPr>
           <a:xfrm>
-            <a:off x="609585" y="4699000"/>
-            <a:ext cx="3268052" cy="457200"/>
+            <a:off x="634984" y="6108700"/>
+            <a:ext cx="3217253" cy="673100"/>
           </a:xfrm>
           <a:prstGeom prst="rect">
             <a:avLst/>
@@ -6203,7 +6230,7 @@
               <a:buNone/>
             </a:pPr>
             <a:r>
-              <a:rPr lang="en-US" sz="1800" dirty="0">
+              <a:rPr lang="en-US" sz="1300" dirty="0">
                 <a:solidFill>
                   <a:srgbClr val="FFFFFF"/>
                 </a:solidFill>
@@ -6213,7 +6240,7 @@
               </a:rPr>
               <a:t>• Integrazione nativa con workflow AI</a:t>
             </a:r>
-            <a:endParaRPr lang="en-US" sz="1800" dirty="0"/>
+            <a:endParaRPr lang="en-US" sz="1300" dirty="0"/>
           </a:p>
         </p:txBody>
       </p:sp>
@@ -6225,12 +6252,12 @@
         </p:nvSpPr>
         <p:spPr>
           <a:xfrm>
-            <a:off x="4258627" y="1778000"/>
-            <a:ext cx="3674441" cy="3022600"/>
+            <a:off x="4258627" y="2019300"/>
+            <a:ext cx="3674441" cy="4267200"/>
           </a:xfrm>
           <a:prstGeom prst="roundRect">
             <a:avLst>
-              <a:gd name="adj" fmla="val 2420"/>
+              <a:gd name="adj" fmla="val 1991"/>
             </a:avLst>
           </a:prstGeom>
           <a:solidFill>
@@ -6252,8 +6279,8 @@
         </p:nvSpPr>
         <p:spPr>
           <a:xfrm>
-            <a:off x="4276915" y="1814576"/>
-            <a:ext cx="54864" cy="2949448"/>
+            <a:off x="4276915" y="2055876"/>
+            <a:ext cx="54864" cy="4194048"/>
           </a:xfrm>
           <a:prstGeom prst="roundRect">
             <a:avLst>
@@ -6274,8 +6301,8 @@
         </p:nvSpPr>
         <p:spPr>
           <a:xfrm>
-            <a:off x="4487227" y="1942592"/>
-            <a:ext cx="3217241" cy="320040"/>
+            <a:off x="4487227" y="2129028"/>
+            <a:ext cx="3217241" cy="274320"/>
           </a:xfrm>
           <a:prstGeom prst="rect">
             <a:avLst/>
@@ -6291,7 +6318,7 @@
               <a:buNone/>
             </a:pPr>
             <a:r>
-              <a:rPr lang="en-US" sz="2000" b="1" dirty="0">
+              <a:rPr lang="en-US" sz="1600" b="1" dirty="0">
                 <a:solidFill>
                   <a:srgbClr val="FFE600"/>
                 </a:solidFill>
@@ -6301,7 +6328,7 @@
               </a:rPr>
               <a:t>Aspetti da Consolidare</a:t>
             </a:r>
-            <a:endParaRPr lang="en-US" sz="2000" dirty="0"/>
+            <a:endParaRPr lang="en-US" sz="1600" dirty="0"/>
           </a:p>
         </p:txBody>
       </p:sp>
@@ -6313,8 +6340,8 @@
         </p:nvSpPr>
         <p:spPr>
           <a:xfrm>
-            <a:off x="4461822" y="2362200"/>
-            <a:ext cx="3268052" cy="457200"/>
+            <a:off x="4487221" y="2705100"/>
+            <a:ext cx="3217253" cy="673100"/>
           </a:xfrm>
           <a:prstGeom prst="rect">
             <a:avLst/>
@@ -6330,7 +6357,7 @@
               <a:buNone/>
             </a:pPr>
             <a:r>
-              <a:rPr lang="en-US" sz="1800" dirty="0">
+              <a:rPr lang="en-US" sz="1300" dirty="0">
                 <a:solidFill>
                   <a:srgbClr val="FFFFFF"/>
                 </a:solidFill>
@@ -6340,7 +6367,7 @@
               </a:rPr>
               <a:t>• Parità totale di rendering su edge case</a:t>
             </a:r>
-            <a:endParaRPr lang="en-US" sz="1800" dirty="0"/>
+            <a:endParaRPr lang="en-US" sz="1300" dirty="0"/>
           </a:p>
         </p:txBody>
       </p:sp>
@@ -6352,8 +6379,8 @@
         </p:nvSpPr>
         <p:spPr>
           <a:xfrm>
-            <a:off x="4461822" y="2997200"/>
-            <a:ext cx="3268052" cy="457200"/>
+            <a:off x="4487221" y="3556000"/>
+            <a:ext cx="3217253" cy="673100"/>
           </a:xfrm>
           <a:prstGeom prst="rect">
             <a:avLst/>
@@ -6369,7 +6396,7 @@
               <a:buNone/>
             </a:pPr>
             <a:r>
-              <a:rPr lang="en-US" sz="1800" dirty="0">
+              <a:rPr lang="en-US" sz="1300" dirty="0">
                 <a:solidFill>
                   <a:srgbClr val="FFFFFF"/>
                 </a:solidFill>
@@ -6379,7 +6406,7 @@
               </a:rPr>
               <a:t>• Estensione della copertura dei test</a:t>
             </a:r>
-            <a:endParaRPr lang="en-US" sz="1800" dirty="0"/>
+            <a:endParaRPr lang="en-US" sz="1300" dirty="0"/>
           </a:p>
         </p:txBody>
       </p:sp>
@@ -6391,8 +6418,8 @@
         </p:nvSpPr>
         <p:spPr>
           <a:xfrm>
-            <a:off x="4461822" y="3632200"/>
-            <a:ext cx="3268052" cy="457200"/>
+            <a:off x="4487221" y="4406900"/>
+            <a:ext cx="3217253" cy="673100"/>
           </a:xfrm>
           <a:prstGeom prst="rect">
             <a:avLst/>
@@ -6408,7 +6435,7 @@
               <a:buNone/>
             </a:pPr>
             <a:r>
-              <a:rPr lang="en-US" sz="1800" dirty="0">
+              <a:rPr lang="en-US" sz="1300" dirty="0">
                 <a:solidFill>
                   <a:srgbClr val="FFFFFF"/>
                 </a:solidFill>
@@ -6418,7 +6445,7 @@
               </a:rPr>
               <a:t>• Supporto a font e asset esterni complessi</a:t>
             </a:r>
-            <a:endParaRPr lang="en-US" sz="1800" dirty="0"/>
+            <a:endParaRPr lang="en-US" sz="1300" dirty="0"/>
           </a:p>
         </p:txBody>
       </p:sp>
@@ -6430,8 +6457,8 @@
         </p:nvSpPr>
         <p:spPr>
           <a:xfrm>
-            <a:off x="4461822" y="4267200"/>
-            <a:ext cx="3268052" cy="254000"/>
+            <a:off x="4487221" y="5257800"/>
+            <a:ext cx="3217253" cy="673100"/>
           </a:xfrm>
           <a:prstGeom prst="rect">
             <a:avLst/>
@@ -6447,7 +6474,7 @@
               <a:buNone/>
             </a:pPr>
             <a:r>
-              <a:rPr lang="en-US" sz="1800" dirty="0">
+              <a:rPr lang="en-US" sz="1300" dirty="0">
                 <a:solidFill>
                   <a:srgbClr val="FFFFFF"/>
                 </a:solidFill>
@@ -6457,7 +6484,7 @@
               </a:rPr>
               <a:t>• Documentazione di scenari avanzati</a:t>
             </a:r>
-            <a:endParaRPr lang="en-US" sz="1800" dirty="0"/>
+            <a:endParaRPr lang="en-US" sz="1300" dirty="0"/>
           </a:p>
         </p:txBody>
       </p:sp>
@@ -6469,12 +6496,12 @@
         </p:nvSpPr>
         <p:spPr>
           <a:xfrm>
-            <a:off x="8110864" y="1778000"/>
-            <a:ext cx="3674441" cy="3225800"/>
+            <a:off x="8110864" y="2019300"/>
+            <a:ext cx="3674441" cy="4267200"/>
           </a:xfrm>
           <a:prstGeom prst="roundRect">
             <a:avLst>
-              <a:gd name="adj" fmla="val 2268"/>
+              <a:gd name="adj" fmla="val 1991"/>
             </a:avLst>
           </a:prstGeom>
           <a:solidFill>
@@ -6496,8 +6523,8 @@
         </p:nvSpPr>
         <p:spPr>
           <a:xfrm>
-            <a:off x="8129152" y="1814576"/>
-            <a:ext cx="54864" cy="3152648"/>
+            <a:off x="8129152" y="2055876"/>
+            <a:ext cx="54864" cy="4194048"/>
           </a:xfrm>
           <a:prstGeom prst="roundRect">
             <a:avLst>
@@ -6518,8 +6545,8 @@
         </p:nvSpPr>
         <p:spPr>
           <a:xfrm>
-            <a:off x="8339464" y="1942592"/>
-            <a:ext cx="3217241" cy="320040"/>
+            <a:off x="8339464" y="2129028"/>
+            <a:ext cx="3217241" cy="274320"/>
           </a:xfrm>
           <a:prstGeom prst="rect">
             <a:avLst/>
@@ -6535,7 +6562,7 @@
               <a:buNone/>
             </a:pPr>
             <a:r>
-              <a:rPr lang="en-US" sz="2000" b="1" dirty="0">
+              <a:rPr lang="en-US" sz="1600" b="1" dirty="0">
                 <a:solidFill>
                   <a:srgbClr val="FF2E88"/>
                 </a:solidFill>
@@ -6545,7 +6572,7 @@
               </a:rPr>
               <a:t>Sviluppi Futuri</a:t>
             </a:r>
-            <a:endParaRPr lang="en-US" sz="2000" dirty="0"/>
+            <a:endParaRPr lang="en-US" sz="1600" dirty="0"/>
           </a:p>
         </p:txBody>
       </p:sp>
@@ -6557,8 +6584,8 @@
         </p:nvSpPr>
         <p:spPr>
           <a:xfrm>
-            <a:off x="8314059" y="2362200"/>
-            <a:ext cx="3268052" cy="457200"/>
+            <a:off x="8339458" y="2705100"/>
+            <a:ext cx="3217253" cy="673100"/>
           </a:xfrm>
           <a:prstGeom prst="rect">
             <a:avLst/>
@@ -6574,7 +6601,7 @@
               <a:buNone/>
             </a:pPr>
             <a:r>
-              <a:rPr lang="en-US" sz="1800" dirty="0">
+              <a:rPr lang="en-US" sz="1300" dirty="0">
                 <a:solidFill>
                   <a:srgbClr val="FFFFFF"/>
                 </a:solidFill>
@@ -6584,7 +6611,7 @@
               </a:rPr>
               <a:t>• Editor visuale WYSIWYG bidirezionale</a:t>
             </a:r>
-            <a:endParaRPr lang="en-US" sz="1800" dirty="0"/>
+            <a:endParaRPr lang="en-US" sz="1300" dirty="0"/>
           </a:p>
         </p:txBody>
       </p:sp>
@@ -6596,8 +6623,8 @@
         </p:nvSpPr>
         <p:spPr>
           <a:xfrm>
-            <a:off x="8314059" y="2997200"/>
-            <a:ext cx="3268052" cy="457200"/>
+            <a:off x="8339458" y="3556000"/>
+            <a:ext cx="3217253" cy="673100"/>
           </a:xfrm>
           <a:prstGeom prst="rect">
             <a:avLst/>
@@ -6613,7 +6640,7 @@
               <a:buNone/>
             </a:pPr>
             <a:r>
-              <a:rPr lang="en-US" sz="1800" dirty="0">
+              <a:rPr lang="en-US" sz="1300" dirty="0">
                 <a:solidFill>
                   <a:srgbClr val="FFFFFF"/>
                 </a:solidFill>
@@ -6623,7 +6650,7 @@
               </a:rPr>
               <a:t>• Collaborazione in tempo reale su browser</a:t>
             </a:r>
-            <a:endParaRPr lang="en-US" sz="1800" dirty="0"/>
+            <a:endParaRPr lang="en-US" sz="1300" dirty="0"/>
           </a:p>
         </p:txBody>
       </p:sp>
@@ -6635,8 +6662,8 @@
         </p:nvSpPr>
         <p:spPr>
           <a:xfrm>
-            <a:off x="8314059" y="3632200"/>
-            <a:ext cx="3268052" cy="457200"/>
+            <a:off x="8339458" y="4406900"/>
+            <a:ext cx="3217253" cy="673100"/>
           </a:xfrm>
           <a:prstGeom prst="rect">
             <a:avLst/>
@@ -6652,7 +6679,7 @@
               <a:buNone/>
             </a:pPr>
             <a:r>
-              <a:rPr lang="en-US" sz="1800" dirty="0">
+              <a:rPr lang="en-US" sz="1300" dirty="0">
                 <a:solidFill>
                   <a:srgbClr val="FFFFFF"/>
                 </a:solidFill>
@@ -6662,7 +6689,7 @@
               </a:rPr>
               <a:t>• Integrazione con modelli LLM in locale</a:t>
             </a:r>
-            <a:endParaRPr lang="en-US" sz="1800" dirty="0"/>
+            <a:endParaRPr lang="en-US" sz="1300" dirty="0"/>
           </a:p>
         </p:txBody>
       </p:sp>
@@ -6674,8 +6701,8 @@
         </p:nvSpPr>
         <p:spPr>
           <a:xfrm>
-            <a:off x="8314059" y="4267200"/>
-            <a:ext cx="3268052" cy="457200"/>
+            <a:off x="8339458" y="5257800"/>
+            <a:ext cx="3217253" cy="673100"/>
           </a:xfrm>
           <a:prstGeom prst="rect">
             <a:avLst/>
@@ -6691,7 +6718,7 @@
               <a:buNone/>
             </a:pPr>
             <a:r>
-              <a:rPr lang="en-US" sz="1800" dirty="0">
+              <a:rPr lang="en-US" sz="1300" dirty="0">
                 <a:solidFill>
                   <a:srgbClr val="FFFFFF"/>
                 </a:solidFill>
@@ -6701,7 +6728,7 @@
               </a:rPr>
               <a:t>• Plugin per VS Code ed estensioni IDE</a:t>
             </a:r>
-            <a:endParaRPr lang="en-US" sz="1800" dirty="0"/>
+            <a:endParaRPr lang="en-US" sz="1300" dirty="0"/>
           </a:p>
         </p:txBody>
       </p:sp>
@@ -6778,96 +6805,18 @@
       </p:grpSpPr>
       <p:sp>
         <p:nvSpPr>
-          <p:cNvPr id="2" name="Text 0"/>
-          <p:cNvSpPr/>
-          <p:nvPr/>
-        </p:nvSpPr>
-        <p:spPr>
-          <a:xfrm>
-            <a:off x="406390" y="406400"/>
-            <a:ext cx="11378916" cy="1060704"/>
-          </a:xfrm>
-          <a:prstGeom prst="rect">
-            <a:avLst/>
-          </a:prstGeom>
-          <a:noFill/>
-          <a:ln/>
-        </p:spPr>
-        <p:txBody>
-          <a:bodyPr wrap="square" rtlCol="0" anchor="ctr"/>
-          <a:lstStyle/>
-          <a:p>
-            <a:pPr algn="ctr" indent="0" marL="0">
-              <a:buNone/>
-            </a:pPr>
-            <a:r>
-              <a:rPr lang="en-US" sz="2900" b="1" dirty="0">
-                <a:solidFill>
-                  <a:srgbClr val="FFFFFF"/>
-                </a:solidFill>
-                <a:latin typeface="Trebuchet MS" pitchFamily="34" charset="0"/>
-                <a:ea typeface="Trebuchet MS" pitchFamily="34" charset="-122"/>
-                <a:cs typeface="Trebuchet MS" pitchFamily="34" charset="-120"/>
-              </a:rPr>
-              <a:t>Descrivere ciò che si vuole comunicare,</a:t>
-            </a:r>
-            <a:endParaRPr lang="en-US" sz="2900" dirty="0"/>
-          </a:p>
-        </p:txBody>
-      </p:sp>
-      <p:sp>
-        <p:nvSpPr>
-          <p:cNvPr id="3" name="Text 1"/>
-          <p:cNvSpPr/>
-          <p:nvPr/>
-        </p:nvSpPr>
-        <p:spPr>
-          <a:xfrm>
-            <a:off x="406390" y="1540256"/>
-            <a:ext cx="11378916" cy="365760"/>
-          </a:xfrm>
-          <a:prstGeom prst="rect">
-            <a:avLst/>
-          </a:prstGeom>
-          <a:noFill/>
-          <a:ln/>
-        </p:spPr>
-        <p:txBody>
-          <a:bodyPr wrap="square" rtlCol="0" anchor="ctr"/>
-          <a:lstStyle/>
-          <a:p>
-            <a:pPr algn="ctr" indent="0" marL="0">
-              <a:buNone/>
-            </a:pPr>
-            <a:r>
-              <a:rPr lang="en-US" sz="1600" dirty="0">
-                <a:solidFill>
-                  <a:srgbClr val="A7A7B5"/>
-                </a:solidFill>
-                <a:latin typeface="Segoe UI" pitchFamily="34" charset="0"/>
-                <a:ea typeface="Segoe UI" pitchFamily="34" charset="-122"/>
-                <a:cs typeface="Segoe UI" pitchFamily="34" charset="-120"/>
-              </a:rPr>
-              <a:t>lasciare al compilatore il compito di comporlo.</a:t>
-            </a:r>
-            <a:endParaRPr lang="en-US" sz="1600" dirty="0"/>
-          </a:p>
-        </p:txBody>
-      </p:sp>
-      <p:sp>
-        <p:nvSpPr>
-          <p:cNvPr id="4" name="Shape 2"/>
-          <p:cNvSpPr/>
-          <p:nvPr/>
-        </p:nvSpPr>
-        <p:spPr>
-          <a:xfrm>
-            <a:off x="406390" y="1600200"/>
-            <a:ext cx="3674441" cy="1320800"/>
+          <p:cNvPr id="2" name="Shape 0"/>
+          <p:cNvSpPr/>
+          <p:nvPr/>
+        </p:nvSpPr>
+        <p:spPr>
+          <a:xfrm>
+            <a:off x="5117440" y="479552"/>
+            <a:ext cx="1956816" cy="237744"/>
           </a:xfrm>
           <a:prstGeom prst="roundRect">
             <a:avLst>
-              <a:gd name="adj" fmla="val 5538"/>
+              <a:gd name="adj" fmla="val 61538"/>
             </a:avLst>
           </a:prstGeom>
           <a:solidFill>
@@ -6883,14 +6832,158 @@
       </p:sp>
       <p:sp>
         <p:nvSpPr>
-          <p:cNvPr id="5" name="Shape 3"/>
-          <p:cNvSpPr/>
-          <p:nvPr/>
-        </p:nvSpPr>
-        <p:spPr>
-          <a:xfrm>
-            <a:off x="424678" y="1636776"/>
-            <a:ext cx="54864" cy="1247648"/>
+          <p:cNvPr id="3" name="Text 1"/>
+          <p:cNvSpPr/>
+          <p:nvPr/>
+        </p:nvSpPr>
+        <p:spPr>
+          <a:xfrm>
+            <a:off x="5117440" y="479552"/>
+            <a:ext cx="1956816" cy="237744"/>
+          </a:xfrm>
+          <a:prstGeom prst="rect">
+            <a:avLst/>
+          </a:prstGeom>
+          <a:noFill/>
+          <a:ln/>
+        </p:spPr>
+        <p:txBody>
+          <a:bodyPr wrap="square" rtlCol="0" anchor="ctr"/>
+          <a:lstStyle/>
+          <a:p>
+            <a:pPr algn="ctr" indent="0" marL="0">
+              <a:buNone/>
+            </a:pPr>
+            <a:r>
+              <a:rPr lang="en-US" sz="900" b="1" dirty="0">
+                <a:solidFill>
+                  <a:srgbClr val="FF2E88"/>
+                </a:solidFill>
+                <a:latin typeface="Trebuchet MS" pitchFamily="34" charset="0"/>
+                <a:ea typeface="Trebuchet MS" pitchFamily="34" charset="-122"/>
+                <a:cs typeface="Trebuchet MS" pitchFamily="34" charset="-120"/>
+              </a:rPr>
+              <a:t>DESIGN AS CODE</a:t>
+            </a:r>
+            <a:endParaRPr lang="en-US" sz="900" dirty="0"/>
+          </a:p>
+        </p:txBody>
+      </p:sp>
+      <p:sp>
+        <p:nvSpPr>
+          <p:cNvPr id="4" name="Text 2"/>
+          <p:cNvSpPr/>
+          <p:nvPr/>
+        </p:nvSpPr>
+        <p:spPr>
+          <a:xfrm>
+            <a:off x="406390" y="808736"/>
+            <a:ext cx="11378916" cy="402336"/>
+          </a:xfrm>
+          <a:prstGeom prst="rect">
+            <a:avLst/>
+          </a:prstGeom>
+          <a:noFill/>
+          <a:ln/>
+        </p:spPr>
+        <p:txBody>
+          <a:bodyPr wrap="square" rtlCol="0" anchor="t"/>
+          <a:lstStyle/>
+          <a:p>
+            <a:pPr algn="ctr" indent="0" marL="0">
+              <a:buNone/>
+            </a:pPr>
+            <a:r>
+              <a:rPr lang="en-US" sz="2400" b="1" dirty="0">
+                <a:solidFill>
+                  <a:srgbClr val="FFFFFF"/>
+                </a:solidFill>
+                <a:latin typeface="Trebuchet MS" pitchFamily="34" charset="0"/>
+                <a:ea typeface="Trebuchet MS" pitchFamily="34" charset="-122"/>
+                <a:cs typeface="Trebuchet MS" pitchFamily="34" charset="-120"/>
+              </a:rPr>
+              <a:t>Descrivere ciò che si vuole comunicare,</a:t>
+            </a:r>
+            <a:endParaRPr lang="en-US" sz="2400" dirty="0"/>
+          </a:p>
+        </p:txBody>
+      </p:sp>
+      <p:sp>
+        <p:nvSpPr>
+          <p:cNvPr id="5" name="Text 3"/>
+          <p:cNvSpPr/>
+          <p:nvPr/>
+        </p:nvSpPr>
+        <p:spPr>
+          <a:xfrm>
+            <a:off x="406390" y="1247648"/>
+            <a:ext cx="11378916" cy="239776"/>
+          </a:xfrm>
+          <a:prstGeom prst="rect">
+            <a:avLst/>
+          </a:prstGeom>
+          <a:noFill/>
+          <a:ln/>
+        </p:spPr>
+        <p:txBody>
+          <a:bodyPr wrap="square" rtlCol="0" anchor="t"/>
+          <a:lstStyle/>
+          <a:p>
+            <a:pPr algn="ctr" indent="0" marL="0">
+              <a:buNone/>
+            </a:pPr>
+            <a:r>
+              <a:rPr lang="en-US" sz="1200" dirty="0">
+                <a:solidFill>
+                  <a:srgbClr val="A7A7B5"/>
+                </a:solidFill>
+                <a:latin typeface="Segoe UI" pitchFamily="34" charset="0"/>
+                <a:ea typeface="Segoe UI" pitchFamily="34" charset="-122"/>
+                <a:cs typeface="Segoe UI" pitchFamily="34" charset="-120"/>
+              </a:rPr>
+              <a:t>lasciare al compilatore il compito di comporlo.</a:t>
+            </a:r>
+            <a:endParaRPr lang="en-US" sz="1200" dirty="0"/>
+          </a:p>
+        </p:txBody>
+      </p:sp>
+      <p:sp>
+        <p:nvSpPr>
+          <p:cNvPr id="6" name="Shape 4"/>
+          <p:cNvSpPr/>
+          <p:nvPr/>
+        </p:nvSpPr>
+        <p:spPr>
+          <a:xfrm>
+            <a:off x="406390" y="1701800"/>
+            <a:ext cx="3674441" cy="2019300"/>
+          </a:xfrm>
+          <a:prstGeom prst="roundRect">
+            <a:avLst>
+              <a:gd name="adj" fmla="val 3623"/>
+            </a:avLst>
+          </a:prstGeom>
+          <a:solidFill>
+            <a:srgbClr val="151522"/>
+          </a:solidFill>
+          <a:ln w="19050">
+            <a:solidFill>
+              <a:srgbClr val="FF2E88"/>
+            </a:solidFill>
+            <a:prstDash val="solid"/>
+          </a:ln>
+        </p:spPr>
+      </p:sp>
+      <p:sp>
+        <p:nvSpPr>
+          <p:cNvPr id="7" name="Shape 5"/>
+          <p:cNvSpPr/>
+          <p:nvPr/>
+        </p:nvSpPr>
+        <p:spPr>
+          <a:xfrm>
+            <a:off x="424678" y="1738376"/>
+            <a:ext cx="54864" cy="1946148"/>
           </a:xfrm>
           <a:prstGeom prst="roundRect">
             <a:avLst>
@@ -6905,14 +6998,14 @@
       </p:sp>
       <p:sp>
         <p:nvSpPr>
-          <p:cNvPr id="6" name="Text 4"/>
-          <p:cNvSpPr/>
-          <p:nvPr/>
-        </p:nvSpPr>
-        <p:spPr>
-          <a:xfrm>
-            <a:off x="634990" y="1764792"/>
-            <a:ext cx="3217241" cy="320040"/>
+          <p:cNvPr id="8" name="Text 6"/>
+          <p:cNvSpPr/>
+          <p:nvPr/>
+        </p:nvSpPr>
+        <p:spPr>
+          <a:xfrm>
+            <a:off x="634990" y="1811528"/>
+            <a:ext cx="3217241" cy="274320"/>
           </a:xfrm>
           <a:prstGeom prst="rect">
             <a:avLst/>
@@ -6928,7 +7021,7 @@
               <a:buNone/>
             </a:pPr>
             <a:r>
-              <a:rPr lang="en-US" sz="2000" b="1" dirty="0">
+              <a:rPr lang="en-US" sz="1600" b="1" dirty="0">
                 <a:solidFill>
                   <a:srgbClr val="FF2E88"/>
                 </a:solidFill>
@@ -6938,20 +7031,20 @@
               </a:rPr>
               <a:t>1. Separazione</a:t>
             </a:r>
-            <a:endParaRPr lang="en-US" sz="2000" dirty="0"/>
-          </a:p>
-        </p:txBody>
-      </p:sp>
-      <p:sp>
-        <p:nvSpPr>
-          <p:cNvPr id="7" name="Text 5"/>
-          <p:cNvSpPr/>
-          <p:nvPr/>
-        </p:nvSpPr>
-        <p:spPr>
-          <a:xfrm>
-            <a:off x="609585" y="2184400"/>
-            <a:ext cx="3268052" cy="457200"/>
+            <a:endParaRPr lang="en-US" sz="1600" dirty="0"/>
+          </a:p>
+        </p:txBody>
+      </p:sp>
+      <p:sp>
+        <p:nvSpPr>
+          <p:cNvPr id="9" name="Text 7"/>
+          <p:cNvSpPr/>
+          <p:nvPr/>
+        </p:nvSpPr>
+        <p:spPr>
+          <a:xfrm>
+            <a:off x="634984" y="2387600"/>
+            <a:ext cx="3217253" cy="977900"/>
           </a:xfrm>
           <a:prstGeom prst="rect">
             <a:avLst/>
@@ -6967,7 +7060,7 @@
               <a:buNone/>
             </a:pPr>
             <a:r>
-              <a:rPr lang="en-US" sz="1800" dirty="0">
+              <a:rPr lang="en-US" sz="1300" dirty="0">
                 <a:solidFill>
                   <a:srgbClr val="FFFFFF"/>
                 </a:solidFill>
@@ -6977,24 +7070,24 @@
               </a:rPr>
               <a:t>Il contenuto è completamente disaccoppiato dalle coordinate grafiche.</a:t>
             </a:r>
-            <a:endParaRPr lang="en-US" sz="1800" dirty="0"/>
-          </a:p>
-        </p:txBody>
-      </p:sp>
-      <p:sp>
-        <p:nvSpPr>
-          <p:cNvPr id="8" name="Shape 6"/>
-          <p:cNvSpPr/>
-          <p:nvPr/>
-        </p:nvSpPr>
-        <p:spPr>
-          <a:xfrm>
-            <a:off x="4258627" y="1600200"/>
-            <a:ext cx="3674441" cy="1320800"/>
+            <a:endParaRPr lang="en-US" sz="1300" dirty="0"/>
+          </a:p>
+        </p:txBody>
+      </p:sp>
+      <p:sp>
+        <p:nvSpPr>
+          <p:cNvPr id="10" name="Shape 8"/>
+          <p:cNvSpPr/>
+          <p:nvPr/>
+        </p:nvSpPr>
+        <p:spPr>
+          <a:xfrm>
+            <a:off x="4258627" y="1701800"/>
+            <a:ext cx="3674441" cy="2019300"/>
           </a:xfrm>
           <a:prstGeom prst="roundRect">
             <a:avLst>
-              <a:gd name="adj" fmla="val 5538"/>
+              <a:gd name="adj" fmla="val 3623"/>
             </a:avLst>
           </a:prstGeom>
           <a:solidFill>
@@ -7010,14 +7103,14 @@
       </p:sp>
       <p:sp>
         <p:nvSpPr>
-          <p:cNvPr id="9" name="Shape 7"/>
-          <p:cNvSpPr/>
-          <p:nvPr/>
-        </p:nvSpPr>
-        <p:spPr>
-          <a:xfrm>
-            <a:off x="4276915" y="1636776"/>
-            <a:ext cx="54864" cy="1247648"/>
+          <p:cNvPr id="11" name="Shape 9"/>
+          <p:cNvSpPr/>
+          <p:nvPr/>
+        </p:nvSpPr>
+        <p:spPr>
+          <a:xfrm>
+            <a:off x="4276915" y="1738376"/>
+            <a:ext cx="54864" cy="1946148"/>
           </a:xfrm>
           <a:prstGeom prst="roundRect">
             <a:avLst>
@@ -7032,14 +7125,14 @@
       </p:sp>
       <p:sp>
         <p:nvSpPr>
-          <p:cNvPr id="10" name="Text 8"/>
-          <p:cNvSpPr/>
-          <p:nvPr/>
-        </p:nvSpPr>
-        <p:spPr>
-          <a:xfrm>
-            <a:off x="4487227" y="1764792"/>
-            <a:ext cx="3217241" cy="320040"/>
+          <p:cNvPr id="12" name="Text 10"/>
+          <p:cNvSpPr/>
+          <p:nvPr/>
+        </p:nvSpPr>
+        <p:spPr>
+          <a:xfrm>
+            <a:off x="4487227" y="1811528"/>
+            <a:ext cx="3217241" cy="274320"/>
           </a:xfrm>
           <a:prstGeom prst="rect">
             <a:avLst/>
@@ -7055,7 +7148,7 @@
               <a:buNone/>
             </a:pPr>
             <a:r>
-              <a:rPr lang="en-US" sz="2000" b="1" dirty="0">
+              <a:rPr lang="en-US" sz="1600" b="1" dirty="0">
                 <a:solidFill>
                   <a:srgbClr val="7B61FF"/>
                 </a:solidFill>
@@ -7065,20 +7158,20 @@
               </a:rPr>
               <a:t>2. Flessibilità</a:t>
             </a:r>
-            <a:endParaRPr lang="en-US" sz="2000" dirty="0"/>
-          </a:p>
-        </p:txBody>
-      </p:sp>
-      <p:sp>
-        <p:nvSpPr>
-          <p:cNvPr id="11" name="Text 9"/>
-          <p:cNvSpPr/>
-          <p:nvPr/>
-        </p:nvSpPr>
-        <p:spPr>
-          <a:xfrm>
-            <a:off x="4461822" y="2184400"/>
-            <a:ext cx="3268052" cy="457200"/>
+            <a:endParaRPr lang="en-US" sz="1600" dirty="0"/>
+          </a:p>
+        </p:txBody>
+      </p:sp>
+      <p:sp>
+        <p:nvSpPr>
+          <p:cNvPr id="13" name="Text 11"/>
+          <p:cNvSpPr/>
+          <p:nvPr/>
+        </p:nvSpPr>
+        <p:spPr>
+          <a:xfrm>
+            <a:off x="4487221" y="2387600"/>
+            <a:ext cx="3217253" cy="977900"/>
           </a:xfrm>
           <a:prstGeom prst="rect">
             <a:avLst/>
@@ -7094,7 +7187,7 @@
               <a:buNone/>
             </a:pPr>
             <a:r>
-              <a:rPr lang="en-US" sz="1800" dirty="0">
+              <a:rPr lang="en-US" sz="1300" dirty="0">
                 <a:solidFill>
                   <a:srgbClr val="FFFFFF"/>
                 </a:solidFill>
@@ -7104,24 +7197,24 @@
               </a:rPr>
               <a:t>Un singolo sorgente produce Web interattivo, PowerPoint nativo e PDF.</a:t>
             </a:r>
-            <a:endParaRPr lang="en-US" sz="1800" dirty="0"/>
-          </a:p>
-        </p:txBody>
-      </p:sp>
-      <p:sp>
-        <p:nvSpPr>
-          <p:cNvPr id="12" name="Shape 10"/>
-          <p:cNvSpPr/>
-          <p:nvPr/>
-        </p:nvSpPr>
-        <p:spPr>
-          <a:xfrm>
-            <a:off x="8110864" y="1600200"/>
-            <a:ext cx="3674441" cy="1320800"/>
+            <a:endParaRPr lang="en-US" sz="1300" dirty="0"/>
+          </a:p>
+        </p:txBody>
+      </p:sp>
+      <p:sp>
+        <p:nvSpPr>
+          <p:cNvPr id="14" name="Shape 12"/>
+          <p:cNvSpPr/>
+          <p:nvPr/>
+        </p:nvSpPr>
+        <p:spPr>
+          <a:xfrm>
+            <a:off x="8110864" y="1701800"/>
+            <a:ext cx="3674441" cy="2019300"/>
           </a:xfrm>
           <a:prstGeom prst="roundRect">
             <a:avLst>
-              <a:gd name="adj" fmla="val 5538"/>
+              <a:gd name="adj" fmla="val 3623"/>
             </a:avLst>
           </a:prstGeom>
           <a:solidFill>
@@ -7137,14 +7230,14 @@
       </p:sp>
       <p:sp>
         <p:nvSpPr>
-          <p:cNvPr id="13" name="Shape 11"/>
-          <p:cNvSpPr/>
-          <p:nvPr/>
-        </p:nvSpPr>
-        <p:spPr>
-          <a:xfrm>
-            <a:off x="8129152" y="1636776"/>
-            <a:ext cx="54864" cy="1247648"/>
+          <p:cNvPr id="15" name="Shape 13"/>
+          <p:cNvSpPr/>
+          <p:nvPr/>
+        </p:nvSpPr>
+        <p:spPr>
+          <a:xfrm>
+            <a:off x="8129152" y="1738376"/>
+            <a:ext cx="54864" cy="1946148"/>
           </a:xfrm>
           <a:prstGeom prst="roundRect">
             <a:avLst>
@@ -7159,14 +7252,14 @@
       </p:sp>
       <p:sp>
         <p:nvSpPr>
-          <p:cNvPr id="14" name="Text 12"/>
-          <p:cNvSpPr/>
-          <p:nvPr/>
-        </p:nvSpPr>
-        <p:spPr>
-          <a:xfrm>
-            <a:off x="8339464" y="1764792"/>
-            <a:ext cx="3217241" cy="320040"/>
+          <p:cNvPr id="16" name="Text 14"/>
+          <p:cNvSpPr/>
+          <p:nvPr/>
+        </p:nvSpPr>
+        <p:spPr>
+          <a:xfrm>
+            <a:off x="8339464" y="1811528"/>
+            <a:ext cx="3217241" cy="274320"/>
           </a:xfrm>
           <a:prstGeom prst="rect">
             <a:avLst/>
@@ -7182,7 +7275,7 @@
               <a:buNone/>
             </a:pPr>
             <a:r>
-              <a:rPr lang="en-US" sz="2000" b="1" dirty="0">
+              <a:rPr lang="en-US" sz="1600" b="1" dirty="0">
                 <a:solidFill>
                   <a:srgbClr val="00FF9F"/>
                 </a:solidFill>
@@ -7192,20 +7285,20 @@
               </a:rPr>
               <a:t>3. Futuro</a:t>
             </a:r>
-            <a:endParaRPr lang="en-US" sz="2000" dirty="0"/>
-          </a:p>
-        </p:txBody>
-      </p:sp>
-      <p:sp>
-        <p:nvSpPr>
-          <p:cNvPr id="15" name="Text 13"/>
-          <p:cNvSpPr/>
-          <p:nvPr/>
-        </p:nvSpPr>
-        <p:spPr>
-          <a:xfrm>
-            <a:off x="8314059" y="2184400"/>
-            <a:ext cx="3268052" cy="457200"/>
+            <a:endParaRPr lang="en-US" sz="1600" dirty="0"/>
+          </a:p>
+        </p:txBody>
+      </p:sp>
+      <p:sp>
+        <p:nvSpPr>
+          <p:cNvPr id="17" name="Text 15"/>
+          <p:cNvSpPr/>
+          <p:nvPr/>
+        </p:nvSpPr>
+        <p:spPr>
+          <a:xfrm>
+            <a:off x="8339458" y="2387600"/>
+            <a:ext cx="3217253" cy="977900"/>
           </a:xfrm>
           <a:prstGeom prst="rect">
             <a:avLst/>
@@ -7221,7 +7314,7 @@
               <a:buNone/>
             </a:pPr>
             <a:r>
-              <a:rPr lang="en-US" sz="1800" dirty="0">
+              <a:rPr lang="en-US" sz="1300" dirty="0">
                 <a:solidFill>
                   <a:srgbClr val="FFFFFF"/>
                 </a:solidFill>
@@ -7231,19 +7324,19 @@
               </a:rPr>
               <a:t>Un ponte naturale tra sviluppatori, designer e intelligenza artificiale.</a:t>
             </a:r>
-            <a:endParaRPr lang="en-US" sz="1800" dirty="0"/>
-          </a:p>
-        </p:txBody>
-      </p:sp>
-      <p:sp>
-        <p:nvSpPr>
-          <p:cNvPr id="16" name="Shape 14"/>
-          <p:cNvSpPr/>
-          <p:nvPr/>
-        </p:nvSpPr>
-        <p:spPr>
-          <a:xfrm>
-            <a:off x="406390" y="3276600"/>
+            <a:endParaRPr lang="en-US" sz="1300" dirty="0"/>
+          </a:p>
+        </p:txBody>
+      </p:sp>
+      <p:sp>
+        <p:nvSpPr>
+          <p:cNvPr id="18" name="Shape 16"/>
+          <p:cNvSpPr/>
+          <p:nvPr/>
+        </p:nvSpPr>
+        <p:spPr>
+          <a:xfrm>
+            <a:off x="406390" y="4076700"/>
             <a:ext cx="11378916" cy="654050"/>
           </a:xfrm>
           <a:prstGeom prst="roundRect">
@@ -7264,13 +7357,13 @@
       </p:sp>
       <p:sp>
         <p:nvSpPr>
-          <p:cNvPr id="17" name="Text 15"/>
-          <p:cNvSpPr/>
-          <p:nvPr/>
-        </p:nvSpPr>
-        <p:spPr>
-          <a:xfrm>
-            <a:off x="543550" y="3349752"/>
+          <p:cNvPr id="19" name="Text 17"/>
+          <p:cNvSpPr/>
+          <p:nvPr/>
+        </p:nvSpPr>
+        <p:spPr>
+          <a:xfrm>
+            <a:off x="543550" y="4149852"/>
             <a:ext cx="11104596" cy="274320"/>
           </a:xfrm>
           <a:prstGeom prst="rect">
@@ -7303,13 +7396,13 @@
       </p:sp>
       <p:sp>
         <p:nvSpPr>
-          <p:cNvPr id="18" name="Text 16"/>
-          <p:cNvSpPr/>
-          <p:nvPr/>
-        </p:nvSpPr>
-        <p:spPr>
-          <a:xfrm>
-            <a:off x="543550" y="3669792"/>
+          <p:cNvPr id="20" name="Text 18"/>
+          <p:cNvSpPr/>
+          <p:nvPr/>
+        </p:nvSpPr>
+        <p:spPr>
+          <a:xfrm>
+            <a:off x="543550" y="4469892"/>
             <a:ext cx="11104596" cy="187706"/>
           </a:xfrm>
           <a:prstGeom prst="rect">
@@ -7342,7 +7435,7 @@
       </p:sp>
       <p:sp>
         <p:nvSpPr>
-          <p:cNvPr id="19" name="Text 17"/>
+          <p:cNvPr id="21" name="Text 19"/>
           <p:cNvSpPr/>
           <p:nvPr/>
         </p:nvSpPr>
@@ -7420,23 +7513,23 @@
         <p:spPr>
           <a:xfrm>
             <a:off x="406390" y="406400"/>
-            <a:ext cx="11378916" cy="571500"/>
-          </a:xfrm>
-          <a:prstGeom prst="rect">
-            <a:avLst/>
-          </a:prstGeom>
-          <a:noFill/>
-          <a:ln/>
-        </p:spPr>
-        <p:txBody>
-          <a:bodyPr wrap="square" lIns="0" tIns="0" rIns="0" bIns="0" rtlCol="0" anchor="ctr"/>
+            <a:ext cx="11378916" cy="698500"/>
+          </a:xfrm>
+          <a:prstGeom prst="rect">
+            <a:avLst/>
+          </a:prstGeom>
+          <a:noFill/>
+          <a:ln/>
+        </p:spPr>
+        <p:txBody>
+          <a:bodyPr wrap="square" lIns="0" tIns="0" rIns="0" bIns="0" rtlCol="0" anchor="t"/>
           <a:lstStyle/>
           <a:p>
             <a:pPr algn="l" indent="0" marL="0">
               <a:buNone/>
             </a:pPr>
             <a:r>
-              <a:rPr lang="en-US" sz="4600" b="1" dirty="0">
+              <a:rPr lang="en-US" sz="3300" b="1" dirty="0">
                 <a:solidFill>
                   <a:srgbClr val="FF2E88"/>
                 </a:solidFill>
@@ -7446,7 +7539,7 @@
               </a:rPr>
               <a:t>Il problema delle presentazioni tecniche</a:t>
             </a:r>
-            <a:endParaRPr lang="en-US" sz="4600" dirty="0"/>
+            <a:endParaRPr lang="en-US" sz="3300" dirty="0"/>
           </a:p>
         </p:txBody>
       </p:sp>
@@ -7458,24 +7551,24 @@
         </p:nvSpPr>
         <p:spPr>
           <a:xfrm>
-            <a:off x="406390" y="1155700"/>
-            <a:ext cx="11378916" cy="444500"/>
-          </a:xfrm>
-          <a:prstGeom prst="rect">
-            <a:avLst/>
-          </a:prstGeom>
-          <a:noFill/>
-          <a:ln/>
-        </p:spPr>
-        <p:txBody>
-          <a:bodyPr wrap="square" lIns="0" tIns="0" rIns="0" bIns="0" rtlCol="0" anchor="ctr"/>
+            <a:off x="406390" y="1282700"/>
+            <a:ext cx="11378916" cy="558800"/>
+          </a:xfrm>
+          <a:prstGeom prst="rect">
+            <a:avLst/>
+          </a:prstGeom>
+          <a:noFill/>
+          <a:ln/>
+        </p:spPr>
+        <p:txBody>
+          <a:bodyPr wrap="square" lIns="0" tIns="0" rIns="0" bIns="0" rtlCol="0" anchor="t"/>
           <a:lstStyle/>
           <a:p>
             <a:pPr algn="l" indent="0" marL="0">
               <a:buNone/>
             </a:pPr>
             <a:r>
-              <a:rPr lang="en-US" sz="3800" b="1" dirty="0">
+              <a:rPr lang="en-US" sz="2700" b="1" dirty="0">
                 <a:solidFill>
                   <a:srgbClr val="FFFFFF"/>
                 </a:solidFill>
@@ -7485,7 +7578,7 @@
               </a:rPr>
               <a:t>Perché creare slide tecniche è complesso e inefficiente</a:t>
             </a:r>
-            <a:endParaRPr lang="en-US" sz="3800" dirty="0"/>
+            <a:endParaRPr lang="en-US" sz="2700" dirty="0"/>
           </a:p>
         </p:txBody>
       </p:sp>
@@ -7497,12 +7590,12 @@
         </p:nvSpPr>
         <p:spPr>
           <a:xfrm>
-            <a:off x="406390" y="1778000"/>
-            <a:ext cx="5506578" cy="2247900"/>
+            <a:off x="406390" y="2019300"/>
+            <a:ext cx="5506578" cy="3479800"/>
           </a:xfrm>
           <a:prstGeom prst="roundRect">
             <a:avLst>
-              <a:gd name="adj" fmla="val 4068"/>
+              <a:gd name="adj" fmla="val 2628"/>
             </a:avLst>
           </a:prstGeom>
           <a:solidFill>
@@ -7524,7 +7617,7 @@
         </p:nvSpPr>
         <p:spPr>
           <a:xfrm>
-            <a:off x="543550" y="1915160"/>
+            <a:off x="543550" y="2156460"/>
             <a:ext cx="5232258" cy="365760"/>
           </a:xfrm>
           <a:prstGeom prst="rect">
@@ -7563,12 +7656,12 @@
         </p:nvSpPr>
         <p:spPr>
           <a:xfrm>
-            <a:off x="6278728" y="1778000"/>
-            <a:ext cx="5506578" cy="2247900"/>
+            <a:off x="6278728" y="2019300"/>
+            <a:ext cx="5506578" cy="3479800"/>
           </a:xfrm>
           <a:prstGeom prst="roundRect">
             <a:avLst>
-              <a:gd name="adj" fmla="val 4068"/>
+              <a:gd name="adj" fmla="val 2628"/>
             </a:avLst>
           </a:prstGeom>
           <a:solidFill>
@@ -7590,7 +7683,7 @@
         </p:nvSpPr>
         <p:spPr>
           <a:xfrm>
-            <a:off x="6415888" y="1915160"/>
+            <a:off x="6415888" y="2156460"/>
             <a:ext cx="5232258" cy="365760"/>
           </a:xfrm>
           <a:prstGeom prst="rect">
@@ -7629,7 +7722,7 @@
         </p:nvSpPr>
         <p:spPr>
           <a:xfrm>
-            <a:off x="5958688" y="2737358"/>
+            <a:off x="5958688" y="3594608"/>
             <a:ext cx="274320" cy="274320"/>
           </a:xfrm>
           <a:prstGeom prst="roundRect">
@@ -7651,7 +7744,7 @@
         </p:nvSpPr>
         <p:spPr>
           <a:xfrm>
-            <a:off x="5958688" y="2737358"/>
+            <a:off x="5958688" y="3594608"/>
             <a:ext cx="274320" cy="274320"/>
           </a:xfrm>
           <a:prstGeom prst="rect">
@@ -7690,12 +7783,12 @@
         </p:nvSpPr>
         <p:spPr>
           <a:xfrm>
-            <a:off x="1606470" y="2216150"/>
-            <a:ext cx="3200400" cy="285750"/>
+            <a:off x="1606470" y="2552700"/>
+            <a:ext cx="3200400" cy="330200"/>
           </a:xfrm>
           <a:prstGeom prst="roundRect">
             <a:avLst>
-              <a:gd name="adj" fmla="val 48000"/>
+              <a:gd name="adj" fmla="val 41538"/>
             </a:avLst>
           </a:prstGeom>
           <a:solidFill>
@@ -7717,8 +7810,8 @@
         </p:nvSpPr>
         <p:spPr>
           <a:xfrm>
-            <a:off x="1606470" y="2216150"/>
-            <a:ext cx="3200400" cy="285750"/>
+            <a:off x="1606470" y="2552700"/>
+            <a:ext cx="3200400" cy="330200"/>
           </a:xfrm>
           <a:prstGeom prst="rect">
             <a:avLst/>
@@ -7756,8 +7849,8 @@
         </p:nvSpPr>
         <p:spPr>
           <a:xfrm>
-            <a:off x="558786" y="2590800"/>
-            <a:ext cx="5295768" cy="254000"/>
+            <a:off x="584185" y="2971800"/>
+            <a:ext cx="5244969" cy="368300"/>
           </a:xfrm>
           <a:prstGeom prst="rect">
             <a:avLst/>
@@ -7773,7 +7866,7 @@
               <a:buNone/>
             </a:pPr>
             <a:r>
-              <a:rPr lang="en-US" sz="1800" dirty="0">
+              <a:rPr lang="en-US" sz="1300" dirty="0">
                 <a:solidFill>
                   <a:srgbClr val="FFFFFF"/>
                 </a:solidFill>
@@ -7783,7 +7876,7 @@
               </a:rPr>
               <a:t>• Disposizione manuale di box di testo e forme</a:t>
             </a:r>
-            <a:endParaRPr lang="en-US" sz="1800" dirty="0"/>
+            <a:endParaRPr lang="en-US" sz="1300" dirty="0"/>
           </a:p>
         </p:txBody>
       </p:sp>
@@ -7795,8 +7888,8 @@
         </p:nvSpPr>
         <p:spPr>
           <a:xfrm>
-            <a:off x="558786" y="2933700"/>
-            <a:ext cx="5295768" cy="254000"/>
+            <a:off x="584185" y="3429000"/>
+            <a:ext cx="5244969" cy="368300"/>
           </a:xfrm>
           <a:prstGeom prst="rect">
             <a:avLst/>
@@ -7812,7 +7905,7 @@
               <a:buNone/>
             </a:pPr>
             <a:r>
-              <a:rPr lang="en-US" sz="1800" dirty="0">
+              <a:rPr lang="en-US" sz="1300" dirty="0">
                 <a:solidFill>
                   <a:srgbClr val="FFFFFF"/>
                 </a:solidFill>
@@ -7822,7 +7915,7 @@
               </a:rPr>
               <a:t>• Formattazione incoerente che degrada nel tempo</a:t>
             </a:r>
-            <a:endParaRPr lang="en-US" sz="1800" dirty="0"/>
+            <a:endParaRPr lang="en-US" sz="1300" dirty="0"/>
           </a:p>
         </p:txBody>
       </p:sp>
@@ -7834,8 +7927,8 @@
         </p:nvSpPr>
         <p:spPr>
           <a:xfrm>
-            <a:off x="558786" y="3276600"/>
-            <a:ext cx="5295768" cy="254000"/>
+            <a:off x="584185" y="3886200"/>
+            <a:ext cx="5244969" cy="368300"/>
           </a:xfrm>
           <a:prstGeom prst="rect">
             <a:avLst/>
@@ -7851,7 +7944,7 @@
               <a:buNone/>
             </a:pPr>
             <a:r>
-              <a:rPr lang="en-US" sz="1800" dirty="0">
+              <a:rPr lang="en-US" sz="1300" dirty="0">
                 <a:solidFill>
                   <a:srgbClr val="FFFFFF"/>
                 </a:solidFill>
@@ -7861,7 +7954,7 @@
               </a:rPr>
               <a:t>• File binari opachi non versionabili con Git</a:t>
             </a:r>
-            <a:endParaRPr lang="en-US" sz="1800" dirty="0"/>
+            <a:endParaRPr lang="en-US" sz="1300" dirty="0"/>
           </a:p>
         </p:txBody>
       </p:sp>
@@ -7873,8 +7966,8 @@
         </p:nvSpPr>
         <p:spPr>
           <a:xfrm>
-            <a:off x="558786" y="3619500"/>
-            <a:ext cx="5295768" cy="254000"/>
+            <a:off x="584185" y="4343400"/>
+            <a:ext cx="5244969" cy="673100"/>
           </a:xfrm>
           <a:prstGeom prst="rect">
             <a:avLst/>
@@ -7890,7 +7983,7 @@
               <a:buNone/>
             </a:pPr>
             <a:r>
-              <a:rPr lang="en-US" sz="1800" dirty="0">
+              <a:rPr lang="en-US" sz="1300" dirty="0">
                 <a:solidFill>
                   <a:srgbClr val="FFFFFF"/>
                 </a:solidFill>
@@ -7900,7 +7993,7 @@
               </a:rPr>
               <a:t>• Rischio costante di disallineamenti tra formati</a:t>
             </a:r>
-            <a:endParaRPr lang="en-US" sz="1800" dirty="0"/>
+            <a:endParaRPr lang="en-US" sz="1300" dirty="0"/>
           </a:p>
         </p:txBody>
       </p:sp>
@@ -7912,12 +8005,12 @@
         </p:nvSpPr>
         <p:spPr>
           <a:xfrm>
-            <a:off x="7503697" y="2216150"/>
-            <a:ext cx="2962656" cy="285750"/>
+            <a:off x="7503697" y="2552700"/>
+            <a:ext cx="2962656" cy="330200"/>
           </a:xfrm>
           <a:prstGeom prst="roundRect">
             <a:avLst>
-              <a:gd name="adj" fmla="val 48000"/>
+              <a:gd name="adj" fmla="val 41538"/>
             </a:avLst>
           </a:prstGeom>
           <a:solidFill>
@@ -7939,8 +8032,8 @@
         </p:nvSpPr>
         <p:spPr>
           <a:xfrm>
-            <a:off x="7503697" y="2216150"/>
-            <a:ext cx="2962656" cy="285750"/>
+            <a:off x="7503697" y="2552700"/>
+            <a:ext cx="2962656" cy="330200"/>
           </a:xfrm>
           <a:prstGeom prst="rect">
             <a:avLst/>
@@ -7978,8 +8071,8 @@
         </p:nvSpPr>
         <p:spPr>
           <a:xfrm>
-            <a:off x="6337142" y="2590800"/>
-            <a:ext cx="5295768" cy="254000"/>
+            <a:off x="6362541" y="2971800"/>
+            <a:ext cx="5244969" cy="673100"/>
           </a:xfrm>
           <a:prstGeom prst="rect">
             <a:avLst/>
@@ -7995,7 +8088,7 @@
               <a:buNone/>
             </a:pPr>
             <a:r>
-              <a:rPr lang="en-US" sz="1800" dirty="0">
+              <a:rPr lang="en-US" sz="1300" dirty="0">
                 <a:solidFill>
                   <a:srgbClr val="FFFFFF"/>
                 </a:solidFill>
@@ -8005,7 +8098,7 @@
               </a:rPr>
               <a:t>• Zero riutilizzabilità tra documentazione e slide</a:t>
             </a:r>
-            <a:endParaRPr lang="en-US" sz="1800" dirty="0"/>
+            <a:endParaRPr lang="en-US" sz="1300" dirty="0"/>
           </a:p>
         </p:txBody>
       </p:sp>
@@ -8017,8 +8110,8 @@
         </p:nvSpPr>
         <p:spPr>
           <a:xfrm>
-            <a:off x="6337142" y="2933700"/>
-            <a:ext cx="5295768" cy="254000"/>
+            <a:off x="6362541" y="3733800"/>
+            <a:ext cx="5244969" cy="368300"/>
           </a:xfrm>
           <a:prstGeom prst="rect">
             <a:avLst/>
@@ -8034,7 +8127,7 @@
               <a:buNone/>
             </a:pPr>
             <a:r>
-              <a:rPr lang="en-US" sz="1800" dirty="0">
+              <a:rPr lang="en-US" sz="1300" dirty="0">
                 <a:solidFill>
                   <a:srgbClr val="FFFFFF"/>
                 </a:solidFill>
@@ -8044,7 +8137,7 @@
               </a:rPr>
               <a:t>• Frammentazione tra Markdown, HTML e PPTX</a:t>
             </a:r>
-            <a:endParaRPr lang="en-US" sz="1800" dirty="0"/>
+            <a:endParaRPr lang="en-US" sz="1300" dirty="0"/>
           </a:p>
         </p:txBody>
       </p:sp>
@@ -8056,8 +8149,8 @@
         </p:nvSpPr>
         <p:spPr>
           <a:xfrm>
-            <a:off x="6337142" y="3276600"/>
-            <a:ext cx="5295768" cy="254000"/>
+            <a:off x="6362541" y="4191000"/>
+            <a:ext cx="5244969" cy="673100"/>
           </a:xfrm>
           <a:prstGeom prst="rect">
             <a:avLst/>
@@ -8073,7 +8166,7 @@
               <a:buNone/>
             </a:pPr>
             <a:r>
-              <a:rPr lang="en-US" sz="1800" dirty="0">
+              <a:rPr lang="en-US" sz="1300" dirty="0">
                 <a:solidFill>
                   <a:srgbClr val="FFFFFF"/>
                 </a:solidFill>
@@ -8083,7 +8176,7 @@
               </a:rPr>
               <a:t>• Gli LLM faticano a generare layout geometrici stabili</a:t>
             </a:r>
-            <a:endParaRPr lang="en-US" sz="1800" dirty="0"/>
+            <a:endParaRPr lang="en-US" sz="1300" dirty="0"/>
           </a:p>
         </p:txBody>
       </p:sp>
@@ -8095,8 +8188,8 @@
         </p:nvSpPr>
         <p:spPr>
           <a:xfrm>
-            <a:off x="6337142" y="3619500"/>
-            <a:ext cx="5295768" cy="254000"/>
+            <a:off x="6362541" y="4953000"/>
+            <a:ext cx="5244969" cy="368300"/>
           </a:xfrm>
           <a:prstGeom prst="rect">
             <a:avLst/>
@@ -8112,7 +8205,7 @@
               <a:buNone/>
             </a:pPr>
             <a:r>
-              <a:rPr lang="en-US" sz="1800" dirty="0">
+              <a:rPr lang="en-US" sz="1300" dirty="0">
                 <a:solidFill>
                   <a:srgbClr val="FFFFFF"/>
                 </a:solidFill>
@@ -8122,7 +8215,7 @@
               </a:rPr>
               <a:t>• Nessun test automatico di qualità visiva</a:t>
             </a:r>
-            <a:endParaRPr lang="en-US" sz="1800" dirty="0"/>
+            <a:endParaRPr lang="en-US" sz="1300" dirty="0"/>
           </a:p>
         </p:txBody>
       </p:sp>
@@ -8206,23 +8299,23 @@
         <p:spPr>
           <a:xfrm>
             <a:off x="406390" y="406400"/>
-            <a:ext cx="11378916" cy="571500"/>
-          </a:xfrm>
-          <a:prstGeom prst="rect">
-            <a:avLst/>
-          </a:prstGeom>
-          <a:noFill/>
-          <a:ln/>
-        </p:spPr>
-        <p:txBody>
-          <a:bodyPr wrap="square" lIns="0" tIns="0" rIns="0" bIns="0" rtlCol="0" anchor="ctr"/>
+            <a:ext cx="11378916" cy="698500"/>
+          </a:xfrm>
+          <a:prstGeom prst="rect">
+            <a:avLst/>
+          </a:prstGeom>
+          <a:noFill/>
+          <a:ln/>
+        </p:spPr>
+        <p:txBody>
+          <a:bodyPr wrap="square" lIns="0" tIns="0" rIns="0" bIns="0" rtlCol="0" anchor="t"/>
           <a:lstStyle/>
           <a:p>
             <a:pPr algn="l" indent="0" marL="0">
               <a:buNone/>
             </a:pPr>
             <a:r>
-              <a:rPr lang="en-US" sz="4600" b="1" dirty="0">
+              <a:rPr lang="en-US" sz="3300" b="1" dirty="0">
                 <a:solidFill>
                   <a:srgbClr val="FF2E88"/>
                 </a:solidFill>
@@ -8232,7 +8325,7 @@
               </a:rPr>
               <a:t>La soluzione: Il Design Compiler</a:t>
             </a:r>
-            <a:endParaRPr lang="en-US" sz="4600" dirty="0"/>
+            <a:endParaRPr lang="en-US" sz="3300" dirty="0"/>
           </a:p>
         </p:txBody>
       </p:sp>
@@ -8244,24 +8337,24 @@
         </p:nvSpPr>
         <p:spPr>
           <a:xfrm>
-            <a:off x="406390" y="1155700"/>
-            <a:ext cx="11378916" cy="444500"/>
-          </a:xfrm>
-          <a:prstGeom prst="rect">
-            <a:avLst/>
-          </a:prstGeom>
-          <a:noFill/>
-          <a:ln/>
-        </p:spPr>
-        <p:txBody>
-          <a:bodyPr wrap="square" lIns="0" tIns="0" rIns="0" bIns="0" rtlCol="0" anchor="ctr"/>
+            <a:off x="406390" y="1282700"/>
+            <a:ext cx="11378916" cy="558800"/>
+          </a:xfrm>
+          <a:prstGeom prst="rect">
+            <a:avLst/>
+          </a:prstGeom>
+          <a:noFill/>
+          <a:ln/>
+        </p:spPr>
+        <p:txBody>
+          <a:bodyPr wrap="square" lIns="0" tIns="0" rIns="0" bIns="0" rtlCol="0" anchor="t"/>
           <a:lstStyle/>
           <a:p>
             <a:pPr algn="l" indent="0" marL="0">
               <a:buNone/>
             </a:pPr>
             <a:r>
-              <a:rPr lang="en-US" sz="3800" b="1" dirty="0">
+              <a:rPr lang="en-US" sz="2700" b="1" dirty="0">
                 <a:solidFill>
                   <a:srgbClr val="FFFFFF"/>
                 </a:solidFill>
@@ -8271,7 +8364,7 @@
               </a:rPr>
               <a:t>Dall'intento comunicativo alla composizione automatica</a:t>
             </a:r>
-            <a:endParaRPr lang="en-US" sz="3800" dirty="0"/>
+            <a:endParaRPr lang="en-US" sz="2700" dirty="0"/>
           </a:p>
         </p:txBody>
       </p:sp>
@@ -8283,12 +8376,12 @@
         </p:nvSpPr>
         <p:spPr>
           <a:xfrm>
-            <a:off x="406390" y="1778000"/>
-            <a:ext cx="3674441" cy="1778000"/>
+            <a:off x="406390" y="2019300"/>
+            <a:ext cx="3674441" cy="2628900"/>
           </a:xfrm>
           <a:prstGeom prst="roundRect">
             <a:avLst>
-              <a:gd name="adj" fmla="val 4114"/>
+              <a:gd name="adj" fmla="val 2783"/>
             </a:avLst>
           </a:prstGeom>
           <a:solidFill>
@@ -8310,8 +8403,8 @@
         </p:nvSpPr>
         <p:spPr>
           <a:xfrm>
-            <a:off x="424678" y="1814576"/>
-            <a:ext cx="54864" cy="1704848"/>
+            <a:off x="424678" y="2055876"/>
+            <a:ext cx="54864" cy="2555748"/>
           </a:xfrm>
           <a:prstGeom prst="roundRect">
             <a:avLst>
@@ -8332,8 +8425,8 @@
         </p:nvSpPr>
         <p:spPr>
           <a:xfrm>
-            <a:off x="634990" y="1942592"/>
-            <a:ext cx="3217241" cy="320040"/>
+            <a:off x="634990" y="2129028"/>
+            <a:ext cx="3217241" cy="274320"/>
           </a:xfrm>
           <a:prstGeom prst="rect">
             <a:avLst/>
@@ -8349,7 +8442,7 @@
               <a:buNone/>
             </a:pPr>
             <a:r>
-              <a:rPr lang="en-US" sz="2000" b="1" dirty="0">
+              <a:rPr lang="en-US" sz="1600" b="1" dirty="0">
                 <a:solidFill>
                   <a:srgbClr val="FF2E88"/>
                 </a:solidFill>
@@ -8359,7 +8452,7 @@
               </a:rPr>
               <a:t>Intento vs Geometria</a:t>
             </a:r>
-            <a:endParaRPr lang="en-US" sz="2000" dirty="0"/>
+            <a:endParaRPr lang="en-US" sz="1600" dirty="0"/>
           </a:p>
         </p:txBody>
       </p:sp>
@@ -8371,8 +8464,8 @@
         </p:nvSpPr>
         <p:spPr>
           <a:xfrm>
-            <a:off x="609585" y="2362200"/>
-            <a:ext cx="3268052" cy="914400"/>
+            <a:off x="634984" y="2705100"/>
+            <a:ext cx="3217253" cy="1587500"/>
           </a:xfrm>
           <a:prstGeom prst="rect">
             <a:avLst/>
@@ -8388,7 +8481,7 @@
               <a:buNone/>
             </a:pPr>
             <a:r>
-              <a:rPr lang="en-US" sz="1800" dirty="0">
+              <a:rPr lang="en-US" sz="1300" dirty="0">
                 <a:solidFill>
                   <a:srgbClr val="FFFFFF"/>
                 </a:solidFill>
@@ -8398,7 +8491,7 @@
               </a:rPr>
               <a:t>Non diciamo al computer 'disegna un rettangolo a coordinate (x,y)', ma 'crea una Card per evidenziare una funzionalità'.</a:t>
             </a:r>
-            <a:endParaRPr lang="en-US" sz="1800" dirty="0"/>
+            <a:endParaRPr lang="en-US" sz="1300" dirty="0"/>
           </a:p>
         </p:txBody>
       </p:sp>
@@ -8410,12 +8503,12 @@
         </p:nvSpPr>
         <p:spPr>
           <a:xfrm>
-            <a:off x="4258627" y="1778000"/>
-            <a:ext cx="3674441" cy="1549400"/>
+            <a:off x="4258627" y="2019300"/>
+            <a:ext cx="3674441" cy="2324100"/>
           </a:xfrm>
           <a:prstGeom prst="roundRect">
             <a:avLst>
-              <a:gd name="adj" fmla="val 4721"/>
+              <a:gd name="adj" fmla="val 3148"/>
             </a:avLst>
           </a:prstGeom>
           <a:solidFill>
@@ -8437,8 +8530,8 @@
         </p:nvSpPr>
         <p:spPr>
           <a:xfrm>
-            <a:off x="4276915" y="1814576"/>
-            <a:ext cx="54864" cy="1476248"/>
+            <a:off x="4276915" y="2055876"/>
+            <a:ext cx="54864" cy="2250948"/>
           </a:xfrm>
           <a:prstGeom prst="roundRect">
             <a:avLst>
@@ -8459,8 +8552,8 @@
         </p:nvSpPr>
         <p:spPr>
           <a:xfrm>
-            <a:off x="4487227" y="1942592"/>
-            <a:ext cx="3217241" cy="320040"/>
+            <a:off x="4487227" y="2129028"/>
+            <a:ext cx="3217241" cy="274320"/>
           </a:xfrm>
           <a:prstGeom prst="rect">
             <a:avLst/>
@@ -8476,7 +8569,7 @@
               <a:buNone/>
             </a:pPr>
             <a:r>
-              <a:rPr lang="en-US" sz="2000" b="1" dirty="0">
+              <a:rPr lang="en-US" sz="1600" b="1" dirty="0">
                 <a:solidFill>
                   <a:srgbClr val="7B61FF"/>
                 </a:solidFill>
@@ -8486,7 +8579,7 @@
               </a:rPr>
               <a:t>Componenti Semantici</a:t>
             </a:r>
-            <a:endParaRPr lang="en-US" sz="2000" dirty="0"/>
+            <a:endParaRPr lang="en-US" sz="1600" dirty="0"/>
           </a:p>
         </p:txBody>
       </p:sp>
@@ -8498,8 +8591,8 @@
         </p:nvSpPr>
         <p:spPr>
           <a:xfrm>
-            <a:off x="4461822" y="2362200"/>
-            <a:ext cx="3268052" cy="685800"/>
+            <a:off x="4487221" y="2705100"/>
+            <a:ext cx="3217253" cy="1282700"/>
           </a:xfrm>
           <a:prstGeom prst="rect">
             <a:avLst/>
@@ -8515,7 +8608,7 @@
               <a:buNone/>
             </a:pPr>
             <a:r>
-              <a:rPr lang="en-US" sz="1800" dirty="0">
+              <a:rPr lang="en-US" sz="1300" dirty="0">
                 <a:solidFill>
                   <a:srgbClr val="FFFFFF"/>
                 </a:solidFill>
@@ -8525,7 +8618,7 @@
               </a:rPr>
               <a:t>Primitive di alto livello: hero, metric, card, grid, compare, timeline, chart e diagram.</a:t>
             </a:r>
-            <a:endParaRPr lang="en-US" sz="1800" dirty="0"/>
+            <a:endParaRPr lang="en-US" sz="1300" dirty="0"/>
           </a:p>
         </p:txBody>
       </p:sp>
@@ -8537,12 +8630,12 @@
         </p:nvSpPr>
         <p:spPr>
           <a:xfrm>
-            <a:off x="8110864" y="1778000"/>
-            <a:ext cx="3674441" cy="1549400"/>
+            <a:off x="8110864" y="2019300"/>
+            <a:ext cx="3674441" cy="2324100"/>
           </a:xfrm>
           <a:prstGeom prst="roundRect">
             <a:avLst>
-              <a:gd name="adj" fmla="val 4721"/>
+              <a:gd name="adj" fmla="val 3148"/>
             </a:avLst>
           </a:prstGeom>
           <a:solidFill>
@@ -8564,8 +8657,8 @@
         </p:nvSpPr>
         <p:spPr>
           <a:xfrm>
-            <a:off x="8129152" y="1814576"/>
-            <a:ext cx="54864" cy="1476248"/>
+            <a:off x="8129152" y="2055876"/>
+            <a:ext cx="54864" cy="2250948"/>
           </a:xfrm>
           <a:prstGeom prst="roundRect">
             <a:avLst>
@@ -8586,8 +8679,8 @@
         </p:nvSpPr>
         <p:spPr>
           <a:xfrm>
-            <a:off x="8339464" y="1942592"/>
-            <a:ext cx="3217241" cy="320040"/>
+            <a:off x="8339464" y="2129028"/>
+            <a:ext cx="3217241" cy="274320"/>
           </a:xfrm>
           <a:prstGeom prst="rect">
             <a:avLst/>
@@ -8603,7 +8696,7 @@
               <a:buNone/>
             </a:pPr>
             <a:r>
-              <a:rPr lang="en-US" sz="2000" b="1" dirty="0">
+              <a:rPr lang="en-US" sz="1600" b="1" dirty="0">
                 <a:solidFill>
                   <a:srgbClr val="00FF9F"/>
                 </a:solidFill>
@@ -8613,7 +8706,7 @@
               </a:rPr>
               <a:t>Layout Deterministico</a:t>
             </a:r>
-            <a:endParaRPr lang="en-US" sz="2000" dirty="0"/>
+            <a:endParaRPr lang="en-US" sz="1600" dirty="0"/>
           </a:p>
         </p:txBody>
       </p:sp>
@@ -8625,8 +8718,8 @@
         </p:nvSpPr>
         <p:spPr>
           <a:xfrm>
-            <a:off x="8314059" y="2362200"/>
-            <a:ext cx="3268052" cy="685800"/>
+            <a:off x="8339458" y="2705100"/>
+            <a:ext cx="3217253" cy="1282700"/>
           </a:xfrm>
           <a:prstGeom prst="rect">
             <a:avLst/>
@@ -8642,7 +8735,7 @@
               <a:buNone/>
             </a:pPr>
             <a:r>
-              <a:rPr lang="en-US" sz="1800" dirty="0">
+              <a:rPr lang="en-US" sz="1300" dirty="0">
                 <a:solidFill>
                   <a:srgbClr val="FFFFFF"/>
                 </a:solidFill>
@@ -8652,7 +8745,7 @@
               </a:rPr>
               <a:t>Un motore di calcolo automatico distribuisce spazi, gap, contrasti e gerarchie visive senza overflow.</a:t>
             </a:r>
-            <a:endParaRPr lang="en-US" sz="1800" dirty="0"/>
+            <a:endParaRPr lang="en-US" sz="1300" dirty="0"/>
           </a:p>
         </p:txBody>
       </p:sp>
@@ -8664,7 +8757,7 @@
         </p:nvSpPr>
         <p:spPr>
           <a:xfrm>
-            <a:off x="406390" y="3911600"/>
+            <a:off x="406390" y="5003800"/>
             <a:ext cx="11378916" cy="831850"/>
           </a:xfrm>
           <a:prstGeom prst="roundRect">
@@ -8691,7 +8784,7 @@
         </p:nvSpPr>
         <p:spPr>
           <a:xfrm>
-            <a:off x="543550" y="3984752"/>
+            <a:off x="543550" y="5076952"/>
             <a:ext cx="11104596" cy="274320"/>
           </a:xfrm>
           <a:prstGeom prst="rect">
@@ -8730,7 +8823,7 @@
         </p:nvSpPr>
         <p:spPr>
           <a:xfrm>
-            <a:off x="543550" y="4304792"/>
+            <a:off x="543550" y="5396992"/>
             <a:ext cx="11104596" cy="365506"/>
           </a:xfrm>
           <a:prstGeom prst="rect">
@@ -8841,23 +8934,23 @@
         <p:spPr>
           <a:xfrm>
             <a:off x="406390" y="406400"/>
-            <a:ext cx="11378916" cy="571500"/>
-          </a:xfrm>
-          <a:prstGeom prst="rect">
-            <a:avLst/>
-          </a:prstGeom>
-          <a:noFill/>
-          <a:ln/>
-        </p:spPr>
-        <p:txBody>
-          <a:bodyPr wrap="square" lIns="0" tIns="0" rIns="0" bIns="0" rtlCol="0" anchor="ctr"/>
+            <a:ext cx="11378916" cy="698500"/>
+          </a:xfrm>
+          <a:prstGeom prst="rect">
+            <a:avLst/>
+          </a:prstGeom>
+          <a:noFill/>
+          <a:ln/>
+        </p:spPr>
+        <p:txBody>
+          <a:bodyPr wrap="square" lIns="0" tIns="0" rIns="0" bIns="0" rtlCol="0" anchor="t"/>
           <a:lstStyle/>
           <a:p>
             <a:pPr algn="l" indent="0" marL="0">
               <a:buNone/>
             </a:pPr>
             <a:r>
-              <a:rPr lang="en-US" sz="4600" b="1" dirty="0">
+              <a:rPr lang="en-US" sz="3300" b="1" dirty="0">
                 <a:solidFill>
                   <a:srgbClr val="FF2E88"/>
                 </a:solidFill>
@@ -8867,7 +8960,7 @@
               </a:rPr>
               <a:t>Un'unica sorgente, più formati</a:t>
             </a:r>
-            <a:endParaRPr lang="en-US" sz="4600" dirty="0"/>
+            <a:endParaRPr lang="en-US" sz="3300" dirty="0"/>
           </a:p>
         </p:txBody>
       </p:sp>
@@ -8879,24 +8972,24 @@
         </p:nvSpPr>
         <p:spPr>
           <a:xfrm>
-            <a:off x="406390" y="1155700"/>
-            <a:ext cx="11378916" cy="444500"/>
-          </a:xfrm>
-          <a:prstGeom prst="rect">
-            <a:avLst/>
-          </a:prstGeom>
-          <a:noFill/>
-          <a:ln/>
-        </p:spPr>
-        <p:txBody>
-          <a:bodyPr wrap="square" lIns="0" tIns="0" rIns="0" bIns="0" rtlCol="0" anchor="ctr"/>
+            <a:off x="406390" y="1282700"/>
+            <a:ext cx="11378916" cy="558800"/>
+          </a:xfrm>
+          <a:prstGeom prst="rect">
+            <a:avLst/>
+          </a:prstGeom>
+          <a:noFill/>
+          <a:ln/>
+        </p:spPr>
+        <p:txBody>
+          <a:bodyPr wrap="square" lIns="0" tIns="0" rIns="0" bIns="0" rtlCol="0" anchor="t"/>
           <a:lstStyle/>
           <a:p>
             <a:pPr algn="l" indent="0" marL="0">
               <a:buNone/>
             </a:pPr>
             <a:r>
-              <a:rPr lang="en-US" sz="3800" b="1" dirty="0">
+              <a:rPr lang="en-US" sz="2700" b="1" dirty="0">
                 <a:solidFill>
                   <a:srgbClr val="FFFFFF"/>
                 </a:solidFill>
@@ -8906,20 +8999,105 @@
               </a:rPr>
               <a:t>Compilazione Multi-Target da una Singola Sorgente</a:t>
             </a:r>
-            <a:endParaRPr lang="en-US" sz="3800" dirty="0"/>
-          </a:p>
-        </p:txBody>
-      </p:sp>
-      <p:sp>
-        <p:nvSpPr>
-          <p:cNvPr id="4" name="Shape 2"/>
-          <p:cNvSpPr/>
-          <p:nvPr/>
-        </p:nvSpPr>
-        <p:spPr>
-          <a:xfrm>
-            <a:off x="2052310" y="1890486"/>
-            <a:ext cx="1598412" cy="903514"/>
+            <a:endParaRPr lang="en-US" sz="2700" dirty="0"/>
+          </a:p>
+        </p:txBody>
+      </p:sp>
+      <p:sp>
+        <p:nvSpPr>
+          <p:cNvPr id="4" name="Text 2"/>
+          <p:cNvSpPr/>
+          <p:nvPr/>
+        </p:nvSpPr>
+        <p:spPr>
+          <a:xfrm>
+            <a:off x="406390" y="2019300"/>
+            <a:ext cx="11378916" cy="256032"/>
+          </a:xfrm>
+          <a:prstGeom prst="rect">
+            <a:avLst/>
+          </a:prstGeom>
+          <a:noFill/>
+          <a:ln/>
+        </p:spPr>
+        <p:txBody>
+          <a:bodyPr wrap="square" rtlCol="0" anchor="ctr"/>
+          <a:lstStyle/>
+          <a:p>
+            <a:pPr algn="ctr" indent="0" marL="0">
+              <a:buNone/>
+            </a:pPr>
+            <a:r>
+              <a:rPr lang="en-US" sz="1200" b="1" dirty="0">
+                <a:solidFill>
+                  <a:srgbClr val="FF2E88"/>
+                </a:solidFill>
+                <a:latin typeface="Trebuchet MS" pitchFamily="34" charset="0"/>
+                <a:ea typeface="Trebuchet MS" pitchFamily="34" charset="-122"/>
+                <a:cs typeface="Trebuchet MS" pitchFamily="34" charset="-120"/>
+              </a:rPr>
+              <a:t>Flusso di Trasformazione Multi-Target</a:t>
+            </a:r>
+            <a:endParaRPr lang="en-US" sz="1200" dirty="0"/>
+          </a:p>
+        </p:txBody>
+      </p:sp>
+      <p:sp>
+        <p:nvSpPr>
+          <p:cNvPr id="5" name="Shape 3"/>
+          <p:cNvSpPr/>
+          <p:nvPr/>
+        </p:nvSpPr>
+        <p:spPr>
+          <a:xfrm>
+            <a:off x="4869778" y="2433168"/>
+            <a:ext cx="94313" cy="9144"/>
+          </a:xfrm>
+          <a:prstGeom prst="line">
+            <a:avLst/>
+          </a:prstGeom>
+          <a:noFill/>
+          <a:ln w="25400">
+            <a:solidFill>
+              <a:srgbClr val="7B61FF"/>
+            </a:solidFill>
+            <a:prstDash val="solid"/>
+          </a:ln>
+        </p:spPr>
+      </p:sp>
+      <p:sp>
+        <p:nvSpPr>
+          <p:cNvPr id="6" name="Shape 4"/>
+          <p:cNvSpPr/>
+          <p:nvPr/>
+        </p:nvSpPr>
+        <p:spPr>
+          <a:xfrm>
+            <a:off x="4964091" y="2433168"/>
+            <a:ext cx="9144" cy="1091336"/>
+          </a:xfrm>
+          <a:prstGeom prst="line">
+            <a:avLst/>
+          </a:prstGeom>
+          <a:noFill/>
+          <a:ln w="25400">
+            <a:solidFill>
+              <a:srgbClr val="7B61FF"/>
+            </a:solidFill>
+            <a:prstDash val="solid"/>
+          </a:ln>
+        </p:spPr>
+      </p:sp>
+      <p:sp>
+        <p:nvSpPr>
+          <p:cNvPr id="7" name="Shape 5"/>
+          <p:cNvSpPr/>
+          <p:nvPr/>
+        </p:nvSpPr>
+        <p:spPr>
+          <a:xfrm>
+            <a:off x="4964091" y="3524504"/>
+            <a:ext cx="94313" cy="9144"/>
           </a:xfrm>
           <a:prstGeom prst="line">
             <a:avLst/>
@@ -8936,14 +9114,60 @@
       </p:sp>
       <p:sp>
         <p:nvSpPr>
-          <p:cNvPr id="5" name="Shape 3"/>
-          <p:cNvSpPr/>
-          <p:nvPr/>
-        </p:nvSpPr>
-        <p:spPr>
-          <a:xfrm>
-            <a:off x="5296642" y="2794000"/>
-            <a:ext cx="1598412" cy="9144"/>
+          <p:cNvPr id="8" name="Shape 6"/>
+          <p:cNvSpPr/>
+          <p:nvPr/>
+        </p:nvSpPr>
+        <p:spPr>
+          <a:xfrm>
+            <a:off x="6001535" y="3524504"/>
+            <a:ext cx="94313" cy="9144"/>
+          </a:xfrm>
+          <a:prstGeom prst="line">
+            <a:avLst/>
+          </a:prstGeom>
+          <a:noFill/>
+          <a:ln w="25400">
+            <a:solidFill>
+              <a:srgbClr val="7B61FF"/>
+            </a:solidFill>
+            <a:prstDash val="solid"/>
+          </a:ln>
+        </p:spPr>
+      </p:sp>
+      <p:sp>
+        <p:nvSpPr>
+          <p:cNvPr id="9" name="Shape 7"/>
+          <p:cNvSpPr/>
+          <p:nvPr/>
+        </p:nvSpPr>
+        <p:spPr>
+          <a:xfrm>
+            <a:off x="6095848" y="3524504"/>
+            <a:ext cx="9144" cy="9144"/>
+          </a:xfrm>
+          <a:prstGeom prst="line">
+            <a:avLst/>
+          </a:prstGeom>
+          <a:noFill/>
+          <a:ln w="25400">
+            <a:solidFill>
+              <a:srgbClr val="7B61FF"/>
+            </a:solidFill>
+            <a:prstDash val="solid"/>
+          </a:ln>
+        </p:spPr>
+      </p:sp>
+      <p:sp>
+        <p:nvSpPr>
+          <p:cNvPr id="10" name="Shape 8"/>
+          <p:cNvSpPr/>
+          <p:nvPr/>
+        </p:nvSpPr>
+        <p:spPr>
+          <a:xfrm>
+            <a:off x="6095848" y="3524504"/>
+            <a:ext cx="94313" cy="9144"/>
           </a:xfrm>
           <a:prstGeom prst="line">
             <a:avLst/>
@@ -8960,14 +9184,60 @@
       </p:sp>
       <p:sp>
         <p:nvSpPr>
-          <p:cNvPr id="6" name="Shape 4"/>
+          <p:cNvPr id="11" name="Shape 9"/>
+          <p:cNvSpPr/>
+          <p:nvPr/>
+        </p:nvSpPr>
+        <p:spPr>
+          <a:xfrm>
+            <a:off x="7133291" y="3524504"/>
+            <a:ext cx="94313" cy="9144"/>
+          </a:xfrm>
+          <a:prstGeom prst="line">
+            <a:avLst/>
+          </a:prstGeom>
+          <a:noFill/>
+          <a:ln w="25400">
+            <a:solidFill>
+              <a:srgbClr val="7B61FF"/>
+            </a:solidFill>
+            <a:prstDash val="solid"/>
+          </a:ln>
+        </p:spPr>
+      </p:sp>
+      <p:sp>
+        <p:nvSpPr>
+          <p:cNvPr id="12" name="Shape 10"/>
           <p:cNvSpPr/>
           <p:nvPr/>
         </p:nvSpPr>
         <p:spPr>
           <a:xfrm flipV="1">
-            <a:off x="8540974" y="2492829"/>
-            <a:ext cx="1598412" cy="301171"/>
+            <a:off x="7227604" y="3160725"/>
+            <a:ext cx="9144" cy="363779"/>
+          </a:xfrm>
+          <a:prstGeom prst="line">
+            <a:avLst/>
+          </a:prstGeom>
+          <a:noFill/>
+          <a:ln w="25400">
+            <a:solidFill>
+              <a:srgbClr val="7B61FF"/>
+            </a:solidFill>
+            <a:prstDash val="solid"/>
+          </a:ln>
+        </p:spPr>
+      </p:sp>
+      <p:sp>
+        <p:nvSpPr>
+          <p:cNvPr id="13" name="Shape 11"/>
+          <p:cNvSpPr/>
+          <p:nvPr/>
+        </p:nvSpPr>
+        <p:spPr>
+          <a:xfrm>
+            <a:off x="7227604" y="3160725"/>
+            <a:ext cx="94313" cy="9144"/>
           </a:xfrm>
           <a:prstGeom prst="line">
             <a:avLst/>
@@ -8984,14 +9254,60 @@
       </p:sp>
       <p:sp>
         <p:nvSpPr>
-          <p:cNvPr id="7" name="Shape 5"/>
-          <p:cNvSpPr/>
-          <p:nvPr/>
-        </p:nvSpPr>
-        <p:spPr>
-          <a:xfrm>
-            <a:off x="8540974" y="2794000"/>
-            <a:ext cx="1598412" cy="9144"/>
+          <p:cNvPr id="14" name="Shape 12"/>
+          <p:cNvSpPr/>
+          <p:nvPr/>
+        </p:nvSpPr>
+        <p:spPr>
+          <a:xfrm>
+            <a:off x="7133291" y="3524504"/>
+            <a:ext cx="94313" cy="9144"/>
+          </a:xfrm>
+          <a:prstGeom prst="line">
+            <a:avLst/>
+          </a:prstGeom>
+          <a:noFill/>
+          <a:ln w="25400">
+            <a:solidFill>
+              <a:srgbClr val="7B61FF"/>
+            </a:solidFill>
+            <a:prstDash val="solid"/>
+          </a:ln>
+        </p:spPr>
+      </p:sp>
+      <p:sp>
+        <p:nvSpPr>
+          <p:cNvPr id="15" name="Shape 13"/>
+          <p:cNvSpPr/>
+          <p:nvPr/>
+        </p:nvSpPr>
+        <p:spPr>
+          <a:xfrm>
+            <a:off x="7227604" y="3524504"/>
+            <a:ext cx="9144" cy="9144"/>
+          </a:xfrm>
+          <a:prstGeom prst="line">
+            <a:avLst/>
+          </a:prstGeom>
+          <a:noFill/>
+          <a:ln w="25400">
+            <a:solidFill>
+              <a:srgbClr val="7B61FF"/>
+            </a:solidFill>
+            <a:prstDash val="solid"/>
+          </a:ln>
+        </p:spPr>
+      </p:sp>
+      <p:sp>
+        <p:nvSpPr>
+          <p:cNvPr id="16" name="Shape 14"/>
+          <p:cNvSpPr/>
+          <p:nvPr/>
+        </p:nvSpPr>
+        <p:spPr>
+          <a:xfrm>
+            <a:off x="7227604" y="3524504"/>
+            <a:ext cx="94313" cy="9144"/>
           </a:xfrm>
           <a:prstGeom prst="line">
             <a:avLst/>
@@ -9008,14 +9324,60 @@
       </p:sp>
       <p:sp>
         <p:nvSpPr>
-          <p:cNvPr id="8" name="Shape 6"/>
-          <p:cNvSpPr/>
-          <p:nvPr/>
-        </p:nvSpPr>
-        <p:spPr>
-          <a:xfrm>
-            <a:off x="8540974" y="2794000"/>
-            <a:ext cx="1598412" cy="301171"/>
+          <p:cNvPr id="17" name="Shape 15"/>
+          <p:cNvSpPr/>
+          <p:nvPr/>
+        </p:nvSpPr>
+        <p:spPr>
+          <a:xfrm>
+            <a:off x="7133291" y="3524504"/>
+            <a:ext cx="94313" cy="9144"/>
+          </a:xfrm>
+          <a:prstGeom prst="line">
+            <a:avLst/>
+          </a:prstGeom>
+          <a:noFill/>
+          <a:ln w="25400">
+            <a:solidFill>
+              <a:srgbClr val="7B61FF"/>
+            </a:solidFill>
+            <a:prstDash val="solid"/>
+          </a:ln>
+        </p:spPr>
+      </p:sp>
+      <p:sp>
+        <p:nvSpPr>
+          <p:cNvPr id="18" name="Shape 16"/>
+          <p:cNvSpPr/>
+          <p:nvPr/>
+        </p:nvSpPr>
+        <p:spPr>
+          <a:xfrm>
+            <a:off x="7227604" y="3524504"/>
+            <a:ext cx="9144" cy="363779"/>
+          </a:xfrm>
+          <a:prstGeom prst="line">
+            <a:avLst/>
+          </a:prstGeom>
+          <a:noFill/>
+          <a:ln w="25400">
+            <a:solidFill>
+              <a:srgbClr val="7B61FF"/>
+            </a:solidFill>
+            <a:prstDash val="solid"/>
+          </a:ln>
+        </p:spPr>
+      </p:sp>
+      <p:sp>
+        <p:nvSpPr>
+          <p:cNvPr id="19" name="Shape 17"/>
+          <p:cNvSpPr/>
+          <p:nvPr/>
+        </p:nvSpPr>
+        <p:spPr>
+          <a:xfrm>
+            <a:off x="7227604" y="3888283"/>
+            <a:ext cx="94313" cy="9144"/>
           </a:xfrm>
           <a:prstGeom prst="line">
             <a:avLst/>
@@ -9032,18 +9394,18 @@
       </p:sp>
       <p:sp>
         <p:nvSpPr>
-          <p:cNvPr id="9" name="Shape 7"/>
-          <p:cNvSpPr/>
-          <p:nvPr/>
-        </p:nvSpPr>
-        <p:spPr>
-          <a:xfrm>
-            <a:off x="406390" y="1778000"/>
-            <a:ext cx="1645920" cy="224971"/>
+          <p:cNvPr id="20" name="Shape 18"/>
+          <p:cNvSpPr/>
+          <p:nvPr/>
+        </p:nvSpPr>
+        <p:spPr>
+          <a:xfrm>
+            <a:off x="3926648" y="2311908"/>
+            <a:ext cx="943130" cy="242519"/>
           </a:xfrm>
           <a:prstGeom prst="roundRect">
             <a:avLst>
-              <a:gd name="adj" fmla="val 32516"/>
+              <a:gd name="adj" fmla="val 30163"/>
             </a:avLst>
           </a:prstGeom>
           <a:solidFill>
@@ -9059,14 +9421,14 @@
       </p:sp>
       <p:sp>
         <p:nvSpPr>
-          <p:cNvPr id="10" name="Text 8"/>
-          <p:cNvSpPr/>
-          <p:nvPr/>
-        </p:nvSpPr>
-        <p:spPr>
-          <a:xfrm>
-            <a:off x="461254" y="1832864"/>
-            <a:ext cx="1536192" cy="115243"/>
+          <p:cNvPr id="21" name="Text 19"/>
+          <p:cNvSpPr/>
+          <p:nvPr/>
+        </p:nvSpPr>
+        <p:spPr>
+          <a:xfrm>
+            <a:off x="3981512" y="2366772"/>
+            <a:ext cx="833402" cy="132791"/>
           </a:xfrm>
           <a:prstGeom prst="rect">
             <a:avLst/>
@@ -9090,7 +9452,7 @@
                 <a:ea typeface="Trebuchet MS" pitchFamily="34" charset="-122"/>
                 <a:cs typeface="Trebuchet MS" pitchFamily="34" charset="-120"/>
               </a:rPr>
-              <a:t>Sorgente Yumia</a:t>
+              <a:t>Sorgente Yu…</a:t>
             </a:r>
             <a:endParaRPr lang="en-US" sz="1100" dirty="0"/>
           </a:p>
@@ -9098,18 +9460,18 @@
       </p:sp>
       <p:sp>
         <p:nvSpPr>
-          <p:cNvPr id="11" name="Shape 9"/>
-          <p:cNvSpPr/>
-          <p:nvPr/>
-        </p:nvSpPr>
-        <p:spPr>
-          <a:xfrm>
-            <a:off x="3650722" y="2681514"/>
-            <a:ext cx="1645920" cy="224971"/>
+          <p:cNvPr id="22" name="Shape 20"/>
+          <p:cNvSpPr/>
+          <p:nvPr/>
+        </p:nvSpPr>
+        <p:spPr>
+          <a:xfrm>
+            <a:off x="5058404" y="3403244"/>
+            <a:ext cx="943130" cy="242519"/>
           </a:xfrm>
           <a:prstGeom prst="roundRect">
             <a:avLst>
-              <a:gd name="adj" fmla="val 32516"/>
+              <a:gd name="adj" fmla="val 30163"/>
             </a:avLst>
           </a:prstGeom>
           <a:solidFill>
@@ -9125,14 +9487,14 @@
       </p:sp>
       <p:sp>
         <p:nvSpPr>
-          <p:cNvPr id="12" name="Text 10"/>
-          <p:cNvSpPr/>
-          <p:nvPr/>
-        </p:nvSpPr>
-        <p:spPr>
-          <a:xfrm>
-            <a:off x="3705586" y="2736378"/>
-            <a:ext cx="1536192" cy="115243"/>
+          <p:cNvPr id="23" name="Text 21"/>
+          <p:cNvSpPr/>
+          <p:nvPr/>
+        </p:nvSpPr>
+        <p:spPr>
+          <a:xfrm>
+            <a:off x="5113268" y="3458108"/>
+            <a:ext cx="833402" cy="132791"/>
           </a:xfrm>
           <a:prstGeom prst="rect">
             <a:avLst/>
@@ -9156,7 +9518,7 @@
                 <a:ea typeface="Trebuchet MS" pitchFamily="34" charset="-122"/>
                 <a:cs typeface="Trebuchet MS" pitchFamily="34" charset="-120"/>
               </a:rPr>
-              <a:t>AST Semantico</a:t>
+              <a:t>AST Semanti…</a:t>
             </a:r>
             <a:endParaRPr lang="en-US" sz="1100" dirty="0"/>
           </a:p>
@@ -9164,18 +9526,18 @@
       </p:sp>
       <p:sp>
         <p:nvSpPr>
-          <p:cNvPr id="13" name="Shape 11"/>
-          <p:cNvSpPr/>
-          <p:nvPr/>
-        </p:nvSpPr>
-        <p:spPr>
-          <a:xfrm>
-            <a:off x="6895054" y="2681514"/>
-            <a:ext cx="1645920" cy="224971"/>
+          <p:cNvPr id="24" name="Shape 22"/>
+          <p:cNvSpPr/>
+          <p:nvPr/>
+        </p:nvSpPr>
+        <p:spPr>
+          <a:xfrm>
+            <a:off x="6190161" y="3403244"/>
+            <a:ext cx="943130" cy="242519"/>
           </a:xfrm>
           <a:prstGeom prst="roundRect">
             <a:avLst>
-              <a:gd name="adj" fmla="val 32516"/>
+              <a:gd name="adj" fmla="val 30163"/>
             </a:avLst>
           </a:prstGeom>
           <a:solidFill>
@@ -9191,14 +9553,14 @@
       </p:sp>
       <p:sp>
         <p:nvSpPr>
-          <p:cNvPr id="14" name="Text 12"/>
-          <p:cNvSpPr/>
-          <p:nvPr/>
-        </p:nvSpPr>
-        <p:spPr>
-          <a:xfrm>
-            <a:off x="6949918" y="2736378"/>
-            <a:ext cx="1536192" cy="115243"/>
+          <p:cNvPr id="25" name="Text 23"/>
+          <p:cNvSpPr/>
+          <p:nvPr/>
+        </p:nvSpPr>
+        <p:spPr>
+          <a:xfrm>
+            <a:off x="6245025" y="3458108"/>
+            <a:ext cx="833402" cy="132791"/>
           </a:xfrm>
           <a:prstGeom prst="rect">
             <a:avLst/>
@@ -9222,7 +9584,7 @@
                 <a:ea typeface="Trebuchet MS" pitchFamily="34" charset="-122"/>
                 <a:cs typeface="Trebuchet MS" pitchFamily="34" charset="-120"/>
               </a:rPr>
-              <a:t>Design System</a:t>
+              <a:t>Design Syst…</a:t>
             </a:r>
             <a:endParaRPr lang="en-US" sz="1100" dirty="0"/>
           </a:p>
@@ -9230,18 +9592,18 @@
       </p:sp>
       <p:sp>
         <p:nvSpPr>
-          <p:cNvPr id="15" name="Shape 13"/>
-          <p:cNvSpPr/>
-          <p:nvPr/>
-        </p:nvSpPr>
-        <p:spPr>
-          <a:xfrm>
-            <a:off x="10139385" y="2380343"/>
-            <a:ext cx="1645920" cy="224971"/>
+          <p:cNvPr id="26" name="Shape 24"/>
+          <p:cNvSpPr/>
+          <p:nvPr/>
+        </p:nvSpPr>
+        <p:spPr>
+          <a:xfrm>
+            <a:off x="7321917" y="3039466"/>
+            <a:ext cx="943130" cy="242519"/>
           </a:xfrm>
           <a:prstGeom prst="roundRect">
             <a:avLst>
-              <a:gd name="adj" fmla="val 32516"/>
+              <a:gd name="adj" fmla="val 30163"/>
             </a:avLst>
           </a:prstGeom>
           <a:solidFill>
@@ -9257,14 +9619,14 @@
       </p:sp>
       <p:sp>
         <p:nvSpPr>
-          <p:cNvPr id="16" name="Text 14"/>
-          <p:cNvSpPr/>
-          <p:nvPr/>
-        </p:nvSpPr>
-        <p:spPr>
-          <a:xfrm>
-            <a:off x="10194249" y="2435207"/>
-            <a:ext cx="1536192" cy="115243"/>
+          <p:cNvPr id="27" name="Text 25"/>
+          <p:cNvSpPr/>
+          <p:nvPr/>
+        </p:nvSpPr>
+        <p:spPr>
+          <a:xfrm>
+            <a:off x="7376781" y="3094330"/>
+            <a:ext cx="833402" cy="132791"/>
           </a:xfrm>
           <a:prstGeom prst="rect">
             <a:avLst/>
@@ -9288,7 +9650,7 @@
                 <a:ea typeface="Trebuchet MS" pitchFamily="34" charset="-122"/>
                 <a:cs typeface="Trebuchet MS" pitchFamily="34" charset="-120"/>
               </a:rPr>
-              <a:t>HTML Interattivo</a:t>
+              <a:t>HTML Intera…</a:t>
             </a:r>
             <a:endParaRPr lang="en-US" sz="1100" dirty="0"/>
           </a:p>
@@ -9296,18 +9658,18 @@
       </p:sp>
       <p:sp>
         <p:nvSpPr>
-          <p:cNvPr id="17" name="Shape 15"/>
-          <p:cNvSpPr/>
-          <p:nvPr/>
-        </p:nvSpPr>
-        <p:spPr>
-          <a:xfrm>
-            <a:off x="10139385" y="2681514"/>
-            <a:ext cx="1645920" cy="224971"/>
+          <p:cNvPr id="28" name="Shape 26"/>
+          <p:cNvSpPr/>
+          <p:nvPr/>
+        </p:nvSpPr>
+        <p:spPr>
+          <a:xfrm>
+            <a:off x="7321917" y="3403244"/>
+            <a:ext cx="943130" cy="242519"/>
           </a:xfrm>
           <a:prstGeom prst="roundRect">
             <a:avLst>
-              <a:gd name="adj" fmla="val 32516"/>
+              <a:gd name="adj" fmla="val 30163"/>
             </a:avLst>
           </a:prstGeom>
           <a:solidFill>
@@ -9323,14 +9685,14 @@
       </p:sp>
       <p:sp>
         <p:nvSpPr>
-          <p:cNvPr id="18" name="Text 16"/>
-          <p:cNvSpPr/>
-          <p:nvPr/>
-        </p:nvSpPr>
-        <p:spPr>
-          <a:xfrm>
-            <a:off x="10194249" y="2736378"/>
-            <a:ext cx="1536192" cy="115243"/>
+          <p:cNvPr id="29" name="Text 27"/>
+          <p:cNvSpPr/>
+          <p:nvPr/>
+        </p:nvSpPr>
+        <p:spPr>
+          <a:xfrm>
+            <a:off x="7376781" y="3458108"/>
+            <a:ext cx="833402" cy="132791"/>
           </a:xfrm>
           <a:prstGeom prst="rect">
             <a:avLst/>
@@ -9354,7 +9716,7 @@
                 <a:ea typeface="Trebuchet MS" pitchFamily="34" charset="-122"/>
                 <a:cs typeface="Trebuchet MS" pitchFamily="34" charset="-120"/>
               </a:rPr>
-              <a:t>PowerPoint PPTX</a:t>
+              <a:t>PowerPoint …</a:t>
             </a:r>
             <a:endParaRPr lang="en-US" sz="1100" dirty="0"/>
           </a:p>
@@ -9362,18 +9724,18 @@
       </p:sp>
       <p:sp>
         <p:nvSpPr>
-          <p:cNvPr id="19" name="Shape 17"/>
-          <p:cNvSpPr/>
-          <p:nvPr/>
-        </p:nvSpPr>
-        <p:spPr>
-          <a:xfrm>
-            <a:off x="10139385" y="2982686"/>
-            <a:ext cx="1645920" cy="224971"/>
+          <p:cNvPr id="30" name="Shape 28"/>
+          <p:cNvSpPr/>
+          <p:nvPr/>
+        </p:nvSpPr>
+        <p:spPr>
+          <a:xfrm>
+            <a:off x="7321917" y="3767023"/>
+            <a:ext cx="943130" cy="242519"/>
           </a:xfrm>
           <a:prstGeom prst="roundRect">
             <a:avLst>
-              <a:gd name="adj" fmla="val 32516"/>
+              <a:gd name="adj" fmla="val 30163"/>
             </a:avLst>
           </a:prstGeom>
           <a:solidFill>
@@ -9389,14 +9751,14 @@
       </p:sp>
       <p:sp>
         <p:nvSpPr>
-          <p:cNvPr id="20" name="Text 18"/>
-          <p:cNvSpPr/>
-          <p:nvPr/>
-        </p:nvSpPr>
-        <p:spPr>
-          <a:xfrm>
-            <a:off x="10194249" y="3037550"/>
-            <a:ext cx="1536192" cy="115243"/>
+          <p:cNvPr id="31" name="Text 29"/>
+          <p:cNvSpPr/>
+          <p:nvPr/>
+        </p:nvSpPr>
+        <p:spPr>
+          <a:xfrm>
+            <a:off x="7376781" y="3821887"/>
+            <a:ext cx="833402" cy="132791"/>
           </a:xfrm>
           <a:prstGeom prst="rect">
             <a:avLst/>
@@ -9420,7 +9782,7 @@
                 <a:ea typeface="Trebuchet MS" pitchFamily="34" charset="-122"/>
                 <a:cs typeface="Trebuchet MS" pitchFamily="34" charset="-120"/>
               </a:rPr>
-              <a:t>PDF Vettoriale</a:t>
+              <a:t>PDF Vettori…</a:t>
             </a:r>
             <a:endParaRPr lang="en-US" sz="1100" dirty="0"/>
           </a:p>
@@ -9428,18 +9790,18 @@
       </p:sp>
       <p:sp>
         <p:nvSpPr>
-          <p:cNvPr id="21" name="Shape 19"/>
-          <p:cNvSpPr/>
-          <p:nvPr/>
-        </p:nvSpPr>
-        <p:spPr>
-          <a:xfrm>
-            <a:off x="406390" y="2079171"/>
-            <a:ext cx="1645920" cy="224971"/>
+          <p:cNvPr id="32" name="Shape 30"/>
+          <p:cNvSpPr/>
+          <p:nvPr/>
+        </p:nvSpPr>
+        <p:spPr>
+          <a:xfrm>
+            <a:off x="3926648" y="2675687"/>
+            <a:ext cx="943130" cy="242519"/>
           </a:xfrm>
           <a:prstGeom prst="roundRect">
             <a:avLst>
-              <a:gd name="adj" fmla="val 32516"/>
+              <a:gd name="adj" fmla="val 30163"/>
             </a:avLst>
           </a:prstGeom>
           <a:solidFill>
@@ -9455,14 +9817,14 @@
       </p:sp>
       <p:sp>
         <p:nvSpPr>
-          <p:cNvPr id="22" name="Text 20"/>
-          <p:cNvSpPr/>
-          <p:nvPr/>
-        </p:nvSpPr>
-        <p:spPr>
-          <a:xfrm>
-            <a:off x="461254" y="2134035"/>
-            <a:ext cx="1536192" cy="115243"/>
+          <p:cNvPr id="33" name="Text 31"/>
+          <p:cNvSpPr/>
+          <p:nvPr/>
+        </p:nvSpPr>
+        <p:spPr>
+          <a:xfrm>
+            <a:off x="3981512" y="2730551"/>
+            <a:ext cx="833402" cy="132791"/>
           </a:xfrm>
           <a:prstGeom prst="rect">
             <a:avLst/>
@@ -9494,18 +9856,18 @@
       </p:sp>
       <p:sp>
         <p:nvSpPr>
-          <p:cNvPr id="23" name="Shape 21"/>
-          <p:cNvSpPr/>
-          <p:nvPr/>
-        </p:nvSpPr>
-        <p:spPr>
-          <a:xfrm>
-            <a:off x="406390" y="2380343"/>
-            <a:ext cx="1645920" cy="224971"/>
+          <p:cNvPr id="34" name="Shape 32"/>
+          <p:cNvSpPr/>
+          <p:nvPr/>
+        </p:nvSpPr>
+        <p:spPr>
+          <a:xfrm>
+            <a:off x="3926648" y="3039466"/>
+            <a:ext cx="943130" cy="242519"/>
           </a:xfrm>
           <a:prstGeom prst="roundRect">
             <a:avLst>
-              <a:gd name="adj" fmla="val 32516"/>
+              <a:gd name="adj" fmla="val 30163"/>
             </a:avLst>
           </a:prstGeom>
           <a:solidFill>
@@ -9521,14 +9883,14 @@
       </p:sp>
       <p:sp>
         <p:nvSpPr>
-          <p:cNvPr id="24" name="Text 22"/>
-          <p:cNvSpPr/>
-          <p:nvPr/>
-        </p:nvSpPr>
-        <p:spPr>
-          <a:xfrm>
-            <a:off x="461254" y="2435207"/>
-            <a:ext cx="1536192" cy="115243"/>
+          <p:cNvPr id="35" name="Text 33"/>
+          <p:cNvSpPr/>
+          <p:nvPr/>
+        </p:nvSpPr>
+        <p:spPr>
+          <a:xfrm>
+            <a:off x="3981512" y="3094330"/>
+            <a:ext cx="833402" cy="132791"/>
           </a:xfrm>
           <a:prstGeom prst="rect">
             <a:avLst/>
@@ -9560,18 +9922,18 @@
       </p:sp>
       <p:sp>
         <p:nvSpPr>
-          <p:cNvPr id="25" name="Shape 23"/>
-          <p:cNvSpPr/>
-          <p:nvPr/>
-        </p:nvSpPr>
-        <p:spPr>
-          <a:xfrm>
-            <a:off x="406390" y="2681514"/>
-            <a:ext cx="1645920" cy="224971"/>
+          <p:cNvPr id="36" name="Shape 34"/>
+          <p:cNvSpPr/>
+          <p:nvPr/>
+        </p:nvSpPr>
+        <p:spPr>
+          <a:xfrm>
+            <a:off x="3926648" y="3403244"/>
+            <a:ext cx="943130" cy="242519"/>
           </a:xfrm>
           <a:prstGeom prst="roundRect">
             <a:avLst>
-              <a:gd name="adj" fmla="val 32516"/>
+              <a:gd name="adj" fmla="val 30163"/>
             </a:avLst>
           </a:prstGeom>
           <a:solidFill>
@@ -9587,14 +9949,14 @@
       </p:sp>
       <p:sp>
         <p:nvSpPr>
-          <p:cNvPr id="26" name="Text 24"/>
-          <p:cNvSpPr/>
-          <p:nvPr/>
-        </p:nvSpPr>
-        <p:spPr>
-          <a:xfrm>
-            <a:off x="461254" y="2736378"/>
-            <a:ext cx="1536192" cy="115243"/>
+          <p:cNvPr id="37" name="Text 35"/>
+          <p:cNvSpPr/>
+          <p:nvPr/>
+        </p:nvSpPr>
+        <p:spPr>
+          <a:xfrm>
+            <a:off x="3981512" y="3458108"/>
+            <a:ext cx="833402" cy="132791"/>
           </a:xfrm>
           <a:prstGeom prst="rect">
             <a:avLst/>
@@ -9626,18 +9988,18 @@
       </p:sp>
       <p:sp>
         <p:nvSpPr>
-          <p:cNvPr id="27" name="Shape 25"/>
-          <p:cNvSpPr/>
-          <p:nvPr/>
-        </p:nvSpPr>
-        <p:spPr>
-          <a:xfrm>
-            <a:off x="406390" y="2982686"/>
-            <a:ext cx="1645920" cy="224971"/>
+          <p:cNvPr id="38" name="Shape 36"/>
+          <p:cNvSpPr/>
+          <p:nvPr/>
+        </p:nvSpPr>
+        <p:spPr>
+          <a:xfrm>
+            <a:off x="3926648" y="3767023"/>
+            <a:ext cx="943130" cy="242519"/>
           </a:xfrm>
           <a:prstGeom prst="roundRect">
             <a:avLst>
-              <a:gd name="adj" fmla="val 32516"/>
+              <a:gd name="adj" fmla="val 30163"/>
             </a:avLst>
           </a:prstGeom>
           <a:solidFill>
@@ -9653,14 +10015,14 @@
       </p:sp>
       <p:sp>
         <p:nvSpPr>
-          <p:cNvPr id="28" name="Text 26"/>
-          <p:cNvSpPr/>
-          <p:nvPr/>
-        </p:nvSpPr>
-        <p:spPr>
-          <a:xfrm>
-            <a:off x="461254" y="3037550"/>
-            <a:ext cx="1536192" cy="115243"/>
+          <p:cNvPr id="39" name="Text 37"/>
+          <p:cNvSpPr/>
+          <p:nvPr/>
+        </p:nvSpPr>
+        <p:spPr>
+          <a:xfrm>
+            <a:off x="3981512" y="3821887"/>
+            <a:ext cx="833402" cy="132791"/>
           </a:xfrm>
           <a:prstGeom prst="rect">
             <a:avLst/>
@@ -9692,18 +10054,18 @@
       </p:sp>
       <p:sp>
         <p:nvSpPr>
-          <p:cNvPr id="29" name="Shape 27"/>
-          <p:cNvSpPr/>
-          <p:nvPr/>
-        </p:nvSpPr>
-        <p:spPr>
-          <a:xfrm>
-            <a:off x="406390" y="3283857"/>
-            <a:ext cx="1645920" cy="224971"/>
+          <p:cNvPr id="40" name="Shape 38"/>
+          <p:cNvSpPr/>
+          <p:nvPr/>
+        </p:nvSpPr>
+        <p:spPr>
+          <a:xfrm>
+            <a:off x="3926648" y="4130802"/>
+            <a:ext cx="943130" cy="242519"/>
           </a:xfrm>
           <a:prstGeom prst="roundRect">
             <a:avLst>
-              <a:gd name="adj" fmla="val 32516"/>
+              <a:gd name="adj" fmla="val 30163"/>
             </a:avLst>
           </a:prstGeom>
           <a:solidFill>
@@ -9719,14 +10081,14 @@
       </p:sp>
       <p:sp>
         <p:nvSpPr>
-          <p:cNvPr id="30" name="Text 28"/>
-          <p:cNvSpPr/>
-          <p:nvPr/>
-        </p:nvSpPr>
-        <p:spPr>
-          <a:xfrm>
-            <a:off x="461254" y="3338721"/>
-            <a:ext cx="1536192" cy="115243"/>
+          <p:cNvPr id="41" name="Text 39"/>
+          <p:cNvSpPr/>
+          <p:nvPr/>
+        </p:nvSpPr>
+        <p:spPr>
+          <a:xfrm>
+            <a:off x="3981512" y="4185666"/>
+            <a:ext cx="833402" cy="132791"/>
           </a:xfrm>
           <a:prstGeom prst="rect">
             <a:avLst/>
@@ -9758,18 +10120,18 @@
       </p:sp>
       <p:sp>
         <p:nvSpPr>
-          <p:cNvPr id="31" name="Shape 29"/>
-          <p:cNvSpPr/>
-          <p:nvPr/>
-        </p:nvSpPr>
-        <p:spPr>
-          <a:xfrm>
-            <a:off x="406390" y="3585029"/>
-            <a:ext cx="1645920" cy="224971"/>
+          <p:cNvPr id="42" name="Shape 40"/>
+          <p:cNvSpPr/>
+          <p:nvPr/>
+        </p:nvSpPr>
+        <p:spPr>
+          <a:xfrm>
+            <a:off x="3926648" y="4494581"/>
+            <a:ext cx="943130" cy="242519"/>
           </a:xfrm>
           <a:prstGeom prst="roundRect">
             <a:avLst>
-              <a:gd name="adj" fmla="val 32516"/>
+              <a:gd name="adj" fmla="val 30163"/>
             </a:avLst>
           </a:prstGeom>
           <a:solidFill>
@@ -9785,14 +10147,14 @@
       </p:sp>
       <p:sp>
         <p:nvSpPr>
-          <p:cNvPr id="32" name="Text 30"/>
-          <p:cNvSpPr/>
-          <p:nvPr/>
-        </p:nvSpPr>
-        <p:spPr>
-          <a:xfrm>
-            <a:off x="461254" y="3639893"/>
-            <a:ext cx="1536192" cy="115243"/>
+          <p:cNvPr id="43" name="Text 41"/>
+          <p:cNvSpPr/>
+          <p:nvPr/>
+        </p:nvSpPr>
+        <p:spPr>
+          <a:xfrm>
+            <a:off x="3981512" y="4549445"/>
+            <a:ext cx="833402" cy="132791"/>
           </a:xfrm>
           <a:prstGeom prst="rect">
             <a:avLst/>
@@ -9824,13 +10186,13 @@
       </p:sp>
       <p:sp>
         <p:nvSpPr>
-          <p:cNvPr id="33" name="Shape 31"/>
-          <p:cNvSpPr/>
-          <p:nvPr/>
-        </p:nvSpPr>
-        <p:spPr>
-          <a:xfrm>
-            <a:off x="406390" y="3987800"/>
+          <p:cNvPr id="44" name="Shape 42"/>
+          <p:cNvSpPr/>
+          <p:nvPr/>
+        </p:nvSpPr>
+        <p:spPr>
+          <a:xfrm>
+            <a:off x="406390" y="4914900"/>
             <a:ext cx="11378916" cy="831850"/>
           </a:xfrm>
           <a:prstGeom prst="roundRect">
@@ -9851,13 +10213,13 @@
       </p:sp>
       <p:sp>
         <p:nvSpPr>
-          <p:cNvPr id="34" name="Text 32"/>
-          <p:cNvSpPr/>
-          <p:nvPr/>
-        </p:nvSpPr>
-        <p:spPr>
-          <a:xfrm>
-            <a:off x="543550" y="4060952"/>
+          <p:cNvPr id="45" name="Text 43"/>
+          <p:cNvSpPr/>
+          <p:nvPr/>
+        </p:nvSpPr>
+        <p:spPr>
+          <a:xfrm>
+            <a:off x="543550" y="4988052"/>
             <a:ext cx="11104596" cy="274320"/>
           </a:xfrm>
           <a:prstGeom prst="rect">
@@ -9890,13 +10252,13 @@
       </p:sp>
       <p:sp>
         <p:nvSpPr>
-          <p:cNvPr id="35" name="Text 33"/>
-          <p:cNvSpPr/>
-          <p:nvPr/>
-        </p:nvSpPr>
-        <p:spPr>
-          <a:xfrm>
-            <a:off x="543550" y="4380992"/>
+          <p:cNvPr id="46" name="Text 44"/>
+          <p:cNvSpPr/>
+          <p:nvPr/>
+        </p:nvSpPr>
+        <p:spPr>
+          <a:xfrm>
+            <a:off x="543550" y="5308092"/>
             <a:ext cx="11104596" cy="365506"/>
           </a:xfrm>
           <a:prstGeom prst="rect">
@@ -9929,7 +10291,7 @@
       </p:sp>
       <p:sp>
         <p:nvSpPr>
-          <p:cNvPr id="36" name="Text 34"/>
+          <p:cNvPr id="47" name="Text 45"/>
           <p:cNvSpPr/>
           <p:nvPr/>
         </p:nvSpPr>
@@ -10007,23 +10369,23 @@
         <p:spPr>
           <a:xfrm>
             <a:off x="406390" y="406400"/>
-            <a:ext cx="11378916" cy="571500"/>
-          </a:xfrm>
-          <a:prstGeom prst="rect">
-            <a:avLst/>
-          </a:prstGeom>
-          <a:noFill/>
-          <a:ln/>
-        </p:spPr>
-        <p:txBody>
-          <a:bodyPr wrap="square" lIns="0" tIns="0" rIns="0" bIns="0" rtlCol="0" anchor="ctr"/>
+            <a:ext cx="11378916" cy="698500"/>
+          </a:xfrm>
+          <a:prstGeom prst="rect">
+            <a:avLst/>
+          </a:prstGeom>
+          <a:noFill/>
+          <a:ln/>
+        </p:spPr>
+        <p:txBody>
+          <a:bodyPr wrap="square" lIns="0" tIns="0" rIns="0" bIns="0" rtlCol="0" anchor="t"/>
           <a:lstStyle/>
           <a:p>
             <a:pPr algn="l" indent="0" marL="0">
               <a:buNone/>
             </a:pPr>
             <a:r>
-              <a:rPr lang="en-US" sz="4600" b="1" dirty="0">
+              <a:rPr lang="en-US" sz="3300" b="1" dirty="0">
                 <a:solidFill>
                   <a:srgbClr val="FF2E88"/>
                 </a:solidFill>
@@ -10033,7 +10395,7 @@
               </a:rPr>
               <a:t>Architettura della Pipeline</a:t>
             </a:r>
-            <a:endParaRPr lang="en-US" sz="4600" dirty="0"/>
+            <a:endParaRPr lang="en-US" sz="3300" dirty="0"/>
           </a:p>
         </p:txBody>
       </p:sp>
@@ -10045,24 +10407,24 @@
         </p:nvSpPr>
         <p:spPr>
           <a:xfrm>
-            <a:off x="406390" y="1155700"/>
-            <a:ext cx="11378916" cy="444500"/>
-          </a:xfrm>
-          <a:prstGeom prst="rect">
-            <a:avLst/>
-          </a:prstGeom>
-          <a:noFill/>
-          <a:ln/>
-        </p:spPr>
-        <p:txBody>
-          <a:bodyPr wrap="square" lIns="0" tIns="0" rIns="0" bIns="0" rtlCol="0" anchor="ctr"/>
+            <a:off x="406390" y="1282700"/>
+            <a:ext cx="11378916" cy="558800"/>
+          </a:xfrm>
+          <a:prstGeom prst="rect">
+            <a:avLst/>
+          </a:prstGeom>
+          <a:noFill/>
+          <a:ln/>
+        </p:spPr>
+        <p:txBody>
+          <a:bodyPr wrap="square" lIns="0" tIns="0" rIns="0" bIns="0" rtlCol="0" anchor="t"/>
           <a:lstStyle/>
           <a:p>
             <a:pPr algn="l" indent="0" marL="0">
               <a:buNone/>
             </a:pPr>
             <a:r>
-              <a:rPr lang="en-US" sz="3800" b="1" dirty="0">
+              <a:rPr lang="en-US" sz="2700" b="1" dirty="0">
                 <a:solidFill>
                   <a:srgbClr val="FFFFFF"/>
                 </a:solidFill>
@@ -10072,20 +10434,105 @@
               </a:rPr>
               <a:t>Dalla sintassi al rendering finale: la pipeline a 7 stadi</a:t>
             </a:r>
-            <a:endParaRPr lang="en-US" sz="3800" dirty="0"/>
-          </a:p>
-        </p:txBody>
-      </p:sp>
-      <p:sp>
-        <p:nvSpPr>
-          <p:cNvPr id="4" name="Shape 2"/>
-          <p:cNvSpPr/>
-          <p:nvPr/>
-        </p:nvSpPr>
-        <p:spPr>
-          <a:xfrm>
-            <a:off x="1619914" y="1890486"/>
-            <a:ext cx="819554" cy="903514"/>
+            <a:endParaRPr lang="en-US" sz="2700" dirty="0"/>
+          </a:p>
+        </p:txBody>
+      </p:sp>
+      <p:sp>
+        <p:nvSpPr>
+          <p:cNvPr id="4" name="Text 2"/>
+          <p:cNvSpPr/>
+          <p:nvPr/>
+        </p:nvSpPr>
+        <p:spPr>
+          <a:xfrm>
+            <a:off x="406390" y="2019300"/>
+            <a:ext cx="11378916" cy="256032"/>
+          </a:xfrm>
+          <a:prstGeom prst="rect">
+            <a:avLst/>
+          </a:prstGeom>
+          <a:noFill/>
+          <a:ln/>
+        </p:spPr>
+        <p:txBody>
+          <a:bodyPr wrap="square" rtlCol="0" anchor="ctr"/>
+          <a:lstStyle/>
+          <a:p>
+            <a:pPr algn="ctr" indent="0" marL="0">
+              <a:buNone/>
+            </a:pPr>
+            <a:r>
+              <a:rPr lang="en-US" sz="1200" b="1" dirty="0">
+                <a:solidFill>
+                  <a:srgbClr val="FF2E88"/>
+                </a:solidFill>
+                <a:latin typeface="Trebuchet MS" pitchFamily="34" charset="0"/>
+                <a:ea typeface="Trebuchet MS" pitchFamily="34" charset="-122"/>
+                <a:cs typeface="Trebuchet MS" pitchFamily="34" charset="-120"/>
+              </a:rPr>
+              <a:t>Pipeline di Compilazione Deterministica</a:t>
+            </a:r>
+            <a:endParaRPr lang="en-US" sz="1200" dirty="0"/>
+          </a:p>
+        </p:txBody>
+      </p:sp>
+      <p:sp>
+        <p:nvSpPr>
+          <p:cNvPr id="5" name="Shape 3"/>
+          <p:cNvSpPr/>
+          <p:nvPr/>
+        </p:nvSpPr>
+        <p:spPr>
+          <a:xfrm>
+            <a:off x="3782933" y="2433168"/>
+            <a:ext cx="94313" cy="9144"/>
+          </a:xfrm>
+          <a:prstGeom prst="line">
+            <a:avLst/>
+          </a:prstGeom>
+          <a:noFill/>
+          <a:ln w="25400">
+            <a:solidFill>
+              <a:srgbClr val="7B61FF"/>
+            </a:solidFill>
+            <a:prstDash val="solid"/>
+          </a:ln>
+        </p:spPr>
+      </p:sp>
+      <p:sp>
+        <p:nvSpPr>
+          <p:cNvPr id="6" name="Shape 4"/>
+          <p:cNvSpPr/>
+          <p:nvPr/>
+        </p:nvSpPr>
+        <p:spPr>
+          <a:xfrm>
+            <a:off x="3877246" y="2433168"/>
+            <a:ext cx="9144" cy="1091336"/>
+          </a:xfrm>
+          <a:prstGeom prst="line">
+            <a:avLst/>
+          </a:prstGeom>
+          <a:noFill/>
+          <a:ln w="25400">
+            <a:solidFill>
+              <a:srgbClr val="7B61FF"/>
+            </a:solidFill>
+            <a:prstDash val="solid"/>
+          </a:ln>
+        </p:spPr>
+      </p:sp>
+      <p:sp>
+        <p:nvSpPr>
+          <p:cNvPr id="7" name="Shape 5"/>
+          <p:cNvSpPr/>
+          <p:nvPr/>
+        </p:nvSpPr>
+        <p:spPr>
+          <a:xfrm>
+            <a:off x="3877246" y="3524504"/>
+            <a:ext cx="94313" cy="9144"/>
           </a:xfrm>
           <a:prstGeom prst="line">
             <a:avLst/>
@@ -10102,14 +10549,60 @@
       </p:sp>
       <p:sp>
         <p:nvSpPr>
-          <p:cNvPr id="5" name="Shape 3"/>
-          <p:cNvSpPr/>
-          <p:nvPr/>
-        </p:nvSpPr>
-        <p:spPr>
-          <a:xfrm>
-            <a:off x="3652992" y="2794000"/>
-            <a:ext cx="819554" cy="9144"/>
+          <p:cNvPr id="8" name="Shape 6"/>
+          <p:cNvSpPr/>
+          <p:nvPr/>
+        </p:nvSpPr>
+        <p:spPr>
+          <a:xfrm>
+            <a:off x="4892234" y="3524504"/>
+            <a:ext cx="94313" cy="9144"/>
+          </a:xfrm>
+          <a:prstGeom prst="line">
+            <a:avLst/>
+          </a:prstGeom>
+          <a:noFill/>
+          <a:ln w="25400">
+            <a:solidFill>
+              <a:srgbClr val="7B61FF"/>
+            </a:solidFill>
+            <a:prstDash val="solid"/>
+          </a:ln>
+        </p:spPr>
+      </p:sp>
+      <p:sp>
+        <p:nvSpPr>
+          <p:cNvPr id="9" name="Shape 7"/>
+          <p:cNvSpPr/>
+          <p:nvPr/>
+        </p:nvSpPr>
+        <p:spPr>
+          <a:xfrm>
+            <a:off x="4986547" y="3524504"/>
+            <a:ext cx="9144" cy="9144"/>
+          </a:xfrm>
+          <a:prstGeom prst="line">
+            <a:avLst/>
+          </a:prstGeom>
+          <a:noFill/>
+          <a:ln w="25400">
+            <a:solidFill>
+              <a:srgbClr val="7B61FF"/>
+            </a:solidFill>
+            <a:prstDash val="solid"/>
+          </a:ln>
+        </p:spPr>
+      </p:sp>
+      <p:sp>
+        <p:nvSpPr>
+          <p:cNvPr id="10" name="Shape 8"/>
+          <p:cNvSpPr/>
+          <p:nvPr/>
+        </p:nvSpPr>
+        <p:spPr>
+          <a:xfrm>
+            <a:off x="4986547" y="3524504"/>
+            <a:ext cx="94313" cy="9144"/>
           </a:xfrm>
           <a:prstGeom prst="line">
             <a:avLst/>
@@ -10126,14 +10619,60 @@
       </p:sp>
       <p:sp>
         <p:nvSpPr>
-          <p:cNvPr id="6" name="Shape 4"/>
-          <p:cNvSpPr/>
-          <p:nvPr/>
-        </p:nvSpPr>
-        <p:spPr>
-          <a:xfrm>
-            <a:off x="5686070" y="2794000"/>
-            <a:ext cx="819554" cy="9144"/>
+          <p:cNvPr id="11" name="Shape 9"/>
+          <p:cNvSpPr/>
+          <p:nvPr/>
+        </p:nvSpPr>
+        <p:spPr>
+          <a:xfrm>
+            <a:off x="6001535" y="3524504"/>
+            <a:ext cx="94313" cy="9144"/>
+          </a:xfrm>
+          <a:prstGeom prst="line">
+            <a:avLst/>
+          </a:prstGeom>
+          <a:noFill/>
+          <a:ln w="25400">
+            <a:solidFill>
+              <a:srgbClr val="7B61FF"/>
+            </a:solidFill>
+            <a:prstDash val="solid"/>
+          </a:ln>
+        </p:spPr>
+      </p:sp>
+      <p:sp>
+        <p:nvSpPr>
+          <p:cNvPr id="12" name="Shape 10"/>
+          <p:cNvSpPr/>
+          <p:nvPr/>
+        </p:nvSpPr>
+        <p:spPr>
+          <a:xfrm>
+            <a:off x="6095848" y="3524504"/>
+            <a:ext cx="9144" cy="9144"/>
+          </a:xfrm>
+          <a:prstGeom prst="line">
+            <a:avLst/>
+          </a:prstGeom>
+          <a:noFill/>
+          <a:ln w="25400">
+            <a:solidFill>
+              <a:srgbClr val="7B61FF"/>
+            </a:solidFill>
+            <a:prstDash val="solid"/>
+          </a:ln>
+        </p:spPr>
+      </p:sp>
+      <p:sp>
+        <p:nvSpPr>
+          <p:cNvPr id="13" name="Shape 11"/>
+          <p:cNvSpPr/>
+          <p:nvPr/>
+        </p:nvSpPr>
+        <p:spPr>
+          <a:xfrm>
+            <a:off x="6095848" y="3524504"/>
+            <a:ext cx="94313" cy="9144"/>
           </a:xfrm>
           <a:prstGeom prst="line">
             <a:avLst/>
@@ -10150,14 +10689,60 @@
       </p:sp>
       <p:sp>
         <p:nvSpPr>
-          <p:cNvPr id="7" name="Shape 5"/>
-          <p:cNvSpPr/>
-          <p:nvPr/>
-        </p:nvSpPr>
-        <p:spPr>
-          <a:xfrm>
-            <a:off x="7719149" y="2794000"/>
-            <a:ext cx="819554" cy="9144"/>
+          <p:cNvPr id="14" name="Shape 12"/>
+          <p:cNvSpPr/>
+          <p:nvPr/>
+        </p:nvSpPr>
+        <p:spPr>
+          <a:xfrm>
+            <a:off x="7110835" y="3524504"/>
+            <a:ext cx="94313" cy="9144"/>
+          </a:xfrm>
+          <a:prstGeom prst="line">
+            <a:avLst/>
+          </a:prstGeom>
+          <a:noFill/>
+          <a:ln w="25400">
+            <a:solidFill>
+              <a:srgbClr val="7B61FF"/>
+            </a:solidFill>
+            <a:prstDash val="solid"/>
+          </a:ln>
+        </p:spPr>
+      </p:sp>
+      <p:sp>
+        <p:nvSpPr>
+          <p:cNvPr id="15" name="Shape 13"/>
+          <p:cNvSpPr/>
+          <p:nvPr/>
+        </p:nvSpPr>
+        <p:spPr>
+          <a:xfrm>
+            <a:off x="7205148" y="3524504"/>
+            <a:ext cx="9144" cy="9144"/>
+          </a:xfrm>
+          <a:prstGeom prst="line">
+            <a:avLst/>
+          </a:prstGeom>
+          <a:noFill/>
+          <a:ln w="25400">
+            <a:solidFill>
+              <a:srgbClr val="7B61FF"/>
+            </a:solidFill>
+            <a:prstDash val="solid"/>
+          </a:ln>
+        </p:spPr>
+      </p:sp>
+      <p:sp>
+        <p:nvSpPr>
+          <p:cNvPr id="16" name="Shape 14"/>
+          <p:cNvSpPr/>
+          <p:nvPr/>
+        </p:nvSpPr>
+        <p:spPr>
+          <a:xfrm>
+            <a:off x="7205148" y="3524504"/>
+            <a:ext cx="94313" cy="9144"/>
           </a:xfrm>
           <a:prstGeom prst="line">
             <a:avLst/>
@@ -10174,14 +10759,60 @@
       </p:sp>
       <p:sp>
         <p:nvSpPr>
-          <p:cNvPr id="8" name="Shape 6"/>
-          <p:cNvSpPr/>
-          <p:nvPr/>
-        </p:nvSpPr>
-        <p:spPr>
-          <a:xfrm>
-            <a:off x="9752227" y="2794000"/>
-            <a:ext cx="819554" cy="9144"/>
+          <p:cNvPr id="17" name="Shape 15"/>
+          <p:cNvSpPr/>
+          <p:nvPr/>
+        </p:nvSpPr>
+        <p:spPr>
+          <a:xfrm>
+            <a:off x="8220136" y="3524504"/>
+            <a:ext cx="94313" cy="9144"/>
+          </a:xfrm>
+          <a:prstGeom prst="line">
+            <a:avLst/>
+          </a:prstGeom>
+          <a:noFill/>
+          <a:ln w="25400">
+            <a:solidFill>
+              <a:srgbClr val="7B61FF"/>
+            </a:solidFill>
+            <a:prstDash val="solid"/>
+          </a:ln>
+        </p:spPr>
+      </p:sp>
+      <p:sp>
+        <p:nvSpPr>
+          <p:cNvPr id="18" name="Shape 16"/>
+          <p:cNvSpPr/>
+          <p:nvPr/>
+        </p:nvSpPr>
+        <p:spPr>
+          <a:xfrm>
+            <a:off x="8314449" y="3524504"/>
+            <a:ext cx="9144" cy="9144"/>
+          </a:xfrm>
+          <a:prstGeom prst="line">
+            <a:avLst/>
+          </a:prstGeom>
+          <a:noFill/>
+          <a:ln w="25400">
+            <a:solidFill>
+              <a:srgbClr val="7B61FF"/>
+            </a:solidFill>
+            <a:prstDash val="solid"/>
+          </a:ln>
+        </p:spPr>
+      </p:sp>
+      <p:sp>
+        <p:nvSpPr>
+          <p:cNvPr id="19" name="Shape 17"/>
+          <p:cNvSpPr/>
+          <p:nvPr/>
+        </p:nvSpPr>
+        <p:spPr>
+          <a:xfrm>
+            <a:off x="8314449" y="3524504"/>
+            <a:ext cx="94313" cy="9144"/>
           </a:xfrm>
           <a:prstGeom prst="line">
             <a:avLst/>
@@ -10198,18 +10829,18 @@
       </p:sp>
       <p:sp>
         <p:nvSpPr>
-          <p:cNvPr id="9" name="Shape 7"/>
-          <p:cNvSpPr/>
-          <p:nvPr/>
-        </p:nvSpPr>
-        <p:spPr>
-          <a:xfrm>
-            <a:off x="406390" y="1778000"/>
-            <a:ext cx="1213524" cy="224971"/>
+          <p:cNvPr id="20" name="Shape 18"/>
+          <p:cNvSpPr/>
+          <p:nvPr/>
+        </p:nvSpPr>
+        <p:spPr>
+          <a:xfrm>
+            <a:off x="2862258" y="2311908"/>
+            <a:ext cx="920675" cy="242519"/>
           </a:xfrm>
           <a:prstGeom prst="roundRect">
             <a:avLst>
-              <a:gd name="adj" fmla="val 32516"/>
+              <a:gd name="adj" fmla="val 30163"/>
             </a:avLst>
           </a:prstGeom>
           <a:solidFill>
@@ -10225,14 +10856,14 @@
       </p:sp>
       <p:sp>
         <p:nvSpPr>
-          <p:cNvPr id="10" name="Text 8"/>
-          <p:cNvSpPr/>
-          <p:nvPr/>
-        </p:nvSpPr>
-        <p:spPr>
-          <a:xfrm>
-            <a:off x="461254" y="1832864"/>
-            <a:ext cx="1103796" cy="115243"/>
+          <p:cNvPr id="21" name="Text 19"/>
+          <p:cNvSpPr/>
+          <p:nvPr/>
+        </p:nvSpPr>
+        <p:spPr>
+          <a:xfrm>
+            <a:off x="2917122" y="2366772"/>
+            <a:ext cx="810947" cy="132791"/>
           </a:xfrm>
           <a:prstGeom prst="rect">
             <a:avLst/>
@@ -10264,18 +10895,18 @@
       </p:sp>
       <p:sp>
         <p:nvSpPr>
-          <p:cNvPr id="11" name="Shape 9"/>
-          <p:cNvSpPr/>
-          <p:nvPr/>
-        </p:nvSpPr>
-        <p:spPr>
-          <a:xfrm>
-            <a:off x="2439468" y="2681514"/>
-            <a:ext cx="1213524" cy="224971"/>
+          <p:cNvPr id="22" name="Shape 20"/>
+          <p:cNvSpPr/>
+          <p:nvPr/>
+        </p:nvSpPr>
+        <p:spPr>
+          <a:xfrm>
+            <a:off x="3971559" y="3403244"/>
+            <a:ext cx="920675" cy="242519"/>
           </a:xfrm>
           <a:prstGeom prst="roundRect">
             <a:avLst>
-              <a:gd name="adj" fmla="val 32516"/>
+              <a:gd name="adj" fmla="val 30163"/>
             </a:avLst>
           </a:prstGeom>
           <a:solidFill>
@@ -10291,14 +10922,14 @@
       </p:sp>
       <p:sp>
         <p:nvSpPr>
-          <p:cNvPr id="12" name="Text 10"/>
-          <p:cNvSpPr/>
-          <p:nvPr/>
-        </p:nvSpPr>
-        <p:spPr>
-          <a:xfrm>
-            <a:off x="2494332" y="2736378"/>
-            <a:ext cx="1103796" cy="115243"/>
+          <p:cNvPr id="23" name="Text 21"/>
+          <p:cNvSpPr/>
+          <p:nvPr/>
+        </p:nvSpPr>
+        <p:spPr>
+          <a:xfrm>
+            <a:off x="4026423" y="3458108"/>
+            <a:ext cx="810947" cy="132791"/>
           </a:xfrm>
           <a:prstGeom prst="rect">
             <a:avLst/>
@@ -10330,18 +10961,18 @@
       </p:sp>
       <p:sp>
         <p:nvSpPr>
-          <p:cNvPr id="13" name="Shape 11"/>
-          <p:cNvSpPr/>
-          <p:nvPr/>
-        </p:nvSpPr>
-        <p:spPr>
-          <a:xfrm>
-            <a:off x="4472546" y="2681514"/>
-            <a:ext cx="1213524" cy="224971"/>
+          <p:cNvPr id="24" name="Shape 22"/>
+          <p:cNvSpPr/>
+          <p:nvPr/>
+        </p:nvSpPr>
+        <p:spPr>
+          <a:xfrm>
+            <a:off x="5080860" y="3403244"/>
+            <a:ext cx="920675" cy="242519"/>
           </a:xfrm>
           <a:prstGeom prst="roundRect">
             <a:avLst>
-              <a:gd name="adj" fmla="val 32516"/>
+              <a:gd name="adj" fmla="val 30163"/>
             </a:avLst>
           </a:prstGeom>
           <a:solidFill>
@@ -10357,14 +10988,14 @@
       </p:sp>
       <p:sp>
         <p:nvSpPr>
-          <p:cNvPr id="14" name="Text 12"/>
-          <p:cNvSpPr/>
-          <p:nvPr/>
-        </p:nvSpPr>
-        <p:spPr>
-          <a:xfrm>
-            <a:off x="4527410" y="2736378"/>
-            <a:ext cx="1103796" cy="115243"/>
+          <p:cNvPr id="25" name="Text 23"/>
+          <p:cNvSpPr/>
+          <p:nvPr/>
+        </p:nvSpPr>
+        <p:spPr>
+          <a:xfrm>
+            <a:off x="5135724" y="3458108"/>
+            <a:ext cx="810947" cy="132791"/>
           </a:xfrm>
           <a:prstGeom prst="rect">
             <a:avLst/>
@@ -10388,7 +11019,7 @@
                 <a:ea typeface="Trebuchet MS" pitchFamily="34" charset="-122"/>
                 <a:cs typeface="Trebuchet MS" pitchFamily="34" charset="-120"/>
               </a:rPr>
-              <a:t>Design Linter</a:t>
+              <a:t>Design Lint…</a:t>
             </a:r>
             <a:endParaRPr lang="en-US" sz="1100" dirty="0"/>
           </a:p>
@@ -10396,18 +11027,18 @@
       </p:sp>
       <p:sp>
         <p:nvSpPr>
-          <p:cNvPr id="15" name="Shape 13"/>
-          <p:cNvSpPr/>
-          <p:nvPr/>
-        </p:nvSpPr>
-        <p:spPr>
-          <a:xfrm>
-            <a:off x="6505625" y="2681514"/>
-            <a:ext cx="1213524" cy="224971"/>
+          <p:cNvPr id="26" name="Shape 24"/>
+          <p:cNvSpPr/>
+          <p:nvPr/>
+        </p:nvSpPr>
+        <p:spPr>
+          <a:xfrm>
+            <a:off x="6190161" y="3403244"/>
+            <a:ext cx="920675" cy="242519"/>
           </a:xfrm>
           <a:prstGeom prst="roundRect">
             <a:avLst>
-              <a:gd name="adj" fmla="val 32516"/>
+              <a:gd name="adj" fmla="val 30163"/>
             </a:avLst>
           </a:prstGeom>
           <a:solidFill>
@@ -10423,14 +11054,14 @@
       </p:sp>
       <p:sp>
         <p:nvSpPr>
-          <p:cNvPr id="16" name="Text 14"/>
-          <p:cNvSpPr/>
-          <p:nvPr/>
-        </p:nvSpPr>
-        <p:spPr>
-          <a:xfrm>
-            <a:off x="6560489" y="2736378"/>
-            <a:ext cx="1103796" cy="115243"/>
+          <p:cNvPr id="27" name="Text 25"/>
+          <p:cNvSpPr/>
+          <p:nvPr/>
+        </p:nvSpPr>
+        <p:spPr>
+          <a:xfrm>
+            <a:off x="6245025" y="3458108"/>
+            <a:ext cx="810947" cy="132791"/>
           </a:xfrm>
           <a:prstGeom prst="rect">
             <a:avLst/>
@@ -10462,18 +11093,18 @@
       </p:sp>
       <p:sp>
         <p:nvSpPr>
-          <p:cNvPr id="17" name="Shape 15"/>
-          <p:cNvSpPr/>
-          <p:nvPr/>
-        </p:nvSpPr>
-        <p:spPr>
-          <a:xfrm>
-            <a:off x="8538703" y="2681514"/>
-            <a:ext cx="1213524" cy="224971"/>
+          <p:cNvPr id="28" name="Shape 26"/>
+          <p:cNvSpPr/>
+          <p:nvPr/>
+        </p:nvSpPr>
+        <p:spPr>
+          <a:xfrm>
+            <a:off x="7299461" y="3403244"/>
+            <a:ext cx="920675" cy="242519"/>
           </a:xfrm>
           <a:prstGeom prst="roundRect">
             <a:avLst>
-              <a:gd name="adj" fmla="val 32516"/>
+              <a:gd name="adj" fmla="val 30163"/>
             </a:avLst>
           </a:prstGeom>
           <a:solidFill>
@@ -10489,14 +11120,14 @@
       </p:sp>
       <p:sp>
         <p:nvSpPr>
-          <p:cNvPr id="18" name="Text 16"/>
-          <p:cNvSpPr/>
-          <p:nvPr/>
-        </p:nvSpPr>
-        <p:spPr>
-          <a:xfrm>
-            <a:off x="8593567" y="2736378"/>
-            <a:ext cx="1103796" cy="115243"/>
+          <p:cNvPr id="29" name="Text 27"/>
+          <p:cNvSpPr/>
+          <p:nvPr/>
+        </p:nvSpPr>
+        <p:spPr>
+          <a:xfrm>
+            <a:off x="7354325" y="3458108"/>
+            <a:ext cx="810947" cy="132791"/>
           </a:xfrm>
           <a:prstGeom prst="rect">
             <a:avLst/>
@@ -10520,7 +11151,7 @@
                 <a:ea typeface="Trebuchet MS" pitchFamily="34" charset="-122"/>
                 <a:cs typeface="Trebuchet MS" pitchFamily="34" charset="-120"/>
               </a:rPr>
-              <a:t>Layout Engine</a:t>
+              <a:t>Layout Engi…</a:t>
             </a:r>
             <a:endParaRPr lang="en-US" sz="1100" dirty="0"/>
           </a:p>
@@ -10528,18 +11159,18 @@
       </p:sp>
       <p:sp>
         <p:nvSpPr>
-          <p:cNvPr id="19" name="Shape 17"/>
-          <p:cNvSpPr/>
-          <p:nvPr/>
-        </p:nvSpPr>
-        <p:spPr>
-          <a:xfrm>
-            <a:off x="10571781" y="2681514"/>
-            <a:ext cx="1213524" cy="224971"/>
+          <p:cNvPr id="30" name="Shape 28"/>
+          <p:cNvSpPr/>
+          <p:nvPr/>
+        </p:nvSpPr>
+        <p:spPr>
+          <a:xfrm>
+            <a:off x="8408762" y="3403244"/>
+            <a:ext cx="920675" cy="242519"/>
           </a:xfrm>
           <a:prstGeom prst="roundRect">
             <a:avLst>
-              <a:gd name="adj" fmla="val 32516"/>
+              <a:gd name="adj" fmla="val 30163"/>
             </a:avLst>
           </a:prstGeom>
           <a:solidFill>
@@ -10555,14 +11186,14 @@
       </p:sp>
       <p:sp>
         <p:nvSpPr>
-          <p:cNvPr id="20" name="Text 18"/>
-          <p:cNvSpPr/>
-          <p:nvPr/>
-        </p:nvSpPr>
-        <p:spPr>
-          <a:xfrm>
-            <a:off x="10626645" y="2736378"/>
-            <a:ext cx="1103796" cy="115243"/>
+          <p:cNvPr id="31" name="Text 29"/>
+          <p:cNvSpPr/>
+          <p:nvPr/>
+        </p:nvSpPr>
+        <p:spPr>
+          <a:xfrm>
+            <a:off x="8463626" y="3458108"/>
+            <a:ext cx="810947" cy="132791"/>
           </a:xfrm>
           <a:prstGeom prst="rect">
             <a:avLst/>
@@ -10586,7 +11217,7 @@
                 <a:ea typeface="Trebuchet MS" pitchFamily="34" charset="-122"/>
                 <a:cs typeface="Trebuchet MS" pitchFamily="34" charset="-120"/>
               </a:rPr>
-              <a:t>Renderer Multipli</a:t>
+              <a:t>Renderer Mu…</a:t>
             </a:r>
             <a:endParaRPr lang="en-US" sz="1100" dirty="0"/>
           </a:p>
@@ -10594,18 +11225,18 @@
       </p:sp>
       <p:sp>
         <p:nvSpPr>
-          <p:cNvPr id="21" name="Shape 19"/>
-          <p:cNvSpPr/>
-          <p:nvPr/>
-        </p:nvSpPr>
-        <p:spPr>
-          <a:xfrm>
-            <a:off x="406390" y="2079171"/>
-            <a:ext cx="1213524" cy="224971"/>
+          <p:cNvPr id="32" name="Shape 30"/>
+          <p:cNvSpPr/>
+          <p:nvPr/>
+        </p:nvSpPr>
+        <p:spPr>
+          <a:xfrm>
+            <a:off x="2862258" y="2675687"/>
+            <a:ext cx="920675" cy="242519"/>
           </a:xfrm>
           <a:prstGeom prst="roundRect">
             <a:avLst>
-              <a:gd name="adj" fmla="val 32516"/>
+              <a:gd name="adj" fmla="val 30163"/>
             </a:avLst>
           </a:prstGeom>
           <a:solidFill>
@@ -10621,14 +11252,14 @@
       </p:sp>
       <p:sp>
         <p:nvSpPr>
-          <p:cNvPr id="22" name="Text 20"/>
-          <p:cNvSpPr/>
-          <p:nvPr/>
-        </p:nvSpPr>
-        <p:spPr>
-          <a:xfrm>
-            <a:off x="461254" y="2134035"/>
-            <a:ext cx="1103796" cy="115243"/>
+          <p:cNvPr id="33" name="Text 31"/>
+          <p:cNvSpPr/>
+          <p:nvPr/>
+        </p:nvSpPr>
+        <p:spPr>
+          <a:xfrm>
+            <a:off x="2917122" y="2730551"/>
+            <a:ext cx="810947" cy="132791"/>
           </a:xfrm>
           <a:prstGeom prst="rect">
             <a:avLst/>
@@ -10660,18 +11291,18 @@
       </p:sp>
       <p:sp>
         <p:nvSpPr>
-          <p:cNvPr id="23" name="Shape 21"/>
-          <p:cNvSpPr/>
-          <p:nvPr/>
-        </p:nvSpPr>
-        <p:spPr>
-          <a:xfrm>
-            <a:off x="406390" y="2380343"/>
-            <a:ext cx="1213524" cy="224971"/>
+          <p:cNvPr id="34" name="Shape 32"/>
+          <p:cNvSpPr/>
+          <p:nvPr/>
+        </p:nvSpPr>
+        <p:spPr>
+          <a:xfrm>
+            <a:off x="2862258" y="3039466"/>
+            <a:ext cx="920675" cy="242519"/>
           </a:xfrm>
           <a:prstGeom prst="roundRect">
             <a:avLst>
-              <a:gd name="adj" fmla="val 32516"/>
+              <a:gd name="adj" fmla="val 30163"/>
             </a:avLst>
           </a:prstGeom>
           <a:solidFill>
@@ -10687,14 +11318,14 @@
       </p:sp>
       <p:sp>
         <p:nvSpPr>
-          <p:cNvPr id="24" name="Text 22"/>
-          <p:cNvSpPr/>
-          <p:nvPr/>
-        </p:nvSpPr>
-        <p:spPr>
-          <a:xfrm>
-            <a:off x="461254" y="2435207"/>
-            <a:ext cx="1103796" cy="115243"/>
+          <p:cNvPr id="35" name="Text 33"/>
+          <p:cNvSpPr/>
+          <p:nvPr/>
+        </p:nvSpPr>
+        <p:spPr>
+          <a:xfrm>
+            <a:off x="2917122" y="3094330"/>
+            <a:ext cx="810947" cy="132791"/>
           </a:xfrm>
           <a:prstGeom prst="rect">
             <a:avLst/>
@@ -10726,18 +11357,18 @@
       </p:sp>
       <p:sp>
         <p:nvSpPr>
-          <p:cNvPr id="25" name="Shape 23"/>
-          <p:cNvSpPr/>
-          <p:nvPr/>
-        </p:nvSpPr>
-        <p:spPr>
-          <a:xfrm>
-            <a:off x="406390" y="2681514"/>
-            <a:ext cx="1213524" cy="224971"/>
+          <p:cNvPr id="36" name="Shape 34"/>
+          <p:cNvSpPr/>
+          <p:nvPr/>
+        </p:nvSpPr>
+        <p:spPr>
+          <a:xfrm>
+            <a:off x="2862258" y="3403244"/>
+            <a:ext cx="920675" cy="242519"/>
           </a:xfrm>
           <a:prstGeom prst="roundRect">
             <a:avLst>
-              <a:gd name="adj" fmla="val 32516"/>
+              <a:gd name="adj" fmla="val 30163"/>
             </a:avLst>
           </a:prstGeom>
           <a:solidFill>
@@ -10753,14 +11384,14 @@
       </p:sp>
       <p:sp>
         <p:nvSpPr>
-          <p:cNvPr id="26" name="Text 24"/>
-          <p:cNvSpPr/>
-          <p:nvPr/>
-        </p:nvSpPr>
-        <p:spPr>
-          <a:xfrm>
-            <a:off x="461254" y="2736378"/>
-            <a:ext cx="1103796" cy="115243"/>
+          <p:cNvPr id="37" name="Text 35"/>
+          <p:cNvSpPr/>
+          <p:nvPr/>
+        </p:nvSpPr>
+        <p:spPr>
+          <a:xfrm>
+            <a:off x="2917122" y="3458108"/>
+            <a:ext cx="810947" cy="132791"/>
           </a:xfrm>
           <a:prstGeom prst="rect">
             <a:avLst/>
@@ -10792,18 +11423,18 @@
       </p:sp>
       <p:sp>
         <p:nvSpPr>
-          <p:cNvPr id="27" name="Shape 25"/>
-          <p:cNvSpPr/>
-          <p:nvPr/>
-        </p:nvSpPr>
-        <p:spPr>
-          <a:xfrm>
-            <a:off x="406390" y="2982686"/>
-            <a:ext cx="1213524" cy="224971"/>
+          <p:cNvPr id="38" name="Shape 36"/>
+          <p:cNvSpPr/>
+          <p:nvPr/>
+        </p:nvSpPr>
+        <p:spPr>
+          <a:xfrm>
+            <a:off x="2862258" y="3767023"/>
+            <a:ext cx="920675" cy="242519"/>
           </a:xfrm>
           <a:prstGeom prst="roundRect">
             <a:avLst>
-              <a:gd name="adj" fmla="val 32516"/>
+              <a:gd name="adj" fmla="val 30163"/>
             </a:avLst>
           </a:prstGeom>
           <a:solidFill>
@@ -10819,14 +11450,14 @@
       </p:sp>
       <p:sp>
         <p:nvSpPr>
-          <p:cNvPr id="28" name="Text 26"/>
-          <p:cNvSpPr/>
-          <p:nvPr/>
-        </p:nvSpPr>
-        <p:spPr>
-          <a:xfrm>
-            <a:off x="461254" y="3037550"/>
-            <a:ext cx="1103796" cy="115243"/>
+          <p:cNvPr id="39" name="Text 37"/>
+          <p:cNvSpPr/>
+          <p:nvPr/>
+        </p:nvSpPr>
+        <p:spPr>
+          <a:xfrm>
+            <a:off x="2917122" y="3821887"/>
+            <a:ext cx="810947" cy="132791"/>
           </a:xfrm>
           <a:prstGeom prst="rect">
             <a:avLst/>
@@ -10858,18 +11489,18 @@
       </p:sp>
       <p:sp>
         <p:nvSpPr>
-          <p:cNvPr id="29" name="Shape 27"/>
-          <p:cNvSpPr/>
-          <p:nvPr/>
-        </p:nvSpPr>
-        <p:spPr>
-          <a:xfrm>
-            <a:off x="406390" y="3283857"/>
-            <a:ext cx="1213524" cy="224971"/>
+          <p:cNvPr id="40" name="Shape 38"/>
+          <p:cNvSpPr/>
+          <p:nvPr/>
+        </p:nvSpPr>
+        <p:spPr>
+          <a:xfrm>
+            <a:off x="2862258" y="4130802"/>
+            <a:ext cx="920675" cy="242519"/>
           </a:xfrm>
           <a:prstGeom prst="roundRect">
             <a:avLst>
-              <a:gd name="adj" fmla="val 32516"/>
+              <a:gd name="adj" fmla="val 30163"/>
             </a:avLst>
           </a:prstGeom>
           <a:solidFill>
@@ -10885,14 +11516,14 @@
       </p:sp>
       <p:sp>
         <p:nvSpPr>
-          <p:cNvPr id="30" name="Text 28"/>
-          <p:cNvSpPr/>
-          <p:nvPr/>
-        </p:nvSpPr>
-        <p:spPr>
-          <a:xfrm>
-            <a:off x="461254" y="3338721"/>
-            <a:ext cx="1103796" cy="115243"/>
+          <p:cNvPr id="41" name="Text 39"/>
+          <p:cNvSpPr/>
+          <p:nvPr/>
+        </p:nvSpPr>
+        <p:spPr>
+          <a:xfrm>
+            <a:off x="2917122" y="4185666"/>
+            <a:ext cx="810947" cy="132791"/>
           </a:xfrm>
           <a:prstGeom prst="rect">
             <a:avLst/>
@@ -10924,18 +11555,18 @@
       </p:sp>
       <p:sp>
         <p:nvSpPr>
-          <p:cNvPr id="31" name="Shape 29"/>
-          <p:cNvSpPr/>
-          <p:nvPr/>
-        </p:nvSpPr>
-        <p:spPr>
-          <a:xfrm>
-            <a:off x="406390" y="3585029"/>
-            <a:ext cx="1213524" cy="224971"/>
+          <p:cNvPr id="42" name="Shape 40"/>
+          <p:cNvSpPr/>
+          <p:nvPr/>
+        </p:nvSpPr>
+        <p:spPr>
+          <a:xfrm>
+            <a:off x="2862258" y="4494581"/>
+            <a:ext cx="920675" cy="242519"/>
           </a:xfrm>
           <a:prstGeom prst="roundRect">
             <a:avLst>
-              <a:gd name="adj" fmla="val 32516"/>
+              <a:gd name="adj" fmla="val 30163"/>
             </a:avLst>
           </a:prstGeom>
           <a:solidFill>
@@ -10951,14 +11582,14 @@
       </p:sp>
       <p:sp>
         <p:nvSpPr>
-          <p:cNvPr id="32" name="Text 30"/>
-          <p:cNvSpPr/>
-          <p:nvPr/>
-        </p:nvSpPr>
-        <p:spPr>
-          <a:xfrm>
-            <a:off x="461254" y="3639893"/>
-            <a:ext cx="1103796" cy="115243"/>
+          <p:cNvPr id="43" name="Text 41"/>
+          <p:cNvSpPr/>
+          <p:nvPr/>
+        </p:nvSpPr>
+        <p:spPr>
+          <a:xfrm>
+            <a:off x="2917122" y="4549445"/>
+            <a:ext cx="810947" cy="132791"/>
           </a:xfrm>
           <a:prstGeom prst="rect">
             <a:avLst/>
@@ -10990,13 +11621,13 @@
       </p:sp>
       <p:sp>
         <p:nvSpPr>
-          <p:cNvPr id="33" name="Shape 31"/>
-          <p:cNvSpPr/>
-          <p:nvPr/>
-        </p:nvSpPr>
-        <p:spPr>
-          <a:xfrm>
-            <a:off x="406390" y="3987800"/>
+          <p:cNvPr id="44" name="Shape 42"/>
+          <p:cNvSpPr/>
+          <p:nvPr/>
+        </p:nvSpPr>
+        <p:spPr>
+          <a:xfrm>
+            <a:off x="406390" y="4914900"/>
             <a:ext cx="11378916" cy="831850"/>
           </a:xfrm>
           <a:prstGeom prst="roundRect">
@@ -11017,13 +11648,13 @@
       </p:sp>
       <p:sp>
         <p:nvSpPr>
-          <p:cNvPr id="34" name="Text 32"/>
-          <p:cNvSpPr/>
-          <p:nvPr/>
-        </p:nvSpPr>
-        <p:spPr>
-          <a:xfrm>
-            <a:off x="543550" y="4060952"/>
+          <p:cNvPr id="45" name="Text 43"/>
+          <p:cNvSpPr/>
+          <p:nvPr/>
+        </p:nvSpPr>
+        <p:spPr>
+          <a:xfrm>
+            <a:off x="543550" y="4988052"/>
             <a:ext cx="11104596" cy="274320"/>
           </a:xfrm>
           <a:prstGeom prst="rect">
@@ -11056,13 +11687,13 @@
       </p:sp>
       <p:sp>
         <p:nvSpPr>
-          <p:cNvPr id="35" name="Text 33"/>
-          <p:cNvSpPr/>
-          <p:nvPr/>
-        </p:nvSpPr>
-        <p:spPr>
-          <a:xfrm>
-            <a:off x="543550" y="4380992"/>
+          <p:cNvPr id="46" name="Text 44"/>
+          <p:cNvSpPr/>
+          <p:nvPr/>
+        </p:nvSpPr>
+        <p:spPr>
+          <a:xfrm>
+            <a:off x="543550" y="5308092"/>
             <a:ext cx="11104596" cy="365506"/>
           </a:xfrm>
           <a:prstGeom prst="rect">
@@ -11095,7 +11726,7 @@
       </p:sp>
       <p:sp>
         <p:nvSpPr>
-          <p:cNvPr id="36" name="Text 34"/>
+          <p:cNvPr id="47" name="Text 45"/>
           <p:cNvSpPr/>
           <p:nvPr/>
         </p:nvSpPr>
@@ -11173,23 +11804,23 @@
         <p:spPr>
           <a:xfrm>
             <a:off x="406390" y="406400"/>
-            <a:ext cx="11378916" cy="571500"/>
-          </a:xfrm>
-          <a:prstGeom prst="rect">
-            <a:avLst/>
-          </a:prstGeom>
-          <a:noFill/>
-          <a:ln/>
-        </p:spPr>
-        <p:txBody>
-          <a:bodyPr wrap="square" lIns="0" tIns="0" rIns="0" bIns="0" rtlCol="0" anchor="ctr"/>
+            <a:ext cx="11378916" cy="698500"/>
+          </a:xfrm>
+          <a:prstGeom prst="rect">
+            <a:avLst/>
+          </a:prstGeom>
+          <a:noFill/>
+          <a:ln/>
+        </p:spPr>
+        <p:txBody>
+          <a:bodyPr wrap="square" lIns="0" tIns="0" rIns="0" bIns="0" rtlCol="0" anchor="t"/>
           <a:lstStyle/>
           <a:p>
             <a:pPr algn="l" indent="0" marL="0">
               <a:buNone/>
             </a:pPr>
             <a:r>
-              <a:rPr lang="en-US" sz="4600" b="1" dirty="0">
+              <a:rPr lang="en-US" sz="3300" b="1" dirty="0">
                 <a:solidFill>
                   <a:srgbClr val="FF2E88"/>
                 </a:solidFill>
@@ -11199,7 +11830,7 @@
               </a:rPr>
               <a:t>L'AST e il Design Intent</a:t>
             </a:r>
-            <a:endParaRPr lang="en-US" sz="4600" dirty="0"/>
+            <a:endParaRPr lang="en-US" sz="3300" dirty="0"/>
           </a:p>
         </p:txBody>
       </p:sp>
@@ -11211,24 +11842,24 @@
         </p:nvSpPr>
         <p:spPr>
           <a:xfrm>
-            <a:off x="406390" y="1155700"/>
-            <a:ext cx="11378916" cy="444500"/>
-          </a:xfrm>
-          <a:prstGeom prst="rect">
-            <a:avLst/>
-          </a:prstGeom>
-          <a:noFill/>
-          <a:ln/>
-        </p:spPr>
-        <p:txBody>
-          <a:bodyPr wrap="square" lIns="0" tIns="0" rIns="0" bIns="0" rtlCol="0" anchor="ctr"/>
+            <a:off x="406390" y="1282700"/>
+            <a:ext cx="11378916" cy="558800"/>
+          </a:xfrm>
+          <a:prstGeom prst="rect">
+            <a:avLst/>
+          </a:prstGeom>
+          <a:noFill/>
+          <a:ln/>
+        </p:spPr>
+        <p:txBody>
+          <a:bodyPr wrap="square" lIns="0" tIns="0" rIns="0" bIns="0" rtlCol="0" anchor="t"/>
           <a:lstStyle/>
           <a:p>
             <a:pPr algn="l" indent="0" marL="0">
               <a:buNone/>
             </a:pPr>
             <a:r>
-              <a:rPr lang="en-US" sz="3800" b="1" dirty="0">
+              <a:rPr lang="en-US" sz="2700" b="1" dirty="0">
                 <a:solidFill>
                   <a:srgbClr val="FFFFFF"/>
                 </a:solidFill>
@@ -11238,7 +11869,7 @@
               </a:rPr>
               <a:t>Rappresentazione intermedia del significato e della struttura</a:t>
             </a:r>
-            <a:endParaRPr lang="en-US" sz="3800" dirty="0"/>
+            <a:endParaRPr lang="en-US" sz="2700" dirty="0"/>
           </a:p>
         </p:txBody>
       </p:sp>
@@ -11250,12 +11881,12 @@
         </p:nvSpPr>
         <p:spPr>
           <a:xfrm>
-            <a:off x="406390" y="1778000"/>
-            <a:ext cx="5600560" cy="3403600"/>
+            <a:off x="406390" y="2019300"/>
+            <a:ext cx="5600560" cy="4051300"/>
           </a:xfrm>
           <a:prstGeom prst="roundRect">
             <a:avLst>
-              <a:gd name="adj" fmla="val 2149"/>
+              <a:gd name="adj" fmla="val 1806"/>
             </a:avLst>
           </a:prstGeom>
           <a:solidFill>
@@ -11277,8 +11908,8 @@
         </p:nvSpPr>
         <p:spPr>
           <a:xfrm>
-            <a:off x="424678" y="1814576"/>
-            <a:ext cx="54864" cy="3330448"/>
+            <a:off x="424678" y="2055876"/>
+            <a:ext cx="54864" cy="3978148"/>
           </a:xfrm>
           <a:prstGeom prst="roundRect">
             <a:avLst>
@@ -11299,8 +11930,8 @@
         </p:nvSpPr>
         <p:spPr>
           <a:xfrm>
-            <a:off x="634990" y="1942592"/>
-            <a:ext cx="5143360" cy="320040"/>
+            <a:off x="634990" y="2129028"/>
+            <a:ext cx="5143360" cy="274320"/>
           </a:xfrm>
           <a:prstGeom prst="rect">
             <a:avLst/>
@@ -11316,7 +11947,7 @@
               <a:buNone/>
             </a:pPr>
             <a:r>
-              <a:rPr lang="en-US" sz="2000" b="1" dirty="0">
+              <a:rPr lang="en-US" sz="1600" b="1" dirty="0">
                 <a:solidFill>
                   <a:srgbClr val="7B61FF"/>
                 </a:solidFill>
@@ -11326,7 +11957,7 @@
               </a:rPr>
               <a:t>AST: Abstract Syntax Tree</a:t>
             </a:r>
-            <a:endParaRPr lang="en-US" sz="2000" dirty="0"/>
+            <a:endParaRPr lang="en-US" sz="1600" dirty="0"/>
           </a:p>
         </p:txBody>
       </p:sp>
@@ -11338,8 +11969,8 @@
         </p:nvSpPr>
         <p:spPr>
           <a:xfrm>
-            <a:off x="609585" y="2362200"/>
-            <a:ext cx="5194170" cy="685800"/>
+            <a:off x="634984" y="2705100"/>
+            <a:ext cx="5143371" cy="977900"/>
           </a:xfrm>
           <a:prstGeom prst="rect">
             <a:avLst/>
@@ -11355,7 +11986,7 @@
               <a:buNone/>
             </a:pPr>
             <a:r>
-              <a:rPr lang="en-US" sz="1800" dirty="0">
+              <a:rPr lang="en-US" sz="1300" dirty="0">
                 <a:solidFill>
                   <a:srgbClr val="FFFFFF"/>
                 </a:solidFill>
@@ -11365,7 +11996,7 @@
               </a:rPr>
               <a:t>Struttura dati intermedia ad albero che incapsula il contenuto, la gerarchia logica e i vincoli semantici di presentazione.</a:t>
             </a:r>
-            <a:endParaRPr lang="en-US" sz="1800" dirty="0"/>
+            <a:endParaRPr lang="en-US" sz="1300" dirty="0"/>
           </a:p>
         </p:txBody>
       </p:sp>
@@ -11377,12 +12008,12 @@
         </p:nvSpPr>
         <p:spPr>
           <a:xfrm>
-            <a:off x="2530014" y="3225800"/>
-            <a:ext cx="1353312" cy="285750"/>
+            <a:off x="2530014" y="3860800"/>
+            <a:ext cx="1353312" cy="330200"/>
           </a:xfrm>
           <a:prstGeom prst="roundRect">
             <a:avLst>
-              <a:gd name="adj" fmla="val 48000"/>
+              <a:gd name="adj" fmla="val 41538"/>
             </a:avLst>
           </a:prstGeom>
           <a:solidFill>
@@ -11404,8 +12035,8 @@
         </p:nvSpPr>
         <p:spPr>
           <a:xfrm>
-            <a:off x="2530014" y="3225800"/>
-            <a:ext cx="1353312" cy="285750"/>
+            <a:off x="2530014" y="3860800"/>
+            <a:ext cx="1353312" cy="330200"/>
           </a:xfrm>
           <a:prstGeom prst="rect">
             <a:avLst/>
@@ -11443,12 +12074,12 @@
         </p:nvSpPr>
         <p:spPr>
           <a:xfrm>
-            <a:off x="2580306" y="3689350"/>
-            <a:ext cx="1252728" cy="285750"/>
+            <a:off x="2580306" y="4368800"/>
+            <a:ext cx="1252728" cy="330200"/>
           </a:xfrm>
           <a:prstGeom prst="roundRect">
             <a:avLst>
-              <a:gd name="adj" fmla="val 48000"/>
+              <a:gd name="adj" fmla="val 41538"/>
             </a:avLst>
           </a:prstGeom>
           <a:solidFill>
@@ -11470,8 +12101,8 @@
         </p:nvSpPr>
         <p:spPr>
           <a:xfrm>
-            <a:off x="2580306" y="3689350"/>
-            <a:ext cx="1252728" cy="285750"/>
+            <a:off x="2580306" y="4368800"/>
+            <a:ext cx="1252728" cy="330200"/>
           </a:xfrm>
           <a:prstGeom prst="rect">
             <a:avLst/>
@@ -11509,12 +12140,12 @@
         </p:nvSpPr>
         <p:spPr>
           <a:xfrm>
-            <a:off x="2479722" y="4152900"/>
-            <a:ext cx="1453896" cy="285750"/>
+            <a:off x="2479722" y="4876800"/>
+            <a:ext cx="1453896" cy="330200"/>
           </a:xfrm>
           <a:prstGeom prst="roundRect">
             <a:avLst>
-              <a:gd name="adj" fmla="val 48000"/>
+              <a:gd name="adj" fmla="val 41538"/>
             </a:avLst>
           </a:prstGeom>
           <a:solidFill>
@@ -11536,8 +12167,8 @@
         </p:nvSpPr>
         <p:spPr>
           <a:xfrm>
-            <a:off x="2479722" y="4152900"/>
-            <a:ext cx="1453896" cy="285750"/>
+            <a:off x="2479722" y="4876800"/>
+            <a:ext cx="1453896" cy="330200"/>
           </a:xfrm>
           <a:prstGeom prst="rect">
             <a:avLst/>
@@ -11575,12 +12206,12 @@
         </p:nvSpPr>
         <p:spPr>
           <a:xfrm>
-            <a:off x="2658030" y="4616450"/>
-            <a:ext cx="1097280" cy="285750"/>
+            <a:off x="2658030" y="5384800"/>
+            <a:ext cx="1097280" cy="330200"/>
           </a:xfrm>
           <a:prstGeom prst="roundRect">
             <a:avLst>
-              <a:gd name="adj" fmla="val 48000"/>
+              <a:gd name="adj" fmla="val 41538"/>
             </a:avLst>
           </a:prstGeom>
           <a:solidFill>
@@ -11602,8 +12233,8 @@
         </p:nvSpPr>
         <p:spPr>
           <a:xfrm>
-            <a:off x="2658030" y="4616450"/>
-            <a:ext cx="1097280" cy="285750"/>
+            <a:off x="2658030" y="5384800"/>
+            <a:ext cx="1097280" cy="330200"/>
           </a:xfrm>
           <a:prstGeom prst="rect">
             <a:avLst/>
@@ -11641,12 +12272,12 @@
         </p:nvSpPr>
         <p:spPr>
           <a:xfrm>
-            <a:off x="6184745" y="1778000"/>
-            <a:ext cx="5600560" cy="2413000"/>
+            <a:off x="6184745" y="2019300"/>
+            <a:ext cx="5600560" cy="3962400"/>
           </a:xfrm>
           <a:prstGeom prst="roundRect">
             <a:avLst>
-              <a:gd name="adj" fmla="val 3032"/>
+              <a:gd name="adj" fmla="val 1846"/>
             </a:avLst>
           </a:prstGeom>
           <a:solidFill>
@@ -11668,8 +12299,8 @@
         </p:nvSpPr>
         <p:spPr>
           <a:xfrm>
-            <a:off x="6203033" y="1814576"/>
-            <a:ext cx="54864" cy="2339848"/>
+            <a:off x="6203033" y="2055876"/>
+            <a:ext cx="54864" cy="3889248"/>
           </a:xfrm>
           <a:prstGeom prst="roundRect">
             <a:avLst>
@@ -11690,8 +12321,8 @@
         </p:nvSpPr>
         <p:spPr>
           <a:xfrm>
-            <a:off x="6413345" y="1942592"/>
-            <a:ext cx="5143360" cy="320040"/>
+            <a:off x="6413345" y="2129028"/>
+            <a:ext cx="5143360" cy="274320"/>
           </a:xfrm>
           <a:prstGeom prst="rect">
             <a:avLst/>
@@ -11707,7 +12338,7 @@
               <a:buNone/>
             </a:pPr>
             <a:r>
-              <a:rPr lang="en-US" sz="2000" b="1" dirty="0">
+              <a:rPr lang="en-US" sz="1600" b="1" dirty="0">
                 <a:solidFill>
                   <a:srgbClr val="FF2E88"/>
                 </a:solidFill>
@@ -11717,7 +12348,7 @@
               </a:rPr>
               <a:t>Componenti Semantici Astratti</a:t>
             </a:r>
-            <a:endParaRPr lang="en-US" sz="2000" dirty="0"/>
+            <a:endParaRPr lang="en-US" sz="1600" dirty="0"/>
           </a:p>
         </p:txBody>
       </p:sp>
@@ -11729,8 +12360,8 @@
         </p:nvSpPr>
         <p:spPr>
           <a:xfrm>
-            <a:off x="6387940" y="2362200"/>
-            <a:ext cx="5194170" cy="254000"/>
+            <a:off x="6413340" y="2705100"/>
+            <a:ext cx="5143371" cy="673100"/>
           </a:xfrm>
           <a:prstGeom prst="rect">
             <a:avLst/>
@@ -11746,7 +12377,7 @@
               <a:buNone/>
             </a:pPr>
             <a:r>
-              <a:rPr lang="en-US" sz="1800" dirty="0">
+              <a:rPr lang="en-US" sz="1300" dirty="0">
                 <a:solidFill>
                   <a:srgbClr val="FFFFFF"/>
                 </a:solidFill>
@@ -11756,7 +12387,7 @@
               </a:rPr>
               <a:t>• Struttura: Hero, Heading, Paragraph, Columns, Grid</a:t>
             </a:r>
-            <a:endParaRPr lang="en-US" sz="1800" dirty="0"/>
+            <a:endParaRPr lang="en-US" sz="1300" dirty="0"/>
           </a:p>
         </p:txBody>
       </p:sp>
@@ -11768,8 +12399,8 @@
         </p:nvSpPr>
         <p:spPr>
           <a:xfrm>
-            <a:off x="6387940" y="2794000"/>
-            <a:ext cx="5194170" cy="254000"/>
+            <a:off x="6413340" y="3556000"/>
+            <a:ext cx="5143371" cy="673100"/>
           </a:xfrm>
           <a:prstGeom prst="rect">
             <a:avLst/>
@@ -11785,7 +12416,7 @@
               <a:buNone/>
             </a:pPr>
             <a:r>
-              <a:rPr lang="en-US" sz="1800" dirty="0">
+              <a:rPr lang="en-US" sz="1300" dirty="0">
                 <a:solidFill>
                   <a:srgbClr val="FFFFFF"/>
                 </a:solidFill>
@@ -11795,7 +12426,7 @@
               </a:rPr>
               <a:t>• Dati &amp; Logica: Metric, Card, Compare, Timeline</a:t>
             </a:r>
-            <a:endParaRPr lang="en-US" sz="1800" dirty="0"/>
+            <a:endParaRPr lang="en-US" sz="1300" dirty="0"/>
           </a:p>
         </p:txBody>
       </p:sp>
@@ -11807,8 +12438,8 @@
         </p:nvSpPr>
         <p:spPr>
           <a:xfrm>
-            <a:off x="6387940" y="3225800"/>
-            <a:ext cx="5194170" cy="254000"/>
+            <a:off x="6413340" y="4406900"/>
+            <a:ext cx="5143371" cy="673100"/>
           </a:xfrm>
           <a:prstGeom prst="rect">
             <a:avLst/>
@@ -11824,7 +12455,7 @@
               <a:buNone/>
             </a:pPr>
             <a:r>
-              <a:rPr lang="en-US" sz="1800" dirty="0">
+              <a:rPr lang="en-US" sz="1300" dirty="0">
                 <a:solidFill>
                   <a:srgbClr val="FFFFFF"/>
                 </a:solidFill>
@@ -11834,7 +12465,7 @@
               </a:rPr>
               <a:t>• Visuali: Diagram, Sequence, Class, Chart, Table</a:t>
             </a:r>
-            <a:endParaRPr lang="en-US" sz="1800" dirty="0"/>
+            <a:endParaRPr lang="en-US" sz="1300" dirty="0"/>
           </a:p>
         </p:txBody>
       </p:sp>
@@ -11846,8 +12477,8 @@
         </p:nvSpPr>
         <p:spPr>
           <a:xfrm>
-            <a:off x="6387940" y="3657600"/>
-            <a:ext cx="5194170" cy="254000"/>
+            <a:off x="6413340" y="5257800"/>
+            <a:ext cx="5143371" cy="368300"/>
           </a:xfrm>
           <a:prstGeom prst="rect">
             <a:avLst/>
@@ -11863,7 +12494,7 @@
               <a:buNone/>
             </a:pPr>
             <a:r>
-              <a:rPr lang="en-US" sz="1800" dirty="0">
+              <a:rPr lang="en-US" sz="1300" dirty="0">
                 <a:solidFill>
                   <a:srgbClr val="FFFFFF"/>
                 </a:solidFill>
@@ -11873,7 +12504,7 @@
               </a:rPr>
               <a:t>• Annotazioni: Badge, Callout, Math, Notes</a:t>
             </a:r>
-            <a:endParaRPr lang="en-US" sz="1800" dirty="0"/>
+            <a:endParaRPr lang="en-US" sz="1300" dirty="0"/>
           </a:p>
         </p:txBody>
       </p:sp>
@@ -11957,23 +12588,23 @@
         <p:spPr>
           <a:xfrm>
             <a:off x="406390" y="406400"/>
-            <a:ext cx="11378916" cy="571500"/>
-          </a:xfrm>
-          <a:prstGeom prst="rect">
-            <a:avLst/>
-          </a:prstGeom>
-          <a:noFill/>
-          <a:ln/>
-        </p:spPr>
-        <p:txBody>
-          <a:bodyPr wrap="square" lIns="0" tIns="0" rIns="0" bIns="0" rtlCol="0" anchor="ctr"/>
+            <a:ext cx="11378916" cy="698500"/>
+          </a:xfrm>
+          <a:prstGeom prst="rect">
+            <a:avLst/>
+          </a:prstGeom>
+          <a:noFill/>
+          <a:ln/>
+        </p:spPr>
+        <p:txBody>
+          <a:bodyPr wrap="square" lIns="0" tIns="0" rIns="0" bIns="0" rtlCol="0" anchor="t"/>
           <a:lstStyle/>
           <a:p>
             <a:pPr algn="l" indent="0" marL="0">
               <a:buNone/>
             </a:pPr>
             <a:r>
-              <a:rPr lang="en-US" sz="4600" b="1" dirty="0">
+              <a:rPr lang="en-US" sz="3300" b="1" dirty="0">
                 <a:solidFill>
                   <a:srgbClr val="FF2E88"/>
                 </a:solidFill>
@@ -11983,7 +12614,7 @@
               </a:rPr>
               <a:t>Esempio di Codice Native Yumia</a:t>
             </a:r>
-            <a:endParaRPr lang="en-US" sz="4600" dirty="0"/>
+            <a:endParaRPr lang="en-US" sz="3300" dirty="0"/>
           </a:p>
         </p:txBody>
       </p:sp>
@@ -11995,24 +12626,24 @@
         </p:nvSpPr>
         <p:spPr>
           <a:xfrm>
-            <a:off x="406390" y="1155700"/>
-            <a:ext cx="11378916" cy="444500"/>
-          </a:xfrm>
-          <a:prstGeom prst="rect">
-            <a:avLst/>
-          </a:prstGeom>
-          <a:noFill/>
-          <a:ln/>
-        </p:spPr>
-        <p:txBody>
-          <a:bodyPr wrap="square" lIns="0" tIns="0" rIns="0" bIns="0" rtlCol="0" anchor="ctr"/>
+            <a:off x="406390" y="1282700"/>
+            <a:ext cx="11378916" cy="558800"/>
+          </a:xfrm>
+          <a:prstGeom prst="rect">
+            <a:avLst/>
+          </a:prstGeom>
+          <a:noFill/>
+          <a:ln/>
+        </p:spPr>
+        <p:txBody>
+          <a:bodyPr wrap="square" lIns="0" tIns="0" rIns="0" bIns="0" rtlCol="0" anchor="t"/>
           <a:lstStyle/>
           <a:p>
             <a:pPr algn="l" indent="0" marL="0">
               <a:buNone/>
             </a:pPr>
             <a:r>
-              <a:rPr lang="en-US" sz="3800" b="1" dirty="0">
+              <a:rPr lang="en-US" sz="2700" b="1" dirty="0">
                 <a:solidFill>
                   <a:srgbClr val="FFFFFF"/>
                 </a:solidFill>
@@ -12022,7 +12653,7 @@
               </a:rPr>
               <a:t>Sintassi pulita, dichiarativa e basata su indentazione</a:t>
             </a:r>
-            <a:endParaRPr lang="en-US" sz="3800" dirty="0"/>
+            <a:endParaRPr lang="en-US" sz="2700" dirty="0"/>
           </a:p>
         </p:txBody>
       </p:sp>
@@ -12034,7 +12665,7 @@
         </p:nvSpPr>
         <p:spPr>
           <a:xfrm>
-            <a:off x="406390" y="1778000"/>
+            <a:off x="406390" y="2019300"/>
             <a:ext cx="6160616" cy="1905000"/>
           </a:xfrm>
           <a:prstGeom prst="roundRect">
@@ -12061,7 +12692,7 @@
         </p:nvSpPr>
         <p:spPr>
           <a:xfrm>
-            <a:off x="543550" y="1887728"/>
+            <a:off x="543550" y="2129028"/>
             <a:ext cx="91440" cy="91440"/>
           </a:xfrm>
           <a:prstGeom prst="ellipse">
@@ -12086,7 +12717,7 @@
         </p:nvSpPr>
         <p:spPr>
           <a:xfrm>
-            <a:off x="680710" y="1887728"/>
+            <a:off x="680710" y="2129028"/>
             <a:ext cx="91440" cy="91440"/>
           </a:xfrm>
           <a:prstGeom prst="ellipse">
@@ -12111,7 +12742,7 @@
         </p:nvSpPr>
         <p:spPr>
           <a:xfrm>
-            <a:off x="817870" y="1887728"/>
+            <a:off x="817870" y="2129028"/>
             <a:ext cx="91440" cy="91440"/>
           </a:xfrm>
           <a:prstGeom prst="ellipse">
@@ -12136,7 +12767,7 @@
         </p:nvSpPr>
         <p:spPr>
           <a:xfrm>
-            <a:off x="589270" y="2070608"/>
+            <a:off x="589270" y="2311908"/>
             <a:ext cx="5794856" cy="1539240"/>
           </a:xfrm>
           <a:prstGeom prst="rect">
@@ -12311,12 +12942,12 @@
         </p:nvSpPr>
         <p:spPr>
           <a:xfrm>
-            <a:off x="6744801" y="1778000"/>
-            <a:ext cx="5040504" cy="2819400"/>
+            <a:off x="6744801" y="2019300"/>
+            <a:ext cx="5040504" cy="4267200"/>
           </a:xfrm>
           <a:prstGeom prst="roundRect">
             <a:avLst>
-              <a:gd name="adj" fmla="val 2595"/>
+              <a:gd name="adj" fmla="val 1714"/>
             </a:avLst>
           </a:prstGeom>
           <a:solidFill>
@@ -12338,8 +12969,8 @@
         </p:nvSpPr>
         <p:spPr>
           <a:xfrm>
-            <a:off x="6763089" y="1814576"/>
-            <a:ext cx="54864" cy="2746248"/>
+            <a:off x="6763089" y="2055876"/>
+            <a:ext cx="54864" cy="4194048"/>
           </a:xfrm>
           <a:prstGeom prst="roundRect">
             <a:avLst>
@@ -12360,8 +12991,8 @@
         </p:nvSpPr>
         <p:spPr>
           <a:xfrm>
-            <a:off x="6973401" y="1942592"/>
-            <a:ext cx="4583304" cy="320040"/>
+            <a:off x="6973401" y="2129028"/>
+            <a:ext cx="4583304" cy="274320"/>
           </a:xfrm>
           <a:prstGeom prst="rect">
             <a:avLst/>
@@ -12377,7 +13008,7 @@
               <a:buNone/>
             </a:pPr>
             <a:r>
-              <a:rPr lang="en-US" sz="2000" b="1" dirty="0">
+              <a:rPr lang="en-US" sz="1600" b="1" dirty="0">
                 <a:solidFill>
                   <a:srgbClr val="FF2E88"/>
                 </a:solidFill>
@@ -12387,7 +13018,7 @@
               </a:rPr>
               <a:t>Caratteristiche del linguaggio</a:t>
             </a:r>
-            <a:endParaRPr lang="en-US" sz="2000" dirty="0"/>
+            <a:endParaRPr lang="en-US" sz="1600" dirty="0"/>
           </a:p>
         </p:txBody>
       </p:sp>
@@ -12399,8 +13030,8 @@
         </p:nvSpPr>
         <p:spPr>
           <a:xfrm>
-            <a:off x="6947996" y="2362200"/>
-            <a:ext cx="4634114" cy="457200"/>
+            <a:off x="6973396" y="2705100"/>
+            <a:ext cx="4583315" cy="673100"/>
           </a:xfrm>
           <a:prstGeom prst="rect">
             <a:avLst/>
@@ -12416,7 +13047,7 @@
               <a:buNone/>
             </a:pPr>
             <a:r>
-              <a:rPr lang="en-US" sz="1800" dirty="0">
+              <a:rPr lang="en-US" sz="1300" dirty="0">
                 <a:solidFill>
                   <a:srgbClr val="FFFFFF"/>
                 </a:solidFill>
@@ -12426,7 +13057,7 @@
               </a:rPr>
               <a:t>• Struttura gerarchica pulita basata sull'indentazione</a:t>
             </a:r>
-            <a:endParaRPr lang="en-US" sz="1800" dirty="0"/>
+            <a:endParaRPr lang="en-US" sz="1300" dirty="0"/>
           </a:p>
         </p:txBody>
       </p:sp>
@@ -12438,8 +13069,8 @@
         </p:nvSpPr>
         <p:spPr>
           <a:xfrm>
-            <a:off x="6947996" y="2997200"/>
-            <a:ext cx="4634114" cy="254000"/>
+            <a:off x="6973396" y="3556000"/>
+            <a:ext cx="4583315" cy="673100"/>
           </a:xfrm>
           <a:prstGeom prst="rect">
             <a:avLst/>
@@ -12455,7 +13086,7 @@
               <a:buNone/>
             </a:pPr>
             <a:r>
-              <a:rPr lang="en-US" sz="1800" dirty="0">
+              <a:rPr lang="en-US" sz="1300" dirty="0">
                 <a:solidFill>
                   <a:srgbClr val="FFFFFF"/>
                 </a:solidFill>
@@ -12465,7 +13096,7 @@
               </a:rPr>
               <a:t>• Componenti semantici senza CSS a basso livello</a:t>
             </a:r>
-            <a:endParaRPr lang="en-US" sz="1800" dirty="0"/>
+            <a:endParaRPr lang="en-US" sz="1300" dirty="0"/>
           </a:p>
         </p:txBody>
       </p:sp>
@@ -12477,8 +13108,8 @@
         </p:nvSpPr>
         <p:spPr>
           <a:xfrm>
-            <a:off x="6947996" y="3429000"/>
-            <a:ext cx="4634114" cy="254000"/>
+            <a:off x="6973396" y="4406900"/>
+            <a:ext cx="4583315" cy="673100"/>
           </a:xfrm>
           <a:prstGeom prst="rect">
             <a:avLst/>
@@ -12494,7 +13125,7 @@
               <a:buNone/>
             </a:pPr>
             <a:r>
-              <a:rPr lang="en-US" sz="1800" dirty="0">
+              <a:rPr lang="en-US" sz="1300" dirty="0">
                 <a:solidFill>
                   <a:srgbClr val="FFFFFF"/>
                 </a:solidFill>
@@ -12504,7 +13135,7 @@
               </a:rPr>
               <a:t>• Nessun tag HTML di chiusura o sintassi verbosa</a:t>
             </a:r>
-            <a:endParaRPr lang="en-US" sz="1800" dirty="0"/>
+            <a:endParaRPr lang="en-US" sz="1300" dirty="0"/>
           </a:p>
         </p:txBody>
       </p:sp>
@@ -12516,8 +13147,8 @@
         </p:nvSpPr>
         <p:spPr>
           <a:xfrm>
-            <a:off x="6947996" y="3860800"/>
-            <a:ext cx="4634114" cy="457200"/>
+            <a:off x="6973396" y="5257800"/>
+            <a:ext cx="4583315" cy="673100"/>
           </a:xfrm>
           <a:prstGeom prst="rect">
             <a:avLst/>
@@ -12533,7 +13164,7 @@
               <a:buNone/>
             </a:pPr>
             <a:r>
-              <a:rPr lang="en-US" sz="1800" dirty="0">
+              <a:rPr lang="en-US" sz="1300" dirty="0">
                 <a:solidFill>
                   <a:srgbClr val="FFFFFF"/>
                 </a:solidFill>
@@ -12543,7 +13174,7 @@
               </a:rPr>
               <a:t>• Perfettamente leggibile e modificabile in qualsiasi editor</a:t>
             </a:r>
-            <a:endParaRPr lang="en-US" sz="1800" dirty="0"/>
+            <a:endParaRPr lang="en-US" sz="1300" dirty="0"/>
           </a:p>
         </p:txBody>
       </p:sp>
@@ -12627,23 +13258,23 @@
         <p:spPr>
           <a:xfrm>
             <a:off x="406390" y="406400"/>
-            <a:ext cx="11378916" cy="571500"/>
-          </a:xfrm>
-          <a:prstGeom prst="rect">
-            <a:avLst/>
-          </a:prstGeom>
-          <a:noFill/>
-          <a:ln/>
-        </p:spPr>
-        <p:txBody>
-          <a:bodyPr wrap="square" lIns="0" tIns="0" rIns="0" bIns="0" rtlCol="0" anchor="ctr"/>
+            <a:ext cx="11378916" cy="698500"/>
+          </a:xfrm>
+          <a:prstGeom prst="rect">
+            <a:avLst/>
+          </a:prstGeom>
+          <a:noFill/>
+          <a:ln/>
+        </p:spPr>
+        <p:txBody>
+          <a:bodyPr wrap="square" lIns="0" tIns="0" rIns="0" bIns="0" rtlCol="0" anchor="t"/>
           <a:lstStyle/>
           <a:p>
             <a:pPr algn="l" indent="0" marL="0">
               <a:buNone/>
             </a:pPr>
             <a:r>
-              <a:rPr lang="en-US" sz="4600" b="1" dirty="0">
+              <a:rPr lang="en-US" sz="3300" b="1" dirty="0">
                 <a:solidFill>
                   <a:srgbClr val="FF2E88"/>
                 </a:solidFill>
@@ -12653,7 +13284,7 @@
               </a:rPr>
               <a:t>I Tre Output Principali</a:t>
             </a:r>
-            <a:endParaRPr lang="en-US" sz="4600" dirty="0"/>
+            <a:endParaRPr lang="en-US" sz="3300" dirty="0"/>
           </a:p>
         </p:txBody>
       </p:sp>
@@ -12665,24 +13296,24 @@
         </p:nvSpPr>
         <p:spPr>
           <a:xfrm>
-            <a:off x="406390" y="1155700"/>
-            <a:ext cx="11378916" cy="444500"/>
-          </a:xfrm>
-          <a:prstGeom prst="rect">
-            <a:avLst/>
-          </a:prstGeom>
-          <a:noFill/>
-          <a:ln/>
-        </p:spPr>
-        <p:txBody>
-          <a:bodyPr wrap="square" lIns="0" tIns="0" rIns="0" bIns="0" rtlCol="0" anchor="ctr"/>
+            <a:off x="406390" y="1282700"/>
+            <a:ext cx="11378916" cy="558800"/>
+          </a:xfrm>
+          <a:prstGeom prst="rect">
+            <a:avLst/>
+          </a:prstGeom>
+          <a:noFill/>
+          <a:ln/>
+        </p:spPr>
+        <p:txBody>
+          <a:bodyPr wrap="square" lIns="0" tIns="0" rIns="0" bIns="0" rtlCol="0" anchor="t"/>
           <a:lstStyle/>
           <a:p>
             <a:pPr algn="l" indent="0" marL="0">
               <a:buNone/>
             </a:pPr>
             <a:r>
-              <a:rPr lang="en-US" sz="3800" b="1" dirty="0">
+              <a:rPr lang="en-US" sz="2700" b="1" dirty="0">
                 <a:solidFill>
                   <a:srgbClr val="FFFFFF"/>
                 </a:solidFill>
@@ -12692,7 +13323,7 @@
               </a:rPr>
               <a:t>Generazione nativa e specializzata per ogni ecosistema</a:t>
             </a:r>
-            <a:endParaRPr lang="en-US" sz="3800" dirty="0"/>
+            <a:endParaRPr lang="en-US" sz="2700" dirty="0"/>
           </a:p>
         </p:txBody>
       </p:sp>
@@ -12704,12 +13335,12 @@
         </p:nvSpPr>
         <p:spPr>
           <a:xfrm>
-            <a:off x="406390" y="1778000"/>
-            <a:ext cx="3674441" cy="2616200"/>
+            <a:off x="406390" y="2019300"/>
+            <a:ext cx="3674441" cy="4267200"/>
           </a:xfrm>
           <a:prstGeom prst="roundRect">
             <a:avLst>
-              <a:gd name="adj" fmla="val 2796"/>
+              <a:gd name="adj" fmla="val 1991"/>
             </a:avLst>
           </a:prstGeom>
           <a:solidFill>
@@ -12731,8 +13362,8 @@
         </p:nvSpPr>
         <p:spPr>
           <a:xfrm>
-            <a:off x="424678" y="1814576"/>
-            <a:ext cx="54864" cy="2543048"/>
+            <a:off x="424678" y="2055876"/>
+            <a:ext cx="54864" cy="4194048"/>
           </a:xfrm>
           <a:prstGeom prst="roundRect">
             <a:avLst>
@@ -12753,8 +13384,8 @@
         </p:nvSpPr>
         <p:spPr>
           <a:xfrm>
-            <a:off x="634990" y="1942592"/>
-            <a:ext cx="3217241" cy="320040"/>
+            <a:off x="634990" y="2129028"/>
+            <a:ext cx="3217241" cy="274320"/>
           </a:xfrm>
           <a:prstGeom prst="rect">
             <a:avLst/>
@@ -12770,7 +13401,7 @@
               <a:buNone/>
             </a:pPr>
             <a:r>
-              <a:rPr lang="en-US" sz="2000" b="1" dirty="0">
+              <a:rPr lang="en-US" sz="1600" b="1" dirty="0">
                 <a:solidFill>
                   <a:srgbClr val="FF2E88"/>
                 </a:solidFill>
@@ -12780,7 +13411,7 @@
               </a:rPr>
               <a:t>HtmlRenderer</a:t>
             </a:r>
-            <a:endParaRPr lang="en-US" sz="2000" dirty="0"/>
+            <a:endParaRPr lang="en-US" sz="1600" dirty="0"/>
           </a:p>
         </p:txBody>
       </p:sp>
@@ -12792,8 +13423,8 @@
         </p:nvSpPr>
         <p:spPr>
           <a:xfrm>
-            <a:off x="609585" y="2362200"/>
-            <a:ext cx="3268052" cy="254000"/>
+            <a:off x="634984" y="2705100"/>
+            <a:ext cx="3217253" cy="673100"/>
           </a:xfrm>
           <a:prstGeom prst="rect">
             <a:avLst/>
@@ -12809,7 +13440,7 @@
               <a:buNone/>
             </a:pPr>
             <a:r>
-              <a:rPr lang="en-US" sz="1800" dirty="0">
+              <a:rPr lang="en-US" sz="1300" dirty="0">
                 <a:solidFill>
                   <a:srgbClr val="FFFFFF"/>
                 </a:solidFill>
@@ -12819,7 +13450,7 @@
               </a:rPr>
               <a:t>• Presentazione web interattiva SPA</a:t>
             </a:r>
-            <a:endParaRPr lang="en-US" sz="1800" dirty="0"/>
+            <a:endParaRPr lang="en-US" sz="1300" dirty="0"/>
           </a:p>
         </p:txBody>
       </p:sp>
@@ -12831,8 +13462,8 @@
         </p:nvSpPr>
         <p:spPr>
           <a:xfrm>
-            <a:off x="609585" y="2794000"/>
-            <a:ext cx="3268052" cy="457200"/>
+            <a:off x="634984" y="3556000"/>
+            <a:ext cx="3217253" cy="673100"/>
           </a:xfrm>
           <a:prstGeom prst="rect">
             <a:avLst/>
@@ -12848,7 +13479,7 @@
               <a:buNone/>
             </a:pPr>
             <a:r>
-              <a:rPr lang="en-US" sz="1800" dirty="0">
+              <a:rPr lang="en-US" sz="1300" dirty="0">
                 <a:solidFill>
                   <a:srgbClr val="FFFFFF"/>
                 </a:solidFill>
@@ -12858,7 +13489,7 @@
               </a:rPr>
               <a:t>• Navigazione da tastiera e fullscreen</a:t>
             </a:r>
-            <a:endParaRPr lang="en-US" sz="1800" dirty="0"/>
+            <a:endParaRPr lang="en-US" sz="1300" dirty="0"/>
           </a:p>
         </p:txBody>
       </p:sp>
@@ -12870,8 +13501,8 @@
         </p:nvSpPr>
         <p:spPr>
           <a:xfrm>
-            <a:off x="609585" y="3429000"/>
-            <a:ext cx="3268052" cy="254000"/>
+            <a:off x="634984" y="4406900"/>
+            <a:ext cx="3217253" cy="673100"/>
           </a:xfrm>
           <a:prstGeom prst="rect">
             <a:avLst/>
@@ -12887,7 +13518,7 @@
               <a:buNone/>
             </a:pPr>
             <a:r>
-              <a:rPr lang="en-US" sz="1800" dirty="0">
+              <a:rPr lang="en-US" sz="1300" dirty="0">
                 <a:solidFill>
                   <a:srgbClr val="FFFFFF"/>
                 </a:solidFill>
@@ -12897,7 +13528,7 @@
               </a:rPr>
               <a:t>• Modalità Speaker View con note</a:t>
             </a:r>
-            <a:endParaRPr lang="en-US" sz="1800" dirty="0"/>
+            <a:endParaRPr lang="en-US" sz="1300" dirty="0"/>
           </a:p>
         </p:txBody>
       </p:sp>
@@ -12909,8 +13540,8 @@
         </p:nvSpPr>
         <p:spPr>
           <a:xfrm>
-            <a:off x="609585" y="3860800"/>
-            <a:ext cx="3268052" cy="254000"/>
+            <a:off x="634984" y="5257800"/>
+            <a:ext cx="3217253" cy="673100"/>
           </a:xfrm>
           <a:prstGeom prst="rect">
             <a:avLst/>
@@ -12926,7 +13557,7 @@
               <a:buNone/>
             </a:pPr>
             <a:r>
-              <a:rPr lang="en-US" sz="1800" dirty="0">
+              <a:rPr lang="en-US" sz="1300" dirty="0">
                 <a:solidFill>
                   <a:srgbClr val="FFFFFF"/>
                 </a:solidFill>
@@ -12936,7 +13567,7 @@
               </a:rPr>
               <a:t>• Inspector visuale in tempo reale</a:t>
             </a:r>
-            <a:endParaRPr lang="en-US" sz="1800" dirty="0"/>
+            <a:endParaRPr lang="en-US" sz="1300" dirty="0"/>
           </a:p>
         </p:txBody>
       </p:sp>
@@ -12948,12 +13579,12 @@
         </p:nvSpPr>
         <p:spPr>
           <a:xfrm>
-            <a:off x="4258627" y="1778000"/>
-            <a:ext cx="3674441" cy="3225800"/>
+            <a:off x="4258627" y="2019300"/>
+            <a:ext cx="3674441" cy="4267200"/>
           </a:xfrm>
           <a:prstGeom prst="roundRect">
             <a:avLst>
-              <a:gd name="adj" fmla="val 2268"/>
+              <a:gd name="adj" fmla="val 1991"/>
             </a:avLst>
           </a:prstGeom>
           <a:solidFill>
@@ -12975,8 +13606,8 @@
         </p:nvSpPr>
         <p:spPr>
           <a:xfrm>
-            <a:off x="4276915" y="1814576"/>
-            <a:ext cx="54864" cy="3152648"/>
+            <a:off x="4276915" y="2055876"/>
+            <a:ext cx="54864" cy="4194048"/>
           </a:xfrm>
           <a:prstGeom prst="roundRect">
             <a:avLst>
@@ -12997,8 +13628,8 @@
         </p:nvSpPr>
         <p:spPr>
           <a:xfrm>
-            <a:off x="4487227" y="1942592"/>
-            <a:ext cx="3217241" cy="320040"/>
+            <a:off x="4487227" y="2129028"/>
+            <a:ext cx="3217241" cy="274320"/>
           </a:xfrm>
           <a:prstGeom prst="rect">
             <a:avLst/>
@@ -13014,7 +13645,7 @@
               <a:buNone/>
             </a:pPr>
             <a:r>
-              <a:rPr lang="en-US" sz="2000" b="1" dirty="0">
+              <a:rPr lang="en-US" sz="1600" b="1" dirty="0">
                 <a:solidFill>
                   <a:srgbClr val="7B61FF"/>
                 </a:solidFill>
@@ -13024,7 +13655,7 @@
               </a:rPr>
               <a:t>PptxRenderer</a:t>
             </a:r>
-            <a:endParaRPr lang="en-US" sz="2000" dirty="0"/>
+            <a:endParaRPr lang="en-US" sz="1600" dirty="0"/>
           </a:p>
         </p:txBody>
       </p:sp>
@@ -13036,8 +13667,8 @@
         </p:nvSpPr>
         <p:spPr>
           <a:xfrm>
-            <a:off x="4461822" y="2362200"/>
-            <a:ext cx="3268052" cy="457200"/>
+            <a:off x="4487221" y="2705100"/>
+            <a:ext cx="3217253" cy="673100"/>
           </a:xfrm>
           <a:prstGeom prst="rect">
             <a:avLst/>
@@ -13053,7 +13684,7 @@
               <a:buNone/>
             </a:pPr>
             <a:r>
-              <a:rPr lang="en-US" sz="1800" dirty="0">
+              <a:rPr lang="en-US" sz="1300" dirty="0">
                 <a:solidFill>
                   <a:srgbClr val="FFFFFF"/>
                 </a:solidFill>
@@ -13063,7 +13694,7 @@
               </a:rPr>
               <a:t>• Forme OpenXML native e testo modificabile</a:t>
             </a:r>
-            <a:endParaRPr lang="en-US" sz="1800" dirty="0"/>
+            <a:endParaRPr lang="en-US" sz="1300" dirty="0"/>
           </a:p>
         </p:txBody>
       </p:sp>
@@ -13075,8 +13706,8 @@
         </p:nvSpPr>
         <p:spPr>
           <a:xfrm>
-            <a:off x="4461822" y="2997200"/>
-            <a:ext cx="3268052" cy="457200"/>
+            <a:off x="4487221" y="3556000"/>
+            <a:ext cx="3217253" cy="673100"/>
           </a:xfrm>
           <a:prstGeom prst="rect">
             <a:avLst/>
@@ -13092,7 +13723,7 @@
               <a:buNone/>
             </a:pPr>
             <a:r>
-              <a:rPr lang="en-US" sz="1800" dirty="0">
+              <a:rPr lang="en-US" sz="1300" dirty="0">
                 <a:solidFill>
                   <a:srgbClr val="FFFFFF"/>
                 </a:solidFill>
@@ -13102,7 +13733,7 @@
               </a:rPr>
               <a:t>• Tabelle, card e grafici nativi Office</a:t>
             </a:r>
-            <a:endParaRPr lang="en-US" sz="1800" dirty="0"/>
+            <a:endParaRPr lang="en-US" sz="1300" dirty="0"/>
           </a:p>
         </p:txBody>
       </p:sp>
@@ -13114,8 +13745,8 @@
         </p:nvSpPr>
         <p:spPr>
           <a:xfrm>
-            <a:off x="4461822" y="3632200"/>
-            <a:ext cx="3268052" cy="457200"/>
+            <a:off x="4487221" y="4406900"/>
+            <a:ext cx="3217253" cy="673100"/>
           </a:xfrm>
           <a:prstGeom prst="rect">
             <a:avLst/>
@@ -13131,7 +13762,7 @@
               <a:buNone/>
             </a:pPr>
             <a:r>
-              <a:rPr lang="en-US" sz="1800" dirty="0">
+              <a:rPr lang="en-US" sz="1300" dirty="0">
                 <a:solidFill>
                   <a:srgbClr val="FFFFFF"/>
                 </a:solidFill>
@@ -13141,7 +13772,7 @@
               </a:rPr>
               <a:t>• Zero screenshot o immagini statiche</a:t>
             </a:r>
-            <a:endParaRPr lang="en-US" sz="1800" dirty="0"/>
+            <a:endParaRPr lang="en-US" sz="1300" dirty="0"/>
           </a:p>
         </p:txBody>
       </p:sp>
@@ -13153,8 +13784,8 @@
         </p:nvSpPr>
         <p:spPr>
           <a:xfrm>
-            <a:off x="4461822" y="4267200"/>
-            <a:ext cx="3268052" cy="457200"/>
+            <a:off x="4487221" y="5257800"/>
+            <a:ext cx="3217253" cy="673100"/>
           </a:xfrm>
           <a:prstGeom prst="rect">
             <a:avLst/>
@@ -13170,7 +13801,7 @@
               <a:buNone/>
             </a:pPr>
             <a:r>
-              <a:rPr lang="en-US" sz="1800" dirty="0">
+              <a:rPr lang="en-US" sz="1300" dirty="0">
                 <a:solidFill>
                   <a:srgbClr val="FFFFFF"/>
                 </a:solidFill>
@@ -13180,7 +13811,7 @@
               </a:rPr>
               <a:t>• Modificabile su PowerPoint / Keynote</a:t>
             </a:r>
-            <a:endParaRPr lang="en-US" sz="1800" dirty="0"/>
+            <a:endParaRPr lang="en-US" sz="1300" dirty="0"/>
           </a:p>
         </p:txBody>
       </p:sp>
@@ -13192,12 +13823,12 @@
         </p:nvSpPr>
         <p:spPr>
           <a:xfrm>
-            <a:off x="8110864" y="1778000"/>
-            <a:ext cx="3674441" cy="3022600"/>
+            <a:off x="8110864" y="2019300"/>
+            <a:ext cx="3674441" cy="4267200"/>
           </a:xfrm>
           <a:prstGeom prst="roundRect">
             <a:avLst>
-              <a:gd name="adj" fmla="val 2420"/>
+              <a:gd name="adj" fmla="val 1991"/>
             </a:avLst>
           </a:prstGeom>
           <a:solidFill>
@@ -13219,8 +13850,8 @@
         </p:nvSpPr>
         <p:spPr>
           <a:xfrm>
-            <a:off x="8129152" y="1814576"/>
-            <a:ext cx="54864" cy="2949448"/>
+            <a:off x="8129152" y="2055876"/>
+            <a:ext cx="54864" cy="4194048"/>
           </a:xfrm>
           <a:prstGeom prst="roundRect">
             <a:avLst>
@@ -13241,8 +13872,8 @@
         </p:nvSpPr>
         <p:spPr>
           <a:xfrm>
-            <a:off x="8339464" y="1942592"/>
-            <a:ext cx="3217241" cy="320040"/>
+            <a:off x="8339464" y="2129028"/>
+            <a:ext cx="3217241" cy="274320"/>
           </a:xfrm>
           <a:prstGeom prst="rect">
             <a:avLst/>
@@ -13258,7 +13889,7 @@
               <a:buNone/>
             </a:pPr>
             <a:r>
-              <a:rPr lang="en-US" sz="2000" b="1" dirty="0">
+              <a:rPr lang="en-US" sz="1600" b="1" dirty="0">
                 <a:solidFill>
                   <a:srgbClr val="00FF9F"/>
                 </a:solidFill>
@@ -13268,7 +13899,7 @@
               </a:rPr>
               <a:t>PdfRenderer</a:t>
             </a:r>
-            <a:endParaRPr lang="en-US" sz="2000" dirty="0"/>
+            <a:endParaRPr lang="en-US" sz="1600" dirty="0"/>
           </a:p>
         </p:txBody>
       </p:sp>
@@ -13280,8 +13911,8 @@
         </p:nvSpPr>
         <p:spPr>
           <a:xfrm>
-            <a:off x="8314059" y="2362200"/>
-            <a:ext cx="3268052" cy="457200"/>
+            <a:off x="8339458" y="2705100"/>
+            <a:ext cx="3217253" cy="673100"/>
           </a:xfrm>
           <a:prstGeom prst="rect">
             <a:avLst/>
@@ -13297,7 +13928,7 @@
               <a:buNone/>
             </a:pPr>
             <a:r>
-              <a:rPr lang="en-US" sz="1800" dirty="0">
+              <a:rPr lang="en-US" sz="1300" dirty="0">
                 <a:solidFill>
                   <a:srgbClr val="FFFFFF"/>
                 </a:solidFill>
@@ -13307,7 +13938,7 @@
               </a:rPr>
               <a:t>• Rendering vettoriale ad alta definizione</a:t>
             </a:r>
-            <a:endParaRPr lang="en-US" sz="1800" dirty="0"/>
+            <a:endParaRPr lang="en-US" sz="1300" dirty="0"/>
           </a:p>
         </p:txBody>
       </p:sp>
@@ -13319,8 +13950,8 @@
         </p:nvSpPr>
         <p:spPr>
           <a:xfrm>
-            <a:off x="8314059" y="2997200"/>
-            <a:ext cx="3268052" cy="457200"/>
+            <a:off x="8339458" y="3556000"/>
+            <a:ext cx="3217253" cy="673100"/>
           </a:xfrm>
           <a:prstGeom prst="rect">
             <a:avLst/>
@@ -13336,7 +13967,7 @@
               <a:buNone/>
             </a:pPr>
             <a:r>
-              <a:rPr lang="en-US" sz="1800" dirty="0">
+              <a:rPr lang="en-US" sz="1300" dirty="0">
                 <a:solidFill>
                   <a:srgbClr val="FFFFFF"/>
                 </a:solidFill>
@@ -13346,7 +13977,7 @@
               </a:rPr>
               <a:t>• Layout e tipografia rigorosamente fissati</a:t>
             </a:r>
-            <a:endParaRPr lang="en-US" sz="1800" dirty="0"/>
+            <a:endParaRPr lang="en-US" sz="1300" dirty="0"/>
           </a:p>
         </p:txBody>
       </p:sp>
@@ -13358,8 +13989,8 @@
         </p:nvSpPr>
         <p:spPr>
           <a:xfrm>
-            <a:off x="8314059" y="3632200"/>
-            <a:ext cx="3268052" cy="457200"/>
+            <a:off x="8339458" y="4406900"/>
+            <a:ext cx="3217253" cy="673100"/>
           </a:xfrm>
           <a:prstGeom prst="rect">
             <a:avLst/>
@@ -13375,7 +14006,7 @@
               <a:buNone/>
             </a:pPr>
             <a:r>
-              <a:rPr lang="en-US" sz="1800" dirty="0">
+              <a:rPr lang="en-US" sz="1300" dirty="0">
                 <a:solidFill>
                   <a:srgbClr val="FFFFFF"/>
                 </a:solidFill>
@@ -13385,7 +14016,7 @@
               </a:rPr>
               <a:t>• Ideale per dispense, esami e stampa</a:t>
             </a:r>
-            <a:endParaRPr lang="en-US" sz="1800" dirty="0"/>
+            <a:endParaRPr lang="en-US" sz="1300" dirty="0"/>
           </a:p>
         </p:txBody>
       </p:sp>
@@ -13397,8 +14028,8 @@
         </p:nvSpPr>
         <p:spPr>
           <a:xfrm>
-            <a:off x="8314059" y="4267200"/>
-            <a:ext cx="3268052" cy="254000"/>
+            <a:off x="8339458" y="5257800"/>
+            <a:ext cx="3217253" cy="673100"/>
           </a:xfrm>
           <a:prstGeom prst="rect">
             <a:avLst/>
@@ -13414,7 +14045,7 @@
               <a:buNone/>
             </a:pPr>
             <a:r>
-              <a:rPr lang="en-US" sz="1800" dirty="0">
+              <a:rPr lang="en-US" sz="1300" dirty="0">
                 <a:solidFill>
                   <a:srgbClr val="FFFFFF"/>
                 </a:solidFill>
@@ -13424,7 +14055,7 @@
               </a:rPr>
               <a:t>• Dimensioni del file ottimizzate</a:t>
             </a:r>
-            <a:endParaRPr lang="en-US" sz="1800" dirty="0"/>
+            <a:endParaRPr lang="en-US" sz="1300" dirty="0"/>
           </a:p>
         </p:txBody>
       </p:sp>
@@ -13508,23 +14139,23 @@
         <p:spPr>
           <a:xfrm>
             <a:off x="406390" y="406400"/>
-            <a:ext cx="11378916" cy="571500"/>
-          </a:xfrm>
-          <a:prstGeom prst="rect">
-            <a:avLst/>
-          </a:prstGeom>
-          <a:noFill/>
-          <a:ln/>
-        </p:spPr>
-        <p:txBody>
-          <a:bodyPr wrap="square" lIns="0" tIns="0" rIns="0" bIns="0" rtlCol="0" anchor="ctr"/>
+            <a:ext cx="11378916" cy="698500"/>
+          </a:xfrm>
+          <a:prstGeom prst="rect">
+            <a:avLst/>
+          </a:prstGeom>
+          <a:noFill/>
+          <a:ln/>
+        </p:spPr>
+        <p:txBody>
+          <a:bodyPr wrap="square" lIns="0" tIns="0" rIns="0" bIns="0" rtlCol="0" anchor="t"/>
           <a:lstStyle/>
           <a:p>
             <a:pPr algn="l" indent="0" marL="0">
               <a:buNone/>
             </a:pPr>
             <a:r>
-              <a:rPr lang="en-US" sz="4600" b="1" dirty="0">
+              <a:rPr lang="en-US" sz="3300" b="1" dirty="0">
                 <a:solidFill>
                   <a:srgbClr val="FF2E88"/>
                 </a:solidFill>
@@ -13534,7 +14165,7 @@
               </a:rPr>
               <a:t>Design Linter e Qualità Visiva</a:t>
             </a:r>
-            <a:endParaRPr lang="en-US" sz="4600" dirty="0"/>
+            <a:endParaRPr lang="en-US" sz="3300" dirty="0"/>
           </a:p>
         </p:txBody>
       </p:sp>
@@ -13546,24 +14177,24 @@
         </p:nvSpPr>
         <p:spPr>
           <a:xfrm>
-            <a:off x="406390" y="1155700"/>
-            <a:ext cx="11378916" cy="444500"/>
-          </a:xfrm>
-          <a:prstGeom prst="rect">
-            <a:avLst/>
-          </a:prstGeom>
-          <a:noFill/>
-          <a:ln/>
-        </p:spPr>
-        <p:txBody>
-          <a:bodyPr wrap="square" lIns="0" tIns="0" rIns="0" bIns="0" rtlCol="0" anchor="ctr"/>
+            <a:off x="406390" y="1282700"/>
+            <a:ext cx="11378916" cy="558800"/>
+          </a:xfrm>
+          <a:prstGeom prst="rect">
+            <a:avLst/>
+          </a:prstGeom>
+          <a:noFill/>
+          <a:ln/>
+        </p:spPr>
+        <p:txBody>
+          <a:bodyPr wrap="square" lIns="0" tIns="0" rIns="0" bIns="0" rtlCol="0" anchor="t"/>
           <a:lstStyle/>
           <a:p>
             <a:pPr algn="l" indent="0" marL="0">
               <a:buNone/>
             </a:pPr>
             <a:r>
-              <a:rPr lang="en-US" sz="3800" b="1" dirty="0">
+              <a:rPr lang="en-US" sz="2700" b="1" dirty="0">
                 <a:solidFill>
                   <a:srgbClr val="FFFFFF"/>
                 </a:solidFill>
@@ -13573,7 +14204,7 @@
               </a:rPr>
               <a:t>Static Analysis per la leggibilità e l'accessibilità</a:t>
             </a:r>
-            <a:endParaRPr lang="en-US" sz="3800" dirty="0"/>
+            <a:endParaRPr lang="en-US" sz="2700" dirty="0"/>
           </a:p>
         </p:txBody>
       </p:sp>
@@ -13585,12 +14216,12 @@
         </p:nvSpPr>
         <p:spPr>
           <a:xfrm>
-            <a:off x="406390" y="1778000"/>
-            <a:ext cx="5600560" cy="2844800"/>
+            <a:off x="406390" y="2019300"/>
+            <a:ext cx="5600560" cy="3594100"/>
           </a:xfrm>
           <a:prstGeom prst="roundRect">
             <a:avLst>
-              <a:gd name="adj" fmla="val 2571"/>
+              <a:gd name="adj" fmla="val 2035"/>
             </a:avLst>
           </a:prstGeom>
           <a:solidFill>
@@ -13612,8 +14243,8 @@
         </p:nvSpPr>
         <p:spPr>
           <a:xfrm>
-            <a:off x="424678" y="1814576"/>
-            <a:ext cx="54864" cy="2771648"/>
+            <a:off x="424678" y="2055876"/>
+            <a:ext cx="54864" cy="3520948"/>
           </a:xfrm>
           <a:prstGeom prst="roundRect">
             <a:avLst>
@@ -13634,8 +14265,8 @@
         </p:nvSpPr>
         <p:spPr>
           <a:xfrm>
-            <a:off x="634990" y="1942592"/>
-            <a:ext cx="5143360" cy="320040"/>
+            <a:off x="634990" y="2129028"/>
+            <a:ext cx="5143360" cy="274320"/>
           </a:xfrm>
           <a:prstGeom prst="rect">
             <a:avLst/>
@@ -13651,7 +14282,7 @@
               <a:buNone/>
             </a:pPr>
             <a:r>
-              <a:rPr lang="en-US" sz="2000" b="1" dirty="0">
+              <a:rPr lang="en-US" sz="1600" b="1" dirty="0">
                 <a:solidFill>
                   <a:srgbClr val="FF2E88"/>
                 </a:solidFill>
@@ -13661,7 +14292,7 @@
               </a:rPr>
               <a:t>Controlli Automatici di Design</a:t>
             </a:r>
-            <a:endParaRPr lang="en-US" sz="2000" dirty="0"/>
+            <a:endParaRPr lang="en-US" sz="1600" dirty="0"/>
           </a:p>
         </p:txBody>
       </p:sp>
@@ -13673,8 +14304,8 @@
         </p:nvSpPr>
         <p:spPr>
           <a:xfrm>
-            <a:off x="609585" y="2362200"/>
-            <a:ext cx="5194170" cy="254000"/>
+            <a:off x="634984" y="2705100"/>
+            <a:ext cx="5143371" cy="368300"/>
           </a:xfrm>
           <a:prstGeom prst="rect">
             <a:avLst/>
@@ -13690,7 +14321,7 @@
               <a:buNone/>
             </a:pPr>
             <a:r>
-              <a:rPr lang="en-US" sz="1800" dirty="0">
+              <a:rPr lang="en-US" sz="1300" dirty="0">
                 <a:solidFill>
                   <a:srgbClr val="FFFFFF"/>
                 </a:solidFill>
@@ -13700,7 +14331,7 @@
               </a:rPr>
               <a:t>• Densità informativa e carico cognitivo</a:t>
             </a:r>
-            <a:endParaRPr lang="en-US" sz="1800" dirty="0"/>
+            <a:endParaRPr lang="en-US" sz="1300" dirty="0"/>
           </a:p>
         </p:txBody>
       </p:sp>
@@ -13712,8 +14343,8 @@
         </p:nvSpPr>
         <p:spPr>
           <a:xfrm>
-            <a:off x="609585" y="2794000"/>
-            <a:ext cx="5194170" cy="254000"/>
+            <a:off x="634984" y="3251200"/>
+            <a:ext cx="5143371" cy="368300"/>
           </a:xfrm>
           <a:prstGeom prst="rect">
             <a:avLst/>
@@ -13729,7 +14360,7 @@
               <a:buNone/>
             </a:pPr>
             <a:r>
-              <a:rPr lang="en-US" sz="1800" dirty="0">
+              <a:rPr lang="en-US" sz="1300" dirty="0">
                 <a:solidFill>
                   <a:srgbClr val="FFFFFF"/>
                 </a:solidFill>
@@ -13739,7 +14370,7 @@
               </a:rPr>
               <a:t>• Verifica slide vuote o incomplete</a:t>
             </a:r>
-            <a:endParaRPr lang="en-US" sz="1800" dirty="0"/>
+            <a:endParaRPr lang="en-US" sz="1300" dirty="0"/>
           </a:p>
         </p:txBody>
       </p:sp>
@@ -13751,8 +14382,8 @@
         </p:nvSpPr>
         <p:spPr>
           <a:xfrm>
-            <a:off x="609585" y="3225800"/>
-            <a:ext cx="5194170" cy="254000"/>
+            <a:off x="634984" y="3797300"/>
+            <a:ext cx="5143371" cy="368300"/>
           </a:xfrm>
           <a:prstGeom prst="rect">
             <a:avLst/>
@@ -13768,7 +14399,7 @@
               <a:buNone/>
             </a:pPr>
             <a:r>
-              <a:rPr lang="en-US" sz="1800" dirty="0">
+              <a:rPr lang="en-US" sz="1300" dirty="0">
                 <a:solidFill>
                   <a:srgbClr val="FFFFFF"/>
                 </a:solidFill>
@@ -13778,7 +14409,7 @@
               </a:rPr>
               <a:t>• Contrasto testo/sfondo secondo standard WCAG</a:t>
             </a:r>
-            <a:endParaRPr lang="en-US" sz="1800" dirty="0"/>
+            <a:endParaRPr lang="en-US" sz="1300" dirty="0"/>
           </a:p>
         </p:txBody>
       </p:sp>
@@ -13790,8 +14421,8 @@
         </p:nvSpPr>
         <p:spPr>
           <a:xfrm>
-            <a:off x="609585" y="3657600"/>
-            <a:ext cx="5194170" cy="254000"/>
+            <a:off x="634984" y="4343400"/>
+            <a:ext cx="5143371" cy="368300"/>
           </a:xfrm>
           <a:prstGeom prst="rect">
             <a:avLst/>
@@ -13807,7 +14438,7 @@
               <a:buNone/>
             </a:pPr>
             <a:r>
-              <a:rPr lang="en-US" sz="1800" dirty="0">
+              <a:rPr lang="en-US" sz="1300" dirty="0">
                 <a:solidFill>
                   <a:srgbClr val="FFFFFF"/>
                 </a:solidFill>
@@ -13817,7 +14448,7 @@
               </a:rPr>
               <a:t>• Rispetto della Safe Area e margini</a:t>
             </a:r>
-            <a:endParaRPr lang="en-US" sz="1800" dirty="0"/>
+            <a:endParaRPr lang="en-US" sz="1300" dirty="0"/>
           </a:p>
         </p:txBody>
       </p:sp>
@@ -13829,8 +14460,8 @@
         </p:nvSpPr>
         <p:spPr>
           <a:xfrm>
-            <a:off x="609585" y="4089400"/>
-            <a:ext cx="5194170" cy="254000"/>
+            <a:off x="634984" y="4889500"/>
+            <a:ext cx="5143371" cy="368300"/>
           </a:xfrm>
           <a:prstGeom prst="rect">
             <a:avLst/>
@@ -13846,7 +14477,7 @@
               <a:buNone/>
             </a:pPr>
             <a:r>
-              <a:rPr lang="en-US" sz="1800" dirty="0">
+              <a:rPr lang="en-US" sz="1300" dirty="0">
                 <a:solidFill>
                   <a:srgbClr val="FFFFFF"/>
                 </a:solidFill>
@@ -13856,7 +14487,7 @@
               </a:rPr>
               <a:t>• Calcolo del Visual Score da 0 a 100</a:t>
             </a:r>
-            <a:endParaRPr lang="en-US" sz="1800" dirty="0"/>
+            <a:endParaRPr lang="en-US" sz="1300" dirty="0"/>
           </a:p>
         </p:txBody>
       </p:sp>
@@ -13868,12 +14499,12 @@
         </p:nvSpPr>
         <p:spPr>
           <a:xfrm>
-            <a:off x="6184745" y="1778000"/>
-            <a:ext cx="5600560" cy="1879600"/>
+            <a:off x="6184745" y="2019300"/>
+            <a:ext cx="5600560" cy="2057400"/>
           </a:xfrm>
           <a:prstGeom prst="roundRect">
             <a:avLst>
-              <a:gd name="adj" fmla="val 3892"/>
+              <a:gd name="adj" fmla="val 3556"/>
             </a:avLst>
           </a:prstGeom>
           <a:solidFill>
@@ -13895,8 +14526,8 @@
         </p:nvSpPr>
         <p:spPr>
           <a:xfrm>
-            <a:off x="6203033" y="1814576"/>
-            <a:ext cx="54864" cy="1806448"/>
+            <a:off x="6203033" y="2055876"/>
+            <a:ext cx="54864" cy="1984248"/>
           </a:xfrm>
           <a:prstGeom prst="roundRect">
             <a:avLst>
@@ -13917,8 +14548,8 @@
         </p:nvSpPr>
         <p:spPr>
           <a:xfrm>
-            <a:off x="6413345" y="1942592"/>
-            <a:ext cx="5143360" cy="320040"/>
+            <a:off x="6413345" y="2129028"/>
+            <a:ext cx="5143360" cy="274320"/>
           </a:xfrm>
           <a:prstGeom prst="rect">
             <a:avLst/>
@@ -13934,7 +14565,7 @@
               <a:buNone/>
             </a:pPr>
             <a:r>
-              <a:rPr lang="en-US" sz="2000" b="1" dirty="0">
+              <a:rPr lang="en-US" sz="1600" b="1" dirty="0">
                 <a:solidFill>
                   <a:srgbClr val="FFE600"/>
                 </a:solidFill>
@@ -13944,7 +14575,7 @@
               </a:rPr>
               <a:t>Esempio di Diagnostica CLI</a:t>
             </a:r>
-            <a:endParaRPr lang="en-US" sz="2000" dirty="0"/>
+            <a:endParaRPr lang="en-US" sz="1600" dirty="0"/>
           </a:p>
         </p:txBody>
       </p:sp>
@@ -13956,8 +14587,8 @@
         </p:nvSpPr>
         <p:spPr>
           <a:xfrm>
-            <a:off x="6387940" y="2362200"/>
-            <a:ext cx="5194170" cy="1016000"/>
+            <a:off x="6413340" y="2705100"/>
+            <a:ext cx="5143371" cy="1016000"/>
           </a:xfrm>
           <a:prstGeom prst="roundRect">
             <a:avLst>
@@ -13983,7 +14614,7 @@
         </p:nvSpPr>
         <p:spPr>
           <a:xfrm>
-            <a:off x="6525100" y="2471928"/>
+            <a:off x="6550500" y="2814828"/>
             <a:ext cx="91440" cy="91440"/>
           </a:xfrm>
           <a:prstGeom prst="ellipse">
@@ -14008,7 +14639,7 @@
         </p:nvSpPr>
         <p:spPr>
           <a:xfrm>
-            <a:off x="6662260" y="2471928"/>
+            <a:off x="6687660" y="2814828"/>
             <a:ext cx="91440" cy="91440"/>
           </a:xfrm>
           <a:prstGeom prst="ellipse">
@@ -14033,7 +14664,7 @@
         </p:nvSpPr>
         <p:spPr>
           <a:xfrm>
-            <a:off x="6799420" y="2471928"/>
+            <a:off x="6824820" y="2814828"/>
             <a:ext cx="91440" cy="91440"/>
           </a:xfrm>
           <a:prstGeom prst="ellipse">
@@ -14058,8 +14689,8 @@
         </p:nvSpPr>
         <p:spPr>
           <a:xfrm>
-            <a:off x="6570820" y="2654808"/>
-            <a:ext cx="4828410" cy="650240"/>
+            <a:off x="6596220" y="2997708"/>
+            <a:ext cx="4777611" cy="650240"/>
           </a:xfrm>
           <a:prstGeom prst="rect">
             <a:avLst/>
@@ -14148,7 +14779,7 @@
         </p:nvSpPr>
         <p:spPr>
           <a:xfrm>
-            <a:off x="406390" y="4800600"/>
+            <a:off x="406390" y="5791200"/>
             <a:ext cx="11378916" cy="654050"/>
           </a:xfrm>
           <a:prstGeom prst="roundRect">
@@ -14175,7 +14806,7 @@
         </p:nvSpPr>
         <p:spPr>
           <a:xfrm>
-            <a:off x="543550" y="4873752"/>
+            <a:off x="543550" y="5864352"/>
             <a:ext cx="11104596" cy="274320"/>
           </a:xfrm>
           <a:prstGeom prst="rect">
@@ -14214,7 +14845,7 @@
         </p:nvSpPr>
         <p:spPr>
           <a:xfrm>
-            <a:off x="543550" y="5193792"/>
+            <a:off x="543550" y="6184392"/>
             <a:ext cx="11104596" cy="187706"/>
           </a:xfrm>
           <a:prstGeom prst="rect">

--- a/presentation.pptx
+++ b/presentation.pptx
@@ -2491,11 +2491,11 @@
         <p:spPr>
           <a:xfrm>
             <a:off x="406390" y="2019300"/>
-            <a:ext cx="3674441" cy="1701800"/>
+            <a:ext cx="3674441" cy="2006600"/>
           </a:xfrm>
           <a:prstGeom prst="roundRect">
             <a:avLst>
-              <a:gd name="adj" fmla="val 4299"/>
+              <a:gd name="adj" fmla="val 3646"/>
             </a:avLst>
           </a:prstGeom>
           <a:solidFill>
@@ -2518,7 +2518,7 @@
         <p:spPr>
           <a:xfrm>
             <a:off x="424678" y="2055876"/>
-            <a:ext cx="54864" cy="1628648"/>
+            <a:ext cx="54864" cy="1933448"/>
           </a:xfrm>
           <a:prstGeom prst="roundRect">
             <a:avLst>
@@ -2579,11 +2579,11 @@
         <p:spPr>
           <a:xfrm>
             <a:off x="634984" y="2705100"/>
-            <a:ext cx="3217253" cy="660400"/>
+            <a:ext cx="3217253" cy="965200"/>
           </a:xfrm>
           <a:prstGeom prst="roundRect">
             <a:avLst>
-              <a:gd name="adj" fmla="val 11077"/>
+              <a:gd name="adj" fmla="val 7579"/>
             </a:avLst>
           </a:prstGeom>
           <a:solidFill>
@@ -2680,24 +2680,24 @@
         </p:nvSpPr>
         <p:spPr>
           <a:xfrm>
-            <a:off x="817864" y="2997708"/>
-            <a:ext cx="2851493" cy="294640"/>
-          </a:xfrm>
-          <a:prstGeom prst="rect">
-            <a:avLst/>
-          </a:prstGeom>
-          <a:noFill/>
-          <a:ln/>
-        </p:spPr>
-        <p:txBody>
-          <a:bodyPr wrap="square" rtlCol="0" anchor="t"/>
+            <a:off x="836152" y="3034284"/>
+            <a:ext cx="2814917" cy="526288"/>
+          </a:xfrm>
+          <a:prstGeom prst="rect">
+            <a:avLst/>
+          </a:prstGeom>
+          <a:noFill/>
+          <a:ln/>
+        </p:spPr>
+        <p:txBody>
+          <a:bodyPr wrap="square" lIns="0" tIns="0" rIns="0" bIns="0" rtlCol="0" anchor="t"/>
           <a:lstStyle/>
           <a:p>
             <a:pPr indent="0" marL="0">
               <a:buNone/>
             </a:pPr>
             <a:r>
-              <a:rPr lang="en-US" sz="1150" dirty="0">
+              <a:rPr lang="en-US" sz="1000" dirty="0">
                 <a:solidFill>
                   <a:srgbClr val="00F0FF"/>
                 </a:solidFill>
@@ -2707,14 +2707,14 @@
               </a:rPr>
               <a:t>yumia validate pres.yumia</a:t>
             </a:r>
-            <a:endParaRPr lang="en-US" sz="1150" dirty="0"/>
+            <a:endParaRPr lang="en-US" sz="1000" dirty="0"/>
           </a:p>
           <a:p>
             <a:pPr indent="0" marL="0">
               <a:buNone/>
             </a:pPr>
             <a:r>
-              <a:rPr lang="en-US" sz="1150" dirty="0">
+              <a:rPr lang="en-US" sz="1000" dirty="0">
                 <a:solidFill>
                   <a:srgbClr val="00F0FF"/>
                 </a:solidFill>
@@ -2724,7 +2724,7 @@
               </a:rPr>
               <a:t>yumia explain pres.yumia</a:t>
             </a:r>
-            <a:endParaRPr lang="en-US" sz="1150" dirty="0"/>
+            <a:endParaRPr lang="en-US" sz="1000" dirty="0"/>
           </a:p>
         </p:txBody>
       </p:sp>
@@ -2737,11 +2737,11 @@
         <p:spPr>
           <a:xfrm>
             <a:off x="4258627" y="2019300"/>
-            <a:ext cx="3674441" cy="1701800"/>
+            <a:ext cx="3674441" cy="2006600"/>
           </a:xfrm>
           <a:prstGeom prst="roundRect">
             <a:avLst>
-              <a:gd name="adj" fmla="val 4299"/>
+              <a:gd name="adj" fmla="val 3646"/>
             </a:avLst>
           </a:prstGeom>
           <a:solidFill>
@@ -2764,7 +2764,7 @@
         <p:spPr>
           <a:xfrm>
             <a:off x="4276915" y="2055876"/>
-            <a:ext cx="54864" cy="1628648"/>
+            <a:ext cx="54864" cy="1933448"/>
           </a:xfrm>
           <a:prstGeom prst="roundRect">
             <a:avLst>
@@ -2825,11 +2825,11 @@
         <p:spPr>
           <a:xfrm>
             <a:off x="4487221" y="2705100"/>
-            <a:ext cx="3217253" cy="660400"/>
+            <a:ext cx="3217253" cy="965200"/>
           </a:xfrm>
           <a:prstGeom prst="roundRect">
             <a:avLst>
-              <a:gd name="adj" fmla="val 11077"/>
+              <a:gd name="adj" fmla="val 7579"/>
             </a:avLst>
           </a:prstGeom>
           <a:solidFill>
@@ -2926,24 +2926,24 @@
         </p:nvSpPr>
         <p:spPr>
           <a:xfrm>
-            <a:off x="4670101" y="2997708"/>
-            <a:ext cx="2851493" cy="294640"/>
-          </a:xfrm>
-          <a:prstGeom prst="rect">
-            <a:avLst/>
-          </a:prstGeom>
-          <a:noFill/>
-          <a:ln/>
-        </p:spPr>
-        <p:txBody>
-          <a:bodyPr wrap="square" rtlCol="0" anchor="t"/>
+            <a:off x="4688389" y="3034284"/>
+            <a:ext cx="2814917" cy="526288"/>
+          </a:xfrm>
+          <a:prstGeom prst="rect">
+            <a:avLst/>
+          </a:prstGeom>
+          <a:noFill/>
+          <a:ln/>
+        </p:spPr>
+        <p:txBody>
+          <a:bodyPr wrap="square" lIns="0" tIns="0" rIns="0" bIns="0" rtlCol="0" anchor="t"/>
           <a:lstStyle/>
           <a:p>
             <a:pPr indent="0" marL="0">
               <a:buNone/>
             </a:pPr>
             <a:r>
-              <a:rPr lang="en-US" sz="1150" dirty="0">
+              <a:rPr lang="en-US" sz="1000" dirty="0">
                 <a:solidFill>
                   <a:srgbClr val="00F0FF"/>
                 </a:solidFill>
@@ -2953,14 +2953,14 @@
               </a:rPr>
               <a:t>yumia dev pres.yumia --open</a:t>
             </a:r>
-            <a:endParaRPr lang="en-US" sz="1150" dirty="0"/>
+            <a:endParaRPr lang="en-US" sz="1000" dirty="0"/>
           </a:p>
           <a:p>
             <a:pPr indent="0" marL="0">
               <a:buNone/>
             </a:pPr>
             <a:r>
-              <a:rPr lang="en-US" sz="1150" dirty="0">
+              <a:rPr lang="en-US" sz="1000" dirty="0">
                 <a:solidFill>
                   <a:srgbClr val="00F0FF"/>
                 </a:solidFill>
@@ -2970,7 +2970,7 @@
               </a:rPr>
               <a:t>yumia check --optimize</a:t>
             </a:r>
-            <a:endParaRPr lang="en-US" sz="1150" dirty="0"/>
+            <a:endParaRPr lang="en-US" sz="1000" dirty="0"/>
           </a:p>
         </p:txBody>
       </p:sp>
@@ -2983,11 +2983,11 @@
         <p:spPr>
           <a:xfrm>
             <a:off x="8110864" y="2019300"/>
-            <a:ext cx="3674441" cy="1701800"/>
+            <a:ext cx="3674441" cy="2006600"/>
           </a:xfrm>
           <a:prstGeom prst="roundRect">
             <a:avLst>
-              <a:gd name="adj" fmla="val 4299"/>
+              <a:gd name="adj" fmla="val 3646"/>
             </a:avLst>
           </a:prstGeom>
           <a:solidFill>
@@ -3010,7 +3010,7 @@
         <p:spPr>
           <a:xfrm>
             <a:off x="8129152" y="2055876"/>
-            <a:ext cx="54864" cy="1628648"/>
+            <a:ext cx="54864" cy="1933448"/>
           </a:xfrm>
           <a:prstGeom prst="roundRect">
             <a:avLst>
@@ -3071,11 +3071,11 @@
         <p:spPr>
           <a:xfrm>
             <a:off x="8339458" y="2705100"/>
-            <a:ext cx="3217253" cy="660400"/>
+            <a:ext cx="3217253" cy="965200"/>
           </a:xfrm>
           <a:prstGeom prst="roundRect">
             <a:avLst>
-              <a:gd name="adj" fmla="val 11077"/>
+              <a:gd name="adj" fmla="val 7579"/>
             </a:avLst>
           </a:prstGeom>
           <a:solidFill>
@@ -3172,24 +3172,24 @@
         </p:nvSpPr>
         <p:spPr>
           <a:xfrm>
-            <a:off x="8522338" y="2997708"/>
-            <a:ext cx="2851493" cy="294640"/>
-          </a:xfrm>
-          <a:prstGeom prst="rect">
-            <a:avLst/>
-          </a:prstGeom>
-          <a:noFill/>
-          <a:ln/>
-        </p:spPr>
-        <p:txBody>
-          <a:bodyPr wrap="square" rtlCol="0" anchor="t"/>
+            <a:off x="8540626" y="3034284"/>
+            <a:ext cx="2814917" cy="526288"/>
+          </a:xfrm>
+          <a:prstGeom prst="rect">
+            <a:avLst/>
+          </a:prstGeom>
+          <a:noFill/>
+          <a:ln/>
+        </p:spPr>
+        <p:txBody>
+          <a:bodyPr wrap="square" lIns="0" tIns="0" rIns="0" bIns="0" rtlCol="0" anchor="t"/>
           <a:lstStyle/>
           <a:p>
             <a:pPr indent="0" marL="0">
               <a:buNone/>
             </a:pPr>
             <a:r>
-              <a:rPr lang="en-US" sz="1150" dirty="0">
+              <a:rPr lang="en-US" sz="1000" dirty="0">
                 <a:solidFill>
                   <a:srgbClr val="00F0FF"/>
                 </a:solidFill>
@@ -3199,14 +3199,14 @@
               </a:rPr>
               <a:t>yumia build --format pptx</a:t>
             </a:r>
-            <a:endParaRPr lang="en-US" sz="1150" dirty="0"/>
+            <a:endParaRPr lang="en-US" sz="1000" dirty="0"/>
           </a:p>
           <a:p>
             <a:pPr indent="0" marL="0">
               <a:buNone/>
             </a:pPr>
             <a:r>
-              <a:rPr lang="en-US" sz="1150" dirty="0">
+              <a:rPr lang="en-US" sz="1000" dirty="0">
                 <a:solidFill>
                   <a:srgbClr val="00F0FF"/>
                 </a:solidFill>
@@ -3216,7 +3216,7 @@
               </a:rPr>
               <a:t>yumia deploy --provider gh-pages</a:t>
             </a:r>
-            <a:endParaRPr lang="en-US" sz="1150" dirty="0"/>
+            <a:endParaRPr lang="en-US" sz="1000" dirty="0"/>
           </a:p>
         </p:txBody>
       </p:sp>
@@ -3228,12 +3228,12 @@
         </p:nvSpPr>
         <p:spPr>
           <a:xfrm>
-            <a:off x="406390" y="4076700"/>
-            <a:ext cx="11378916" cy="654050"/>
+            <a:off x="406390" y="4381500"/>
+            <a:ext cx="11378916" cy="774700"/>
           </a:xfrm>
           <a:prstGeom prst="roundRect">
             <a:avLst>
-              <a:gd name="adj" fmla="val 11184"/>
+              <a:gd name="adj" fmla="val 9443"/>
             </a:avLst>
           </a:prstGeom>
           <a:solidFill>
@@ -3255,8 +3255,8 @@
         </p:nvSpPr>
         <p:spPr>
           <a:xfrm>
-            <a:off x="543550" y="4149852"/>
-            <a:ext cx="11104596" cy="274320"/>
+            <a:off x="589270" y="4527804"/>
+            <a:ext cx="11013156" cy="274320"/>
           </a:xfrm>
           <a:prstGeom prst="rect">
             <a:avLst/>
@@ -3294,8 +3294,8 @@
         </p:nvSpPr>
         <p:spPr>
           <a:xfrm>
-            <a:off x="543550" y="4469892"/>
-            <a:ext cx="11104596" cy="187706"/>
+            <a:off x="589270" y="4856988"/>
+            <a:ext cx="11013156" cy="182880"/>
           </a:xfrm>
           <a:prstGeom prst="rect">
             <a:avLst/>
@@ -3483,7 +3483,7 @@
         <p:spPr>
           <a:xfrm>
             <a:off x="406390" y="2019300"/>
-            <a:ext cx="5506578" cy="4089400"/>
+            <a:ext cx="5460858" cy="4089400"/>
           </a:xfrm>
           <a:prstGeom prst="roundRect">
             <a:avLst>
@@ -3510,7 +3510,7 @@
         <p:spPr>
           <a:xfrm>
             <a:off x="543550" y="2156460"/>
-            <a:ext cx="5232258" cy="365760"/>
+            <a:ext cx="5186538" cy="365760"/>
           </a:xfrm>
           <a:prstGeom prst="rect">
             <a:avLst/>
@@ -3548,8 +3548,8 @@
         </p:nvSpPr>
         <p:spPr>
           <a:xfrm>
-            <a:off x="6278728" y="2019300"/>
-            <a:ext cx="5506578" cy="4089400"/>
+            <a:off x="6324448" y="2019300"/>
+            <a:ext cx="5460858" cy="4089400"/>
           </a:xfrm>
           <a:prstGeom prst="roundRect">
             <a:avLst>
@@ -3575,8 +3575,8 @@
         </p:nvSpPr>
         <p:spPr>
           <a:xfrm>
-            <a:off x="6415888" y="2156460"/>
-            <a:ext cx="5232258" cy="365760"/>
+            <a:off x="6461608" y="2156460"/>
+            <a:ext cx="5186538" cy="365760"/>
           </a:xfrm>
           <a:prstGeom prst="rect">
             <a:avLst/>
@@ -3614,18 +3614,21 @@
         </p:nvSpPr>
         <p:spPr>
           <a:xfrm>
-            <a:off x="5958688" y="3899408"/>
-            <a:ext cx="274320" cy="274320"/>
-          </a:xfrm>
-          <a:prstGeom prst="roundRect">
-            <a:avLst>
-              <a:gd name="adj" fmla="val 50000"/>
-            </a:avLst>
+            <a:off x="5903824" y="3871976"/>
+            <a:ext cx="384048" cy="384048"/>
+          </a:xfrm>
+          <a:prstGeom prst="ellipse">
+            <a:avLst/>
           </a:prstGeom>
           <a:solidFill>
-            <a:srgbClr val="2E2E48"/>
+            <a:srgbClr val="151522"/>
           </a:solidFill>
-          <a:ln/>
+          <a:ln w="19050">
+            <a:solidFill>
+              <a:srgbClr val="FF2E88"/>
+            </a:solidFill>
+            <a:prstDash val="solid"/>
+          </a:ln>
         </p:spPr>
       </p:sp>
       <p:sp>
@@ -3636,26 +3639,26 @@
         </p:nvSpPr>
         <p:spPr>
           <a:xfrm>
-            <a:off x="5958688" y="3899408"/>
-            <a:ext cx="274320" cy="274320"/>
-          </a:xfrm>
-          <a:prstGeom prst="rect">
-            <a:avLst/>
-          </a:prstGeom>
-          <a:noFill/>
-          <a:ln/>
-        </p:spPr>
-        <p:txBody>
-          <a:bodyPr wrap="square" rtlCol="0" anchor="ctr"/>
+            <a:off x="5903824" y="3871976"/>
+            <a:ext cx="384048" cy="384048"/>
+          </a:xfrm>
+          <a:prstGeom prst="rect">
+            <a:avLst/>
+          </a:prstGeom>
+          <a:noFill/>
+          <a:ln/>
+        </p:spPr>
+        <p:txBody>
+          <a:bodyPr wrap="square" lIns="0" tIns="0" rIns="0" bIns="0" rtlCol="0" anchor="ctr"/>
           <a:lstStyle/>
           <a:p>
             <a:pPr algn="ctr" indent="0" marL="0">
               <a:buNone/>
             </a:pPr>
             <a:r>
-              <a:rPr lang="en-US" sz="1000" b="1" dirty="0">
-                <a:solidFill>
-                  <a:srgbClr val="A7A7B5"/>
+              <a:rPr lang="en-US" sz="1100" b="1" dirty="0">
+                <a:solidFill>
+                  <a:srgbClr val="FFFFFF"/>
                 </a:solidFill>
                 <a:latin typeface="Trebuchet MS" pitchFamily="34" charset="0"/>
                 <a:ea typeface="Trebuchet MS" pitchFamily="34" charset="-122"/>
@@ -3663,7 +3666,7 @@
               </a:rPr>
               <a:t>VS</a:t>
             </a:r>
-            <a:endParaRPr lang="en-US" sz="1000" dirty="0"/>
+            <a:endParaRPr lang="en-US" sz="1100" dirty="0"/>
           </a:p>
         </p:txBody>
       </p:sp>
@@ -3675,7 +3678,7 @@
         </p:nvSpPr>
         <p:spPr>
           <a:xfrm>
-            <a:off x="1775634" y="2552700"/>
+            <a:off x="1731185" y="2552700"/>
             <a:ext cx="2862072" cy="330200"/>
           </a:xfrm>
           <a:prstGeom prst="roundRect">
@@ -3702,7 +3705,7 @@
         </p:nvSpPr>
         <p:spPr>
           <a:xfrm>
-            <a:off x="1775634" y="2552700"/>
+            <a:off x="1731185" y="2552700"/>
             <a:ext cx="2862072" cy="330200"/>
           </a:xfrm>
           <a:prstGeom prst="rect">
@@ -3742,7 +3745,7 @@
         <p:spPr>
           <a:xfrm>
             <a:off x="584185" y="2971800"/>
-            <a:ext cx="5244969" cy="673100"/>
+            <a:ext cx="5156071" cy="673100"/>
           </a:xfrm>
           <a:prstGeom prst="rect">
             <a:avLst/>
@@ -3781,7 +3784,7 @@
         <p:spPr>
           <a:xfrm>
             <a:off x="584185" y="3733800"/>
-            <a:ext cx="5244969" cy="673100"/>
+            <a:ext cx="5156071" cy="673100"/>
           </a:xfrm>
           <a:prstGeom prst="rect">
             <a:avLst/>
@@ -3820,7 +3823,7 @@
         <p:spPr>
           <a:xfrm>
             <a:off x="584185" y="4495800"/>
-            <a:ext cx="5244969" cy="673100"/>
+            <a:ext cx="5156071" cy="673100"/>
           </a:xfrm>
           <a:prstGeom prst="rect">
             <a:avLst/>
@@ -3859,7 +3862,7 @@
         <p:spPr>
           <a:xfrm>
             <a:off x="584185" y="5257800"/>
-            <a:ext cx="5244969" cy="368300"/>
+            <a:ext cx="5156071" cy="368300"/>
           </a:xfrm>
           <a:prstGeom prst="rect">
             <a:avLst/>
@@ -3897,7 +3900,7 @@
         </p:nvSpPr>
         <p:spPr>
           <a:xfrm>
-            <a:off x="7654573" y="2552700"/>
+            <a:off x="7699022" y="2552700"/>
             <a:ext cx="2660904" cy="330200"/>
           </a:xfrm>
           <a:prstGeom prst="roundRect">
@@ -3924,7 +3927,7 @@
         </p:nvSpPr>
         <p:spPr>
           <a:xfrm>
-            <a:off x="7654573" y="2552700"/>
+            <a:off x="7699022" y="2552700"/>
             <a:ext cx="2660904" cy="330200"/>
           </a:xfrm>
           <a:prstGeom prst="rect">
@@ -3963,8 +3966,8 @@
         </p:nvSpPr>
         <p:spPr>
           <a:xfrm>
-            <a:off x="6362541" y="2971800"/>
-            <a:ext cx="5244969" cy="673100"/>
+            <a:off x="6451439" y="2971800"/>
+            <a:ext cx="5156071" cy="673100"/>
           </a:xfrm>
           <a:prstGeom prst="rect">
             <a:avLst/>
@@ -4002,8 +4005,8 @@
         </p:nvSpPr>
         <p:spPr>
           <a:xfrm>
-            <a:off x="6362541" y="3733800"/>
-            <a:ext cx="5244969" cy="673100"/>
+            <a:off x="6451439" y="3733800"/>
+            <a:ext cx="5156071" cy="673100"/>
           </a:xfrm>
           <a:prstGeom prst="rect">
             <a:avLst/>
@@ -4041,8 +4044,8 @@
         </p:nvSpPr>
         <p:spPr>
           <a:xfrm>
-            <a:off x="6362541" y="4495800"/>
-            <a:ext cx="5244969" cy="673100"/>
+            <a:off x="6451439" y="4495800"/>
+            <a:ext cx="5156071" cy="673100"/>
           </a:xfrm>
           <a:prstGeom prst="rect">
             <a:avLst/>
@@ -4080,8 +4083,8 @@
         </p:nvSpPr>
         <p:spPr>
           <a:xfrm>
-            <a:off x="6362541" y="5257800"/>
-            <a:ext cx="5244969" cy="673100"/>
+            <a:off x="6451439" y="5257800"/>
+            <a:ext cx="5156071" cy="673100"/>
           </a:xfrm>
           <a:prstGeom prst="rect">
             <a:avLst/>
@@ -5180,11 +5183,11 @@
         <p:spPr>
           <a:xfrm>
             <a:off x="406390" y="2019300"/>
-            <a:ext cx="5600560" cy="1524000"/>
+            <a:ext cx="5600560" cy="1803400"/>
           </a:xfrm>
           <a:prstGeom prst="roundRect">
             <a:avLst>
-              <a:gd name="adj" fmla="val 4800"/>
+              <a:gd name="adj" fmla="val 4056"/>
             </a:avLst>
           </a:prstGeom>
           <a:solidFill>
@@ -5207,7 +5210,7 @@
         <p:spPr>
           <a:xfrm>
             <a:off x="424678" y="2055876"/>
-            <a:ext cx="54864" cy="1450848"/>
+            <a:ext cx="54864" cy="1730248"/>
           </a:xfrm>
           <a:prstGeom prst="roundRect">
             <a:avLst>
@@ -5268,11 +5271,11 @@
         <p:spPr>
           <a:xfrm>
             <a:off x="634984" y="2705100"/>
-            <a:ext cx="5143371" cy="482600"/>
+            <a:ext cx="5143371" cy="762000"/>
           </a:xfrm>
           <a:prstGeom prst="roundRect">
             <a:avLst>
-              <a:gd name="adj" fmla="val 15158"/>
+              <a:gd name="adj" fmla="val 9600"/>
             </a:avLst>
           </a:prstGeom>
           <a:solidFill>
@@ -5369,24 +5372,24 @@
         </p:nvSpPr>
         <p:spPr>
           <a:xfrm>
-            <a:off x="817864" y="2997708"/>
-            <a:ext cx="4777611" cy="116840"/>
-          </a:xfrm>
-          <a:prstGeom prst="rect">
-            <a:avLst/>
-          </a:prstGeom>
-          <a:noFill/>
-          <a:ln/>
-        </p:spPr>
-        <p:txBody>
-          <a:bodyPr wrap="square" rtlCol="0" anchor="t"/>
+            <a:off x="836152" y="3034284"/>
+            <a:ext cx="4741035" cy="323088"/>
+          </a:xfrm>
+          <a:prstGeom prst="rect">
+            <a:avLst/>
+          </a:prstGeom>
+          <a:noFill/>
+          <a:ln/>
+        </p:spPr>
+        <p:txBody>
+          <a:bodyPr wrap="square" lIns="0" tIns="0" rIns="0" bIns="0" rtlCol="0" anchor="t"/>
           <a:lstStyle/>
           <a:p>
             <a:pPr indent="0" marL="0">
               <a:buNone/>
             </a:pPr>
             <a:r>
-              <a:rPr lang="en-US" sz="1150" dirty="0">
+              <a:rPr lang="en-US" sz="1000" dirty="0">
                 <a:solidFill>
                   <a:srgbClr val="00F0FF"/>
                 </a:solidFill>
@@ -5396,7 +5399,7 @@
               </a:rPr>
               <a:t>:::metric value="99%" label="Uptime" change="+1%" :::</a:t>
             </a:r>
-            <a:endParaRPr lang="en-US" sz="1150" dirty="0"/>
+            <a:endParaRPr lang="en-US" sz="1000" dirty="0"/>
           </a:p>
         </p:txBody>
       </p:sp>
@@ -5408,7 +5411,7 @@
         </p:nvSpPr>
         <p:spPr>
           <a:xfrm>
-            <a:off x="406390" y="3721100"/>
+            <a:off x="406390" y="4000500"/>
             <a:ext cx="5600560" cy="673100"/>
           </a:xfrm>
           <a:prstGeom prst="rect">
@@ -5448,11 +5451,11 @@
         <p:spPr>
           <a:xfrm>
             <a:off x="6184745" y="2019300"/>
-            <a:ext cx="5600560" cy="1524000"/>
+            <a:ext cx="5600560" cy="1803400"/>
           </a:xfrm>
           <a:prstGeom prst="roundRect">
             <a:avLst>
-              <a:gd name="adj" fmla="val 4800"/>
+              <a:gd name="adj" fmla="val 4056"/>
             </a:avLst>
           </a:prstGeom>
           <a:solidFill>
@@ -5475,7 +5478,7 @@
         <p:spPr>
           <a:xfrm>
             <a:off x="6203033" y="2055876"/>
-            <a:ext cx="54864" cy="1450848"/>
+            <a:ext cx="54864" cy="1730248"/>
           </a:xfrm>
           <a:prstGeom prst="roundRect">
             <a:avLst>
@@ -5536,11 +5539,11 @@
         <p:spPr>
           <a:xfrm>
             <a:off x="6413340" y="2705100"/>
-            <a:ext cx="5143371" cy="482600"/>
+            <a:ext cx="5143371" cy="762000"/>
           </a:xfrm>
           <a:prstGeom prst="roundRect">
             <a:avLst>
-              <a:gd name="adj" fmla="val 15158"/>
+              <a:gd name="adj" fmla="val 9600"/>
             </a:avLst>
           </a:prstGeom>
           <a:solidFill>
@@ -5637,24 +5640,24 @@
         </p:nvSpPr>
         <p:spPr>
           <a:xfrm>
-            <a:off x="6596220" y="2997708"/>
-            <a:ext cx="4777611" cy="116840"/>
-          </a:xfrm>
-          <a:prstGeom prst="rect">
-            <a:avLst/>
-          </a:prstGeom>
-          <a:noFill/>
-          <a:ln/>
-        </p:spPr>
-        <p:txBody>
-          <a:bodyPr wrap="square" rtlCol="0" anchor="t"/>
+            <a:off x="6614508" y="3034284"/>
+            <a:ext cx="4741035" cy="323088"/>
+          </a:xfrm>
+          <a:prstGeom prst="rect">
+            <a:avLst/>
+          </a:prstGeom>
+          <a:noFill/>
+          <a:ln/>
+        </p:spPr>
+        <p:txBody>
+          <a:bodyPr wrap="square" lIns="0" tIns="0" rIns="0" bIns="0" rtlCol="0" anchor="t"/>
           <a:lstStyle/>
           <a:p>
             <a:pPr indent="0" marL="0">
               <a:buNone/>
             </a:pPr>
             <a:r>
-              <a:rPr lang="en-US" sz="1150" dirty="0">
+              <a:rPr lang="en-US" sz="1000" dirty="0">
                 <a:solidFill>
                   <a:srgbClr val="00F0FF"/>
                 </a:solidFill>
@@ -5664,7 +5667,7 @@
               </a:rPr>
               <a:t>metric "99%" label="Uptime" diff="+1%"</a:t>
             </a:r>
-            <a:endParaRPr lang="en-US" sz="1150" dirty="0"/>
+            <a:endParaRPr lang="en-US" sz="1000" dirty="0"/>
           </a:p>
         </p:txBody>
       </p:sp>
@@ -5676,7 +5679,7 @@
         </p:nvSpPr>
         <p:spPr>
           <a:xfrm>
-            <a:off x="6184745" y="3721100"/>
+            <a:off x="6184745" y="4000500"/>
             <a:ext cx="5600560" cy="673100"/>
           </a:xfrm>
           <a:prstGeom prst="rect">
@@ -5715,12 +5718,12 @@
         </p:nvSpPr>
         <p:spPr>
           <a:xfrm>
-            <a:off x="406390" y="4572000"/>
-            <a:ext cx="11378916" cy="831850"/>
+            <a:off x="406390" y="4851400"/>
+            <a:ext cx="11378916" cy="965200"/>
           </a:xfrm>
           <a:prstGeom prst="roundRect">
             <a:avLst>
-              <a:gd name="adj" fmla="val 8794"/>
+              <a:gd name="adj" fmla="val 7579"/>
             </a:avLst>
           </a:prstGeom>
           <a:solidFill>
@@ -5742,8 +5745,8 @@
         </p:nvSpPr>
         <p:spPr>
           <a:xfrm>
-            <a:off x="543550" y="4645152"/>
-            <a:ext cx="11104596" cy="274320"/>
+            <a:off x="589270" y="4997704"/>
+            <a:ext cx="11013156" cy="274320"/>
           </a:xfrm>
           <a:prstGeom prst="rect">
             <a:avLst/>
@@ -5781,8 +5784,8 @@
         </p:nvSpPr>
         <p:spPr>
           <a:xfrm>
-            <a:off x="543550" y="4965192"/>
-            <a:ext cx="11104596" cy="365506"/>
+            <a:off x="589270" y="5326888"/>
+            <a:ext cx="11013156" cy="361696"/>
           </a:xfrm>
           <a:prstGeom prst="rect">
             <a:avLst/>
@@ -7337,11 +7340,11 @@
         <p:spPr>
           <a:xfrm>
             <a:off x="406390" y="4076700"/>
-            <a:ext cx="11378916" cy="654050"/>
+            <a:ext cx="11378916" cy="774700"/>
           </a:xfrm>
           <a:prstGeom prst="roundRect">
             <a:avLst>
-              <a:gd name="adj" fmla="val 11184"/>
+              <a:gd name="adj" fmla="val 9443"/>
             </a:avLst>
           </a:prstGeom>
           <a:solidFill>
@@ -7363,8 +7366,8 @@
         </p:nvSpPr>
         <p:spPr>
           <a:xfrm>
-            <a:off x="543550" y="4149852"/>
-            <a:ext cx="11104596" cy="274320"/>
+            <a:off x="589270" y="4223004"/>
+            <a:ext cx="11013156" cy="274320"/>
           </a:xfrm>
           <a:prstGeom prst="rect">
             <a:avLst/>
@@ -7402,8 +7405,8 @@
         </p:nvSpPr>
         <p:spPr>
           <a:xfrm>
-            <a:off x="543550" y="4469892"/>
-            <a:ext cx="11104596" cy="187706"/>
+            <a:off x="589270" y="4552188"/>
+            <a:ext cx="11013156" cy="182880"/>
           </a:xfrm>
           <a:prstGeom prst="rect">
             <a:avLst/>
@@ -7591,7 +7594,7 @@
         <p:spPr>
           <a:xfrm>
             <a:off x="406390" y="2019300"/>
-            <a:ext cx="5506578" cy="3479800"/>
+            <a:ext cx="5460858" cy="3479800"/>
           </a:xfrm>
           <a:prstGeom prst="roundRect">
             <a:avLst>
@@ -7618,7 +7621,7 @@
         <p:spPr>
           <a:xfrm>
             <a:off x="543550" y="2156460"/>
-            <a:ext cx="5232258" cy="365760"/>
+            <a:ext cx="5186538" cy="365760"/>
           </a:xfrm>
           <a:prstGeom prst="rect">
             <a:avLst/>
@@ -7656,8 +7659,8 @@
         </p:nvSpPr>
         <p:spPr>
           <a:xfrm>
-            <a:off x="6278728" y="2019300"/>
-            <a:ext cx="5506578" cy="3479800"/>
+            <a:off x="6324448" y="2019300"/>
+            <a:ext cx="5460858" cy="3479800"/>
           </a:xfrm>
           <a:prstGeom prst="roundRect">
             <a:avLst>
@@ -7683,8 +7686,8 @@
         </p:nvSpPr>
         <p:spPr>
           <a:xfrm>
-            <a:off x="6415888" y="2156460"/>
-            <a:ext cx="5232258" cy="365760"/>
+            <a:off x="6461608" y="2156460"/>
+            <a:ext cx="5186538" cy="365760"/>
           </a:xfrm>
           <a:prstGeom prst="rect">
             <a:avLst/>
@@ -7722,18 +7725,21 @@
         </p:nvSpPr>
         <p:spPr>
           <a:xfrm>
-            <a:off x="5958688" y="3594608"/>
-            <a:ext cx="274320" cy="274320"/>
-          </a:xfrm>
-          <a:prstGeom prst="roundRect">
-            <a:avLst>
-              <a:gd name="adj" fmla="val 50000"/>
-            </a:avLst>
+            <a:off x="5903824" y="3567176"/>
+            <a:ext cx="384048" cy="384048"/>
+          </a:xfrm>
+          <a:prstGeom prst="ellipse">
+            <a:avLst/>
           </a:prstGeom>
           <a:solidFill>
-            <a:srgbClr val="2E2E48"/>
+            <a:srgbClr val="151522"/>
           </a:solidFill>
-          <a:ln/>
+          <a:ln w="19050">
+            <a:solidFill>
+              <a:srgbClr val="FF2E88"/>
+            </a:solidFill>
+            <a:prstDash val="solid"/>
+          </a:ln>
         </p:spPr>
       </p:sp>
       <p:sp>
@@ -7744,26 +7750,26 @@
         </p:nvSpPr>
         <p:spPr>
           <a:xfrm>
-            <a:off x="5958688" y="3594608"/>
-            <a:ext cx="274320" cy="274320"/>
-          </a:xfrm>
-          <a:prstGeom prst="rect">
-            <a:avLst/>
-          </a:prstGeom>
-          <a:noFill/>
-          <a:ln/>
-        </p:spPr>
-        <p:txBody>
-          <a:bodyPr wrap="square" rtlCol="0" anchor="ctr"/>
+            <a:off x="5903824" y="3567176"/>
+            <a:ext cx="384048" cy="384048"/>
+          </a:xfrm>
+          <a:prstGeom prst="rect">
+            <a:avLst/>
+          </a:prstGeom>
+          <a:noFill/>
+          <a:ln/>
+        </p:spPr>
+        <p:txBody>
+          <a:bodyPr wrap="square" lIns="0" tIns="0" rIns="0" bIns="0" rtlCol="0" anchor="ctr"/>
           <a:lstStyle/>
           <a:p>
             <a:pPr algn="ctr" indent="0" marL="0">
               <a:buNone/>
             </a:pPr>
             <a:r>
-              <a:rPr lang="en-US" sz="1000" b="1" dirty="0">
-                <a:solidFill>
-                  <a:srgbClr val="A7A7B5"/>
+              <a:rPr lang="en-US" sz="1100" b="1" dirty="0">
+                <a:solidFill>
+                  <a:srgbClr val="FFFFFF"/>
                 </a:solidFill>
                 <a:latin typeface="Trebuchet MS" pitchFamily="34" charset="0"/>
                 <a:ea typeface="Trebuchet MS" pitchFamily="34" charset="-122"/>
@@ -7771,7 +7777,7 @@
               </a:rPr>
               <a:t>VS</a:t>
             </a:r>
-            <a:endParaRPr lang="en-US" sz="1000" dirty="0"/>
+            <a:endParaRPr lang="en-US" sz="1100" dirty="0"/>
           </a:p>
         </p:txBody>
       </p:sp>
@@ -7783,7 +7789,7 @@
         </p:nvSpPr>
         <p:spPr>
           <a:xfrm>
-            <a:off x="1606470" y="2552700"/>
+            <a:off x="1562021" y="2552700"/>
             <a:ext cx="3200400" cy="330200"/>
           </a:xfrm>
           <a:prstGeom prst="roundRect">
@@ -7810,7 +7816,7 @@
         </p:nvSpPr>
         <p:spPr>
           <a:xfrm>
-            <a:off x="1606470" y="2552700"/>
+            <a:off x="1562021" y="2552700"/>
             <a:ext cx="3200400" cy="330200"/>
           </a:xfrm>
           <a:prstGeom prst="rect">
@@ -7850,7 +7856,7 @@
         <p:spPr>
           <a:xfrm>
             <a:off x="584185" y="2971800"/>
-            <a:ext cx="5244969" cy="368300"/>
+            <a:ext cx="5156071" cy="368300"/>
           </a:xfrm>
           <a:prstGeom prst="rect">
             <a:avLst/>
@@ -7889,7 +7895,7 @@
         <p:spPr>
           <a:xfrm>
             <a:off x="584185" y="3429000"/>
-            <a:ext cx="5244969" cy="368300"/>
+            <a:ext cx="5156071" cy="673100"/>
           </a:xfrm>
           <a:prstGeom prst="rect">
             <a:avLst/>
@@ -7927,8 +7933,8 @@
         </p:nvSpPr>
         <p:spPr>
           <a:xfrm>
-            <a:off x="584185" y="3886200"/>
-            <a:ext cx="5244969" cy="368300"/>
+            <a:off x="584185" y="4191000"/>
+            <a:ext cx="5156071" cy="368300"/>
           </a:xfrm>
           <a:prstGeom prst="rect">
             <a:avLst/>
@@ -7966,8 +7972,8 @@
         </p:nvSpPr>
         <p:spPr>
           <a:xfrm>
-            <a:off x="584185" y="4343400"/>
-            <a:ext cx="5244969" cy="673100"/>
+            <a:off x="584185" y="4648200"/>
+            <a:ext cx="5156071" cy="673100"/>
           </a:xfrm>
           <a:prstGeom prst="rect">
             <a:avLst/>
@@ -8005,7 +8011,7 @@
         </p:nvSpPr>
         <p:spPr>
           <a:xfrm>
-            <a:off x="7503697" y="2552700"/>
+            <a:off x="7548146" y="2552700"/>
             <a:ext cx="2962656" cy="330200"/>
           </a:xfrm>
           <a:prstGeom prst="roundRect">
@@ -8032,7 +8038,7 @@
         </p:nvSpPr>
         <p:spPr>
           <a:xfrm>
-            <a:off x="7503697" y="2552700"/>
+            <a:off x="7548146" y="2552700"/>
             <a:ext cx="2962656" cy="330200"/>
           </a:xfrm>
           <a:prstGeom prst="rect">
@@ -8071,8 +8077,8 @@
         </p:nvSpPr>
         <p:spPr>
           <a:xfrm>
-            <a:off x="6362541" y="2971800"/>
-            <a:ext cx="5244969" cy="673100"/>
+            <a:off x="6451439" y="2971800"/>
+            <a:ext cx="5156071" cy="673100"/>
           </a:xfrm>
           <a:prstGeom prst="rect">
             <a:avLst/>
@@ -8110,8 +8116,8 @@
         </p:nvSpPr>
         <p:spPr>
           <a:xfrm>
-            <a:off x="6362541" y="3733800"/>
-            <a:ext cx="5244969" cy="368300"/>
+            <a:off x="6451439" y="3733800"/>
+            <a:ext cx="5156071" cy="368300"/>
           </a:xfrm>
           <a:prstGeom prst="rect">
             <a:avLst/>
@@ -8149,8 +8155,8 @@
         </p:nvSpPr>
         <p:spPr>
           <a:xfrm>
-            <a:off x="6362541" y="4191000"/>
-            <a:ext cx="5244969" cy="673100"/>
+            <a:off x="6451439" y="4191000"/>
+            <a:ext cx="5156071" cy="673100"/>
           </a:xfrm>
           <a:prstGeom prst="rect">
             <a:avLst/>
@@ -8188,8 +8194,8 @@
         </p:nvSpPr>
         <p:spPr>
           <a:xfrm>
-            <a:off x="6362541" y="4953000"/>
-            <a:ext cx="5244969" cy="368300"/>
+            <a:off x="6451439" y="4953000"/>
+            <a:ext cx="5156071" cy="368300"/>
           </a:xfrm>
           <a:prstGeom prst="rect">
             <a:avLst/>
@@ -8758,11 +8764,11 @@
         <p:spPr>
           <a:xfrm>
             <a:off x="406390" y="5003800"/>
-            <a:ext cx="11378916" cy="831850"/>
+            <a:ext cx="11378916" cy="965200"/>
           </a:xfrm>
           <a:prstGeom prst="roundRect">
             <a:avLst>
-              <a:gd name="adj" fmla="val 8794"/>
+              <a:gd name="adj" fmla="val 7579"/>
             </a:avLst>
           </a:prstGeom>
           <a:solidFill>
@@ -8784,8 +8790,8 @@
         </p:nvSpPr>
         <p:spPr>
           <a:xfrm>
-            <a:off x="543550" y="5076952"/>
-            <a:ext cx="11104596" cy="274320"/>
+            <a:off x="589270" y="5150104"/>
+            <a:ext cx="11013156" cy="274320"/>
           </a:xfrm>
           <a:prstGeom prst="rect">
             <a:avLst/>
@@ -8823,8 +8829,8 @@
         </p:nvSpPr>
         <p:spPr>
           <a:xfrm>
-            <a:off x="543550" y="5396992"/>
-            <a:ext cx="11104596" cy="365506"/>
+            <a:off x="589270" y="5479288"/>
+            <a:ext cx="11013156" cy="361696"/>
           </a:xfrm>
           <a:prstGeom prst="rect">
             <a:avLst/>
@@ -9050,8 +9056,8 @@
         </p:nvSpPr>
         <p:spPr>
           <a:xfrm>
-            <a:off x="4869778" y="2433168"/>
-            <a:ext cx="94313" cy="9144"/>
+            <a:off x="4188184" y="2902204"/>
+            <a:ext cx="129577" cy="9144"/>
           </a:xfrm>
           <a:prstGeom prst="line">
             <a:avLst/>
@@ -9073,8 +9079,8 @@
         </p:nvSpPr>
         <p:spPr>
           <a:xfrm>
-            <a:off x="4964091" y="2433168"/>
-            <a:ext cx="9144" cy="1091336"/>
+            <a:off x="4317761" y="2902204"/>
+            <a:ext cx="9144" cy="9144"/>
           </a:xfrm>
           <a:prstGeom prst="line">
             <a:avLst/>
@@ -9096,8 +9102,8 @@
         </p:nvSpPr>
         <p:spPr>
           <a:xfrm>
-            <a:off x="4964091" y="3524504"/>
-            <a:ext cx="94313" cy="9144"/>
+            <a:off x="4317761" y="2902204"/>
+            <a:ext cx="129577" cy="9144"/>
           </a:xfrm>
           <a:prstGeom prst="line">
             <a:avLst/>
@@ -9120,8 +9126,8 @@
         </p:nvSpPr>
         <p:spPr>
           <a:xfrm>
-            <a:off x="6001535" y="3524504"/>
-            <a:ext cx="94313" cy="9144"/>
+            <a:off x="5966270" y="2902204"/>
+            <a:ext cx="129577" cy="9144"/>
           </a:xfrm>
           <a:prstGeom prst="line">
             <a:avLst/>
@@ -9143,7 +9149,7 @@
         </p:nvSpPr>
         <p:spPr>
           <a:xfrm>
-            <a:off x="6095848" y="3524504"/>
+            <a:off x="6095848" y="2902204"/>
             <a:ext cx="9144" cy="9144"/>
           </a:xfrm>
           <a:prstGeom prst="line">
@@ -9166,8 +9172,8 @@
         </p:nvSpPr>
         <p:spPr>
           <a:xfrm>
-            <a:off x="6095848" y="3524504"/>
-            <a:ext cx="94313" cy="9144"/>
+            <a:off x="6095848" y="2902204"/>
+            <a:ext cx="129577" cy="9144"/>
           </a:xfrm>
           <a:prstGeom prst="line">
             <a:avLst/>
@@ -9190,8 +9196,8 @@
         </p:nvSpPr>
         <p:spPr>
           <a:xfrm>
-            <a:off x="7133291" y="3524504"/>
-            <a:ext cx="94313" cy="9144"/>
+            <a:off x="7744357" y="2902204"/>
+            <a:ext cx="129577" cy="9144"/>
           </a:xfrm>
           <a:prstGeom prst="line">
             <a:avLst/>
@@ -9213,8 +9219,8 @@
         </p:nvSpPr>
         <p:spPr>
           <a:xfrm flipV="1">
-            <a:off x="7227604" y="3160725"/>
-            <a:ext cx="9144" cy="363779"/>
+            <a:off x="7873934" y="2455883"/>
+            <a:ext cx="9144" cy="446321"/>
           </a:xfrm>
           <a:prstGeom prst="line">
             <a:avLst/>
@@ -9236,8 +9242,8 @@
         </p:nvSpPr>
         <p:spPr>
           <a:xfrm>
-            <a:off x="7227604" y="3160725"/>
-            <a:ext cx="94313" cy="9144"/>
+            <a:off x="7873934" y="2455883"/>
+            <a:ext cx="129577" cy="9144"/>
           </a:xfrm>
           <a:prstGeom prst="line">
             <a:avLst/>
@@ -9260,8 +9266,8 @@
         </p:nvSpPr>
         <p:spPr>
           <a:xfrm>
-            <a:off x="7133291" y="3524504"/>
-            <a:ext cx="94313" cy="9144"/>
+            <a:off x="7744357" y="2902204"/>
+            <a:ext cx="129577" cy="9144"/>
           </a:xfrm>
           <a:prstGeom prst="line">
             <a:avLst/>
@@ -9283,7 +9289,7 @@
         </p:nvSpPr>
         <p:spPr>
           <a:xfrm>
-            <a:off x="7227604" y="3524504"/>
+            <a:off x="7873934" y="2902204"/>
             <a:ext cx="9144" cy="9144"/>
           </a:xfrm>
           <a:prstGeom prst="line">
@@ -9306,8 +9312,8 @@
         </p:nvSpPr>
         <p:spPr>
           <a:xfrm>
-            <a:off x="7227604" y="3524504"/>
-            <a:ext cx="94313" cy="9144"/>
+            <a:off x="7873934" y="2902204"/>
+            <a:ext cx="129577" cy="9144"/>
           </a:xfrm>
           <a:prstGeom prst="line">
             <a:avLst/>
@@ -9330,8 +9336,8 @@
         </p:nvSpPr>
         <p:spPr>
           <a:xfrm>
-            <a:off x="7133291" y="3524504"/>
-            <a:ext cx="94313" cy="9144"/>
+            <a:off x="7744357" y="2902204"/>
+            <a:ext cx="129577" cy="9144"/>
           </a:xfrm>
           <a:prstGeom prst="line">
             <a:avLst/>
@@ -9353,8 +9359,8 @@
         </p:nvSpPr>
         <p:spPr>
           <a:xfrm>
-            <a:off x="7227604" y="3524504"/>
-            <a:ext cx="9144" cy="363779"/>
+            <a:off x="7873934" y="2902204"/>
+            <a:ext cx="9144" cy="446321"/>
           </a:xfrm>
           <a:prstGeom prst="line">
             <a:avLst/>
@@ -9376,8 +9382,8 @@
         </p:nvSpPr>
         <p:spPr>
           <a:xfrm>
-            <a:off x="7227604" y="3888283"/>
-            <a:ext cx="94313" cy="9144"/>
+            <a:off x="7873934" y="3348525"/>
+            <a:ext cx="129577" cy="9144"/>
           </a:xfrm>
           <a:prstGeom prst="line">
             <a:avLst/>
@@ -9400,12 +9406,12 @@
         </p:nvSpPr>
         <p:spPr>
           <a:xfrm>
-            <a:off x="3926648" y="2311908"/>
-            <a:ext cx="943130" cy="242519"/>
+            <a:off x="2669251" y="2758229"/>
+            <a:ext cx="1518932" cy="287949"/>
           </a:xfrm>
           <a:prstGeom prst="roundRect">
             <a:avLst>
-              <a:gd name="adj" fmla="val 30163"/>
+              <a:gd name="adj" fmla="val 25404"/>
             </a:avLst>
           </a:prstGeom>
           <a:solidFill>
@@ -9427,24 +9433,24 @@
         </p:nvSpPr>
         <p:spPr>
           <a:xfrm>
-            <a:off x="3981512" y="2366772"/>
-            <a:ext cx="833402" cy="132791"/>
-          </a:xfrm>
-          <a:prstGeom prst="rect">
-            <a:avLst/>
-          </a:prstGeom>
-          <a:noFill/>
-          <a:ln/>
-        </p:spPr>
-        <p:txBody>
-          <a:bodyPr wrap="square" rtlCol="0" anchor="ctr"/>
+            <a:off x="2742403" y="2813093"/>
+            <a:ext cx="1372628" cy="178221"/>
+          </a:xfrm>
+          <a:prstGeom prst="rect">
+            <a:avLst/>
+          </a:prstGeom>
+          <a:noFill/>
+          <a:ln/>
+        </p:spPr>
+        <p:txBody>
+          <a:bodyPr wrap="square" lIns="0" tIns="0" rIns="0" bIns="0" rtlCol="0" anchor="ctr"/>
           <a:lstStyle/>
           <a:p>
             <a:pPr algn="ctr" indent="0" marL="0">
               <a:buNone/>
             </a:pPr>
             <a:r>
-              <a:rPr lang="en-US" sz="1100" b="1" dirty="0">
+              <a:rPr lang="en-US" sz="1200" b="1" dirty="0">
                 <a:solidFill>
                   <a:srgbClr val="FFFFFF"/>
                 </a:solidFill>
@@ -9452,9 +9458,9 @@
                 <a:ea typeface="Trebuchet MS" pitchFamily="34" charset="-122"/>
                 <a:cs typeface="Trebuchet MS" pitchFamily="34" charset="-120"/>
               </a:rPr>
-              <a:t>Sorgente Yu…</a:t>
-            </a:r>
-            <a:endParaRPr lang="en-US" sz="1100" dirty="0"/>
+              <a:t>Sorgente Yumia</a:t>
+            </a:r>
+            <a:endParaRPr lang="en-US" sz="1200" dirty="0"/>
           </a:p>
         </p:txBody>
       </p:sp>
@@ -9466,12 +9472,12 @@
         </p:nvSpPr>
         <p:spPr>
           <a:xfrm>
-            <a:off x="5058404" y="3403244"/>
-            <a:ext cx="943130" cy="242519"/>
+            <a:off x="4447338" y="2758229"/>
+            <a:ext cx="1518932" cy="287949"/>
           </a:xfrm>
           <a:prstGeom prst="roundRect">
             <a:avLst>
-              <a:gd name="adj" fmla="val 30163"/>
+              <a:gd name="adj" fmla="val 25404"/>
             </a:avLst>
           </a:prstGeom>
           <a:solidFill>
@@ -9493,24 +9499,24 @@
         </p:nvSpPr>
         <p:spPr>
           <a:xfrm>
-            <a:off x="5113268" y="3458108"/>
-            <a:ext cx="833402" cy="132791"/>
-          </a:xfrm>
-          <a:prstGeom prst="rect">
-            <a:avLst/>
-          </a:prstGeom>
-          <a:noFill/>
-          <a:ln/>
-        </p:spPr>
-        <p:txBody>
-          <a:bodyPr wrap="square" rtlCol="0" anchor="ctr"/>
+            <a:off x="4520490" y="2813093"/>
+            <a:ext cx="1372628" cy="178221"/>
+          </a:xfrm>
+          <a:prstGeom prst="rect">
+            <a:avLst/>
+          </a:prstGeom>
+          <a:noFill/>
+          <a:ln/>
+        </p:spPr>
+        <p:txBody>
+          <a:bodyPr wrap="square" lIns="0" tIns="0" rIns="0" bIns="0" rtlCol="0" anchor="ctr"/>
           <a:lstStyle/>
           <a:p>
             <a:pPr algn="ctr" indent="0" marL="0">
               <a:buNone/>
             </a:pPr>
             <a:r>
-              <a:rPr lang="en-US" sz="1100" b="1" dirty="0">
+              <a:rPr lang="en-US" sz="1200" b="1" dirty="0">
                 <a:solidFill>
                   <a:srgbClr val="FFFFFF"/>
                 </a:solidFill>
@@ -9518,9 +9524,9 @@
                 <a:ea typeface="Trebuchet MS" pitchFamily="34" charset="-122"/>
                 <a:cs typeface="Trebuchet MS" pitchFamily="34" charset="-120"/>
               </a:rPr>
-              <a:t>AST Semanti…</a:t>
-            </a:r>
-            <a:endParaRPr lang="en-US" sz="1100" dirty="0"/>
+              <a:t>AST Semantico</a:t>
+            </a:r>
+            <a:endParaRPr lang="en-US" sz="1200" dirty="0"/>
           </a:p>
         </p:txBody>
       </p:sp>
@@ -9532,12 +9538,12 @@
         </p:nvSpPr>
         <p:spPr>
           <a:xfrm>
-            <a:off x="6190161" y="3403244"/>
-            <a:ext cx="943130" cy="242519"/>
+            <a:off x="6225425" y="2758229"/>
+            <a:ext cx="1518932" cy="287949"/>
           </a:xfrm>
           <a:prstGeom prst="roundRect">
             <a:avLst>
-              <a:gd name="adj" fmla="val 30163"/>
+              <a:gd name="adj" fmla="val 25404"/>
             </a:avLst>
           </a:prstGeom>
           <a:solidFill>
@@ -9545,7 +9551,7 @@
           </a:solidFill>
           <a:ln w="25400">
             <a:solidFill>
-              <a:srgbClr val="7B61FF"/>
+              <a:srgbClr val="FFE600"/>
             </a:solidFill>
             <a:prstDash val="solid"/>
           </a:ln>
@@ -9559,24 +9565,24 @@
         </p:nvSpPr>
         <p:spPr>
           <a:xfrm>
-            <a:off x="6245025" y="3458108"/>
-            <a:ext cx="833402" cy="132791"/>
-          </a:xfrm>
-          <a:prstGeom prst="rect">
-            <a:avLst/>
-          </a:prstGeom>
-          <a:noFill/>
-          <a:ln/>
-        </p:spPr>
-        <p:txBody>
-          <a:bodyPr wrap="square" rtlCol="0" anchor="ctr"/>
+            <a:off x="6298577" y="2813093"/>
+            <a:ext cx="1372628" cy="178221"/>
+          </a:xfrm>
+          <a:prstGeom prst="rect">
+            <a:avLst/>
+          </a:prstGeom>
+          <a:noFill/>
+          <a:ln/>
+        </p:spPr>
+        <p:txBody>
+          <a:bodyPr wrap="square" lIns="0" tIns="0" rIns="0" bIns="0" rtlCol="0" anchor="ctr"/>
           <a:lstStyle/>
           <a:p>
             <a:pPr algn="ctr" indent="0" marL="0">
               <a:buNone/>
             </a:pPr>
             <a:r>
-              <a:rPr lang="en-US" sz="1100" b="1" dirty="0">
+              <a:rPr lang="en-US" sz="1200" b="1" dirty="0">
                 <a:solidFill>
                   <a:srgbClr val="FFFFFF"/>
                 </a:solidFill>
@@ -9584,9 +9590,9 @@
                 <a:ea typeface="Trebuchet MS" pitchFamily="34" charset="-122"/>
                 <a:cs typeface="Trebuchet MS" pitchFamily="34" charset="-120"/>
               </a:rPr>
-              <a:t>Design Syst…</a:t>
-            </a:r>
-            <a:endParaRPr lang="en-US" sz="1100" dirty="0"/>
+              <a:t>Design System</a:t>
+            </a:r>
+            <a:endParaRPr lang="en-US" sz="1200" dirty="0"/>
           </a:p>
         </p:txBody>
       </p:sp>
@@ -9598,12 +9604,12 @@
         </p:nvSpPr>
         <p:spPr>
           <a:xfrm>
-            <a:off x="7321917" y="3039466"/>
-            <a:ext cx="943130" cy="242519"/>
+            <a:off x="8003512" y="2311908"/>
+            <a:ext cx="1518932" cy="287949"/>
           </a:xfrm>
           <a:prstGeom prst="roundRect">
             <a:avLst>
-              <a:gd name="adj" fmla="val 30163"/>
+              <a:gd name="adj" fmla="val 25404"/>
             </a:avLst>
           </a:prstGeom>
           <a:solidFill>
@@ -9611,7 +9617,7 @@
           </a:solidFill>
           <a:ln w="25400">
             <a:solidFill>
-              <a:srgbClr val="7B61FF"/>
+              <a:srgbClr val="00FF9F"/>
             </a:solidFill>
             <a:prstDash val="solid"/>
           </a:ln>
@@ -9625,24 +9631,24 @@
         </p:nvSpPr>
         <p:spPr>
           <a:xfrm>
-            <a:off x="7376781" y="3094330"/>
-            <a:ext cx="833402" cy="132791"/>
-          </a:xfrm>
-          <a:prstGeom prst="rect">
-            <a:avLst/>
-          </a:prstGeom>
-          <a:noFill/>
-          <a:ln/>
-        </p:spPr>
-        <p:txBody>
-          <a:bodyPr wrap="square" rtlCol="0" anchor="ctr"/>
+            <a:off x="8076664" y="2366772"/>
+            <a:ext cx="1372628" cy="178221"/>
+          </a:xfrm>
+          <a:prstGeom prst="rect">
+            <a:avLst/>
+          </a:prstGeom>
+          <a:noFill/>
+          <a:ln/>
+        </p:spPr>
+        <p:txBody>
+          <a:bodyPr wrap="square" lIns="0" tIns="0" rIns="0" bIns="0" rtlCol="0" anchor="ctr"/>
           <a:lstStyle/>
           <a:p>
             <a:pPr algn="ctr" indent="0" marL="0">
               <a:buNone/>
             </a:pPr>
             <a:r>
-              <a:rPr lang="en-US" sz="1100" b="1" dirty="0">
+              <a:rPr lang="en-US" sz="1200" b="1" dirty="0">
                 <a:solidFill>
                   <a:srgbClr val="FFFFFF"/>
                 </a:solidFill>
@@ -9650,9 +9656,9 @@
                 <a:ea typeface="Trebuchet MS" pitchFamily="34" charset="-122"/>
                 <a:cs typeface="Trebuchet MS" pitchFamily="34" charset="-120"/>
               </a:rPr>
-              <a:t>HTML Intera…</a:t>
-            </a:r>
-            <a:endParaRPr lang="en-US" sz="1100" dirty="0"/>
+              <a:t>HTML Interattivo</a:t>
+            </a:r>
+            <a:endParaRPr lang="en-US" sz="1200" dirty="0"/>
           </a:p>
         </p:txBody>
       </p:sp>
@@ -9664,144 +9670,12 @@
         </p:nvSpPr>
         <p:spPr>
           <a:xfrm>
-            <a:off x="7321917" y="3403244"/>
-            <a:ext cx="943130" cy="242519"/>
+            <a:off x="8003512" y="2758229"/>
+            <a:ext cx="1518932" cy="287949"/>
           </a:xfrm>
           <a:prstGeom prst="roundRect">
             <a:avLst>
-              <a:gd name="adj" fmla="val 30163"/>
-            </a:avLst>
-          </a:prstGeom>
-          <a:solidFill>
-            <a:srgbClr val="151522"/>
-          </a:solidFill>
-          <a:ln w="25400">
-            <a:solidFill>
-              <a:srgbClr val="7B61FF"/>
-            </a:solidFill>
-            <a:prstDash val="solid"/>
-          </a:ln>
-        </p:spPr>
-      </p:sp>
-      <p:sp>
-        <p:nvSpPr>
-          <p:cNvPr id="29" name="Text 27"/>
-          <p:cNvSpPr/>
-          <p:nvPr/>
-        </p:nvSpPr>
-        <p:spPr>
-          <a:xfrm>
-            <a:off x="7376781" y="3458108"/>
-            <a:ext cx="833402" cy="132791"/>
-          </a:xfrm>
-          <a:prstGeom prst="rect">
-            <a:avLst/>
-          </a:prstGeom>
-          <a:noFill/>
-          <a:ln/>
-        </p:spPr>
-        <p:txBody>
-          <a:bodyPr wrap="square" rtlCol="0" anchor="ctr"/>
-          <a:lstStyle/>
-          <a:p>
-            <a:pPr algn="ctr" indent="0" marL="0">
-              <a:buNone/>
-            </a:pPr>
-            <a:r>
-              <a:rPr lang="en-US" sz="1100" b="1" dirty="0">
-                <a:solidFill>
-                  <a:srgbClr val="FFFFFF"/>
-                </a:solidFill>
-                <a:latin typeface="Trebuchet MS" pitchFamily="34" charset="0"/>
-                <a:ea typeface="Trebuchet MS" pitchFamily="34" charset="-122"/>
-                <a:cs typeface="Trebuchet MS" pitchFamily="34" charset="-120"/>
-              </a:rPr>
-              <a:t>PowerPoint …</a:t>
-            </a:r>
-            <a:endParaRPr lang="en-US" sz="1100" dirty="0"/>
-          </a:p>
-        </p:txBody>
-      </p:sp>
-      <p:sp>
-        <p:nvSpPr>
-          <p:cNvPr id="30" name="Shape 28"/>
-          <p:cNvSpPr/>
-          <p:nvPr/>
-        </p:nvSpPr>
-        <p:spPr>
-          <a:xfrm>
-            <a:off x="7321917" y="3767023"/>
-            <a:ext cx="943130" cy="242519"/>
-          </a:xfrm>
-          <a:prstGeom prst="roundRect">
-            <a:avLst>
-              <a:gd name="adj" fmla="val 30163"/>
-            </a:avLst>
-          </a:prstGeom>
-          <a:solidFill>
-            <a:srgbClr val="151522"/>
-          </a:solidFill>
-          <a:ln w="25400">
-            <a:solidFill>
-              <a:srgbClr val="7B61FF"/>
-            </a:solidFill>
-            <a:prstDash val="solid"/>
-          </a:ln>
-        </p:spPr>
-      </p:sp>
-      <p:sp>
-        <p:nvSpPr>
-          <p:cNvPr id="31" name="Text 29"/>
-          <p:cNvSpPr/>
-          <p:nvPr/>
-        </p:nvSpPr>
-        <p:spPr>
-          <a:xfrm>
-            <a:off x="7376781" y="3821887"/>
-            <a:ext cx="833402" cy="132791"/>
-          </a:xfrm>
-          <a:prstGeom prst="rect">
-            <a:avLst/>
-          </a:prstGeom>
-          <a:noFill/>
-          <a:ln/>
-        </p:spPr>
-        <p:txBody>
-          <a:bodyPr wrap="square" rtlCol="0" anchor="ctr"/>
-          <a:lstStyle/>
-          <a:p>
-            <a:pPr algn="ctr" indent="0" marL="0">
-              <a:buNone/>
-            </a:pPr>
-            <a:r>
-              <a:rPr lang="en-US" sz="1100" b="1" dirty="0">
-                <a:solidFill>
-                  <a:srgbClr val="FFFFFF"/>
-                </a:solidFill>
-                <a:latin typeface="Trebuchet MS" pitchFamily="34" charset="0"/>
-                <a:ea typeface="Trebuchet MS" pitchFamily="34" charset="-122"/>
-                <a:cs typeface="Trebuchet MS" pitchFamily="34" charset="-120"/>
-              </a:rPr>
-              <a:t>PDF Vettori…</a:t>
-            </a:r>
-            <a:endParaRPr lang="en-US" sz="1100" dirty="0"/>
-          </a:p>
-        </p:txBody>
-      </p:sp>
-      <p:sp>
-        <p:nvSpPr>
-          <p:cNvPr id="32" name="Shape 30"/>
-          <p:cNvSpPr/>
-          <p:nvPr/>
-        </p:nvSpPr>
-        <p:spPr>
-          <a:xfrm>
-            <a:off x="3926648" y="2675687"/>
-            <a:ext cx="943130" cy="242519"/>
-          </a:xfrm>
-          <a:prstGeom prst="roundRect">
-            <a:avLst>
-              <a:gd name="adj" fmla="val 30163"/>
+              <a:gd name="adj" fmla="val 25404"/>
             </a:avLst>
           </a:prstGeom>
           <a:solidFill>
@@ -9817,30 +9691,30 @@
       </p:sp>
       <p:sp>
         <p:nvSpPr>
-          <p:cNvPr id="33" name="Text 31"/>
-          <p:cNvSpPr/>
-          <p:nvPr/>
-        </p:nvSpPr>
-        <p:spPr>
-          <a:xfrm>
-            <a:off x="3981512" y="2730551"/>
-            <a:ext cx="833402" cy="132791"/>
-          </a:xfrm>
-          <a:prstGeom prst="rect">
-            <a:avLst/>
-          </a:prstGeom>
-          <a:noFill/>
-          <a:ln/>
-        </p:spPr>
-        <p:txBody>
-          <a:bodyPr wrap="square" rtlCol="0" anchor="ctr"/>
+          <p:cNvPr id="29" name="Text 27"/>
+          <p:cNvSpPr/>
+          <p:nvPr/>
+        </p:nvSpPr>
+        <p:spPr>
+          <a:xfrm>
+            <a:off x="8076664" y="2813093"/>
+            <a:ext cx="1372628" cy="178221"/>
+          </a:xfrm>
+          <a:prstGeom prst="rect">
+            <a:avLst/>
+          </a:prstGeom>
+          <a:noFill/>
+          <a:ln/>
+        </p:spPr>
+        <p:txBody>
+          <a:bodyPr wrap="square" lIns="0" tIns="0" rIns="0" bIns="0" rtlCol="0" anchor="ctr"/>
           <a:lstStyle/>
           <a:p>
             <a:pPr algn="ctr" indent="0" marL="0">
               <a:buNone/>
             </a:pPr>
             <a:r>
-              <a:rPr lang="en-US" sz="1100" b="1" dirty="0">
+              <a:rPr lang="en-US" sz="1200" b="1" dirty="0">
                 <a:solidFill>
                   <a:srgbClr val="FFFFFF"/>
                 </a:solidFill>
@@ -9848,26 +9722,26 @@
                 <a:ea typeface="Trebuchet MS" pitchFamily="34" charset="-122"/>
                 <a:cs typeface="Trebuchet MS" pitchFamily="34" charset="-120"/>
               </a:rPr>
-              <a:t>Sorgente</a:t>
-            </a:r>
-            <a:endParaRPr lang="en-US" sz="1100" dirty="0"/>
-          </a:p>
-        </p:txBody>
-      </p:sp>
-      <p:sp>
-        <p:nvSpPr>
-          <p:cNvPr id="34" name="Shape 32"/>
-          <p:cNvSpPr/>
-          <p:nvPr/>
-        </p:nvSpPr>
-        <p:spPr>
-          <a:xfrm>
-            <a:off x="3926648" y="3039466"/>
-            <a:ext cx="943130" cy="242519"/>
+              <a:t>PowerPoint PPTX</a:t>
+            </a:r>
+            <a:endParaRPr lang="en-US" sz="1200" dirty="0"/>
+          </a:p>
+        </p:txBody>
+      </p:sp>
+      <p:sp>
+        <p:nvSpPr>
+          <p:cNvPr id="30" name="Shape 28"/>
+          <p:cNvSpPr/>
+          <p:nvPr/>
+        </p:nvSpPr>
+        <p:spPr>
+          <a:xfrm>
+            <a:off x="8003512" y="3204551"/>
+            <a:ext cx="1518932" cy="287949"/>
           </a:xfrm>
           <a:prstGeom prst="roundRect">
             <a:avLst>
-              <a:gd name="adj" fmla="val 30163"/>
+              <a:gd name="adj" fmla="val 25404"/>
             </a:avLst>
           </a:prstGeom>
           <a:solidFill>
@@ -9875,7 +9749,7 @@
           </a:solidFill>
           <a:ln w="25400">
             <a:solidFill>
-              <a:srgbClr val="7B61FF"/>
+              <a:srgbClr val="FF0055"/>
             </a:solidFill>
             <a:prstDash val="solid"/>
           </a:ln>
@@ -9883,30 +9757,30 @@
       </p:sp>
       <p:sp>
         <p:nvSpPr>
-          <p:cNvPr id="35" name="Text 33"/>
-          <p:cNvSpPr/>
-          <p:nvPr/>
-        </p:nvSpPr>
-        <p:spPr>
-          <a:xfrm>
-            <a:off x="3981512" y="3094330"/>
-            <a:ext cx="833402" cy="132791"/>
-          </a:xfrm>
-          <a:prstGeom prst="rect">
-            <a:avLst/>
-          </a:prstGeom>
-          <a:noFill/>
-          <a:ln/>
-        </p:spPr>
-        <p:txBody>
-          <a:bodyPr wrap="square" rtlCol="0" anchor="ctr"/>
+          <p:cNvPr id="31" name="Text 29"/>
+          <p:cNvSpPr/>
+          <p:nvPr/>
+        </p:nvSpPr>
+        <p:spPr>
+          <a:xfrm>
+            <a:off x="8076664" y="3259415"/>
+            <a:ext cx="1372628" cy="178221"/>
+          </a:xfrm>
+          <a:prstGeom prst="rect">
+            <a:avLst/>
+          </a:prstGeom>
+          <a:noFill/>
+          <a:ln/>
+        </p:spPr>
+        <p:txBody>
+          <a:bodyPr wrap="square" lIns="0" tIns="0" rIns="0" bIns="0" rtlCol="0" anchor="ctr"/>
           <a:lstStyle/>
           <a:p>
             <a:pPr algn="ctr" indent="0" marL="0">
               <a:buNone/>
             </a:pPr>
             <a:r>
-              <a:rPr lang="en-US" sz="1100" b="1" dirty="0">
+              <a:rPr lang="en-US" sz="1200" b="1" dirty="0">
                 <a:solidFill>
                   <a:srgbClr val="FFFFFF"/>
                 </a:solidFill>
@@ -9914,92 +9788,26 @@
                 <a:ea typeface="Trebuchet MS" pitchFamily="34" charset="-122"/>
                 <a:cs typeface="Trebuchet MS" pitchFamily="34" charset="-120"/>
               </a:rPr>
-              <a:t>AST</a:t>
-            </a:r>
-            <a:endParaRPr lang="en-US" sz="1100" dirty="0"/>
-          </a:p>
-        </p:txBody>
-      </p:sp>
-      <p:sp>
-        <p:nvSpPr>
-          <p:cNvPr id="36" name="Shape 34"/>
-          <p:cNvSpPr/>
-          <p:nvPr/>
-        </p:nvSpPr>
-        <p:spPr>
-          <a:xfrm>
-            <a:off x="3926648" y="3403244"/>
-            <a:ext cx="943130" cy="242519"/>
+              <a:t>PDF Vettoriale</a:t>
+            </a:r>
+            <a:endParaRPr lang="en-US" sz="1200" dirty="0"/>
+          </a:p>
+        </p:txBody>
+      </p:sp>
+      <p:sp>
+        <p:nvSpPr>
+          <p:cNvPr id="32" name="Shape 30"/>
+          <p:cNvSpPr/>
+          <p:nvPr/>
+        </p:nvSpPr>
+        <p:spPr>
+          <a:xfrm>
+            <a:off x="406390" y="3670300"/>
+            <a:ext cx="11378916" cy="965200"/>
           </a:xfrm>
           <a:prstGeom prst="roundRect">
             <a:avLst>
-              <a:gd name="adj" fmla="val 30163"/>
-            </a:avLst>
-          </a:prstGeom>
-          <a:solidFill>
-            <a:srgbClr val="151522"/>
-          </a:solidFill>
-          <a:ln w="25400">
-            <a:solidFill>
-              <a:srgbClr val="FFE600"/>
-            </a:solidFill>
-            <a:prstDash val="solid"/>
-          </a:ln>
-        </p:spPr>
-      </p:sp>
-      <p:sp>
-        <p:nvSpPr>
-          <p:cNvPr id="37" name="Text 35"/>
-          <p:cNvSpPr/>
-          <p:nvPr/>
-        </p:nvSpPr>
-        <p:spPr>
-          <a:xfrm>
-            <a:off x="3981512" y="3458108"/>
-            <a:ext cx="833402" cy="132791"/>
-          </a:xfrm>
-          <a:prstGeom prst="rect">
-            <a:avLst/>
-          </a:prstGeom>
-          <a:noFill/>
-          <a:ln/>
-        </p:spPr>
-        <p:txBody>
-          <a:bodyPr wrap="square" rtlCol="0" anchor="ctr"/>
-          <a:lstStyle/>
-          <a:p>
-            <a:pPr algn="ctr" indent="0" marL="0">
-              <a:buNone/>
-            </a:pPr>
-            <a:r>
-              <a:rPr lang="en-US" sz="1100" b="1" dirty="0">
-                <a:solidFill>
-                  <a:srgbClr val="FFFFFF"/>
-                </a:solidFill>
-                <a:latin typeface="Trebuchet MS" pitchFamily="34" charset="0"/>
-                <a:ea typeface="Trebuchet MS" pitchFamily="34" charset="-122"/>
-                <a:cs typeface="Trebuchet MS" pitchFamily="34" charset="-120"/>
-              </a:rPr>
-              <a:t>Design</a:t>
-            </a:r>
-            <a:endParaRPr lang="en-US" sz="1100" dirty="0"/>
-          </a:p>
-        </p:txBody>
-      </p:sp>
-      <p:sp>
-        <p:nvSpPr>
-          <p:cNvPr id="38" name="Shape 36"/>
-          <p:cNvSpPr/>
-          <p:nvPr/>
-        </p:nvSpPr>
-        <p:spPr>
-          <a:xfrm>
-            <a:off x="3926648" y="3767023"/>
-            <a:ext cx="943130" cy="242519"/>
-          </a:xfrm>
-          <a:prstGeom prst="roundRect">
-            <a:avLst>
-              <a:gd name="adj" fmla="val 30163"/>
+              <a:gd name="adj" fmla="val 7579"/>
             </a:avLst>
           </a:prstGeom>
           <a:solidFill>
@@ -10015,14 +9823,14 @@
       </p:sp>
       <p:sp>
         <p:nvSpPr>
-          <p:cNvPr id="39" name="Text 37"/>
-          <p:cNvSpPr/>
-          <p:nvPr/>
-        </p:nvSpPr>
-        <p:spPr>
-          <a:xfrm>
-            <a:off x="3981512" y="3821887"/>
-            <a:ext cx="833402" cy="132791"/>
+          <p:cNvPr id="33" name="Text 31"/>
+          <p:cNvSpPr/>
+          <p:nvPr/>
+        </p:nvSpPr>
+        <p:spPr>
+          <a:xfrm>
+            <a:off x="589270" y="3816604"/>
+            <a:ext cx="11013156" cy="274320"/>
           </a:xfrm>
           <a:prstGeom prst="rect">
             <a:avLst/>
@@ -10034,216 +9842,18 @@
           <a:bodyPr wrap="square" rtlCol="0" anchor="ctr"/>
           <a:lstStyle/>
           <a:p>
-            <a:pPr algn="ctr" indent="0" marL="0">
-              <a:buNone/>
-            </a:pPr>
-            <a:r>
-              <a:rPr lang="en-US" sz="1100" b="1" dirty="0">
-                <a:solidFill>
-                  <a:srgbClr val="FFFFFF"/>
+            <a:pPr indent="0" marL="0">
+              <a:buNone/>
+            </a:pPr>
+            <a:r>
+              <a:rPr lang="en-US" sz="1300" b="1" dirty="0">
+                <a:solidFill>
+                  <a:srgbClr val="00FF9F"/>
                 </a:solidFill>
                 <a:latin typeface="Trebuchet MS" pitchFamily="34" charset="0"/>
                 <a:ea typeface="Trebuchet MS" pitchFamily="34" charset="-122"/>
                 <a:cs typeface="Trebuchet MS" pitchFamily="34" charset="-120"/>
               </a:rPr>
-              <a:t>HTML</a:t>
-            </a:r>
-            <a:endParaRPr lang="en-US" sz="1100" dirty="0"/>
-          </a:p>
-        </p:txBody>
-      </p:sp>
-      <p:sp>
-        <p:nvSpPr>
-          <p:cNvPr id="40" name="Shape 38"/>
-          <p:cNvSpPr/>
-          <p:nvPr/>
-        </p:nvSpPr>
-        <p:spPr>
-          <a:xfrm>
-            <a:off x="3926648" y="4130802"/>
-            <a:ext cx="943130" cy="242519"/>
-          </a:xfrm>
-          <a:prstGeom prst="roundRect">
-            <a:avLst>
-              <a:gd name="adj" fmla="val 30163"/>
-            </a:avLst>
-          </a:prstGeom>
-          <a:solidFill>
-            <a:srgbClr val="151522"/>
-          </a:solidFill>
-          <a:ln w="25400">
-            <a:solidFill>
-              <a:srgbClr val="FF2E88"/>
-            </a:solidFill>
-            <a:prstDash val="solid"/>
-          </a:ln>
-        </p:spPr>
-      </p:sp>
-      <p:sp>
-        <p:nvSpPr>
-          <p:cNvPr id="41" name="Text 39"/>
-          <p:cNvSpPr/>
-          <p:nvPr/>
-        </p:nvSpPr>
-        <p:spPr>
-          <a:xfrm>
-            <a:off x="3981512" y="4185666"/>
-            <a:ext cx="833402" cy="132791"/>
-          </a:xfrm>
-          <a:prstGeom prst="rect">
-            <a:avLst/>
-          </a:prstGeom>
-          <a:noFill/>
-          <a:ln/>
-        </p:spPr>
-        <p:txBody>
-          <a:bodyPr wrap="square" rtlCol="0" anchor="ctr"/>
-          <a:lstStyle/>
-          <a:p>
-            <a:pPr algn="ctr" indent="0" marL="0">
-              <a:buNone/>
-            </a:pPr>
-            <a:r>
-              <a:rPr lang="en-US" sz="1100" b="1" dirty="0">
-                <a:solidFill>
-                  <a:srgbClr val="FFFFFF"/>
-                </a:solidFill>
-                <a:latin typeface="Trebuchet MS" pitchFamily="34" charset="0"/>
-                <a:ea typeface="Trebuchet MS" pitchFamily="34" charset="-122"/>
-                <a:cs typeface="Trebuchet MS" pitchFamily="34" charset="-120"/>
-              </a:rPr>
-              <a:t>PowerPoint</a:t>
-            </a:r>
-            <a:endParaRPr lang="en-US" sz="1100" dirty="0"/>
-          </a:p>
-        </p:txBody>
-      </p:sp>
-      <p:sp>
-        <p:nvSpPr>
-          <p:cNvPr id="42" name="Shape 40"/>
-          <p:cNvSpPr/>
-          <p:nvPr/>
-        </p:nvSpPr>
-        <p:spPr>
-          <a:xfrm>
-            <a:off x="3926648" y="4494581"/>
-            <a:ext cx="943130" cy="242519"/>
-          </a:xfrm>
-          <a:prstGeom prst="roundRect">
-            <a:avLst>
-              <a:gd name="adj" fmla="val 30163"/>
-            </a:avLst>
-          </a:prstGeom>
-          <a:solidFill>
-            <a:srgbClr val="151522"/>
-          </a:solidFill>
-          <a:ln w="25400">
-            <a:solidFill>
-              <a:srgbClr val="FF0055"/>
-            </a:solidFill>
-            <a:prstDash val="solid"/>
-          </a:ln>
-        </p:spPr>
-      </p:sp>
-      <p:sp>
-        <p:nvSpPr>
-          <p:cNvPr id="43" name="Text 41"/>
-          <p:cNvSpPr/>
-          <p:nvPr/>
-        </p:nvSpPr>
-        <p:spPr>
-          <a:xfrm>
-            <a:off x="3981512" y="4549445"/>
-            <a:ext cx="833402" cy="132791"/>
-          </a:xfrm>
-          <a:prstGeom prst="rect">
-            <a:avLst/>
-          </a:prstGeom>
-          <a:noFill/>
-          <a:ln/>
-        </p:spPr>
-        <p:txBody>
-          <a:bodyPr wrap="square" rtlCol="0" anchor="ctr"/>
-          <a:lstStyle/>
-          <a:p>
-            <a:pPr algn="ctr" indent="0" marL="0">
-              <a:buNone/>
-            </a:pPr>
-            <a:r>
-              <a:rPr lang="en-US" sz="1100" b="1" dirty="0">
-                <a:solidFill>
-                  <a:srgbClr val="FFFFFF"/>
-                </a:solidFill>
-                <a:latin typeface="Trebuchet MS" pitchFamily="34" charset="0"/>
-                <a:ea typeface="Trebuchet MS" pitchFamily="34" charset="-122"/>
-                <a:cs typeface="Trebuchet MS" pitchFamily="34" charset="-120"/>
-              </a:rPr>
-              <a:t>PDF</a:t>
-            </a:r>
-            <a:endParaRPr lang="en-US" sz="1100" dirty="0"/>
-          </a:p>
-        </p:txBody>
-      </p:sp>
-      <p:sp>
-        <p:nvSpPr>
-          <p:cNvPr id="44" name="Shape 42"/>
-          <p:cNvSpPr/>
-          <p:nvPr/>
-        </p:nvSpPr>
-        <p:spPr>
-          <a:xfrm>
-            <a:off x="406390" y="4914900"/>
-            <a:ext cx="11378916" cy="831850"/>
-          </a:xfrm>
-          <a:prstGeom prst="roundRect">
-            <a:avLst>
-              <a:gd name="adj" fmla="val 8794"/>
-            </a:avLst>
-          </a:prstGeom>
-          <a:solidFill>
-            <a:srgbClr val="151522"/>
-          </a:solidFill>
-          <a:ln w="25400">
-            <a:solidFill>
-              <a:srgbClr val="00FF9F"/>
-            </a:solidFill>
-            <a:prstDash val="solid"/>
-          </a:ln>
-        </p:spPr>
-      </p:sp>
-      <p:sp>
-        <p:nvSpPr>
-          <p:cNvPr id="45" name="Text 43"/>
-          <p:cNvSpPr/>
-          <p:nvPr/>
-        </p:nvSpPr>
-        <p:spPr>
-          <a:xfrm>
-            <a:off x="543550" y="4988052"/>
-            <a:ext cx="11104596" cy="274320"/>
-          </a:xfrm>
-          <a:prstGeom prst="rect">
-            <a:avLst/>
-          </a:prstGeom>
-          <a:noFill/>
-          <a:ln/>
-        </p:spPr>
-        <p:txBody>
-          <a:bodyPr wrap="square" rtlCol="0" anchor="ctr"/>
-          <a:lstStyle/>
-          <a:p>
-            <a:pPr indent="0" marL="0">
-              <a:buNone/>
-            </a:pPr>
-            <a:r>
-              <a:rPr lang="en-US" sz="1300" b="1" dirty="0">
-                <a:solidFill>
-                  <a:srgbClr val="00FF9F"/>
-                </a:solidFill>
-                <a:latin typeface="Trebuchet MS" pitchFamily="34" charset="0"/>
-                <a:ea typeface="Trebuchet MS" pitchFamily="34" charset="-122"/>
-                <a:cs typeface="Trebuchet MS" pitchFamily="34" charset="-120"/>
-              </a:rPr>
               <a:t>Principio Single Source of Truth</a:t>
             </a:r>
             <a:endParaRPr lang="en-US" sz="1300" dirty="0"/>
@@ -10252,14 +9862,14 @@
       </p:sp>
       <p:sp>
         <p:nvSpPr>
-          <p:cNvPr id="46" name="Text 44"/>
-          <p:cNvSpPr/>
-          <p:nvPr/>
-        </p:nvSpPr>
-        <p:spPr>
-          <a:xfrm>
-            <a:off x="543550" y="5308092"/>
-            <a:ext cx="11104596" cy="365506"/>
+          <p:cNvPr id="34" name="Text 32"/>
+          <p:cNvSpPr/>
+          <p:nvPr/>
+        </p:nvSpPr>
+        <p:spPr>
+          <a:xfrm>
+            <a:off x="589270" y="4145788"/>
+            <a:ext cx="11013156" cy="361696"/>
           </a:xfrm>
           <a:prstGeom prst="rect">
             <a:avLst/>
@@ -10291,7 +9901,7 @@
       </p:sp>
       <p:sp>
         <p:nvSpPr>
-          <p:cNvPr id="47" name="Text 45"/>
+          <p:cNvPr id="35" name="Text 33"/>
           <p:cNvSpPr/>
           <p:nvPr/>
         </p:nvSpPr>
@@ -10485,8 +10095,8 @@
         </p:nvSpPr>
         <p:spPr>
           <a:xfrm>
-            <a:off x="3782933" y="2433168"/>
-            <a:ext cx="94313" cy="9144"/>
+            <a:off x="1944296" y="2800604"/>
+            <a:ext cx="215148" cy="9144"/>
           </a:xfrm>
           <a:prstGeom prst="line">
             <a:avLst/>
@@ -10508,8 +10118,8 @@
         </p:nvSpPr>
         <p:spPr>
           <a:xfrm>
-            <a:off x="3877246" y="2433168"/>
-            <a:ext cx="9144" cy="1091336"/>
+            <a:off x="2159444" y="2800604"/>
+            <a:ext cx="9144" cy="9144"/>
           </a:xfrm>
           <a:prstGeom prst="line">
             <a:avLst/>
@@ -10531,8 +10141,8 @@
         </p:nvSpPr>
         <p:spPr>
           <a:xfrm>
-            <a:off x="3877246" y="3524504"/>
-            <a:ext cx="94313" cy="9144"/>
+            <a:off x="2159444" y="2800604"/>
+            <a:ext cx="215148" cy="9144"/>
           </a:xfrm>
           <a:prstGeom prst="line">
             <a:avLst/>
@@ -10555,8 +10165,8 @@
         </p:nvSpPr>
         <p:spPr>
           <a:xfrm>
-            <a:off x="4892234" y="3524504"/>
-            <a:ext cx="94313" cy="9144"/>
+            <a:off x="3912498" y="2800604"/>
+            <a:ext cx="215148" cy="9144"/>
           </a:xfrm>
           <a:prstGeom prst="line">
             <a:avLst/>
@@ -10578,7 +10188,7 @@
         </p:nvSpPr>
         <p:spPr>
           <a:xfrm>
-            <a:off x="4986547" y="3524504"/>
+            <a:off x="4127646" y="2800604"/>
             <a:ext cx="9144" cy="9144"/>
           </a:xfrm>
           <a:prstGeom prst="line">
@@ -10601,8 +10211,8 @@
         </p:nvSpPr>
         <p:spPr>
           <a:xfrm>
-            <a:off x="4986547" y="3524504"/>
-            <a:ext cx="94313" cy="9144"/>
+            <a:off x="4127646" y="2800604"/>
+            <a:ext cx="215148" cy="9144"/>
           </a:xfrm>
           <a:prstGeom prst="line">
             <a:avLst/>
@@ -10625,8 +10235,8 @@
         </p:nvSpPr>
         <p:spPr>
           <a:xfrm>
-            <a:off x="6001535" y="3524504"/>
-            <a:ext cx="94313" cy="9144"/>
+            <a:off x="5880700" y="2800604"/>
+            <a:ext cx="215148" cy="9144"/>
           </a:xfrm>
           <a:prstGeom prst="line">
             <a:avLst/>
@@ -10648,7 +10258,7 @@
         </p:nvSpPr>
         <p:spPr>
           <a:xfrm>
-            <a:off x="6095848" y="3524504"/>
+            <a:off x="6095848" y="2800604"/>
             <a:ext cx="9144" cy="9144"/>
           </a:xfrm>
           <a:prstGeom prst="line">
@@ -10671,8 +10281,8 @@
         </p:nvSpPr>
         <p:spPr>
           <a:xfrm>
-            <a:off x="6095848" y="3524504"/>
-            <a:ext cx="94313" cy="9144"/>
+            <a:off x="6095848" y="2800604"/>
+            <a:ext cx="215148" cy="9144"/>
           </a:xfrm>
           <a:prstGeom prst="line">
             <a:avLst/>
@@ -10695,8 +10305,8 @@
         </p:nvSpPr>
         <p:spPr>
           <a:xfrm>
-            <a:off x="7110835" y="3524504"/>
-            <a:ext cx="94313" cy="9144"/>
+            <a:off x="7848902" y="2800604"/>
+            <a:ext cx="215148" cy="9144"/>
           </a:xfrm>
           <a:prstGeom prst="line">
             <a:avLst/>
@@ -10718,7 +10328,7 @@
         </p:nvSpPr>
         <p:spPr>
           <a:xfrm>
-            <a:off x="7205148" y="3524504"/>
+            <a:off x="8064049" y="2800604"/>
             <a:ext cx="9144" cy="9144"/>
           </a:xfrm>
           <a:prstGeom prst="line">
@@ -10741,8 +10351,8 @@
         </p:nvSpPr>
         <p:spPr>
           <a:xfrm>
-            <a:off x="7205148" y="3524504"/>
-            <a:ext cx="94313" cy="9144"/>
+            <a:off x="8064049" y="2800604"/>
+            <a:ext cx="215148" cy="9144"/>
           </a:xfrm>
           <a:prstGeom prst="line">
             <a:avLst/>
@@ -10765,8 +10375,8 @@
         </p:nvSpPr>
         <p:spPr>
           <a:xfrm>
-            <a:off x="8220136" y="3524504"/>
-            <a:ext cx="94313" cy="9144"/>
+            <a:off x="9817104" y="2800604"/>
+            <a:ext cx="215148" cy="9144"/>
           </a:xfrm>
           <a:prstGeom prst="line">
             <a:avLst/>
@@ -10788,7 +10398,7 @@
         </p:nvSpPr>
         <p:spPr>
           <a:xfrm>
-            <a:off x="8314449" y="3524504"/>
+            <a:off x="10032251" y="2800604"/>
             <a:ext cx="9144" cy="9144"/>
           </a:xfrm>
           <a:prstGeom prst="line">
@@ -10811,8 +10421,8 @@
         </p:nvSpPr>
         <p:spPr>
           <a:xfrm>
-            <a:off x="8314449" y="3524504"/>
-            <a:ext cx="94313" cy="9144"/>
+            <a:off x="10032251" y="2800604"/>
+            <a:ext cx="215148" cy="9144"/>
           </a:xfrm>
           <a:prstGeom prst="line">
             <a:avLst/>
@@ -10835,12 +10445,12 @@
         </p:nvSpPr>
         <p:spPr>
           <a:xfrm>
-            <a:off x="2862258" y="2311908"/>
-            <a:ext cx="920675" cy="242519"/>
+            <a:off x="406390" y="2561551"/>
+            <a:ext cx="1537907" cy="478106"/>
           </a:xfrm>
           <a:prstGeom prst="roundRect">
             <a:avLst>
-              <a:gd name="adj" fmla="val 30163"/>
+              <a:gd name="adj" fmla="val 15300"/>
             </a:avLst>
           </a:prstGeom>
           <a:solidFill>
@@ -10862,24 +10472,24 @@
         </p:nvSpPr>
         <p:spPr>
           <a:xfrm>
-            <a:off x="2917122" y="2366772"/>
-            <a:ext cx="810947" cy="132791"/>
-          </a:xfrm>
-          <a:prstGeom prst="rect">
-            <a:avLst/>
-          </a:prstGeom>
-          <a:noFill/>
-          <a:ln/>
-        </p:spPr>
-        <p:txBody>
-          <a:bodyPr wrap="square" rtlCol="0" anchor="ctr"/>
+            <a:off x="479542" y="2616415"/>
+            <a:ext cx="1391603" cy="368378"/>
+          </a:xfrm>
+          <a:prstGeom prst="rect">
+            <a:avLst/>
+          </a:prstGeom>
+          <a:noFill/>
+          <a:ln/>
+        </p:spPr>
+        <p:txBody>
+          <a:bodyPr wrap="square" lIns="0" tIns="0" rIns="0" bIns="0" rtlCol="0" anchor="ctr"/>
           <a:lstStyle/>
           <a:p>
             <a:pPr algn="ctr" indent="0" marL="0">
               <a:buNone/>
             </a:pPr>
             <a:r>
-              <a:rPr lang="en-US" sz="1100" b="1" dirty="0">
+              <a:rPr lang="en-US" sz="1200" b="1" dirty="0">
                 <a:solidFill>
                   <a:srgbClr val="FFFFFF"/>
                 </a:solidFill>
@@ -10889,7 +10499,7 @@
               </a:rPr>
               <a:t>Sorgente DSL</a:t>
             </a:r>
-            <a:endParaRPr lang="en-US" sz="1100" dirty="0"/>
+            <a:endParaRPr lang="en-US" sz="1200" dirty="0"/>
           </a:p>
         </p:txBody>
       </p:sp>
@@ -10901,12 +10511,12 @@
         </p:nvSpPr>
         <p:spPr>
           <a:xfrm>
-            <a:off x="3971559" y="3403244"/>
-            <a:ext cx="920675" cy="242519"/>
+            <a:off x="2374592" y="2561551"/>
+            <a:ext cx="1537907" cy="478106"/>
           </a:xfrm>
           <a:prstGeom prst="roundRect">
             <a:avLst>
-              <a:gd name="adj" fmla="val 30163"/>
+              <a:gd name="adj" fmla="val 15300"/>
             </a:avLst>
           </a:prstGeom>
           <a:solidFill>
@@ -10928,24 +10538,24 @@
         </p:nvSpPr>
         <p:spPr>
           <a:xfrm>
-            <a:off x="4026423" y="3458108"/>
-            <a:ext cx="810947" cy="132791"/>
-          </a:xfrm>
-          <a:prstGeom prst="rect">
-            <a:avLst/>
-          </a:prstGeom>
-          <a:noFill/>
-          <a:ln/>
-        </p:spPr>
-        <p:txBody>
-          <a:bodyPr wrap="square" rtlCol="0" anchor="ctr"/>
+            <a:off x="2447744" y="2616415"/>
+            <a:ext cx="1391603" cy="368378"/>
+          </a:xfrm>
+          <a:prstGeom prst="rect">
+            <a:avLst/>
+          </a:prstGeom>
+          <a:noFill/>
+          <a:ln/>
+        </p:spPr>
+        <p:txBody>
+          <a:bodyPr wrap="square" lIns="0" tIns="0" rIns="0" bIns="0" rtlCol="0" anchor="ctr"/>
           <a:lstStyle/>
           <a:p>
             <a:pPr algn="ctr" indent="0" marL="0">
               <a:buNone/>
             </a:pPr>
             <a:r>
-              <a:rPr lang="en-US" sz="1100" b="1" dirty="0">
+              <a:rPr lang="en-US" sz="1200" b="1" dirty="0">
                 <a:solidFill>
                   <a:srgbClr val="FFFFFF"/>
                 </a:solidFill>
@@ -10955,7 +10565,7 @@
               </a:rPr>
               <a:t>Parser AST</a:t>
             </a:r>
-            <a:endParaRPr lang="en-US" sz="1100" dirty="0"/>
+            <a:endParaRPr lang="en-US" sz="1200" dirty="0"/>
           </a:p>
         </p:txBody>
       </p:sp>
@@ -10967,12 +10577,12 @@
         </p:nvSpPr>
         <p:spPr>
           <a:xfrm>
-            <a:off x="5080860" y="3403244"/>
-            <a:ext cx="920675" cy="242519"/>
+            <a:off x="4342793" y="2561551"/>
+            <a:ext cx="1537907" cy="478106"/>
           </a:xfrm>
           <a:prstGeom prst="roundRect">
             <a:avLst>
-              <a:gd name="adj" fmla="val 30163"/>
+              <a:gd name="adj" fmla="val 15300"/>
             </a:avLst>
           </a:prstGeom>
           <a:solidFill>
@@ -10980,7 +10590,7 @@
           </a:solidFill>
           <a:ln w="25400">
             <a:solidFill>
-              <a:srgbClr val="7B61FF"/>
+              <a:srgbClr val="FFE600"/>
             </a:solidFill>
             <a:prstDash val="solid"/>
           </a:ln>
@@ -10994,24 +10604,24 @@
         </p:nvSpPr>
         <p:spPr>
           <a:xfrm>
-            <a:off x="5135724" y="3458108"/>
-            <a:ext cx="810947" cy="132791"/>
-          </a:xfrm>
-          <a:prstGeom prst="rect">
-            <a:avLst/>
-          </a:prstGeom>
-          <a:noFill/>
-          <a:ln/>
-        </p:spPr>
-        <p:txBody>
-          <a:bodyPr wrap="square" rtlCol="0" anchor="ctr"/>
+            <a:off x="4415945" y="2616415"/>
+            <a:ext cx="1391603" cy="368378"/>
+          </a:xfrm>
+          <a:prstGeom prst="rect">
+            <a:avLst/>
+          </a:prstGeom>
+          <a:noFill/>
+          <a:ln/>
+        </p:spPr>
+        <p:txBody>
+          <a:bodyPr wrap="square" lIns="0" tIns="0" rIns="0" bIns="0" rtlCol="0" anchor="ctr"/>
           <a:lstStyle/>
           <a:p>
             <a:pPr algn="ctr" indent="0" marL="0">
               <a:buNone/>
             </a:pPr>
             <a:r>
-              <a:rPr lang="en-US" sz="1100" b="1" dirty="0">
+              <a:rPr lang="en-US" sz="1200" b="1" dirty="0">
                 <a:solidFill>
                   <a:srgbClr val="FFFFFF"/>
                 </a:solidFill>
@@ -11019,9 +10629,9 @@
                 <a:ea typeface="Trebuchet MS" pitchFamily="34" charset="-122"/>
                 <a:cs typeface="Trebuchet MS" pitchFamily="34" charset="-120"/>
               </a:rPr>
-              <a:t>Design Lint…</a:t>
-            </a:r>
-            <a:endParaRPr lang="en-US" sz="1100" dirty="0"/>
+              <a:t>Design Linter</a:t>
+            </a:r>
+            <a:endParaRPr lang="en-US" sz="1200" dirty="0"/>
           </a:p>
         </p:txBody>
       </p:sp>
@@ -11033,210 +10643,12 @@
         </p:nvSpPr>
         <p:spPr>
           <a:xfrm>
-            <a:off x="6190161" y="3403244"/>
-            <a:ext cx="920675" cy="242519"/>
+            <a:off x="6310995" y="2561551"/>
+            <a:ext cx="1537907" cy="478106"/>
           </a:xfrm>
           <a:prstGeom prst="roundRect">
             <a:avLst>
-              <a:gd name="adj" fmla="val 30163"/>
-            </a:avLst>
-          </a:prstGeom>
-          <a:solidFill>
-            <a:srgbClr val="151522"/>
-          </a:solidFill>
-          <a:ln w="25400">
-            <a:solidFill>
-              <a:srgbClr val="7B61FF"/>
-            </a:solidFill>
-            <a:prstDash val="solid"/>
-          </a:ln>
-        </p:spPr>
-      </p:sp>
-      <p:sp>
-        <p:nvSpPr>
-          <p:cNvPr id="27" name="Text 25"/>
-          <p:cNvSpPr/>
-          <p:nvPr/>
-        </p:nvSpPr>
-        <p:spPr>
-          <a:xfrm>
-            <a:off x="6245025" y="3458108"/>
-            <a:ext cx="810947" cy="132791"/>
-          </a:xfrm>
-          <a:prstGeom prst="rect">
-            <a:avLst/>
-          </a:prstGeom>
-          <a:noFill/>
-          <a:ln/>
-        </p:spPr>
-        <p:txBody>
-          <a:bodyPr wrap="square" rtlCol="0" anchor="ctr"/>
-          <a:lstStyle/>
-          <a:p>
-            <a:pPr algn="ctr" indent="0" marL="0">
-              <a:buNone/>
-            </a:pPr>
-            <a:r>
-              <a:rPr lang="en-US" sz="1100" b="1" dirty="0">
-                <a:solidFill>
-                  <a:srgbClr val="FFFFFF"/>
-                </a:solidFill>
-                <a:latin typeface="Trebuchet MS" pitchFamily="34" charset="0"/>
-                <a:ea typeface="Trebuchet MS" pitchFamily="34" charset="-122"/>
-                <a:cs typeface="Trebuchet MS" pitchFamily="34" charset="-120"/>
-              </a:rPr>
-              <a:t>Theme Engine</a:t>
-            </a:r>
-            <a:endParaRPr lang="en-US" sz="1100" dirty="0"/>
-          </a:p>
-        </p:txBody>
-      </p:sp>
-      <p:sp>
-        <p:nvSpPr>
-          <p:cNvPr id="28" name="Shape 26"/>
-          <p:cNvSpPr/>
-          <p:nvPr/>
-        </p:nvSpPr>
-        <p:spPr>
-          <a:xfrm>
-            <a:off x="7299461" y="3403244"/>
-            <a:ext cx="920675" cy="242519"/>
-          </a:xfrm>
-          <a:prstGeom prst="roundRect">
-            <a:avLst>
-              <a:gd name="adj" fmla="val 30163"/>
-            </a:avLst>
-          </a:prstGeom>
-          <a:solidFill>
-            <a:srgbClr val="151522"/>
-          </a:solidFill>
-          <a:ln w="25400">
-            <a:solidFill>
-              <a:srgbClr val="7B61FF"/>
-            </a:solidFill>
-            <a:prstDash val="solid"/>
-          </a:ln>
-        </p:spPr>
-      </p:sp>
-      <p:sp>
-        <p:nvSpPr>
-          <p:cNvPr id="29" name="Text 27"/>
-          <p:cNvSpPr/>
-          <p:nvPr/>
-        </p:nvSpPr>
-        <p:spPr>
-          <a:xfrm>
-            <a:off x="7354325" y="3458108"/>
-            <a:ext cx="810947" cy="132791"/>
-          </a:xfrm>
-          <a:prstGeom prst="rect">
-            <a:avLst/>
-          </a:prstGeom>
-          <a:noFill/>
-          <a:ln/>
-        </p:spPr>
-        <p:txBody>
-          <a:bodyPr wrap="square" rtlCol="0" anchor="ctr"/>
-          <a:lstStyle/>
-          <a:p>
-            <a:pPr algn="ctr" indent="0" marL="0">
-              <a:buNone/>
-            </a:pPr>
-            <a:r>
-              <a:rPr lang="en-US" sz="1100" b="1" dirty="0">
-                <a:solidFill>
-                  <a:srgbClr val="FFFFFF"/>
-                </a:solidFill>
-                <a:latin typeface="Trebuchet MS" pitchFamily="34" charset="0"/>
-                <a:ea typeface="Trebuchet MS" pitchFamily="34" charset="-122"/>
-                <a:cs typeface="Trebuchet MS" pitchFamily="34" charset="-120"/>
-              </a:rPr>
-              <a:t>Layout Engi…</a:t>
-            </a:r>
-            <a:endParaRPr lang="en-US" sz="1100" dirty="0"/>
-          </a:p>
-        </p:txBody>
-      </p:sp>
-      <p:sp>
-        <p:nvSpPr>
-          <p:cNvPr id="30" name="Shape 28"/>
-          <p:cNvSpPr/>
-          <p:nvPr/>
-        </p:nvSpPr>
-        <p:spPr>
-          <a:xfrm>
-            <a:off x="8408762" y="3403244"/>
-            <a:ext cx="920675" cy="242519"/>
-          </a:xfrm>
-          <a:prstGeom prst="roundRect">
-            <a:avLst>
-              <a:gd name="adj" fmla="val 30163"/>
-            </a:avLst>
-          </a:prstGeom>
-          <a:solidFill>
-            <a:srgbClr val="151522"/>
-          </a:solidFill>
-          <a:ln w="25400">
-            <a:solidFill>
-              <a:srgbClr val="7B61FF"/>
-            </a:solidFill>
-            <a:prstDash val="solid"/>
-          </a:ln>
-        </p:spPr>
-      </p:sp>
-      <p:sp>
-        <p:nvSpPr>
-          <p:cNvPr id="31" name="Text 29"/>
-          <p:cNvSpPr/>
-          <p:nvPr/>
-        </p:nvSpPr>
-        <p:spPr>
-          <a:xfrm>
-            <a:off x="8463626" y="3458108"/>
-            <a:ext cx="810947" cy="132791"/>
-          </a:xfrm>
-          <a:prstGeom prst="rect">
-            <a:avLst/>
-          </a:prstGeom>
-          <a:noFill/>
-          <a:ln/>
-        </p:spPr>
-        <p:txBody>
-          <a:bodyPr wrap="square" rtlCol="0" anchor="ctr"/>
-          <a:lstStyle/>
-          <a:p>
-            <a:pPr algn="ctr" indent="0" marL="0">
-              <a:buNone/>
-            </a:pPr>
-            <a:r>
-              <a:rPr lang="en-US" sz="1100" b="1" dirty="0">
-                <a:solidFill>
-                  <a:srgbClr val="FFFFFF"/>
-                </a:solidFill>
-                <a:latin typeface="Trebuchet MS" pitchFamily="34" charset="0"/>
-                <a:ea typeface="Trebuchet MS" pitchFamily="34" charset="-122"/>
-                <a:cs typeface="Trebuchet MS" pitchFamily="34" charset="-120"/>
-              </a:rPr>
-              <a:t>Renderer Mu…</a:t>
-            </a:r>
-            <a:endParaRPr lang="en-US" sz="1100" dirty="0"/>
-          </a:p>
-        </p:txBody>
-      </p:sp>
-      <p:sp>
-        <p:nvSpPr>
-          <p:cNvPr id="32" name="Shape 30"/>
-          <p:cNvSpPr/>
-          <p:nvPr/>
-        </p:nvSpPr>
-        <p:spPr>
-          <a:xfrm>
-            <a:off x="2862258" y="2675687"/>
-            <a:ext cx="920675" cy="242519"/>
-          </a:xfrm>
-          <a:prstGeom prst="roundRect">
-            <a:avLst>
-              <a:gd name="adj" fmla="val 30163"/>
+              <a:gd name="adj" fmla="val 15300"/>
             </a:avLst>
           </a:prstGeom>
           <a:solidFill>
@@ -11252,30 +10664,30 @@
       </p:sp>
       <p:sp>
         <p:nvSpPr>
-          <p:cNvPr id="33" name="Text 31"/>
-          <p:cNvSpPr/>
-          <p:nvPr/>
-        </p:nvSpPr>
-        <p:spPr>
-          <a:xfrm>
-            <a:off x="2917122" y="2730551"/>
-            <a:ext cx="810947" cy="132791"/>
-          </a:xfrm>
-          <a:prstGeom prst="rect">
-            <a:avLst/>
-          </a:prstGeom>
-          <a:noFill/>
-          <a:ln/>
-        </p:spPr>
-        <p:txBody>
-          <a:bodyPr wrap="square" rtlCol="0" anchor="ctr"/>
+          <p:cNvPr id="27" name="Text 25"/>
+          <p:cNvSpPr/>
+          <p:nvPr/>
+        </p:nvSpPr>
+        <p:spPr>
+          <a:xfrm>
+            <a:off x="6384147" y="2616415"/>
+            <a:ext cx="1391603" cy="368378"/>
+          </a:xfrm>
+          <a:prstGeom prst="rect">
+            <a:avLst/>
+          </a:prstGeom>
+          <a:noFill/>
+          <a:ln/>
+        </p:spPr>
+        <p:txBody>
+          <a:bodyPr wrap="square" lIns="0" tIns="0" rIns="0" bIns="0" rtlCol="0" anchor="ctr"/>
           <a:lstStyle/>
           <a:p>
             <a:pPr algn="ctr" indent="0" marL="0">
               <a:buNone/>
             </a:pPr>
             <a:r>
-              <a:rPr lang="en-US" sz="1100" b="1" dirty="0">
+              <a:rPr lang="en-US" sz="1200" b="1" dirty="0">
                 <a:solidFill>
                   <a:srgbClr val="FFFFFF"/>
                 </a:solidFill>
@@ -11283,158 +10695,26 @@
                 <a:ea typeface="Trebuchet MS" pitchFamily="34" charset="-122"/>
                 <a:cs typeface="Trebuchet MS" pitchFamily="34" charset="-120"/>
               </a:rPr>
-              <a:t>Sorgente</a:t>
-            </a:r>
-            <a:endParaRPr lang="en-US" sz="1100" dirty="0"/>
-          </a:p>
-        </p:txBody>
-      </p:sp>
-      <p:sp>
-        <p:nvSpPr>
-          <p:cNvPr id="34" name="Shape 32"/>
-          <p:cNvSpPr/>
-          <p:nvPr/>
-        </p:nvSpPr>
-        <p:spPr>
-          <a:xfrm>
-            <a:off x="2862258" y="3039466"/>
-            <a:ext cx="920675" cy="242519"/>
+              <a:t>Theme Engine</a:t>
+            </a:r>
+            <a:endParaRPr lang="en-US" sz="1200" dirty="0"/>
+          </a:p>
+        </p:txBody>
+      </p:sp>
+      <p:sp>
+        <p:nvSpPr>
+          <p:cNvPr id="28" name="Shape 26"/>
+          <p:cNvSpPr/>
+          <p:nvPr/>
+        </p:nvSpPr>
+        <p:spPr>
+          <a:xfrm>
+            <a:off x="8279197" y="2561551"/>
+            <a:ext cx="1537907" cy="478106"/>
           </a:xfrm>
           <a:prstGeom prst="roundRect">
             <a:avLst>
-              <a:gd name="adj" fmla="val 30163"/>
-            </a:avLst>
-          </a:prstGeom>
-          <a:solidFill>
-            <a:srgbClr val="151522"/>
-          </a:solidFill>
-          <a:ln w="25400">
-            <a:solidFill>
-              <a:srgbClr val="7B61FF"/>
-            </a:solidFill>
-            <a:prstDash val="solid"/>
-          </a:ln>
-        </p:spPr>
-      </p:sp>
-      <p:sp>
-        <p:nvSpPr>
-          <p:cNvPr id="35" name="Text 33"/>
-          <p:cNvSpPr/>
-          <p:nvPr/>
-        </p:nvSpPr>
-        <p:spPr>
-          <a:xfrm>
-            <a:off x="2917122" y="3094330"/>
-            <a:ext cx="810947" cy="132791"/>
-          </a:xfrm>
-          <a:prstGeom prst="rect">
-            <a:avLst/>
-          </a:prstGeom>
-          <a:noFill/>
-          <a:ln/>
-        </p:spPr>
-        <p:txBody>
-          <a:bodyPr wrap="square" rtlCol="0" anchor="ctr"/>
-          <a:lstStyle/>
-          <a:p>
-            <a:pPr algn="ctr" indent="0" marL="0">
-              <a:buNone/>
-            </a:pPr>
-            <a:r>
-              <a:rPr lang="en-US" sz="1100" b="1" dirty="0">
-                <a:solidFill>
-                  <a:srgbClr val="FFFFFF"/>
-                </a:solidFill>
-                <a:latin typeface="Trebuchet MS" pitchFamily="34" charset="0"/>
-                <a:ea typeface="Trebuchet MS" pitchFamily="34" charset="-122"/>
-                <a:cs typeface="Trebuchet MS" pitchFamily="34" charset="-120"/>
-              </a:rPr>
-              <a:t>Parser</a:t>
-            </a:r>
-            <a:endParaRPr lang="en-US" sz="1100" dirty="0"/>
-          </a:p>
-        </p:txBody>
-      </p:sp>
-      <p:sp>
-        <p:nvSpPr>
-          <p:cNvPr id="36" name="Shape 34"/>
-          <p:cNvSpPr/>
-          <p:nvPr/>
-        </p:nvSpPr>
-        <p:spPr>
-          <a:xfrm>
-            <a:off x="2862258" y="3403244"/>
-            <a:ext cx="920675" cy="242519"/>
-          </a:xfrm>
-          <a:prstGeom prst="roundRect">
-            <a:avLst>
-              <a:gd name="adj" fmla="val 30163"/>
-            </a:avLst>
-          </a:prstGeom>
-          <a:solidFill>
-            <a:srgbClr val="151522"/>
-          </a:solidFill>
-          <a:ln w="25400">
-            <a:solidFill>
-              <a:srgbClr val="FFE600"/>
-            </a:solidFill>
-            <a:prstDash val="solid"/>
-          </a:ln>
-        </p:spPr>
-      </p:sp>
-      <p:sp>
-        <p:nvSpPr>
-          <p:cNvPr id="37" name="Text 35"/>
-          <p:cNvSpPr/>
-          <p:nvPr/>
-        </p:nvSpPr>
-        <p:spPr>
-          <a:xfrm>
-            <a:off x="2917122" y="3458108"/>
-            <a:ext cx="810947" cy="132791"/>
-          </a:xfrm>
-          <a:prstGeom prst="rect">
-            <a:avLst/>
-          </a:prstGeom>
-          <a:noFill/>
-          <a:ln/>
-        </p:spPr>
-        <p:txBody>
-          <a:bodyPr wrap="square" rtlCol="0" anchor="ctr"/>
-          <a:lstStyle/>
-          <a:p>
-            <a:pPr algn="ctr" indent="0" marL="0">
-              <a:buNone/>
-            </a:pPr>
-            <a:r>
-              <a:rPr lang="en-US" sz="1100" b="1" dirty="0">
-                <a:solidFill>
-                  <a:srgbClr val="FFFFFF"/>
-                </a:solidFill>
-                <a:latin typeface="Trebuchet MS" pitchFamily="34" charset="0"/>
-                <a:ea typeface="Trebuchet MS" pitchFamily="34" charset="-122"/>
-                <a:cs typeface="Trebuchet MS" pitchFamily="34" charset="-120"/>
-              </a:rPr>
-              <a:t>Design</a:t>
-            </a:r>
-            <a:endParaRPr lang="en-US" sz="1100" dirty="0"/>
-          </a:p>
-        </p:txBody>
-      </p:sp>
-      <p:sp>
-        <p:nvSpPr>
-          <p:cNvPr id="38" name="Shape 36"/>
-          <p:cNvSpPr/>
-          <p:nvPr/>
-        </p:nvSpPr>
-        <p:spPr>
-          <a:xfrm>
-            <a:off x="2862258" y="3767023"/>
-            <a:ext cx="920675" cy="242519"/>
-          </a:xfrm>
-          <a:prstGeom prst="roundRect">
-            <a:avLst>
-              <a:gd name="adj" fmla="val 30163"/>
+              <a:gd name="adj" fmla="val 15300"/>
             </a:avLst>
           </a:prstGeom>
           <a:solidFill>
@@ -11450,30 +10730,30 @@
       </p:sp>
       <p:sp>
         <p:nvSpPr>
-          <p:cNvPr id="39" name="Text 37"/>
-          <p:cNvSpPr/>
-          <p:nvPr/>
-        </p:nvSpPr>
-        <p:spPr>
-          <a:xfrm>
-            <a:off x="2917122" y="3821887"/>
-            <a:ext cx="810947" cy="132791"/>
-          </a:xfrm>
-          <a:prstGeom prst="rect">
-            <a:avLst/>
-          </a:prstGeom>
-          <a:noFill/>
-          <a:ln/>
-        </p:spPr>
-        <p:txBody>
-          <a:bodyPr wrap="square" rtlCol="0" anchor="ctr"/>
+          <p:cNvPr id="29" name="Text 27"/>
+          <p:cNvSpPr/>
+          <p:nvPr/>
+        </p:nvSpPr>
+        <p:spPr>
+          <a:xfrm>
+            <a:off x="8352349" y="2616415"/>
+            <a:ext cx="1391603" cy="368378"/>
+          </a:xfrm>
+          <a:prstGeom prst="rect">
+            <a:avLst/>
+          </a:prstGeom>
+          <a:noFill/>
+          <a:ln/>
+        </p:spPr>
+        <p:txBody>
+          <a:bodyPr wrap="square" lIns="0" tIns="0" rIns="0" bIns="0" rtlCol="0" anchor="ctr"/>
           <a:lstStyle/>
           <a:p>
             <a:pPr algn="ctr" indent="0" marL="0">
               <a:buNone/>
             </a:pPr>
             <a:r>
-              <a:rPr lang="en-US" sz="1100" b="1" dirty="0">
+              <a:rPr lang="en-US" sz="1200" b="1" dirty="0">
                 <a:solidFill>
                   <a:srgbClr val="FFFFFF"/>
                 </a:solidFill>
@@ -11481,92 +10761,26 @@
                 <a:ea typeface="Trebuchet MS" pitchFamily="34" charset="-122"/>
                 <a:cs typeface="Trebuchet MS" pitchFamily="34" charset="-120"/>
               </a:rPr>
-              <a:t>Theme</a:t>
-            </a:r>
-            <a:endParaRPr lang="en-US" sz="1100" dirty="0"/>
-          </a:p>
-        </p:txBody>
-      </p:sp>
-      <p:sp>
-        <p:nvSpPr>
-          <p:cNvPr id="40" name="Shape 38"/>
-          <p:cNvSpPr/>
-          <p:nvPr/>
-        </p:nvSpPr>
-        <p:spPr>
-          <a:xfrm>
-            <a:off x="2862258" y="4130802"/>
-            <a:ext cx="920675" cy="242519"/>
+              <a:t>Layout Engine</a:t>
+            </a:r>
+            <a:endParaRPr lang="en-US" sz="1200" dirty="0"/>
+          </a:p>
+        </p:txBody>
+      </p:sp>
+      <p:sp>
+        <p:nvSpPr>
+          <p:cNvPr id="30" name="Shape 28"/>
+          <p:cNvSpPr/>
+          <p:nvPr/>
+        </p:nvSpPr>
+        <p:spPr>
+          <a:xfrm>
+            <a:off x="10247399" y="2561551"/>
+            <a:ext cx="1537907" cy="478106"/>
           </a:xfrm>
           <a:prstGeom prst="roundRect">
             <a:avLst>
-              <a:gd name="adj" fmla="val 30163"/>
-            </a:avLst>
-          </a:prstGeom>
-          <a:solidFill>
-            <a:srgbClr val="151522"/>
-          </a:solidFill>
-          <a:ln w="25400">
-            <a:solidFill>
-              <a:srgbClr val="FF2E88"/>
-            </a:solidFill>
-            <a:prstDash val="solid"/>
-          </a:ln>
-        </p:spPr>
-      </p:sp>
-      <p:sp>
-        <p:nvSpPr>
-          <p:cNvPr id="41" name="Text 39"/>
-          <p:cNvSpPr/>
-          <p:nvPr/>
-        </p:nvSpPr>
-        <p:spPr>
-          <a:xfrm>
-            <a:off x="2917122" y="4185666"/>
-            <a:ext cx="810947" cy="132791"/>
-          </a:xfrm>
-          <a:prstGeom prst="rect">
-            <a:avLst/>
-          </a:prstGeom>
-          <a:noFill/>
-          <a:ln/>
-        </p:spPr>
-        <p:txBody>
-          <a:bodyPr wrap="square" rtlCol="0" anchor="ctr"/>
-          <a:lstStyle/>
-          <a:p>
-            <a:pPr algn="ctr" indent="0" marL="0">
-              <a:buNone/>
-            </a:pPr>
-            <a:r>
-              <a:rPr lang="en-US" sz="1100" b="1" dirty="0">
-                <a:solidFill>
-                  <a:srgbClr val="FFFFFF"/>
-                </a:solidFill>
-                <a:latin typeface="Trebuchet MS" pitchFamily="34" charset="0"/>
-                <a:ea typeface="Trebuchet MS" pitchFamily="34" charset="-122"/>
-                <a:cs typeface="Trebuchet MS" pitchFamily="34" charset="-120"/>
-              </a:rPr>
-              <a:t>Layout</a:t>
-            </a:r>
-            <a:endParaRPr lang="en-US" sz="1100" dirty="0"/>
-          </a:p>
-        </p:txBody>
-      </p:sp>
-      <p:sp>
-        <p:nvSpPr>
-          <p:cNvPr id="42" name="Shape 40"/>
-          <p:cNvSpPr/>
-          <p:nvPr/>
-        </p:nvSpPr>
-        <p:spPr>
-          <a:xfrm>
-            <a:off x="2862258" y="4494581"/>
-            <a:ext cx="920675" cy="242519"/>
-          </a:xfrm>
-          <a:prstGeom prst="roundRect">
-            <a:avLst>
-              <a:gd name="adj" fmla="val 30163"/>
+              <a:gd name="adj" fmla="val 15300"/>
             </a:avLst>
           </a:prstGeom>
           <a:solidFill>
@@ -11582,30 +10796,30 @@
       </p:sp>
       <p:sp>
         <p:nvSpPr>
-          <p:cNvPr id="43" name="Text 41"/>
-          <p:cNvSpPr/>
-          <p:nvPr/>
-        </p:nvSpPr>
-        <p:spPr>
-          <a:xfrm>
-            <a:off x="2917122" y="4549445"/>
-            <a:ext cx="810947" cy="132791"/>
-          </a:xfrm>
-          <a:prstGeom prst="rect">
-            <a:avLst/>
-          </a:prstGeom>
-          <a:noFill/>
-          <a:ln/>
-        </p:spPr>
-        <p:txBody>
-          <a:bodyPr wrap="square" rtlCol="0" anchor="ctr"/>
+          <p:cNvPr id="31" name="Text 29"/>
+          <p:cNvSpPr/>
+          <p:nvPr/>
+        </p:nvSpPr>
+        <p:spPr>
+          <a:xfrm>
+            <a:off x="10320551" y="2616415"/>
+            <a:ext cx="1391603" cy="368378"/>
+          </a:xfrm>
+          <a:prstGeom prst="rect">
+            <a:avLst/>
+          </a:prstGeom>
+          <a:noFill/>
+          <a:ln/>
+        </p:spPr>
+        <p:txBody>
+          <a:bodyPr wrap="square" lIns="0" tIns="0" rIns="0" bIns="0" rtlCol="0" anchor="ctr"/>
           <a:lstStyle/>
           <a:p>
             <a:pPr algn="ctr" indent="0" marL="0">
               <a:buNone/>
             </a:pPr>
             <a:r>
-              <a:rPr lang="en-US" sz="1100" b="1" dirty="0">
+              <a:rPr lang="en-US" sz="1200" b="1" dirty="0">
                 <a:solidFill>
                   <a:srgbClr val="FFFFFF"/>
                 </a:solidFill>
@@ -11613,26 +10827,26 @@
                 <a:ea typeface="Trebuchet MS" pitchFamily="34" charset="-122"/>
                 <a:cs typeface="Trebuchet MS" pitchFamily="34" charset="-120"/>
               </a:rPr>
-              <a:t>Renderer</a:t>
-            </a:r>
-            <a:endParaRPr lang="en-US" sz="1100" dirty="0"/>
-          </a:p>
-        </p:txBody>
-      </p:sp>
-      <p:sp>
-        <p:nvSpPr>
-          <p:cNvPr id="44" name="Shape 42"/>
-          <p:cNvSpPr/>
-          <p:nvPr/>
-        </p:nvSpPr>
-        <p:spPr>
-          <a:xfrm>
-            <a:off x="406390" y="4914900"/>
-            <a:ext cx="11378916" cy="831850"/>
+              <a:t>Renderer Multipli</a:t>
+            </a:r>
+            <a:endParaRPr lang="en-US" sz="1200" dirty="0"/>
+          </a:p>
+        </p:txBody>
+      </p:sp>
+      <p:sp>
+        <p:nvSpPr>
+          <p:cNvPr id="32" name="Shape 30"/>
+          <p:cNvSpPr/>
+          <p:nvPr/>
+        </p:nvSpPr>
+        <p:spPr>
+          <a:xfrm>
+            <a:off x="406390" y="3467100"/>
+            <a:ext cx="11378916" cy="965200"/>
           </a:xfrm>
           <a:prstGeom prst="roundRect">
             <a:avLst>
-              <a:gd name="adj" fmla="val 8794"/>
+              <a:gd name="adj" fmla="val 7579"/>
             </a:avLst>
           </a:prstGeom>
           <a:solidFill>
@@ -11648,14 +10862,14 @@
       </p:sp>
       <p:sp>
         <p:nvSpPr>
-          <p:cNvPr id="45" name="Text 43"/>
-          <p:cNvSpPr/>
-          <p:nvPr/>
-        </p:nvSpPr>
-        <p:spPr>
-          <a:xfrm>
-            <a:off x="543550" y="4988052"/>
-            <a:ext cx="11104596" cy="274320"/>
+          <p:cNvPr id="33" name="Text 31"/>
+          <p:cNvSpPr/>
+          <p:nvPr/>
+        </p:nvSpPr>
+        <p:spPr>
+          <a:xfrm>
+            <a:off x="589270" y="3613404"/>
+            <a:ext cx="11013156" cy="274320"/>
           </a:xfrm>
           <a:prstGeom prst="rect">
             <a:avLst/>
@@ -11687,14 +10901,14 @@
       </p:sp>
       <p:sp>
         <p:nvSpPr>
-          <p:cNvPr id="46" name="Text 44"/>
-          <p:cNvSpPr/>
-          <p:nvPr/>
-        </p:nvSpPr>
-        <p:spPr>
-          <a:xfrm>
-            <a:off x="543550" y="5308092"/>
-            <a:ext cx="11104596" cy="365506"/>
+          <p:cNvPr id="34" name="Text 32"/>
+          <p:cNvSpPr/>
+          <p:nvPr/>
+        </p:nvSpPr>
+        <p:spPr>
+          <a:xfrm>
+            <a:off x="589270" y="3942588"/>
+            <a:ext cx="11013156" cy="361696"/>
           </a:xfrm>
           <a:prstGeom prst="rect">
             <a:avLst/>
@@ -11726,7 +10940,7 @@
       </p:sp>
       <p:sp>
         <p:nvSpPr>
-          <p:cNvPr id="47" name="Text 45"/>
+          <p:cNvPr id="35" name="Text 33"/>
           <p:cNvSpPr/>
           <p:nvPr/>
         </p:nvSpPr>
@@ -12666,11 +11880,11 @@
         <p:spPr>
           <a:xfrm>
             <a:off x="406390" y="2019300"/>
-            <a:ext cx="6160616" cy="1905000"/>
+            <a:ext cx="6160616" cy="2476500"/>
           </a:xfrm>
           <a:prstGeom prst="roundRect">
             <a:avLst>
-              <a:gd name="adj" fmla="val 3840"/>
+              <a:gd name="adj" fmla="val 2954"/>
             </a:avLst>
           </a:prstGeom>
           <a:solidFill>
@@ -12767,17 +11981,17 @@
         </p:nvSpPr>
         <p:spPr>
           <a:xfrm>
-            <a:off x="589270" y="2311908"/>
-            <a:ext cx="5794856" cy="1539240"/>
-          </a:xfrm>
-          <a:prstGeom prst="rect">
-            <a:avLst/>
-          </a:prstGeom>
-          <a:noFill/>
-          <a:ln/>
-        </p:spPr>
-        <p:txBody>
-          <a:bodyPr wrap="square" rtlCol="0" anchor="t"/>
+            <a:off x="607558" y="2348484"/>
+            <a:ext cx="5758280" cy="2037588"/>
+          </a:xfrm>
+          <a:prstGeom prst="rect">
+            <a:avLst/>
+          </a:prstGeom>
+          <a:noFill/>
+          <a:ln/>
+        </p:spPr>
+        <p:txBody>
+          <a:bodyPr wrap="square" lIns="0" tIns="0" rIns="0" bIns="0" rtlCol="0" anchor="t"/>
           <a:lstStyle/>
           <a:p>
             <a:pPr indent="0" marL="0">
@@ -14500,11 +13714,11 @@
         <p:spPr>
           <a:xfrm>
             <a:off x="6184745" y="2019300"/>
-            <a:ext cx="5600560" cy="2057400"/>
+            <a:ext cx="5600560" cy="2438400"/>
           </a:xfrm>
           <a:prstGeom prst="roundRect">
             <a:avLst>
-              <a:gd name="adj" fmla="val 3556"/>
+              <a:gd name="adj" fmla="val 3000"/>
             </a:avLst>
           </a:prstGeom>
           <a:solidFill>
@@ -14527,7 +13741,7 @@
         <p:spPr>
           <a:xfrm>
             <a:off x="6203033" y="2055876"/>
-            <a:ext cx="54864" cy="1984248"/>
+            <a:ext cx="54864" cy="2365248"/>
           </a:xfrm>
           <a:prstGeom prst="roundRect">
             <a:avLst>
@@ -14588,11 +13802,11 @@
         <p:spPr>
           <a:xfrm>
             <a:off x="6413340" y="2705100"/>
-            <a:ext cx="5143371" cy="1016000"/>
+            <a:ext cx="5143371" cy="1397000"/>
           </a:xfrm>
           <a:prstGeom prst="roundRect">
             <a:avLst>
-              <a:gd name="adj" fmla="val 7200"/>
+              <a:gd name="adj" fmla="val 5236"/>
             </a:avLst>
           </a:prstGeom>
           <a:solidFill>
@@ -14689,24 +13903,24 @@
         </p:nvSpPr>
         <p:spPr>
           <a:xfrm>
-            <a:off x="6596220" y="2997708"/>
-            <a:ext cx="4777611" cy="650240"/>
-          </a:xfrm>
-          <a:prstGeom prst="rect">
-            <a:avLst/>
-          </a:prstGeom>
-          <a:noFill/>
-          <a:ln/>
-        </p:spPr>
-        <p:txBody>
-          <a:bodyPr wrap="square" rtlCol="0" anchor="t"/>
+            <a:off x="6614508" y="3034284"/>
+            <a:ext cx="4741035" cy="958088"/>
+          </a:xfrm>
+          <a:prstGeom prst="rect">
+            <a:avLst/>
+          </a:prstGeom>
+          <a:noFill/>
+          <a:ln/>
+        </p:spPr>
+        <p:txBody>
+          <a:bodyPr wrap="square" lIns="0" tIns="0" rIns="0" bIns="0" rtlCol="0" anchor="t"/>
           <a:lstStyle/>
           <a:p>
             <a:pPr indent="0" marL="0">
               <a:buNone/>
             </a:pPr>
             <a:r>
-              <a:rPr lang="en-US" sz="1150" dirty="0">
+              <a:rPr lang="en-US" sz="1000" dirty="0">
                 <a:solidFill>
                   <a:srgbClr val="00F0FF"/>
                 </a:solidFill>
@@ -14716,14 +13930,14 @@
               </a:rPr>
               <a:t>[YUM004] Alta densità informativa</a:t>
             </a:r>
-            <a:endParaRPr lang="en-US" sz="1150" dirty="0"/>
+            <a:endParaRPr lang="en-US" sz="1000" dirty="0"/>
           </a:p>
           <a:p>
             <a:pPr indent="0" marL="0">
               <a:buNone/>
             </a:pPr>
             <a:r>
-              <a:rPr lang="en-US" sz="1150" dirty="0">
+              <a:rPr lang="en-US" sz="1000" dirty="0">
                 <a:solidFill>
                   <a:srgbClr val="00F0FF"/>
                 </a:solidFill>
@@ -14733,14 +13947,14 @@
               </a:rPr>
               <a:t>La slide contiene troppi elementi complessi.</a:t>
             </a:r>
-            <a:endParaRPr lang="en-US" sz="1150" dirty="0"/>
+            <a:endParaRPr lang="en-US" sz="1000" dirty="0"/>
           </a:p>
           <a:p>
             <a:pPr indent="0" marL="0">
               <a:buNone/>
             </a:pPr>
             <a:r>
-              <a:rPr lang="en-US" sz="1150" dirty="0">
+              <a:rPr lang="en-US" sz="1000" dirty="0">
                 <a:solidFill>
                   <a:srgbClr val="00F0FF"/>
                 </a:solidFill>
@@ -14750,14 +13964,14 @@
               </a:rPr>
               <a:t>Suggerimento: dividere la slide o usare</a:t>
             </a:r>
-            <a:endParaRPr lang="en-US" sz="1150" dirty="0"/>
+            <a:endParaRPr lang="en-US" sz="1000" dirty="0"/>
           </a:p>
           <a:p>
             <a:pPr indent="0" marL="0">
               <a:buNone/>
             </a:pPr>
             <a:r>
-              <a:rPr lang="en-US" sz="1150" dirty="0">
+              <a:rPr lang="en-US" sz="1000" dirty="0">
                 <a:solidFill>
                   <a:srgbClr val="00F0FF"/>
                 </a:solidFill>
@@ -14767,7 +13981,7 @@
               </a:rPr>
               <a:t>una griglia di metriche.</a:t>
             </a:r>
-            <a:endParaRPr lang="en-US" sz="1150" dirty="0"/>
+            <a:endParaRPr lang="en-US" sz="1000" dirty="0"/>
           </a:p>
         </p:txBody>
       </p:sp>
@@ -14780,11 +13994,11 @@
         <p:spPr>
           <a:xfrm>
             <a:off x="406390" y="5791200"/>
-            <a:ext cx="11378916" cy="654050"/>
+            <a:ext cx="11378916" cy="774700"/>
           </a:xfrm>
           <a:prstGeom prst="roundRect">
             <a:avLst>
-              <a:gd name="adj" fmla="val 11184"/>
+              <a:gd name="adj" fmla="val 9443"/>
             </a:avLst>
           </a:prstGeom>
           <a:solidFill>
@@ -14806,8 +14020,8 @@
         </p:nvSpPr>
         <p:spPr>
           <a:xfrm>
-            <a:off x="543550" y="5864352"/>
-            <a:ext cx="11104596" cy="274320"/>
+            <a:off x="589270" y="5937504"/>
+            <a:ext cx="11013156" cy="274320"/>
           </a:xfrm>
           <a:prstGeom prst="rect">
             <a:avLst/>
@@ -14845,8 +14059,8 @@
         </p:nvSpPr>
         <p:spPr>
           <a:xfrm>
-            <a:off x="543550" y="6184392"/>
-            <a:ext cx="11104596" cy="187706"/>
+            <a:off x="589270" y="6266688"/>
+            <a:ext cx="11013156" cy="182880"/>
           </a:xfrm>
           <a:prstGeom prst="rect">
             <a:avLst/>

--- a/presentation.pptx
+++ b/presentation.pptx
@@ -2303,16 +2303,18 @@
         <p:spPr>
           <a:xfrm>
             <a:off x="406390" y="1701800"/>
-            <a:ext cx="11378916" cy="368300"/>
-          </a:xfrm>
-          <a:prstGeom prst="rect">
-            <a:avLst/>
-          </a:prstGeom>
-          <a:noFill/>
-          <a:ln/>
-        </p:spPr>
-        <p:txBody>
-          <a:bodyPr wrap="square" lIns="0" tIns="0" rIns="0" bIns="0" rtlCol="0" anchor="t"/>
+            <a:ext cx="11378916" cy="266700"/>
+          </a:xfrm>
+          <a:prstGeom prst="rect">
+            <a:avLst/>
+          </a:prstGeom>
+          <a:noFill/>
+          <a:ln/>
+        </p:spPr>
+        <p:txBody>
+          <a:bodyPr wrap="square" lIns="0" tIns="0" rIns="0" bIns="0" rtlCol="0" anchor="t">
+            <a:normAutofit/>
+          </a:bodyPr>
           <a:lstStyle/>
           <a:p>
             <a:pPr algn="ctr" indent="0" marL="0">
@@ -2491,11 +2493,11 @@
         <p:spPr>
           <a:xfrm>
             <a:off x="406390" y="2019300"/>
-            <a:ext cx="3674441" cy="2006600"/>
+            <a:ext cx="3725240" cy="1752600"/>
           </a:xfrm>
           <a:prstGeom prst="roundRect">
             <a:avLst>
-              <a:gd name="adj" fmla="val 3646"/>
+              <a:gd name="adj" fmla="val 4174"/>
             </a:avLst>
           </a:prstGeom>
           <a:solidFill>
@@ -2518,7 +2520,7 @@
         <p:spPr>
           <a:xfrm>
             <a:off x="424678" y="2055876"/>
-            <a:ext cx="54864" cy="1933448"/>
+            <a:ext cx="54864" cy="1679448"/>
           </a:xfrm>
           <a:prstGeom prst="roundRect">
             <a:avLst>
@@ -2540,7 +2542,7 @@
         <p:spPr>
           <a:xfrm>
             <a:off x="634990" y="2129028"/>
-            <a:ext cx="3217241" cy="274320"/>
+            <a:ext cx="3268040" cy="274320"/>
           </a:xfrm>
           <a:prstGeom prst="rect">
             <a:avLst/>
@@ -2578,8 +2580,8 @@
         </p:nvSpPr>
         <p:spPr>
           <a:xfrm>
-            <a:off x="634984" y="2705100"/>
-            <a:ext cx="3217253" cy="965200"/>
+            <a:off x="584185" y="2552700"/>
+            <a:ext cx="3369649" cy="965200"/>
           </a:xfrm>
           <a:prstGeom prst="roundRect">
             <a:avLst>
@@ -2605,7 +2607,7 @@
         </p:nvSpPr>
         <p:spPr>
           <a:xfrm>
-            <a:off x="772144" y="2814828"/>
+            <a:off x="721345" y="2662428"/>
             <a:ext cx="91440" cy="91440"/>
           </a:xfrm>
           <a:prstGeom prst="ellipse">
@@ -2630,7 +2632,7 @@
         </p:nvSpPr>
         <p:spPr>
           <a:xfrm>
-            <a:off x="909304" y="2814828"/>
+            <a:off x="858505" y="2662428"/>
             <a:ext cx="91440" cy="91440"/>
           </a:xfrm>
           <a:prstGeom prst="ellipse">
@@ -2655,7 +2657,7 @@
         </p:nvSpPr>
         <p:spPr>
           <a:xfrm>
-            <a:off x="1046464" y="2814828"/>
+            <a:off x="995665" y="2662428"/>
             <a:ext cx="91440" cy="91440"/>
           </a:xfrm>
           <a:prstGeom prst="ellipse">
@@ -2680,8 +2682,8 @@
         </p:nvSpPr>
         <p:spPr>
           <a:xfrm>
-            <a:off x="836152" y="3034284"/>
-            <a:ext cx="2814917" cy="526288"/>
+            <a:off x="785353" y="2881884"/>
+            <a:ext cx="2967313" cy="526288"/>
           </a:xfrm>
           <a:prstGeom prst="rect">
             <a:avLst/>
@@ -2736,12 +2738,12 @@
         </p:nvSpPr>
         <p:spPr>
           <a:xfrm>
-            <a:off x="4258627" y="2019300"/>
-            <a:ext cx="3674441" cy="2006600"/>
+            <a:off x="4233228" y="2019300"/>
+            <a:ext cx="3725240" cy="1752600"/>
           </a:xfrm>
           <a:prstGeom prst="roundRect">
             <a:avLst>
-              <a:gd name="adj" fmla="val 3646"/>
+              <a:gd name="adj" fmla="val 4174"/>
             </a:avLst>
           </a:prstGeom>
           <a:solidFill>
@@ -2763,8 +2765,8 @@
         </p:nvSpPr>
         <p:spPr>
           <a:xfrm>
-            <a:off x="4276915" y="2055876"/>
-            <a:ext cx="54864" cy="1933448"/>
+            <a:off x="4251516" y="2055876"/>
+            <a:ext cx="54864" cy="1679448"/>
           </a:xfrm>
           <a:prstGeom prst="roundRect">
             <a:avLst>
@@ -2785,8 +2787,8 @@
         </p:nvSpPr>
         <p:spPr>
           <a:xfrm>
-            <a:off x="4487227" y="2129028"/>
-            <a:ext cx="3217241" cy="274320"/>
+            <a:off x="4461828" y="2129028"/>
+            <a:ext cx="3268040" cy="274320"/>
           </a:xfrm>
           <a:prstGeom prst="rect">
             <a:avLst/>
@@ -2824,8 +2826,8 @@
         </p:nvSpPr>
         <p:spPr>
           <a:xfrm>
-            <a:off x="4487221" y="2705100"/>
-            <a:ext cx="3217253" cy="965200"/>
+            <a:off x="4411023" y="2552700"/>
+            <a:ext cx="3369649" cy="965200"/>
           </a:xfrm>
           <a:prstGeom prst="roundRect">
             <a:avLst>
@@ -2851,7 +2853,7 @@
         </p:nvSpPr>
         <p:spPr>
           <a:xfrm>
-            <a:off x="4624381" y="2814828"/>
+            <a:off x="4548183" y="2662428"/>
             <a:ext cx="91440" cy="91440"/>
           </a:xfrm>
           <a:prstGeom prst="ellipse">
@@ -2876,7 +2878,7 @@
         </p:nvSpPr>
         <p:spPr>
           <a:xfrm>
-            <a:off x="4761541" y="2814828"/>
+            <a:off x="4685343" y="2662428"/>
             <a:ext cx="91440" cy="91440"/>
           </a:xfrm>
           <a:prstGeom prst="ellipse">
@@ -2901,7 +2903,7 @@
         </p:nvSpPr>
         <p:spPr>
           <a:xfrm>
-            <a:off x="4898701" y="2814828"/>
+            <a:off x="4822503" y="2662428"/>
             <a:ext cx="91440" cy="91440"/>
           </a:xfrm>
           <a:prstGeom prst="ellipse">
@@ -2926,8 +2928,8 @@
         </p:nvSpPr>
         <p:spPr>
           <a:xfrm>
-            <a:off x="4688389" y="3034284"/>
-            <a:ext cx="2814917" cy="526288"/>
+            <a:off x="4612191" y="2881884"/>
+            <a:ext cx="2967313" cy="526288"/>
           </a:xfrm>
           <a:prstGeom prst="rect">
             <a:avLst/>
@@ -2982,12 +2984,12 @@
         </p:nvSpPr>
         <p:spPr>
           <a:xfrm>
-            <a:off x="8110864" y="2019300"/>
-            <a:ext cx="3674441" cy="2006600"/>
+            <a:off x="8060065" y="2019300"/>
+            <a:ext cx="3725240" cy="1752600"/>
           </a:xfrm>
           <a:prstGeom prst="roundRect">
             <a:avLst>
-              <a:gd name="adj" fmla="val 3646"/>
+              <a:gd name="adj" fmla="val 4174"/>
             </a:avLst>
           </a:prstGeom>
           <a:solidFill>
@@ -3009,8 +3011,8 @@
         </p:nvSpPr>
         <p:spPr>
           <a:xfrm>
-            <a:off x="8129152" y="2055876"/>
-            <a:ext cx="54864" cy="1933448"/>
+            <a:off x="8078353" y="2055876"/>
+            <a:ext cx="54864" cy="1679448"/>
           </a:xfrm>
           <a:prstGeom prst="roundRect">
             <a:avLst>
@@ -3031,8 +3033,8 @@
         </p:nvSpPr>
         <p:spPr>
           <a:xfrm>
-            <a:off x="8339464" y="2129028"/>
-            <a:ext cx="3217241" cy="274320"/>
+            <a:off x="8288665" y="2129028"/>
+            <a:ext cx="3268040" cy="274320"/>
           </a:xfrm>
           <a:prstGeom prst="rect">
             <a:avLst/>
@@ -3070,8 +3072,8 @@
         </p:nvSpPr>
         <p:spPr>
           <a:xfrm>
-            <a:off x="8339458" y="2705100"/>
-            <a:ext cx="3217253" cy="965200"/>
+            <a:off x="8237861" y="2552700"/>
+            <a:ext cx="3369649" cy="965200"/>
           </a:xfrm>
           <a:prstGeom prst="roundRect">
             <a:avLst>
@@ -3097,7 +3099,7 @@
         </p:nvSpPr>
         <p:spPr>
           <a:xfrm>
-            <a:off x="8476618" y="2814828"/>
+            <a:off x="8375021" y="2662428"/>
             <a:ext cx="91440" cy="91440"/>
           </a:xfrm>
           <a:prstGeom prst="ellipse">
@@ -3122,7 +3124,7 @@
         </p:nvSpPr>
         <p:spPr>
           <a:xfrm>
-            <a:off x="8613778" y="2814828"/>
+            <a:off x="8512181" y="2662428"/>
             <a:ext cx="91440" cy="91440"/>
           </a:xfrm>
           <a:prstGeom prst="ellipse">
@@ -3147,7 +3149,7 @@
         </p:nvSpPr>
         <p:spPr>
           <a:xfrm>
-            <a:off x="8750938" y="2814828"/>
+            <a:off x="8649341" y="2662428"/>
             <a:ext cx="91440" cy="91440"/>
           </a:xfrm>
           <a:prstGeom prst="ellipse">
@@ -3172,8 +3174,8 @@
         </p:nvSpPr>
         <p:spPr>
           <a:xfrm>
-            <a:off x="8540626" y="3034284"/>
-            <a:ext cx="2814917" cy="526288"/>
+            <a:off x="8439029" y="2881884"/>
+            <a:ext cx="2967313" cy="526288"/>
           </a:xfrm>
           <a:prstGeom prst="rect">
             <a:avLst/>
@@ -3228,7 +3230,7 @@
         </p:nvSpPr>
         <p:spPr>
           <a:xfrm>
-            <a:off x="406390" y="4381500"/>
+            <a:off x="406390" y="3949700"/>
             <a:ext cx="11378916" cy="774700"/>
           </a:xfrm>
           <a:prstGeom prst="roundRect">
@@ -3255,7 +3257,7 @@
         </p:nvSpPr>
         <p:spPr>
           <a:xfrm>
-            <a:off x="589270" y="4527804"/>
+            <a:off x="589270" y="4096004"/>
             <a:ext cx="11013156" cy="274320"/>
           </a:xfrm>
           <a:prstGeom prst="rect">
@@ -3294,7 +3296,7 @@
         </p:nvSpPr>
         <p:spPr>
           <a:xfrm>
-            <a:off x="589270" y="4856988"/>
+            <a:off x="589270" y="4425188"/>
             <a:ext cx="11013156" cy="182880"/>
           </a:xfrm>
           <a:prstGeom prst="rect">
@@ -3483,11 +3485,11 @@
         <p:spPr>
           <a:xfrm>
             <a:off x="406390" y="2019300"/>
-            <a:ext cx="5460858" cy="4089400"/>
+            <a:ext cx="5460858" cy="2463800"/>
           </a:xfrm>
           <a:prstGeom prst="roundRect">
             <a:avLst>
-              <a:gd name="adj" fmla="val 2236"/>
+              <a:gd name="adj" fmla="val 3711"/>
             </a:avLst>
           </a:prstGeom>
           <a:solidFill>
@@ -3549,11 +3551,11 @@
         <p:spPr>
           <a:xfrm>
             <a:off x="6324448" y="2019300"/>
-            <a:ext cx="5460858" cy="4089400"/>
+            <a:ext cx="5460858" cy="2463800"/>
           </a:xfrm>
           <a:prstGeom prst="roundRect">
             <a:avLst>
-              <a:gd name="adj" fmla="val 2236"/>
+              <a:gd name="adj" fmla="val 3711"/>
             </a:avLst>
           </a:prstGeom>
           <a:solidFill>
@@ -3614,7 +3616,7 @@
         </p:nvSpPr>
         <p:spPr>
           <a:xfrm>
-            <a:off x="5903824" y="3871976"/>
+            <a:off x="5903824" y="3059176"/>
             <a:ext cx="384048" cy="384048"/>
           </a:xfrm>
           <a:prstGeom prst="ellipse">
@@ -3639,7 +3641,7 @@
         </p:nvSpPr>
         <p:spPr>
           <a:xfrm>
-            <a:off x="5903824" y="3871976"/>
+            <a:off x="5903824" y="3059176"/>
             <a:ext cx="384048" cy="384048"/>
           </a:xfrm>
           <a:prstGeom prst="rect">
@@ -3745,16 +3747,18 @@
         <p:spPr>
           <a:xfrm>
             <a:off x="584185" y="2971800"/>
-            <a:ext cx="5156071" cy="673100"/>
-          </a:xfrm>
-          <a:prstGeom prst="rect">
-            <a:avLst/>
-          </a:prstGeom>
-          <a:noFill/>
-          <a:ln/>
-        </p:spPr>
-        <p:txBody>
-          <a:bodyPr wrap="square" lIns="0" tIns="0" rIns="0" bIns="0" rtlCol="0" anchor="t"/>
+            <a:ext cx="5156071" cy="266700"/>
+          </a:xfrm>
+          <a:prstGeom prst="rect">
+            <a:avLst/>
+          </a:prstGeom>
+          <a:noFill/>
+          <a:ln/>
+        </p:spPr>
+        <p:txBody>
+          <a:bodyPr wrap="square" lIns="0" tIns="0" rIns="0" bIns="0" rtlCol="0" anchor="t">
+            <a:normAutofit/>
+          </a:bodyPr>
           <a:lstStyle/>
           <a:p>
             <a:pPr algn="l" indent="0" marL="0">
@@ -3783,17 +3787,19 @@
         </p:nvSpPr>
         <p:spPr>
           <a:xfrm>
-            <a:off x="584185" y="3733800"/>
-            <a:ext cx="5156071" cy="673100"/>
-          </a:xfrm>
-          <a:prstGeom prst="rect">
-            <a:avLst/>
-          </a:prstGeom>
-          <a:noFill/>
-          <a:ln/>
-        </p:spPr>
-        <p:txBody>
-          <a:bodyPr wrap="square" lIns="0" tIns="0" rIns="0" bIns="0" rtlCol="0" anchor="t"/>
+            <a:off x="584185" y="3327400"/>
+            <a:ext cx="5156071" cy="266700"/>
+          </a:xfrm>
+          <a:prstGeom prst="rect">
+            <a:avLst/>
+          </a:prstGeom>
+          <a:noFill/>
+          <a:ln/>
+        </p:spPr>
+        <p:txBody>
+          <a:bodyPr wrap="square" lIns="0" tIns="0" rIns="0" bIns="0" rtlCol="0" anchor="t">
+            <a:normAutofit/>
+          </a:bodyPr>
           <a:lstStyle/>
           <a:p>
             <a:pPr algn="l" indent="0" marL="0">
@@ -3822,17 +3828,19 @@
         </p:nvSpPr>
         <p:spPr>
           <a:xfrm>
-            <a:off x="584185" y="4495800"/>
-            <a:ext cx="5156071" cy="673100"/>
-          </a:xfrm>
-          <a:prstGeom prst="rect">
-            <a:avLst/>
-          </a:prstGeom>
-          <a:noFill/>
-          <a:ln/>
-        </p:spPr>
-        <p:txBody>
-          <a:bodyPr wrap="square" lIns="0" tIns="0" rIns="0" bIns="0" rtlCol="0" anchor="t"/>
+            <a:off x="584185" y="3683000"/>
+            <a:ext cx="5156071" cy="266700"/>
+          </a:xfrm>
+          <a:prstGeom prst="rect">
+            <a:avLst/>
+          </a:prstGeom>
+          <a:noFill/>
+          <a:ln/>
+        </p:spPr>
+        <p:txBody>
+          <a:bodyPr wrap="square" lIns="0" tIns="0" rIns="0" bIns="0" rtlCol="0" anchor="t">
+            <a:normAutofit/>
+          </a:bodyPr>
           <a:lstStyle/>
           <a:p>
             <a:pPr algn="l" indent="0" marL="0">
@@ -3861,17 +3869,19 @@
         </p:nvSpPr>
         <p:spPr>
           <a:xfrm>
-            <a:off x="584185" y="5257800"/>
-            <a:ext cx="5156071" cy="368300"/>
-          </a:xfrm>
-          <a:prstGeom prst="rect">
-            <a:avLst/>
-          </a:prstGeom>
-          <a:noFill/>
-          <a:ln/>
-        </p:spPr>
-        <p:txBody>
-          <a:bodyPr wrap="square" lIns="0" tIns="0" rIns="0" bIns="0" rtlCol="0" anchor="t"/>
+            <a:off x="584185" y="4038600"/>
+            <a:ext cx="5156071" cy="266700"/>
+          </a:xfrm>
+          <a:prstGeom prst="rect">
+            <a:avLst/>
+          </a:prstGeom>
+          <a:noFill/>
+          <a:ln/>
+        </p:spPr>
+        <p:txBody>
+          <a:bodyPr wrap="square" lIns="0" tIns="0" rIns="0" bIns="0" rtlCol="0" anchor="t">
+            <a:normAutofit/>
+          </a:bodyPr>
           <a:lstStyle/>
           <a:p>
             <a:pPr algn="l" indent="0" marL="0">
@@ -3967,16 +3977,18 @@
         <p:spPr>
           <a:xfrm>
             <a:off x="6451439" y="2971800"/>
-            <a:ext cx="5156071" cy="673100"/>
-          </a:xfrm>
-          <a:prstGeom prst="rect">
-            <a:avLst/>
-          </a:prstGeom>
-          <a:noFill/>
-          <a:ln/>
-        </p:spPr>
-        <p:txBody>
-          <a:bodyPr wrap="square" lIns="0" tIns="0" rIns="0" bIns="0" rtlCol="0" anchor="t"/>
+            <a:ext cx="5156071" cy="266700"/>
+          </a:xfrm>
+          <a:prstGeom prst="rect">
+            <a:avLst/>
+          </a:prstGeom>
+          <a:noFill/>
+          <a:ln/>
+        </p:spPr>
+        <p:txBody>
+          <a:bodyPr wrap="square" lIns="0" tIns="0" rIns="0" bIns="0" rtlCol="0" anchor="t">
+            <a:normAutofit/>
+          </a:bodyPr>
           <a:lstStyle/>
           <a:p>
             <a:pPr algn="l" indent="0" marL="0">
@@ -4005,17 +4017,19 @@
         </p:nvSpPr>
         <p:spPr>
           <a:xfrm>
-            <a:off x="6451439" y="3733800"/>
-            <a:ext cx="5156071" cy="673100"/>
-          </a:xfrm>
-          <a:prstGeom prst="rect">
-            <a:avLst/>
-          </a:prstGeom>
-          <a:noFill/>
-          <a:ln/>
-        </p:spPr>
-        <p:txBody>
-          <a:bodyPr wrap="square" lIns="0" tIns="0" rIns="0" bIns="0" rtlCol="0" anchor="t"/>
+            <a:off x="6451439" y="3327400"/>
+            <a:ext cx="5156071" cy="266700"/>
+          </a:xfrm>
+          <a:prstGeom prst="rect">
+            <a:avLst/>
+          </a:prstGeom>
+          <a:noFill/>
+          <a:ln/>
+        </p:spPr>
+        <p:txBody>
+          <a:bodyPr wrap="square" lIns="0" tIns="0" rIns="0" bIns="0" rtlCol="0" anchor="t">
+            <a:normAutofit/>
+          </a:bodyPr>
           <a:lstStyle/>
           <a:p>
             <a:pPr algn="l" indent="0" marL="0">
@@ -4044,17 +4058,19 @@
         </p:nvSpPr>
         <p:spPr>
           <a:xfrm>
-            <a:off x="6451439" y="4495800"/>
-            <a:ext cx="5156071" cy="673100"/>
-          </a:xfrm>
-          <a:prstGeom prst="rect">
-            <a:avLst/>
-          </a:prstGeom>
-          <a:noFill/>
-          <a:ln/>
-        </p:spPr>
-        <p:txBody>
-          <a:bodyPr wrap="square" lIns="0" tIns="0" rIns="0" bIns="0" rtlCol="0" anchor="t"/>
+            <a:off x="6451439" y="3683000"/>
+            <a:ext cx="5156071" cy="266700"/>
+          </a:xfrm>
+          <a:prstGeom prst="rect">
+            <a:avLst/>
+          </a:prstGeom>
+          <a:noFill/>
+          <a:ln/>
+        </p:spPr>
+        <p:txBody>
+          <a:bodyPr wrap="square" lIns="0" tIns="0" rIns="0" bIns="0" rtlCol="0" anchor="t">
+            <a:normAutofit/>
+          </a:bodyPr>
           <a:lstStyle/>
           <a:p>
             <a:pPr algn="l" indent="0" marL="0">
@@ -4083,17 +4099,19 @@
         </p:nvSpPr>
         <p:spPr>
           <a:xfrm>
-            <a:off x="6451439" y="5257800"/>
-            <a:ext cx="5156071" cy="673100"/>
-          </a:xfrm>
-          <a:prstGeom prst="rect">
-            <a:avLst/>
-          </a:prstGeom>
-          <a:noFill/>
-          <a:ln/>
-        </p:spPr>
-        <p:txBody>
-          <a:bodyPr wrap="square" lIns="0" tIns="0" rIns="0" bIns="0" rtlCol="0" anchor="t"/>
+            <a:off x="6451439" y="4038600"/>
+            <a:ext cx="5156071" cy="266700"/>
+          </a:xfrm>
+          <a:prstGeom prst="rect">
+            <a:avLst/>
+          </a:prstGeom>
+          <a:noFill/>
+          <a:ln/>
+        </p:spPr>
+        <p:txBody>
+          <a:bodyPr wrap="square" lIns="0" tIns="0" rIns="0" bIns="0" rtlCol="0" anchor="t">
+            <a:normAutofit/>
+          </a:bodyPr>
           <a:lstStyle/>
           <a:p>
             <a:pPr algn="l" indent="0" marL="0">
@@ -4272,11 +4290,11 @@
         <p:spPr>
           <a:xfrm>
             <a:off x="406390" y="2019300"/>
-            <a:ext cx="3674441" cy="2019300"/>
+            <a:ext cx="3725240" cy="1270000"/>
           </a:xfrm>
           <a:prstGeom prst="roundRect">
             <a:avLst>
-              <a:gd name="adj" fmla="val 3623"/>
+              <a:gd name="adj" fmla="val 5760"/>
             </a:avLst>
           </a:prstGeom>
           <a:solidFill>
@@ -4299,7 +4317,7 @@
         <p:spPr>
           <a:xfrm>
             <a:off x="424678" y="2055876"/>
-            <a:ext cx="54864" cy="1946148"/>
+            <a:ext cx="54864" cy="1196848"/>
           </a:xfrm>
           <a:prstGeom prst="roundRect">
             <a:avLst>
@@ -4321,7 +4339,7 @@
         <p:spPr>
           <a:xfrm>
             <a:off x="634990" y="2129028"/>
-            <a:ext cx="3217241" cy="274320"/>
+            <a:ext cx="3268040" cy="274320"/>
           </a:xfrm>
           <a:prstGeom prst="rect">
             <a:avLst/>
@@ -4359,8 +4377,8 @@
         </p:nvSpPr>
         <p:spPr>
           <a:xfrm>
-            <a:off x="634984" y="2705100"/>
-            <a:ext cx="3217253" cy="977900"/>
+            <a:off x="584185" y="2552700"/>
+            <a:ext cx="3369649" cy="482600"/>
           </a:xfrm>
           <a:prstGeom prst="rect">
             <a:avLst/>
@@ -4398,12 +4416,12 @@
         </p:nvSpPr>
         <p:spPr>
           <a:xfrm>
-            <a:off x="4258627" y="2019300"/>
-            <a:ext cx="3674441" cy="2019300"/>
+            <a:off x="4233228" y="2019300"/>
+            <a:ext cx="3725240" cy="1270000"/>
           </a:xfrm>
           <a:prstGeom prst="roundRect">
             <a:avLst>
-              <a:gd name="adj" fmla="val 3623"/>
+              <a:gd name="adj" fmla="val 5760"/>
             </a:avLst>
           </a:prstGeom>
           <a:solidFill>
@@ -4425,8 +4443,8 @@
         </p:nvSpPr>
         <p:spPr>
           <a:xfrm>
-            <a:off x="4276915" y="2055876"/>
-            <a:ext cx="54864" cy="1946148"/>
+            <a:off x="4251516" y="2055876"/>
+            <a:ext cx="54864" cy="1196848"/>
           </a:xfrm>
           <a:prstGeom prst="roundRect">
             <a:avLst>
@@ -4447,8 +4465,8 @@
         </p:nvSpPr>
         <p:spPr>
           <a:xfrm>
-            <a:off x="4487227" y="2129028"/>
-            <a:ext cx="3217241" cy="274320"/>
+            <a:off x="4461828" y="2129028"/>
+            <a:ext cx="3268040" cy="274320"/>
           </a:xfrm>
           <a:prstGeom prst="rect">
             <a:avLst/>
@@ -4486,8 +4504,8 @@
         </p:nvSpPr>
         <p:spPr>
           <a:xfrm>
-            <a:off x="4487221" y="2705100"/>
-            <a:ext cx="3217253" cy="977900"/>
+            <a:off x="4411023" y="2552700"/>
+            <a:ext cx="3369649" cy="482600"/>
           </a:xfrm>
           <a:prstGeom prst="rect">
             <a:avLst/>
@@ -4525,12 +4543,12 @@
         </p:nvSpPr>
         <p:spPr>
           <a:xfrm>
-            <a:off x="8110864" y="2019300"/>
-            <a:ext cx="3674441" cy="2019300"/>
+            <a:off x="8060065" y="2019300"/>
+            <a:ext cx="3725240" cy="1270000"/>
           </a:xfrm>
           <a:prstGeom prst="roundRect">
             <a:avLst>
-              <a:gd name="adj" fmla="val 3623"/>
+              <a:gd name="adj" fmla="val 5760"/>
             </a:avLst>
           </a:prstGeom>
           <a:solidFill>
@@ -4552,8 +4570,8 @@
         </p:nvSpPr>
         <p:spPr>
           <a:xfrm>
-            <a:off x="8129152" y="2055876"/>
-            <a:ext cx="54864" cy="1946148"/>
+            <a:off x="8078353" y="2055876"/>
+            <a:ext cx="54864" cy="1196848"/>
           </a:xfrm>
           <a:prstGeom prst="roundRect">
             <a:avLst>
@@ -4574,8 +4592,8 @@
         </p:nvSpPr>
         <p:spPr>
           <a:xfrm>
-            <a:off x="8339464" y="2129028"/>
-            <a:ext cx="3217241" cy="274320"/>
+            <a:off x="8288665" y="2129028"/>
+            <a:ext cx="3268040" cy="274320"/>
           </a:xfrm>
           <a:prstGeom prst="rect">
             <a:avLst/>
@@ -4613,8 +4631,8 @@
         </p:nvSpPr>
         <p:spPr>
           <a:xfrm>
-            <a:off x="8339458" y="2705100"/>
-            <a:ext cx="3217253" cy="977900"/>
+            <a:off x="8237861" y="2552700"/>
+            <a:ext cx="3369649" cy="482600"/>
           </a:xfrm>
           <a:prstGeom prst="rect">
             <a:avLst/>
@@ -4652,12 +4670,12 @@
         </p:nvSpPr>
         <p:spPr>
           <a:xfrm>
-            <a:off x="406390" y="4216400"/>
-            <a:ext cx="3674441" cy="2019300"/>
+            <a:off x="406390" y="3390900"/>
+            <a:ext cx="3725240" cy="1270000"/>
           </a:xfrm>
           <a:prstGeom prst="roundRect">
             <a:avLst>
-              <a:gd name="adj" fmla="val 3623"/>
+              <a:gd name="adj" fmla="val 5760"/>
             </a:avLst>
           </a:prstGeom>
           <a:solidFill>
@@ -4679,8 +4697,8 @@
         </p:nvSpPr>
         <p:spPr>
           <a:xfrm>
-            <a:off x="424678" y="4252976"/>
-            <a:ext cx="54864" cy="1946148"/>
+            <a:off x="424678" y="3427476"/>
+            <a:ext cx="54864" cy="1196848"/>
           </a:xfrm>
           <a:prstGeom prst="roundRect">
             <a:avLst>
@@ -4701,8 +4719,8 @@
         </p:nvSpPr>
         <p:spPr>
           <a:xfrm>
-            <a:off x="634990" y="4326128"/>
-            <a:ext cx="3217241" cy="274320"/>
+            <a:off x="634990" y="3500628"/>
+            <a:ext cx="3268040" cy="274320"/>
           </a:xfrm>
           <a:prstGeom prst="rect">
             <a:avLst/>
@@ -4740,8 +4758,8 @@
         </p:nvSpPr>
         <p:spPr>
           <a:xfrm>
-            <a:off x="634984" y="4902200"/>
-            <a:ext cx="3217253" cy="977900"/>
+            <a:off x="584185" y="3924300"/>
+            <a:ext cx="3369649" cy="482600"/>
           </a:xfrm>
           <a:prstGeom prst="rect">
             <a:avLst/>
@@ -4779,12 +4797,12 @@
         </p:nvSpPr>
         <p:spPr>
           <a:xfrm>
-            <a:off x="4258627" y="4216400"/>
-            <a:ext cx="3674441" cy="2019300"/>
+            <a:off x="4233228" y="3390900"/>
+            <a:ext cx="3725240" cy="1270000"/>
           </a:xfrm>
           <a:prstGeom prst="roundRect">
             <a:avLst>
-              <a:gd name="adj" fmla="val 3623"/>
+              <a:gd name="adj" fmla="val 5760"/>
             </a:avLst>
           </a:prstGeom>
           <a:solidFill>
@@ -4806,8 +4824,8 @@
         </p:nvSpPr>
         <p:spPr>
           <a:xfrm>
-            <a:off x="4276915" y="4252976"/>
-            <a:ext cx="54864" cy="1946148"/>
+            <a:off x="4251516" y="3427476"/>
+            <a:ext cx="54864" cy="1196848"/>
           </a:xfrm>
           <a:prstGeom prst="roundRect">
             <a:avLst>
@@ -4828,8 +4846,8 @@
         </p:nvSpPr>
         <p:spPr>
           <a:xfrm>
-            <a:off x="4487227" y="4326128"/>
-            <a:ext cx="3217241" cy="274320"/>
+            <a:off x="4461828" y="3500628"/>
+            <a:ext cx="3268040" cy="274320"/>
           </a:xfrm>
           <a:prstGeom prst="rect">
             <a:avLst/>
@@ -4867,8 +4885,8 @@
         </p:nvSpPr>
         <p:spPr>
           <a:xfrm>
-            <a:off x="4487221" y="4902200"/>
-            <a:ext cx="3217253" cy="977900"/>
+            <a:off x="4411023" y="3924300"/>
+            <a:ext cx="3369649" cy="482600"/>
           </a:xfrm>
           <a:prstGeom prst="rect">
             <a:avLst/>
@@ -4906,12 +4924,12 @@
         </p:nvSpPr>
         <p:spPr>
           <a:xfrm>
-            <a:off x="8110864" y="4216400"/>
-            <a:ext cx="3674441" cy="2019300"/>
+            <a:off x="8060065" y="3390900"/>
+            <a:ext cx="3725240" cy="1270000"/>
           </a:xfrm>
           <a:prstGeom prst="roundRect">
             <a:avLst>
-              <a:gd name="adj" fmla="val 3623"/>
+              <a:gd name="adj" fmla="val 5760"/>
             </a:avLst>
           </a:prstGeom>
           <a:solidFill>
@@ -4933,8 +4951,8 @@
         </p:nvSpPr>
         <p:spPr>
           <a:xfrm>
-            <a:off x="8129152" y="4252976"/>
-            <a:ext cx="54864" cy="1946148"/>
+            <a:off x="8078353" y="3427476"/>
+            <a:ext cx="54864" cy="1196848"/>
           </a:xfrm>
           <a:prstGeom prst="roundRect">
             <a:avLst>
@@ -4955,8 +4973,8 @@
         </p:nvSpPr>
         <p:spPr>
           <a:xfrm>
-            <a:off x="8339464" y="4326128"/>
-            <a:ext cx="3217241" cy="274320"/>
+            <a:off x="8288665" y="3500628"/>
+            <a:ext cx="3268040" cy="274320"/>
           </a:xfrm>
           <a:prstGeom prst="rect">
             <a:avLst/>
@@ -4994,8 +5012,8 @@
         </p:nvSpPr>
         <p:spPr>
           <a:xfrm>
-            <a:off x="8339458" y="4902200"/>
-            <a:ext cx="3217253" cy="977900"/>
+            <a:off x="8237861" y="3924300"/>
+            <a:ext cx="3369649" cy="482600"/>
           </a:xfrm>
           <a:prstGeom prst="rect">
             <a:avLst/>
@@ -5183,11 +5201,11 @@
         <p:spPr>
           <a:xfrm>
             <a:off x="406390" y="2019300"/>
-            <a:ext cx="5600560" cy="1803400"/>
+            <a:ext cx="5600560" cy="1549400"/>
           </a:xfrm>
           <a:prstGeom prst="roundRect">
             <a:avLst>
-              <a:gd name="adj" fmla="val 4056"/>
+              <a:gd name="adj" fmla="val 4721"/>
             </a:avLst>
           </a:prstGeom>
           <a:solidFill>
@@ -5210,7 +5228,7 @@
         <p:spPr>
           <a:xfrm>
             <a:off x="424678" y="2055876"/>
-            <a:ext cx="54864" cy="1730248"/>
+            <a:ext cx="54864" cy="1476248"/>
           </a:xfrm>
           <a:prstGeom prst="roundRect">
             <a:avLst>
@@ -5270,8 +5288,8 @@
         </p:nvSpPr>
         <p:spPr>
           <a:xfrm>
-            <a:off x="634984" y="2705100"/>
-            <a:ext cx="5143371" cy="762000"/>
+            <a:off x="584185" y="2552700"/>
+            <a:ext cx="5244969" cy="762000"/>
           </a:xfrm>
           <a:prstGeom prst="roundRect">
             <a:avLst>
@@ -5297,7 +5315,7 @@
         </p:nvSpPr>
         <p:spPr>
           <a:xfrm>
-            <a:off x="772144" y="2814828"/>
+            <a:off x="721345" y="2662428"/>
             <a:ext cx="91440" cy="91440"/>
           </a:xfrm>
           <a:prstGeom prst="ellipse">
@@ -5322,7 +5340,7 @@
         </p:nvSpPr>
         <p:spPr>
           <a:xfrm>
-            <a:off x="909304" y="2814828"/>
+            <a:off x="858505" y="2662428"/>
             <a:ext cx="91440" cy="91440"/>
           </a:xfrm>
           <a:prstGeom prst="ellipse">
@@ -5347,7 +5365,7 @@
         </p:nvSpPr>
         <p:spPr>
           <a:xfrm>
-            <a:off x="1046464" y="2814828"/>
+            <a:off x="995665" y="2662428"/>
             <a:ext cx="91440" cy="91440"/>
           </a:xfrm>
           <a:prstGeom prst="ellipse">
@@ -5372,8 +5390,8 @@
         </p:nvSpPr>
         <p:spPr>
           <a:xfrm>
-            <a:off x="836152" y="3034284"/>
-            <a:ext cx="4741035" cy="323088"/>
+            <a:off x="785353" y="2881884"/>
+            <a:ext cx="4842633" cy="323088"/>
           </a:xfrm>
           <a:prstGeom prst="rect">
             <a:avLst/>
@@ -5411,17 +5429,19 @@
         </p:nvSpPr>
         <p:spPr>
           <a:xfrm>
-            <a:off x="406390" y="4000500"/>
-            <a:ext cx="5600560" cy="673100"/>
-          </a:xfrm>
-          <a:prstGeom prst="rect">
-            <a:avLst/>
-          </a:prstGeom>
-          <a:noFill/>
-          <a:ln/>
-        </p:spPr>
-        <p:txBody>
-          <a:bodyPr wrap="square" lIns="0" tIns="0" rIns="0" bIns="0" rtlCol="0" anchor="t"/>
+            <a:off x="406390" y="3746500"/>
+            <a:ext cx="5600560" cy="266700"/>
+          </a:xfrm>
+          <a:prstGeom prst="rect">
+            <a:avLst/>
+          </a:prstGeom>
+          <a:noFill/>
+          <a:ln/>
+        </p:spPr>
+        <p:txBody>
+          <a:bodyPr wrap="square" lIns="0" tIns="0" rIns="0" bIns="0" rtlCol="0" anchor="t">
+            <a:normAutofit/>
+          </a:bodyPr>
           <a:lstStyle/>
           <a:p>
             <a:pPr algn="l" indent="0" marL="0">
@@ -5451,11 +5471,11 @@
         <p:spPr>
           <a:xfrm>
             <a:off x="6184745" y="2019300"/>
-            <a:ext cx="5600560" cy="1803400"/>
+            <a:ext cx="5600560" cy="1549400"/>
           </a:xfrm>
           <a:prstGeom prst="roundRect">
             <a:avLst>
-              <a:gd name="adj" fmla="val 4056"/>
+              <a:gd name="adj" fmla="val 4721"/>
             </a:avLst>
           </a:prstGeom>
           <a:solidFill>
@@ -5478,7 +5498,7 @@
         <p:spPr>
           <a:xfrm>
             <a:off x="6203033" y="2055876"/>
-            <a:ext cx="54864" cy="1730248"/>
+            <a:ext cx="54864" cy="1476248"/>
           </a:xfrm>
           <a:prstGeom prst="roundRect">
             <a:avLst>
@@ -5538,8 +5558,8 @@
         </p:nvSpPr>
         <p:spPr>
           <a:xfrm>
-            <a:off x="6413340" y="2705100"/>
-            <a:ext cx="5143371" cy="762000"/>
+            <a:off x="6362541" y="2552700"/>
+            <a:ext cx="5244969" cy="762000"/>
           </a:xfrm>
           <a:prstGeom prst="roundRect">
             <a:avLst>
@@ -5565,7 +5585,7 @@
         </p:nvSpPr>
         <p:spPr>
           <a:xfrm>
-            <a:off x="6550500" y="2814828"/>
+            <a:off x="6499701" y="2662428"/>
             <a:ext cx="91440" cy="91440"/>
           </a:xfrm>
           <a:prstGeom prst="ellipse">
@@ -5590,7 +5610,7 @@
         </p:nvSpPr>
         <p:spPr>
           <a:xfrm>
-            <a:off x="6687660" y="2814828"/>
+            <a:off x="6636861" y="2662428"/>
             <a:ext cx="91440" cy="91440"/>
           </a:xfrm>
           <a:prstGeom prst="ellipse">
@@ -5615,7 +5635,7 @@
         </p:nvSpPr>
         <p:spPr>
           <a:xfrm>
-            <a:off x="6824820" y="2814828"/>
+            <a:off x="6774021" y="2662428"/>
             <a:ext cx="91440" cy="91440"/>
           </a:xfrm>
           <a:prstGeom prst="ellipse">
@@ -5640,8 +5660,8 @@
         </p:nvSpPr>
         <p:spPr>
           <a:xfrm>
-            <a:off x="6614508" y="3034284"/>
-            <a:ext cx="4741035" cy="323088"/>
+            <a:off x="6563709" y="2881884"/>
+            <a:ext cx="4842633" cy="323088"/>
           </a:xfrm>
           <a:prstGeom prst="rect">
             <a:avLst/>
@@ -5679,17 +5699,19 @@
         </p:nvSpPr>
         <p:spPr>
           <a:xfrm>
-            <a:off x="6184745" y="4000500"/>
-            <a:ext cx="5600560" cy="673100"/>
-          </a:xfrm>
-          <a:prstGeom prst="rect">
-            <a:avLst/>
-          </a:prstGeom>
-          <a:noFill/>
-          <a:ln/>
-        </p:spPr>
-        <p:txBody>
-          <a:bodyPr wrap="square" lIns="0" tIns="0" rIns="0" bIns="0" rtlCol="0" anchor="t"/>
+            <a:off x="6184745" y="3746500"/>
+            <a:ext cx="5600560" cy="266700"/>
+          </a:xfrm>
+          <a:prstGeom prst="rect">
+            <a:avLst/>
+          </a:prstGeom>
+          <a:noFill/>
+          <a:ln/>
+        </p:spPr>
+        <p:txBody>
+          <a:bodyPr wrap="square" lIns="0" tIns="0" rIns="0" bIns="0" rtlCol="0" anchor="t">
+            <a:normAutofit/>
+          </a:bodyPr>
           <a:lstStyle/>
           <a:p>
             <a:pPr algn="l" indent="0" marL="0">
@@ -5718,7 +5740,7 @@
         </p:nvSpPr>
         <p:spPr>
           <a:xfrm>
-            <a:off x="406390" y="4851400"/>
+            <a:off x="406390" y="4191000"/>
             <a:ext cx="11378916" cy="965200"/>
           </a:xfrm>
           <a:prstGeom prst="roundRect">
@@ -5745,7 +5767,7 @@
         </p:nvSpPr>
         <p:spPr>
           <a:xfrm>
-            <a:off x="589270" y="4997704"/>
+            <a:off x="589270" y="4337304"/>
             <a:ext cx="11013156" cy="274320"/>
           </a:xfrm>
           <a:prstGeom prst="rect">
@@ -5784,7 +5806,7 @@
         </p:nvSpPr>
         <p:spPr>
           <a:xfrm>
-            <a:off x="589270" y="5326888"/>
+            <a:off x="589270" y="4666488"/>
             <a:ext cx="11013156" cy="361696"/>
           </a:xfrm>
           <a:prstGeom prst="rect">
@@ -5973,11 +5995,11 @@
         <p:spPr>
           <a:xfrm>
             <a:off x="406390" y="2019300"/>
-            <a:ext cx="3674441" cy="5118100"/>
+            <a:ext cx="3725240" cy="2120900"/>
           </a:xfrm>
           <a:prstGeom prst="roundRect">
             <a:avLst>
-              <a:gd name="adj" fmla="val 1991"/>
+              <a:gd name="adj" fmla="val 3449"/>
             </a:avLst>
           </a:prstGeom>
           <a:solidFill>
@@ -6000,7 +6022,7 @@
         <p:spPr>
           <a:xfrm>
             <a:off x="424678" y="2055876"/>
-            <a:ext cx="54864" cy="5044948"/>
+            <a:ext cx="54864" cy="2047748"/>
           </a:xfrm>
           <a:prstGeom prst="roundRect">
             <a:avLst>
@@ -6022,7 +6044,7 @@
         <p:spPr>
           <a:xfrm>
             <a:off x="634990" y="2129028"/>
-            <a:ext cx="3217241" cy="274320"/>
+            <a:ext cx="3268040" cy="274320"/>
           </a:xfrm>
           <a:prstGeom prst="rect">
             <a:avLst/>
@@ -6060,8 +6082,8 @@
         </p:nvSpPr>
         <p:spPr>
           <a:xfrm>
-            <a:off x="634984" y="2705100"/>
-            <a:ext cx="3217253" cy="673100"/>
+            <a:off x="584185" y="2552700"/>
+            <a:ext cx="3369649" cy="1333500"/>
           </a:xfrm>
           <a:prstGeom prst="rect">
             <a:avLst/>
@@ -6073,11 +6095,15 @@
           <a:bodyPr wrap="square" lIns="0" tIns="0" rIns="0" bIns="0" rtlCol="0" anchor="t"/>
           <a:lstStyle/>
           <a:p>
-            <a:pPr algn="l" indent="0" marL="0">
-              <a:buNone/>
-            </a:pPr>
-            <a:r>
-              <a:rPr lang="en-US" sz="1300" dirty="0">
+            <a:pPr marL="342900" indent="-342900">
+              <a:spcAft>
+                <a:spcPts val="400"/>
+              </a:spcAft>
+              <a:buSzPct val="100000"/>
+              <a:buChar char="•"/>
+            </a:pPr>
+            <a:r>
+              <a:rPr lang="en-US" sz="1250" dirty="0">
                 <a:solidFill>
                   <a:srgbClr val="FFFFFF"/>
                 </a:solidFill>
@@ -6085,38 +6111,20 @@
                 <a:ea typeface="Segoe UI" pitchFamily="34" charset="-122"/>
                 <a:cs typeface="Segoe UI" pitchFamily="34" charset="-120"/>
               </a:rPr>
-              <a:t>• Sorgente 100% versionabile con Git</a:t>
-            </a:r>
-            <a:endParaRPr lang="en-US" sz="1300" dirty="0"/>
-          </a:p>
-        </p:txBody>
-      </p:sp>
-      <p:sp>
-        <p:nvSpPr>
-          <p:cNvPr id="8" name="Text 6"/>
-          <p:cNvSpPr/>
-          <p:nvPr/>
-        </p:nvSpPr>
-        <p:spPr>
-          <a:xfrm>
-            <a:off x="634984" y="3556000"/>
-            <a:ext cx="3217253" cy="673100"/>
-          </a:xfrm>
-          <a:prstGeom prst="rect">
-            <a:avLst/>
-          </a:prstGeom>
-          <a:noFill/>
-          <a:ln/>
-        </p:spPr>
-        <p:txBody>
-          <a:bodyPr wrap="square" lIns="0" tIns="0" rIns="0" bIns="0" rtlCol="0" anchor="t"/>
-          <a:lstStyle/>
-          <a:p>
-            <a:pPr algn="l" indent="0" marL="0">
-              <a:buNone/>
-            </a:pPr>
-            <a:r>
-              <a:rPr lang="en-US" sz="1300" dirty="0">
+              <a:t>Sorgente 100% versionabile con Git</a:t>
+            </a:r>
+            <a:endParaRPr lang="en-US" sz="1250" dirty="0"/>
+          </a:p>
+          <a:p>
+            <a:pPr marL="342900" indent="-342900">
+              <a:spcAft>
+                <a:spcPts val="400"/>
+              </a:spcAft>
+              <a:buSzPct val="100000"/>
+              <a:buChar char="•"/>
+            </a:pPr>
+            <a:r>
+              <a:rPr lang="en-US" sz="1250" dirty="0">
                 <a:solidFill>
                   <a:srgbClr val="FFFFFF"/>
                 </a:solidFill>
@@ -6124,38 +6132,20 @@
                 <a:ea typeface="Segoe UI" pitchFamily="34" charset="-122"/>
                 <a:cs typeface="Segoe UI" pitchFamily="34" charset="-120"/>
               </a:rPr>
-              <a:t>• Tre output compilati da un unico file</a:t>
-            </a:r>
-            <a:endParaRPr lang="en-US" sz="1300" dirty="0"/>
-          </a:p>
-        </p:txBody>
-      </p:sp>
-      <p:sp>
-        <p:nvSpPr>
-          <p:cNvPr id="9" name="Text 7"/>
-          <p:cNvSpPr/>
-          <p:nvPr/>
-        </p:nvSpPr>
-        <p:spPr>
-          <a:xfrm>
-            <a:off x="634984" y="4406900"/>
-            <a:ext cx="3217253" cy="673100"/>
-          </a:xfrm>
-          <a:prstGeom prst="rect">
-            <a:avLst/>
-          </a:prstGeom>
-          <a:noFill/>
-          <a:ln/>
-        </p:spPr>
-        <p:txBody>
-          <a:bodyPr wrap="square" lIns="0" tIns="0" rIns="0" bIns="0" rtlCol="0" anchor="t"/>
-          <a:lstStyle/>
-          <a:p>
-            <a:pPr algn="l" indent="0" marL="0">
-              <a:buNone/>
-            </a:pPr>
-            <a:r>
-              <a:rPr lang="en-US" sz="1300" dirty="0">
+              <a:t>Tre output compilati da un unico file</a:t>
+            </a:r>
+            <a:endParaRPr lang="en-US" sz="1250" dirty="0"/>
+          </a:p>
+          <a:p>
+            <a:pPr marL="342900" indent="-342900">
+              <a:spcAft>
+                <a:spcPts val="400"/>
+              </a:spcAft>
+              <a:buSzPct val="100000"/>
+              <a:buChar char="•"/>
+            </a:pPr>
+            <a:r>
+              <a:rPr lang="en-US" sz="1250" dirty="0">
                 <a:solidFill>
                   <a:srgbClr val="FFFFFF"/>
                 </a:solidFill>
@@ -6163,38 +6153,20 @@
                 <a:ea typeface="Segoe UI" pitchFamily="34" charset="-122"/>
                 <a:cs typeface="Segoe UI" pitchFamily="34" charset="-120"/>
               </a:rPr>
-              <a:t>• Layout e gerarchia visiva garantiti</a:t>
-            </a:r>
-            <a:endParaRPr lang="en-US" sz="1300" dirty="0"/>
-          </a:p>
-        </p:txBody>
-      </p:sp>
-      <p:sp>
-        <p:nvSpPr>
-          <p:cNvPr id="10" name="Text 8"/>
-          <p:cNvSpPr/>
-          <p:nvPr/>
-        </p:nvSpPr>
-        <p:spPr>
-          <a:xfrm>
-            <a:off x="634984" y="5257800"/>
-            <a:ext cx="3217253" cy="673100"/>
-          </a:xfrm>
-          <a:prstGeom prst="rect">
-            <a:avLst/>
-          </a:prstGeom>
-          <a:noFill/>
-          <a:ln/>
-        </p:spPr>
-        <p:txBody>
-          <a:bodyPr wrap="square" lIns="0" tIns="0" rIns="0" bIns="0" rtlCol="0" anchor="t"/>
-          <a:lstStyle/>
-          <a:p>
-            <a:pPr algn="l" indent="0" marL="0">
-              <a:buNone/>
-            </a:pPr>
-            <a:r>
-              <a:rPr lang="en-US" sz="1300" dirty="0">
+              <a:t>Layout e gerarchia visiva garantiti</a:t>
+            </a:r>
+            <a:endParaRPr lang="en-US" sz="1250" dirty="0"/>
+          </a:p>
+          <a:p>
+            <a:pPr marL="342900" indent="-342900">
+              <a:spcAft>
+                <a:spcPts val="400"/>
+              </a:spcAft>
+              <a:buSzPct val="100000"/>
+              <a:buChar char="•"/>
+            </a:pPr>
+            <a:r>
+              <a:rPr lang="en-US" sz="1250" dirty="0">
                 <a:solidFill>
                   <a:srgbClr val="FFFFFF"/>
                 </a:solidFill>
@@ -6202,38 +6174,20 @@
                 <a:ea typeface="Segoe UI" pitchFamily="34" charset="-122"/>
                 <a:cs typeface="Segoe UI" pitchFamily="34" charset="-120"/>
               </a:rPr>
-              <a:t>• Linter automatico per design e WCAG</a:t>
-            </a:r>
-            <a:endParaRPr lang="en-US" sz="1300" dirty="0"/>
-          </a:p>
-        </p:txBody>
-      </p:sp>
-      <p:sp>
-        <p:nvSpPr>
-          <p:cNvPr id="11" name="Text 9"/>
-          <p:cNvSpPr/>
-          <p:nvPr/>
-        </p:nvSpPr>
-        <p:spPr>
-          <a:xfrm>
-            <a:off x="634984" y="6108700"/>
-            <a:ext cx="3217253" cy="673100"/>
-          </a:xfrm>
-          <a:prstGeom prst="rect">
-            <a:avLst/>
-          </a:prstGeom>
-          <a:noFill/>
-          <a:ln/>
-        </p:spPr>
-        <p:txBody>
-          <a:bodyPr wrap="square" lIns="0" tIns="0" rIns="0" bIns="0" rtlCol="0" anchor="t"/>
-          <a:lstStyle/>
-          <a:p>
-            <a:pPr algn="l" indent="0" marL="0">
-              <a:buNone/>
-            </a:pPr>
-            <a:r>
-              <a:rPr lang="en-US" sz="1300" dirty="0">
+              <a:t>Linter automatico per design e WCAG</a:t>
+            </a:r>
+            <a:endParaRPr lang="en-US" sz="1250" dirty="0"/>
+          </a:p>
+          <a:p>
+            <a:pPr marL="342900" indent="-342900">
+              <a:spcAft>
+                <a:spcPts val="400"/>
+              </a:spcAft>
+              <a:buSzPct val="100000"/>
+              <a:buChar char="•"/>
+            </a:pPr>
+            <a:r>
+              <a:rPr lang="en-US" sz="1250" dirty="0">
                 <a:solidFill>
                   <a:srgbClr val="FFFFFF"/>
                 </a:solidFill>
@@ -6241,26 +6195,26 @@
                 <a:ea typeface="Segoe UI" pitchFamily="34" charset="-122"/>
                 <a:cs typeface="Segoe UI" pitchFamily="34" charset="-120"/>
               </a:rPr>
-              <a:t>• Integrazione nativa con workflow AI</a:t>
-            </a:r>
-            <a:endParaRPr lang="en-US" sz="1300" dirty="0"/>
-          </a:p>
-        </p:txBody>
-      </p:sp>
-      <p:sp>
-        <p:nvSpPr>
-          <p:cNvPr id="12" name="Shape 10"/>
-          <p:cNvSpPr/>
-          <p:nvPr/>
-        </p:nvSpPr>
-        <p:spPr>
-          <a:xfrm>
-            <a:off x="4258627" y="2019300"/>
-            <a:ext cx="3674441" cy="4267200"/>
+              <a:t>Integrazione nativa con workflow AI</a:t>
+            </a:r>
+            <a:endParaRPr lang="en-US" sz="1250" dirty="0"/>
+          </a:p>
+        </p:txBody>
+      </p:sp>
+      <p:sp>
+        <p:nvSpPr>
+          <p:cNvPr id="8" name="Shape 6"/>
+          <p:cNvSpPr/>
+          <p:nvPr/>
+        </p:nvSpPr>
+        <p:spPr>
+          <a:xfrm>
+            <a:off x="4233228" y="2019300"/>
+            <a:ext cx="3725240" cy="2120900"/>
           </a:xfrm>
           <a:prstGeom prst="roundRect">
             <a:avLst>
-              <a:gd name="adj" fmla="val 1991"/>
+              <a:gd name="adj" fmla="val 3449"/>
             </a:avLst>
           </a:prstGeom>
           <a:solidFill>
@@ -6276,14 +6230,14 @@
       </p:sp>
       <p:sp>
         <p:nvSpPr>
-          <p:cNvPr id="13" name="Shape 11"/>
-          <p:cNvSpPr/>
-          <p:nvPr/>
-        </p:nvSpPr>
-        <p:spPr>
-          <a:xfrm>
-            <a:off x="4276915" y="2055876"/>
-            <a:ext cx="54864" cy="4194048"/>
+          <p:cNvPr id="9" name="Shape 7"/>
+          <p:cNvSpPr/>
+          <p:nvPr/>
+        </p:nvSpPr>
+        <p:spPr>
+          <a:xfrm>
+            <a:off x="4251516" y="2055876"/>
+            <a:ext cx="54864" cy="2047748"/>
           </a:xfrm>
           <a:prstGeom prst="roundRect">
             <a:avLst>
@@ -6298,14 +6252,14 @@
       </p:sp>
       <p:sp>
         <p:nvSpPr>
-          <p:cNvPr id="14" name="Text 12"/>
-          <p:cNvSpPr/>
-          <p:nvPr/>
-        </p:nvSpPr>
-        <p:spPr>
-          <a:xfrm>
-            <a:off x="4487227" y="2129028"/>
-            <a:ext cx="3217241" cy="274320"/>
+          <p:cNvPr id="10" name="Text 8"/>
+          <p:cNvSpPr/>
+          <p:nvPr/>
+        </p:nvSpPr>
+        <p:spPr>
+          <a:xfrm>
+            <a:off x="4461828" y="2129028"/>
+            <a:ext cx="3268040" cy="274320"/>
           </a:xfrm>
           <a:prstGeom prst="rect">
             <a:avLst/>
@@ -6337,14 +6291,14 @@
       </p:sp>
       <p:sp>
         <p:nvSpPr>
-          <p:cNvPr id="15" name="Text 13"/>
-          <p:cNvSpPr/>
-          <p:nvPr/>
-        </p:nvSpPr>
-        <p:spPr>
-          <a:xfrm>
-            <a:off x="4487221" y="2705100"/>
-            <a:ext cx="3217253" cy="673100"/>
+          <p:cNvPr id="11" name="Text 9"/>
+          <p:cNvSpPr/>
+          <p:nvPr/>
+        </p:nvSpPr>
+        <p:spPr>
+          <a:xfrm>
+            <a:off x="4411023" y="2552700"/>
+            <a:ext cx="3369649" cy="1066800"/>
           </a:xfrm>
           <a:prstGeom prst="rect">
             <a:avLst/>
@@ -6356,11 +6310,15 @@
           <a:bodyPr wrap="square" lIns="0" tIns="0" rIns="0" bIns="0" rtlCol="0" anchor="t"/>
           <a:lstStyle/>
           <a:p>
-            <a:pPr algn="l" indent="0" marL="0">
-              <a:buNone/>
-            </a:pPr>
-            <a:r>
-              <a:rPr lang="en-US" sz="1300" dirty="0">
+            <a:pPr marL="342900" indent="-342900">
+              <a:spcAft>
+                <a:spcPts val="400"/>
+              </a:spcAft>
+              <a:buSzPct val="100000"/>
+              <a:buChar char="•"/>
+            </a:pPr>
+            <a:r>
+              <a:rPr lang="en-US" sz="1250" dirty="0">
                 <a:solidFill>
                   <a:srgbClr val="FFFFFF"/>
                 </a:solidFill>
@@ -6368,38 +6326,20 @@
                 <a:ea typeface="Segoe UI" pitchFamily="34" charset="-122"/>
                 <a:cs typeface="Segoe UI" pitchFamily="34" charset="-120"/>
               </a:rPr>
-              <a:t>• Parità totale di rendering su edge case</a:t>
-            </a:r>
-            <a:endParaRPr lang="en-US" sz="1300" dirty="0"/>
-          </a:p>
-        </p:txBody>
-      </p:sp>
-      <p:sp>
-        <p:nvSpPr>
-          <p:cNvPr id="16" name="Text 14"/>
-          <p:cNvSpPr/>
-          <p:nvPr/>
-        </p:nvSpPr>
-        <p:spPr>
-          <a:xfrm>
-            <a:off x="4487221" y="3556000"/>
-            <a:ext cx="3217253" cy="673100"/>
-          </a:xfrm>
-          <a:prstGeom prst="rect">
-            <a:avLst/>
-          </a:prstGeom>
-          <a:noFill/>
-          <a:ln/>
-        </p:spPr>
-        <p:txBody>
-          <a:bodyPr wrap="square" lIns="0" tIns="0" rIns="0" bIns="0" rtlCol="0" anchor="t"/>
-          <a:lstStyle/>
-          <a:p>
-            <a:pPr algn="l" indent="0" marL="0">
-              <a:buNone/>
-            </a:pPr>
-            <a:r>
-              <a:rPr lang="en-US" sz="1300" dirty="0">
+              <a:t>Parità totale di rendering su edge case</a:t>
+            </a:r>
+            <a:endParaRPr lang="en-US" sz="1250" dirty="0"/>
+          </a:p>
+          <a:p>
+            <a:pPr marL="342900" indent="-342900">
+              <a:spcAft>
+                <a:spcPts val="400"/>
+              </a:spcAft>
+              <a:buSzPct val="100000"/>
+              <a:buChar char="•"/>
+            </a:pPr>
+            <a:r>
+              <a:rPr lang="en-US" sz="1250" dirty="0">
                 <a:solidFill>
                   <a:srgbClr val="FFFFFF"/>
                 </a:solidFill>
@@ -6407,38 +6347,20 @@
                 <a:ea typeface="Segoe UI" pitchFamily="34" charset="-122"/>
                 <a:cs typeface="Segoe UI" pitchFamily="34" charset="-120"/>
               </a:rPr>
-              <a:t>• Estensione della copertura dei test</a:t>
-            </a:r>
-            <a:endParaRPr lang="en-US" sz="1300" dirty="0"/>
-          </a:p>
-        </p:txBody>
-      </p:sp>
-      <p:sp>
-        <p:nvSpPr>
-          <p:cNvPr id="17" name="Text 15"/>
-          <p:cNvSpPr/>
-          <p:nvPr/>
-        </p:nvSpPr>
-        <p:spPr>
-          <a:xfrm>
-            <a:off x="4487221" y="4406900"/>
-            <a:ext cx="3217253" cy="673100"/>
-          </a:xfrm>
-          <a:prstGeom prst="rect">
-            <a:avLst/>
-          </a:prstGeom>
-          <a:noFill/>
-          <a:ln/>
-        </p:spPr>
-        <p:txBody>
-          <a:bodyPr wrap="square" lIns="0" tIns="0" rIns="0" bIns="0" rtlCol="0" anchor="t"/>
-          <a:lstStyle/>
-          <a:p>
-            <a:pPr algn="l" indent="0" marL="0">
-              <a:buNone/>
-            </a:pPr>
-            <a:r>
-              <a:rPr lang="en-US" sz="1300" dirty="0">
+              <a:t>Estensione della copertura dei test</a:t>
+            </a:r>
+            <a:endParaRPr lang="en-US" sz="1250" dirty="0"/>
+          </a:p>
+          <a:p>
+            <a:pPr marL="342900" indent="-342900">
+              <a:spcAft>
+                <a:spcPts val="400"/>
+              </a:spcAft>
+              <a:buSzPct val="100000"/>
+              <a:buChar char="•"/>
+            </a:pPr>
+            <a:r>
+              <a:rPr lang="en-US" sz="1250" dirty="0">
                 <a:solidFill>
                   <a:srgbClr val="FFFFFF"/>
                 </a:solidFill>
@@ -6446,38 +6368,20 @@
                 <a:ea typeface="Segoe UI" pitchFamily="34" charset="-122"/>
                 <a:cs typeface="Segoe UI" pitchFamily="34" charset="-120"/>
               </a:rPr>
-              <a:t>• Supporto a font e asset esterni complessi</a:t>
-            </a:r>
-            <a:endParaRPr lang="en-US" sz="1300" dirty="0"/>
-          </a:p>
-        </p:txBody>
-      </p:sp>
-      <p:sp>
-        <p:nvSpPr>
-          <p:cNvPr id="18" name="Text 16"/>
-          <p:cNvSpPr/>
-          <p:nvPr/>
-        </p:nvSpPr>
-        <p:spPr>
-          <a:xfrm>
-            <a:off x="4487221" y="5257800"/>
-            <a:ext cx="3217253" cy="673100"/>
-          </a:xfrm>
-          <a:prstGeom prst="rect">
-            <a:avLst/>
-          </a:prstGeom>
-          <a:noFill/>
-          <a:ln/>
-        </p:spPr>
-        <p:txBody>
-          <a:bodyPr wrap="square" lIns="0" tIns="0" rIns="0" bIns="0" rtlCol="0" anchor="t"/>
-          <a:lstStyle/>
-          <a:p>
-            <a:pPr algn="l" indent="0" marL="0">
-              <a:buNone/>
-            </a:pPr>
-            <a:r>
-              <a:rPr lang="en-US" sz="1300" dirty="0">
+              <a:t>Supporto a font e asset esterni complessi</a:t>
+            </a:r>
+            <a:endParaRPr lang="en-US" sz="1250" dirty="0"/>
+          </a:p>
+          <a:p>
+            <a:pPr marL="342900" indent="-342900">
+              <a:spcAft>
+                <a:spcPts val="400"/>
+              </a:spcAft>
+              <a:buSzPct val="100000"/>
+              <a:buChar char="•"/>
+            </a:pPr>
+            <a:r>
+              <a:rPr lang="en-US" sz="1250" dirty="0">
                 <a:solidFill>
                   <a:srgbClr val="FFFFFF"/>
                 </a:solidFill>
@@ -6485,26 +6389,26 @@
                 <a:ea typeface="Segoe UI" pitchFamily="34" charset="-122"/>
                 <a:cs typeface="Segoe UI" pitchFamily="34" charset="-120"/>
               </a:rPr>
-              <a:t>• Documentazione di scenari avanzati</a:t>
-            </a:r>
-            <a:endParaRPr lang="en-US" sz="1300" dirty="0"/>
-          </a:p>
-        </p:txBody>
-      </p:sp>
-      <p:sp>
-        <p:nvSpPr>
-          <p:cNvPr id="19" name="Shape 17"/>
-          <p:cNvSpPr/>
-          <p:nvPr/>
-        </p:nvSpPr>
-        <p:spPr>
-          <a:xfrm>
-            <a:off x="8110864" y="2019300"/>
-            <a:ext cx="3674441" cy="4267200"/>
+              <a:t>Documentazione di scenari avanzati</a:t>
+            </a:r>
+            <a:endParaRPr lang="en-US" sz="1250" dirty="0"/>
+          </a:p>
+        </p:txBody>
+      </p:sp>
+      <p:sp>
+        <p:nvSpPr>
+          <p:cNvPr id="12" name="Shape 10"/>
+          <p:cNvSpPr/>
+          <p:nvPr/>
+        </p:nvSpPr>
+        <p:spPr>
+          <a:xfrm>
+            <a:off x="8060065" y="2019300"/>
+            <a:ext cx="3725240" cy="2120900"/>
           </a:xfrm>
           <a:prstGeom prst="roundRect">
             <a:avLst>
-              <a:gd name="adj" fmla="val 1991"/>
+              <a:gd name="adj" fmla="val 3449"/>
             </a:avLst>
           </a:prstGeom>
           <a:solidFill>
@@ -6520,14 +6424,14 @@
       </p:sp>
       <p:sp>
         <p:nvSpPr>
-          <p:cNvPr id="20" name="Shape 18"/>
-          <p:cNvSpPr/>
-          <p:nvPr/>
-        </p:nvSpPr>
-        <p:spPr>
-          <a:xfrm>
-            <a:off x="8129152" y="2055876"/>
-            <a:ext cx="54864" cy="4194048"/>
+          <p:cNvPr id="13" name="Shape 11"/>
+          <p:cNvSpPr/>
+          <p:nvPr/>
+        </p:nvSpPr>
+        <p:spPr>
+          <a:xfrm>
+            <a:off x="8078353" y="2055876"/>
+            <a:ext cx="54864" cy="2047748"/>
           </a:xfrm>
           <a:prstGeom prst="roundRect">
             <a:avLst>
@@ -6542,14 +6446,14 @@
       </p:sp>
       <p:sp>
         <p:nvSpPr>
-          <p:cNvPr id="21" name="Text 19"/>
-          <p:cNvSpPr/>
-          <p:nvPr/>
-        </p:nvSpPr>
-        <p:spPr>
-          <a:xfrm>
-            <a:off x="8339464" y="2129028"/>
-            <a:ext cx="3217241" cy="274320"/>
+          <p:cNvPr id="14" name="Text 12"/>
+          <p:cNvSpPr/>
+          <p:nvPr/>
+        </p:nvSpPr>
+        <p:spPr>
+          <a:xfrm>
+            <a:off x="8288665" y="2129028"/>
+            <a:ext cx="3268040" cy="274320"/>
           </a:xfrm>
           <a:prstGeom prst="rect">
             <a:avLst/>
@@ -6581,14 +6485,14 @@
       </p:sp>
       <p:sp>
         <p:nvSpPr>
-          <p:cNvPr id="22" name="Text 20"/>
-          <p:cNvSpPr/>
-          <p:nvPr/>
-        </p:nvSpPr>
-        <p:spPr>
-          <a:xfrm>
-            <a:off x="8339458" y="2705100"/>
-            <a:ext cx="3217253" cy="673100"/>
+          <p:cNvPr id="15" name="Text 13"/>
+          <p:cNvSpPr/>
+          <p:nvPr/>
+        </p:nvSpPr>
+        <p:spPr>
+          <a:xfrm>
+            <a:off x="8237861" y="2552700"/>
+            <a:ext cx="3369649" cy="1066800"/>
           </a:xfrm>
           <a:prstGeom prst="rect">
             <a:avLst/>
@@ -6600,11 +6504,15 @@
           <a:bodyPr wrap="square" lIns="0" tIns="0" rIns="0" bIns="0" rtlCol="0" anchor="t"/>
           <a:lstStyle/>
           <a:p>
-            <a:pPr algn="l" indent="0" marL="0">
-              <a:buNone/>
-            </a:pPr>
-            <a:r>
-              <a:rPr lang="en-US" sz="1300" dirty="0">
+            <a:pPr marL="342900" indent="-342900">
+              <a:spcAft>
+                <a:spcPts val="400"/>
+              </a:spcAft>
+              <a:buSzPct val="100000"/>
+              <a:buChar char="•"/>
+            </a:pPr>
+            <a:r>
+              <a:rPr lang="en-US" sz="1250" dirty="0">
                 <a:solidFill>
                   <a:srgbClr val="FFFFFF"/>
                 </a:solidFill>
@@ -6612,38 +6520,20 @@
                 <a:ea typeface="Segoe UI" pitchFamily="34" charset="-122"/>
                 <a:cs typeface="Segoe UI" pitchFamily="34" charset="-120"/>
               </a:rPr>
-              <a:t>• Editor visuale WYSIWYG bidirezionale</a:t>
-            </a:r>
-            <a:endParaRPr lang="en-US" sz="1300" dirty="0"/>
-          </a:p>
-        </p:txBody>
-      </p:sp>
-      <p:sp>
-        <p:nvSpPr>
-          <p:cNvPr id="23" name="Text 21"/>
-          <p:cNvSpPr/>
-          <p:nvPr/>
-        </p:nvSpPr>
-        <p:spPr>
-          <a:xfrm>
-            <a:off x="8339458" y="3556000"/>
-            <a:ext cx="3217253" cy="673100"/>
-          </a:xfrm>
-          <a:prstGeom prst="rect">
-            <a:avLst/>
-          </a:prstGeom>
-          <a:noFill/>
-          <a:ln/>
-        </p:spPr>
-        <p:txBody>
-          <a:bodyPr wrap="square" lIns="0" tIns="0" rIns="0" bIns="0" rtlCol="0" anchor="t"/>
-          <a:lstStyle/>
-          <a:p>
-            <a:pPr algn="l" indent="0" marL="0">
-              <a:buNone/>
-            </a:pPr>
-            <a:r>
-              <a:rPr lang="en-US" sz="1300" dirty="0">
+              <a:t>Editor visuale WYSIWYG bidirezionale</a:t>
+            </a:r>
+            <a:endParaRPr lang="en-US" sz="1250" dirty="0"/>
+          </a:p>
+          <a:p>
+            <a:pPr marL="342900" indent="-342900">
+              <a:spcAft>
+                <a:spcPts val="400"/>
+              </a:spcAft>
+              <a:buSzPct val="100000"/>
+              <a:buChar char="•"/>
+            </a:pPr>
+            <a:r>
+              <a:rPr lang="en-US" sz="1250" dirty="0">
                 <a:solidFill>
                   <a:srgbClr val="FFFFFF"/>
                 </a:solidFill>
@@ -6651,38 +6541,20 @@
                 <a:ea typeface="Segoe UI" pitchFamily="34" charset="-122"/>
                 <a:cs typeface="Segoe UI" pitchFamily="34" charset="-120"/>
               </a:rPr>
-              <a:t>• Collaborazione in tempo reale su browser</a:t>
-            </a:r>
-            <a:endParaRPr lang="en-US" sz="1300" dirty="0"/>
-          </a:p>
-        </p:txBody>
-      </p:sp>
-      <p:sp>
-        <p:nvSpPr>
-          <p:cNvPr id="24" name="Text 22"/>
-          <p:cNvSpPr/>
-          <p:nvPr/>
-        </p:nvSpPr>
-        <p:spPr>
-          <a:xfrm>
-            <a:off x="8339458" y="4406900"/>
-            <a:ext cx="3217253" cy="673100"/>
-          </a:xfrm>
-          <a:prstGeom prst="rect">
-            <a:avLst/>
-          </a:prstGeom>
-          <a:noFill/>
-          <a:ln/>
-        </p:spPr>
-        <p:txBody>
-          <a:bodyPr wrap="square" lIns="0" tIns="0" rIns="0" bIns="0" rtlCol="0" anchor="t"/>
-          <a:lstStyle/>
-          <a:p>
-            <a:pPr algn="l" indent="0" marL="0">
-              <a:buNone/>
-            </a:pPr>
-            <a:r>
-              <a:rPr lang="en-US" sz="1300" dirty="0">
+              <a:t>Collaborazione in tempo reale su browser</a:t>
+            </a:r>
+            <a:endParaRPr lang="en-US" sz="1250" dirty="0"/>
+          </a:p>
+          <a:p>
+            <a:pPr marL="342900" indent="-342900">
+              <a:spcAft>
+                <a:spcPts val="400"/>
+              </a:spcAft>
+              <a:buSzPct val="100000"/>
+              <a:buChar char="•"/>
+            </a:pPr>
+            <a:r>
+              <a:rPr lang="en-US" sz="1250" dirty="0">
                 <a:solidFill>
                   <a:srgbClr val="FFFFFF"/>
                 </a:solidFill>
@@ -6690,38 +6562,20 @@
                 <a:ea typeface="Segoe UI" pitchFamily="34" charset="-122"/>
                 <a:cs typeface="Segoe UI" pitchFamily="34" charset="-120"/>
               </a:rPr>
-              <a:t>• Integrazione con modelli LLM in locale</a:t>
-            </a:r>
-            <a:endParaRPr lang="en-US" sz="1300" dirty="0"/>
-          </a:p>
-        </p:txBody>
-      </p:sp>
-      <p:sp>
-        <p:nvSpPr>
-          <p:cNvPr id="25" name="Text 23"/>
-          <p:cNvSpPr/>
-          <p:nvPr/>
-        </p:nvSpPr>
-        <p:spPr>
-          <a:xfrm>
-            <a:off x="8339458" y="5257800"/>
-            <a:ext cx="3217253" cy="673100"/>
-          </a:xfrm>
-          <a:prstGeom prst="rect">
-            <a:avLst/>
-          </a:prstGeom>
-          <a:noFill/>
-          <a:ln/>
-        </p:spPr>
-        <p:txBody>
-          <a:bodyPr wrap="square" lIns="0" tIns="0" rIns="0" bIns="0" rtlCol="0" anchor="t"/>
-          <a:lstStyle/>
-          <a:p>
-            <a:pPr algn="l" indent="0" marL="0">
-              <a:buNone/>
-            </a:pPr>
-            <a:r>
-              <a:rPr lang="en-US" sz="1300" dirty="0">
+              <a:t>Integrazione con modelli LLM in locale</a:t>
+            </a:r>
+            <a:endParaRPr lang="en-US" sz="1250" dirty="0"/>
+          </a:p>
+          <a:p>
+            <a:pPr marL="342900" indent="-342900">
+              <a:spcAft>
+                <a:spcPts val="400"/>
+              </a:spcAft>
+              <a:buSzPct val="100000"/>
+              <a:buChar char="•"/>
+            </a:pPr>
+            <a:r>
+              <a:rPr lang="en-US" sz="1250" dirty="0">
                 <a:solidFill>
                   <a:srgbClr val="FFFFFF"/>
                 </a:solidFill>
@@ -6729,15 +6583,15 @@
                 <a:ea typeface="Segoe UI" pitchFamily="34" charset="-122"/>
                 <a:cs typeface="Segoe UI" pitchFamily="34" charset="-120"/>
               </a:rPr>
-              <a:t>• Plugin per VS Code ed estensioni IDE</a:t>
-            </a:r>
-            <a:endParaRPr lang="en-US" sz="1300" dirty="0"/>
-          </a:p>
-        </p:txBody>
-      </p:sp>
-      <p:sp>
-        <p:nvSpPr>
-          <p:cNvPr id="26" name="Text 24"/>
+              <a:t>Plugin per VS Code ed estensioni IDE</a:t>
+            </a:r>
+            <a:endParaRPr lang="en-US" sz="1250" dirty="0"/>
+          </a:p>
+        </p:txBody>
+      </p:sp>
+      <p:sp>
+        <p:nvSpPr>
+          <p:cNvPr id="16" name="Text 14"/>
           <p:cNvSpPr/>
           <p:nvPr/>
         </p:nvSpPr>
@@ -6959,11 +6813,11 @@
         <p:spPr>
           <a:xfrm>
             <a:off x="406390" y="1701800"/>
-            <a:ext cx="3674441" cy="2019300"/>
+            <a:ext cx="3725240" cy="1270000"/>
           </a:xfrm>
           <a:prstGeom prst="roundRect">
             <a:avLst>
-              <a:gd name="adj" fmla="val 3623"/>
+              <a:gd name="adj" fmla="val 5760"/>
             </a:avLst>
           </a:prstGeom>
           <a:solidFill>
@@ -6986,7 +6840,7 @@
         <p:spPr>
           <a:xfrm>
             <a:off x="424678" y="1738376"/>
-            <a:ext cx="54864" cy="1946148"/>
+            <a:ext cx="54864" cy="1196848"/>
           </a:xfrm>
           <a:prstGeom prst="roundRect">
             <a:avLst>
@@ -7008,7 +6862,7 @@
         <p:spPr>
           <a:xfrm>
             <a:off x="634990" y="1811528"/>
-            <a:ext cx="3217241" cy="274320"/>
+            <a:ext cx="3268040" cy="274320"/>
           </a:xfrm>
           <a:prstGeom prst="rect">
             <a:avLst/>
@@ -7046,8 +6900,8 @@
         </p:nvSpPr>
         <p:spPr>
           <a:xfrm>
-            <a:off x="634984" y="2387600"/>
-            <a:ext cx="3217253" cy="977900"/>
+            <a:off x="584185" y="2235200"/>
+            <a:ext cx="3369649" cy="482600"/>
           </a:xfrm>
           <a:prstGeom prst="rect">
             <a:avLst/>
@@ -7085,12 +6939,12 @@
         </p:nvSpPr>
         <p:spPr>
           <a:xfrm>
-            <a:off x="4258627" y="1701800"/>
-            <a:ext cx="3674441" cy="2019300"/>
+            <a:off x="4233228" y="1701800"/>
+            <a:ext cx="3725240" cy="1270000"/>
           </a:xfrm>
           <a:prstGeom prst="roundRect">
             <a:avLst>
-              <a:gd name="adj" fmla="val 3623"/>
+              <a:gd name="adj" fmla="val 5760"/>
             </a:avLst>
           </a:prstGeom>
           <a:solidFill>
@@ -7112,8 +6966,8 @@
         </p:nvSpPr>
         <p:spPr>
           <a:xfrm>
-            <a:off x="4276915" y="1738376"/>
-            <a:ext cx="54864" cy="1946148"/>
+            <a:off x="4251516" y="1738376"/>
+            <a:ext cx="54864" cy="1196848"/>
           </a:xfrm>
           <a:prstGeom prst="roundRect">
             <a:avLst>
@@ -7134,8 +6988,8 @@
         </p:nvSpPr>
         <p:spPr>
           <a:xfrm>
-            <a:off x="4487227" y="1811528"/>
-            <a:ext cx="3217241" cy="274320"/>
+            <a:off x="4461828" y="1811528"/>
+            <a:ext cx="3268040" cy="274320"/>
           </a:xfrm>
           <a:prstGeom prst="rect">
             <a:avLst/>
@@ -7173,8 +7027,8 @@
         </p:nvSpPr>
         <p:spPr>
           <a:xfrm>
-            <a:off x="4487221" y="2387600"/>
-            <a:ext cx="3217253" cy="977900"/>
+            <a:off x="4411023" y="2235200"/>
+            <a:ext cx="3369649" cy="482600"/>
           </a:xfrm>
           <a:prstGeom prst="rect">
             <a:avLst/>
@@ -7212,12 +7066,12 @@
         </p:nvSpPr>
         <p:spPr>
           <a:xfrm>
-            <a:off x="8110864" y="1701800"/>
-            <a:ext cx="3674441" cy="2019300"/>
+            <a:off x="8060065" y="1701800"/>
+            <a:ext cx="3725240" cy="1270000"/>
           </a:xfrm>
           <a:prstGeom prst="roundRect">
             <a:avLst>
-              <a:gd name="adj" fmla="val 3623"/>
+              <a:gd name="adj" fmla="val 5760"/>
             </a:avLst>
           </a:prstGeom>
           <a:solidFill>
@@ -7239,8 +7093,8 @@
         </p:nvSpPr>
         <p:spPr>
           <a:xfrm>
-            <a:off x="8129152" y="1738376"/>
-            <a:ext cx="54864" cy="1946148"/>
+            <a:off x="8078353" y="1738376"/>
+            <a:ext cx="54864" cy="1196848"/>
           </a:xfrm>
           <a:prstGeom prst="roundRect">
             <a:avLst>
@@ -7261,8 +7115,8 @@
         </p:nvSpPr>
         <p:spPr>
           <a:xfrm>
-            <a:off x="8339464" y="1811528"/>
-            <a:ext cx="3217241" cy="274320"/>
+            <a:off x="8288665" y="1811528"/>
+            <a:ext cx="3268040" cy="274320"/>
           </a:xfrm>
           <a:prstGeom prst="rect">
             <a:avLst/>
@@ -7300,8 +7154,8 @@
         </p:nvSpPr>
         <p:spPr>
           <a:xfrm>
-            <a:off x="8339458" y="2387600"/>
-            <a:ext cx="3217253" cy="977900"/>
+            <a:off x="8237861" y="2235200"/>
+            <a:ext cx="3369649" cy="482600"/>
           </a:xfrm>
           <a:prstGeom prst="rect">
             <a:avLst/>
@@ -7339,7 +7193,7 @@
         </p:nvSpPr>
         <p:spPr>
           <a:xfrm>
-            <a:off x="406390" y="4076700"/>
+            <a:off x="406390" y="3149600"/>
             <a:ext cx="11378916" cy="774700"/>
           </a:xfrm>
           <a:prstGeom prst="roundRect">
@@ -7366,7 +7220,7 @@
         </p:nvSpPr>
         <p:spPr>
           <a:xfrm>
-            <a:off x="589270" y="4223004"/>
+            <a:off x="589270" y="3295904"/>
             <a:ext cx="11013156" cy="274320"/>
           </a:xfrm>
           <a:prstGeom prst="rect">
@@ -7405,7 +7259,7 @@
         </p:nvSpPr>
         <p:spPr>
           <a:xfrm>
-            <a:off x="589270" y="4552188"/>
+            <a:off x="589270" y="3625088"/>
             <a:ext cx="11013156" cy="182880"/>
           </a:xfrm>
           <a:prstGeom prst="rect">
@@ -7594,11 +7448,11 @@
         <p:spPr>
           <a:xfrm>
             <a:off x="406390" y="2019300"/>
-            <a:ext cx="5460858" cy="3479800"/>
+            <a:ext cx="5460858" cy="2463800"/>
           </a:xfrm>
           <a:prstGeom prst="roundRect">
             <a:avLst>
-              <a:gd name="adj" fmla="val 2628"/>
+              <a:gd name="adj" fmla="val 3711"/>
             </a:avLst>
           </a:prstGeom>
           <a:solidFill>
@@ -7660,11 +7514,11 @@
         <p:spPr>
           <a:xfrm>
             <a:off x="6324448" y="2019300"/>
-            <a:ext cx="5460858" cy="3479800"/>
+            <a:ext cx="5460858" cy="2463800"/>
           </a:xfrm>
           <a:prstGeom prst="roundRect">
             <a:avLst>
-              <a:gd name="adj" fmla="val 2628"/>
+              <a:gd name="adj" fmla="val 3711"/>
             </a:avLst>
           </a:prstGeom>
           <a:solidFill>
@@ -7725,7 +7579,7 @@
         </p:nvSpPr>
         <p:spPr>
           <a:xfrm>
-            <a:off x="5903824" y="3567176"/>
+            <a:off x="5903824" y="3059176"/>
             <a:ext cx="384048" cy="384048"/>
           </a:xfrm>
           <a:prstGeom prst="ellipse">
@@ -7750,7 +7604,7 @@
         </p:nvSpPr>
         <p:spPr>
           <a:xfrm>
-            <a:off x="5903824" y="3567176"/>
+            <a:off x="5903824" y="3059176"/>
             <a:ext cx="384048" cy="384048"/>
           </a:xfrm>
           <a:prstGeom prst="rect">
@@ -7856,16 +7710,18 @@
         <p:spPr>
           <a:xfrm>
             <a:off x="584185" y="2971800"/>
-            <a:ext cx="5156071" cy="368300"/>
-          </a:xfrm>
-          <a:prstGeom prst="rect">
-            <a:avLst/>
-          </a:prstGeom>
-          <a:noFill/>
-          <a:ln/>
-        </p:spPr>
-        <p:txBody>
-          <a:bodyPr wrap="square" lIns="0" tIns="0" rIns="0" bIns="0" rtlCol="0" anchor="t"/>
+            <a:ext cx="5156071" cy="266700"/>
+          </a:xfrm>
+          <a:prstGeom prst="rect">
+            <a:avLst/>
+          </a:prstGeom>
+          <a:noFill/>
+          <a:ln/>
+        </p:spPr>
+        <p:txBody>
+          <a:bodyPr wrap="square" lIns="0" tIns="0" rIns="0" bIns="0" rtlCol="0" anchor="t">
+            <a:normAutofit/>
+          </a:bodyPr>
           <a:lstStyle/>
           <a:p>
             <a:pPr algn="l" indent="0" marL="0">
@@ -7894,17 +7750,19 @@
         </p:nvSpPr>
         <p:spPr>
           <a:xfrm>
-            <a:off x="584185" y="3429000"/>
-            <a:ext cx="5156071" cy="673100"/>
-          </a:xfrm>
-          <a:prstGeom prst="rect">
-            <a:avLst/>
-          </a:prstGeom>
-          <a:noFill/>
-          <a:ln/>
-        </p:spPr>
-        <p:txBody>
-          <a:bodyPr wrap="square" lIns="0" tIns="0" rIns="0" bIns="0" rtlCol="0" anchor="t"/>
+            <a:off x="584185" y="3327400"/>
+            <a:ext cx="5156071" cy="266700"/>
+          </a:xfrm>
+          <a:prstGeom prst="rect">
+            <a:avLst/>
+          </a:prstGeom>
+          <a:noFill/>
+          <a:ln/>
+        </p:spPr>
+        <p:txBody>
+          <a:bodyPr wrap="square" lIns="0" tIns="0" rIns="0" bIns="0" rtlCol="0" anchor="t">
+            <a:normAutofit/>
+          </a:bodyPr>
           <a:lstStyle/>
           <a:p>
             <a:pPr algn="l" indent="0" marL="0">
@@ -7933,17 +7791,19 @@
         </p:nvSpPr>
         <p:spPr>
           <a:xfrm>
-            <a:off x="584185" y="4191000"/>
-            <a:ext cx="5156071" cy="368300"/>
-          </a:xfrm>
-          <a:prstGeom prst="rect">
-            <a:avLst/>
-          </a:prstGeom>
-          <a:noFill/>
-          <a:ln/>
-        </p:spPr>
-        <p:txBody>
-          <a:bodyPr wrap="square" lIns="0" tIns="0" rIns="0" bIns="0" rtlCol="0" anchor="t"/>
+            <a:off x="584185" y="3683000"/>
+            <a:ext cx="5156071" cy="266700"/>
+          </a:xfrm>
+          <a:prstGeom prst="rect">
+            <a:avLst/>
+          </a:prstGeom>
+          <a:noFill/>
+          <a:ln/>
+        </p:spPr>
+        <p:txBody>
+          <a:bodyPr wrap="square" lIns="0" tIns="0" rIns="0" bIns="0" rtlCol="0" anchor="t">
+            <a:normAutofit/>
+          </a:bodyPr>
           <a:lstStyle/>
           <a:p>
             <a:pPr algn="l" indent="0" marL="0">
@@ -7972,17 +7832,19 @@
         </p:nvSpPr>
         <p:spPr>
           <a:xfrm>
-            <a:off x="584185" y="4648200"/>
-            <a:ext cx="5156071" cy="673100"/>
-          </a:xfrm>
-          <a:prstGeom prst="rect">
-            <a:avLst/>
-          </a:prstGeom>
-          <a:noFill/>
-          <a:ln/>
-        </p:spPr>
-        <p:txBody>
-          <a:bodyPr wrap="square" lIns="0" tIns="0" rIns="0" bIns="0" rtlCol="0" anchor="t"/>
+            <a:off x="584185" y="4038600"/>
+            <a:ext cx="5156071" cy="266700"/>
+          </a:xfrm>
+          <a:prstGeom prst="rect">
+            <a:avLst/>
+          </a:prstGeom>
+          <a:noFill/>
+          <a:ln/>
+        </p:spPr>
+        <p:txBody>
+          <a:bodyPr wrap="square" lIns="0" tIns="0" rIns="0" bIns="0" rtlCol="0" anchor="t">
+            <a:normAutofit/>
+          </a:bodyPr>
           <a:lstStyle/>
           <a:p>
             <a:pPr algn="l" indent="0" marL="0">
@@ -8078,16 +7940,18 @@
         <p:spPr>
           <a:xfrm>
             <a:off x="6451439" y="2971800"/>
-            <a:ext cx="5156071" cy="673100"/>
-          </a:xfrm>
-          <a:prstGeom prst="rect">
-            <a:avLst/>
-          </a:prstGeom>
-          <a:noFill/>
-          <a:ln/>
-        </p:spPr>
-        <p:txBody>
-          <a:bodyPr wrap="square" lIns="0" tIns="0" rIns="0" bIns="0" rtlCol="0" anchor="t"/>
+            <a:ext cx="5156071" cy="266700"/>
+          </a:xfrm>
+          <a:prstGeom prst="rect">
+            <a:avLst/>
+          </a:prstGeom>
+          <a:noFill/>
+          <a:ln/>
+        </p:spPr>
+        <p:txBody>
+          <a:bodyPr wrap="square" lIns="0" tIns="0" rIns="0" bIns="0" rtlCol="0" anchor="t">
+            <a:normAutofit/>
+          </a:bodyPr>
           <a:lstStyle/>
           <a:p>
             <a:pPr algn="l" indent="0" marL="0">
@@ -8116,17 +7980,19 @@
         </p:nvSpPr>
         <p:spPr>
           <a:xfrm>
-            <a:off x="6451439" y="3733800"/>
-            <a:ext cx="5156071" cy="368300"/>
-          </a:xfrm>
-          <a:prstGeom prst="rect">
-            <a:avLst/>
-          </a:prstGeom>
-          <a:noFill/>
-          <a:ln/>
-        </p:spPr>
-        <p:txBody>
-          <a:bodyPr wrap="square" lIns="0" tIns="0" rIns="0" bIns="0" rtlCol="0" anchor="t"/>
+            <a:off x="6451439" y="3327400"/>
+            <a:ext cx="5156071" cy="266700"/>
+          </a:xfrm>
+          <a:prstGeom prst="rect">
+            <a:avLst/>
+          </a:prstGeom>
+          <a:noFill/>
+          <a:ln/>
+        </p:spPr>
+        <p:txBody>
+          <a:bodyPr wrap="square" lIns="0" tIns="0" rIns="0" bIns="0" rtlCol="0" anchor="t">
+            <a:normAutofit/>
+          </a:bodyPr>
           <a:lstStyle/>
           <a:p>
             <a:pPr algn="l" indent="0" marL="0">
@@ -8155,17 +8021,19 @@
         </p:nvSpPr>
         <p:spPr>
           <a:xfrm>
-            <a:off x="6451439" y="4191000"/>
-            <a:ext cx="5156071" cy="673100"/>
-          </a:xfrm>
-          <a:prstGeom prst="rect">
-            <a:avLst/>
-          </a:prstGeom>
-          <a:noFill/>
-          <a:ln/>
-        </p:spPr>
-        <p:txBody>
-          <a:bodyPr wrap="square" lIns="0" tIns="0" rIns="0" bIns="0" rtlCol="0" anchor="t"/>
+            <a:off x="6451439" y="3683000"/>
+            <a:ext cx="5156071" cy="266700"/>
+          </a:xfrm>
+          <a:prstGeom prst="rect">
+            <a:avLst/>
+          </a:prstGeom>
+          <a:noFill/>
+          <a:ln/>
+        </p:spPr>
+        <p:txBody>
+          <a:bodyPr wrap="square" lIns="0" tIns="0" rIns="0" bIns="0" rtlCol="0" anchor="t">
+            <a:normAutofit/>
+          </a:bodyPr>
           <a:lstStyle/>
           <a:p>
             <a:pPr algn="l" indent="0" marL="0">
@@ -8194,17 +8062,19 @@
         </p:nvSpPr>
         <p:spPr>
           <a:xfrm>
-            <a:off x="6451439" y="4953000"/>
-            <a:ext cx="5156071" cy="368300"/>
-          </a:xfrm>
-          <a:prstGeom prst="rect">
-            <a:avLst/>
-          </a:prstGeom>
-          <a:noFill/>
-          <a:ln/>
-        </p:spPr>
-        <p:txBody>
-          <a:bodyPr wrap="square" lIns="0" tIns="0" rIns="0" bIns="0" rtlCol="0" anchor="t"/>
+            <a:off x="6451439" y="4038600"/>
+            <a:ext cx="5156071" cy="266700"/>
+          </a:xfrm>
+          <a:prstGeom prst="rect">
+            <a:avLst/>
+          </a:prstGeom>
+          <a:noFill/>
+          <a:ln/>
+        </p:spPr>
+        <p:txBody>
+          <a:bodyPr wrap="square" lIns="0" tIns="0" rIns="0" bIns="0" rtlCol="0" anchor="t">
+            <a:normAutofit/>
+          </a:bodyPr>
           <a:lstStyle/>
           <a:p>
             <a:pPr algn="l" indent="0" marL="0">
@@ -8383,11 +8253,11 @@
         <p:spPr>
           <a:xfrm>
             <a:off x="406390" y="2019300"/>
-            <a:ext cx="3674441" cy="2628900"/>
+            <a:ext cx="3725240" cy="1485900"/>
           </a:xfrm>
           <a:prstGeom prst="roundRect">
             <a:avLst>
-              <a:gd name="adj" fmla="val 2783"/>
+              <a:gd name="adj" fmla="val 4923"/>
             </a:avLst>
           </a:prstGeom>
           <a:solidFill>
@@ -8410,7 +8280,7 @@
         <p:spPr>
           <a:xfrm>
             <a:off x="424678" y="2055876"/>
-            <a:ext cx="54864" cy="2555748"/>
+            <a:ext cx="54864" cy="1412748"/>
           </a:xfrm>
           <a:prstGeom prst="roundRect">
             <a:avLst>
@@ -8432,7 +8302,7 @@
         <p:spPr>
           <a:xfrm>
             <a:off x="634990" y="2129028"/>
-            <a:ext cx="3217241" cy="274320"/>
+            <a:ext cx="3268040" cy="274320"/>
           </a:xfrm>
           <a:prstGeom prst="rect">
             <a:avLst/>
@@ -8470,8 +8340,8 @@
         </p:nvSpPr>
         <p:spPr>
           <a:xfrm>
-            <a:off x="634984" y="2705100"/>
-            <a:ext cx="3217253" cy="1587500"/>
+            <a:off x="584185" y="2552700"/>
+            <a:ext cx="3369649" cy="698500"/>
           </a:xfrm>
           <a:prstGeom prst="rect">
             <a:avLst/>
@@ -8509,12 +8379,12 @@
         </p:nvSpPr>
         <p:spPr>
           <a:xfrm>
-            <a:off x="4258627" y="2019300"/>
-            <a:ext cx="3674441" cy="2324100"/>
+            <a:off x="4233228" y="2019300"/>
+            <a:ext cx="3725240" cy="1485900"/>
           </a:xfrm>
           <a:prstGeom prst="roundRect">
             <a:avLst>
-              <a:gd name="adj" fmla="val 3148"/>
+              <a:gd name="adj" fmla="val 4923"/>
             </a:avLst>
           </a:prstGeom>
           <a:solidFill>
@@ -8536,8 +8406,8 @@
         </p:nvSpPr>
         <p:spPr>
           <a:xfrm>
-            <a:off x="4276915" y="2055876"/>
-            <a:ext cx="54864" cy="2250948"/>
+            <a:off x="4251516" y="2055876"/>
+            <a:ext cx="54864" cy="1412748"/>
           </a:xfrm>
           <a:prstGeom prst="roundRect">
             <a:avLst>
@@ -8558,8 +8428,8 @@
         </p:nvSpPr>
         <p:spPr>
           <a:xfrm>
-            <a:off x="4487227" y="2129028"/>
-            <a:ext cx="3217241" cy="274320"/>
+            <a:off x="4461828" y="2129028"/>
+            <a:ext cx="3268040" cy="274320"/>
           </a:xfrm>
           <a:prstGeom prst="rect">
             <a:avLst/>
@@ -8597,8 +8467,8 @@
         </p:nvSpPr>
         <p:spPr>
           <a:xfrm>
-            <a:off x="4487221" y="2705100"/>
-            <a:ext cx="3217253" cy="1282700"/>
+            <a:off x="4411023" y="2552700"/>
+            <a:ext cx="3369649" cy="482600"/>
           </a:xfrm>
           <a:prstGeom prst="rect">
             <a:avLst/>
@@ -8636,12 +8506,12 @@
         </p:nvSpPr>
         <p:spPr>
           <a:xfrm>
-            <a:off x="8110864" y="2019300"/>
-            <a:ext cx="3674441" cy="2324100"/>
+            <a:off x="8060065" y="2019300"/>
+            <a:ext cx="3725240" cy="1485900"/>
           </a:xfrm>
           <a:prstGeom prst="roundRect">
             <a:avLst>
-              <a:gd name="adj" fmla="val 3148"/>
+              <a:gd name="adj" fmla="val 4923"/>
             </a:avLst>
           </a:prstGeom>
           <a:solidFill>
@@ -8663,8 +8533,8 @@
         </p:nvSpPr>
         <p:spPr>
           <a:xfrm>
-            <a:off x="8129152" y="2055876"/>
-            <a:ext cx="54864" cy="2250948"/>
+            <a:off x="8078353" y="2055876"/>
+            <a:ext cx="54864" cy="1412748"/>
           </a:xfrm>
           <a:prstGeom prst="roundRect">
             <a:avLst>
@@ -8685,8 +8555,8 @@
         </p:nvSpPr>
         <p:spPr>
           <a:xfrm>
-            <a:off x="8339464" y="2129028"/>
-            <a:ext cx="3217241" cy="274320"/>
+            <a:off x="8288665" y="2129028"/>
+            <a:ext cx="3268040" cy="274320"/>
           </a:xfrm>
           <a:prstGeom prst="rect">
             <a:avLst/>
@@ -8724,8 +8594,8 @@
         </p:nvSpPr>
         <p:spPr>
           <a:xfrm>
-            <a:off x="8339458" y="2705100"/>
-            <a:ext cx="3217253" cy="1282700"/>
+            <a:off x="8237861" y="2552700"/>
+            <a:ext cx="3369649" cy="482600"/>
           </a:xfrm>
           <a:prstGeom prst="rect">
             <a:avLst/>
@@ -8763,7 +8633,7 @@
         </p:nvSpPr>
         <p:spPr>
           <a:xfrm>
-            <a:off x="406390" y="5003800"/>
+            <a:off x="406390" y="3683000"/>
             <a:ext cx="11378916" cy="965200"/>
           </a:xfrm>
           <a:prstGeom prst="roundRect">
@@ -8790,7 +8660,7 @@
         </p:nvSpPr>
         <p:spPr>
           <a:xfrm>
-            <a:off x="589270" y="5150104"/>
+            <a:off x="589270" y="3829304"/>
             <a:ext cx="11013156" cy="274320"/>
           </a:xfrm>
           <a:prstGeom prst="rect">
@@ -8829,7 +8699,7 @@
         </p:nvSpPr>
         <p:spPr>
           <a:xfrm>
-            <a:off x="589270" y="5479288"/>
+            <a:off x="589270" y="4158488"/>
             <a:ext cx="11013156" cy="361696"/>
           </a:xfrm>
           <a:prstGeom prst="rect">
@@ -11096,11 +10966,11 @@
         <p:spPr>
           <a:xfrm>
             <a:off x="406390" y="2019300"/>
-            <a:ext cx="5600560" cy="4051300"/>
+            <a:ext cx="5600560" cy="2870200"/>
           </a:xfrm>
           <a:prstGeom prst="roundRect">
             <a:avLst>
-              <a:gd name="adj" fmla="val 1806"/>
+              <a:gd name="adj" fmla="val 2549"/>
             </a:avLst>
           </a:prstGeom>
           <a:solidFill>
@@ -11123,7 +10993,7 @@
         <p:spPr>
           <a:xfrm>
             <a:off x="424678" y="2055876"/>
-            <a:ext cx="54864" cy="3978148"/>
+            <a:ext cx="54864" cy="2797048"/>
           </a:xfrm>
           <a:prstGeom prst="roundRect">
             <a:avLst>
@@ -11183,8 +11053,8 @@
         </p:nvSpPr>
         <p:spPr>
           <a:xfrm>
-            <a:off x="634984" y="2705100"/>
-            <a:ext cx="5143371" cy="977900"/>
+            <a:off x="584185" y="2552700"/>
+            <a:ext cx="5244969" cy="482600"/>
           </a:xfrm>
           <a:prstGeom prst="rect">
             <a:avLst/>
@@ -11222,7 +11092,7 @@
         </p:nvSpPr>
         <p:spPr>
           <a:xfrm>
-            <a:off x="2530014" y="3860800"/>
+            <a:off x="2530014" y="3105150"/>
             <a:ext cx="1353312" cy="330200"/>
           </a:xfrm>
           <a:prstGeom prst="roundRect">
@@ -11249,7 +11119,7 @@
         </p:nvSpPr>
         <p:spPr>
           <a:xfrm>
-            <a:off x="2530014" y="3860800"/>
+            <a:off x="2530014" y="3105150"/>
             <a:ext cx="1353312" cy="330200"/>
           </a:xfrm>
           <a:prstGeom prst="rect">
@@ -11288,7 +11158,7 @@
         </p:nvSpPr>
         <p:spPr>
           <a:xfrm>
-            <a:off x="2580306" y="4368800"/>
+            <a:off x="2580306" y="3505200"/>
             <a:ext cx="1252728" cy="330200"/>
           </a:xfrm>
           <a:prstGeom prst="roundRect">
@@ -11315,7 +11185,7 @@
         </p:nvSpPr>
         <p:spPr>
           <a:xfrm>
-            <a:off x="2580306" y="4368800"/>
+            <a:off x="2580306" y="3505200"/>
             <a:ext cx="1252728" cy="330200"/>
           </a:xfrm>
           <a:prstGeom prst="rect">
@@ -11354,7 +11224,7 @@
         </p:nvSpPr>
         <p:spPr>
           <a:xfrm>
-            <a:off x="2479722" y="4876800"/>
+            <a:off x="2479722" y="3905250"/>
             <a:ext cx="1453896" cy="330200"/>
           </a:xfrm>
           <a:prstGeom prst="roundRect">
@@ -11381,7 +11251,7 @@
         </p:nvSpPr>
         <p:spPr>
           <a:xfrm>
-            <a:off x="2479722" y="4876800"/>
+            <a:off x="2479722" y="3905250"/>
             <a:ext cx="1453896" cy="330200"/>
           </a:xfrm>
           <a:prstGeom prst="rect">
@@ -11420,7 +11290,7 @@
         </p:nvSpPr>
         <p:spPr>
           <a:xfrm>
-            <a:off x="2658030" y="5384800"/>
+            <a:off x="2658030" y="4305300"/>
             <a:ext cx="1097280" cy="330200"/>
           </a:xfrm>
           <a:prstGeom prst="roundRect">
@@ -11447,7 +11317,7 @@
         </p:nvSpPr>
         <p:spPr>
           <a:xfrm>
-            <a:off x="2658030" y="5384800"/>
+            <a:off x="2658030" y="4305300"/>
             <a:ext cx="1097280" cy="330200"/>
           </a:xfrm>
           <a:prstGeom prst="rect">
@@ -11487,11 +11357,11 @@
         <p:spPr>
           <a:xfrm>
             <a:off x="6184745" y="2019300"/>
-            <a:ext cx="5600560" cy="3962400"/>
+            <a:ext cx="5600560" cy="2063750"/>
           </a:xfrm>
           <a:prstGeom prst="roundRect">
             <a:avLst>
-              <a:gd name="adj" fmla="val 1846"/>
+              <a:gd name="adj" fmla="val 3545"/>
             </a:avLst>
           </a:prstGeom>
           <a:solidFill>
@@ -11514,7 +11384,7 @@
         <p:spPr>
           <a:xfrm>
             <a:off x="6203033" y="2055876"/>
-            <a:ext cx="54864" cy="3889248"/>
+            <a:ext cx="54864" cy="1990598"/>
           </a:xfrm>
           <a:prstGeom prst="roundRect">
             <a:avLst>
@@ -11574,17 +11444,19 @@
         </p:nvSpPr>
         <p:spPr>
           <a:xfrm>
-            <a:off x="6413340" y="2705100"/>
-            <a:ext cx="5143371" cy="673100"/>
-          </a:xfrm>
-          <a:prstGeom prst="rect">
-            <a:avLst/>
-          </a:prstGeom>
-          <a:noFill/>
-          <a:ln/>
-        </p:spPr>
-        <p:txBody>
-          <a:bodyPr wrap="square" lIns="0" tIns="0" rIns="0" bIns="0" rtlCol="0" anchor="t"/>
+            <a:off x="6362541" y="2552700"/>
+            <a:ext cx="5244969" cy="266700"/>
+          </a:xfrm>
+          <a:prstGeom prst="rect">
+            <a:avLst/>
+          </a:prstGeom>
+          <a:noFill/>
+          <a:ln/>
+        </p:spPr>
+        <p:txBody>
+          <a:bodyPr wrap="square" lIns="0" tIns="0" rIns="0" bIns="0" rtlCol="0" anchor="t">
+            <a:normAutofit/>
+          </a:bodyPr>
           <a:lstStyle/>
           <a:p>
             <a:pPr algn="l" indent="0" marL="0">
@@ -11613,17 +11485,19 @@
         </p:nvSpPr>
         <p:spPr>
           <a:xfrm>
-            <a:off x="6413340" y="3556000"/>
-            <a:ext cx="5143371" cy="673100"/>
-          </a:xfrm>
-          <a:prstGeom prst="rect">
-            <a:avLst/>
-          </a:prstGeom>
-          <a:noFill/>
-          <a:ln/>
-        </p:spPr>
-        <p:txBody>
-          <a:bodyPr wrap="square" lIns="0" tIns="0" rIns="0" bIns="0" rtlCol="0" anchor="t"/>
+            <a:off x="6362541" y="2889250"/>
+            <a:ext cx="5244969" cy="266700"/>
+          </a:xfrm>
+          <a:prstGeom prst="rect">
+            <a:avLst/>
+          </a:prstGeom>
+          <a:noFill/>
+          <a:ln/>
+        </p:spPr>
+        <p:txBody>
+          <a:bodyPr wrap="square" lIns="0" tIns="0" rIns="0" bIns="0" rtlCol="0" anchor="t">
+            <a:normAutofit/>
+          </a:bodyPr>
           <a:lstStyle/>
           <a:p>
             <a:pPr algn="l" indent="0" marL="0">
@@ -11652,17 +11526,19 @@
         </p:nvSpPr>
         <p:spPr>
           <a:xfrm>
-            <a:off x="6413340" y="4406900"/>
-            <a:ext cx="5143371" cy="673100"/>
-          </a:xfrm>
-          <a:prstGeom prst="rect">
-            <a:avLst/>
-          </a:prstGeom>
-          <a:noFill/>
-          <a:ln/>
-        </p:spPr>
-        <p:txBody>
-          <a:bodyPr wrap="square" lIns="0" tIns="0" rIns="0" bIns="0" rtlCol="0" anchor="t"/>
+            <a:off x="6362541" y="3225800"/>
+            <a:ext cx="5244969" cy="266700"/>
+          </a:xfrm>
+          <a:prstGeom prst="rect">
+            <a:avLst/>
+          </a:prstGeom>
+          <a:noFill/>
+          <a:ln/>
+        </p:spPr>
+        <p:txBody>
+          <a:bodyPr wrap="square" lIns="0" tIns="0" rIns="0" bIns="0" rtlCol="0" anchor="t">
+            <a:normAutofit/>
+          </a:bodyPr>
           <a:lstStyle/>
           <a:p>
             <a:pPr algn="l" indent="0" marL="0">
@@ -11691,17 +11567,19 @@
         </p:nvSpPr>
         <p:spPr>
           <a:xfrm>
-            <a:off x="6413340" y="5257800"/>
-            <a:ext cx="5143371" cy="368300"/>
-          </a:xfrm>
-          <a:prstGeom prst="rect">
-            <a:avLst/>
-          </a:prstGeom>
-          <a:noFill/>
-          <a:ln/>
-        </p:spPr>
-        <p:txBody>
-          <a:bodyPr wrap="square" lIns="0" tIns="0" rIns="0" bIns="0" rtlCol="0" anchor="t"/>
+            <a:off x="6362541" y="3562350"/>
+            <a:ext cx="5244969" cy="266700"/>
+          </a:xfrm>
+          <a:prstGeom prst="rect">
+            <a:avLst/>
+          </a:prstGeom>
+          <a:noFill/>
+          <a:ln/>
+        </p:spPr>
+        <p:txBody>
+          <a:bodyPr wrap="square" lIns="0" tIns="0" rIns="0" bIns="0" rtlCol="0" anchor="t">
+            <a:normAutofit/>
+          </a:bodyPr>
           <a:lstStyle/>
           <a:p>
             <a:pPr algn="l" indent="0" marL="0">
@@ -12157,11 +12035,11 @@
         <p:spPr>
           <a:xfrm>
             <a:off x="6744801" y="2019300"/>
-            <a:ext cx="5040504" cy="4267200"/>
+            <a:ext cx="5040504" cy="2063750"/>
           </a:xfrm>
           <a:prstGeom prst="roundRect">
             <a:avLst>
-              <a:gd name="adj" fmla="val 1714"/>
+              <a:gd name="adj" fmla="val 3545"/>
             </a:avLst>
           </a:prstGeom>
           <a:solidFill>
@@ -12184,7 +12062,7 @@
         <p:spPr>
           <a:xfrm>
             <a:off x="6763089" y="2055876"/>
-            <a:ext cx="54864" cy="4194048"/>
+            <a:ext cx="54864" cy="1990598"/>
           </a:xfrm>
           <a:prstGeom prst="roundRect">
             <a:avLst>
@@ -12244,17 +12122,19 @@
         </p:nvSpPr>
         <p:spPr>
           <a:xfrm>
-            <a:off x="6973396" y="2705100"/>
-            <a:ext cx="4583315" cy="673100"/>
-          </a:xfrm>
-          <a:prstGeom prst="rect">
-            <a:avLst/>
-          </a:prstGeom>
-          <a:noFill/>
-          <a:ln/>
-        </p:spPr>
-        <p:txBody>
-          <a:bodyPr wrap="square" lIns="0" tIns="0" rIns="0" bIns="0" rtlCol="0" anchor="t"/>
+            <a:off x="6922597" y="2552700"/>
+            <a:ext cx="4684913" cy="266700"/>
+          </a:xfrm>
+          <a:prstGeom prst="rect">
+            <a:avLst/>
+          </a:prstGeom>
+          <a:noFill/>
+          <a:ln/>
+        </p:spPr>
+        <p:txBody>
+          <a:bodyPr wrap="square" lIns="0" tIns="0" rIns="0" bIns="0" rtlCol="0" anchor="t">
+            <a:normAutofit/>
+          </a:bodyPr>
           <a:lstStyle/>
           <a:p>
             <a:pPr algn="l" indent="0" marL="0">
@@ -12283,17 +12163,19 @@
         </p:nvSpPr>
         <p:spPr>
           <a:xfrm>
-            <a:off x="6973396" y="3556000"/>
-            <a:ext cx="4583315" cy="673100"/>
-          </a:xfrm>
-          <a:prstGeom prst="rect">
-            <a:avLst/>
-          </a:prstGeom>
-          <a:noFill/>
-          <a:ln/>
-        </p:spPr>
-        <p:txBody>
-          <a:bodyPr wrap="square" lIns="0" tIns="0" rIns="0" bIns="0" rtlCol="0" anchor="t"/>
+            <a:off x="6922597" y="2889250"/>
+            <a:ext cx="4684913" cy="266700"/>
+          </a:xfrm>
+          <a:prstGeom prst="rect">
+            <a:avLst/>
+          </a:prstGeom>
+          <a:noFill/>
+          <a:ln/>
+        </p:spPr>
+        <p:txBody>
+          <a:bodyPr wrap="square" lIns="0" tIns="0" rIns="0" bIns="0" rtlCol="0" anchor="t">
+            <a:normAutofit/>
+          </a:bodyPr>
           <a:lstStyle/>
           <a:p>
             <a:pPr algn="l" indent="0" marL="0">
@@ -12322,17 +12204,19 @@
         </p:nvSpPr>
         <p:spPr>
           <a:xfrm>
-            <a:off x="6973396" y="4406900"/>
-            <a:ext cx="4583315" cy="673100"/>
-          </a:xfrm>
-          <a:prstGeom prst="rect">
-            <a:avLst/>
-          </a:prstGeom>
-          <a:noFill/>
-          <a:ln/>
-        </p:spPr>
-        <p:txBody>
-          <a:bodyPr wrap="square" lIns="0" tIns="0" rIns="0" bIns="0" rtlCol="0" anchor="t"/>
+            <a:off x="6922597" y="3225800"/>
+            <a:ext cx="4684913" cy="266700"/>
+          </a:xfrm>
+          <a:prstGeom prst="rect">
+            <a:avLst/>
+          </a:prstGeom>
+          <a:noFill/>
+          <a:ln/>
+        </p:spPr>
+        <p:txBody>
+          <a:bodyPr wrap="square" lIns="0" tIns="0" rIns="0" bIns="0" rtlCol="0" anchor="t">
+            <a:normAutofit/>
+          </a:bodyPr>
           <a:lstStyle/>
           <a:p>
             <a:pPr algn="l" indent="0" marL="0">
@@ -12361,17 +12245,19 @@
         </p:nvSpPr>
         <p:spPr>
           <a:xfrm>
-            <a:off x="6973396" y="5257800"/>
-            <a:ext cx="4583315" cy="673100"/>
-          </a:xfrm>
-          <a:prstGeom prst="rect">
-            <a:avLst/>
-          </a:prstGeom>
-          <a:noFill/>
-          <a:ln/>
-        </p:spPr>
-        <p:txBody>
-          <a:bodyPr wrap="square" lIns="0" tIns="0" rIns="0" bIns="0" rtlCol="0" anchor="t"/>
+            <a:off x="6922597" y="3562350"/>
+            <a:ext cx="4684913" cy="266700"/>
+          </a:xfrm>
+          <a:prstGeom prst="rect">
+            <a:avLst/>
+          </a:prstGeom>
+          <a:noFill/>
+          <a:ln/>
+        </p:spPr>
+        <p:txBody>
+          <a:bodyPr wrap="square" lIns="0" tIns="0" rIns="0" bIns="0" rtlCol="0" anchor="t">
+            <a:normAutofit/>
+          </a:bodyPr>
           <a:lstStyle/>
           <a:p>
             <a:pPr algn="l" indent="0" marL="0">
@@ -12550,11 +12436,11 @@
         <p:spPr>
           <a:xfrm>
             <a:off x="406390" y="2019300"/>
-            <a:ext cx="3674441" cy="4267200"/>
+            <a:ext cx="3725240" cy="2063750"/>
           </a:xfrm>
           <a:prstGeom prst="roundRect">
             <a:avLst>
-              <a:gd name="adj" fmla="val 1991"/>
+              <a:gd name="adj" fmla="val 3545"/>
             </a:avLst>
           </a:prstGeom>
           <a:solidFill>
@@ -12577,7 +12463,7 @@
         <p:spPr>
           <a:xfrm>
             <a:off x="424678" y="2055876"/>
-            <a:ext cx="54864" cy="4194048"/>
+            <a:ext cx="54864" cy="1990598"/>
           </a:xfrm>
           <a:prstGeom prst="roundRect">
             <a:avLst>
@@ -12599,7 +12485,7 @@
         <p:spPr>
           <a:xfrm>
             <a:off x="634990" y="2129028"/>
-            <a:ext cx="3217241" cy="274320"/>
+            <a:ext cx="3268040" cy="274320"/>
           </a:xfrm>
           <a:prstGeom prst="rect">
             <a:avLst/>
@@ -12637,17 +12523,19 @@
         </p:nvSpPr>
         <p:spPr>
           <a:xfrm>
-            <a:off x="634984" y="2705100"/>
-            <a:ext cx="3217253" cy="673100"/>
-          </a:xfrm>
-          <a:prstGeom prst="rect">
-            <a:avLst/>
-          </a:prstGeom>
-          <a:noFill/>
-          <a:ln/>
-        </p:spPr>
-        <p:txBody>
-          <a:bodyPr wrap="square" lIns="0" tIns="0" rIns="0" bIns="0" rtlCol="0" anchor="t"/>
+            <a:off x="584185" y="2552700"/>
+            <a:ext cx="3369649" cy="266700"/>
+          </a:xfrm>
+          <a:prstGeom prst="rect">
+            <a:avLst/>
+          </a:prstGeom>
+          <a:noFill/>
+          <a:ln/>
+        </p:spPr>
+        <p:txBody>
+          <a:bodyPr wrap="square" lIns="0" tIns="0" rIns="0" bIns="0" rtlCol="0" anchor="t">
+            <a:normAutofit/>
+          </a:bodyPr>
           <a:lstStyle/>
           <a:p>
             <a:pPr algn="l" indent="0" marL="0">
@@ -12676,17 +12564,19 @@
         </p:nvSpPr>
         <p:spPr>
           <a:xfrm>
-            <a:off x="634984" y="3556000"/>
-            <a:ext cx="3217253" cy="673100"/>
-          </a:xfrm>
-          <a:prstGeom prst="rect">
-            <a:avLst/>
-          </a:prstGeom>
-          <a:noFill/>
-          <a:ln/>
-        </p:spPr>
-        <p:txBody>
-          <a:bodyPr wrap="square" lIns="0" tIns="0" rIns="0" bIns="0" rtlCol="0" anchor="t"/>
+            <a:off x="584185" y="2889250"/>
+            <a:ext cx="3369649" cy="266700"/>
+          </a:xfrm>
+          <a:prstGeom prst="rect">
+            <a:avLst/>
+          </a:prstGeom>
+          <a:noFill/>
+          <a:ln/>
+        </p:spPr>
+        <p:txBody>
+          <a:bodyPr wrap="square" lIns="0" tIns="0" rIns="0" bIns="0" rtlCol="0" anchor="t">
+            <a:normAutofit/>
+          </a:bodyPr>
           <a:lstStyle/>
           <a:p>
             <a:pPr algn="l" indent="0" marL="0">
@@ -12715,17 +12605,19 @@
         </p:nvSpPr>
         <p:spPr>
           <a:xfrm>
-            <a:off x="634984" y="4406900"/>
-            <a:ext cx="3217253" cy="673100"/>
-          </a:xfrm>
-          <a:prstGeom prst="rect">
-            <a:avLst/>
-          </a:prstGeom>
-          <a:noFill/>
-          <a:ln/>
-        </p:spPr>
-        <p:txBody>
-          <a:bodyPr wrap="square" lIns="0" tIns="0" rIns="0" bIns="0" rtlCol="0" anchor="t"/>
+            <a:off x="584185" y="3225800"/>
+            <a:ext cx="3369649" cy="266700"/>
+          </a:xfrm>
+          <a:prstGeom prst="rect">
+            <a:avLst/>
+          </a:prstGeom>
+          <a:noFill/>
+          <a:ln/>
+        </p:spPr>
+        <p:txBody>
+          <a:bodyPr wrap="square" lIns="0" tIns="0" rIns="0" bIns="0" rtlCol="0" anchor="t">
+            <a:normAutofit/>
+          </a:bodyPr>
           <a:lstStyle/>
           <a:p>
             <a:pPr algn="l" indent="0" marL="0">
@@ -12754,17 +12646,19 @@
         </p:nvSpPr>
         <p:spPr>
           <a:xfrm>
-            <a:off x="634984" y="5257800"/>
-            <a:ext cx="3217253" cy="673100"/>
-          </a:xfrm>
-          <a:prstGeom prst="rect">
-            <a:avLst/>
-          </a:prstGeom>
-          <a:noFill/>
-          <a:ln/>
-        </p:spPr>
-        <p:txBody>
-          <a:bodyPr wrap="square" lIns="0" tIns="0" rIns="0" bIns="0" rtlCol="0" anchor="t"/>
+            <a:off x="584185" y="3562350"/>
+            <a:ext cx="3369649" cy="266700"/>
+          </a:xfrm>
+          <a:prstGeom prst="rect">
+            <a:avLst/>
+          </a:prstGeom>
+          <a:noFill/>
+          <a:ln/>
+        </p:spPr>
+        <p:txBody>
+          <a:bodyPr wrap="square" lIns="0" tIns="0" rIns="0" bIns="0" rtlCol="0" anchor="t">
+            <a:normAutofit/>
+          </a:bodyPr>
           <a:lstStyle/>
           <a:p>
             <a:pPr algn="l" indent="0" marL="0">
@@ -12793,12 +12687,12 @@
         </p:nvSpPr>
         <p:spPr>
           <a:xfrm>
-            <a:off x="4258627" y="2019300"/>
-            <a:ext cx="3674441" cy="4267200"/>
+            <a:off x="4233228" y="2019300"/>
+            <a:ext cx="3725240" cy="2063750"/>
           </a:xfrm>
           <a:prstGeom prst="roundRect">
             <a:avLst>
-              <a:gd name="adj" fmla="val 1991"/>
+              <a:gd name="adj" fmla="val 3545"/>
             </a:avLst>
           </a:prstGeom>
           <a:solidFill>
@@ -12820,8 +12714,8 @@
         </p:nvSpPr>
         <p:spPr>
           <a:xfrm>
-            <a:off x="4276915" y="2055876"/>
-            <a:ext cx="54864" cy="4194048"/>
+            <a:off x="4251516" y="2055876"/>
+            <a:ext cx="54864" cy="1990598"/>
           </a:xfrm>
           <a:prstGeom prst="roundRect">
             <a:avLst>
@@ -12842,8 +12736,8 @@
         </p:nvSpPr>
         <p:spPr>
           <a:xfrm>
-            <a:off x="4487227" y="2129028"/>
-            <a:ext cx="3217241" cy="274320"/>
+            <a:off x="4461828" y="2129028"/>
+            <a:ext cx="3268040" cy="274320"/>
           </a:xfrm>
           <a:prstGeom prst="rect">
             <a:avLst/>
@@ -12881,17 +12775,19 @@
         </p:nvSpPr>
         <p:spPr>
           <a:xfrm>
-            <a:off x="4487221" y="2705100"/>
-            <a:ext cx="3217253" cy="673100"/>
-          </a:xfrm>
-          <a:prstGeom prst="rect">
-            <a:avLst/>
-          </a:prstGeom>
-          <a:noFill/>
-          <a:ln/>
-        </p:spPr>
-        <p:txBody>
-          <a:bodyPr wrap="square" lIns="0" tIns="0" rIns="0" bIns="0" rtlCol="0" anchor="t"/>
+            <a:off x="4411023" y="2552700"/>
+            <a:ext cx="3369649" cy="266700"/>
+          </a:xfrm>
+          <a:prstGeom prst="rect">
+            <a:avLst/>
+          </a:prstGeom>
+          <a:noFill/>
+          <a:ln/>
+        </p:spPr>
+        <p:txBody>
+          <a:bodyPr wrap="square" lIns="0" tIns="0" rIns="0" bIns="0" rtlCol="0" anchor="t">
+            <a:normAutofit/>
+          </a:bodyPr>
           <a:lstStyle/>
           <a:p>
             <a:pPr algn="l" indent="0" marL="0">
@@ -12920,17 +12816,19 @@
         </p:nvSpPr>
         <p:spPr>
           <a:xfrm>
-            <a:off x="4487221" y="3556000"/>
-            <a:ext cx="3217253" cy="673100"/>
-          </a:xfrm>
-          <a:prstGeom prst="rect">
-            <a:avLst/>
-          </a:prstGeom>
-          <a:noFill/>
-          <a:ln/>
-        </p:spPr>
-        <p:txBody>
-          <a:bodyPr wrap="square" lIns="0" tIns="0" rIns="0" bIns="0" rtlCol="0" anchor="t"/>
+            <a:off x="4411023" y="2889250"/>
+            <a:ext cx="3369649" cy="266700"/>
+          </a:xfrm>
+          <a:prstGeom prst="rect">
+            <a:avLst/>
+          </a:prstGeom>
+          <a:noFill/>
+          <a:ln/>
+        </p:spPr>
+        <p:txBody>
+          <a:bodyPr wrap="square" lIns="0" tIns="0" rIns="0" bIns="0" rtlCol="0" anchor="t">
+            <a:normAutofit/>
+          </a:bodyPr>
           <a:lstStyle/>
           <a:p>
             <a:pPr algn="l" indent="0" marL="0">
@@ -12959,17 +12857,19 @@
         </p:nvSpPr>
         <p:spPr>
           <a:xfrm>
-            <a:off x="4487221" y="4406900"/>
-            <a:ext cx="3217253" cy="673100"/>
-          </a:xfrm>
-          <a:prstGeom prst="rect">
-            <a:avLst/>
-          </a:prstGeom>
-          <a:noFill/>
-          <a:ln/>
-        </p:spPr>
-        <p:txBody>
-          <a:bodyPr wrap="square" lIns="0" tIns="0" rIns="0" bIns="0" rtlCol="0" anchor="t"/>
+            <a:off x="4411023" y="3225800"/>
+            <a:ext cx="3369649" cy="266700"/>
+          </a:xfrm>
+          <a:prstGeom prst="rect">
+            <a:avLst/>
+          </a:prstGeom>
+          <a:noFill/>
+          <a:ln/>
+        </p:spPr>
+        <p:txBody>
+          <a:bodyPr wrap="square" lIns="0" tIns="0" rIns="0" bIns="0" rtlCol="0" anchor="t">
+            <a:normAutofit/>
+          </a:bodyPr>
           <a:lstStyle/>
           <a:p>
             <a:pPr algn="l" indent="0" marL="0">
@@ -12998,17 +12898,19 @@
         </p:nvSpPr>
         <p:spPr>
           <a:xfrm>
-            <a:off x="4487221" y="5257800"/>
-            <a:ext cx="3217253" cy="673100"/>
-          </a:xfrm>
-          <a:prstGeom prst="rect">
-            <a:avLst/>
-          </a:prstGeom>
-          <a:noFill/>
-          <a:ln/>
-        </p:spPr>
-        <p:txBody>
-          <a:bodyPr wrap="square" lIns="0" tIns="0" rIns="0" bIns="0" rtlCol="0" anchor="t"/>
+            <a:off x="4411023" y="3562350"/>
+            <a:ext cx="3369649" cy="266700"/>
+          </a:xfrm>
+          <a:prstGeom prst="rect">
+            <a:avLst/>
+          </a:prstGeom>
+          <a:noFill/>
+          <a:ln/>
+        </p:spPr>
+        <p:txBody>
+          <a:bodyPr wrap="square" lIns="0" tIns="0" rIns="0" bIns="0" rtlCol="0" anchor="t">
+            <a:normAutofit/>
+          </a:bodyPr>
           <a:lstStyle/>
           <a:p>
             <a:pPr algn="l" indent="0" marL="0">
@@ -13037,12 +12939,12 @@
         </p:nvSpPr>
         <p:spPr>
           <a:xfrm>
-            <a:off x="8110864" y="2019300"/>
-            <a:ext cx="3674441" cy="4267200"/>
+            <a:off x="8060065" y="2019300"/>
+            <a:ext cx="3725240" cy="2063750"/>
           </a:xfrm>
           <a:prstGeom prst="roundRect">
             <a:avLst>
-              <a:gd name="adj" fmla="val 1991"/>
+              <a:gd name="adj" fmla="val 3545"/>
             </a:avLst>
           </a:prstGeom>
           <a:solidFill>
@@ -13064,8 +12966,8 @@
         </p:nvSpPr>
         <p:spPr>
           <a:xfrm>
-            <a:off x="8129152" y="2055876"/>
-            <a:ext cx="54864" cy="4194048"/>
+            <a:off x="8078353" y="2055876"/>
+            <a:ext cx="54864" cy="1990598"/>
           </a:xfrm>
           <a:prstGeom prst="roundRect">
             <a:avLst>
@@ -13086,8 +12988,8 @@
         </p:nvSpPr>
         <p:spPr>
           <a:xfrm>
-            <a:off x="8339464" y="2129028"/>
-            <a:ext cx="3217241" cy="274320"/>
+            <a:off x="8288665" y="2129028"/>
+            <a:ext cx="3268040" cy="274320"/>
           </a:xfrm>
           <a:prstGeom prst="rect">
             <a:avLst/>
@@ -13125,17 +13027,19 @@
         </p:nvSpPr>
         <p:spPr>
           <a:xfrm>
-            <a:off x="8339458" y="2705100"/>
-            <a:ext cx="3217253" cy="673100"/>
-          </a:xfrm>
-          <a:prstGeom prst="rect">
-            <a:avLst/>
-          </a:prstGeom>
-          <a:noFill/>
-          <a:ln/>
-        </p:spPr>
-        <p:txBody>
-          <a:bodyPr wrap="square" lIns="0" tIns="0" rIns="0" bIns="0" rtlCol="0" anchor="t"/>
+            <a:off x="8237861" y="2552700"/>
+            <a:ext cx="3369649" cy="266700"/>
+          </a:xfrm>
+          <a:prstGeom prst="rect">
+            <a:avLst/>
+          </a:prstGeom>
+          <a:noFill/>
+          <a:ln/>
+        </p:spPr>
+        <p:txBody>
+          <a:bodyPr wrap="square" lIns="0" tIns="0" rIns="0" bIns="0" rtlCol="0" anchor="t">
+            <a:normAutofit/>
+          </a:bodyPr>
           <a:lstStyle/>
           <a:p>
             <a:pPr algn="l" indent="0" marL="0">
@@ -13164,17 +13068,19 @@
         </p:nvSpPr>
         <p:spPr>
           <a:xfrm>
-            <a:off x="8339458" y="3556000"/>
-            <a:ext cx="3217253" cy="673100"/>
-          </a:xfrm>
-          <a:prstGeom prst="rect">
-            <a:avLst/>
-          </a:prstGeom>
-          <a:noFill/>
-          <a:ln/>
-        </p:spPr>
-        <p:txBody>
-          <a:bodyPr wrap="square" lIns="0" tIns="0" rIns="0" bIns="0" rtlCol="0" anchor="t"/>
+            <a:off x="8237861" y="2889250"/>
+            <a:ext cx="3369649" cy="266700"/>
+          </a:xfrm>
+          <a:prstGeom prst="rect">
+            <a:avLst/>
+          </a:prstGeom>
+          <a:noFill/>
+          <a:ln/>
+        </p:spPr>
+        <p:txBody>
+          <a:bodyPr wrap="square" lIns="0" tIns="0" rIns="0" bIns="0" rtlCol="0" anchor="t">
+            <a:normAutofit/>
+          </a:bodyPr>
           <a:lstStyle/>
           <a:p>
             <a:pPr algn="l" indent="0" marL="0">
@@ -13203,17 +13109,19 @@
         </p:nvSpPr>
         <p:spPr>
           <a:xfrm>
-            <a:off x="8339458" y="4406900"/>
-            <a:ext cx="3217253" cy="673100"/>
-          </a:xfrm>
-          <a:prstGeom prst="rect">
-            <a:avLst/>
-          </a:prstGeom>
-          <a:noFill/>
-          <a:ln/>
-        </p:spPr>
-        <p:txBody>
-          <a:bodyPr wrap="square" lIns="0" tIns="0" rIns="0" bIns="0" rtlCol="0" anchor="t"/>
+            <a:off x="8237861" y="3225800"/>
+            <a:ext cx="3369649" cy="266700"/>
+          </a:xfrm>
+          <a:prstGeom prst="rect">
+            <a:avLst/>
+          </a:prstGeom>
+          <a:noFill/>
+          <a:ln/>
+        </p:spPr>
+        <p:txBody>
+          <a:bodyPr wrap="square" lIns="0" tIns="0" rIns="0" bIns="0" rtlCol="0" anchor="t">
+            <a:normAutofit/>
+          </a:bodyPr>
           <a:lstStyle/>
           <a:p>
             <a:pPr algn="l" indent="0" marL="0">
@@ -13242,17 +13150,19 @@
         </p:nvSpPr>
         <p:spPr>
           <a:xfrm>
-            <a:off x="8339458" y="5257800"/>
-            <a:ext cx="3217253" cy="673100"/>
-          </a:xfrm>
-          <a:prstGeom prst="rect">
-            <a:avLst/>
-          </a:prstGeom>
-          <a:noFill/>
-          <a:ln/>
-        </p:spPr>
-        <p:txBody>
-          <a:bodyPr wrap="square" lIns="0" tIns="0" rIns="0" bIns="0" rtlCol="0" anchor="t"/>
+            <a:off x="8237861" y="3562350"/>
+            <a:ext cx="3369649" cy="266700"/>
+          </a:xfrm>
+          <a:prstGeom prst="rect">
+            <a:avLst/>
+          </a:prstGeom>
+          <a:noFill/>
+          <a:ln/>
+        </p:spPr>
+        <p:txBody>
+          <a:bodyPr wrap="square" lIns="0" tIns="0" rIns="0" bIns="0" rtlCol="0" anchor="t">
+            <a:normAutofit/>
+          </a:bodyPr>
           <a:lstStyle/>
           <a:p>
             <a:pPr algn="l" indent="0" marL="0">
@@ -13431,11 +13341,11 @@
         <p:spPr>
           <a:xfrm>
             <a:off x="406390" y="2019300"/>
-            <a:ext cx="5600560" cy="3594100"/>
+            <a:ext cx="5600560" cy="2400300"/>
           </a:xfrm>
           <a:prstGeom prst="roundRect">
             <a:avLst>
-              <a:gd name="adj" fmla="val 2035"/>
+              <a:gd name="adj" fmla="val 3048"/>
             </a:avLst>
           </a:prstGeom>
           <a:solidFill>
@@ -13458,7 +13368,7 @@
         <p:spPr>
           <a:xfrm>
             <a:off x="424678" y="2055876"/>
-            <a:ext cx="54864" cy="3520948"/>
+            <a:ext cx="54864" cy="2327148"/>
           </a:xfrm>
           <a:prstGeom prst="roundRect">
             <a:avLst>
@@ -13518,17 +13428,19 @@
         </p:nvSpPr>
         <p:spPr>
           <a:xfrm>
-            <a:off x="634984" y="2705100"/>
-            <a:ext cx="5143371" cy="368300"/>
-          </a:xfrm>
-          <a:prstGeom prst="rect">
-            <a:avLst/>
-          </a:prstGeom>
-          <a:noFill/>
-          <a:ln/>
-        </p:spPr>
-        <p:txBody>
-          <a:bodyPr wrap="square" lIns="0" tIns="0" rIns="0" bIns="0" rtlCol="0" anchor="t"/>
+            <a:off x="584185" y="2552700"/>
+            <a:ext cx="5244969" cy="266700"/>
+          </a:xfrm>
+          <a:prstGeom prst="rect">
+            <a:avLst/>
+          </a:prstGeom>
+          <a:noFill/>
+          <a:ln/>
+        </p:spPr>
+        <p:txBody>
+          <a:bodyPr wrap="square" lIns="0" tIns="0" rIns="0" bIns="0" rtlCol="0" anchor="t">
+            <a:normAutofit/>
+          </a:bodyPr>
           <a:lstStyle/>
           <a:p>
             <a:pPr algn="l" indent="0" marL="0">
@@ -13557,17 +13469,19 @@
         </p:nvSpPr>
         <p:spPr>
           <a:xfrm>
-            <a:off x="634984" y="3251200"/>
-            <a:ext cx="5143371" cy="368300"/>
-          </a:xfrm>
-          <a:prstGeom prst="rect">
-            <a:avLst/>
-          </a:prstGeom>
-          <a:noFill/>
-          <a:ln/>
-        </p:spPr>
-        <p:txBody>
-          <a:bodyPr wrap="square" lIns="0" tIns="0" rIns="0" bIns="0" rtlCol="0" anchor="t"/>
+            <a:off x="584185" y="2889250"/>
+            <a:ext cx="5244969" cy="266700"/>
+          </a:xfrm>
+          <a:prstGeom prst="rect">
+            <a:avLst/>
+          </a:prstGeom>
+          <a:noFill/>
+          <a:ln/>
+        </p:spPr>
+        <p:txBody>
+          <a:bodyPr wrap="square" lIns="0" tIns="0" rIns="0" bIns="0" rtlCol="0" anchor="t">
+            <a:normAutofit/>
+          </a:bodyPr>
           <a:lstStyle/>
           <a:p>
             <a:pPr algn="l" indent="0" marL="0">
@@ -13596,17 +13510,19 @@
         </p:nvSpPr>
         <p:spPr>
           <a:xfrm>
-            <a:off x="634984" y="3797300"/>
-            <a:ext cx="5143371" cy="368300"/>
-          </a:xfrm>
-          <a:prstGeom prst="rect">
-            <a:avLst/>
-          </a:prstGeom>
-          <a:noFill/>
-          <a:ln/>
-        </p:spPr>
-        <p:txBody>
-          <a:bodyPr wrap="square" lIns="0" tIns="0" rIns="0" bIns="0" rtlCol="0" anchor="t"/>
+            <a:off x="584185" y="3225800"/>
+            <a:ext cx="5244969" cy="266700"/>
+          </a:xfrm>
+          <a:prstGeom prst="rect">
+            <a:avLst/>
+          </a:prstGeom>
+          <a:noFill/>
+          <a:ln/>
+        </p:spPr>
+        <p:txBody>
+          <a:bodyPr wrap="square" lIns="0" tIns="0" rIns="0" bIns="0" rtlCol="0" anchor="t">
+            <a:normAutofit/>
+          </a:bodyPr>
           <a:lstStyle/>
           <a:p>
             <a:pPr algn="l" indent="0" marL="0">
@@ -13635,17 +13551,19 @@
         </p:nvSpPr>
         <p:spPr>
           <a:xfrm>
-            <a:off x="634984" y="4343400"/>
-            <a:ext cx="5143371" cy="368300"/>
-          </a:xfrm>
-          <a:prstGeom prst="rect">
-            <a:avLst/>
-          </a:prstGeom>
-          <a:noFill/>
-          <a:ln/>
-        </p:spPr>
-        <p:txBody>
-          <a:bodyPr wrap="square" lIns="0" tIns="0" rIns="0" bIns="0" rtlCol="0" anchor="t"/>
+            <a:off x="584185" y="3562350"/>
+            <a:ext cx="5244969" cy="266700"/>
+          </a:xfrm>
+          <a:prstGeom prst="rect">
+            <a:avLst/>
+          </a:prstGeom>
+          <a:noFill/>
+          <a:ln/>
+        </p:spPr>
+        <p:txBody>
+          <a:bodyPr wrap="square" lIns="0" tIns="0" rIns="0" bIns="0" rtlCol="0" anchor="t">
+            <a:normAutofit/>
+          </a:bodyPr>
           <a:lstStyle/>
           <a:p>
             <a:pPr algn="l" indent="0" marL="0">
@@ -13674,17 +13592,19 @@
         </p:nvSpPr>
         <p:spPr>
           <a:xfrm>
-            <a:off x="634984" y="4889500"/>
-            <a:ext cx="5143371" cy="368300"/>
-          </a:xfrm>
-          <a:prstGeom prst="rect">
-            <a:avLst/>
-          </a:prstGeom>
-          <a:noFill/>
-          <a:ln/>
-        </p:spPr>
-        <p:txBody>
-          <a:bodyPr wrap="square" lIns="0" tIns="0" rIns="0" bIns="0" rtlCol="0" anchor="t"/>
+            <a:off x="584185" y="3898900"/>
+            <a:ext cx="5244969" cy="266700"/>
+          </a:xfrm>
+          <a:prstGeom prst="rect">
+            <a:avLst/>
+          </a:prstGeom>
+          <a:noFill/>
+          <a:ln/>
+        </p:spPr>
+        <p:txBody>
+          <a:bodyPr wrap="square" lIns="0" tIns="0" rIns="0" bIns="0" rtlCol="0" anchor="t">
+            <a:normAutofit/>
+          </a:bodyPr>
           <a:lstStyle/>
           <a:p>
             <a:pPr algn="l" indent="0" marL="0">
@@ -13714,11 +13634,11 @@
         <p:spPr>
           <a:xfrm>
             <a:off x="6184745" y="2019300"/>
-            <a:ext cx="5600560" cy="2438400"/>
+            <a:ext cx="5600560" cy="2184400"/>
           </a:xfrm>
           <a:prstGeom prst="roundRect">
             <a:avLst>
-              <a:gd name="adj" fmla="val 3000"/>
+              <a:gd name="adj" fmla="val 3349"/>
             </a:avLst>
           </a:prstGeom>
           <a:solidFill>
@@ -13741,7 +13661,7 @@
         <p:spPr>
           <a:xfrm>
             <a:off x="6203033" y="2055876"/>
-            <a:ext cx="54864" cy="2365248"/>
+            <a:ext cx="54864" cy="2111248"/>
           </a:xfrm>
           <a:prstGeom prst="roundRect">
             <a:avLst>
@@ -13801,8 +13721,8 @@
         </p:nvSpPr>
         <p:spPr>
           <a:xfrm>
-            <a:off x="6413340" y="2705100"/>
-            <a:ext cx="5143371" cy="1397000"/>
+            <a:off x="6362541" y="2552700"/>
+            <a:ext cx="5244969" cy="1397000"/>
           </a:xfrm>
           <a:prstGeom prst="roundRect">
             <a:avLst>
@@ -13828,7 +13748,7 @@
         </p:nvSpPr>
         <p:spPr>
           <a:xfrm>
-            <a:off x="6550500" y="2814828"/>
+            <a:off x="6499701" y="2662428"/>
             <a:ext cx="91440" cy="91440"/>
           </a:xfrm>
           <a:prstGeom prst="ellipse">
@@ -13853,7 +13773,7 @@
         </p:nvSpPr>
         <p:spPr>
           <a:xfrm>
-            <a:off x="6687660" y="2814828"/>
+            <a:off x="6636861" y="2662428"/>
             <a:ext cx="91440" cy="91440"/>
           </a:xfrm>
           <a:prstGeom prst="ellipse">
@@ -13878,7 +13798,7 @@
         </p:nvSpPr>
         <p:spPr>
           <a:xfrm>
-            <a:off x="6824820" y="2814828"/>
+            <a:off x="6774021" y="2662428"/>
             <a:ext cx="91440" cy="91440"/>
           </a:xfrm>
           <a:prstGeom prst="ellipse">
@@ -13903,8 +13823,8 @@
         </p:nvSpPr>
         <p:spPr>
           <a:xfrm>
-            <a:off x="6614508" y="3034284"/>
-            <a:ext cx="4741035" cy="958088"/>
+            <a:off x="6563709" y="2881884"/>
+            <a:ext cx="4842633" cy="958088"/>
           </a:xfrm>
           <a:prstGeom prst="rect">
             <a:avLst/>
@@ -13993,7 +13913,7 @@
         </p:nvSpPr>
         <p:spPr>
           <a:xfrm>
-            <a:off x="406390" y="5791200"/>
+            <a:off x="406390" y="4597400"/>
             <a:ext cx="11378916" cy="774700"/>
           </a:xfrm>
           <a:prstGeom prst="roundRect">
@@ -14020,7 +13940,7 @@
         </p:nvSpPr>
         <p:spPr>
           <a:xfrm>
-            <a:off x="589270" y="5937504"/>
+            <a:off x="589270" y="4743704"/>
             <a:ext cx="11013156" cy="274320"/>
           </a:xfrm>
           <a:prstGeom prst="rect">
@@ -14059,7 +13979,7 @@
         </p:nvSpPr>
         <p:spPr>
           <a:xfrm>
-            <a:off x="589270" y="6266688"/>
+            <a:off x="589270" y="5072888"/>
             <a:ext cx="11013156" cy="182880"/>
           </a:xfrm>
           <a:prstGeom prst="rect">

--- a/presentation.pptx
+++ b/presentation.pptx
@@ -1856,7 +1856,7 @@
     <p:bg>
       <p:bgPr>
         <a:solidFill>
-          <a:srgbClr val="0B0B12"/>
+          <a:srgbClr val="1A1B26"/>
         </a:solidFill>
       </p:bgPr>
     </p:bg>
@@ -1891,11 +1891,11 @@
             </a:avLst>
           </a:prstGeom>
           <a:solidFill>
-            <a:srgbClr val="151522"/>
+            <a:srgbClr val="24283B"/>
           </a:solidFill>
           <a:ln w="19050">
             <a:solidFill>
-              <a:srgbClr val="FF2E88"/>
+              <a:srgbClr val="7AA2F7"/>
             </a:solidFill>
             <a:prstDash val="solid"/>
           </a:ln>
@@ -1928,7 +1928,7 @@
             <a:r>
               <a:rPr lang="en-US" sz="900" b="1" dirty="0">
                 <a:solidFill>
-                  <a:srgbClr val="FF2E88"/>
+                  <a:srgbClr val="7AA2F7"/>
                 </a:solidFill>
                 <a:latin typeface="Trebuchet MS" pitchFamily="34" charset="0"/>
                 <a:ea typeface="Trebuchet MS" pitchFamily="34" charset="-122"/>
@@ -1967,7 +1967,7 @@
             <a:r>
               <a:rPr lang="en-US" sz="2400" b="1" dirty="0">
                 <a:solidFill>
-                  <a:srgbClr val="FFFFFF"/>
+                  <a:srgbClr val="C0CAF5"/>
                 </a:solidFill>
                 <a:latin typeface="Trebuchet MS" pitchFamily="34" charset="0"/>
                 <a:ea typeface="Trebuchet MS" pitchFamily="34" charset="-122"/>
@@ -2006,7 +2006,7 @@
             <a:r>
               <a:rPr lang="en-US" sz="1200" dirty="0">
                 <a:solidFill>
-                  <a:srgbClr val="A7A7B5"/>
+                  <a:srgbClr val="565F89"/>
                 </a:solidFill>
                 <a:latin typeface="Segoe UI" pitchFamily="34" charset="0"/>
                 <a:ea typeface="Segoe UI" pitchFamily="34" charset="-122"/>
@@ -2035,11 +2035,11 @@
             </a:avLst>
           </a:prstGeom>
           <a:solidFill>
-            <a:srgbClr val="151522"/>
+            <a:srgbClr val="24283B"/>
           </a:solidFill>
           <a:ln w="19050">
             <a:solidFill>
-              <a:srgbClr val="FF2E88"/>
+              <a:srgbClr val="7AA2F7"/>
             </a:solidFill>
             <a:prstDash val="solid"/>
           </a:ln>
@@ -2062,21 +2062,45 @@
             </a:avLst>
           </a:prstGeom>
           <a:solidFill>
-            <a:srgbClr val="FF2E88"/>
+            <a:srgbClr val="7AA2F7"/>
           </a:solidFill>
           <a:ln/>
         </p:spPr>
       </p:sp>
-      <p:sp>
-        <p:nvSpPr>
-          <p:cNvPr id="8" name="Text 6"/>
-          <p:cNvSpPr/>
-          <p:nvPr/>
-        </p:nvSpPr>
-        <p:spPr>
-          <a:xfrm>
-            <a:off x="634990" y="1811528"/>
-            <a:ext cx="3268040" cy="274320"/>
+      <p:pic>
+        <p:nvPicPr>
+          <p:cNvPr id="8" name="Image 0" descr="preencoded.png">    </p:cNvPr>
+          <p:cNvPicPr>
+            <a:picLocks noChangeAspect="1"/>
+          </p:cNvPicPr>
+          <p:nvPr/>
+        </p:nvPicPr>
+        <p:blipFill>
+          <a:blip r:embed="rId1"/>
+          <a:stretch>
+            <a:fillRect/>
+          </a:stretch>
+        </p:blipFill>
+        <p:spPr>
+          <a:xfrm>
+            <a:off x="607558" y="1829816"/>
+            <a:ext cx="219456" cy="219456"/>
+          </a:xfrm>
+          <a:prstGeom prst="rect">
+            <a:avLst/>
+          </a:prstGeom>
+        </p:spPr>
+      </p:pic>
+      <p:sp>
+        <p:nvSpPr>
+          <p:cNvPr id="9" name="Text 6"/>
+          <p:cNvSpPr/>
+          <p:nvPr/>
+        </p:nvSpPr>
+        <p:spPr>
+          <a:xfrm>
+            <a:off x="881878" y="1811528"/>
+            <a:ext cx="3021152" cy="274320"/>
           </a:xfrm>
           <a:prstGeom prst="rect">
             <a:avLst/>
@@ -2094,7 +2118,7 @@
             <a:r>
               <a:rPr lang="en-US" sz="1600" b="1" dirty="0">
                 <a:solidFill>
-                  <a:srgbClr val="FF2E88"/>
+                  <a:srgbClr val="7AA2F7"/>
                 </a:solidFill>
                 <a:latin typeface="Trebuchet MS" pitchFamily="34" charset="0"/>
                 <a:ea typeface="Trebuchet MS" pitchFamily="34" charset="-122"/>
@@ -2108,7 +2132,7 @@
       </p:sp>
       <p:sp>
         <p:nvSpPr>
-          <p:cNvPr id="9" name="Text 7"/>
+          <p:cNvPr id="10" name="Text 7"/>
           <p:cNvSpPr/>
           <p:nvPr/>
         </p:nvSpPr>
@@ -2133,7 +2157,7 @@
             <a:r>
               <a:rPr lang="en-US" sz="1300" dirty="0">
                 <a:solidFill>
-                  <a:srgbClr val="FFFFFF"/>
+                  <a:srgbClr val="C0CAF5"/>
                 </a:solidFill>
                 <a:latin typeface="Segoe UI" pitchFamily="34" charset="0"/>
                 <a:ea typeface="Segoe UI" pitchFamily="34" charset="-122"/>
@@ -2147,7 +2171,7 @@
       </p:sp>
       <p:sp>
         <p:nvSpPr>
-          <p:cNvPr id="10" name="Shape 8"/>
+          <p:cNvPr id="11" name="Shape 8"/>
           <p:cNvSpPr/>
           <p:nvPr/>
         </p:nvSpPr>
@@ -2162,11 +2186,11 @@
             </a:avLst>
           </a:prstGeom>
           <a:solidFill>
-            <a:srgbClr val="151522"/>
+            <a:srgbClr val="24283B"/>
           </a:solidFill>
           <a:ln w="19050">
             <a:solidFill>
-              <a:srgbClr val="7B61FF"/>
+              <a:srgbClr val="7DCFFF"/>
             </a:solidFill>
             <a:prstDash val="solid"/>
           </a:ln>
@@ -2174,7 +2198,7 @@
       </p:sp>
       <p:sp>
         <p:nvSpPr>
-          <p:cNvPr id="11" name="Shape 9"/>
+          <p:cNvPr id="12" name="Shape 9"/>
           <p:cNvSpPr/>
           <p:nvPr/>
         </p:nvSpPr>
@@ -2189,21 +2213,45 @@
             </a:avLst>
           </a:prstGeom>
           <a:solidFill>
-            <a:srgbClr val="7B61FF"/>
+            <a:srgbClr val="7DCFFF"/>
           </a:solidFill>
           <a:ln/>
         </p:spPr>
       </p:sp>
-      <p:sp>
-        <p:nvSpPr>
-          <p:cNvPr id="12" name="Text 10"/>
-          <p:cNvSpPr/>
-          <p:nvPr/>
-        </p:nvSpPr>
-        <p:spPr>
-          <a:xfrm>
-            <a:off x="4461828" y="1811528"/>
-            <a:ext cx="3268040" cy="274320"/>
+      <p:pic>
+        <p:nvPicPr>
+          <p:cNvPr id="13" name="Image 1" descr="preencoded.png">    </p:cNvPr>
+          <p:cNvPicPr>
+            <a:picLocks noChangeAspect="1"/>
+          </p:cNvPicPr>
+          <p:nvPr/>
+        </p:nvPicPr>
+        <p:blipFill>
+          <a:blip r:embed="rId2"/>
+          <a:stretch>
+            <a:fillRect/>
+          </a:stretch>
+        </p:blipFill>
+        <p:spPr>
+          <a:xfrm>
+            <a:off x="4434396" y="1829816"/>
+            <a:ext cx="219456" cy="219456"/>
+          </a:xfrm>
+          <a:prstGeom prst="rect">
+            <a:avLst/>
+          </a:prstGeom>
+        </p:spPr>
+      </p:pic>
+      <p:sp>
+        <p:nvSpPr>
+          <p:cNvPr id="14" name="Text 10"/>
+          <p:cNvSpPr/>
+          <p:nvPr/>
+        </p:nvSpPr>
+        <p:spPr>
+          <a:xfrm>
+            <a:off x="4708716" y="1811528"/>
+            <a:ext cx="3021152" cy="274320"/>
           </a:xfrm>
           <a:prstGeom prst="rect">
             <a:avLst/>
@@ -2221,7 +2269,7 @@
             <a:r>
               <a:rPr lang="en-US" sz="1600" b="1" dirty="0">
                 <a:solidFill>
-                  <a:srgbClr val="7B61FF"/>
+                  <a:srgbClr val="7DCFFF"/>
                 </a:solidFill>
                 <a:latin typeface="Trebuchet MS" pitchFamily="34" charset="0"/>
                 <a:ea typeface="Trebuchet MS" pitchFamily="34" charset="-122"/>
@@ -2235,7 +2283,7 @@
       </p:sp>
       <p:sp>
         <p:nvSpPr>
-          <p:cNvPr id="13" name="Text 11"/>
+          <p:cNvPr id="15" name="Text 11"/>
           <p:cNvSpPr/>
           <p:nvPr/>
         </p:nvSpPr>
@@ -2260,7 +2308,7 @@
             <a:r>
               <a:rPr lang="en-US" sz="1300" dirty="0">
                 <a:solidFill>
-                  <a:srgbClr val="FFFFFF"/>
+                  <a:srgbClr val="C0CAF5"/>
                 </a:solidFill>
                 <a:latin typeface="Segoe UI" pitchFamily="34" charset="0"/>
                 <a:ea typeface="Segoe UI" pitchFamily="34" charset="-122"/>
@@ -2274,7 +2322,7 @@
       </p:sp>
       <p:sp>
         <p:nvSpPr>
-          <p:cNvPr id="14" name="Shape 12"/>
+          <p:cNvPr id="16" name="Shape 12"/>
           <p:cNvSpPr/>
           <p:nvPr/>
         </p:nvSpPr>
@@ -2289,11 +2337,11 @@
             </a:avLst>
           </a:prstGeom>
           <a:solidFill>
-            <a:srgbClr val="151522"/>
+            <a:srgbClr val="24283B"/>
           </a:solidFill>
           <a:ln w="19050">
             <a:solidFill>
-              <a:srgbClr val="00FF9F"/>
+              <a:srgbClr val="9ECE6A"/>
             </a:solidFill>
             <a:prstDash val="solid"/>
           </a:ln>
@@ -2301,7 +2349,7 @@
       </p:sp>
       <p:sp>
         <p:nvSpPr>
-          <p:cNvPr id="15" name="Shape 13"/>
+          <p:cNvPr id="17" name="Shape 13"/>
           <p:cNvSpPr/>
           <p:nvPr/>
         </p:nvSpPr>
@@ -2316,21 +2364,45 @@
             </a:avLst>
           </a:prstGeom>
           <a:solidFill>
-            <a:srgbClr val="00FF9F"/>
+            <a:srgbClr val="9ECE6A"/>
           </a:solidFill>
           <a:ln/>
         </p:spPr>
       </p:sp>
-      <p:sp>
-        <p:nvSpPr>
-          <p:cNvPr id="16" name="Text 14"/>
-          <p:cNvSpPr/>
-          <p:nvPr/>
-        </p:nvSpPr>
-        <p:spPr>
-          <a:xfrm>
-            <a:off x="8288665" y="1811528"/>
-            <a:ext cx="3268040" cy="274320"/>
+      <p:pic>
+        <p:nvPicPr>
+          <p:cNvPr id="18" name="Image 2" descr="preencoded.png">    </p:cNvPr>
+          <p:cNvPicPr>
+            <a:picLocks noChangeAspect="1"/>
+          </p:cNvPicPr>
+          <p:nvPr/>
+        </p:nvPicPr>
+        <p:blipFill>
+          <a:blip r:embed="rId3"/>
+          <a:stretch>
+            <a:fillRect/>
+          </a:stretch>
+        </p:blipFill>
+        <p:spPr>
+          <a:xfrm>
+            <a:off x="8261233" y="1829816"/>
+            <a:ext cx="219456" cy="219456"/>
+          </a:xfrm>
+          <a:prstGeom prst="rect">
+            <a:avLst/>
+          </a:prstGeom>
+        </p:spPr>
+      </p:pic>
+      <p:sp>
+        <p:nvSpPr>
+          <p:cNvPr id="19" name="Text 14"/>
+          <p:cNvSpPr/>
+          <p:nvPr/>
+        </p:nvSpPr>
+        <p:spPr>
+          <a:xfrm>
+            <a:off x="8535553" y="1811528"/>
+            <a:ext cx="3021152" cy="274320"/>
           </a:xfrm>
           <a:prstGeom prst="rect">
             <a:avLst/>
@@ -2348,7 +2420,7 @@
             <a:r>
               <a:rPr lang="en-US" sz="1600" b="1" dirty="0">
                 <a:solidFill>
-                  <a:srgbClr val="00FF9F"/>
+                  <a:srgbClr val="9ECE6A"/>
                 </a:solidFill>
                 <a:latin typeface="Trebuchet MS" pitchFamily="34" charset="0"/>
                 <a:ea typeface="Trebuchet MS" pitchFamily="34" charset="-122"/>
@@ -2362,7 +2434,7 @@
       </p:sp>
       <p:sp>
         <p:nvSpPr>
-          <p:cNvPr id="17" name="Text 15"/>
+          <p:cNvPr id="20" name="Text 15"/>
           <p:cNvSpPr/>
           <p:nvPr/>
         </p:nvSpPr>
@@ -2387,7 +2459,7 @@
             <a:r>
               <a:rPr lang="en-US" sz="1300" dirty="0">
                 <a:solidFill>
-                  <a:srgbClr val="FFFFFF"/>
+                  <a:srgbClr val="C0CAF5"/>
                 </a:solidFill>
                 <a:latin typeface="Segoe UI" pitchFamily="34" charset="0"/>
                 <a:ea typeface="Segoe UI" pitchFamily="34" charset="-122"/>
@@ -2401,7 +2473,7 @@
       </p:sp>
       <p:sp>
         <p:nvSpPr>
-          <p:cNvPr id="18" name="Text 16"/>
+          <p:cNvPr id="21" name="Text 16"/>
           <p:cNvSpPr/>
           <p:nvPr/>
         </p:nvSpPr>
@@ -2426,7 +2498,7 @@
             <a:r>
               <a:rPr lang="en-US" sz="900" b="1" dirty="0">
                 <a:solidFill>
-                  <a:srgbClr val="A7A7B5"/>
+                  <a:srgbClr val="565F89"/>
                 </a:solidFill>
                 <a:latin typeface="Trebuchet MS" pitchFamily="34" charset="0"/>
                 <a:ea typeface="Trebuchet MS" pitchFamily="34" charset="-122"/>
@@ -2452,7 +2524,7 @@
     <p:bg>
       <p:bgPr>
         <a:solidFill>
-          <a:srgbClr val="0B0B12"/>
+          <a:srgbClr val="1A1B26"/>
         </a:solidFill>
       </p:bgPr>
     </p:bg>
@@ -2497,7 +2569,7 @@
             <a:r>
               <a:rPr lang="en-US" sz="3300" b="1" dirty="0">
                 <a:solidFill>
-                  <a:srgbClr val="FF2E88"/>
+                  <a:srgbClr val="7AA2F7"/>
                 </a:solidFill>
                 <a:latin typeface="Trebuchet MS" pitchFamily="34" charset="0"/>
                 <a:ea typeface="Trebuchet MS" pitchFamily="34" charset="-122"/>
@@ -2534,9 +2606,9 @@
               <a:buNone/>
             </a:pPr>
             <a:r>
-              <a:rPr lang="en-US" sz="2700" b="1" dirty="0">
-                <a:solidFill>
-                  <a:srgbClr val="FFFFFF"/>
+              <a:rPr lang="en-US" sz="2600" b="1" dirty="0">
+                <a:solidFill>
+                  <a:srgbClr val="C0CAF5"/>
                 </a:solidFill>
                 <a:latin typeface="Trebuchet MS" pitchFamily="34" charset="0"/>
                 <a:ea typeface="Trebuchet MS" pitchFamily="34" charset="-122"/>
@@ -2544,7 +2616,7 @@
               </a:rPr>
               <a:t>Perché è utile per studenti, programmatori e professionisti</a:t>
             </a:r>
-            <a:endParaRPr lang="en-US" sz="2700" dirty="0"/>
+            <a:endParaRPr lang="en-US" sz="2600" dirty="0"/>
           </a:p>
         </p:txBody>
       </p:sp>
@@ -2565,11 +2637,11 @@
             </a:avLst>
           </a:prstGeom>
           <a:solidFill>
-            <a:srgbClr val="151522"/>
+            <a:srgbClr val="24283B"/>
           </a:solidFill>
           <a:ln w="19050">
             <a:solidFill>
-              <a:srgbClr val="FF2E88"/>
+              <a:srgbClr val="7AA2F7"/>
             </a:solidFill>
             <a:prstDash val="solid"/>
           </a:ln>
@@ -2592,21 +2664,45 @@
             </a:avLst>
           </a:prstGeom>
           <a:solidFill>
-            <a:srgbClr val="FF2E88"/>
+            <a:srgbClr val="7AA2F7"/>
           </a:solidFill>
           <a:ln/>
         </p:spPr>
       </p:sp>
-      <p:sp>
-        <p:nvSpPr>
-          <p:cNvPr id="6" name="Text 4"/>
-          <p:cNvSpPr/>
-          <p:nvPr/>
-        </p:nvSpPr>
-        <p:spPr>
-          <a:xfrm>
-            <a:off x="634990" y="2129028"/>
-            <a:ext cx="3268040" cy="274320"/>
+      <p:pic>
+        <p:nvPicPr>
+          <p:cNvPr id="6" name="Image 0" descr="preencoded.png">    </p:cNvPr>
+          <p:cNvPicPr>
+            <a:picLocks noChangeAspect="1"/>
+          </p:cNvPicPr>
+          <p:nvPr/>
+        </p:nvPicPr>
+        <p:blipFill>
+          <a:blip r:embed="rId1"/>
+          <a:stretch>
+            <a:fillRect/>
+          </a:stretch>
+        </p:blipFill>
+        <p:spPr>
+          <a:xfrm>
+            <a:off x="607558" y="2147316"/>
+            <a:ext cx="219456" cy="219456"/>
+          </a:xfrm>
+          <a:prstGeom prst="rect">
+            <a:avLst/>
+          </a:prstGeom>
+        </p:spPr>
+      </p:pic>
+      <p:sp>
+        <p:nvSpPr>
+          <p:cNvPr id="7" name="Text 4"/>
+          <p:cNvSpPr/>
+          <p:nvPr/>
+        </p:nvSpPr>
+        <p:spPr>
+          <a:xfrm>
+            <a:off x="881878" y="2129028"/>
+            <a:ext cx="3021152" cy="274320"/>
           </a:xfrm>
           <a:prstGeom prst="rect">
             <a:avLst/>
@@ -2624,13 +2720,13 @@
             <a:r>
               <a:rPr lang="en-US" sz="1600" b="1" dirty="0">
                 <a:solidFill>
-                  <a:srgbClr val="FF2E88"/>
+                  <a:srgbClr val="7AA2F7"/>
                 </a:solidFill>
                 <a:latin typeface="Trebuchet MS" pitchFamily="34" charset="0"/>
                 <a:ea typeface="Trebuchet MS" pitchFamily="34" charset="-122"/>
                 <a:cs typeface="Trebuchet MS" pitchFamily="34" charset="-120"/>
               </a:rPr>
-              <a:t>⚡ Super Veloce</a:t>
+              <a:t>Super Veloce</a:t>
             </a:r>
             <a:endParaRPr lang="en-US" sz="1600" dirty="0"/>
           </a:p>
@@ -2638,7 +2734,7 @@
       </p:sp>
       <p:sp>
         <p:nvSpPr>
-          <p:cNvPr id="7" name="Text 5"/>
+          <p:cNvPr id="8" name="Text 5"/>
           <p:cNvSpPr/>
           <p:nvPr/>
         </p:nvSpPr>
@@ -2663,7 +2759,7 @@
             <a:r>
               <a:rPr lang="en-US" sz="1300" dirty="0">
                 <a:solidFill>
-                  <a:srgbClr val="FFFFFF"/>
+                  <a:srgbClr val="C0CAF5"/>
                 </a:solidFill>
                 <a:latin typeface="Segoe UI" pitchFamily="34" charset="0"/>
                 <a:ea typeface="Segoe UI" pitchFamily="34" charset="-122"/>
@@ -2677,7 +2773,7 @@
       </p:sp>
       <p:sp>
         <p:nvSpPr>
-          <p:cNvPr id="8" name="Shape 6"/>
+          <p:cNvPr id="9" name="Shape 6"/>
           <p:cNvSpPr/>
           <p:nvPr/>
         </p:nvSpPr>
@@ -2692,11 +2788,11 @@
             </a:avLst>
           </a:prstGeom>
           <a:solidFill>
-            <a:srgbClr val="151522"/>
+            <a:srgbClr val="24283B"/>
           </a:solidFill>
           <a:ln w="19050">
             <a:solidFill>
-              <a:srgbClr val="7B61FF"/>
+              <a:srgbClr val="7DCFFF"/>
             </a:solidFill>
             <a:prstDash val="solid"/>
           </a:ln>
@@ -2704,7 +2800,7 @@
       </p:sp>
       <p:sp>
         <p:nvSpPr>
-          <p:cNvPr id="9" name="Shape 7"/>
+          <p:cNvPr id="10" name="Shape 7"/>
           <p:cNvSpPr/>
           <p:nvPr/>
         </p:nvSpPr>
@@ -2719,21 +2815,45 @@
             </a:avLst>
           </a:prstGeom>
           <a:solidFill>
-            <a:srgbClr val="7B61FF"/>
+            <a:srgbClr val="7DCFFF"/>
           </a:solidFill>
           <a:ln/>
         </p:spPr>
       </p:sp>
-      <p:sp>
-        <p:nvSpPr>
-          <p:cNvPr id="10" name="Text 8"/>
-          <p:cNvSpPr/>
-          <p:nvPr/>
-        </p:nvSpPr>
-        <p:spPr>
-          <a:xfrm>
-            <a:off x="4461828" y="2129028"/>
-            <a:ext cx="3268040" cy="274320"/>
+      <p:pic>
+        <p:nvPicPr>
+          <p:cNvPr id="11" name="Image 1" descr="preencoded.png">    </p:cNvPr>
+          <p:cNvPicPr>
+            <a:picLocks noChangeAspect="1"/>
+          </p:cNvPicPr>
+          <p:nvPr/>
+        </p:nvPicPr>
+        <p:blipFill>
+          <a:blip r:embed="rId2"/>
+          <a:stretch>
+            <a:fillRect/>
+          </a:stretch>
+        </p:blipFill>
+        <p:spPr>
+          <a:xfrm>
+            <a:off x="4434396" y="2147316"/>
+            <a:ext cx="219456" cy="219456"/>
+          </a:xfrm>
+          <a:prstGeom prst="rect">
+            <a:avLst/>
+          </a:prstGeom>
+        </p:spPr>
+      </p:pic>
+      <p:sp>
+        <p:nvSpPr>
+          <p:cNvPr id="12" name="Text 8"/>
+          <p:cNvSpPr/>
+          <p:nvPr/>
+        </p:nvSpPr>
+        <p:spPr>
+          <a:xfrm>
+            <a:off x="4708716" y="2129028"/>
+            <a:ext cx="3021152" cy="274320"/>
           </a:xfrm>
           <a:prstGeom prst="rect">
             <a:avLst/>
@@ -2751,13 +2871,13 @@
             <a:r>
               <a:rPr lang="en-US" sz="1600" b="1" dirty="0">
                 <a:solidFill>
-                  <a:srgbClr val="7B61FF"/>
+                  <a:srgbClr val="7DCFFF"/>
                 </a:solidFill>
                 <a:latin typeface="Trebuchet MS" pitchFamily="34" charset="0"/>
                 <a:ea typeface="Trebuchet MS" pitchFamily="34" charset="-122"/>
                 <a:cs typeface="Trebuchet MS" pitchFamily="34" charset="-120"/>
               </a:rPr>
-              <a:t>🎨 Sempre Ordinato</a:t>
+              <a:t>Sempre Ordinato</a:t>
             </a:r>
             <a:endParaRPr lang="en-US" sz="1600" dirty="0"/>
           </a:p>
@@ -2765,7 +2885,7 @@
       </p:sp>
       <p:sp>
         <p:nvSpPr>
-          <p:cNvPr id="11" name="Text 9"/>
+          <p:cNvPr id="13" name="Text 9"/>
           <p:cNvSpPr/>
           <p:nvPr/>
         </p:nvSpPr>
@@ -2790,7 +2910,7 @@
             <a:r>
               <a:rPr lang="en-US" sz="1300" dirty="0">
                 <a:solidFill>
-                  <a:srgbClr val="FFFFFF"/>
+                  <a:srgbClr val="C0CAF5"/>
                 </a:solidFill>
                 <a:latin typeface="Segoe UI" pitchFamily="34" charset="0"/>
                 <a:ea typeface="Segoe UI" pitchFamily="34" charset="-122"/>
@@ -2804,7 +2924,7 @@
       </p:sp>
       <p:sp>
         <p:nvSpPr>
-          <p:cNvPr id="12" name="Shape 10"/>
+          <p:cNvPr id="14" name="Shape 10"/>
           <p:cNvSpPr/>
           <p:nvPr/>
         </p:nvSpPr>
@@ -2819,11 +2939,11 @@
             </a:avLst>
           </a:prstGeom>
           <a:solidFill>
-            <a:srgbClr val="151522"/>
+            <a:srgbClr val="24283B"/>
           </a:solidFill>
           <a:ln w="19050">
             <a:solidFill>
-              <a:srgbClr val="00FF9F"/>
+              <a:srgbClr val="9ECE6A"/>
             </a:solidFill>
             <a:prstDash val="solid"/>
           </a:ln>
@@ -2831,7 +2951,7 @@
       </p:sp>
       <p:sp>
         <p:nvSpPr>
-          <p:cNvPr id="13" name="Shape 11"/>
+          <p:cNvPr id="15" name="Shape 11"/>
           <p:cNvSpPr/>
           <p:nvPr/>
         </p:nvSpPr>
@@ -2846,21 +2966,45 @@
             </a:avLst>
           </a:prstGeom>
           <a:solidFill>
-            <a:srgbClr val="00FF9F"/>
+            <a:srgbClr val="9ECE6A"/>
           </a:solidFill>
           <a:ln/>
         </p:spPr>
       </p:sp>
-      <p:sp>
-        <p:nvSpPr>
-          <p:cNvPr id="14" name="Text 12"/>
-          <p:cNvSpPr/>
-          <p:nvPr/>
-        </p:nvSpPr>
-        <p:spPr>
-          <a:xfrm>
-            <a:off x="8288665" y="2129028"/>
-            <a:ext cx="3268040" cy="274320"/>
+      <p:pic>
+        <p:nvPicPr>
+          <p:cNvPr id="16" name="Image 2" descr="preencoded.png">    </p:cNvPr>
+          <p:cNvPicPr>
+            <a:picLocks noChangeAspect="1"/>
+          </p:cNvPicPr>
+          <p:nvPr/>
+        </p:nvPicPr>
+        <p:blipFill>
+          <a:blip r:embed="rId3"/>
+          <a:stretch>
+            <a:fillRect/>
+          </a:stretch>
+        </p:blipFill>
+        <p:spPr>
+          <a:xfrm>
+            <a:off x="8261233" y="2147316"/>
+            <a:ext cx="219456" cy="219456"/>
+          </a:xfrm>
+          <a:prstGeom prst="rect">
+            <a:avLst/>
+          </a:prstGeom>
+        </p:spPr>
+      </p:pic>
+      <p:sp>
+        <p:nvSpPr>
+          <p:cNvPr id="17" name="Text 12"/>
+          <p:cNvSpPr/>
+          <p:nvPr/>
+        </p:nvSpPr>
+        <p:spPr>
+          <a:xfrm>
+            <a:off x="8535553" y="2129028"/>
+            <a:ext cx="3021152" cy="274320"/>
           </a:xfrm>
           <a:prstGeom prst="rect">
             <a:avLst/>
@@ -2878,13 +3022,13 @@
             <a:r>
               <a:rPr lang="en-US" sz="1600" b="1" dirty="0">
                 <a:solidFill>
-                  <a:srgbClr val="00FF9F"/>
+                  <a:srgbClr val="9ECE6A"/>
                 </a:solidFill>
                 <a:latin typeface="Trebuchet MS" pitchFamily="34" charset="0"/>
                 <a:ea typeface="Trebuchet MS" pitchFamily="34" charset="-122"/>
                 <a:cs typeface="Trebuchet MS" pitchFamily="34" charset="-120"/>
               </a:rPr>
-              <a:t>📁 Tutto in un File</a:t>
+              <a:t>Tutto in un File</a:t>
             </a:r>
             <a:endParaRPr lang="en-US" sz="1600" dirty="0"/>
           </a:p>
@@ -2892,7 +3036,7 @@
       </p:sp>
       <p:sp>
         <p:nvSpPr>
-          <p:cNvPr id="15" name="Text 13"/>
+          <p:cNvPr id="18" name="Text 13"/>
           <p:cNvSpPr/>
           <p:nvPr/>
         </p:nvSpPr>
@@ -2917,7 +3061,7 @@
             <a:r>
               <a:rPr lang="en-US" sz="1300" dirty="0">
                 <a:solidFill>
-                  <a:srgbClr val="FFFFFF"/>
+                  <a:srgbClr val="C0CAF5"/>
                 </a:solidFill>
                 <a:latin typeface="Segoe UI" pitchFamily="34" charset="0"/>
                 <a:ea typeface="Segoe UI" pitchFamily="34" charset="-122"/>
@@ -2931,7 +3075,7 @@
       </p:sp>
       <p:sp>
         <p:nvSpPr>
-          <p:cNvPr id="16" name="Text 14"/>
+          <p:cNvPr id="19" name="Text 14"/>
           <p:cNvSpPr/>
           <p:nvPr/>
         </p:nvSpPr>
@@ -2956,7 +3100,7 @@
             <a:r>
               <a:rPr lang="en-US" sz="900" b="1" dirty="0">
                 <a:solidFill>
-                  <a:srgbClr val="A7A7B5"/>
+                  <a:srgbClr val="565F89"/>
                 </a:solidFill>
                 <a:latin typeface="Trebuchet MS" pitchFamily="34" charset="0"/>
                 <a:ea typeface="Trebuchet MS" pitchFamily="34" charset="-122"/>
@@ -2982,7 +3126,7 @@
     <p:bg>
       <p:bgPr>
         <a:solidFill>
-          <a:srgbClr val="0B0B12"/>
+          <a:srgbClr val="1A1B26"/>
         </a:solidFill>
       </p:bgPr>
     </p:bg>
@@ -3027,7 +3171,7 @@
             <a:r>
               <a:rPr lang="en-US" sz="3300" b="1" dirty="0">
                 <a:solidFill>
-                  <a:srgbClr val="FF2E88"/>
+                  <a:srgbClr val="7AA2F7"/>
                 </a:solidFill>
                 <a:latin typeface="Trebuchet MS" pitchFamily="34" charset="0"/>
                 <a:ea typeface="Trebuchet MS" pitchFamily="34" charset="-122"/>
@@ -3064,9 +3208,9 @@
               <a:buNone/>
             </a:pPr>
             <a:r>
-              <a:rPr lang="en-US" sz="2700" b="1" dirty="0">
-                <a:solidFill>
-                  <a:srgbClr val="FFFFFF"/>
+              <a:rPr lang="en-US" sz="2600" b="1" dirty="0">
+                <a:solidFill>
+                  <a:srgbClr val="C0CAF5"/>
                 </a:solidFill>
                 <a:latin typeface="Trebuchet MS" pitchFamily="34" charset="0"/>
                 <a:ea typeface="Trebuchet MS" pitchFamily="34" charset="-122"/>
@@ -3074,7 +3218,7 @@
               </a:rPr>
               <a:t>Le prossime novità per rendere Yumia ancora più potente</a:t>
             </a:r>
-            <a:endParaRPr lang="en-US" sz="2700" dirty="0"/>
+            <a:endParaRPr lang="en-US" sz="2600" dirty="0"/>
           </a:p>
         </p:txBody>
       </p:sp>
@@ -3095,11 +3239,11 @@
             </a:avLst>
           </a:prstGeom>
           <a:solidFill>
-            <a:srgbClr val="151522"/>
+            <a:srgbClr val="24283B"/>
           </a:solidFill>
           <a:ln w="19050">
             <a:solidFill>
-              <a:srgbClr val="FF2E88"/>
+              <a:srgbClr val="7AA2F7"/>
             </a:solidFill>
             <a:prstDash val="solid"/>
           </a:ln>
@@ -3122,21 +3266,45 @@
             </a:avLst>
           </a:prstGeom>
           <a:solidFill>
-            <a:srgbClr val="FF2E88"/>
+            <a:srgbClr val="7AA2F7"/>
           </a:solidFill>
           <a:ln/>
         </p:spPr>
       </p:sp>
-      <p:sp>
-        <p:nvSpPr>
-          <p:cNvPr id="6" name="Text 4"/>
-          <p:cNvSpPr/>
-          <p:nvPr/>
-        </p:nvSpPr>
-        <p:spPr>
-          <a:xfrm>
-            <a:off x="634990" y="2129028"/>
-            <a:ext cx="3268040" cy="274320"/>
+      <p:pic>
+        <p:nvPicPr>
+          <p:cNvPr id="6" name="Image 0" descr="preencoded.png">    </p:cNvPr>
+          <p:cNvPicPr>
+            <a:picLocks noChangeAspect="1"/>
+          </p:cNvPicPr>
+          <p:nvPr/>
+        </p:nvPicPr>
+        <p:blipFill>
+          <a:blip r:embed="rId1"/>
+          <a:stretch>
+            <a:fillRect/>
+          </a:stretch>
+        </p:blipFill>
+        <p:spPr>
+          <a:xfrm>
+            <a:off x="607558" y="2147316"/>
+            <a:ext cx="219456" cy="219456"/>
+          </a:xfrm>
+          <a:prstGeom prst="rect">
+            <a:avLst/>
+          </a:prstGeom>
+        </p:spPr>
+      </p:pic>
+      <p:sp>
+        <p:nvSpPr>
+          <p:cNvPr id="7" name="Text 4"/>
+          <p:cNvSpPr/>
+          <p:nvPr/>
+        </p:nvSpPr>
+        <p:spPr>
+          <a:xfrm>
+            <a:off x="881878" y="2129028"/>
+            <a:ext cx="3021152" cy="274320"/>
           </a:xfrm>
           <a:prstGeom prst="rect">
             <a:avLst/>
@@ -3154,7 +3322,7 @@
             <a:r>
               <a:rPr lang="en-US" sz="1600" b="1" dirty="0">
                 <a:solidFill>
-                  <a:srgbClr val="FF2E88"/>
+                  <a:srgbClr val="7AA2F7"/>
                 </a:solidFill>
                 <a:latin typeface="Trebuchet MS" pitchFamily="34" charset="0"/>
                 <a:ea typeface="Trebuchet MS" pitchFamily="34" charset="-122"/>
@@ -3168,7 +3336,7 @@
       </p:sp>
       <p:sp>
         <p:nvSpPr>
-          <p:cNvPr id="7" name="Text 5"/>
+          <p:cNvPr id="8" name="Text 5"/>
           <p:cNvSpPr/>
           <p:nvPr/>
         </p:nvSpPr>
@@ -3193,7 +3361,7 @@
             <a:r>
               <a:rPr lang="en-US" sz="1300" dirty="0">
                 <a:solidFill>
-                  <a:srgbClr val="FFFFFF"/>
+                  <a:srgbClr val="C0CAF5"/>
                 </a:solidFill>
                 <a:latin typeface="Segoe UI" pitchFamily="34" charset="0"/>
                 <a:ea typeface="Segoe UI" pitchFamily="34" charset="-122"/>
@@ -3207,7 +3375,7 @@
       </p:sp>
       <p:sp>
         <p:nvSpPr>
-          <p:cNvPr id="8" name="Shape 6"/>
+          <p:cNvPr id="9" name="Shape 6"/>
           <p:cNvSpPr/>
           <p:nvPr/>
         </p:nvSpPr>
@@ -3222,11 +3390,11 @@
             </a:avLst>
           </a:prstGeom>
           <a:solidFill>
-            <a:srgbClr val="151522"/>
+            <a:srgbClr val="24283B"/>
           </a:solidFill>
           <a:ln w="19050">
             <a:solidFill>
-              <a:srgbClr val="7B61FF"/>
+              <a:srgbClr val="7DCFFF"/>
             </a:solidFill>
             <a:prstDash val="solid"/>
           </a:ln>
@@ -3234,7 +3402,7 @@
       </p:sp>
       <p:sp>
         <p:nvSpPr>
-          <p:cNvPr id="9" name="Shape 7"/>
+          <p:cNvPr id="10" name="Shape 7"/>
           <p:cNvSpPr/>
           <p:nvPr/>
         </p:nvSpPr>
@@ -3249,21 +3417,45 @@
             </a:avLst>
           </a:prstGeom>
           <a:solidFill>
-            <a:srgbClr val="7B61FF"/>
+            <a:srgbClr val="7DCFFF"/>
           </a:solidFill>
           <a:ln/>
         </p:spPr>
       </p:sp>
-      <p:sp>
-        <p:nvSpPr>
-          <p:cNvPr id="10" name="Text 8"/>
-          <p:cNvSpPr/>
-          <p:nvPr/>
-        </p:nvSpPr>
-        <p:spPr>
-          <a:xfrm>
-            <a:off x="4461828" y="2129028"/>
-            <a:ext cx="3268040" cy="274320"/>
+      <p:pic>
+        <p:nvPicPr>
+          <p:cNvPr id="11" name="Image 1" descr="preencoded.png">    </p:cNvPr>
+          <p:cNvPicPr>
+            <a:picLocks noChangeAspect="1"/>
+          </p:cNvPicPr>
+          <p:nvPr/>
+        </p:nvPicPr>
+        <p:blipFill>
+          <a:blip r:embed="rId2"/>
+          <a:stretch>
+            <a:fillRect/>
+          </a:stretch>
+        </p:blipFill>
+        <p:spPr>
+          <a:xfrm>
+            <a:off x="4434396" y="2147316"/>
+            <a:ext cx="219456" cy="219456"/>
+          </a:xfrm>
+          <a:prstGeom prst="rect">
+            <a:avLst/>
+          </a:prstGeom>
+        </p:spPr>
+      </p:pic>
+      <p:sp>
+        <p:nvSpPr>
+          <p:cNvPr id="12" name="Text 8"/>
+          <p:cNvSpPr/>
+          <p:nvPr/>
+        </p:nvSpPr>
+        <p:spPr>
+          <a:xfrm>
+            <a:off x="4708716" y="2129028"/>
+            <a:ext cx="3021152" cy="274320"/>
           </a:xfrm>
           <a:prstGeom prst="rect">
             <a:avLst/>
@@ -3281,7 +3473,7 @@
             <a:r>
               <a:rPr lang="en-US" sz="1600" b="1" dirty="0">
                 <a:solidFill>
-                  <a:srgbClr val="7B61FF"/>
+                  <a:srgbClr val="7DCFFF"/>
                 </a:solidFill>
                 <a:latin typeface="Trebuchet MS" pitchFamily="34" charset="0"/>
                 <a:ea typeface="Trebuchet MS" pitchFamily="34" charset="-122"/>
@@ -3295,7 +3487,7 @@
       </p:sp>
       <p:sp>
         <p:nvSpPr>
-          <p:cNvPr id="11" name="Text 9"/>
+          <p:cNvPr id="13" name="Text 9"/>
           <p:cNvSpPr/>
           <p:nvPr/>
         </p:nvSpPr>
@@ -3320,7 +3512,7 @@
             <a:r>
               <a:rPr lang="en-US" sz="1300" dirty="0">
                 <a:solidFill>
-                  <a:srgbClr val="FFFFFF"/>
+                  <a:srgbClr val="C0CAF5"/>
                 </a:solidFill>
                 <a:latin typeface="Segoe UI" pitchFamily="34" charset="0"/>
                 <a:ea typeface="Segoe UI" pitchFamily="34" charset="-122"/>
@@ -3334,7 +3526,7 @@
       </p:sp>
       <p:sp>
         <p:nvSpPr>
-          <p:cNvPr id="12" name="Shape 10"/>
+          <p:cNvPr id="14" name="Shape 10"/>
           <p:cNvSpPr/>
           <p:nvPr/>
         </p:nvSpPr>
@@ -3349,11 +3541,11 @@
             </a:avLst>
           </a:prstGeom>
           <a:solidFill>
-            <a:srgbClr val="151522"/>
+            <a:srgbClr val="24283B"/>
           </a:solidFill>
           <a:ln w="19050">
             <a:solidFill>
-              <a:srgbClr val="00FF9F"/>
+              <a:srgbClr val="9ECE6A"/>
             </a:solidFill>
             <a:prstDash val="solid"/>
           </a:ln>
@@ -3361,7 +3553,7 @@
       </p:sp>
       <p:sp>
         <p:nvSpPr>
-          <p:cNvPr id="13" name="Shape 11"/>
+          <p:cNvPr id="15" name="Shape 11"/>
           <p:cNvSpPr/>
           <p:nvPr/>
         </p:nvSpPr>
@@ -3376,21 +3568,45 @@
             </a:avLst>
           </a:prstGeom>
           <a:solidFill>
-            <a:srgbClr val="00FF9F"/>
+            <a:srgbClr val="9ECE6A"/>
           </a:solidFill>
           <a:ln/>
         </p:spPr>
       </p:sp>
-      <p:sp>
-        <p:nvSpPr>
-          <p:cNvPr id="14" name="Text 12"/>
-          <p:cNvSpPr/>
-          <p:nvPr/>
-        </p:nvSpPr>
-        <p:spPr>
-          <a:xfrm>
-            <a:off x="8288665" y="2129028"/>
-            <a:ext cx="3268040" cy="274320"/>
+      <p:pic>
+        <p:nvPicPr>
+          <p:cNvPr id="16" name="Image 2" descr="preencoded.png">    </p:cNvPr>
+          <p:cNvPicPr>
+            <a:picLocks noChangeAspect="1"/>
+          </p:cNvPicPr>
+          <p:nvPr/>
+        </p:nvPicPr>
+        <p:blipFill>
+          <a:blip r:embed="rId3"/>
+          <a:stretch>
+            <a:fillRect/>
+          </a:stretch>
+        </p:blipFill>
+        <p:spPr>
+          <a:xfrm>
+            <a:off x="8261233" y="2147316"/>
+            <a:ext cx="219456" cy="219456"/>
+          </a:xfrm>
+          <a:prstGeom prst="rect">
+            <a:avLst/>
+          </a:prstGeom>
+        </p:spPr>
+      </p:pic>
+      <p:sp>
+        <p:nvSpPr>
+          <p:cNvPr id="17" name="Text 12"/>
+          <p:cNvSpPr/>
+          <p:nvPr/>
+        </p:nvSpPr>
+        <p:spPr>
+          <a:xfrm>
+            <a:off x="8535553" y="2129028"/>
+            <a:ext cx="3021152" cy="274320"/>
           </a:xfrm>
           <a:prstGeom prst="rect">
             <a:avLst/>
@@ -3408,7 +3624,7 @@
             <a:r>
               <a:rPr lang="en-US" sz="1600" b="1" dirty="0">
                 <a:solidFill>
-                  <a:srgbClr val="00FF9F"/>
+                  <a:srgbClr val="9ECE6A"/>
                 </a:solidFill>
                 <a:latin typeface="Trebuchet MS" pitchFamily="34" charset="0"/>
                 <a:ea typeface="Trebuchet MS" pitchFamily="34" charset="-122"/>
@@ -3422,7 +3638,7 @@
       </p:sp>
       <p:sp>
         <p:nvSpPr>
-          <p:cNvPr id="15" name="Text 13"/>
+          <p:cNvPr id="18" name="Text 13"/>
           <p:cNvSpPr/>
           <p:nvPr/>
         </p:nvSpPr>
@@ -3447,7 +3663,7 @@
             <a:r>
               <a:rPr lang="en-US" sz="1300" dirty="0">
                 <a:solidFill>
-                  <a:srgbClr val="FFFFFF"/>
+                  <a:srgbClr val="C0CAF5"/>
                 </a:solidFill>
                 <a:latin typeface="Segoe UI" pitchFamily="34" charset="0"/>
                 <a:ea typeface="Segoe UI" pitchFamily="34" charset="-122"/>
@@ -3461,7 +3677,7 @@
       </p:sp>
       <p:sp>
         <p:nvSpPr>
-          <p:cNvPr id="16" name="Text 14"/>
+          <p:cNvPr id="19" name="Text 14"/>
           <p:cNvSpPr/>
           <p:nvPr/>
         </p:nvSpPr>
@@ -3486,7 +3702,7 @@
             <a:r>
               <a:rPr lang="en-US" sz="900" b="1" dirty="0">
                 <a:solidFill>
-                  <a:srgbClr val="A7A7B5"/>
+                  <a:srgbClr val="565F89"/>
                 </a:solidFill>
                 <a:latin typeface="Trebuchet MS" pitchFamily="34" charset="0"/>
                 <a:ea typeface="Trebuchet MS" pitchFamily="34" charset="-122"/>
@@ -3512,7 +3728,7 @@
     <p:bg>
       <p:bgPr>
         <a:solidFill>
-          <a:srgbClr val="0B0B12"/>
+          <a:srgbClr val="1A1B26"/>
         </a:solidFill>
       </p:bgPr>
     </p:bg>
@@ -3547,11 +3763,11 @@
             </a:avLst>
           </a:prstGeom>
           <a:solidFill>
-            <a:srgbClr val="151522"/>
+            <a:srgbClr val="24283B"/>
           </a:solidFill>
           <a:ln w="19050">
             <a:solidFill>
-              <a:srgbClr val="FF2E88"/>
+              <a:srgbClr val="7AA2F7"/>
             </a:solidFill>
             <a:prstDash val="solid"/>
           </a:ln>
@@ -3584,7 +3800,7 @@
             <a:r>
               <a:rPr lang="en-US" sz="900" b="1" dirty="0">
                 <a:solidFill>
-                  <a:srgbClr val="FF2E88"/>
+                  <a:srgbClr val="7AA2F7"/>
                 </a:solidFill>
                 <a:latin typeface="Trebuchet MS" pitchFamily="34" charset="0"/>
                 <a:ea typeface="Trebuchet MS" pitchFamily="34" charset="-122"/>
@@ -3623,7 +3839,7 @@
             <a:r>
               <a:rPr lang="en-US" sz="2400" b="1" dirty="0">
                 <a:solidFill>
-                  <a:srgbClr val="FFFFFF"/>
+                  <a:srgbClr val="C0CAF5"/>
                 </a:solidFill>
                 <a:latin typeface="Trebuchet MS" pitchFamily="34" charset="0"/>
                 <a:ea typeface="Trebuchet MS" pitchFamily="34" charset="-122"/>
@@ -3662,7 +3878,7 @@
             <a:r>
               <a:rPr lang="en-US" sz="1200" dirty="0">
                 <a:solidFill>
-                  <a:srgbClr val="A7A7B5"/>
+                  <a:srgbClr val="565F89"/>
                 </a:solidFill>
                 <a:latin typeface="Segoe UI" pitchFamily="34" charset="0"/>
                 <a:ea typeface="Segoe UI" pitchFamily="34" charset="-122"/>
@@ -3691,11 +3907,11 @@
             </a:avLst>
           </a:prstGeom>
           <a:solidFill>
-            <a:srgbClr val="151522"/>
+            <a:srgbClr val="24283B"/>
           </a:solidFill>
           <a:ln w="19050">
             <a:solidFill>
-              <a:srgbClr val="FF2E88"/>
+              <a:srgbClr val="7AA2F7"/>
             </a:solidFill>
             <a:prstDash val="solid"/>
           </a:ln>
@@ -3718,21 +3934,45 @@
             </a:avLst>
           </a:prstGeom>
           <a:solidFill>
-            <a:srgbClr val="FF2E88"/>
+            <a:srgbClr val="7AA2F7"/>
           </a:solidFill>
           <a:ln/>
         </p:spPr>
       </p:sp>
-      <p:sp>
-        <p:nvSpPr>
-          <p:cNvPr id="8" name="Text 6"/>
-          <p:cNvSpPr/>
-          <p:nvPr/>
-        </p:nvSpPr>
-        <p:spPr>
-          <a:xfrm>
-            <a:off x="634990" y="1811528"/>
-            <a:ext cx="3268040" cy="274320"/>
+      <p:pic>
+        <p:nvPicPr>
+          <p:cNvPr id="8" name="Image 0" descr="preencoded.png">    </p:cNvPr>
+          <p:cNvPicPr>
+            <a:picLocks noChangeAspect="1"/>
+          </p:cNvPicPr>
+          <p:nvPr/>
+        </p:nvPicPr>
+        <p:blipFill>
+          <a:blip r:embed="rId1"/>
+          <a:stretch>
+            <a:fillRect/>
+          </a:stretch>
+        </p:blipFill>
+        <p:spPr>
+          <a:xfrm>
+            <a:off x="607558" y="1829816"/>
+            <a:ext cx="219456" cy="219456"/>
+          </a:xfrm>
+          <a:prstGeom prst="rect">
+            <a:avLst/>
+          </a:prstGeom>
+        </p:spPr>
+      </p:pic>
+      <p:sp>
+        <p:nvSpPr>
+          <p:cNvPr id="9" name="Text 6"/>
+          <p:cNvSpPr/>
+          <p:nvPr/>
+        </p:nvSpPr>
+        <p:spPr>
+          <a:xfrm>
+            <a:off x="881878" y="1811528"/>
+            <a:ext cx="3021152" cy="274320"/>
           </a:xfrm>
           <a:prstGeom prst="rect">
             <a:avLst/>
@@ -3750,7 +3990,7 @@
             <a:r>
               <a:rPr lang="en-US" sz="1600" b="1" dirty="0">
                 <a:solidFill>
-                  <a:srgbClr val="FF2E88"/>
+                  <a:srgbClr val="7AA2F7"/>
                 </a:solidFill>
                 <a:latin typeface="Trebuchet MS" pitchFamily="34" charset="0"/>
                 <a:ea typeface="Trebuchet MS" pitchFamily="34" charset="-122"/>
@@ -3764,7 +4004,7 @@
       </p:sp>
       <p:sp>
         <p:nvSpPr>
-          <p:cNvPr id="9" name="Text 7"/>
+          <p:cNvPr id="10" name="Text 7"/>
           <p:cNvSpPr/>
           <p:nvPr/>
         </p:nvSpPr>
@@ -3789,7 +4029,7 @@
             <a:r>
               <a:rPr lang="en-US" sz="1300" dirty="0">
                 <a:solidFill>
-                  <a:srgbClr val="FFFFFF"/>
+                  <a:srgbClr val="C0CAF5"/>
                 </a:solidFill>
                 <a:latin typeface="Segoe UI" pitchFamily="34" charset="0"/>
                 <a:ea typeface="Segoe UI" pitchFamily="34" charset="-122"/>
@@ -3803,7 +4043,7 @@
       </p:sp>
       <p:sp>
         <p:nvSpPr>
-          <p:cNvPr id="10" name="Shape 8"/>
+          <p:cNvPr id="11" name="Shape 8"/>
           <p:cNvSpPr/>
           <p:nvPr/>
         </p:nvSpPr>
@@ -3818,11 +4058,11 @@
             </a:avLst>
           </a:prstGeom>
           <a:solidFill>
-            <a:srgbClr val="151522"/>
+            <a:srgbClr val="24283B"/>
           </a:solidFill>
           <a:ln w="19050">
             <a:solidFill>
-              <a:srgbClr val="7B61FF"/>
+              <a:srgbClr val="7DCFFF"/>
             </a:solidFill>
             <a:prstDash val="solid"/>
           </a:ln>
@@ -3830,7 +4070,7 @@
       </p:sp>
       <p:sp>
         <p:nvSpPr>
-          <p:cNvPr id="11" name="Shape 9"/>
+          <p:cNvPr id="12" name="Shape 9"/>
           <p:cNvSpPr/>
           <p:nvPr/>
         </p:nvSpPr>
@@ -3845,21 +4085,45 @@
             </a:avLst>
           </a:prstGeom>
           <a:solidFill>
-            <a:srgbClr val="7B61FF"/>
+            <a:srgbClr val="7DCFFF"/>
           </a:solidFill>
           <a:ln/>
         </p:spPr>
       </p:sp>
-      <p:sp>
-        <p:nvSpPr>
-          <p:cNvPr id="12" name="Text 10"/>
-          <p:cNvSpPr/>
-          <p:nvPr/>
-        </p:nvSpPr>
-        <p:spPr>
-          <a:xfrm>
-            <a:off x="4461828" y="1811528"/>
-            <a:ext cx="3268040" cy="274320"/>
+      <p:pic>
+        <p:nvPicPr>
+          <p:cNvPr id="13" name="Image 1" descr="preencoded.png">    </p:cNvPr>
+          <p:cNvPicPr>
+            <a:picLocks noChangeAspect="1"/>
+          </p:cNvPicPr>
+          <p:nvPr/>
+        </p:nvPicPr>
+        <p:blipFill>
+          <a:blip r:embed="rId2"/>
+          <a:stretch>
+            <a:fillRect/>
+          </a:stretch>
+        </p:blipFill>
+        <p:spPr>
+          <a:xfrm>
+            <a:off x="4434396" y="1829816"/>
+            <a:ext cx="219456" cy="219456"/>
+          </a:xfrm>
+          <a:prstGeom prst="rect">
+            <a:avLst/>
+          </a:prstGeom>
+        </p:spPr>
+      </p:pic>
+      <p:sp>
+        <p:nvSpPr>
+          <p:cNvPr id="14" name="Text 10"/>
+          <p:cNvSpPr/>
+          <p:nvPr/>
+        </p:nvSpPr>
+        <p:spPr>
+          <a:xfrm>
+            <a:off x="4708716" y="1811528"/>
+            <a:ext cx="3021152" cy="274320"/>
           </a:xfrm>
           <a:prstGeom prst="rect">
             <a:avLst/>
@@ -3877,7 +4141,7 @@
             <a:r>
               <a:rPr lang="en-US" sz="1600" b="1" dirty="0">
                 <a:solidFill>
-                  <a:srgbClr val="7B61FF"/>
+                  <a:srgbClr val="7DCFFF"/>
                 </a:solidFill>
                 <a:latin typeface="Trebuchet MS" pitchFamily="34" charset="0"/>
                 <a:ea typeface="Trebuchet MS" pitchFamily="34" charset="-122"/>
@@ -3891,7 +4155,7 @@
       </p:sp>
       <p:sp>
         <p:nvSpPr>
-          <p:cNvPr id="13" name="Text 11"/>
+          <p:cNvPr id="15" name="Text 11"/>
           <p:cNvSpPr/>
           <p:nvPr/>
         </p:nvSpPr>
@@ -3916,7 +4180,7 @@
             <a:r>
               <a:rPr lang="en-US" sz="1300" dirty="0">
                 <a:solidFill>
-                  <a:srgbClr val="FFFFFF"/>
+                  <a:srgbClr val="C0CAF5"/>
                 </a:solidFill>
                 <a:latin typeface="Segoe UI" pitchFamily="34" charset="0"/>
                 <a:ea typeface="Segoe UI" pitchFamily="34" charset="-122"/>
@@ -3930,7 +4194,7 @@
       </p:sp>
       <p:sp>
         <p:nvSpPr>
-          <p:cNvPr id="14" name="Shape 12"/>
+          <p:cNvPr id="16" name="Shape 12"/>
           <p:cNvSpPr/>
           <p:nvPr/>
         </p:nvSpPr>
@@ -3945,11 +4209,11 @@
             </a:avLst>
           </a:prstGeom>
           <a:solidFill>
-            <a:srgbClr val="151522"/>
+            <a:srgbClr val="24283B"/>
           </a:solidFill>
           <a:ln w="19050">
             <a:solidFill>
-              <a:srgbClr val="00FF9F"/>
+              <a:srgbClr val="9ECE6A"/>
             </a:solidFill>
             <a:prstDash val="solid"/>
           </a:ln>
@@ -3957,7 +4221,7 @@
       </p:sp>
       <p:sp>
         <p:nvSpPr>
-          <p:cNvPr id="15" name="Shape 13"/>
+          <p:cNvPr id="17" name="Shape 13"/>
           <p:cNvSpPr/>
           <p:nvPr/>
         </p:nvSpPr>
@@ -3972,21 +4236,45 @@
             </a:avLst>
           </a:prstGeom>
           <a:solidFill>
-            <a:srgbClr val="00FF9F"/>
+            <a:srgbClr val="9ECE6A"/>
           </a:solidFill>
           <a:ln/>
         </p:spPr>
       </p:sp>
-      <p:sp>
-        <p:nvSpPr>
-          <p:cNvPr id="16" name="Text 14"/>
-          <p:cNvSpPr/>
-          <p:nvPr/>
-        </p:nvSpPr>
-        <p:spPr>
-          <a:xfrm>
-            <a:off x="8288665" y="1811528"/>
-            <a:ext cx="3268040" cy="274320"/>
+      <p:pic>
+        <p:nvPicPr>
+          <p:cNvPr id="18" name="Image 2" descr="preencoded.png">    </p:cNvPr>
+          <p:cNvPicPr>
+            <a:picLocks noChangeAspect="1"/>
+          </p:cNvPicPr>
+          <p:nvPr/>
+        </p:nvPicPr>
+        <p:blipFill>
+          <a:blip r:embed="rId3"/>
+          <a:stretch>
+            <a:fillRect/>
+          </a:stretch>
+        </p:blipFill>
+        <p:spPr>
+          <a:xfrm>
+            <a:off x="8261233" y="1829816"/>
+            <a:ext cx="219456" cy="219456"/>
+          </a:xfrm>
+          <a:prstGeom prst="rect">
+            <a:avLst/>
+          </a:prstGeom>
+        </p:spPr>
+      </p:pic>
+      <p:sp>
+        <p:nvSpPr>
+          <p:cNvPr id="19" name="Text 14"/>
+          <p:cNvSpPr/>
+          <p:nvPr/>
+        </p:nvSpPr>
+        <p:spPr>
+          <a:xfrm>
+            <a:off x="8535553" y="1811528"/>
+            <a:ext cx="3021152" cy="274320"/>
           </a:xfrm>
           <a:prstGeom prst="rect">
             <a:avLst/>
@@ -4004,7 +4292,7 @@
             <a:r>
               <a:rPr lang="en-US" sz="1600" b="1" dirty="0">
                 <a:solidFill>
-                  <a:srgbClr val="00FF9F"/>
+                  <a:srgbClr val="9ECE6A"/>
                 </a:solidFill>
                 <a:latin typeface="Trebuchet MS" pitchFamily="34" charset="0"/>
                 <a:ea typeface="Trebuchet MS" pitchFamily="34" charset="-122"/>
@@ -4018,7 +4306,7 @@
       </p:sp>
       <p:sp>
         <p:nvSpPr>
-          <p:cNvPr id="17" name="Text 15"/>
+          <p:cNvPr id="20" name="Text 15"/>
           <p:cNvSpPr/>
           <p:nvPr/>
         </p:nvSpPr>
@@ -4043,7 +4331,7 @@
             <a:r>
               <a:rPr lang="en-US" sz="1300" dirty="0">
                 <a:solidFill>
-                  <a:srgbClr val="FFFFFF"/>
+                  <a:srgbClr val="C0CAF5"/>
                 </a:solidFill>
                 <a:latin typeface="Segoe UI" pitchFamily="34" charset="0"/>
                 <a:ea typeface="Segoe UI" pitchFamily="34" charset="-122"/>
@@ -4057,7 +4345,7 @@
       </p:sp>
       <p:sp>
         <p:nvSpPr>
-          <p:cNvPr id="18" name="Shape 16"/>
+          <p:cNvPr id="21" name="Shape 16"/>
           <p:cNvSpPr/>
           <p:nvPr/>
         </p:nvSpPr>
@@ -4072,26 +4360,50 @@
             </a:avLst>
           </a:prstGeom>
           <a:solidFill>
-            <a:srgbClr val="151522"/>
+            <a:srgbClr val="24283B"/>
           </a:solidFill>
           <a:ln w="25400">
             <a:solidFill>
-              <a:srgbClr val="00FF9F"/>
+              <a:srgbClr val="9ECE6A"/>
             </a:solidFill>
             <a:prstDash val="solid"/>
           </a:ln>
         </p:spPr>
       </p:sp>
-      <p:sp>
-        <p:nvSpPr>
-          <p:cNvPr id="19" name="Text 17"/>
-          <p:cNvSpPr/>
-          <p:nvPr/>
-        </p:nvSpPr>
+      <p:pic>
+        <p:nvPicPr>
+          <p:cNvPr id="22" name="Image 3" descr="preencoded.png">    </p:cNvPr>
+          <p:cNvPicPr>
+            <a:picLocks noChangeAspect="1"/>
+          </p:cNvPicPr>
+          <p:nvPr/>
+        </p:nvPicPr>
+        <p:blipFill>
+          <a:blip r:embed="rId4"/>
+          <a:stretch>
+            <a:fillRect/>
+          </a:stretch>
+        </p:blipFill>
         <p:spPr>
           <a:xfrm>
             <a:off x="589270" y="3295904"/>
-            <a:ext cx="11013156" cy="274320"/>
+            <a:ext cx="201168" cy="201168"/>
+          </a:xfrm>
+          <a:prstGeom prst="rect">
+            <a:avLst/>
+          </a:prstGeom>
+        </p:spPr>
+      </p:pic>
+      <p:sp>
+        <p:nvSpPr>
+          <p:cNvPr id="23" name="Text 17"/>
+          <p:cNvSpPr/>
+          <p:nvPr/>
+        </p:nvSpPr>
+        <p:spPr>
+          <a:xfrm>
+            <a:off x="845302" y="3295904"/>
+            <a:ext cx="10757124" cy="274320"/>
           </a:xfrm>
           <a:prstGeom prst="rect">
             <a:avLst/>
@@ -4109,7 +4421,7 @@
             <a:r>
               <a:rPr lang="en-US" sz="1300" b="1" dirty="0">
                 <a:solidFill>
-                  <a:srgbClr val="00FF9F"/>
+                  <a:srgbClr val="9ECE6A"/>
                 </a:solidFill>
                 <a:latin typeface="Trebuchet MS" pitchFamily="34" charset="0"/>
                 <a:ea typeface="Trebuchet MS" pitchFamily="34" charset="-122"/>
@@ -4123,7 +4435,7 @@
       </p:sp>
       <p:sp>
         <p:nvSpPr>
-          <p:cNvPr id="20" name="Text 18"/>
+          <p:cNvPr id="24" name="Text 18"/>
           <p:cNvSpPr/>
           <p:nvPr/>
         </p:nvSpPr>
@@ -4148,7 +4460,7 @@
             <a:r>
               <a:rPr lang="en-US" sz="1200" dirty="0">
                 <a:solidFill>
-                  <a:srgbClr val="FFFFFF"/>
+                  <a:srgbClr val="C0CAF5"/>
                 </a:solidFill>
                 <a:latin typeface="Segoe UI" pitchFamily="34" charset="0"/>
                 <a:ea typeface="Segoe UI" pitchFamily="34" charset="-122"/>
@@ -4162,7 +4474,7 @@
       </p:sp>
       <p:sp>
         <p:nvSpPr>
-          <p:cNvPr id="21" name="Text 19"/>
+          <p:cNvPr id="25" name="Text 19"/>
           <p:cNvSpPr/>
           <p:nvPr/>
         </p:nvSpPr>
@@ -4187,7 +4499,7 @@
             <a:r>
               <a:rPr lang="en-US" sz="900" b="1" dirty="0">
                 <a:solidFill>
-                  <a:srgbClr val="A7A7B5"/>
+                  <a:srgbClr val="565F89"/>
                 </a:solidFill>
                 <a:latin typeface="Trebuchet MS" pitchFamily="34" charset="0"/>
                 <a:ea typeface="Trebuchet MS" pitchFamily="34" charset="-122"/>
@@ -4213,7 +4525,7 @@
     <p:bg>
       <p:bgPr>
         <a:solidFill>
-          <a:srgbClr val="0B0B12"/>
+          <a:srgbClr val="1A1B26"/>
         </a:solidFill>
       </p:bgPr>
     </p:bg>
@@ -4258,7 +4570,7 @@
             <a:r>
               <a:rPr lang="en-US" sz="3300" b="1" dirty="0">
                 <a:solidFill>
-                  <a:srgbClr val="FF2E88"/>
+                  <a:srgbClr val="7AA2F7"/>
                 </a:solidFill>
                 <a:latin typeface="Trebuchet MS" pitchFamily="34" charset="0"/>
                 <a:ea typeface="Trebuchet MS" pitchFamily="34" charset="-122"/>
@@ -4295,9 +4607,9 @@
               <a:buNone/>
             </a:pPr>
             <a:r>
-              <a:rPr lang="en-US" sz="2700" b="1" dirty="0">
-                <a:solidFill>
-                  <a:srgbClr val="FFFFFF"/>
+              <a:rPr lang="en-US" sz="2600" b="1" dirty="0">
+                <a:solidFill>
+                  <a:srgbClr val="C0CAF5"/>
                 </a:solidFill>
                 <a:latin typeface="Trebuchet MS" pitchFamily="34" charset="0"/>
                 <a:ea typeface="Trebuchet MS" pitchFamily="34" charset="-122"/>
@@ -4305,7 +4617,7 @@
               </a:rPr>
               <a:t>Cosa non funziona nei programmi tradizionali come PowerPoint o Canva?</a:t>
             </a:r>
-            <a:endParaRPr lang="en-US" sz="2700" dirty="0"/>
+            <a:endParaRPr lang="en-US" sz="2600" dirty="0"/>
           </a:p>
         </p:txBody>
       </p:sp>
@@ -4326,11 +4638,11 @@
             </a:avLst>
           </a:prstGeom>
           <a:solidFill>
-            <a:srgbClr val="151522"/>
+            <a:srgbClr val="24283B"/>
           </a:solidFill>
           <a:ln w="19050">
             <a:solidFill>
-              <a:srgbClr val="2E2E48"/>
+              <a:srgbClr val="2F354A"/>
             </a:solidFill>
             <a:prstDash val="solid"/>
           </a:ln>
@@ -4363,7 +4675,7 @@
             <a:r>
               <a:rPr lang="en-US" sz="1500" b="1" dirty="0">
                 <a:solidFill>
-                  <a:srgbClr val="FF2E88"/>
+                  <a:srgbClr val="7AA2F7"/>
                 </a:solidFill>
                 <a:latin typeface="Trebuchet MS" pitchFamily="34" charset="0"/>
                 <a:ea typeface="Trebuchet MS" pitchFamily="34" charset="-122"/>
@@ -4392,11 +4704,11 @@
             </a:avLst>
           </a:prstGeom>
           <a:solidFill>
-            <a:srgbClr val="151522"/>
+            <a:srgbClr val="24283B"/>
           </a:solidFill>
           <a:ln w="19050">
             <a:solidFill>
-              <a:srgbClr val="2E2E48"/>
+              <a:srgbClr val="2F354A"/>
             </a:solidFill>
             <a:prstDash val="solid"/>
           </a:ln>
@@ -4429,7 +4741,7 @@
             <a:r>
               <a:rPr lang="en-US" sz="1500" b="1" dirty="0">
                 <a:solidFill>
-                  <a:srgbClr val="FF2E88"/>
+                  <a:srgbClr val="7AA2F7"/>
                 </a:solidFill>
                 <a:latin typeface="Trebuchet MS" pitchFamily="34" charset="0"/>
                 <a:ea typeface="Trebuchet MS" pitchFamily="34" charset="-122"/>
@@ -4456,11 +4768,11 @@
             <a:avLst/>
           </a:prstGeom>
           <a:solidFill>
-            <a:srgbClr val="151522"/>
+            <a:srgbClr val="24283B"/>
           </a:solidFill>
           <a:ln w="19050">
             <a:solidFill>
-              <a:srgbClr val="FF2E88"/>
+              <a:srgbClr val="7AA2F7"/>
             </a:solidFill>
             <a:prstDash val="solid"/>
           </a:ln>
@@ -4493,7 +4805,7 @@
             <a:r>
               <a:rPr lang="en-US" sz="1100" b="1" dirty="0">
                 <a:solidFill>
-                  <a:srgbClr val="FFFFFF"/>
+                  <a:srgbClr val="C0CAF5"/>
                 </a:solidFill>
                 <a:latin typeface="Trebuchet MS" pitchFamily="34" charset="0"/>
                 <a:ea typeface="Trebuchet MS" pitchFamily="34" charset="-122"/>
@@ -4522,11 +4834,11 @@
             </a:avLst>
           </a:prstGeom>
           <a:solidFill>
-            <a:srgbClr val="151522"/>
+            <a:srgbClr val="24283B"/>
           </a:solidFill>
           <a:ln w="19050">
             <a:solidFill>
-              <a:srgbClr val="FFE600"/>
+              <a:srgbClr val="E0AF68"/>
             </a:solidFill>
             <a:prstDash val="solid"/>
           </a:ln>
@@ -4559,7 +4871,7 @@
             <a:r>
               <a:rPr lang="en-US" sz="1000" b="1" dirty="0">
                 <a:solidFill>
-                  <a:srgbClr val="FFE600"/>
+                  <a:srgbClr val="E0AF68"/>
                 </a:solidFill>
                 <a:latin typeface="Trebuchet MS" pitchFamily="34" charset="0"/>
                 <a:ea typeface="Trebuchet MS" pitchFamily="34" charset="-122"/>
@@ -4600,7 +4912,7 @@
             <a:r>
               <a:rPr lang="en-US" sz="1300" dirty="0">
                 <a:solidFill>
-                  <a:srgbClr val="FFFFFF"/>
+                  <a:srgbClr val="C0CAF5"/>
                 </a:solidFill>
                 <a:latin typeface="Segoe UI" pitchFamily="34" charset="0"/>
                 <a:ea typeface="Segoe UI" pitchFamily="34" charset="-122"/>
@@ -4641,7 +4953,7 @@
             <a:r>
               <a:rPr lang="en-US" sz="1300" dirty="0">
                 <a:solidFill>
-                  <a:srgbClr val="FFFFFF"/>
+                  <a:srgbClr val="C0CAF5"/>
                 </a:solidFill>
                 <a:latin typeface="Segoe UI" pitchFamily="34" charset="0"/>
                 <a:ea typeface="Segoe UI" pitchFamily="34" charset="-122"/>
@@ -4682,7 +4994,7 @@
             <a:r>
               <a:rPr lang="en-US" sz="1300" dirty="0">
                 <a:solidFill>
-                  <a:srgbClr val="FFFFFF"/>
+                  <a:srgbClr val="C0CAF5"/>
                 </a:solidFill>
                 <a:latin typeface="Segoe UI" pitchFamily="34" charset="0"/>
                 <a:ea typeface="Segoe UI" pitchFamily="34" charset="-122"/>
@@ -4723,7 +5035,7 @@
             <a:r>
               <a:rPr lang="en-US" sz="1300" dirty="0">
                 <a:solidFill>
-                  <a:srgbClr val="FFFFFF"/>
+                  <a:srgbClr val="C0CAF5"/>
                 </a:solidFill>
                 <a:latin typeface="Segoe UI" pitchFamily="34" charset="0"/>
                 <a:ea typeface="Segoe UI" pitchFamily="34" charset="-122"/>
@@ -4752,11 +5064,11 @@
             </a:avLst>
           </a:prstGeom>
           <a:solidFill>
-            <a:srgbClr val="151522"/>
+            <a:srgbClr val="24283B"/>
           </a:solidFill>
           <a:ln w="19050">
             <a:solidFill>
-              <a:srgbClr val="FF0055"/>
+              <a:srgbClr val="F7768E"/>
             </a:solidFill>
             <a:prstDash val="solid"/>
           </a:ln>
@@ -4789,7 +5101,7 @@
             <a:r>
               <a:rPr lang="en-US" sz="1000" b="1" dirty="0">
                 <a:solidFill>
-                  <a:srgbClr val="FF0055"/>
+                  <a:srgbClr val="F7768E"/>
                 </a:solidFill>
                 <a:latin typeface="Trebuchet MS" pitchFamily="34" charset="0"/>
                 <a:ea typeface="Trebuchet MS" pitchFamily="34" charset="-122"/>
@@ -4830,7 +5142,7 @@
             <a:r>
               <a:rPr lang="en-US" sz="1300" dirty="0">
                 <a:solidFill>
-                  <a:srgbClr val="FFFFFF"/>
+                  <a:srgbClr val="C0CAF5"/>
                 </a:solidFill>
                 <a:latin typeface="Segoe UI" pitchFamily="34" charset="0"/>
                 <a:ea typeface="Segoe UI" pitchFamily="34" charset="-122"/>
@@ -4871,7 +5183,7 @@
             <a:r>
               <a:rPr lang="en-US" sz="1300" dirty="0">
                 <a:solidFill>
-                  <a:srgbClr val="FFFFFF"/>
+                  <a:srgbClr val="C0CAF5"/>
                 </a:solidFill>
                 <a:latin typeface="Segoe UI" pitchFamily="34" charset="0"/>
                 <a:ea typeface="Segoe UI" pitchFamily="34" charset="-122"/>
@@ -4912,7 +5224,7 @@
             <a:r>
               <a:rPr lang="en-US" sz="1300" dirty="0">
                 <a:solidFill>
-                  <a:srgbClr val="FFFFFF"/>
+                  <a:srgbClr val="C0CAF5"/>
                 </a:solidFill>
                 <a:latin typeface="Segoe UI" pitchFamily="34" charset="0"/>
                 <a:ea typeface="Segoe UI" pitchFamily="34" charset="-122"/>
@@ -4953,7 +5265,7 @@
             <a:r>
               <a:rPr lang="en-US" sz="1300" dirty="0">
                 <a:solidFill>
-                  <a:srgbClr val="FFFFFF"/>
+                  <a:srgbClr val="C0CAF5"/>
                 </a:solidFill>
                 <a:latin typeface="Segoe UI" pitchFamily="34" charset="0"/>
                 <a:ea typeface="Segoe UI" pitchFamily="34" charset="-122"/>
@@ -4992,7 +5304,7 @@
             <a:r>
               <a:rPr lang="en-US" sz="900" b="1" dirty="0">
                 <a:solidFill>
-                  <a:srgbClr val="A7A7B5"/>
+                  <a:srgbClr val="565F89"/>
                 </a:solidFill>
                 <a:latin typeface="Trebuchet MS" pitchFamily="34" charset="0"/>
                 <a:ea typeface="Trebuchet MS" pitchFamily="34" charset="-122"/>
@@ -5018,7 +5330,7 @@
     <p:bg>
       <p:bgPr>
         <a:solidFill>
-          <a:srgbClr val="0B0B12"/>
+          <a:srgbClr val="1A1B26"/>
         </a:solidFill>
       </p:bgPr>
     </p:bg>
@@ -5063,7 +5375,7 @@
             <a:r>
               <a:rPr lang="en-US" sz="3300" b="1" dirty="0">
                 <a:solidFill>
-                  <a:srgbClr val="FF2E88"/>
+                  <a:srgbClr val="7AA2F7"/>
                 </a:solidFill>
                 <a:latin typeface="Trebuchet MS" pitchFamily="34" charset="0"/>
                 <a:ea typeface="Trebuchet MS" pitchFamily="34" charset="-122"/>
@@ -5100,9 +5412,9 @@
               <a:buNone/>
             </a:pPr>
             <a:r>
-              <a:rPr lang="en-US" sz="2700" b="1" dirty="0">
-                <a:solidFill>
-                  <a:srgbClr val="FFFFFF"/>
+              <a:rPr lang="en-US" sz="2600" b="1" dirty="0">
+                <a:solidFill>
+                  <a:srgbClr val="C0CAF5"/>
                 </a:solidFill>
                 <a:latin typeface="Trebuchet MS" pitchFamily="34" charset="0"/>
                 <a:ea typeface="Trebuchet MS" pitchFamily="34" charset="-122"/>
@@ -5110,7 +5422,7 @@
               </a:rPr>
               <a:t>Scrivi solo il testo, alla grafica ci pensa il computer!</a:t>
             </a:r>
-            <a:endParaRPr lang="en-US" sz="2700" dirty="0"/>
+            <a:endParaRPr lang="en-US" sz="2600" dirty="0"/>
           </a:p>
         </p:txBody>
       </p:sp>
@@ -5131,11 +5443,11 @@
             </a:avLst>
           </a:prstGeom>
           <a:solidFill>
-            <a:srgbClr val="151522"/>
+            <a:srgbClr val="24283B"/>
           </a:solidFill>
           <a:ln w="19050">
             <a:solidFill>
-              <a:srgbClr val="FF2E88"/>
+              <a:srgbClr val="7AA2F7"/>
             </a:solidFill>
             <a:prstDash val="solid"/>
           </a:ln>
@@ -5158,21 +5470,45 @@
             </a:avLst>
           </a:prstGeom>
           <a:solidFill>
-            <a:srgbClr val="FF2E88"/>
+            <a:srgbClr val="7AA2F7"/>
           </a:solidFill>
           <a:ln/>
         </p:spPr>
       </p:sp>
-      <p:sp>
-        <p:nvSpPr>
-          <p:cNvPr id="6" name="Text 4"/>
-          <p:cNvSpPr/>
-          <p:nvPr/>
-        </p:nvSpPr>
-        <p:spPr>
-          <a:xfrm>
-            <a:off x="634990" y="2129028"/>
-            <a:ext cx="3268040" cy="274320"/>
+      <p:pic>
+        <p:nvPicPr>
+          <p:cNvPr id="6" name="Image 0" descr="preencoded.png">    </p:cNvPr>
+          <p:cNvPicPr>
+            <a:picLocks noChangeAspect="1"/>
+          </p:cNvPicPr>
+          <p:nvPr/>
+        </p:nvPicPr>
+        <p:blipFill>
+          <a:blip r:embed="rId1"/>
+          <a:stretch>
+            <a:fillRect/>
+          </a:stretch>
+        </p:blipFill>
+        <p:spPr>
+          <a:xfrm>
+            <a:off x="607558" y="2147316"/>
+            <a:ext cx="219456" cy="219456"/>
+          </a:xfrm>
+          <a:prstGeom prst="rect">
+            <a:avLst/>
+          </a:prstGeom>
+        </p:spPr>
+      </p:pic>
+      <p:sp>
+        <p:nvSpPr>
+          <p:cNvPr id="7" name="Text 4"/>
+          <p:cNvSpPr/>
+          <p:nvPr/>
+        </p:nvSpPr>
+        <p:spPr>
+          <a:xfrm>
+            <a:off x="881878" y="2129028"/>
+            <a:ext cx="3021152" cy="274320"/>
           </a:xfrm>
           <a:prstGeom prst="rect">
             <a:avLst/>
@@ -5190,7 +5526,7 @@
             <a:r>
               <a:rPr lang="en-US" sz="1600" b="1" dirty="0">
                 <a:solidFill>
-                  <a:srgbClr val="FF2E88"/>
+                  <a:srgbClr val="7AA2F7"/>
                 </a:solidFill>
                 <a:latin typeface="Trebuchet MS" pitchFamily="34" charset="0"/>
                 <a:ea typeface="Trebuchet MS" pitchFamily="34" charset="-122"/>
@@ -5204,7 +5540,7 @@
       </p:sp>
       <p:sp>
         <p:nvSpPr>
-          <p:cNvPr id="7" name="Text 5"/>
+          <p:cNvPr id="8" name="Text 5"/>
           <p:cNvSpPr/>
           <p:nvPr/>
         </p:nvSpPr>
@@ -5229,7 +5565,7 @@
             <a:r>
               <a:rPr lang="en-US" sz="1300" dirty="0">
                 <a:solidFill>
-                  <a:srgbClr val="FFFFFF"/>
+                  <a:srgbClr val="C0CAF5"/>
                 </a:solidFill>
                 <a:latin typeface="Segoe UI" pitchFamily="34" charset="0"/>
                 <a:ea typeface="Segoe UI" pitchFamily="34" charset="-122"/>
@@ -5243,7 +5579,7 @@
       </p:sp>
       <p:sp>
         <p:nvSpPr>
-          <p:cNvPr id="8" name="Shape 6"/>
+          <p:cNvPr id="9" name="Shape 6"/>
           <p:cNvSpPr/>
           <p:nvPr/>
         </p:nvSpPr>
@@ -5258,11 +5594,11 @@
             </a:avLst>
           </a:prstGeom>
           <a:solidFill>
-            <a:srgbClr val="151522"/>
+            <a:srgbClr val="24283B"/>
           </a:solidFill>
           <a:ln w="19050">
             <a:solidFill>
-              <a:srgbClr val="7B61FF"/>
+              <a:srgbClr val="7DCFFF"/>
             </a:solidFill>
             <a:prstDash val="solid"/>
           </a:ln>
@@ -5270,7 +5606,7 @@
       </p:sp>
       <p:sp>
         <p:nvSpPr>
-          <p:cNvPr id="9" name="Shape 7"/>
+          <p:cNvPr id="10" name="Shape 7"/>
           <p:cNvSpPr/>
           <p:nvPr/>
         </p:nvSpPr>
@@ -5285,21 +5621,45 @@
             </a:avLst>
           </a:prstGeom>
           <a:solidFill>
-            <a:srgbClr val="7B61FF"/>
+            <a:srgbClr val="7DCFFF"/>
           </a:solidFill>
           <a:ln/>
         </p:spPr>
       </p:sp>
-      <p:sp>
-        <p:nvSpPr>
-          <p:cNvPr id="10" name="Text 8"/>
-          <p:cNvSpPr/>
-          <p:nvPr/>
-        </p:nvSpPr>
-        <p:spPr>
-          <a:xfrm>
-            <a:off x="4461828" y="2129028"/>
-            <a:ext cx="3268040" cy="274320"/>
+      <p:pic>
+        <p:nvPicPr>
+          <p:cNvPr id="11" name="Image 1" descr="preencoded.png">    </p:cNvPr>
+          <p:cNvPicPr>
+            <a:picLocks noChangeAspect="1"/>
+          </p:cNvPicPr>
+          <p:nvPr/>
+        </p:nvPicPr>
+        <p:blipFill>
+          <a:blip r:embed="rId2"/>
+          <a:stretch>
+            <a:fillRect/>
+          </a:stretch>
+        </p:blipFill>
+        <p:spPr>
+          <a:xfrm>
+            <a:off x="4434396" y="2147316"/>
+            <a:ext cx="219456" cy="219456"/>
+          </a:xfrm>
+          <a:prstGeom prst="rect">
+            <a:avLst/>
+          </a:prstGeom>
+        </p:spPr>
+      </p:pic>
+      <p:sp>
+        <p:nvSpPr>
+          <p:cNvPr id="12" name="Text 8"/>
+          <p:cNvSpPr/>
+          <p:nvPr/>
+        </p:nvSpPr>
+        <p:spPr>
+          <a:xfrm>
+            <a:off x="4708716" y="2129028"/>
+            <a:ext cx="3021152" cy="274320"/>
           </a:xfrm>
           <a:prstGeom prst="rect">
             <a:avLst/>
@@ -5317,7 +5677,7 @@
             <a:r>
               <a:rPr lang="en-US" sz="1600" b="1" dirty="0">
                 <a:solidFill>
-                  <a:srgbClr val="7B61FF"/>
+                  <a:srgbClr val="7DCFFF"/>
                 </a:solidFill>
                 <a:latin typeface="Trebuchet MS" pitchFamily="34" charset="0"/>
                 <a:ea typeface="Trebuchet MS" pitchFamily="34" charset="-122"/>
@@ -5331,7 +5691,7 @@
       </p:sp>
       <p:sp>
         <p:nvSpPr>
-          <p:cNvPr id="11" name="Text 9"/>
+          <p:cNvPr id="13" name="Text 9"/>
           <p:cNvSpPr/>
           <p:nvPr/>
         </p:nvSpPr>
@@ -5356,7 +5716,7 @@
             <a:r>
               <a:rPr lang="en-US" sz="1300" dirty="0">
                 <a:solidFill>
-                  <a:srgbClr val="FFFFFF"/>
+                  <a:srgbClr val="C0CAF5"/>
                 </a:solidFill>
                 <a:latin typeface="Segoe UI" pitchFamily="34" charset="0"/>
                 <a:ea typeface="Segoe UI" pitchFamily="34" charset="-122"/>
@@ -5370,7 +5730,7 @@
       </p:sp>
       <p:sp>
         <p:nvSpPr>
-          <p:cNvPr id="12" name="Shape 10"/>
+          <p:cNvPr id="14" name="Shape 10"/>
           <p:cNvSpPr/>
           <p:nvPr/>
         </p:nvSpPr>
@@ -5385,11 +5745,11 @@
             </a:avLst>
           </a:prstGeom>
           <a:solidFill>
-            <a:srgbClr val="151522"/>
+            <a:srgbClr val="24283B"/>
           </a:solidFill>
           <a:ln w="19050">
             <a:solidFill>
-              <a:srgbClr val="00FF9F"/>
+              <a:srgbClr val="9ECE6A"/>
             </a:solidFill>
             <a:prstDash val="solid"/>
           </a:ln>
@@ -5397,7 +5757,7 @@
       </p:sp>
       <p:sp>
         <p:nvSpPr>
-          <p:cNvPr id="13" name="Shape 11"/>
+          <p:cNvPr id="15" name="Shape 11"/>
           <p:cNvSpPr/>
           <p:nvPr/>
         </p:nvSpPr>
@@ -5412,21 +5772,45 @@
             </a:avLst>
           </a:prstGeom>
           <a:solidFill>
-            <a:srgbClr val="00FF9F"/>
+            <a:srgbClr val="9ECE6A"/>
           </a:solidFill>
           <a:ln/>
         </p:spPr>
       </p:sp>
-      <p:sp>
-        <p:nvSpPr>
-          <p:cNvPr id="14" name="Text 12"/>
-          <p:cNvSpPr/>
-          <p:nvPr/>
-        </p:nvSpPr>
-        <p:spPr>
-          <a:xfrm>
-            <a:off x="8288665" y="2129028"/>
-            <a:ext cx="3268040" cy="274320"/>
+      <p:pic>
+        <p:nvPicPr>
+          <p:cNvPr id="16" name="Image 2" descr="preencoded.png">    </p:cNvPr>
+          <p:cNvPicPr>
+            <a:picLocks noChangeAspect="1"/>
+          </p:cNvPicPr>
+          <p:nvPr/>
+        </p:nvPicPr>
+        <p:blipFill>
+          <a:blip r:embed="rId3"/>
+          <a:stretch>
+            <a:fillRect/>
+          </a:stretch>
+        </p:blipFill>
+        <p:spPr>
+          <a:xfrm>
+            <a:off x="8261233" y="2147316"/>
+            <a:ext cx="219456" cy="219456"/>
+          </a:xfrm>
+          <a:prstGeom prst="rect">
+            <a:avLst/>
+          </a:prstGeom>
+        </p:spPr>
+      </p:pic>
+      <p:sp>
+        <p:nvSpPr>
+          <p:cNvPr id="17" name="Text 12"/>
+          <p:cNvSpPr/>
+          <p:nvPr/>
+        </p:nvSpPr>
+        <p:spPr>
+          <a:xfrm>
+            <a:off x="8535553" y="2129028"/>
+            <a:ext cx="3021152" cy="274320"/>
           </a:xfrm>
           <a:prstGeom prst="rect">
             <a:avLst/>
@@ -5444,7 +5828,7 @@
             <a:r>
               <a:rPr lang="en-US" sz="1600" b="1" dirty="0">
                 <a:solidFill>
-                  <a:srgbClr val="00FF9F"/>
+                  <a:srgbClr val="9ECE6A"/>
                 </a:solidFill>
                 <a:latin typeface="Trebuchet MS" pitchFamily="34" charset="0"/>
                 <a:ea typeface="Trebuchet MS" pitchFamily="34" charset="-122"/>
@@ -5458,7 +5842,7 @@
       </p:sp>
       <p:sp>
         <p:nvSpPr>
-          <p:cNvPr id="15" name="Text 13"/>
+          <p:cNvPr id="18" name="Text 13"/>
           <p:cNvSpPr/>
           <p:nvPr/>
         </p:nvSpPr>
@@ -5483,7 +5867,7 @@
             <a:r>
               <a:rPr lang="en-US" sz="1300" dirty="0">
                 <a:solidFill>
-                  <a:srgbClr val="FFFFFF"/>
+                  <a:srgbClr val="C0CAF5"/>
                 </a:solidFill>
                 <a:latin typeface="Segoe UI" pitchFamily="34" charset="0"/>
                 <a:ea typeface="Segoe UI" pitchFamily="34" charset="-122"/>
@@ -5497,7 +5881,7 @@
       </p:sp>
       <p:sp>
         <p:nvSpPr>
-          <p:cNvPr id="16" name="Shape 14"/>
+          <p:cNvPr id="19" name="Shape 14"/>
           <p:cNvSpPr/>
           <p:nvPr/>
         </p:nvSpPr>
@@ -5512,26 +5896,50 @@
             </a:avLst>
           </a:prstGeom>
           <a:solidFill>
-            <a:srgbClr val="151522"/>
+            <a:srgbClr val="24283B"/>
           </a:solidFill>
           <a:ln w="25400">
             <a:solidFill>
-              <a:srgbClr val="00F0FF"/>
+              <a:srgbClr val="7DCFFF"/>
             </a:solidFill>
             <a:prstDash val="solid"/>
           </a:ln>
         </p:spPr>
       </p:sp>
-      <p:sp>
-        <p:nvSpPr>
-          <p:cNvPr id="17" name="Text 15"/>
-          <p:cNvSpPr/>
-          <p:nvPr/>
-        </p:nvSpPr>
+      <p:pic>
+        <p:nvPicPr>
+          <p:cNvPr id="20" name="Image 3" descr="preencoded.png">    </p:cNvPr>
+          <p:cNvPicPr>
+            <a:picLocks noChangeAspect="1"/>
+          </p:cNvPicPr>
+          <p:nvPr/>
+        </p:nvPicPr>
+        <p:blipFill>
+          <a:blip r:embed="rId4"/>
+          <a:stretch>
+            <a:fillRect/>
+          </a:stretch>
+        </p:blipFill>
         <p:spPr>
           <a:xfrm>
             <a:off x="589270" y="3613404"/>
-            <a:ext cx="11013156" cy="274320"/>
+            <a:ext cx="201168" cy="201168"/>
+          </a:xfrm>
+          <a:prstGeom prst="rect">
+            <a:avLst/>
+          </a:prstGeom>
+        </p:spPr>
+      </p:pic>
+      <p:sp>
+        <p:nvSpPr>
+          <p:cNvPr id="21" name="Text 15"/>
+          <p:cNvSpPr/>
+          <p:nvPr/>
+        </p:nvSpPr>
+        <p:spPr>
+          <a:xfrm>
+            <a:off x="845302" y="3613404"/>
+            <a:ext cx="10757124" cy="274320"/>
           </a:xfrm>
           <a:prstGeom prst="rect">
             <a:avLst/>
@@ -5549,13 +5957,13 @@
             <a:r>
               <a:rPr lang="en-US" sz="1300" b="1" dirty="0">
                 <a:solidFill>
-                  <a:srgbClr val="00F0FF"/>
+                  <a:srgbClr val="7DCFFF"/>
                 </a:solidFill>
                 <a:latin typeface="Trebuchet MS" pitchFamily="34" charset="0"/>
                 <a:ea typeface="Trebuchet MS" pitchFamily="34" charset="-122"/>
                 <a:cs typeface="Trebuchet MS" pitchFamily="34" charset="-120"/>
               </a:rPr>
-              <a:t>L</a:t>
+              <a:t>L'idea chiave</a:t>
             </a:r>
             <a:endParaRPr lang="en-US" sz="1300" dirty="0"/>
           </a:p>
@@ -5563,7 +5971,7 @@
       </p:sp>
       <p:sp>
         <p:nvSpPr>
-          <p:cNvPr id="18" name="Text 16"/>
+          <p:cNvPr id="22" name="Text 16"/>
           <p:cNvSpPr/>
           <p:nvPr/>
         </p:nvSpPr>
@@ -5588,13 +5996,13 @@
             <a:r>
               <a:rPr lang="en-US" sz="1200" dirty="0">
                 <a:solidFill>
-                  <a:srgbClr val="FFFFFF"/>
+                  <a:srgbClr val="C0CAF5"/>
                 </a:solidFill>
                 <a:latin typeface="Segoe UI" pitchFamily="34" charset="0"/>
                 <a:ea typeface="Segoe UI" pitchFamily="34" charset="-122"/>
                 <a:cs typeface="Segoe UI" pitchFamily="34" charset="-120"/>
               </a:rPr>
-              <a:t>idea chiave"</a:t>
+              <a:t>Non diciamo dove mettere ogni singolo pixel: diciamo solo cosa vogliamo mostrare e Yumia trova il modo migliore per disegnarlo.</a:t>
             </a:r>
             <a:endParaRPr lang="en-US" sz="1200" dirty="0"/>
           </a:p>
@@ -5602,48 +6010,7 @@
       </p:sp>
       <p:sp>
         <p:nvSpPr>
-          <p:cNvPr id="19" name="Text 17"/>
-          <p:cNvSpPr/>
-          <p:nvPr/>
-        </p:nvSpPr>
-        <p:spPr>
-          <a:xfrm>
-            <a:off x="406390" y="4419600"/>
-            <a:ext cx="11378916" cy="266700"/>
-          </a:xfrm>
-          <a:prstGeom prst="rect">
-            <a:avLst/>
-          </a:prstGeom>
-          <a:noFill/>
-          <a:ln/>
-        </p:spPr>
-        <p:txBody>
-          <a:bodyPr wrap="square" lIns="0" tIns="0" rIns="0" bIns="0" rtlCol="0" anchor="t">
-            <a:normAutofit/>
-          </a:bodyPr>
-          <a:lstStyle/>
-          <a:p>
-            <a:pPr algn="l" indent="0" marL="0">
-              <a:buNone/>
-            </a:pPr>
-            <a:r>
-              <a:rPr lang="en-US" sz="1300" dirty="0">
-                <a:solidFill>
-                  <a:srgbClr val="FFFFFF"/>
-                </a:solidFill>
-                <a:latin typeface="Segoe UI" pitchFamily="34" charset="0"/>
-                <a:ea typeface="Segoe UI" pitchFamily="34" charset="-122"/>
-                <a:cs typeface="Segoe UI" pitchFamily="34" charset="-120"/>
-              </a:rPr>
-              <a:t>Non diciamo dove mettere ogni singolo pixel: diciamo solo cosa vogliamo mostrare e Yumia trova il modo migliore per disegnarlo.</a:t>
-            </a:r>
-            <a:endParaRPr lang="en-US" sz="1300" dirty="0"/>
-          </a:p>
-        </p:txBody>
-      </p:sp>
-      <p:sp>
-        <p:nvSpPr>
-          <p:cNvPr id="20" name="Text 18"/>
+          <p:cNvPr id="23" name="Text 17"/>
           <p:cNvSpPr/>
           <p:nvPr/>
         </p:nvSpPr>
@@ -5668,7 +6035,7 @@
             <a:r>
               <a:rPr lang="en-US" sz="900" b="1" dirty="0">
                 <a:solidFill>
-                  <a:srgbClr val="A7A7B5"/>
+                  <a:srgbClr val="565F89"/>
                 </a:solidFill>
                 <a:latin typeface="Trebuchet MS" pitchFamily="34" charset="0"/>
                 <a:ea typeface="Trebuchet MS" pitchFamily="34" charset="-122"/>
@@ -5694,7 +6061,7 @@
     <p:bg>
       <p:bgPr>
         <a:solidFill>
-          <a:srgbClr val="0B0B12"/>
+          <a:srgbClr val="1A1B26"/>
         </a:solidFill>
       </p:bgPr>
     </p:bg>
@@ -5739,7 +6106,7 @@
             <a:r>
               <a:rPr lang="en-US" sz="3300" b="1" dirty="0">
                 <a:solidFill>
-                  <a:srgbClr val="FF2E88"/>
+                  <a:srgbClr val="7AA2F7"/>
                 </a:solidFill>
                 <a:latin typeface="Trebuchet MS" pitchFamily="34" charset="0"/>
                 <a:ea typeface="Trebuchet MS" pitchFamily="34" charset="-122"/>
@@ -5776,9 +6143,9 @@
               <a:buNone/>
             </a:pPr>
             <a:r>
-              <a:rPr lang="en-US" sz="2700" b="1" dirty="0">
-                <a:solidFill>
-                  <a:srgbClr val="FFFFFF"/>
+              <a:rPr lang="en-US" sz="2600" b="1" dirty="0">
+                <a:solidFill>
+                  <a:srgbClr val="C0CAF5"/>
                 </a:solidFill>
                 <a:latin typeface="Trebuchet MS" pitchFamily="34" charset="0"/>
                 <a:ea typeface="Trebuchet MS" pitchFamily="34" charset="-122"/>
@@ -5786,7 +6153,7 @@
               </a:rPr>
               <a:t>Un percorso semplice e diretto in 3 passaggi</a:t>
             </a:r>
-            <a:endParaRPr lang="en-US" sz="2700" dirty="0"/>
+            <a:endParaRPr lang="en-US" sz="2600" dirty="0"/>
           </a:p>
         </p:txBody>
       </p:sp>
@@ -5817,7 +6184,7 @@
             <a:r>
               <a:rPr lang="en-US" sz="1200" b="1" dirty="0">
                 <a:solidFill>
-                  <a:srgbClr val="FF2E88"/>
+                  <a:srgbClr val="7AA2F7"/>
                 </a:solidFill>
                 <a:latin typeface="Trebuchet MS" pitchFamily="34" charset="0"/>
                 <a:ea typeface="Trebuchet MS" pitchFamily="34" charset="-122"/>
@@ -5846,7 +6213,7 @@
           <a:noFill/>
           <a:ln w="25400">
             <a:solidFill>
-              <a:srgbClr val="7B61FF"/>
+              <a:srgbClr val="7DCFFF"/>
             </a:solidFill>
             <a:prstDash val="solid"/>
           </a:ln>
@@ -5869,7 +6236,7 @@
           <a:noFill/>
           <a:ln w="25400">
             <a:solidFill>
-              <a:srgbClr val="7B61FF"/>
+              <a:srgbClr val="7DCFFF"/>
             </a:solidFill>
             <a:prstDash val="solid"/>
           </a:ln>
@@ -5892,7 +6259,7 @@
           <a:noFill/>
           <a:ln w="25400">
             <a:solidFill>
-              <a:srgbClr val="7B61FF"/>
+              <a:srgbClr val="7DCFFF"/>
             </a:solidFill>
             <a:prstDash val="solid"/>
             <a:tailEnd type="triangle"/>
@@ -5916,7 +6283,7 @@
           <a:noFill/>
           <a:ln w="25400">
             <a:solidFill>
-              <a:srgbClr val="7B61FF"/>
+              <a:srgbClr val="7DCFFF"/>
             </a:solidFill>
             <a:prstDash val="solid"/>
           </a:ln>
@@ -5939,7 +6306,7 @@
           <a:noFill/>
           <a:ln w="25400">
             <a:solidFill>
-              <a:srgbClr val="7B61FF"/>
+              <a:srgbClr val="7DCFFF"/>
             </a:solidFill>
             <a:prstDash val="solid"/>
           </a:ln>
@@ -5962,7 +6329,7 @@
           <a:noFill/>
           <a:ln w="25400">
             <a:solidFill>
-              <a:srgbClr val="7B61FF"/>
+              <a:srgbClr val="7DCFFF"/>
             </a:solidFill>
             <a:prstDash val="solid"/>
             <a:tailEnd type="triangle"/>
@@ -5986,11 +6353,11 @@
             </a:avLst>
           </a:prstGeom>
           <a:solidFill>
-            <a:srgbClr val="151522"/>
+            <a:srgbClr val="24283B"/>
           </a:solidFill>
           <a:ln w="25400">
             <a:solidFill>
-              <a:srgbClr val="FF2E88"/>
+              <a:srgbClr val="7AA2F7"/>
             </a:solidFill>
             <a:prstDash val="solid"/>
           </a:ln>
@@ -6023,7 +6390,7 @@
             <a:r>
               <a:rPr lang="en-US" sz="1200" b="1" dirty="0">
                 <a:solidFill>
-                  <a:srgbClr val="FFFFFF"/>
+                  <a:srgbClr val="C0CAF5"/>
                 </a:solidFill>
                 <a:latin typeface="Trebuchet MS" pitchFamily="34" charset="0"/>
                 <a:ea typeface="Trebuchet MS" pitchFamily="34" charset="-122"/>
@@ -6052,11 +6419,11 @@
             </a:avLst>
           </a:prstGeom>
           <a:solidFill>
-            <a:srgbClr val="151522"/>
+            <a:srgbClr val="24283B"/>
           </a:solidFill>
           <a:ln w="25400">
             <a:solidFill>
-              <a:srgbClr val="7B61FF"/>
+              <a:srgbClr val="7DCFFF"/>
             </a:solidFill>
             <a:prstDash val="solid"/>
           </a:ln>
@@ -6089,7 +6456,7 @@
             <a:r>
               <a:rPr lang="en-US" sz="1200" b="1" dirty="0">
                 <a:solidFill>
-                  <a:srgbClr val="FFFFFF"/>
+                  <a:srgbClr val="C0CAF5"/>
                 </a:solidFill>
                 <a:latin typeface="Trebuchet MS" pitchFamily="34" charset="0"/>
                 <a:ea typeface="Trebuchet MS" pitchFamily="34" charset="-122"/>
@@ -6118,11 +6485,11 @@
             </a:avLst>
           </a:prstGeom>
           <a:solidFill>
-            <a:srgbClr val="151522"/>
+            <a:srgbClr val="24283B"/>
           </a:solidFill>
           <a:ln w="25400">
             <a:solidFill>
-              <a:srgbClr val="00FF9F"/>
+              <a:srgbClr val="9ECE6A"/>
             </a:solidFill>
             <a:prstDash val="solid"/>
           </a:ln>
@@ -6155,7 +6522,7 @@
             <a:r>
               <a:rPr lang="en-US" sz="1100" b="1" dirty="0">
                 <a:solidFill>
-                  <a:srgbClr val="FFFFFF"/>
+                  <a:srgbClr val="C0CAF5"/>
                 </a:solidFill>
                 <a:latin typeface="Trebuchet MS" pitchFamily="34" charset="0"/>
                 <a:ea typeface="Trebuchet MS" pitchFamily="34" charset="-122"/>
@@ -6184,26 +6551,50 @@
             </a:avLst>
           </a:prstGeom>
           <a:solidFill>
-            <a:srgbClr val="151522"/>
+            <a:srgbClr val="24283B"/>
           </a:solidFill>
           <a:ln w="25400">
             <a:solidFill>
-              <a:srgbClr val="00FF9F"/>
+              <a:srgbClr val="9ECE6A"/>
             </a:solidFill>
             <a:prstDash val="solid"/>
           </a:ln>
         </p:spPr>
       </p:sp>
-      <p:sp>
-        <p:nvSpPr>
-          <p:cNvPr id="18" name="Text 16"/>
-          <p:cNvSpPr/>
-          <p:nvPr/>
-        </p:nvSpPr>
+      <p:pic>
+        <p:nvPicPr>
+          <p:cNvPr id="18" name="Image 0" descr="preencoded.png">    </p:cNvPr>
+          <p:cNvPicPr>
+            <a:picLocks noChangeAspect="1"/>
+          </p:cNvPicPr>
+          <p:nvPr/>
+        </p:nvPicPr>
+        <p:blipFill>
+          <a:blip r:embed="rId1"/>
+          <a:stretch>
+            <a:fillRect/>
+          </a:stretch>
+        </p:blipFill>
         <p:spPr>
           <a:xfrm>
             <a:off x="589270" y="3613404"/>
-            <a:ext cx="11013156" cy="274320"/>
+            <a:ext cx="201168" cy="201168"/>
+          </a:xfrm>
+          <a:prstGeom prst="rect">
+            <a:avLst/>
+          </a:prstGeom>
+        </p:spPr>
+      </p:pic>
+      <p:sp>
+        <p:nvSpPr>
+          <p:cNvPr id="19" name="Text 16"/>
+          <p:cNvSpPr/>
+          <p:nvPr/>
+        </p:nvSpPr>
+        <p:spPr>
+          <a:xfrm>
+            <a:off x="845302" y="3613404"/>
+            <a:ext cx="10757124" cy="274320"/>
           </a:xfrm>
           <a:prstGeom prst="rect">
             <a:avLst/>
@@ -6221,7 +6612,7 @@
             <a:r>
               <a:rPr lang="en-US" sz="1300" b="1" dirty="0">
                 <a:solidFill>
-                  <a:srgbClr val="00FF9F"/>
+                  <a:srgbClr val="9ECE6A"/>
                 </a:solidFill>
                 <a:latin typeface="Trebuchet MS" pitchFamily="34" charset="0"/>
                 <a:ea typeface="Trebuchet MS" pitchFamily="34" charset="-122"/>
@@ -6235,7 +6626,7 @@
       </p:sp>
       <p:sp>
         <p:nvSpPr>
-          <p:cNvPr id="19" name="Text 17"/>
+          <p:cNvPr id="20" name="Text 17"/>
           <p:cNvSpPr/>
           <p:nvPr/>
         </p:nvSpPr>
@@ -6260,7 +6651,7 @@
             <a:r>
               <a:rPr lang="en-US" sz="1200" dirty="0">
                 <a:solidFill>
-                  <a:srgbClr val="FFFFFF"/>
+                  <a:srgbClr val="C0CAF5"/>
                 </a:solidFill>
                 <a:latin typeface="Segoe UI" pitchFamily="34" charset="0"/>
                 <a:ea typeface="Segoe UI" pitchFamily="34" charset="-122"/>
@@ -6274,7 +6665,7 @@
       </p:sp>
       <p:sp>
         <p:nvSpPr>
-          <p:cNvPr id="20" name="Text 18"/>
+          <p:cNvPr id="21" name="Text 18"/>
           <p:cNvSpPr/>
           <p:nvPr/>
         </p:nvSpPr>
@@ -6299,7 +6690,7 @@
             <a:r>
               <a:rPr lang="en-US" sz="900" b="1" dirty="0">
                 <a:solidFill>
-                  <a:srgbClr val="A7A7B5"/>
+                  <a:srgbClr val="565F89"/>
                 </a:solidFill>
                 <a:latin typeface="Trebuchet MS" pitchFamily="34" charset="0"/>
                 <a:ea typeface="Trebuchet MS" pitchFamily="34" charset="-122"/>
@@ -6325,7 +6716,7 @@
     <p:bg>
       <p:bgPr>
         <a:solidFill>
-          <a:srgbClr val="0B0B12"/>
+          <a:srgbClr val="1A1B26"/>
         </a:solidFill>
       </p:bgPr>
     </p:bg>
@@ -6370,7 +6761,7 @@
             <a:r>
               <a:rPr lang="en-US" sz="3300" b="1" dirty="0">
                 <a:solidFill>
-                  <a:srgbClr val="FF2E88"/>
+                  <a:srgbClr val="7AA2F7"/>
                 </a:solidFill>
                 <a:latin typeface="Trebuchet MS" pitchFamily="34" charset="0"/>
                 <a:ea typeface="Trebuchet MS" pitchFamily="34" charset="-122"/>
@@ -6407,9 +6798,9 @@
               <a:buNone/>
             </a:pPr>
             <a:r>
-              <a:rPr lang="en-US" sz="2700" b="1" dirty="0">
-                <a:solidFill>
-                  <a:srgbClr val="FFFFFF"/>
+              <a:rPr lang="en-US" sz="2600" b="1" dirty="0">
+                <a:solidFill>
+                  <a:srgbClr val="C0CAF5"/>
                 </a:solidFill>
                 <a:latin typeface="Trebuchet MS" pitchFamily="34" charset="0"/>
                 <a:ea typeface="Trebuchet MS" pitchFamily="34" charset="-122"/>
@@ -6417,7 +6808,7 @@
               </a:rPr>
               <a:t>Da una sola pagina di testo ottieni subito 3 risultati diversi</a:t>
             </a:r>
-            <a:endParaRPr lang="en-US" sz="2700" dirty="0"/>
+            <a:endParaRPr lang="en-US" sz="2600" dirty="0"/>
           </a:p>
         </p:txBody>
       </p:sp>
@@ -6438,11 +6829,11 @@
             </a:avLst>
           </a:prstGeom>
           <a:solidFill>
-            <a:srgbClr val="151522"/>
+            <a:srgbClr val="24283B"/>
           </a:solidFill>
           <a:ln w="19050">
             <a:solidFill>
-              <a:srgbClr val="FF2E88"/>
+              <a:srgbClr val="7AA2F7"/>
             </a:solidFill>
             <a:prstDash val="solid"/>
           </a:ln>
@@ -6465,21 +6856,45 @@
             </a:avLst>
           </a:prstGeom>
           <a:solidFill>
-            <a:srgbClr val="FF2E88"/>
+            <a:srgbClr val="7AA2F7"/>
           </a:solidFill>
           <a:ln/>
         </p:spPr>
       </p:sp>
-      <p:sp>
-        <p:nvSpPr>
-          <p:cNvPr id="6" name="Text 4"/>
-          <p:cNvSpPr/>
-          <p:nvPr/>
-        </p:nvSpPr>
-        <p:spPr>
-          <a:xfrm>
-            <a:off x="634990" y="2129028"/>
-            <a:ext cx="3268040" cy="274320"/>
+      <p:pic>
+        <p:nvPicPr>
+          <p:cNvPr id="6" name="Image 0" descr="preencoded.png">    </p:cNvPr>
+          <p:cNvPicPr>
+            <a:picLocks noChangeAspect="1"/>
+          </p:cNvPicPr>
+          <p:nvPr/>
+        </p:nvPicPr>
+        <p:blipFill>
+          <a:blip r:embed="rId1"/>
+          <a:stretch>
+            <a:fillRect/>
+          </a:stretch>
+        </p:blipFill>
+        <p:spPr>
+          <a:xfrm>
+            <a:off x="607558" y="2147316"/>
+            <a:ext cx="219456" cy="219456"/>
+          </a:xfrm>
+          <a:prstGeom prst="rect">
+            <a:avLst/>
+          </a:prstGeom>
+        </p:spPr>
+      </p:pic>
+      <p:sp>
+        <p:nvSpPr>
+          <p:cNvPr id="7" name="Text 4"/>
+          <p:cNvSpPr/>
+          <p:nvPr/>
+        </p:nvSpPr>
+        <p:spPr>
+          <a:xfrm>
+            <a:off x="881878" y="2129028"/>
+            <a:ext cx="3021152" cy="274320"/>
           </a:xfrm>
           <a:prstGeom prst="rect">
             <a:avLst/>
@@ -6497,7 +6912,7 @@
             <a:r>
               <a:rPr lang="en-US" sz="1600" b="1" dirty="0">
                 <a:solidFill>
-                  <a:srgbClr val="FF2E88"/>
+                  <a:srgbClr val="7AA2F7"/>
                 </a:solidFill>
                 <a:latin typeface="Trebuchet MS" pitchFamily="34" charset="0"/>
                 <a:ea typeface="Trebuchet MS" pitchFamily="34" charset="-122"/>
@@ -6511,7 +6926,7 @@
       </p:sp>
       <p:sp>
         <p:nvSpPr>
-          <p:cNvPr id="7" name="Text 5"/>
+          <p:cNvPr id="8" name="Text 5"/>
           <p:cNvSpPr/>
           <p:nvPr/>
         </p:nvSpPr>
@@ -6538,7 +6953,7 @@
             <a:r>
               <a:rPr lang="en-US" sz="1300" dirty="0">
                 <a:solidFill>
-                  <a:srgbClr val="FFFFFF"/>
+                  <a:srgbClr val="C0CAF5"/>
                 </a:solidFill>
                 <a:latin typeface="Segoe UI" pitchFamily="34" charset="0"/>
                 <a:ea typeface="Segoe UI" pitchFamily="34" charset="-122"/>
@@ -6552,7 +6967,7 @@
       </p:sp>
       <p:sp>
         <p:nvSpPr>
-          <p:cNvPr id="8" name="Text 6"/>
+          <p:cNvPr id="9" name="Text 6"/>
           <p:cNvSpPr/>
           <p:nvPr/>
         </p:nvSpPr>
@@ -6579,7 +6994,7 @@
             <a:r>
               <a:rPr lang="en-US" sz="1300" dirty="0">
                 <a:solidFill>
-                  <a:srgbClr val="FFFFFF"/>
+                  <a:srgbClr val="C0CAF5"/>
                 </a:solidFill>
                 <a:latin typeface="Segoe UI" pitchFamily="34" charset="0"/>
                 <a:ea typeface="Segoe UI" pitchFamily="34" charset="-122"/>
@@ -6593,7 +7008,7 @@
       </p:sp>
       <p:sp>
         <p:nvSpPr>
-          <p:cNvPr id="9" name="Text 7"/>
+          <p:cNvPr id="10" name="Text 7"/>
           <p:cNvSpPr/>
           <p:nvPr/>
         </p:nvSpPr>
@@ -6620,7 +7035,7 @@
             <a:r>
               <a:rPr lang="en-US" sz="1300" dirty="0">
                 <a:solidFill>
-                  <a:srgbClr val="FFFFFF"/>
+                  <a:srgbClr val="C0CAF5"/>
                 </a:solidFill>
                 <a:latin typeface="Segoe UI" pitchFamily="34" charset="0"/>
                 <a:ea typeface="Segoe UI" pitchFamily="34" charset="-122"/>
@@ -6634,7 +7049,7 @@
       </p:sp>
       <p:sp>
         <p:nvSpPr>
-          <p:cNvPr id="10" name="Shape 8"/>
+          <p:cNvPr id="11" name="Shape 8"/>
           <p:cNvSpPr/>
           <p:nvPr/>
         </p:nvSpPr>
@@ -6649,11 +7064,11 @@
             </a:avLst>
           </a:prstGeom>
           <a:solidFill>
-            <a:srgbClr val="151522"/>
+            <a:srgbClr val="24283B"/>
           </a:solidFill>
           <a:ln w="19050">
             <a:solidFill>
-              <a:srgbClr val="7B61FF"/>
+              <a:srgbClr val="7DCFFF"/>
             </a:solidFill>
             <a:prstDash val="solid"/>
           </a:ln>
@@ -6661,7 +7076,7 @@
       </p:sp>
       <p:sp>
         <p:nvSpPr>
-          <p:cNvPr id="11" name="Shape 9"/>
+          <p:cNvPr id="12" name="Shape 9"/>
           <p:cNvSpPr/>
           <p:nvPr/>
         </p:nvSpPr>
@@ -6676,21 +7091,45 @@
             </a:avLst>
           </a:prstGeom>
           <a:solidFill>
-            <a:srgbClr val="7B61FF"/>
+            <a:srgbClr val="7DCFFF"/>
           </a:solidFill>
           <a:ln/>
         </p:spPr>
       </p:sp>
-      <p:sp>
-        <p:nvSpPr>
-          <p:cNvPr id="12" name="Text 10"/>
-          <p:cNvSpPr/>
-          <p:nvPr/>
-        </p:nvSpPr>
-        <p:spPr>
-          <a:xfrm>
-            <a:off x="4461828" y="2129028"/>
-            <a:ext cx="3268040" cy="274320"/>
+      <p:pic>
+        <p:nvPicPr>
+          <p:cNvPr id="13" name="Image 1" descr="preencoded.png">    </p:cNvPr>
+          <p:cNvPicPr>
+            <a:picLocks noChangeAspect="1"/>
+          </p:cNvPicPr>
+          <p:nvPr/>
+        </p:nvPicPr>
+        <p:blipFill>
+          <a:blip r:embed="rId2"/>
+          <a:stretch>
+            <a:fillRect/>
+          </a:stretch>
+        </p:blipFill>
+        <p:spPr>
+          <a:xfrm>
+            <a:off x="4434396" y="2147316"/>
+            <a:ext cx="219456" cy="219456"/>
+          </a:xfrm>
+          <a:prstGeom prst="rect">
+            <a:avLst/>
+          </a:prstGeom>
+        </p:spPr>
+      </p:pic>
+      <p:sp>
+        <p:nvSpPr>
+          <p:cNvPr id="14" name="Text 10"/>
+          <p:cNvSpPr/>
+          <p:nvPr/>
+        </p:nvSpPr>
+        <p:spPr>
+          <a:xfrm>
+            <a:off x="4708716" y="2129028"/>
+            <a:ext cx="3021152" cy="274320"/>
           </a:xfrm>
           <a:prstGeom prst="rect">
             <a:avLst/>
@@ -6708,7 +7147,7 @@
             <a:r>
               <a:rPr lang="en-US" sz="1600" b="1" dirty="0">
                 <a:solidFill>
-                  <a:srgbClr val="7B61FF"/>
+                  <a:srgbClr val="7DCFFF"/>
                 </a:solidFill>
                 <a:latin typeface="Trebuchet MS" pitchFamily="34" charset="0"/>
                 <a:ea typeface="Trebuchet MS" pitchFamily="34" charset="-122"/>
@@ -6722,7 +7161,7 @@
       </p:sp>
       <p:sp>
         <p:nvSpPr>
-          <p:cNvPr id="13" name="Text 11"/>
+          <p:cNvPr id="15" name="Text 11"/>
           <p:cNvSpPr/>
           <p:nvPr/>
         </p:nvSpPr>
@@ -6749,7 +7188,7 @@
             <a:r>
               <a:rPr lang="en-US" sz="1300" dirty="0">
                 <a:solidFill>
-                  <a:srgbClr val="FFFFFF"/>
+                  <a:srgbClr val="C0CAF5"/>
                 </a:solidFill>
                 <a:latin typeface="Segoe UI" pitchFamily="34" charset="0"/>
                 <a:ea typeface="Segoe UI" pitchFamily="34" charset="-122"/>
@@ -6763,7 +7202,7 @@
       </p:sp>
       <p:sp>
         <p:nvSpPr>
-          <p:cNvPr id="14" name="Text 12"/>
+          <p:cNvPr id="16" name="Text 12"/>
           <p:cNvSpPr/>
           <p:nvPr/>
         </p:nvSpPr>
@@ -6790,7 +7229,7 @@
             <a:r>
               <a:rPr lang="en-US" sz="1300" dirty="0">
                 <a:solidFill>
-                  <a:srgbClr val="FFFFFF"/>
+                  <a:srgbClr val="C0CAF5"/>
                 </a:solidFill>
                 <a:latin typeface="Segoe UI" pitchFamily="34" charset="0"/>
                 <a:ea typeface="Segoe UI" pitchFamily="34" charset="-122"/>
@@ -6804,7 +7243,7 @@
       </p:sp>
       <p:sp>
         <p:nvSpPr>
-          <p:cNvPr id="15" name="Text 13"/>
+          <p:cNvPr id="17" name="Text 13"/>
           <p:cNvSpPr/>
           <p:nvPr/>
         </p:nvSpPr>
@@ -6831,7 +7270,7 @@
             <a:r>
               <a:rPr lang="en-US" sz="1300" dirty="0">
                 <a:solidFill>
-                  <a:srgbClr val="FFFFFF"/>
+                  <a:srgbClr val="C0CAF5"/>
                 </a:solidFill>
                 <a:latin typeface="Segoe UI" pitchFamily="34" charset="0"/>
                 <a:ea typeface="Segoe UI" pitchFamily="34" charset="-122"/>
@@ -6845,7 +7284,7 @@
       </p:sp>
       <p:sp>
         <p:nvSpPr>
-          <p:cNvPr id="16" name="Shape 14"/>
+          <p:cNvPr id="18" name="Shape 14"/>
           <p:cNvSpPr/>
           <p:nvPr/>
         </p:nvSpPr>
@@ -6860,11 +7299,11 @@
             </a:avLst>
           </a:prstGeom>
           <a:solidFill>
-            <a:srgbClr val="151522"/>
+            <a:srgbClr val="24283B"/>
           </a:solidFill>
           <a:ln w="19050">
             <a:solidFill>
-              <a:srgbClr val="00FF9F"/>
+              <a:srgbClr val="9ECE6A"/>
             </a:solidFill>
             <a:prstDash val="solid"/>
           </a:ln>
@@ -6872,7 +7311,7 @@
       </p:sp>
       <p:sp>
         <p:nvSpPr>
-          <p:cNvPr id="17" name="Shape 15"/>
+          <p:cNvPr id="19" name="Shape 15"/>
           <p:cNvSpPr/>
           <p:nvPr/>
         </p:nvSpPr>
@@ -6887,21 +7326,45 @@
             </a:avLst>
           </a:prstGeom>
           <a:solidFill>
-            <a:srgbClr val="00FF9F"/>
+            <a:srgbClr val="9ECE6A"/>
           </a:solidFill>
           <a:ln/>
         </p:spPr>
       </p:sp>
-      <p:sp>
-        <p:nvSpPr>
-          <p:cNvPr id="18" name="Text 16"/>
-          <p:cNvSpPr/>
-          <p:nvPr/>
-        </p:nvSpPr>
-        <p:spPr>
-          <a:xfrm>
-            <a:off x="8288665" y="2129028"/>
-            <a:ext cx="3268040" cy="274320"/>
+      <p:pic>
+        <p:nvPicPr>
+          <p:cNvPr id="20" name="Image 2" descr="preencoded.png">    </p:cNvPr>
+          <p:cNvPicPr>
+            <a:picLocks noChangeAspect="1"/>
+          </p:cNvPicPr>
+          <p:nvPr/>
+        </p:nvPicPr>
+        <p:blipFill>
+          <a:blip r:embed="rId3"/>
+          <a:stretch>
+            <a:fillRect/>
+          </a:stretch>
+        </p:blipFill>
+        <p:spPr>
+          <a:xfrm>
+            <a:off x="8261233" y="2147316"/>
+            <a:ext cx="219456" cy="219456"/>
+          </a:xfrm>
+          <a:prstGeom prst="rect">
+            <a:avLst/>
+          </a:prstGeom>
+        </p:spPr>
+      </p:pic>
+      <p:sp>
+        <p:nvSpPr>
+          <p:cNvPr id="21" name="Text 16"/>
+          <p:cNvSpPr/>
+          <p:nvPr/>
+        </p:nvSpPr>
+        <p:spPr>
+          <a:xfrm>
+            <a:off x="8535553" y="2129028"/>
+            <a:ext cx="3021152" cy="274320"/>
           </a:xfrm>
           <a:prstGeom prst="rect">
             <a:avLst/>
@@ -6919,7 +7382,7 @@
             <a:r>
               <a:rPr lang="en-US" sz="1600" b="1" dirty="0">
                 <a:solidFill>
-                  <a:srgbClr val="00FF9F"/>
+                  <a:srgbClr val="9ECE6A"/>
                 </a:solidFill>
                 <a:latin typeface="Trebuchet MS" pitchFamily="34" charset="0"/>
                 <a:ea typeface="Trebuchet MS" pitchFamily="34" charset="-122"/>
@@ -6933,7 +7396,7 @@
       </p:sp>
       <p:sp>
         <p:nvSpPr>
-          <p:cNvPr id="19" name="Text 17"/>
+          <p:cNvPr id="22" name="Text 17"/>
           <p:cNvSpPr/>
           <p:nvPr/>
         </p:nvSpPr>
@@ -6960,7 +7423,7 @@
             <a:r>
               <a:rPr lang="en-US" sz="1300" dirty="0">
                 <a:solidFill>
-                  <a:srgbClr val="FFFFFF"/>
+                  <a:srgbClr val="C0CAF5"/>
                 </a:solidFill>
                 <a:latin typeface="Segoe UI" pitchFamily="34" charset="0"/>
                 <a:ea typeface="Segoe UI" pitchFamily="34" charset="-122"/>
@@ -6974,7 +7437,7 @@
       </p:sp>
       <p:sp>
         <p:nvSpPr>
-          <p:cNvPr id="20" name="Text 18"/>
+          <p:cNvPr id="23" name="Text 18"/>
           <p:cNvSpPr/>
           <p:nvPr/>
         </p:nvSpPr>
@@ -7001,7 +7464,7 @@
             <a:r>
               <a:rPr lang="en-US" sz="1300" dirty="0">
                 <a:solidFill>
-                  <a:srgbClr val="FFFFFF"/>
+                  <a:srgbClr val="C0CAF5"/>
                 </a:solidFill>
                 <a:latin typeface="Segoe UI" pitchFamily="34" charset="0"/>
                 <a:ea typeface="Segoe UI" pitchFamily="34" charset="-122"/>
@@ -7015,7 +7478,7 @@
       </p:sp>
       <p:sp>
         <p:nvSpPr>
-          <p:cNvPr id="21" name="Text 19"/>
+          <p:cNvPr id="24" name="Text 19"/>
           <p:cNvSpPr/>
           <p:nvPr/>
         </p:nvSpPr>
@@ -7042,7 +7505,7 @@
             <a:r>
               <a:rPr lang="en-US" sz="1300" dirty="0">
                 <a:solidFill>
-                  <a:srgbClr val="FFFFFF"/>
+                  <a:srgbClr val="C0CAF5"/>
                 </a:solidFill>
                 <a:latin typeface="Segoe UI" pitchFamily="34" charset="0"/>
                 <a:ea typeface="Segoe UI" pitchFamily="34" charset="-122"/>
@@ -7056,7 +7519,7 @@
       </p:sp>
       <p:sp>
         <p:nvSpPr>
-          <p:cNvPr id="22" name="Text 20"/>
+          <p:cNvPr id="25" name="Text 20"/>
           <p:cNvSpPr/>
           <p:nvPr/>
         </p:nvSpPr>
@@ -7081,7 +7544,7 @@
             <a:r>
               <a:rPr lang="en-US" sz="900" b="1" dirty="0">
                 <a:solidFill>
-                  <a:srgbClr val="A7A7B5"/>
+                  <a:srgbClr val="565F89"/>
                 </a:solidFill>
                 <a:latin typeface="Trebuchet MS" pitchFamily="34" charset="0"/>
                 <a:ea typeface="Trebuchet MS" pitchFamily="34" charset="-122"/>
@@ -7107,7 +7570,7 @@
     <p:bg>
       <p:bgPr>
         <a:solidFill>
-          <a:srgbClr val="0B0B12"/>
+          <a:srgbClr val="1A1B26"/>
         </a:solidFill>
       </p:bgPr>
     </p:bg>
@@ -7152,7 +7615,7 @@
             <a:r>
               <a:rPr lang="en-US" sz="3300" b="1" dirty="0">
                 <a:solidFill>
-                  <a:srgbClr val="FF2E88"/>
+                  <a:srgbClr val="7AA2F7"/>
                 </a:solidFill>
                 <a:latin typeface="Trebuchet MS" pitchFamily="34" charset="0"/>
                 <a:ea typeface="Trebuchet MS" pitchFamily="34" charset="-122"/>
@@ -7189,9 +7652,9 @@
               <a:buNone/>
             </a:pPr>
             <a:r>
-              <a:rPr lang="en-US" sz="2700" b="1" dirty="0">
-                <a:solidFill>
-                  <a:srgbClr val="FFFFFF"/>
+              <a:rPr lang="en-US" sz="2600" b="1" dirty="0">
+                <a:solidFill>
+                  <a:srgbClr val="C0CAF5"/>
                 </a:solidFill>
                 <a:latin typeface="Trebuchet MS" pitchFamily="34" charset="0"/>
                 <a:ea typeface="Trebuchet MS" pitchFamily="34" charset="-122"/>
@@ -7199,7 +7662,7 @@
               </a:rPr>
               <a:t>Guardate quanto è facile e leggibile il testo!</a:t>
             </a:r>
-            <a:endParaRPr lang="en-US" sz="2700" dirty="0"/>
+            <a:endParaRPr lang="en-US" sz="2600" dirty="0"/>
           </a:p>
         </p:txBody>
       </p:sp>
@@ -7220,11 +7683,11 @@
             </a:avLst>
           </a:prstGeom>
           <a:solidFill>
-            <a:srgbClr val="07070D"/>
+            <a:srgbClr val="16161E"/>
           </a:solidFill>
           <a:ln w="19050">
             <a:solidFill>
-              <a:srgbClr val="2E2E48"/>
+              <a:srgbClr val="2F354A"/>
             </a:solidFill>
             <a:prstDash val="solid"/>
           </a:ln>
@@ -7332,7 +7795,7 @@
             <a:r>
               <a:rPr lang="en-US" sz="1000" dirty="0">
                 <a:solidFill>
-                  <a:srgbClr val="00F0FF"/>
+                  <a:srgbClr val="C0CAF5"/>
                 </a:solidFill>
                 <a:latin typeface="Consolas" pitchFamily="34" charset="0"/>
                 <a:ea typeface="Consolas" pitchFamily="34" charset="-122"/>
@@ -7349,7 +7812,7 @@
             <a:r>
               <a:rPr lang="en-US" sz="1000" dirty="0">
                 <a:solidFill>
-                  <a:srgbClr val="00F0FF"/>
+                  <a:srgbClr val="C0CAF5"/>
                 </a:solidFill>
                 <a:latin typeface="Consolas" pitchFamily="34" charset="0"/>
                 <a:ea typeface="Consolas" pitchFamily="34" charset="-122"/>
@@ -7366,7 +7829,7 @@
             <a:r>
               <a:rPr lang="en-US" sz="1000" dirty="0">
                 <a:solidFill>
-                  <a:srgbClr val="00F0FF"/>
+                  <a:srgbClr val="C0CAF5"/>
                 </a:solidFill>
                 <a:latin typeface="Consolas" pitchFamily="34" charset="0"/>
                 <a:ea typeface="Consolas" pitchFamily="34" charset="-122"/>
@@ -7383,7 +7846,7 @@
             <a:r>
               <a:rPr lang="en-US" sz="1000" dirty="0">
                 <a:solidFill>
-                  <a:srgbClr val="00F0FF"/>
+                  <a:srgbClr val="C0CAF5"/>
                 </a:solidFill>
                 <a:latin typeface="Consolas" pitchFamily="34" charset="0"/>
                 <a:ea typeface="Consolas" pitchFamily="34" charset="-122"/>
@@ -7400,7 +7863,7 @@
             <a:r>
               <a:rPr lang="en-US" sz="1000" dirty="0">
                 <a:solidFill>
-                  <a:srgbClr val="00F0FF"/>
+                  <a:srgbClr val="C0CAF5"/>
                 </a:solidFill>
                 <a:latin typeface="Consolas" pitchFamily="34" charset="0"/>
                 <a:ea typeface="Consolas" pitchFamily="34" charset="-122"/>
@@ -7417,7 +7880,7 @@
             <a:r>
               <a:rPr lang="en-US" sz="1000" dirty="0">
                 <a:solidFill>
-                  <a:srgbClr val="00F0FF"/>
+                  <a:srgbClr val="C0CAF5"/>
                 </a:solidFill>
                 <a:latin typeface="Consolas" pitchFamily="34" charset="0"/>
                 <a:ea typeface="Consolas" pitchFamily="34" charset="-122"/>
@@ -7446,11 +7909,11 @@
             </a:avLst>
           </a:prstGeom>
           <a:solidFill>
-            <a:srgbClr val="151522"/>
+            <a:srgbClr val="24283B"/>
           </a:solidFill>
           <a:ln w="19050">
             <a:solidFill>
-              <a:srgbClr val="FF2E88"/>
+              <a:srgbClr val="7AA2F7"/>
             </a:solidFill>
             <a:prstDash val="solid"/>
           </a:ln>
@@ -7473,21 +7936,45 @@
             </a:avLst>
           </a:prstGeom>
           <a:solidFill>
-            <a:srgbClr val="FF2E88"/>
+            <a:srgbClr val="7AA2F7"/>
           </a:solidFill>
           <a:ln/>
         </p:spPr>
       </p:sp>
-      <p:sp>
-        <p:nvSpPr>
-          <p:cNvPr id="11" name="Text 9"/>
-          <p:cNvSpPr/>
-          <p:nvPr/>
-        </p:nvSpPr>
-        <p:spPr>
-          <a:xfrm>
-            <a:off x="6973401" y="2129028"/>
-            <a:ext cx="4583304" cy="274320"/>
+      <p:pic>
+        <p:nvPicPr>
+          <p:cNvPr id="11" name="Image 0" descr="preencoded.png">    </p:cNvPr>
+          <p:cNvPicPr>
+            <a:picLocks noChangeAspect="1"/>
+          </p:cNvPicPr>
+          <p:nvPr/>
+        </p:nvPicPr>
+        <p:blipFill>
+          <a:blip r:embed="rId1"/>
+          <a:stretch>
+            <a:fillRect/>
+          </a:stretch>
+        </p:blipFill>
+        <p:spPr>
+          <a:xfrm>
+            <a:off x="6945969" y="2147316"/>
+            <a:ext cx="219456" cy="219456"/>
+          </a:xfrm>
+          <a:prstGeom prst="rect">
+            <a:avLst/>
+          </a:prstGeom>
+        </p:spPr>
+      </p:pic>
+      <p:sp>
+        <p:nvSpPr>
+          <p:cNvPr id="12" name="Text 9"/>
+          <p:cNvSpPr/>
+          <p:nvPr/>
+        </p:nvSpPr>
+        <p:spPr>
+          <a:xfrm>
+            <a:off x="7220289" y="2129028"/>
+            <a:ext cx="4336416" cy="274320"/>
           </a:xfrm>
           <a:prstGeom prst="rect">
             <a:avLst/>
@@ -7505,7 +7992,7 @@
             <a:r>
               <a:rPr lang="en-US" sz="1600" b="1" dirty="0">
                 <a:solidFill>
-                  <a:srgbClr val="FF2E88"/>
+                  <a:srgbClr val="7AA2F7"/>
                 </a:solidFill>
                 <a:latin typeface="Trebuchet MS" pitchFamily="34" charset="0"/>
                 <a:ea typeface="Trebuchet MS" pitchFamily="34" charset="-122"/>
@@ -7519,7 +8006,7 @@
       </p:sp>
       <p:sp>
         <p:nvSpPr>
-          <p:cNvPr id="12" name="Text 10"/>
+          <p:cNvPr id="13" name="Text 10"/>
           <p:cNvSpPr/>
           <p:nvPr/>
         </p:nvSpPr>
@@ -7546,7 +8033,7 @@
             <a:r>
               <a:rPr lang="en-US" sz="1300" dirty="0">
                 <a:solidFill>
-                  <a:srgbClr val="FFFFFF"/>
+                  <a:srgbClr val="C0CAF5"/>
                 </a:solidFill>
                 <a:latin typeface="Segoe UI" pitchFamily="34" charset="0"/>
                 <a:ea typeface="Segoe UI" pitchFamily="34" charset="-122"/>
@@ -7560,7 +8047,7 @@
       </p:sp>
       <p:sp>
         <p:nvSpPr>
-          <p:cNvPr id="13" name="Text 11"/>
+          <p:cNvPr id="14" name="Text 11"/>
           <p:cNvSpPr/>
           <p:nvPr/>
         </p:nvSpPr>
@@ -7587,7 +8074,7 @@
             <a:r>
               <a:rPr lang="en-US" sz="1300" dirty="0">
                 <a:solidFill>
-                  <a:srgbClr val="FFFFFF"/>
+                  <a:srgbClr val="C0CAF5"/>
                 </a:solidFill>
                 <a:latin typeface="Segoe UI" pitchFamily="34" charset="0"/>
                 <a:ea typeface="Segoe UI" pitchFamily="34" charset="-122"/>
@@ -7601,7 +8088,7 @@
       </p:sp>
       <p:sp>
         <p:nvSpPr>
-          <p:cNvPr id="14" name="Text 12"/>
+          <p:cNvPr id="15" name="Text 12"/>
           <p:cNvSpPr/>
           <p:nvPr/>
         </p:nvSpPr>
@@ -7628,7 +8115,7 @@
             <a:r>
               <a:rPr lang="en-US" sz="1300" dirty="0">
                 <a:solidFill>
-                  <a:srgbClr val="FFFFFF"/>
+                  <a:srgbClr val="C0CAF5"/>
                 </a:solidFill>
                 <a:latin typeface="Segoe UI" pitchFamily="34" charset="0"/>
                 <a:ea typeface="Segoe UI" pitchFamily="34" charset="-122"/>
@@ -7642,7 +8129,7 @@
       </p:sp>
       <p:sp>
         <p:nvSpPr>
-          <p:cNvPr id="15" name="Text 13"/>
+          <p:cNvPr id="16" name="Text 13"/>
           <p:cNvSpPr/>
           <p:nvPr/>
         </p:nvSpPr>
@@ -7669,7 +8156,7 @@
             <a:r>
               <a:rPr lang="en-US" sz="1300" dirty="0">
                 <a:solidFill>
-                  <a:srgbClr val="FFFFFF"/>
+                  <a:srgbClr val="C0CAF5"/>
                 </a:solidFill>
                 <a:latin typeface="Segoe UI" pitchFamily="34" charset="0"/>
                 <a:ea typeface="Segoe UI" pitchFamily="34" charset="-122"/>
@@ -7683,7 +8170,7 @@
       </p:sp>
       <p:sp>
         <p:nvSpPr>
-          <p:cNvPr id="16" name="Text 14"/>
+          <p:cNvPr id="17" name="Text 14"/>
           <p:cNvSpPr/>
           <p:nvPr/>
         </p:nvSpPr>
@@ -7708,7 +8195,7 @@
             <a:r>
               <a:rPr lang="en-US" sz="900" b="1" dirty="0">
                 <a:solidFill>
-                  <a:srgbClr val="A7A7B5"/>
+                  <a:srgbClr val="565F89"/>
                 </a:solidFill>
                 <a:latin typeface="Trebuchet MS" pitchFamily="34" charset="0"/>
                 <a:ea typeface="Trebuchet MS" pitchFamily="34" charset="-122"/>
@@ -7734,7 +8221,7 @@
     <p:bg>
       <p:bgPr>
         <a:solidFill>
-          <a:srgbClr val="0B0B12"/>
+          <a:srgbClr val="1A1B26"/>
         </a:solidFill>
       </p:bgPr>
     </p:bg>
@@ -7779,7 +8266,7 @@
             <a:r>
               <a:rPr lang="en-US" sz="3300" b="1" dirty="0">
                 <a:solidFill>
-                  <a:srgbClr val="FF2E88"/>
+                  <a:srgbClr val="7AA2F7"/>
                 </a:solidFill>
                 <a:latin typeface="Trebuchet MS" pitchFamily="34" charset="0"/>
                 <a:ea typeface="Trebuchet MS" pitchFamily="34" charset="-122"/>
@@ -7816,9 +8303,9 @@
               <a:buNone/>
             </a:pPr>
             <a:r>
-              <a:rPr lang="en-US" sz="2700" b="1" dirty="0">
-                <a:solidFill>
-                  <a:srgbClr val="FFFFFF"/>
+              <a:rPr lang="en-US" sz="2600" b="1" dirty="0">
+                <a:solidFill>
+                  <a:srgbClr val="C0CAF5"/>
                 </a:solidFill>
                 <a:latin typeface="Trebuchet MS" pitchFamily="34" charset="0"/>
                 <a:ea typeface="Trebuchet MS" pitchFamily="34" charset="-122"/>
@@ -7826,7 +8313,7 @@
               </a:rPr>
               <a:t>Tutto quello che serve per spiegare bene un argomento</a:t>
             </a:r>
-            <a:endParaRPr lang="en-US" sz="2700" dirty="0"/>
+            <a:endParaRPr lang="en-US" sz="2600" dirty="0"/>
           </a:p>
         </p:txBody>
       </p:sp>
@@ -7847,11 +8334,11 @@
             </a:avLst>
           </a:prstGeom>
           <a:solidFill>
-            <a:srgbClr val="151522"/>
+            <a:srgbClr val="24283B"/>
           </a:solidFill>
           <a:ln w="19050">
             <a:solidFill>
-              <a:srgbClr val="FF2E88"/>
+              <a:srgbClr val="7AA2F7"/>
             </a:solidFill>
             <a:prstDash val="solid"/>
           </a:ln>
@@ -7874,21 +8361,45 @@
             </a:avLst>
           </a:prstGeom>
           <a:solidFill>
-            <a:srgbClr val="FF2E88"/>
+            <a:srgbClr val="7AA2F7"/>
           </a:solidFill>
           <a:ln/>
         </p:spPr>
       </p:sp>
-      <p:sp>
-        <p:nvSpPr>
-          <p:cNvPr id="6" name="Text 4"/>
-          <p:cNvSpPr/>
-          <p:nvPr/>
-        </p:nvSpPr>
-        <p:spPr>
-          <a:xfrm>
-            <a:off x="634990" y="2129028"/>
-            <a:ext cx="3268040" cy="274320"/>
+      <p:pic>
+        <p:nvPicPr>
+          <p:cNvPr id="6" name="Image 0" descr="preencoded.png">    </p:cNvPr>
+          <p:cNvPicPr>
+            <a:picLocks noChangeAspect="1"/>
+          </p:cNvPicPr>
+          <p:nvPr/>
+        </p:nvPicPr>
+        <p:blipFill>
+          <a:blip r:embed="rId1"/>
+          <a:stretch>
+            <a:fillRect/>
+          </a:stretch>
+        </p:blipFill>
+        <p:spPr>
+          <a:xfrm>
+            <a:off x="607558" y="2147316"/>
+            <a:ext cx="219456" cy="219456"/>
+          </a:xfrm>
+          <a:prstGeom prst="rect">
+            <a:avLst/>
+          </a:prstGeom>
+        </p:spPr>
+      </p:pic>
+      <p:sp>
+        <p:nvSpPr>
+          <p:cNvPr id="7" name="Text 4"/>
+          <p:cNvSpPr/>
+          <p:nvPr/>
+        </p:nvSpPr>
+        <p:spPr>
+          <a:xfrm>
+            <a:off x="881878" y="2129028"/>
+            <a:ext cx="3021152" cy="274320"/>
           </a:xfrm>
           <a:prstGeom prst="rect">
             <a:avLst/>
@@ -7906,7 +8417,7 @@
             <a:r>
               <a:rPr lang="en-US" sz="1600" b="1" dirty="0">
                 <a:solidFill>
-                  <a:srgbClr val="FF2E88"/>
+                  <a:srgbClr val="7AA2F7"/>
                 </a:solidFill>
                 <a:latin typeface="Trebuchet MS" pitchFamily="34" charset="0"/>
                 <a:ea typeface="Trebuchet MS" pitchFamily="34" charset="-122"/>
@@ -7920,7 +8431,7 @@
       </p:sp>
       <p:sp>
         <p:nvSpPr>
-          <p:cNvPr id="7" name="Text 5"/>
+          <p:cNvPr id="8" name="Text 5"/>
           <p:cNvSpPr/>
           <p:nvPr/>
         </p:nvSpPr>
@@ -7945,7 +8456,7 @@
             <a:r>
               <a:rPr lang="en-US" sz="1300" dirty="0">
                 <a:solidFill>
-                  <a:srgbClr val="FFFFFF"/>
+                  <a:srgbClr val="C0CAF5"/>
                 </a:solidFill>
                 <a:latin typeface="Segoe UI" pitchFamily="34" charset="0"/>
                 <a:ea typeface="Segoe UI" pitchFamily="34" charset="-122"/>
@@ -7959,7 +8470,7 @@
       </p:sp>
       <p:sp>
         <p:nvSpPr>
-          <p:cNvPr id="8" name="Shape 6"/>
+          <p:cNvPr id="9" name="Shape 6"/>
           <p:cNvSpPr/>
           <p:nvPr/>
         </p:nvSpPr>
@@ -7974,11 +8485,11 @@
             </a:avLst>
           </a:prstGeom>
           <a:solidFill>
-            <a:srgbClr val="151522"/>
+            <a:srgbClr val="24283B"/>
           </a:solidFill>
           <a:ln w="19050">
             <a:solidFill>
-              <a:srgbClr val="7B61FF"/>
+              <a:srgbClr val="7DCFFF"/>
             </a:solidFill>
             <a:prstDash val="solid"/>
           </a:ln>
@@ -7986,7 +8497,7 @@
       </p:sp>
       <p:sp>
         <p:nvSpPr>
-          <p:cNvPr id="9" name="Shape 7"/>
+          <p:cNvPr id="10" name="Shape 7"/>
           <p:cNvSpPr/>
           <p:nvPr/>
         </p:nvSpPr>
@@ -8001,21 +8512,45 @@
             </a:avLst>
           </a:prstGeom>
           <a:solidFill>
-            <a:srgbClr val="7B61FF"/>
+            <a:srgbClr val="7DCFFF"/>
           </a:solidFill>
           <a:ln/>
         </p:spPr>
       </p:sp>
-      <p:sp>
-        <p:nvSpPr>
-          <p:cNvPr id="10" name="Text 8"/>
-          <p:cNvSpPr/>
-          <p:nvPr/>
-        </p:nvSpPr>
-        <p:spPr>
-          <a:xfrm>
-            <a:off x="4461828" y="2129028"/>
-            <a:ext cx="3268040" cy="274320"/>
+      <p:pic>
+        <p:nvPicPr>
+          <p:cNvPr id="11" name="Image 1" descr="preencoded.png">    </p:cNvPr>
+          <p:cNvPicPr>
+            <a:picLocks noChangeAspect="1"/>
+          </p:cNvPicPr>
+          <p:nvPr/>
+        </p:nvPicPr>
+        <p:blipFill>
+          <a:blip r:embed="rId2"/>
+          <a:stretch>
+            <a:fillRect/>
+          </a:stretch>
+        </p:blipFill>
+        <p:spPr>
+          <a:xfrm>
+            <a:off x="4434396" y="2147316"/>
+            <a:ext cx="219456" cy="219456"/>
+          </a:xfrm>
+          <a:prstGeom prst="rect">
+            <a:avLst/>
+          </a:prstGeom>
+        </p:spPr>
+      </p:pic>
+      <p:sp>
+        <p:nvSpPr>
+          <p:cNvPr id="12" name="Text 8"/>
+          <p:cNvSpPr/>
+          <p:nvPr/>
+        </p:nvSpPr>
+        <p:spPr>
+          <a:xfrm>
+            <a:off x="4708716" y="2129028"/>
+            <a:ext cx="3021152" cy="274320"/>
           </a:xfrm>
           <a:prstGeom prst="rect">
             <a:avLst/>
@@ -8033,7 +8568,7 @@
             <a:r>
               <a:rPr lang="en-US" sz="1600" b="1" dirty="0">
                 <a:solidFill>
-                  <a:srgbClr val="7B61FF"/>
+                  <a:srgbClr val="7DCFFF"/>
                 </a:solidFill>
                 <a:latin typeface="Trebuchet MS" pitchFamily="34" charset="0"/>
                 <a:ea typeface="Trebuchet MS" pitchFamily="34" charset="-122"/>
@@ -8047,7 +8582,7 @@
       </p:sp>
       <p:sp>
         <p:nvSpPr>
-          <p:cNvPr id="11" name="Text 9"/>
+          <p:cNvPr id="13" name="Text 9"/>
           <p:cNvSpPr/>
           <p:nvPr/>
         </p:nvSpPr>
@@ -8072,7 +8607,7 @@
             <a:r>
               <a:rPr lang="en-US" sz="1300" dirty="0">
                 <a:solidFill>
-                  <a:srgbClr val="FFFFFF"/>
+                  <a:srgbClr val="C0CAF5"/>
                 </a:solidFill>
                 <a:latin typeface="Segoe UI" pitchFamily="34" charset="0"/>
                 <a:ea typeface="Segoe UI" pitchFamily="34" charset="-122"/>
@@ -8086,7 +8621,7 @@
       </p:sp>
       <p:sp>
         <p:nvSpPr>
-          <p:cNvPr id="12" name="Shape 10"/>
+          <p:cNvPr id="14" name="Shape 10"/>
           <p:cNvSpPr/>
           <p:nvPr/>
         </p:nvSpPr>
@@ -8101,11 +8636,11 @@
             </a:avLst>
           </a:prstGeom>
           <a:solidFill>
-            <a:srgbClr val="151522"/>
+            <a:srgbClr val="24283B"/>
           </a:solidFill>
           <a:ln w="19050">
             <a:solidFill>
-              <a:srgbClr val="FFE600"/>
+              <a:srgbClr val="E0AF68"/>
             </a:solidFill>
             <a:prstDash val="solid"/>
           </a:ln>
@@ -8113,7 +8648,7 @@
       </p:sp>
       <p:sp>
         <p:nvSpPr>
-          <p:cNvPr id="13" name="Shape 11"/>
+          <p:cNvPr id="15" name="Shape 11"/>
           <p:cNvSpPr/>
           <p:nvPr/>
         </p:nvSpPr>
@@ -8128,21 +8663,45 @@
             </a:avLst>
           </a:prstGeom>
           <a:solidFill>
-            <a:srgbClr val="FFE600"/>
+            <a:srgbClr val="E0AF68"/>
           </a:solidFill>
           <a:ln/>
         </p:spPr>
       </p:sp>
-      <p:sp>
-        <p:nvSpPr>
-          <p:cNvPr id="14" name="Text 12"/>
-          <p:cNvSpPr/>
-          <p:nvPr/>
-        </p:nvSpPr>
-        <p:spPr>
-          <a:xfrm>
-            <a:off x="8288665" y="2129028"/>
-            <a:ext cx="3268040" cy="274320"/>
+      <p:pic>
+        <p:nvPicPr>
+          <p:cNvPr id="16" name="Image 2" descr="preencoded.png">    </p:cNvPr>
+          <p:cNvPicPr>
+            <a:picLocks noChangeAspect="1"/>
+          </p:cNvPicPr>
+          <p:nvPr/>
+        </p:nvPicPr>
+        <p:blipFill>
+          <a:blip r:embed="rId3"/>
+          <a:stretch>
+            <a:fillRect/>
+          </a:stretch>
+        </p:blipFill>
+        <p:spPr>
+          <a:xfrm>
+            <a:off x="8261233" y="2147316"/>
+            <a:ext cx="219456" cy="219456"/>
+          </a:xfrm>
+          <a:prstGeom prst="rect">
+            <a:avLst/>
+          </a:prstGeom>
+        </p:spPr>
+      </p:pic>
+      <p:sp>
+        <p:nvSpPr>
+          <p:cNvPr id="17" name="Text 12"/>
+          <p:cNvSpPr/>
+          <p:nvPr/>
+        </p:nvSpPr>
+        <p:spPr>
+          <a:xfrm>
+            <a:off x="8535553" y="2129028"/>
+            <a:ext cx="3021152" cy="274320"/>
           </a:xfrm>
           <a:prstGeom prst="rect">
             <a:avLst/>
@@ -8160,7 +8719,7 @@
             <a:r>
               <a:rPr lang="en-US" sz="1600" b="1" dirty="0">
                 <a:solidFill>
-                  <a:srgbClr val="FFE600"/>
+                  <a:srgbClr val="E0AF68"/>
                 </a:solidFill>
                 <a:latin typeface="Trebuchet MS" pitchFamily="34" charset="0"/>
                 <a:ea typeface="Trebuchet MS" pitchFamily="34" charset="-122"/>
@@ -8174,7 +8733,7 @@
       </p:sp>
       <p:sp>
         <p:nvSpPr>
-          <p:cNvPr id="15" name="Text 13"/>
+          <p:cNvPr id="18" name="Text 13"/>
           <p:cNvSpPr/>
           <p:nvPr/>
         </p:nvSpPr>
@@ -8199,7 +8758,7 @@
             <a:r>
               <a:rPr lang="en-US" sz="1300" dirty="0">
                 <a:solidFill>
-                  <a:srgbClr val="FFFFFF"/>
+                  <a:srgbClr val="C0CAF5"/>
                 </a:solidFill>
                 <a:latin typeface="Segoe UI" pitchFamily="34" charset="0"/>
                 <a:ea typeface="Segoe UI" pitchFamily="34" charset="-122"/>
@@ -8213,7 +8772,7 @@
       </p:sp>
       <p:sp>
         <p:nvSpPr>
-          <p:cNvPr id="16" name="Shape 14"/>
+          <p:cNvPr id="19" name="Shape 14"/>
           <p:cNvSpPr/>
           <p:nvPr/>
         </p:nvSpPr>
@@ -8228,11 +8787,11 @@
             </a:avLst>
           </a:prstGeom>
           <a:solidFill>
-            <a:srgbClr val="151522"/>
+            <a:srgbClr val="24283B"/>
           </a:solidFill>
           <a:ln w="19050">
             <a:solidFill>
-              <a:srgbClr val="00F0FF"/>
+              <a:srgbClr val="7DCFFF"/>
             </a:solidFill>
             <a:prstDash val="solid"/>
           </a:ln>
@@ -8240,7 +8799,7 @@
       </p:sp>
       <p:sp>
         <p:nvSpPr>
-          <p:cNvPr id="17" name="Shape 15"/>
+          <p:cNvPr id="20" name="Shape 15"/>
           <p:cNvSpPr/>
           <p:nvPr/>
         </p:nvSpPr>
@@ -8255,21 +8814,45 @@
             </a:avLst>
           </a:prstGeom>
           <a:solidFill>
-            <a:srgbClr val="00F0FF"/>
+            <a:srgbClr val="7DCFFF"/>
           </a:solidFill>
           <a:ln/>
         </p:spPr>
       </p:sp>
-      <p:sp>
-        <p:nvSpPr>
-          <p:cNvPr id="18" name="Text 16"/>
-          <p:cNvSpPr/>
-          <p:nvPr/>
-        </p:nvSpPr>
-        <p:spPr>
-          <a:xfrm>
-            <a:off x="634990" y="3500628"/>
-            <a:ext cx="3268040" cy="274320"/>
+      <p:pic>
+        <p:nvPicPr>
+          <p:cNvPr id="21" name="Image 3" descr="preencoded.png">    </p:cNvPr>
+          <p:cNvPicPr>
+            <a:picLocks noChangeAspect="1"/>
+          </p:cNvPicPr>
+          <p:nvPr/>
+        </p:nvPicPr>
+        <p:blipFill>
+          <a:blip r:embed="rId4"/>
+          <a:stretch>
+            <a:fillRect/>
+          </a:stretch>
+        </p:blipFill>
+        <p:spPr>
+          <a:xfrm>
+            <a:off x="607558" y="3518916"/>
+            <a:ext cx="219456" cy="219456"/>
+          </a:xfrm>
+          <a:prstGeom prst="rect">
+            <a:avLst/>
+          </a:prstGeom>
+        </p:spPr>
+      </p:pic>
+      <p:sp>
+        <p:nvSpPr>
+          <p:cNvPr id="22" name="Text 16"/>
+          <p:cNvSpPr/>
+          <p:nvPr/>
+        </p:nvSpPr>
+        <p:spPr>
+          <a:xfrm>
+            <a:off x="881878" y="3500628"/>
+            <a:ext cx="3021152" cy="274320"/>
           </a:xfrm>
           <a:prstGeom prst="rect">
             <a:avLst/>
@@ -8287,7 +8870,7 @@
             <a:r>
               <a:rPr lang="en-US" sz="1600" b="1" dirty="0">
                 <a:solidFill>
-                  <a:srgbClr val="00F0FF"/>
+                  <a:srgbClr val="7DCFFF"/>
                 </a:solidFill>
                 <a:latin typeface="Trebuchet MS" pitchFamily="34" charset="0"/>
                 <a:ea typeface="Trebuchet MS" pitchFamily="34" charset="-122"/>
@@ -8301,7 +8884,7 @@
       </p:sp>
       <p:sp>
         <p:nvSpPr>
-          <p:cNvPr id="19" name="Text 17"/>
+          <p:cNvPr id="23" name="Text 17"/>
           <p:cNvSpPr/>
           <p:nvPr/>
         </p:nvSpPr>
@@ -8326,7 +8909,7 @@
             <a:r>
               <a:rPr lang="en-US" sz="1300" dirty="0">
                 <a:solidFill>
-                  <a:srgbClr val="FFFFFF"/>
+                  <a:srgbClr val="C0CAF5"/>
                 </a:solidFill>
                 <a:latin typeface="Segoe UI" pitchFamily="34" charset="0"/>
                 <a:ea typeface="Segoe UI" pitchFamily="34" charset="-122"/>
@@ -8340,7 +8923,7 @@
       </p:sp>
       <p:sp>
         <p:nvSpPr>
-          <p:cNvPr id="20" name="Shape 18"/>
+          <p:cNvPr id="24" name="Shape 18"/>
           <p:cNvSpPr/>
           <p:nvPr/>
         </p:nvSpPr>
@@ -8355,11 +8938,11 @@
             </a:avLst>
           </a:prstGeom>
           <a:solidFill>
-            <a:srgbClr val="151522"/>
+            <a:srgbClr val="24283B"/>
           </a:solidFill>
           <a:ln w="19050">
             <a:solidFill>
-              <a:srgbClr val="00FF9F"/>
+              <a:srgbClr val="9ECE6A"/>
             </a:solidFill>
             <a:prstDash val="solid"/>
           </a:ln>
@@ -8367,7 +8950,7 @@
       </p:sp>
       <p:sp>
         <p:nvSpPr>
-          <p:cNvPr id="21" name="Shape 19"/>
+          <p:cNvPr id="25" name="Shape 19"/>
           <p:cNvSpPr/>
           <p:nvPr/>
         </p:nvSpPr>
@@ -8382,21 +8965,45 @@
             </a:avLst>
           </a:prstGeom>
           <a:solidFill>
-            <a:srgbClr val="00FF9F"/>
+            <a:srgbClr val="9ECE6A"/>
           </a:solidFill>
           <a:ln/>
         </p:spPr>
       </p:sp>
-      <p:sp>
-        <p:nvSpPr>
-          <p:cNvPr id="22" name="Text 20"/>
-          <p:cNvSpPr/>
-          <p:nvPr/>
-        </p:nvSpPr>
-        <p:spPr>
-          <a:xfrm>
-            <a:off x="4461828" y="3500628"/>
-            <a:ext cx="3268040" cy="274320"/>
+      <p:pic>
+        <p:nvPicPr>
+          <p:cNvPr id="26" name="Image 4" descr="preencoded.png">    </p:cNvPr>
+          <p:cNvPicPr>
+            <a:picLocks noChangeAspect="1"/>
+          </p:cNvPicPr>
+          <p:nvPr/>
+        </p:nvPicPr>
+        <p:blipFill>
+          <a:blip r:embed="rId5"/>
+          <a:stretch>
+            <a:fillRect/>
+          </a:stretch>
+        </p:blipFill>
+        <p:spPr>
+          <a:xfrm>
+            <a:off x="4434396" y="3518916"/>
+            <a:ext cx="219456" cy="219456"/>
+          </a:xfrm>
+          <a:prstGeom prst="rect">
+            <a:avLst/>
+          </a:prstGeom>
+        </p:spPr>
+      </p:pic>
+      <p:sp>
+        <p:nvSpPr>
+          <p:cNvPr id="27" name="Text 20"/>
+          <p:cNvSpPr/>
+          <p:nvPr/>
+        </p:nvSpPr>
+        <p:spPr>
+          <a:xfrm>
+            <a:off x="4708716" y="3500628"/>
+            <a:ext cx="3021152" cy="274320"/>
           </a:xfrm>
           <a:prstGeom prst="rect">
             <a:avLst/>
@@ -8414,7 +9021,7 @@
             <a:r>
               <a:rPr lang="en-US" sz="1600" b="1" dirty="0">
                 <a:solidFill>
-                  <a:srgbClr val="00FF9F"/>
+                  <a:srgbClr val="9ECE6A"/>
                 </a:solidFill>
                 <a:latin typeface="Trebuchet MS" pitchFamily="34" charset="0"/>
                 <a:ea typeface="Trebuchet MS" pitchFamily="34" charset="-122"/>
@@ -8428,7 +9035,7 @@
       </p:sp>
       <p:sp>
         <p:nvSpPr>
-          <p:cNvPr id="23" name="Text 21"/>
+          <p:cNvPr id="28" name="Text 21"/>
           <p:cNvSpPr/>
           <p:nvPr/>
         </p:nvSpPr>
@@ -8455,7 +9062,7 @@
             <a:r>
               <a:rPr lang="en-US" sz="1300" dirty="0">
                 <a:solidFill>
-                  <a:srgbClr val="FFFFFF"/>
+                  <a:srgbClr val="C0CAF5"/>
                 </a:solidFill>
                 <a:latin typeface="Segoe UI" pitchFamily="34" charset="0"/>
                 <a:ea typeface="Segoe UI" pitchFamily="34" charset="-122"/>
@@ -8469,7 +9076,7 @@
       </p:sp>
       <p:sp>
         <p:nvSpPr>
-          <p:cNvPr id="24" name="Shape 22"/>
+          <p:cNvPr id="29" name="Shape 22"/>
           <p:cNvSpPr/>
           <p:nvPr/>
         </p:nvSpPr>
@@ -8484,11 +9091,11 @@
             </a:avLst>
           </a:prstGeom>
           <a:solidFill>
-            <a:srgbClr val="151522"/>
+            <a:srgbClr val="24283B"/>
           </a:solidFill>
           <a:ln w="19050">
             <a:solidFill>
-              <a:srgbClr val="FF0055"/>
+              <a:srgbClr val="F7768E"/>
             </a:solidFill>
             <a:prstDash val="solid"/>
           </a:ln>
@@ -8496,7 +9103,7 @@
       </p:sp>
       <p:sp>
         <p:nvSpPr>
-          <p:cNvPr id="25" name="Shape 23"/>
+          <p:cNvPr id="30" name="Shape 23"/>
           <p:cNvSpPr/>
           <p:nvPr/>
         </p:nvSpPr>
@@ -8511,21 +9118,45 @@
             </a:avLst>
           </a:prstGeom>
           <a:solidFill>
-            <a:srgbClr val="FF0055"/>
+            <a:srgbClr val="F7768E"/>
           </a:solidFill>
           <a:ln/>
         </p:spPr>
       </p:sp>
-      <p:sp>
-        <p:nvSpPr>
-          <p:cNvPr id="26" name="Text 24"/>
-          <p:cNvSpPr/>
-          <p:nvPr/>
-        </p:nvSpPr>
-        <p:spPr>
-          <a:xfrm>
-            <a:off x="8288665" y="3500628"/>
-            <a:ext cx="3268040" cy="274320"/>
+      <p:pic>
+        <p:nvPicPr>
+          <p:cNvPr id="31" name="Image 5" descr="preencoded.png">    </p:cNvPr>
+          <p:cNvPicPr>
+            <a:picLocks noChangeAspect="1"/>
+          </p:cNvPicPr>
+          <p:nvPr/>
+        </p:nvPicPr>
+        <p:blipFill>
+          <a:blip r:embed="rId6"/>
+          <a:stretch>
+            <a:fillRect/>
+          </a:stretch>
+        </p:blipFill>
+        <p:spPr>
+          <a:xfrm>
+            <a:off x="8261233" y="3518916"/>
+            <a:ext cx="219456" cy="219456"/>
+          </a:xfrm>
+          <a:prstGeom prst="rect">
+            <a:avLst/>
+          </a:prstGeom>
+        </p:spPr>
+      </p:pic>
+      <p:sp>
+        <p:nvSpPr>
+          <p:cNvPr id="32" name="Text 24"/>
+          <p:cNvSpPr/>
+          <p:nvPr/>
+        </p:nvSpPr>
+        <p:spPr>
+          <a:xfrm>
+            <a:off x="8535553" y="3500628"/>
+            <a:ext cx="3021152" cy="274320"/>
           </a:xfrm>
           <a:prstGeom prst="rect">
             <a:avLst/>
@@ -8543,7 +9174,7 @@
             <a:r>
               <a:rPr lang="en-US" sz="1600" b="1" dirty="0">
                 <a:solidFill>
-                  <a:srgbClr val="FF0055"/>
+                  <a:srgbClr val="F7768E"/>
                 </a:solidFill>
                 <a:latin typeface="Trebuchet MS" pitchFamily="34" charset="0"/>
                 <a:ea typeface="Trebuchet MS" pitchFamily="34" charset="-122"/>
@@ -8557,7 +9188,7 @@
       </p:sp>
       <p:sp>
         <p:nvSpPr>
-          <p:cNvPr id="27" name="Text 25"/>
+          <p:cNvPr id="33" name="Text 25"/>
           <p:cNvSpPr/>
           <p:nvPr/>
         </p:nvSpPr>
@@ -8582,7 +9213,7 @@
             <a:r>
               <a:rPr lang="en-US" sz="1300" dirty="0">
                 <a:solidFill>
-                  <a:srgbClr val="FFFFFF"/>
+                  <a:srgbClr val="C0CAF5"/>
                 </a:solidFill>
                 <a:latin typeface="Segoe UI" pitchFamily="34" charset="0"/>
                 <a:ea typeface="Segoe UI" pitchFamily="34" charset="-122"/>
@@ -8596,7 +9227,7 @@
       </p:sp>
       <p:sp>
         <p:nvSpPr>
-          <p:cNvPr id="28" name="Text 26"/>
+          <p:cNvPr id="34" name="Text 26"/>
           <p:cNvSpPr/>
           <p:nvPr/>
         </p:nvSpPr>
@@ -8621,7 +9252,7 @@
             <a:r>
               <a:rPr lang="en-US" sz="900" b="1" dirty="0">
                 <a:solidFill>
-                  <a:srgbClr val="A7A7B5"/>
+                  <a:srgbClr val="565F89"/>
                 </a:solidFill>
                 <a:latin typeface="Trebuchet MS" pitchFamily="34" charset="0"/>
                 <a:ea typeface="Trebuchet MS" pitchFamily="34" charset="-122"/>
@@ -8647,7 +9278,7 @@
     <p:bg>
       <p:bgPr>
         <a:solidFill>
-          <a:srgbClr val="0B0B12"/>
+          <a:srgbClr val="1A1B26"/>
         </a:solidFill>
       </p:bgPr>
     </p:bg>
@@ -8692,7 +9323,7 @@
             <a:r>
               <a:rPr lang="en-US" sz="3300" b="1" dirty="0">
                 <a:solidFill>
-                  <a:srgbClr val="FF2E88"/>
+                  <a:srgbClr val="7AA2F7"/>
                 </a:solidFill>
                 <a:latin typeface="Trebuchet MS" pitchFamily="34" charset="0"/>
                 <a:ea typeface="Trebuchet MS" pitchFamily="34" charset="-122"/>
@@ -8729,9 +9360,9 @@
               <a:buNone/>
             </a:pPr>
             <a:r>
-              <a:rPr lang="en-US" sz="2700" b="1" dirty="0">
-                <a:solidFill>
-                  <a:srgbClr val="FFFFFF"/>
+              <a:rPr lang="en-US" sz="2600" b="1" dirty="0">
+                <a:solidFill>
+                  <a:srgbClr val="C0CAF5"/>
                 </a:solidFill>
                 <a:latin typeface="Trebuchet MS" pitchFamily="34" charset="0"/>
                 <a:ea typeface="Trebuchet MS" pitchFamily="34" charset="-122"/>
@@ -8739,7 +9370,7 @@
               </a:rPr>
               <a:t>Un assistente che ti avvisa se la slide è poco leggibile</a:t>
             </a:r>
-            <a:endParaRPr lang="en-US" sz="2700" dirty="0"/>
+            <a:endParaRPr lang="en-US" sz="2600" dirty="0"/>
           </a:p>
         </p:txBody>
       </p:sp>
@@ -8760,11 +9391,11 @@
             </a:avLst>
           </a:prstGeom>
           <a:solidFill>
-            <a:srgbClr val="151522"/>
+            <a:srgbClr val="24283B"/>
           </a:solidFill>
           <a:ln w="19050">
             <a:solidFill>
-              <a:srgbClr val="FF2E88"/>
+              <a:srgbClr val="7AA2F7"/>
             </a:solidFill>
             <a:prstDash val="solid"/>
           </a:ln>
@@ -8787,21 +9418,45 @@
             </a:avLst>
           </a:prstGeom>
           <a:solidFill>
-            <a:srgbClr val="FF2E88"/>
+            <a:srgbClr val="7AA2F7"/>
           </a:solidFill>
           <a:ln/>
         </p:spPr>
       </p:sp>
-      <p:sp>
-        <p:nvSpPr>
-          <p:cNvPr id="6" name="Text 4"/>
-          <p:cNvSpPr/>
-          <p:nvPr/>
-        </p:nvSpPr>
-        <p:spPr>
-          <a:xfrm>
-            <a:off x="634990" y="2129028"/>
-            <a:ext cx="5143360" cy="274320"/>
+      <p:pic>
+        <p:nvPicPr>
+          <p:cNvPr id="6" name="Image 0" descr="preencoded.png">    </p:cNvPr>
+          <p:cNvPicPr>
+            <a:picLocks noChangeAspect="1"/>
+          </p:cNvPicPr>
+          <p:nvPr/>
+        </p:nvPicPr>
+        <p:blipFill>
+          <a:blip r:embed="rId1"/>
+          <a:stretch>
+            <a:fillRect/>
+          </a:stretch>
+        </p:blipFill>
+        <p:spPr>
+          <a:xfrm>
+            <a:off x="607558" y="2147316"/>
+            <a:ext cx="219456" cy="219456"/>
+          </a:xfrm>
+          <a:prstGeom prst="rect">
+            <a:avLst/>
+          </a:prstGeom>
+        </p:spPr>
+      </p:pic>
+      <p:sp>
+        <p:nvSpPr>
+          <p:cNvPr id="7" name="Text 4"/>
+          <p:cNvSpPr/>
+          <p:nvPr/>
+        </p:nvSpPr>
+        <p:spPr>
+          <a:xfrm>
+            <a:off x="881878" y="2129028"/>
+            <a:ext cx="4896472" cy="274320"/>
           </a:xfrm>
           <a:prstGeom prst="rect">
             <a:avLst/>
@@ -8819,7 +9474,7 @@
             <a:r>
               <a:rPr lang="en-US" sz="1600" b="1" dirty="0">
                 <a:solidFill>
-                  <a:srgbClr val="FF2E88"/>
+                  <a:srgbClr val="7AA2F7"/>
                 </a:solidFill>
                 <a:latin typeface="Trebuchet MS" pitchFamily="34" charset="0"/>
                 <a:ea typeface="Trebuchet MS" pitchFamily="34" charset="-122"/>
@@ -8833,7 +9488,7 @@
       </p:sp>
       <p:sp>
         <p:nvSpPr>
-          <p:cNvPr id="7" name="Text 5"/>
+          <p:cNvPr id="8" name="Text 5"/>
           <p:cNvSpPr/>
           <p:nvPr/>
         </p:nvSpPr>
@@ -8860,7 +9515,7 @@
             <a:r>
               <a:rPr lang="en-US" sz="1300" dirty="0">
                 <a:solidFill>
-                  <a:srgbClr val="FFFFFF"/>
+                  <a:srgbClr val="C0CAF5"/>
                 </a:solidFill>
                 <a:latin typeface="Segoe UI" pitchFamily="34" charset="0"/>
                 <a:ea typeface="Segoe UI" pitchFamily="34" charset="-122"/>
@@ -8874,7 +9529,7 @@
       </p:sp>
       <p:sp>
         <p:nvSpPr>
-          <p:cNvPr id="8" name="Text 6"/>
+          <p:cNvPr id="9" name="Text 6"/>
           <p:cNvSpPr/>
           <p:nvPr/>
         </p:nvSpPr>
@@ -8901,7 +9556,7 @@
             <a:r>
               <a:rPr lang="en-US" sz="1300" dirty="0">
                 <a:solidFill>
-                  <a:srgbClr val="FFFFFF"/>
+                  <a:srgbClr val="C0CAF5"/>
                 </a:solidFill>
                 <a:latin typeface="Segoe UI" pitchFamily="34" charset="0"/>
                 <a:ea typeface="Segoe UI" pitchFamily="34" charset="-122"/>
@@ -8915,7 +9570,7 @@
       </p:sp>
       <p:sp>
         <p:nvSpPr>
-          <p:cNvPr id="9" name="Text 7"/>
+          <p:cNvPr id="10" name="Text 7"/>
           <p:cNvSpPr/>
           <p:nvPr/>
         </p:nvSpPr>
@@ -8942,7 +9597,7 @@
             <a:r>
               <a:rPr lang="en-US" sz="1300" dirty="0">
                 <a:solidFill>
-                  <a:srgbClr val="FFFFFF"/>
+                  <a:srgbClr val="C0CAF5"/>
                 </a:solidFill>
                 <a:latin typeface="Segoe UI" pitchFamily="34" charset="0"/>
                 <a:ea typeface="Segoe UI" pitchFamily="34" charset="-122"/>
@@ -8956,7 +9611,7 @@
       </p:sp>
       <p:sp>
         <p:nvSpPr>
-          <p:cNvPr id="10" name="Text 8"/>
+          <p:cNvPr id="11" name="Text 8"/>
           <p:cNvSpPr/>
           <p:nvPr/>
         </p:nvSpPr>
@@ -8983,7 +9638,7 @@
             <a:r>
               <a:rPr lang="en-US" sz="1300" dirty="0">
                 <a:solidFill>
-                  <a:srgbClr val="FFFFFF"/>
+                  <a:srgbClr val="C0CAF5"/>
                 </a:solidFill>
                 <a:latin typeface="Segoe UI" pitchFamily="34" charset="0"/>
                 <a:ea typeface="Segoe UI" pitchFamily="34" charset="-122"/>
@@ -8997,7 +9652,7 @@
       </p:sp>
       <p:sp>
         <p:nvSpPr>
-          <p:cNvPr id="11" name="Shape 9"/>
+          <p:cNvPr id="12" name="Shape 9"/>
           <p:cNvSpPr/>
           <p:nvPr/>
         </p:nvSpPr>
@@ -9012,11 +9667,11 @@
             </a:avLst>
           </a:prstGeom>
           <a:solidFill>
-            <a:srgbClr val="151522"/>
+            <a:srgbClr val="24283B"/>
           </a:solidFill>
           <a:ln w="19050">
             <a:solidFill>
-              <a:srgbClr val="FFE600"/>
+              <a:srgbClr val="E0AF68"/>
             </a:solidFill>
             <a:prstDash val="solid"/>
           </a:ln>
@@ -9024,7 +9679,7 @@
       </p:sp>
       <p:sp>
         <p:nvSpPr>
-          <p:cNvPr id="12" name="Shape 10"/>
+          <p:cNvPr id="13" name="Shape 10"/>
           <p:cNvSpPr/>
           <p:nvPr/>
         </p:nvSpPr>
@@ -9039,21 +9694,45 @@
             </a:avLst>
           </a:prstGeom>
           <a:solidFill>
-            <a:srgbClr val="FFE600"/>
+            <a:srgbClr val="E0AF68"/>
           </a:solidFill>
           <a:ln/>
         </p:spPr>
       </p:sp>
-      <p:sp>
-        <p:nvSpPr>
-          <p:cNvPr id="13" name="Text 11"/>
-          <p:cNvSpPr/>
-          <p:nvPr/>
-        </p:nvSpPr>
-        <p:spPr>
-          <a:xfrm>
-            <a:off x="6413345" y="2129028"/>
-            <a:ext cx="5143360" cy="274320"/>
+      <p:pic>
+        <p:nvPicPr>
+          <p:cNvPr id="14" name="Image 1" descr="preencoded.png">    </p:cNvPr>
+          <p:cNvPicPr>
+            <a:picLocks noChangeAspect="1"/>
+          </p:cNvPicPr>
+          <p:nvPr/>
+        </p:nvPicPr>
+        <p:blipFill>
+          <a:blip r:embed="rId2"/>
+          <a:stretch>
+            <a:fillRect/>
+          </a:stretch>
+        </p:blipFill>
+        <p:spPr>
+          <a:xfrm>
+            <a:off x="6385913" y="2147316"/>
+            <a:ext cx="219456" cy="219456"/>
+          </a:xfrm>
+          <a:prstGeom prst="rect">
+            <a:avLst/>
+          </a:prstGeom>
+        </p:spPr>
+      </p:pic>
+      <p:sp>
+        <p:nvSpPr>
+          <p:cNvPr id="15" name="Text 11"/>
+          <p:cNvSpPr/>
+          <p:nvPr/>
+        </p:nvSpPr>
+        <p:spPr>
+          <a:xfrm>
+            <a:off x="6660233" y="2129028"/>
+            <a:ext cx="4896472" cy="274320"/>
           </a:xfrm>
           <a:prstGeom prst="rect">
             <a:avLst/>
@@ -9071,7 +9750,7 @@
             <a:r>
               <a:rPr lang="en-US" sz="1600" b="1" dirty="0">
                 <a:solidFill>
-                  <a:srgbClr val="FFE600"/>
+                  <a:srgbClr val="E0AF68"/>
                 </a:solidFill>
                 <a:latin typeface="Trebuchet MS" pitchFamily="34" charset="0"/>
                 <a:ea typeface="Trebuchet MS" pitchFamily="34" charset="-122"/>
@@ -9085,7 +9764,7 @@
       </p:sp>
       <p:sp>
         <p:nvSpPr>
-          <p:cNvPr id="14" name="Text 12"/>
+          <p:cNvPr id="16" name="Text 12"/>
           <p:cNvSpPr/>
           <p:nvPr/>
         </p:nvSpPr>
@@ -9112,13 +9791,13 @@
             <a:r>
               <a:rPr lang="en-US" sz="1300" dirty="0">
                 <a:solidFill>
-                  <a:srgbClr val="FFFFFF"/>
+                  <a:srgbClr val="C0CAF5"/>
                 </a:solidFill>
                 <a:latin typeface="Segoe UI" pitchFamily="34" charset="0"/>
                 <a:ea typeface="Segoe UI" pitchFamily="34" charset="-122"/>
                 <a:cs typeface="Segoe UI" pitchFamily="34" charset="-120"/>
               </a:rPr>
-              <a:t>⚠️ Attenzione: hai inserito troppo testo in questa slide!</a:t>
+              <a:t>• Avviso: Hai inserito troppo testo in questa slide!</a:t>
             </a:r>
             <a:endParaRPr lang="en-US" sz="1300" dirty="0"/>
           </a:p>
@@ -9126,7 +9805,7 @@
       </p:sp>
       <p:sp>
         <p:nvSpPr>
-          <p:cNvPr id="15" name="Text 13"/>
+          <p:cNvPr id="17" name="Text 13"/>
           <p:cNvSpPr/>
           <p:nvPr/>
         </p:nvSpPr>
@@ -9151,13 +9830,13 @@
             <a:r>
               <a:rPr lang="en-US" sz="1300" dirty="0">
                 <a:solidFill>
-                  <a:srgbClr val="FFFFFF"/>
+                  <a:srgbClr val="C0CAF5"/>
                 </a:solidFill>
                 <a:latin typeface="Segoe UI" pitchFamily="34" charset="0"/>
                 <a:ea typeface="Segoe UI" pitchFamily="34" charset="-122"/>
                 <a:cs typeface="Segoe UI" pitchFamily="34" charset="-120"/>
               </a:rPr>
-              <a:t>💡 Suggerimento: dividi il contenuto in due schede o in una seconda slide per renderla più chiara.</a:t>
+              <a:t>• Suggerimento: Dividi il contenuto in due schede o in una seconda slide per renderla più chiara.</a:t>
             </a:r>
             <a:endParaRPr lang="en-US" sz="1300" dirty="0"/>
           </a:p>
@@ -9165,7 +9844,7 @@
       </p:sp>
       <p:sp>
         <p:nvSpPr>
-          <p:cNvPr id="16" name="Text 14"/>
+          <p:cNvPr id="18" name="Text 14"/>
           <p:cNvSpPr/>
           <p:nvPr/>
         </p:nvSpPr>
@@ -9190,7 +9869,7 @@
             <a:r>
               <a:rPr lang="en-US" sz="900" b="1" dirty="0">
                 <a:solidFill>
-                  <a:srgbClr val="A7A7B5"/>
+                  <a:srgbClr val="565F89"/>
                 </a:solidFill>
                 <a:latin typeface="Trebuchet MS" pitchFamily="34" charset="0"/>
                 <a:ea typeface="Trebuchet MS" pitchFamily="34" charset="-122"/>
@@ -9216,7 +9895,7 @@
     <p:bg>
       <p:bgPr>
         <a:solidFill>
-          <a:srgbClr val="0B0B12"/>
+          <a:srgbClr val="1A1B26"/>
         </a:solidFill>
       </p:bgPr>
     </p:bg>
@@ -9261,7 +9940,7 @@
             <a:r>
               <a:rPr lang="en-US" sz="3300" b="1" dirty="0">
                 <a:solidFill>
-                  <a:srgbClr val="FF2E88"/>
+                  <a:srgbClr val="7AA2F7"/>
                 </a:solidFill>
                 <a:latin typeface="Trebuchet MS" pitchFamily="34" charset="0"/>
                 <a:ea typeface="Trebuchet MS" pitchFamily="34" charset="-122"/>
@@ -9298,9 +9977,9 @@
               <a:buNone/>
             </a:pPr>
             <a:r>
-              <a:rPr lang="en-US" sz="2700" b="1" dirty="0">
-                <a:solidFill>
-                  <a:srgbClr val="FFFFFF"/>
+              <a:rPr lang="en-US" sz="2600" b="1" dirty="0">
+                <a:solidFill>
+                  <a:srgbClr val="C0CAF5"/>
                 </a:solidFill>
                 <a:latin typeface="Trebuchet MS" pitchFamily="34" charset="0"/>
                 <a:ea typeface="Trebuchet MS" pitchFamily="34" charset="-122"/>
@@ -9308,7 +9987,7 @@
               </a:rPr>
               <a:t>La sintassi perfetta da far scrivere agli assistenti AI</a:t>
             </a:r>
-            <a:endParaRPr lang="en-US" sz="2700" dirty="0"/>
+            <a:endParaRPr lang="en-US" sz="2600" dirty="0"/>
           </a:p>
         </p:txBody>
       </p:sp>
@@ -9329,11 +10008,11 @@
             </a:avLst>
           </a:prstGeom>
           <a:solidFill>
-            <a:srgbClr val="151522"/>
+            <a:srgbClr val="24283B"/>
           </a:solidFill>
           <a:ln w="19050">
             <a:solidFill>
-              <a:srgbClr val="2E2E48"/>
+              <a:srgbClr val="2F354A"/>
             </a:solidFill>
             <a:prstDash val="solid"/>
           </a:ln>
@@ -9366,13 +10045,13 @@
             <a:r>
               <a:rPr lang="en-US" sz="1500" b="1" dirty="0">
                 <a:solidFill>
-                  <a:srgbClr val="FF2E88"/>
+                  <a:srgbClr val="7AA2F7"/>
                 </a:solidFill>
                 <a:latin typeface="Trebuchet MS" pitchFamily="34" charset="0"/>
                 <a:ea typeface="Trebuchet MS" pitchFamily="34" charset="-122"/>
                 <a:cs typeface="Trebuchet MS" pitchFamily="34" charset="-120"/>
               </a:rPr>
-              <a:t>Chiedere all</a:t>
+              <a:t>Chiedere all'AI codice normale (HTML/CSS)</a:t>
             </a:r>
             <a:endParaRPr lang="en-US" sz="1500" dirty="0"/>
           </a:p>
@@ -9395,11 +10074,11 @@
             </a:avLst>
           </a:prstGeom>
           <a:solidFill>
-            <a:srgbClr val="151522"/>
+            <a:srgbClr val="24283B"/>
           </a:solidFill>
           <a:ln w="19050">
             <a:solidFill>
-              <a:srgbClr val="2E2E48"/>
+              <a:srgbClr val="2F354A"/>
             </a:solidFill>
             <a:prstDash val="solid"/>
           </a:ln>
@@ -9432,13 +10111,13 @@
             <a:r>
               <a:rPr lang="en-US" sz="1500" b="1" dirty="0">
                 <a:solidFill>
-                  <a:srgbClr val="FF2E88"/>
+                  <a:srgbClr val="7AA2F7"/>
                 </a:solidFill>
                 <a:latin typeface="Trebuchet MS" pitchFamily="34" charset="0"/>
                 <a:ea typeface="Trebuchet MS" pitchFamily="34" charset="-122"/>
                 <a:cs typeface="Trebuchet MS" pitchFamily="34" charset="-120"/>
               </a:rPr>
-              <a:t>Chiedere all</a:t>
+              <a:t>Chiedere all'AI testo Yumia</a:t>
             </a:r>
             <a:endParaRPr lang="en-US" sz="1500" dirty="0"/>
           </a:p>
@@ -9459,11 +10138,11 @@
             <a:avLst/>
           </a:prstGeom>
           <a:solidFill>
-            <a:srgbClr val="151522"/>
+            <a:srgbClr val="24283B"/>
           </a:solidFill>
           <a:ln w="19050">
             <a:solidFill>
-              <a:srgbClr val="FF2E88"/>
+              <a:srgbClr val="7AA2F7"/>
             </a:solidFill>
             <a:prstDash val="solid"/>
           </a:ln>
@@ -9496,7 +10175,7 @@
             <a:r>
               <a:rPr lang="en-US" sz="1100" b="1" dirty="0">
                 <a:solidFill>
-                  <a:srgbClr val="FFFFFF"/>
+                  <a:srgbClr val="C0CAF5"/>
                 </a:solidFill>
                 <a:latin typeface="Trebuchet MS" pitchFamily="34" charset="0"/>
                 <a:ea typeface="Trebuchet MS" pitchFamily="34" charset="-122"/>
@@ -9525,11 +10204,11 @@
             </a:avLst>
           </a:prstGeom>
           <a:solidFill>
-            <a:srgbClr val="151522"/>
+            <a:srgbClr val="24283B"/>
           </a:solidFill>
           <a:ln w="19050">
             <a:solidFill>
-              <a:srgbClr val="FF0055"/>
+              <a:srgbClr val="F7768E"/>
             </a:solidFill>
             <a:prstDash val="solid"/>
           </a:ln>
@@ -9562,7 +10241,7 @@
             <a:r>
               <a:rPr lang="en-US" sz="1000" b="1" dirty="0">
                 <a:solidFill>
-                  <a:srgbClr val="FF0055"/>
+                  <a:srgbClr val="F7768E"/>
                 </a:solidFill>
                 <a:latin typeface="Trebuchet MS" pitchFamily="34" charset="0"/>
                 <a:ea typeface="Trebuchet MS" pitchFamily="34" charset="-122"/>
@@ -9603,7 +10282,7 @@
             <a:r>
               <a:rPr lang="en-US" sz="1300" dirty="0">
                 <a:solidFill>
-                  <a:srgbClr val="FFFFFF"/>
+                  <a:srgbClr val="C0CAF5"/>
                 </a:solidFill>
                 <a:latin typeface="Segoe UI" pitchFamily="34" charset="0"/>
                 <a:ea typeface="Segoe UI" pitchFamily="34" charset="-122"/>
@@ -9644,7 +10323,7 @@
             <a:r>
               <a:rPr lang="en-US" sz="1300" dirty="0">
                 <a:solidFill>
-                  <a:srgbClr val="FFFFFF"/>
+                  <a:srgbClr val="C0CAF5"/>
                 </a:solidFill>
                 <a:latin typeface="Segoe UI" pitchFamily="34" charset="0"/>
                 <a:ea typeface="Segoe UI" pitchFamily="34" charset="-122"/>
@@ -9685,7 +10364,7 @@
             <a:r>
               <a:rPr lang="en-US" sz="1300" dirty="0">
                 <a:solidFill>
-                  <a:srgbClr val="FFFFFF"/>
+                  <a:srgbClr val="C0CAF5"/>
                 </a:solidFill>
                 <a:latin typeface="Segoe UI" pitchFamily="34" charset="0"/>
                 <a:ea typeface="Segoe UI" pitchFamily="34" charset="-122"/>
@@ -9714,11 +10393,11 @@
             </a:avLst>
           </a:prstGeom>
           <a:solidFill>
-            <a:srgbClr val="151522"/>
+            <a:srgbClr val="24283B"/>
           </a:solidFill>
           <a:ln w="19050">
             <a:solidFill>
-              <a:srgbClr val="00FF9F"/>
+              <a:srgbClr val="9ECE6A"/>
             </a:solidFill>
             <a:prstDash val="solid"/>
           </a:ln>
@@ -9751,7 +10430,7 @@
             <a:r>
               <a:rPr lang="en-US" sz="1000" b="1" dirty="0">
                 <a:solidFill>
-                  <a:srgbClr val="00FF9F"/>
+                  <a:srgbClr val="9ECE6A"/>
                 </a:solidFill>
                 <a:latin typeface="Trebuchet MS" pitchFamily="34" charset="0"/>
                 <a:ea typeface="Trebuchet MS" pitchFamily="34" charset="-122"/>
@@ -9792,7 +10471,7 @@
             <a:r>
               <a:rPr lang="en-US" sz="1300" dirty="0">
                 <a:solidFill>
-                  <a:srgbClr val="FFFFFF"/>
+                  <a:srgbClr val="C0CAF5"/>
                 </a:solidFill>
                 <a:latin typeface="Segoe UI" pitchFamily="34" charset="0"/>
                 <a:ea typeface="Segoe UI" pitchFamily="34" charset="-122"/>
@@ -9833,7 +10512,7 @@
             <a:r>
               <a:rPr lang="en-US" sz="1300" dirty="0">
                 <a:solidFill>
-                  <a:srgbClr val="FFFFFF"/>
+                  <a:srgbClr val="C0CAF5"/>
                 </a:solidFill>
                 <a:latin typeface="Segoe UI" pitchFamily="34" charset="0"/>
                 <a:ea typeface="Segoe UI" pitchFamily="34" charset="-122"/>
@@ -9874,7 +10553,7 @@
             <a:r>
               <a:rPr lang="en-US" sz="1300" dirty="0">
                 <a:solidFill>
-                  <a:srgbClr val="FFFFFF"/>
+                  <a:srgbClr val="C0CAF5"/>
                 </a:solidFill>
                 <a:latin typeface="Segoe UI" pitchFamily="34" charset="0"/>
                 <a:ea typeface="Segoe UI" pitchFamily="34" charset="-122"/>
@@ -9913,7 +10592,7 @@
             <a:r>
               <a:rPr lang="en-US" sz="900" b="1" dirty="0">
                 <a:solidFill>
-                  <a:srgbClr val="A7A7B5"/>
+                  <a:srgbClr val="565F89"/>
                 </a:solidFill>
                 <a:latin typeface="Trebuchet MS" pitchFamily="34" charset="0"/>
                 <a:ea typeface="Trebuchet MS" pitchFamily="34" charset="-122"/>

--- a/presentation.pptx
+++ b/presentation.pptx
@@ -118,6 +118,326 @@
 </p:presentation>
 </file>
 
+<file path=ppt/charts/chart1.xml><?xml version="1.0" encoding="utf-8"?>
+<c:chartSpace xmlns:c="http://schemas.openxmlformats.org/drawingml/2006/chart" xmlns:a="http://schemas.openxmlformats.org/drawingml/2006/main" xmlns:r="http://schemas.openxmlformats.org/officeDocument/2006/relationships">
+  <c:date1904 val="0"/>
+  <c:roundedCorners val="1"/>
+  <c:chart>
+    <c:title>
+      <c:tx>
+        <c:rich>
+          <a:bodyPr/>
+          <a:lstStyle/>
+          <a:p>
+            <a:pPr>
+              <a:defRPr sz="1800" b="0" i="0" u="none" strike="noStrike">
+                <a:solidFill>
+                  <a:srgbClr val="C0CAF5"/>
+                </a:solidFill>
+                <a:latin typeface="Trebuchet MS"/>
+              </a:defRPr>
+            </a:pPr>
+            <a:r>
+              <a:rPr sz="1800" b="0" i="0" u="none" strike="noStrike">
+                <a:solidFill>
+                  <a:srgbClr val="C0CAF5"/>
+                </a:solidFill>
+                <a:latin typeface="Trebuchet MS"/>
+              </a:rPr>
+              <a:t>Minuti per creare 10 slide</a:t>
+            </a:r>
+          </a:p>
+        </c:rich>
+      </c:tx>
+      <c:layout/>
+      <c:overlay val="0"/>
+    </c:title>
+    <c:autoTitleDeleted val="0"/>
+    <c:plotArea>
+      <c:layout/>
+      <c:barChart>
+        <c:barDir val="col"/>
+        <c:grouping val="clustered"/>
+        <c:varyColors val="0"/>
+        <c:ser>
+          <c:idx val="0"/>
+          <c:order val="0"/>
+          <c:tx>
+            <c:strRef>
+              <c:f>Sheet1!$B$1</c:f>
+              <c:strCache>
+                <c:ptCount val="1"/>
+                <c:pt idx="0">
+                  <c:v>Minuti per creare 10 slide</c:v>
+                </c:pt>
+              </c:strCache>
+            </c:strRef>
+          </c:tx>
+          <c:spPr>
+            <a:solidFill>
+              <a:srgbClr val="7AA2F7"/>
+            </a:solidFill>
+            <a:effectLst/>
+          </c:spPr>
+          <c:invertIfNegative val="0"/>
+          <c:dLbls>
+            <c:numFmt formatCode="#,##0" sourceLinked="0"/>
+            <c:txPr>
+              <a:bodyPr/>
+              <a:lstStyle/>
+              <a:p>
+                <a:pPr>
+                  <a:defRPr b="0" i="0" strike="noStrike" sz="1200" u="none">
+                    <a:solidFill>
+                      <a:srgbClr val="000000"/>
+                    </a:solidFill>
+                    <a:latin typeface="Arial"/>
+                  </a:defRPr>
+                </a:pPr>
+              </a:p>
+            </c:txPr>
+            <c:showLegendKey val="0"/>
+            <c:showVal val="0"/>
+            <c:showCatName val="0"/>
+            <c:showSerName val="0"/>
+            <c:showPercent val="0"/>
+            <c:showBubbleSize val="0"/>
+            <c:showLeaderLines val="0"/>
+          </c:dLbls>
+          <c:dPt>
+            <c:idx val="0"/>
+            <c:invertIfNegative val="0"/>
+            <c:bubble3D val="0"/>
+            <c:spPr>
+              <a:solidFill>
+                <a:srgbClr val="7aa2f7"/>
+              </a:solidFill>
+              <a:effectLst/>
+            </c:spPr>
+          </c:dPt>
+          <c:dPt>
+            <c:idx val="1"/>
+            <c:invertIfNegative val="0"/>
+            <c:bubble3D val="0"/>
+            <c:spPr>
+              <a:solidFill>
+                <a:srgbClr val="7dcfff"/>
+              </a:solidFill>
+              <a:effectLst/>
+            </c:spPr>
+          </c:dPt>
+          <c:dPt>
+            <c:idx val="2"/>
+            <c:invertIfNegative val="0"/>
+            <c:bubble3D val="0"/>
+            <c:spPr>
+              <a:solidFill>
+                <a:srgbClr val="bb9af7"/>
+              </a:solidFill>
+              <a:effectLst/>
+            </c:spPr>
+          </c:dPt>
+          <c:cat>
+            <c:multiLvlStrRef>
+              <c:f>Sheet1!$A$2:$A$4</c:f>
+              <c:multiLvlStrCache>
+                <c:ptCount val="3"/>
+                <c:lvl>
+                  <c:pt idx="0">
+                    <c:v>PowerPoint</c:v>
+                  </c:pt>
+                  <c:pt idx="1">
+                    <c:v>Canva</c:v>
+                  </c:pt>
+                  <c:pt idx="2">
+                    <c:v>Yumia</c:v>
+                  </c:pt>
+                </c:lvl>
+              </c:multiLvlStrCache>
+            </c:multiLvlStrRef>
+          </c:cat>
+          <c:val>
+            <c:numRef>
+              <c:f>Sheet1!$B$2:$B$4</c:f>
+              <c:numCache>
+                <c:formatCode>General</c:formatCode>
+                <c:ptCount val="3"/>
+                <c:pt idx="0">
+                  <c:v>90</c:v>
+                </c:pt>
+                <c:pt idx="1">
+                  <c:v>60</c:v>
+                </c:pt>
+                <c:pt idx="2">
+                  <c:v>5</c:v>
+                </c:pt>
+              </c:numCache>
+            </c:numRef>
+          </c:val>
+        </c:ser>
+        <c:dLbls>
+          <c:numFmt formatCode="#,##0" sourceLinked="0"/>
+          <c:txPr>
+            <a:bodyPr/>
+            <a:lstStyle/>
+            <a:p>
+              <a:pPr>
+                <a:defRPr b="0" i="0" strike="noStrike" sz="1200" u="none">
+                  <a:solidFill>
+                    <a:srgbClr val="000000"/>
+                  </a:solidFill>
+                  <a:latin typeface="Arial"/>
+                </a:defRPr>
+              </a:pPr>
+            </a:p>
+          </c:txPr>
+          <c:showLegendKey val="0"/>
+          <c:showVal val="0"/>
+          <c:showCatName val="0"/>
+          <c:showSerName val="0"/>
+          <c:showPercent val="0"/>
+          <c:showBubbleSize val="0"/>
+          <c:showLeaderLines val="0"/>
+        </c:dLbls>
+        <c:gapWidth val="150"/>
+        <c:overlap val="0"/>
+        <c:axId val="2094734554"/>
+        <c:axId val="2094734552"/>
+        <c:axId val="2094734556"/>
+      </c:barChart>
+      <c:catAx>
+        <c:axId val="2094734554"/>
+        <c:scaling>
+          <c:orientation val="minMax"/>
+        </c:scaling>
+        <c:delete val="0"/>
+        <c:axPos val="b"/>
+        <c:numFmt formatCode="General" sourceLinked="1"/>
+        <c:majorTickMark val="out"/>
+        <c:minorTickMark val="none"/>
+        <c:tickLblPos val="low"/>
+        <c:spPr>
+          <a:ln w="12700" cap="flat">
+            <a:solidFill>
+              <a:srgbClr val="888888"/>
+            </a:solidFill>
+            <a:prstDash val="solid"/>
+            <a:round/>
+          </a:ln>
+        </c:spPr>
+        <c:txPr>
+          <a:bodyPr/>
+          <a:lstStyle/>
+          <a:p>
+            <a:pPr>
+              <a:defRPr sz="1200" b="0" i="0" u="none" strike="noStrike">
+                <a:solidFill>
+                  <a:srgbClr val="000000"/>
+                </a:solidFill>
+                <a:latin typeface="Arial"/>
+              </a:defRPr>
+            </a:pPr>
+            <a:endParaRPr lang="en-US"/>
+          </a:p>
+        </c:txPr>
+        <c:crossAx val="2094734552"/>
+        <c:crosses val="autoZero"/>
+        <c:auto val="1"/>
+        <c:lblAlgn val="ctr"/>
+        <c:noMultiLvlLbl val="1"/>
+      </c:catAx>
+      <c:valAx>
+        <c:axId val="2094734552"/>
+        <c:scaling>
+          <c:orientation val="minMax"/>
+        </c:scaling>
+        <c:delete val="0"/>
+        <c:axPos val="l"/>
+        <c:majorGridlines>
+          <c:spPr>
+            <a:ln w="12700" cap="flat">
+              <a:solidFill>
+                <a:srgbClr val="888888"/>
+              </a:solidFill>
+              <a:prstDash val="solid"/>
+              <a:round/>
+            </a:ln>
+          </c:spPr>
+        </c:majorGridlines>
+        <c:numFmt formatCode="General" sourceLinked="0"/>
+        <c:majorTickMark val="out"/>
+        <c:minorTickMark val="none"/>
+        <c:tickLblPos val="nextTo"/>
+        <c:spPr>
+          <a:ln w="12700" cap="flat">
+            <a:solidFill>
+              <a:srgbClr val="888888"/>
+            </a:solidFill>
+            <a:prstDash val="solid"/>
+            <a:round/>
+          </a:ln>
+        </c:spPr>
+        <c:txPr>
+          <a:bodyPr/>
+          <a:lstStyle/>
+          <a:p>
+            <a:pPr>
+              <a:defRPr sz="1200" b="0" i="0" u="none" strike="noStrike">
+                <a:solidFill>
+                  <a:srgbClr val="000000"/>
+                </a:solidFill>
+                <a:latin typeface="Arial"/>
+              </a:defRPr>
+            </a:pPr>
+            <a:endParaRPr lang="en-US"/>
+          </a:p>
+        </c:txPr>
+        <c:crossAx val="2094734554"/>
+        <c:crosses val="autoZero"/>
+        <c:crossBetween val="between"/>
+      </c:valAx>
+      <c:spPr>
+        <a:noFill/>
+        <a:ln>
+          <a:noFill/>
+        </a:ln>
+        <a:effectLst/>
+      </c:spPr>
+    </c:plotArea>
+    <c:legend>
+      <c:legendPos val="b"/>
+      <c:overlay val="0"/>
+      <c:txPr>
+        <a:bodyPr/>
+        <a:lstStyle/>
+        <a:p>
+          <a:pPr>
+            <a:defRPr>
+              <a:solidFill>
+                <a:srgbClr val="565F89"/>
+              </a:solidFill>
+            </a:defRPr>
+          </a:pPr>
+          <a:endParaRPr lang="en-US"/>
+        </a:p>
+      </c:txPr>
+    </c:legend>
+    <c:plotVisOnly val="1"/>
+    <c:dispBlanksAs val="span"/>
+  </c:chart>
+  <c:spPr>
+    <a:noFill/>
+    <a:ln>
+      <a:noFill/>
+    </a:ln>
+    <a:effectLst/>
+  </c:spPr>
+  <c:externalData r:id="rId1">
+    <c:autoUpdate val="0"/>
+  </c:externalData>
+</c:chartSpace>
+</file>
+
 <file path=ppt/notesMasters/notesMaster1.xml><?xml version="1.0" encoding="utf-8"?>
 <p:notesMaster xmlns:a="http://schemas.openxmlformats.org/drawingml/2006/main" xmlns:r="http://schemas.openxmlformats.org/officeDocument/2006/relationships" xmlns:p="http://schemas.openxmlformats.org/presentationml/2006/main">
   <p:cSld>
@@ -602,10 +922,8 @@
           <a:p>
             <a:r>
               <a:rPr lang="en-US" dirty="0"/>
-              <a:t>In sintesi, i tre punti di forza di Yumia sono:
-1. Velocità: non perdi tempo con la grafica;
-2. Coerenza: tutte le slide sono coordinate tra loro;
-3. Semplicità: un solo file di testo facile da gestire e condividere.</a:t>
+              <a:t>In questa slide vediamo un grafico a barre che mette a confronto il tempo necessario per realizzare 10 slide:
+con PowerPoint o Canva si perdono tra i 60 e i 90 minuti per allineare forme e caselle, mentre con Yumia bastano appena 5 minuti di scrittura.</a:t>
             </a:r>
             <a:endParaRPr lang="en-US" dirty="0"/>
           </a:p>
@@ -694,7 +1012,7 @@
             <a:r>
               <a:rPr lang="en-US" dirty="0"/>
               <a:t>Il progetto è in continua evoluzione.
-In futuro puntiamo ad aggiungere nuovi stili grafici, la possibilità di lavorare in gruppo contemporaneamente via web e un'anteprima in tempo reale ancora più fluida.</a:t>
+Nella roadmap futura prevediamo tre fasi: nuovi temi grafici, collaborazione live tra compagni di gruppo e anteprima istantanea in tempo reale.</a:t>
             </a:r>
             <a:endParaRPr lang="en-US" dirty="0"/>
           </a:p>
@@ -2027,11 +2345,11 @@
         <p:spPr>
           <a:xfrm>
             <a:off x="406390" y="1701800"/>
-            <a:ext cx="3725240" cy="1270000"/>
+            <a:ext cx="3708307" cy="1016000"/>
           </a:xfrm>
           <a:prstGeom prst="roundRect">
             <a:avLst>
-              <a:gd name="adj" fmla="val 5760"/>
+              <a:gd name="adj" fmla="val 7200"/>
             </a:avLst>
           </a:prstGeom>
           <a:solidFill>
@@ -2047,60 +2365,14 @@
       </p:sp>
       <p:sp>
         <p:nvSpPr>
-          <p:cNvPr id="7" name="Shape 5"/>
-          <p:cNvSpPr/>
-          <p:nvPr/>
-        </p:nvSpPr>
-        <p:spPr>
-          <a:xfrm>
-            <a:off x="424678" y="1738376"/>
-            <a:ext cx="54864" cy="1196848"/>
-          </a:xfrm>
-          <a:prstGeom prst="roundRect">
-            <a:avLst>
-              <a:gd name="adj" fmla="val 50000"/>
-            </a:avLst>
-          </a:prstGeom>
-          <a:solidFill>
-            <a:srgbClr val="7AA2F7"/>
-          </a:solidFill>
-          <a:ln/>
-        </p:spPr>
-      </p:sp>
-      <p:pic>
-        <p:nvPicPr>
-          <p:cNvPr id="8" name="Image 0" descr="preencoded.png">    </p:cNvPr>
-          <p:cNvPicPr>
-            <a:picLocks noChangeAspect="1"/>
-          </p:cNvPicPr>
-          <p:nvPr/>
-        </p:nvPicPr>
-        <p:blipFill>
-          <a:blip r:embed="rId1"/>
-          <a:stretch>
-            <a:fillRect/>
-          </a:stretch>
-        </p:blipFill>
-        <p:spPr>
-          <a:xfrm>
-            <a:off x="607558" y="1829816"/>
-            <a:ext cx="219456" cy="219456"/>
-          </a:xfrm>
-          <a:prstGeom prst="rect">
-            <a:avLst/>
-          </a:prstGeom>
-        </p:spPr>
-      </p:pic>
-      <p:sp>
-        <p:nvSpPr>
-          <p:cNvPr id="9" name="Text 6"/>
-          <p:cNvSpPr/>
-          <p:nvPr/>
-        </p:nvSpPr>
-        <p:spPr>
-          <a:xfrm>
-            <a:off x="881878" y="1811528"/>
-            <a:ext cx="3021152" cy="274320"/>
+          <p:cNvPr id="7" name="Text 5"/>
+          <p:cNvSpPr/>
+          <p:nvPr/>
+        </p:nvSpPr>
+        <p:spPr>
+          <a:xfrm>
+            <a:off x="497830" y="1793240"/>
+            <a:ext cx="3525427" cy="201168"/>
           </a:xfrm>
           <a:prstGeom prst="rect">
             <a:avLst/>
@@ -2112,77 +2384,116 @@
           <a:bodyPr wrap="square" rtlCol="0" anchor="ctr"/>
           <a:lstStyle/>
           <a:p>
-            <a:pPr indent="0" marL="0">
-              <a:buNone/>
-            </a:pPr>
-            <a:r>
-              <a:rPr lang="en-US" sz="1600" b="1" dirty="0">
-                <a:solidFill>
-                  <a:srgbClr val="7AA2F7"/>
+            <a:pPr algn="ctr" indent="0" marL="0">
+              <a:buNone/>
+            </a:pPr>
+            <a:r>
+              <a:rPr lang="en-US" sz="1000" b="1" dirty="0">
+                <a:solidFill>
+                  <a:srgbClr val="565F89"/>
                 </a:solidFill>
                 <a:latin typeface="Trebuchet MS" pitchFamily="34" charset="0"/>
                 <a:ea typeface="Trebuchet MS" pitchFamily="34" charset="-122"/>
                 <a:cs typeface="Trebuchet MS" pitchFamily="34" charset="-120"/>
               </a:rPr>
-              <a:t>1. Scrittura Semplice</a:t>
-            </a:r>
-            <a:endParaRPr lang="en-US" sz="1600" dirty="0"/>
-          </a:p>
-        </p:txBody>
-      </p:sp>
-      <p:sp>
-        <p:nvSpPr>
-          <p:cNvPr id="10" name="Text 7"/>
-          <p:cNvSpPr/>
-          <p:nvPr/>
-        </p:nvSpPr>
-        <p:spPr>
-          <a:xfrm>
-            <a:off x="584185" y="2235200"/>
-            <a:ext cx="3369649" cy="482600"/>
-          </a:xfrm>
-          <a:prstGeom prst="rect">
-            <a:avLst/>
-          </a:prstGeom>
-          <a:noFill/>
-          <a:ln/>
-        </p:spPr>
-        <p:txBody>
-          <a:bodyPr wrap="square" lIns="0" tIns="0" rIns="0" bIns="0" rtlCol="0" anchor="t"/>
-          <a:lstStyle/>
-          <a:p>
-            <a:pPr algn="l" indent="0" marL="0">
-              <a:buNone/>
-            </a:pPr>
-            <a:r>
-              <a:rPr lang="en-US" sz="1300" dirty="0">
-                <a:solidFill>
-                  <a:srgbClr val="C0CAF5"/>
+              <a:t>FILE DI TESTO SORGENTE</a:t>
+            </a:r>
+            <a:endParaRPr lang="en-US" sz="1000" dirty="0"/>
+          </a:p>
+        </p:txBody>
+      </p:sp>
+      <p:sp>
+        <p:nvSpPr>
+          <p:cNvPr id="8" name="Text 6"/>
+          <p:cNvSpPr/>
+          <p:nvPr/>
+        </p:nvSpPr>
+        <p:spPr>
+          <a:xfrm>
+            <a:off x="497830" y="2012696"/>
+            <a:ext cx="3525427" cy="402336"/>
+          </a:xfrm>
+          <a:prstGeom prst="rect">
+            <a:avLst/>
+          </a:prstGeom>
+          <a:noFill/>
+          <a:ln/>
+        </p:spPr>
+        <p:txBody>
+          <a:bodyPr wrap="square" rtlCol="0" anchor="ctr"/>
+          <a:lstStyle/>
+          <a:p>
+            <a:pPr algn="ctr" indent="0" marL="0">
+              <a:buNone/>
+            </a:pPr>
+            <a:r>
+              <a:rPr lang="en-US" sz="2600" b="1" dirty="0">
+                <a:solidFill>
+                  <a:srgbClr val="7AA2F7"/>
+                </a:solidFill>
+                <a:latin typeface="Trebuchet MS" pitchFamily="34" charset="0"/>
+                <a:ea typeface="Trebuchet MS" pitchFamily="34" charset="-122"/>
+                <a:cs typeface="Trebuchet MS" pitchFamily="34" charset="-120"/>
+              </a:rPr>
+              <a:t>1</a:t>
+            </a:r>
+            <a:endParaRPr lang="en-US" sz="2600" dirty="0"/>
+          </a:p>
+        </p:txBody>
+      </p:sp>
+      <p:sp>
+        <p:nvSpPr>
+          <p:cNvPr id="9" name="Text 7"/>
+          <p:cNvSpPr/>
+          <p:nvPr/>
+        </p:nvSpPr>
+        <p:spPr>
+          <a:xfrm>
+            <a:off x="497830" y="2433320"/>
+            <a:ext cx="3525427" cy="201168"/>
+          </a:xfrm>
+          <a:prstGeom prst="rect">
+            <a:avLst/>
+          </a:prstGeom>
+          <a:noFill/>
+          <a:ln/>
+        </p:spPr>
+        <p:txBody>
+          <a:bodyPr wrap="square" rtlCol="0" anchor="ctr"/>
+          <a:lstStyle/>
+          <a:p>
+            <a:pPr algn="ctr" indent="0" marL="0">
+              <a:buNone/>
+            </a:pPr>
+            <a:r>
+              <a:rPr lang="en-US" sz="1100" b="1" dirty="0">
+                <a:solidFill>
+                  <a:srgbClr val="F7768E"/>
                 </a:solidFill>
                 <a:latin typeface="Segoe UI" pitchFamily="34" charset="0"/>
                 <a:ea typeface="Segoe UI" pitchFamily="34" charset="-122"/>
                 <a:cs typeface="Segoe UI" pitchFamily="34" charset="-120"/>
               </a:rPr>
-              <a:t>Scrivi solo il testo e i concetti, senza perdere ore su margini e coordinate.</a:t>
-            </a:r>
-            <a:endParaRPr lang="en-US" sz="1300" dirty="0"/>
-          </a:p>
-        </p:txBody>
-      </p:sp>
-      <p:sp>
-        <p:nvSpPr>
-          <p:cNvPr id="11" name="Shape 8"/>
-          <p:cNvSpPr/>
-          <p:nvPr/>
-        </p:nvSpPr>
-        <p:spPr>
-          <a:xfrm>
-            <a:off x="4233228" y="1701800"/>
-            <a:ext cx="3725240" cy="1270000"/>
+              <a:t>Zero fatica</a:t>
+            </a:r>
+            <a:endParaRPr lang="en-US" sz="1100" dirty="0"/>
+          </a:p>
+        </p:txBody>
+      </p:sp>
+      <p:sp>
+        <p:nvSpPr>
+          <p:cNvPr id="10" name="Shape 8"/>
+          <p:cNvSpPr/>
+          <p:nvPr/>
+        </p:nvSpPr>
+        <p:spPr>
+          <a:xfrm>
+            <a:off x="4241694" y="1701800"/>
+            <a:ext cx="3708307" cy="1016000"/>
           </a:xfrm>
           <a:prstGeom prst="roundRect">
             <a:avLst>
-              <a:gd name="adj" fmla="val 5760"/>
+              <a:gd name="adj" fmla="val 7200"/>
             </a:avLst>
           </a:prstGeom>
           <a:solidFill>
@@ -2198,60 +2509,14 @@
       </p:sp>
       <p:sp>
         <p:nvSpPr>
-          <p:cNvPr id="12" name="Shape 9"/>
-          <p:cNvSpPr/>
-          <p:nvPr/>
-        </p:nvSpPr>
-        <p:spPr>
-          <a:xfrm>
-            <a:off x="4251516" y="1738376"/>
-            <a:ext cx="54864" cy="1196848"/>
-          </a:xfrm>
-          <a:prstGeom prst="roundRect">
-            <a:avLst>
-              <a:gd name="adj" fmla="val 50000"/>
-            </a:avLst>
-          </a:prstGeom>
-          <a:solidFill>
-            <a:srgbClr val="7DCFFF"/>
-          </a:solidFill>
-          <a:ln/>
-        </p:spPr>
-      </p:sp>
-      <p:pic>
-        <p:nvPicPr>
-          <p:cNvPr id="13" name="Image 1" descr="preencoded.png">    </p:cNvPr>
-          <p:cNvPicPr>
-            <a:picLocks noChangeAspect="1"/>
-          </p:cNvPicPr>
-          <p:nvPr/>
-        </p:nvPicPr>
-        <p:blipFill>
-          <a:blip r:embed="rId2"/>
-          <a:stretch>
-            <a:fillRect/>
-          </a:stretch>
-        </p:blipFill>
-        <p:spPr>
-          <a:xfrm>
-            <a:off x="4434396" y="1829816"/>
-            <a:ext cx="219456" cy="219456"/>
-          </a:xfrm>
-          <a:prstGeom prst="rect">
-            <a:avLst/>
-          </a:prstGeom>
-        </p:spPr>
-      </p:pic>
-      <p:sp>
-        <p:nvSpPr>
-          <p:cNvPr id="14" name="Text 10"/>
-          <p:cNvSpPr/>
-          <p:nvPr/>
-        </p:nvSpPr>
-        <p:spPr>
-          <a:xfrm>
-            <a:off x="4708716" y="1811528"/>
-            <a:ext cx="3021152" cy="274320"/>
+          <p:cNvPr id="11" name="Text 9"/>
+          <p:cNvSpPr/>
+          <p:nvPr/>
+        </p:nvSpPr>
+        <p:spPr>
+          <a:xfrm>
+            <a:off x="4333134" y="1793240"/>
+            <a:ext cx="3525427" cy="201168"/>
           </a:xfrm>
           <a:prstGeom prst="rect">
             <a:avLst/>
@@ -2263,77 +2528,116 @@
           <a:bodyPr wrap="square" rtlCol="0" anchor="ctr"/>
           <a:lstStyle/>
           <a:p>
-            <a:pPr indent="0" marL="0">
-              <a:buNone/>
-            </a:pPr>
-            <a:r>
-              <a:rPr lang="en-US" sz="1600" b="1" dirty="0">
-                <a:solidFill>
-                  <a:srgbClr val="7DCFFF"/>
+            <a:pPr algn="ctr" indent="0" marL="0">
+              <a:buNone/>
+            </a:pPr>
+            <a:r>
+              <a:rPr lang="en-US" sz="1000" b="1" dirty="0">
+                <a:solidFill>
+                  <a:srgbClr val="565F89"/>
                 </a:solidFill>
                 <a:latin typeface="Trebuchet MS" pitchFamily="34" charset="0"/>
                 <a:ea typeface="Trebuchet MS" pitchFamily="34" charset="-122"/>
                 <a:cs typeface="Trebuchet MS" pitchFamily="34" charset="-120"/>
               </a:rPr>
-              <a:t>2. Design Intelligente</a:t>
-            </a:r>
-            <a:endParaRPr lang="en-US" sz="1600" dirty="0"/>
-          </a:p>
-        </p:txBody>
-      </p:sp>
-      <p:sp>
-        <p:nvSpPr>
-          <p:cNvPr id="15" name="Text 11"/>
-          <p:cNvSpPr/>
-          <p:nvPr/>
-        </p:nvSpPr>
-        <p:spPr>
-          <a:xfrm>
-            <a:off x="4411023" y="2235200"/>
-            <a:ext cx="3369649" cy="482600"/>
-          </a:xfrm>
-          <a:prstGeom prst="rect">
-            <a:avLst/>
-          </a:prstGeom>
-          <a:noFill/>
-          <a:ln/>
-        </p:spPr>
-        <p:txBody>
-          <a:bodyPr wrap="square" lIns="0" tIns="0" rIns="0" bIns="0" rtlCol="0" anchor="t"/>
-          <a:lstStyle/>
-          <a:p>
-            <a:pPr algn="l" indent="0" marL="0">
-              <a:buNone/>
-            </a:pPr>
-            <a:r>
-              <a:rPr lang="en-US" sz="1300" dirty="0">
-                <a:solidFill>
-                  <a:srgbClr val="C0CAF5"/>
+              <a:t>FORMATI (WEB, PPTX, PDF)</a:t>
+            </a:r>
+            <a:endParaRPr lang="en-US" sz="1000" dirty="0"/>
+          </a:p>
+        </p:txBody>
+      </p:sp>
+      <p:sp>
+        <p:nvSpPr>
+          <p:cNvPr id="12" name="Text 10"/>
+          <p:cNvSpPr/>
+          <p:nvPr/>
+        </p:nvSpPr>
+        <p:spPr>
+          <a:xfrm>
+            <a:off x="4333134" y="2012696"/>
+            <a:ext cx="3525427" cy="402336"/>
+          </a:xfrm>
+          <a:prstGeom prst="rect">
+            <a:avLst/>
+          </a:prstGeom>
+          <a:noFill/>
+          <a:ln/>
+        </p:spPr>
+        <p:txBody>
+          <a:bodyPr wrap="square" rtlCol="0" anchor="ctr"/>
+          <a:lstStyle/>
+          <a:p>
+            <a:pPr algn="ctr" indent="0" marL="0">
+              <a:buNone/>
+            </a:pPr>
+            <a:r>
+              <a:rPr lang="en-US" sz="2600" b="1" dirty="0">
+                <a:solidFill>
+                  <a:srgbClr val="7DCFFF"/>
+                </a:solidFill>
+                <a:latin typeface="Trebuchet MS" pitchFamily="34" charset="0"/>
+                <a:ea typeface="Trebuchet MS" pitchFamily="34" charset="-122"/>
+                <a:cs typeface="Trebuchet MS" pitchFamily="34" charset="-120"/>
+              </a:rPr>
+              <a:t>3</a:t>
+            </a:r>
+            <a:endParaRPr lang="en-US" sz="2600" dirty="0"/>
+          </a:p>
+        </p:txBody>
+      </p:sp>
+      <p:sp>
+        <p:nvSpPr>
+          <p:cNvPr id="13" name="Text 11"/>
+          <p:cNvSpPr/>
+          <p:nvPr/>
+        </p:nvSpPr>
+        <p:spPr>
+          <a:xfrm>
+            <a:off x="4333134" y="2433320"/>
+            <a:ext cx="3525427" cy="201168"/>
+          </a:xfrm>
+          <a:prstGeom prst="rect">
+            <a:avLst/>
+          </a:prstGeom>
+          <a:noFill/>
+          <a:ln/>
+        </p:spPr>
+        <p:txBody>
+          <a:bodyPr wrap="square" rtlCol="0" anchor="ctr"/>
+          <a:lstStyle/>
+          <a:p>
+            <a:pPr algn="ctr" indent="0" marL="0">
+              <a:buNone/>
+            </a:pPr>
+            <a:r>
+              <a:rPr lang="en-US" sz="1100" b="1" dirty="0">
+                <a:solidFill>
+                  <a:srgbClr val="F7768E"/>
                 </a:solidFill>
                 <a:latin typeface="Segoe UI" pitchFamily="34" charset="0"/>
                 <a:ea typeface="Segoe UI" pitchFamily="34" charset="-122"/>
                 <a:cs typeface="Segoe UI" pitchFamily="34" charset="-120"/>
               </a:rPr>
-              <a:t>Yumia organizza automaticamente spazi, palette di colori e stili armoniosi.</a:t>
-            </a:r>
-            <a:endParaRPr lang="en-US" sz="1300" dirty="0"/>
-          </a:p>
-        </p:txBody>
-      </p:sp>
-      <p:sp>
-        <p:nvSpPr>
-          <p:cNvPr id="16" name="Shape 12"/>
-          <p:cNvSpPr/>
-          <p:nvPr/>
-        </p:nvSpPr>
-        <p:spPr>
-          <a:xfrm>
-            <a:off x="8060065" y="1701800"/>
-            <a:ext cx="3725240" cy="1270000"/>
+              <a:t>In 1 secondo</a:t>
+            </a:r>
+            <a:endParaRPr lang="en-US" sz="1100" dirty="0"/>
+          </a:p>
+        </p:txBody>
+      </p:sp>
+      <p:sp>
+        <p:nvSpPr>
+          <p:cNvPr id="14" name="Shape 12"/>
+          <p:cNvSpPr/>
+          <p:nvPr/>
+        </p:nvSpPr>
+        <p:spPr>
+          <a:xfrm>
+            <a:off x="8076998" y="1701800"/>
+            <a:ext cx="3708307" cy="1016000"/>
           </a:xfrm>
           <a:prstGeom prst="roundRect">
             <a:avLst>
-              <a:gd name="adj" fmla="val 5760"/>
+              <a:gd name="adj" fmla="val 7200"/>
             </a:avLst>
           </a:prstGeom>
           <a:solidFill>
@@ -2349,60 +2653,14 @@
       </p:sp>
       <p:sp>
         <p:nvSpPr>
-          <p:cNvPr id="17" name="Shape 13"/>
-          <p:cNvSpPr/>
-          <p:nvPr/>
-        </p:nvSpPr>
-        <p:spPr>
-          <a:xfrm>
-            <a:off x="8078353" y="1738376"/>
-            <a:ext cx="54864" cy="1196848"/>
-          </a:xfrm>
-          <a:prstGeom prst="roundRect">
-            <a:avLst>
-              <a:gd name="adj" fmla="val 50000"/>
-            </a:avLst>
-          </a:prstGeom>
-          <a:solidFill>
-            <a:srgbClr val="9ECE6A"/>
-          </a:solidFill>
-          <a:ln/>
-        </p:spPr>
-      </p:sp>
-      <p:pic>
-        <p:nvPicPr>
-          <p:cNvPr id="18" name="Image 2" descr="preencoded.png">    </p:cNvPr>
-          <p:cNvPicPr>
-            <a:picLocks noChangeAspect="1"/>
-          </p:cNvPicPr>
-          <p:nvPr/>
-        </p:nvPicPr>
-        <p:blipFill>
-          <a:blip r:embed="rId3"/>
-          <a:stretch>
-            <a:fillRect/>
-          </a:stretch>
-        </p:blipFill>
-        <p:spPr>
-          <a:xfrm>
-            <a:off x="8261233" y="1829816"/>
-            <a:ext cx="219456" cy="219456"/>
-          </a:xfrm>
-          <a:prstGeom prst="rect">
-            <a:avLst/>
-          </a:prstGeom>
-        </p:spPr>
-      </p:pic>
-      <p:sp>
-        <p:nvSpPr>
-          <p:cNvPr id="19" name="Text 14"/>
-          <p:cNvSpPr/>
-          <p:nvPr/>
-        </p:nvSpPr>
-        <p:spPr>
-          <a:xfrm>
-            <a:off x="8535553" y="1811528"/>
-            <a:ext cx="3021152" cy="274320"/>
+          <p:cNvPr id="15" name="Text 13"/>
+          <p:cNvSpPr/>
+          <p:nvPr/>
+        </p:nvSpPr>
+        <p:spPr>
+          <a:xfrm>
+            <a:off x="8168438" y="1793240"/>
+            <a:ext cx="3525427" cy="201168"/>
           </a:xfrm>
           <a:prstGeom prst="rect">
             <a:avLst/>
@@ -2414,66 +2672,105 @@
           <a:bodyPr wrap="square" rtlCol="0" anchor="ctr"/>
           <a:lstStyle/>
           <a:p>
-            <a:pPr indent="0" marL="0">
-              <a:buNone/>
-            </a:pPr>
-            <a:r>
-              <a:rPr lang="en-US" sz="1600" b="1" dirty="0">
-                <a:solidFill>
-                  <a:srgbClr val="9ECE6A"/>
+            <a:pPr algn="ctr" indent="0" marL="0">
+              <a:buNone/>
+            </a:pPr>
+            <a:r>
+              <a:rPr lang="en-US" sz="1000" b="1" dirty="0">
+                <a:solidFill>
+                  <a:srgbClr val="565F89"/>
                 </a:solidFill>
                 <a:latin typeface="Trebuchet MS" pitchFamily="34" charset="0"/>
                 <a:ea typeface="Trebuchet MS" pitchFamily="34" charset="-122"/>
                 <a:cs typeface="Trebuchet MS" pitchFamily="34" charset="-120"/>
               </a:rPr>
-              <a:t>3. Triplo Formato</a:t>
-            </a:r>
-            <a:endParaRPr lang="en-US" sz="1600" dirty="0"/>
-          </a:p>
-        </p:txBody>
-      </p:sp>
-      <p:sp>
-        <p:nvSpPr>
-          <p:cNvPr id="20" name="Text 15"/>
-          <p:cNvSpPr/>
-          <p:nvPr/>
-        </p:nvSpPr>
-        <p:spPr>
-          <a:xfrm>
-            <a:off x="8237861" y="2235200"/>
-            <a:ext cx="3369649" cy="482600"/>
-          </a:xfrm>
-          <a:prstGeom prst="rect">
-            <a:avLst/>
-          </a:prstGeom>
-          <a:noFill/>
-          <a:ln/>
-        </p:spPr>
-        <p:txBody>
-          <a:bodyPr wrap="square" lIns="0" tIns="0" rIns="0" bIns="0" rtlCol="0" anchor="t"/>
-          <a:lstStyle/>
-          <a:p>
-            <a:pPr algn="l" indent="0" marL="0">
-              <a:buNone/>
-            </a:pPr>
-            <a:r>
-              <a:rPr lang="en-US" sz="1300" dirty="0">
-                <a:solidFill>
-                  <a:srgbClr val="C0CAF5"/>
+              <a:t>LAYOUT E DESIGN GARANTITI</a:t>
+            </a:r>
+            <a:endParaRPr lang="en-US" sz="1000" dirty="0"/>
+          </a:p>
+        </p:txBody>
+      </p:sp>
+      <p:sp>
+        <p:nvSpPr>
+          <p:cNvPr id="16" name="Text 14"/>
+          <p:cNvSpPr/>
+          <p:nvPr/>
+        </p:nvSpPr>
+        <p:spPr>
+          <a:xfrm>
+            <a:off x="8168438" y="2012696"/>
+            <a:ext cx="3525427" cy="402336"/>
+          </a:xfrm>
+          <a:prstGeom prst="rect">
+            <a:avLst/>
+          </a:prstGeom>
+          <a:noFill/>
+          <a:ln/>
+        </p:spPr>
+        <p:txBody>
+          <a:bodyPr wrap="square" rtlCol="0" anchor="ctr"/>
+          <a:lstStyle/>
+          <a:p>
+            <a:pPr algn="ctr" indent="0" marL="0">
+              <a:buNone/>
+            </a:pPr>
+            <a:r>
+              <a:rPr lang="en-US" sz="2600" b="1" dirty="0">
+                <a:solidFill>
+                  <a:srgbClr val="9ECE6A"/>
+                </a:solidFill>
+                <a:latin typeface="Trebuchet MS" pitchFamily="34" charset="0"/>
+                <a:ea typeface="Trebuchet MS" pitchFamily="34" charset="-122"/>
+                <a:cs typeface="Trebuchet MS" pitchFamily="34" charset="-120"/>
+              </a:rPr>
+              <a:t>100%</a:t>
+            </a:r>
+            <a:endParaRPr lang="en-US" sz="2600" dirty="0"/>
+          </a:p>
+        </p:txBody>
+      </p:sp>
+      <p:sp>
+        <p:nvSpPr>
+          <p:cNvPr id="17" name="Text 15"/>
+          <p:cNvSpPr/>
+          <p:nvPr/>
+        </p:nvSpPr>
+        <p:spPr>
+          <a:xfrm>
+            <a:off x="8168438" y="2433320"/>
+            <a:ext cx="3525427" cy="201168"/>
+          </a:xfrm>
+          <a:prstGeom prst="rect">
+            <a:avLst/>
+          </a:prstGeom>
+          <a:noFill/>
+          <a:ln/>
+        </p:spPr>
+        <p:txBody>
+          <a:bodyPr wrap="square" rtlCol="0" anchor="ctr"/>
+          <a:lstStyle/>
+          <a:p>
+            <a:pPr algn="ctr" indent="0" marL="0">
+              <a:buNone/>
+            </a:pPr>
+            <a:r>
+              <a:rPr lang="en-US" sz="1100" b="1" dirty="0">
+                <a:solidFill>
+                  <a:srgbClr val="F7768E"/>
                 </a:solidFill>
                 <a:latin typeface="Segoe UI" pitchFamily="34" charset="0"/>
                 <a:ea typeface="Segoe UI" pitchFamily="34" charset="-122"/>
                 <a:cs typeface="Segoe UI" pitchFamily="34" charset="-120"/>
               </a:rPr>
-              <a:t>Esportazione istantanea in Sito Web interattivo, PowerPoint nativo e PDF.</a:t>
-            </a:r>
-            <a:endParaRPr lang="en-US" sz="1300" dirty="0"/>
-          </a:p>
-        </p:txBody>
-      </p:sp>
-      <p:sp>
-        <p:nvSpPr>
-          <p:cNvPr id="21" name="Text 16"/>
+              <a:t>Zero disallineamenti</a:t>
+            </a:r>
+            <a:endParaRPr lang="en-US" sz="1100" dirty="0"/>
+          </a:p>
+        </p:txBody>
+      </p:sp>
+      <p:sp>
+        <p:nvSpPr>
+          <p:cNvPr id="18" name="Text 16"/>
           <p:cNvSpPr/>
           <p:nvPr/>
         </p:nvSpPr>
@@ -2575,7 +2872,7 @@
                 <a:ea typeface="Trebuchet MS" pitchFamily="34" charset="-122"/>
                 <a:cs typeface="Trebuchet MS" pitchFamily="34" charset="-120"/>
               </a:rPr>
-              <a:t>I Grandi Vantaggi di Yumia</a:t>
+              <a:t>Tempo Risparmiato con Yumia</a:t>
             </a:r>
             <a:endParaRPr lang="en-US" sz="3300" dirty="0"/>
           </a:p>
@@ -2614,26 +2911,42 @@
                 <a:ea typeface="Trebuchet MS" pitchFamily="34" charset="-122"/>
                 <a:cs typeface="Trebuchet MS" pitchFamily="34" charset="-120"/>
               </a:rPr>
-              <a:t>Perché è utile per studenti, programmatori e professionisti</a:t>
+              <a:t>Meno tempo perso sulla grafica, più spazio ai contenuti</a:t>
             </a:r>
             <a:endParaRPr lang="en-US" sz="2600" dirty="0"/>
           </a:p>
         </p:txBody>
       </p:sp>
-      <p:sp>
-        <p:nvSpPr>
-          <p:cNvPr id="4" name="Shape 2"/>
-          <p:cNvSpPr/>
-          <p:nvPr/>
-        </p:nvSpPr>
-        <p:spPr>
-          <a:xfrm>
-            <a:off x="406390" y="2019300"/>
-            <a:ext cx="3725240" cy="1270000"/>
+      <p:graphicFrame>
+        <p:nvGraphicFramePr>
+          <p:cNvPr id="4" name="Chart 0" descr=""/>
+          <p:cNvGraphicFramePr/>
+          <p:nvPr/>
+        </p:nvGraphicFramePr>
+        <p:xfrm>
+          <a:off x="406390" y="2019300"/>
+          <a:ext cx="5824582" cy="1968500"/>
+        </p:xfrm>
+        <a:graphic xmlns:a="http://schemas.openxmlformats.org/drawingml/2006/main">
+          <a:graphicData uri="http://schemas.openxmlformats.org/drawingml/2006/chart">
+            <c:chart xmlns:c="http://schemas.openxmlformats.org/drawingml/2006/chart" r:id="rId1"/>
+          </a:graphicData>
+        </a:graphic>
+      </p:graphicFrame>
+      <p:sp>
+        <p:nvSpPr>
+          <p:cNvPr id="5" name="Shape 2"/>
+          <p:cNvSpPr/>
+          <p:nvPr/>
+        </p:nvSpPr>
+        <p:spPr>
+          <a:xfrm>
+            <a:off x="6408768" y="2019300"/>
+            <a:ext cx="5376538" cy="2127250"/>
           </a:xfrm>
           <a:prstGeom prst="roundRect">
             <a:avLst>
-              <a:gd name="adj" fmla="val 5760"/>
+              <a:gd name="adj" fmla="val 3439"/>
             </a:avLst>
           </a:prstGeom>
           <a:solidFill>
@@ -2649,14 +2962,14 @@
       </p:sp>
       <p:sp>
         <p:nvSpPr>
-          <p:cNvPr id="5" name="Shape 3"/>
-          <p:cNvSpPr/>
-          <p:nvPr/>
-        </p:nvSpPr>
-        <p:spPr>
-          <a:xfrm>
-            <a:off x="424678" y="2055876"/>
-            <a:ext cx="54864" cy="1196848"/>
+          <p:cNvPr id="6" name="Shape 3"/>
+          <p:cNvSpPr/>
+          <p:nvPr/>
+        </p:nvSpPr>
+        <p:spPr>
+          <a:xfrm>
+            <a:off x="6427056" y="2055876"/>
+            <a:ext cx="54864" cy="2054098"/>
           </a:xfrm>
           <a:prstGeom prst="roundRect">
             <a:avLst>
@@ -2671,158 +2984,7 @@
       </p:sp>
       <p:pic>
         <p:nvPicPr>
-          <p:cNvPr id="6" name="Image 0" descr="preencoded.png">    </p:cNvPr>
-          <p:cNvPicPr>
-            <a:picLocks noChangeAspect="1"/>
-          </p:cNvPicPr>
-          <p:nvPr/>
-        </p:nvPicPr>
-        <p:blipFill>
-          <a:blip r:embed="rId1"/>
-          <a:stretch>
-            <a:fillRect/>
-          </a:stretch>
-        </p:blipFill>
-        <p:spPr>
-          <a:xfrm>
-            <a:off x="607558" y="2147316"/>
-            <a:ext cx="219456" cy="219456"/>
-          </a:xfrm>
-          <a:prstGeom prst="rect">
-            <a:avLst/>
-          </a:prstGeom>
-        </p:spPr>
-      </p:pic>
-      <p:sp>
-        <p:nvSpPr>
-          <p:cNvPr id="7" name="Text 4"/>
-          <p:cNvSpPr/>
-          <p:nvPr/>
-        </p:nvSpPr>
-        <p:spPr>
-          <a:xfrm>
-            <a:off x="881878" y="2129028"/>
-            <a:ext cx="3021152" cy="274320"/>
-          </a:xfrm>
-          <a:prstGeom prst="rect">
-            <a:avLst/>
-          </a:prstGeom>
-          <a:noFill/>
-          <a:ln/>
-        </p:spPr>
-        <p:txBody>
-          <a:bodyPr wrap="square" rtlCol="0" anchor="ctr"/>
-          <a:lstStyle/>
-          <a:p>
-            <a:pPr indent="0" marL="0">
-              <a:buNone/>
-            </a:pPr>
-            <a:r>
-              <a:rPr lang="en-US" sz="1600" b="1" dirty="0">
-                <a:solidFill>
-                  <a:srgbClr val="7AA2F7"/>
-                </a:solidFill>
-                <a:latin typeface="Trebuchet MS" pitchFamily="34" charset="0"/>
-                <a:ea typeface="Trebuchet MS" pitchFamily="34" charset="-122"/>
-                <a:cs typeface="Trebuchet MS" pitchFamily="34" charset="-120"/>
-              </a:rPr>
-              <a:t>Super Veloce</a:t>
-            </a:r>
-            <a:endParaRPr lang="en-US" sz="1600" dirty="0"/>
-          </a:p>
-        </p:txBody>
-      </p:sp>
-      <p:sp>
-        <p:nvSpPr>
-          <p:cNvPr id="8" name="Text 5"/>
-          <p:cNvSpPr/>
-          <p:nvPr/>
-        </p:nvSpPr>
-        <p:spPr>
-          <a:xfrm>
-            <a:off x="584185" y="2552700"/>
-            <a:ext cx="3369649" cy="482600"/>
-          </a:xfrm>
-          <a:prstGeom prst="rect">
-            <a:avLst/>
-          </a:prstGeom>
-          <a:noFill/>
-          <a:ln/>
-        </p:spPr>
-        <p:txBody>
-          <a:bodyPr wrap="square" lIns="0" tIns="0" rIns="0" bIns="0" rtlCol="0" anchor="t"/>
-          <a:lstStyle/>
-          <a:p>
-            <a:pPr algn="l" indent="0" marL="0">
-              <a:buNone/>
-            </a:pPr>
-            <a:r>
-              <a:rPr lang="en-US" sz="1300" dirty="0">
-                <a:solidFill>
-                  <a:srgbClr val="C0CAF5"/>
-                </a:solidFill>
-                <a:latin typeface="Segoe UI" pitchFamily="34" charset="0"/>
-                <a:ea typeface="Segoe UI" pitchFamily="34" charset="-122"/>
-                <a:cs typeface="Segoe UI" pitchFamily="34" charset="-120"/>
-              </a:rPr>
-              <a:t>Crei una presentazione completa in pochi minuti partendo dai tuoi appunti.</a:t>
-            </a:r>
-            <a:endParaRPr lang="en-US" sz="1300" dirty="0"/>
-          </a:p>
-        </p:txBody>
-      </p:sp>
-      <p:sp>
-        <p:nvSpPr>
-          <p:cNvPr id="9" name="Shape 6"/>
-          <p:cNvSpPr/>
-          <p:nvPr/>
-        </p:nvSpPr>
-        <p:spPr>
-          <a:xfrm>
-            <a:off x="4233228" y="2019300"/>
-            <a:ext cx="3725240" cy="1270000"/>
-          </a:xfrm>
-          <a:prstGeom prst="roundRect">
-            <a:avLst>
-              <a:gd name="adj" fmla="val 5760"/>
-            </a:avLst>
-          </a:prstGeom>
-          <a:solidFill>
-            <a:srgbClr val="24283B"/>
-          </a:solidFill>
-          <a:ln w="19050">
-            <a:solidFill>
-              <a:srgbClr val="7DCFFF"/>
-            </a:solidFill>
-            <a:prstDash val="solid"/>
-          </a:ln>
-        </p:spPr>
-      </p:sp>
-      <p:sp>
-        <p:nvSpPr>
-          <p:cNvPr id="10" name="Shape 7"/>
-          <p:cNvSpPr/>
-          <p:nvPr/>
-        </p:nvSpPr>
-        <p:spPr>
-          <a:xfrm>
-            <a:off x="4251516" y="2055876"/>
-            <a:ext cx="54864" cy="1196848"/>
-          </a:xfrm>
-          <a:prstGeom prst="roundRect">
-            <a:avLst>
-              <a:gd name="adj" fmla="val 50000"/>
-            </a:avLst>
-          </a:prstGeom>
-          <a:solidFill>
-            <a:srgbClr val="7DCFFF"/>
-          </a:solidFill>
-          <a:ln/>
-        </p:spPr>
-      </p:sp>
-      <p:pic>
-        <p:nvPicPr>
-          <p:cNvPr id="11" name="Image 1" descr="preencoded.png">    </p:cNvPr>
+          <p:cNvPr id="7" name="Image 0" descr="preencoded.png">    </p:cNvPr>
           <p:cNvPicPr>
             <a:picLocks noChangeAspect="1"/>
           </p:cNvPicPr>
@@ -2836,7 +2998,7 @@
         </p:blipFill>
         <p:spPr>
           <a:xfrm>
-            <a:off x="4434396" y="2147316"/>
+            <a:off x="6609936" y="2147316"/>
             <a:ext cx="219456" cy="219456"/>
           </a:xfrm>
           <a:prstGeom prst="rect">
@@ -2846,14 +3008,14 @@
       </p:pic>
       <p:sp>
         <p:nvSpPr>
-          <p:cNvPr id="12" name="Text 8"/>
-          <p:cNvSpPr/>
-          <p:nvPr/>
-        </p:nvSpPr>
-        <p:spPr>
-          <a:xfrm>
-            <a:off x="4708716" y="2129028"/>
-            <a:ext cx="3021152" cy="274320"/>
+          <p:cNvPr id="8" name="Text 4"/>
+          <p:cNvSpPr/>
+          <p:nvPr/>
+        </p:nvSpPr>
+        <p:spPr>
+          <a:xfrm>
+            <a:off x="6884256" y="2129028"/>
+            <a:ext cx="4672450" cy="274320"/>
           </a:xfrm>
           <a:prstGeom prst="rect">
             <a:avLst/>
@@ -2871,13 +3033,13 @@
             <a:r>
               <a:rPr lang="en-US" sz="1600" b="1" dirty="0">
                 <a:solidFill>
-                  <a:srgbClr val="7DCFFF"/>
+                  <a:srgbClr val="7AA2F7"/>
                 </a:solidFill>
                 <a:latin typeface="Trebuchet MS" pitchFamily="34" charset="0"/>
                 <a:ea typeface="Trebuchet MS" pitchFamily="34" charset="-122"/>
                 <a:cs typeface="Trebuchet MS" pitchFamily="34" charset="-120"/>
               </a:rPr>
-              <a:t>Sempre Ordinato</a:t>
+              <a:t>Perché tanta differenza?</a:t>
             </a:r>
             <a:endParaRPr lang="en-US" sz="1600" dirty="0"/>
           </a:p>
@@ -2885,23 +3047,25 @@
       </p:sp>
       <p:sp>
         <p:nvSpPr>
-          <p:cNvPr id="13" name="Text 9"/>
-          <p:cNvSpPr/>
-          <p:nvPr/>
-        </p:nvSpPr>
-        <p:spPr>
-          <a:xfrm>
-            <a:off x="4411023" y="2552700"/>
-            <a:ext cx="3369649" cy="482600"/>
-          </a:xfrm>
-          <a:prstGeom prst="rect">
-            <a:avLst/>
-          </a:prstGeom>
-          <a:noFill/>
-          <a:ln/>
-        </p:spPr>
-        <p:txBody>
-          <a:bodyPr wrap="square" lIns="0" tIns="0" rIns="0" bIns="0" rtlCol="0" anchor="t"/>
+          <p:cNvPr id="9" name="Text 5"/>
+          <p:cNvSpPr/>
+          <p:nvPr/>
+        </p:nvSpPr>
+        <p:spPr>
+          <a:xfrm>
+            <a:off x="6586563" y="2552700"/>
+            <a:ext cx="5020946" cy="266700"/>
+          </a:xfrm>
+          <a:prstGeom prst="rect">
+            <a:avLst/>
+          </a:prstGeom>
+          <a:noFill/>
+          <a:ln/>
+        </p:spPr>
+        <p:txBody>
+          <a:bodyPr wrap="square" lIns="0" tIns="0" rIns="0" bIns="0" rtlCol="0" anchor="t">
+            <a:normAutofit/>
+          </a:bodyPr>
           <a:lstStyle/>
           <a:p>
             <a:pPr algn="l" indent="0" marL="0">
@@ -2916,7 +3080,7 @@
                 <a:ea typeface="Segoe UI" pitchFamily="34" charset="-122"/>
                 <a:cs typeface="Segoe UI" pitchFamily="34" charset="-120"/>
               </a:rPr>
-              <a:t>Tutte le slide mantengono lo stesso stile coerente e moderno.</a:t>
+              <a:t>• Zero spostamenti manuali di caselle col mouse</a:t>
             </a:r>
             <a:endParaRPr lang="en-US" sz="1300" dirty="0"/>
           </a:p>
@@ -2924,18 +3088,100 @@
       </p:sp>
       <p:sp>
         <p:nvSpPr>
-          <p:cNvPr id="14" name="Shape 10"/>
-          <p:cNvSpPr/>
-          <p:nvPr/>
-        </p:nvSpPr>
-        <p:spPr>
-          <a:xfrm>
-            <a:off x="8060065" y="2019300"/>
-            <a:ext cx="3725240" cy="1270000"/>
+          <p:cNvPr id="10" name="Text 6"/>
+          <p:cNvSpPr/>
+          <p:nvPr/>
+        </p:nvSpPr>
+        <p:spPr>
+          <a:xfrm>
+            <a:off x="6586563" y="2889250"/>
+            <a:ext cx="5020946" cy="266700"/>
+          </a:xfrm>
+          <a:prstGeom prst="rect">
+            <a:avLst/>
+          </a:prstGeom>
+          <a:noFill/>
+          <a:ln/>
+        </p:spPr>
+        <p:txBody>
+          <a:bodyPr wrap="square" lIns="0" tIns="0" rIns="0" bIns="0" rtlCol="0" anchor="t">
+            <a:normAutofit/>
+          </a:bodyPr>
+          <a:lstStyle/>
+          <a:p>
+            <a:pPr algn="l" indent="0" marL="0">
+              <a:buNone/>
+            </a:pPr>
+            <a:r>
+              <a:rPr lang="en-US" sz="1300" dirty="0">
+                <a:solidFill>
+                  <a:srgbClr val="C0CAF5"/>
+                </a:solidFill>
+                <a:latin typeface="Segoe UI" pitchFamily="34" charset="0"/>
+                <a:ea typeface="Segoe UI" pitchFamily="34" charset="-122"/>
+                <a:cs typeface="Segoe UI" pitchFamily="34" charset="-120"/>
+              </a:rPr>
+              <a:t>• Palette di colori e layout calcolati in un secondo</a:t>
+            </a:r>
+            <a:endParaRPr lang="en-US" sz="1300" dirty="0"/>
+          </a:p>
+        </p:txBody>
+      </p:sp>
+      <p:sp>
+        <p:nvSpPr>
+          <p:cNvPr id="11" name="Text 7"/>
+          <p:cNvSpPr/>
+          <p:nvPr/>
+        </p:nvSpPr>
+        <p:spPr>
+          <a:xfrm>
+            <a:off x="6586563" y="3225800"/>
+            <a:ext cx="5020946" cy="266700"/>
+          </a:xfrm>
+          <a:prstGeom prst="rect">
+            <a:avLst/>
+          </a:prstGeom>
+          <a:noFill/>
+          <a:ln/>
+        </p:spPr>
+        <p:txBody>
+          <a:bodyPr wrap="square" lIns="0" tIns="0" rIns="0" bIns="0" rtlCol="0" anchor="t">
+            <a:normAutofit/>
+          </a:bodyPr>
+          <a:lstStyle/>
+          <a:p>
+            <a:pPr algn="l" indent="0" marL="0">
+              <a:buNone/>
+            </a:pPr>
+            <a:r>
+              <a:rPr lang="en-US" sz="1300" dirty="0">
+                <a:solidFill>
+                  <a:srgbClr val="C0CAF5"/>
+                </a:solidFill>
+                <a:latin typeface="Segoe UI" pitchFamily="34" charset="0"/>
+                <a:ea typeface="Segoe UI" pitchFamily="34" charset="-122"/>
+                <a:cs typeface="Segoe UI" pitchFamily="34" charset="-120"/>
+              </a:rPr>
+              <a:t>• Aggiornamenti immediati su tutte le slide</a:t>
+            </a:r>
+            <a:endParaRPr lang="en-US" sz="1300" dirty="0"/>
+          </a:p>
+        </p:txBody>
+      </p:sp>
+      <p:sp>
+        <p:nvSpPr>
+          <p:cNvPr id="12" name="Shape 8"/>
+          <p:cNvSpPr/>
+          <p:nvPr/>
+        </p:nvSpPr>
+        <p:spPr>
+          <a:xfrm>
+            <a:off x="7816877" y="3562350"/>
+            <a:ext cx="2560320" cy="330200"/>
           </a:xfrm>
           <a:prstGeom prst="roundRect">
             <a:avLst>
-              <a:gd name="adj" fmla="val 5760"/>
+              <a:gd name="adj" fmla="val 41538"/>
             </a:avLst>
           </a:prstGeom>
           <a:solidFill>
@@ -2951,29 +3197,73 @@
       </p:sp>
       <p:sp>
         <p:nvSpPr>
-          <p:cNvPr id="15" name="Shape 11"/>
-          <p:cNvSpPr/>
-          <p:nvPr/>
-        </p:nvSpPr>
-        <p:spPr>
-          <a:xfrm>
-            <a:off x="8078353" y="2055876"/>
-            <a:ext cx="54864" cy="1196848"/>
+          <p:cNvPr id="13" name="Text 9"/>
+          <p:cNvSpPr/>
+          <p:nvPr/>
+        </p:nvSpPr>
+        <p:spPr>
+          <a:xfrm>
+            <a:off x="7816877" y="3562350"/>
+            <a:ext cx="2560320" cy="330200"/>
+          </a:xfrm>
+          <a:prstGeom prst="rect">
+            <a:avLst/>
+          </a:prstGeom>
+          <a:noFill/>
+          <a:ln/>
+        </p:spPr>
+        <p:txBody>
+          <a:bodyPr wrap="square" rtlCol="0" anchor="ctr"/>
+          <a:lstStyle/>
+          <a:p>
+            <a:pPr algn="ctr" indent="0" marL="0">
+              <a:buNone/>
+            </a:pPr>
+            <a:r>
+              <a:rPr lang="en-US" sz="1000" b="1" dirty="0">
+                <a:solidFill>
+                  <a:srgbClr val="9ECE6A"/>
+                </a:solidFill>
+                <a:latin typeface="Trebuchet MS" pitchFamily="34" charset="0"/>
+                <a:ea typeface="Trebuchet MS" pitchFamily="34" charset="-122"/>
+                <a:cs typeface="Trebuchet MS" pitchFamily="34" charset="-120"/>
+              </a:rPr>
+              <a:t>RISPARMIO DI OLTRE L</a:t>
+            </a:r>
+            <a:endParaRPr lang="en-US" sz="1000" dirty="0"/>
+          </a:p>
+        </p:txBody>
+      </p:sp>
+      <p:sp>
+        <p:nvSpPr>
+          <p:cNvPr id="14" name="Shape 10"/>
+          <p:cNvSpPr/>
+          <p:nvPr/>
+        </p:nvSpPr>
+        <p:spPr>
+          <a:xfrm>
+            <a:off x="406390" y="4324350"/>
+            <a:ext cx="11378916" cy="774700"/>
           </a:xfrm>
           <a:prstGeom prst="roundRect">
             <a:avLst>
-              <a:gd name="adj" fmla="val 50000"/>
+              <a:gd name="adj" fmla="val 9443"/>
             </a:avLst>
           </a:prstGeom>
           <a:solidFill>
-            <a:srgbClr val="9ECE6A"/>
+            <a:srgbClr val="24283B"/>
           </a:solidFill>
-          <a:ln/>
+          <a:ln w="25400">
+            <a:solidFill>
+              <a:srgbClr val="9ECE6A"/>
+            </a:solidFill>
+            <a:prstDash val="solid"/>
+          </a:ln>
         </p:spPr>
       </p:sp>
       <p:pic>
         <p:nvPicPr>
-          <p:cNvPr id="16" name="Image 2" descr="preencoded.png">    </p:cNvPr>
+          <p:cNvPr id="15" name="Image 1" descr="preencoded.png">    </p:cNvPr>
           <p:cNvPicPr>
             <a:picLocks noChangeAspect="1"/>
           </p:cNvPicPr>
@@ -2987,8 +3277,8 @@
         </p:blipFill>
         <p:spPr>
           <a:xfrm>
-            <a:off x="8261233" y="2147316"/>
-            <a:ext cx="219456" cy="219456"/>
+            <a:off x="589270" y="4470654"/>
+            <a:ext cx="201168" cy="201168"/>
           </a:xfrm>
           <a:prstGeom prst="rect">
             <a:avLst/>
@@ -2997,14 +3287,14 @@
       </p:pic>
       <p:sp>
         <p:nvSpPr>
-          <p:cNvPr id="17" name="Text 12"/>
-          <p:cNvSpPr/>
-          <p:nvPr/>
-        </p:nvSpPr>
-        <p:spPr>
-          <a:xfrm>
-            <a:off x="8535553" y="2129028"/>
-            <a:ext cx="3021152" cy="274320"/>
+          <p:cNvPr id="16" name="Text 11"/>
+          <p:cNvSpPr/>
+          <p:nvPr/>
+        </p:nvSpPr>
+        <p:spPr>
+          <a:xfrm>
+            <a:off x="845302" y="4470654"/>
+            <a:ext cx="10757124" cy="274320"/>
           </a:xfrm>
           <a:prstGeom prst="rect">
             <a:avLst/>
@@ -3020,7 +3310,7 @@
               <a:buNone/>
             </a:pPr>
             <a:r>
-              <a:rPr lang="en-US" sz="1600" b="1" dirty="0">
+              <a:rPr lang="en-US" sz="1300" b="1" dirty="0">
                 <a:solidFill>
                   <a:srgbClr val="9ECE6A"/>
                 </a:solidFill>
@@ -3028,38 +3318,38 @@
                 <a:ea typeface="Trebuchet MS" pitchFamily="34" charset="-122"/>
                 <a:cs typeface="Trebuchet MS" pitchFamily="34" charset="-120"/>
               </a:rPr>
-              <a:t>Tutto in un File</a:t>
-            </a:r>
-            <a:endParaRPr lang="en-US" sz="1600" dirty="0"/>
-          </a:p>
-        </p:txBody>
-      </p:sp>
-      <p:sp>
-        <p:nvSpPr>
-          <p:cNvPr id="18" name="Text 13"/>
-          <p:cNvSpPr/>
-          <p:nvPr/>
-        </p:nvSpPr>
-        <p:spPr>
-          <a:xfrm>
-            <a:off x="8237861" y="2552700"/>
-            <a:ext cx="3369649" cy="482600"/>
-          </a:xfrm>
-          <a:prstGeom prst="rect">
-            <a:avLst/>
-          </a:prstGeom>
-          <a:noFill/>
-          <a:ln/>
-        </p:spPr>
-        <p:txBody>
-          <a:bodyPr wrap="square" lIns="0" tIns="0" rIns="0" bIns="0" rtlCol="0" anchor="t"/>
-          <a:lstStyle/>
-          <a:p>
-            <a:pPr algn="l" indent="0" marL="0">
-              <a:buNone/>
-            </a:pPr>
-            <a:r>
-              <a:rPr lang="en-US" sz="1300" dirty="0">
+              <a:t>Efficienza Immediata</a:t>
+            </a:r>
+            <a:endParaRPr lang="en-US" sz="1300" dirty="0"/>
+          </a:p>
+        </p:txBody>
+      </p:sp>
+      <p:sp>
+        <p:nvSpPr>
+          <p:cNvPr id="17" name="Text 12"/>
+          <p:cNvSpPr/>
+          <p:nvPr/>
+        </p:nvSpPr>
+        <p:spPr>
+          <a:xfrm>
+            <a:off x="589270" y="4799838"/>
+            <a:ext cx="11013156" cy="182880"/>
+          </a:xfrm>
+          <a:prstGeom prst="rect">
+            <a:avLst/>
+          </a:prstGeom>
+          <a:noFill/>
+          <a:ln/>
+        </p:spPr>
+        <p:txBody>
+          <a:bodyPr wrap="square" rtlCol="0" anchor="t"/>
+          <a:lstStyle/>
+          <a:p>
+            <a:pPr indent="0" marL="0">
+              <a:buNone/>
+            </a:pPr>
+            <a:r>
+              <a:rPr lang="en-US" sz="1200" dirty="0">
                 <a:solidFill>
                   <a:srgbClr val="C0CAF5"/>
                 </a:solidFill>
@@ -3067,15 +3357,15 @@
                 <a:ea typeface="Segoe UI" pitchFamily="34" charset="-122"/>
                 <a:cs typeface="Segoe UI" pitchFamily="34" charset="-120"/>
               </a:rPr>
-              <a:t>Facilissimo da salvare, inviare, condividere e aggiornare nel tempo.</a:t>
-            </a:r>
-            <a:endParaRPr lang="en-US" sz="1300" dirty="0"/>
-          </a:p>
-        </p:txBody>
-      </p:sp>
-      <p:sp>
-        <p:nvSpPr>
-          <p:cNvPr id="19" name="Text 14"/>
+              <a:t>Con Yumia passi subito dai tuoi appunti alla presentazione pronta senza stress.</a:t>
+            </a:r>
+            <a:endParaRPr lang="en-US" sz="1200" dirty="0"/>
+          </a:p>
+        </p:txBody>
+      </p:sp>
+      <p:sp>
+        <p:nvSpPr>
+          <p:cNvPr id="18" name="Text 13"/>
           <p:cNvSpPr/>
           <p:nvPr/>
         </p:nvSpPr>
@@ -3216,7 +3506,7 @@
                 <a:ea typeface="Trebuchet MS" pitchFamily="34" charset="-122"/>
                 <a:cs typeface="Trebuchet MS" pitchFamily="34" charset="-120"/>
               </a:rPr>
-              <a:t>Le prossime novità per rendere Yumia ancora più potente</a:t>
+              <a:t>I prossimi passi per rendere Yumia ancora più completo</a:t>
             </a:r>
             <a:endParaRPr lang="en-US" sz="2600" dirty="0"/>
           </a:p>
@@ -3230,23 +3520,16 @@
         </p:nvSpPr>
         <p:spPr>
           <a:xfrm>
-            <a:off x="406390" y="2019300"/>
-            <a:ext cx="3725240" cy="1270000"/>
-          </a:xfrm>
-          <a:prstGeom prst="roundRect">
-            <a:avLst>
-              <a:gd name="adj" fmla="val 5760"/>
-            </a:avLst>
+            <a:off x="589270" y="2247900"/>
+            <a:ext cx="11013156" cy="27432"/>
+          </a:xfrm>
+          <a:prstGeom prst="rect">
+            <a:avLst/>
           </a:prstGeom>
           <a:solidFill>
-            <a:srgbClr val="24283B"/>
+            <a:srgbClr val="2F354A"/>
           </a:solidFill>
-          <a:ln w="19050">
-            <a:solidFill>
-              <a:srgbClr val="7AA2F7"/>
-            </a:solidFill>
-            <a:prstDash val="solid"/>
-          </a:ln>
+          <a:ln/>
         </p:spPr>
       </p:sp>
       <p:sp>
@@ -3257,8 +3540,8 @@
         </p:nvSpPr>
         <p:spPr>
           <a:xfrm>
-            <a:off x="424678" y="2055876"/>
-            <a:ext cx="54864" cy="1196848"/>
+            <a:off x="2211436" y="2174748"/>
+            <a:ext cx="182880" cy="182880"/>
           </a:xfrm>
           <a:prstGeom prst="roundRect">
             <a:avLst>
@@ -3268,12 +3551,383 @@
           <a:solidFill>
             <a:srgbClr val="7AA2F7"/>
           </a:solidFill>
-          <a:ln/>
+          <a:ln w="25400">
+            <a:solidFill>
+              <a:srgbClr val="1A1B26"/>
+            </a:solidFill>
+            <a:prstDash val="solid"/>
+          </a:ln>
+        </p:spPr>
+      </p:sp>
+      <p:sp>
+        <p:nvSpPr>
+          <p:cNvPr id="6" name="Text 4"/>
+          <p:cNvSpPr/>
+          <p:nvPr/>
+        </p:nvSpPr>
+        <p:spPr>
+          <a:xfrm>
+            <a:off x="406390" y="2412492"/>
+            <a:ext cx="3792972" cy="228600"/>
+          </a:xfrm>
+          <a:prstGeom prst="rect">
+            <a:avLst/>
+          </a:prstGeom>
+          <a:noFill/>
+          <a:ln/>
+        </p:spPr>
+        <p:txBody>
+          <a:bodyPr wrap="square" rtlCol="0" anchor="ctr"/>
+          <a:lstStyle/>
+          <a:p>
+            <a:pPr algn="ctr" indent="0" marL="0">
+              <a:buNone/>
+            </a:pPr>
+            <a:r>
+              <a:rPr lang="en-US" sz="1100" b="1" dirty="0">
+                <a:solidFill>
+                  <a:srgbClr val="7DCFFF"/>
+                </a:solidFill>
+                <a:latin typeface="Consolas" pitchFamily="34" charset="0"/>
+                <a:ea typeface="Consolas" pitchFamily="34" charset="-122"/>
+                <a:cs typeface="Consolas" pitchFamily="34" charset="-120"/>
+              </a:rPr>
+              <a:t>Fase 1</a:t>
+            </a:r>
+            <a:endParaRPr lang="en-US" sz="1100" dirty="0"/>
+          </a:p>
+        </p:txBody>
+      </p:sp>
+      <p:sp>
+        <p:nvSpPr>
+          <p:cNvPr id="7" name="Text 5"/>
+          <p:cNvSpPr/>
+          <p:nvPr/>
+        </p:nvSpPr>
+        <p:spPr>
+          <a:xfrm>
+            <a:off x="452110" y="2659380"/>
+            <a:ext cx="3701532" cy="513080"/>
+          </a:xfrm>
+          <a:prstGeom prst="rect">
+            <a:avLst/>
+          </a:prstGeom>
+          <a:noFill/>
+          <a:ln/>
+        </p:spPr>
+        <p:txBody>
+          <a:bodyPr wrap="square" rtlCol="0" anchor="t"/>
+          <a:lstStyle/>
+          <a:p>
+            <a:pPr algn="ctr" indent="0" marL="0">
+              <a:buNone/>
+            </a:pPr>
+            <a:r>
+              <a:rPr lang="en-US" sz="1200" dirty="0">
+                <a:solidFill>
+                  <a:srgbClr val="C0CAF5"/>
+                </a:solidFill>
+                <a:latin typeface="Segoe UI" pitchFamily="34" charset="0"/>
+                <a:ea typeface="Segoe UI" pitchFamily="34" charset="-122"/>
+                <a:cs typeface="Segoe UI" pitchFamily="34" charset="-120"/>
+              </a:rPr>
+              <a:t>Nuovi Temi</a:t>
+            </a:r>
+            <a:endParaRPr lang="en-US" sz="1200" dirty="0"/>
+          </a:p>
+          <a:p>
+            <a:pPr algn="ctr" indent="0" marL="0">
+              <a:buNone/>
+            </a:pPr>
+            <a:r>
+              <a:rPr lang="en-US" sz="1200" dirty="0">
+                <a:solidFill>
+                  <a:srgbClr val="C0CAF5"/>
+                </a:solidFill>
+                <a:latin typeface="Segoe UI" pitchFamily="34" charset="0"/>
+                <a:ea typeface="Segoe UI" pitchFamily="34" charset="-122"/>
+                <a:cs typeface="Segoe UI" pitchFamily="34" charset="-120"/>
+              </a:rPr>
+              <a:t>Stili grafici moderni, accademici ed eleganti</a:t>
+            </a:r>
+            <a:endParaRPr lang="en-US" sz="1200" dirty="0"/>
+          </a:p>
+        </p:txBody>
+      </p:sp>
+      <p:sp>
+        <p:nvSpPr>
+          <p:cNvPr id="8" name="Shape 6"/>
+          <p:cNvSpPr/>
+          <p:nvPr/>
+        </p:nvSpPr>
+        <p:spPr>
+          <a:xfrm>
+            <a:off x="6004408" y="2174748"/>
+            <a:ext cx="182880" cy="182880"/>
+          </a:xfrm>
+          <a:prstGeom prst="roundRect">
+            <a:avLst>
+              <a:gd name="adj" fmla="val 50000"/>
+            </a:avLst>
+          </a:prstGeom>
+          <a:solidFill>
+            <a:srgbClr val="7AA2F7"/>
+          </a:solidFill>
+          <a:ln w="25400">
+            <a:solidFill>
+              <a:srgbClr val="1A1B26"/>
+            </a:solidFill>
+            <a:prstDash val="solid"/>
+          </a:ln>
+        </p:spPr>
+      </p:sp>
+      <p:sp>
+        <p:nvSpPr>
+          <p:cNvPr id="9" name="Text 7"/>
+          <p:cNvSpPr/>
+          <p:nvPr/>
+        </p:nvSpPr>
+        <p:spPr>
+          <a:xfrm>
+            <a:off x="4199362" y="2412492"/>
+            <a:ext cx="3792972" cy="228600"/>
+          </a:xfrm>
+          <a:prstGeom prst="rect">
+            <a:avLst/>
+          </a:prstGeom>
+          <a:noFill/>
+          <a:ln/>
+        </p:spPr>
+        <p:txBody>
+          <a:bodyPr wrap="square" rtlCol="0" anchor="ctr"/>
+          <a:lstStyle/>
+          <a:p>
+            <a:pPr algn="ctr" indent="0" marL="0">
+              <a:buNone/>
+            </a:pPr>
+            <a:r>
+              <a:rPr lang="en-US" sz="1100" b="1" dirty="0">
+                <a:solidFill>
+                  <a:srgbClr val="7DCFFF"/>
+                </a:solidFill>
+                <a:latin typeface="Consolas" pitchFamily="34" charset="0"/>
+                <a:ea typeface="Consolas" pitchFamily="34" charset="-122"/>
+                <a:cs typeface="Consolas" pitchFamily="34" charset="-120"/>
+              </a:rPr>
+              <a:t>Fase 2</a:t>
+            </a:r>
+            <a:endParaRPr lang="en-US" sz="1100" dirty="0"/>
+          </a:p>
+        </p:txBody>
+      </p:sp>
+      <p:sp>
+        <p:nvSpPr>
+          <p:cNvPr id="10" name="Text 8"/>
+          <p:cNvSpPr/>
+          <p:nvPr/>
+        </p:nvSpPr>
+        <p:spPr>
+          <a:xfrm>
+            <a:off x="4245082" y="2659380"/>
+            <a:ext cx="3701532" cy="513080"/>
+          </a:xfrm>
+          <a:prstGeom prst="rect">
+            <a:avLst/>
+          </a:prstGeom>
+          <a:noFill/>
+          <a:ln/>
+        </p:spPr>
+        <p:txBody>
+          <a:bodyPr wrap="square" rtlCol="0" anchor="t"/>
+          <a:lstStyle/>
+          <a:p>
+            <a:pPr algn="ctr" indent="0" marL="0">
+              <a:buNone/>
+            </a:pPr>
+            <a:r>
+              <a:rPr lang="en-US" sz="1200" dirty="0">
+                <a:solidFill>
+                  <a:srgbClr val="C0CAF5"/>
+                </a:solidFill>
+                <a:latin typeface="Segoe UI" pitchFamily="34" charset="0"/>
+                <a:ea typeface="Segoe UI" pitchFamily="34" charset="-122"/>
+                <a:cs typeface="Segoe UI" pitchFamily="34" charset="-120"/>
+              </a:rPr>
+              <a:t>Lavoro di Gruppo</a:t>
+            </a:r>
+            <a:endParaRPr lang="en-US" sz="1200" dirty="0"/>
+          </a:p>
+          <a:p>
+            <a:pPr algn="ctr" indent="0" marL="0">
+              <a:buNone/>
+            </a:pPr>
+            <a:r>
+              <a:rPr lang="en-US" sz="1200" dirty="0">
+                <a:solidFill>
+                  <a:srgbClr val="C0CAF5"/>
+                </a:solidFill>
+                <a:latin typeface="Segoe UI" pitchFamily="34" charset="0"/>
+                <a:ea typeface="Segoe UI" pitchFamily="34" charset="-122"/>
+                <a:cs typeface="Segoe UI" pitchFamily="34" charset="-120"/>
+              </a:rPr>
+              <a:t>Collaborazione live via web con i compagni</a:t>
+            </a:r>
+            <a:endParaRPr lang="en-US" sz="1200" dirty="0"/>
+          </a:p>
+        </p:txBody>
+      </p:sp>
+      <p:sp>
+        <p:nvSpPr>
+          <p:cNvPr id="11" name="Shape 9"/>
+          <p:cNvSpPr/>
+          <p:nvPr/>
+        </p:nvSpPr>
+        <p:spPr>
+          <a:xfrm>
+            <a:off x="9797379" y="2174748"/>
+            <a:ext cx="182880" cy="182880"/>
+          </a:xfrm>
+          <a:prstGeom prst="roundRect">
+            <a:avLst>
+              <a:gd name="adj" fmla="val 50000"/>
+            </a:avLst>
+          </a:prstGeom>
+          <a:solidFill>
+            <a:srgbClr val="7AA2F7"/>
+          </a:solidFill>
+          <a:ln w="25400">
+            <a:solidFill>
+              <a:srgbClr val="1A1B26"/>
+            </a:solidFill>
+            <a:prstDash val="solid"/>
+          </a:ln>
+        </p:spPr>
+      </p:sp>
+      <p:sp>
+        <p:nvSpPr>
+          <p:cNvPr id="12" name="Text 10"/>
+          <p:cNvSpPr/>
+          <p:nvPr/>
+        </p:nvSpPr>
+        <p:spPr>
+          <a:xfrm>
+            <a:off x="7992334" y="2412492"/>
+            <a:ext cx="3792972" cy="228600"/>
+          </a:xfrm>
+          <a:prstGeom prst="rect">
+            <a:avLst/>
+          </a:prstGeom>
+          <a:noFill/>
+          <a:ln/>
+        </p:spPr>
+        <p:txBody>
+          <a:bodyPr wrap="square" rtlCol="0" anchor="ctr"/>
+          <a:lstStyle/>
+          <a:p>
+            <a:pPr algn="ctr" indent="0" marL="0">
+              <a:buNone/>
+            </a:pPr>
+            <a:r>
+              <a:rPr lang="en-US" sz="1100" b="1" dirty="0">
+                <a:solidFill>
+                  <a:srgbClr val="7DCFFF"/>
+                </a:solidFill>
+                <a:latin typeface="Consolas" pitchFamily="34" charset="0"/>
+                <a:ea typeface="Consolas" pitchFamily="34" charset="-122"/>
+                <a:cs typeface="Consolas" pitchFamily="34" charset="-120"/>
+              </a:rPr>
+              <a:t>Fase 3</a:t>
+            </a:r>
+            <a:endParaRPr lang="en-US" sz="1100" dirty="0"/>
+          </a:p>
+        </p:txBody>
+      </p:sp>
+      <p:sp>
+        <p:nvSpPr>
+          <p:cNvPr id="13" name="Text 11"/>
+          <p:cNvSpPr/>
+          <p:nvPr/>
+        </p:nvSpPr>
+        <p:spPr>
+          <a:xfrm>
+            <a:off x="8038054" y="2659380"/>
+            <a:ext cx="3701532" cy="513080"/>
+          </a:xfrm>
+          <a:prstGeom prst="rect">
+            <a:avLst/>
+          </a:prstGeom>
+          <a:noFill/>
+          <a:ln/>
+        </p:spPr>
+        <p:txBody>
+          <a:bodyPr wrap="square" rtlCol="0" anchor="t"/>
+          <a:lstStyle/>
+          <a:p>
+            <a:pPr algn="ctr" indent="0" marL="0">
+              <a:buNone/>
+            </a:pPr>
+            <a:r>
+              <a:rPr lang="en-US" sz="1200" dirty="0">
+                <a:solidFill>
+                  <a:srgbClr val="C0CAF5"/>
+                </a:solidFill>
+                <a:latin typeface="Segoe UI" pitchFamily="34" charset="0"/>
+                <a:ea typeface="Segoe UI" pitchFamily="34" charset="-122"/>
+                <a:cs typeface="Segoe UI" pitchFamily="34" charset="-120"/>
+              </a:rPr>
+              <a:t>Anteprima Live</a:t>
+            </a:r>
+            <a:endParaRPr lang="en-US" sz="1200" dirty="0"/>
+          </a:p>
+          <a:p>
+            <a:pPr algn="ctr" indent="0" marL="0">
+              <a:buNone/>
+            </a:pPr>
+            <a:r>
+              <a:rPr lang="en-US" sz="1200" dirty="0">
+                <a:solidFill>
+                  <a:srgbClr val="C0CAF5"/>
+                </a:solidFill>
+                <a:latin typeface="Segoe UI" pitchFamily="34" charset="0"/>
+                <a:ea typeface="Segoe UI" pitchFamily="34" charset="-122"/>
+                <a:cs typeface="Segoe UI" pitchFamily="34" charset="-120"/>
+              </a:rPr>
+              <a:t>Rendering immediato mentre scrivi il testo</a:t>
+            </a:r>
+            <a:endParaRPr lang="en-US" sz="1200" dirty="0"/>
+          </a:p>
+        </p:txBody>
+      </p:sp>
+      <p:sp>
+        <p:nvSpPr>
+          <p:cNvPr id="14" name="Shape 12"/>
+          <p:cNvSpPr/>
+          <p:nvPr/>
+        </p:nvSpPr>
+        <p:spPr>
+          <a:xfrm>
+            <a:off x="406390" y="3213100"/>
+            <a:ext cx="11378916" cy="774700"/>
+          </a:xfrm>
+          <a:prstGeom prst="roundRect">
+            <a:avLst>
+              <a:gd name="adj" fmla="val 9443"/>
+            </a:avLst>
+          </a:prstGeom>
+          <a:solidFill>
+            <a:srgbClr val="24283B"/>
+          </a:solidFill>
+          <a:ln w="25400">
+            <a:solidFill>
+              <a:srgbClr val="7DCFFF"/>
+            </a:solidFill>
+            <a:prstDash val="solid"/>
+          </a:ln>
         </p:spPr>
       </p:sp>
       <p:pic>
         <p:nvPicPr>
-          <p:cNvPr id="6" name="Image 0" descr="preencoded.png">    </p:cNvPr>
+          <p:cNvPr id="15" name="Image 0" descr="preencoded.png">    </p:cNvPr>
           <p:cNvPicPr>
             <a:picLocks noChangeAspect="1"/>
           </p:cNvPicPr>
@@ -3287,8 +3941,8 @@
         </p:blipFill>
         <p:spPr>
           <a:xfrm>
-            <a:off x="607558" y="2147316"/>
-            <a:ext cx="219456" cy="219456"/>
+            <a:off x="589270" y="3359404"/>
+            <a:ext cx="201168" cy="201168"/>
           </a:xfrm>
           <a:prstGeom prst="rect">
             <a:avLst/>
@@ -3297,14 +3951,14 @@
       </p:pic>
       <p:sp>
         <p:nvSpPr>
-          <p:cNvPr id="7" name="Text 4"/>
-          <p:cNvSpPr/>
-          <p:nvPr/>
-        </p:nvSpPr>
-        <p:spPr>
-          <a:xfrm>
-            <a:off x="881878" y="2129028"/>
-            <a:ext cx="3021152" cy="274320"/>
+          <p:cNvPr id="16" name="Text 13"/>
+          <p:cNvSpPr/>
+          <p:nvPr/>
+        </p:nvSpPr>
+        <p:spPr>
+          <a:xfrm>
+            <a:off x="845302" y="3359404"/>
+            <a:ext cx="10757124" cy="274320"/>
           </a:xfrm>
           <a:prstGeom prst="rect">
             <a:avLst/>
@@ -3320,46 +3974,46 @@
               <a:buNone/>
             </a:pPr>
             <a:r>
-              <a:rPr lang="en-US" sz="1600" b="1" dirty="0">
-                <a:solidFill>
-                  <a:srgbClr val="7AA2F7"/>
+              <a:rPr lang="en-US" sz="1300" b="1" dirty="0">
+                <a:solidFill>
+                  <a:srgbClr val="7DCFFF"/>
                 </a:solidFill>
                 <a:latin typeface="Trebuchet MS" pitchFamily="34" charset="0"/>
                 <a:ea typeface="Trebuchet MS" pitchFamily="34" charset="-122"/>
                 <a:cs typeface="Trebuchet MS" pitchFamily="34" charset="-120"/>
               </a:rPr>
-              <a:t>1. Nuovi Temi e Colori</a:t>
-            </a:r>
-            <a:endParaRPr lang="en-US" sz="1600" dirty="0"/>
-          </a:p>
-        </p:txBody>
-      </p:sp>
-      <p:sp>
-        <p:nvSpPr>
-          <p:cNvPr id="8" name="Text 5"/>
-          <p:cNvSpPr/>
-          <p:nvPr/>
-        </p:nvSpPr>
-        <p:spPr>
-          <a:xfrm>
-            <a:off x="584185" y="2552700"/>
-            <a:ext cx="3369649" cy="482600"/>
-          </a:xfrm>
-          <a:prstGeom prst="rect">
-            <a:avLst/>
-          </a:prstGeom>
-          <a:noFill/>
-          <a:ln/>
-        </p:spPr>
-        <p:txBody>
-          <a:bodyPr wrap="square" lIns="0" tIns="0" rIns="0" bIns="0" rtlCol="0" anchor="t"/>
-          <a:lstStyle/>
-          <a:p>
-            <a:pPr algn="l" indent="0" marL="0">
-              <a:buNone/>
-            </a:pPr>
-            <a:r>
-              <a:rPr lang="en-US" sz="1300" dirty="0">
+              <a:t>Sviluppo Aperto</a:t>
+            </a:r>
+            <a:endParaRPr lang="en-US" sz="1300" dirty="0"/>
+          </a:p>
+        </p:txBody>
+      </p:sp>
+      <p:sp>
+        <p:nvSpPr>
+          <p:cNvPr id="17" name="Text 14"/>
+          <p:cNvSpPr/>
+          <p:nvPr/>
+        </p:nvSpPr>
+        <p:spPr>
+          <a:xfrm>
+            <a:off x="589270" y="3688588"/>
+            <a:ext cx="11013156" cy="182880"/>
+          </a:xfrm>
+          <a:prstGeom prst="rect">
+            <a:avLst/>
+          </a:prstGeom>
+          <a:noFill/>
+          <a:ln/>
+        </p:spPr>
+        <p:txBody>
+          <a:bodyPr wrap="square" rtlCol="0" anchor="t"/>
+          <a:lstStyle/>
+          <a:p>
+            <a:pPr indent="0" marL="0">
+              <a:buNone/>
+            </a:pPr>
+            <a:r>
+              <a:rPr lang="en-US" sz="1200" dirty="0">
                 <a:solidFill>
                   <a:srgbClr val="C0CAF5"/>
                 </a:solidFill>
@@ -3367,317 +4021,15 @@
                 <a:ea typeface="Segoe UI" pitchFamily="34" charset="-122"/>
                 <a:cs typeface="Segoe UI" pitchFamily="34" charset="-120"/>
               </a:rPr>
-              <a:t>Più stili grafici pronti (moderno, elegante, minimale, colorato).</a:t>
-            </a:r>
-            <a:endParaRPr lang="en-US" sz="1300" dirty="0"/>
-          </a:p>
-        </p:txBody>
-      </p:sp>
-      <p:sp>
-        <p:nvSpPr>
-          <p:cNvPr id="9" name="Shape 6"/>
-          <p:cNvSpPr/>
-          <p:nvPr/>
-        </p:nvSpPr>
-        <p:spPr>
-          <a:xfrm>
-            <a:off x="4233228" y="2019300"/>
-            <a:ext cx="3725240" cy="1270000"/>
-          </a:xfrm>
-          <a:prstGeom prst="roundRect">
-            <a:avLst>
-              <a:gd name="adj" fmla="val 5760"/>
-            </a:avLst>
-          </a:prstGeom>
-          <a:solidFill>
-            <a:srgbClr val="24283B"/>
-          </a:solidFill>
-          <a:ln w="19050">
-            <a:solidFill>
-              <a:srgbClr val="7DCFFF"/>
-            </a:solidFill>
-            <a:prstDash val="solid"/>
-          </a:ln>
-        </p:spPr>
-      </p:sp>
-      <p:sp>
-        <p:nvSpPr>
-          <p:cNvPr id="10" name="Shape 7"/>
-          <p:cNvSpPr/>
-          <p:nvPr/>
-        </p:nvSpPr>
-        <p:spPr>
-          <a:xfrm>
-            <a:off x="4251516" y="2055876"/>
-            <a:ext cx="54864" cy="1196848"/>
-          </a:xfrm>
-          <a:prstGeom prst="roundRect">
-            <a:avLst>
-              <a:gd name="adj" fmla="val 50000"/>
-            </a:avLst>
-          </a:prstGeom>
-          <a:solidFill>
-            <a:srgbClr val="7DCFFF"/>
-          </a:solidFill>
-          <a:ln/>
-        </p:spPr>
-      </p:sp>
-      <p:pic>
-        <p:nvPicPr>
-          <p:cNvPr id="11" name="Image 1" descr="preencoded.png">    </p:cNvPr>
-          <p:cNvPicPr>
-            <a:picLocks noChangeAspect="1"/>
-          </p:cNvPicPr>
-          <p:nvPr/>
-        </p:nvPicPr>
-        <p:blipFill>
-          <a:blip r:embed="rId2"/>
-          <a:stretch>
-            <a:fillRect/>
-          </a:stretch>
-        </p:blipFill>
-        <p:spPr>
-          <a:xfrm>
-            <a:off x="4434396" y="2147316"/>
-            <a:ext cx="219456" cy="219456"/>
-          </a:xfrm>
-          <a:prstGeom prst="rect">
-            <a:avLst/>
-          </a:prstGeom>
-        </p:spPr>
-      </p:pic>
-      <p:sp>
-        <p:nvSpPr>
-          <p:cNvPr id="12" name="Text 8"/>
-          <p:cNvSpPr/>
-          <p:nvPr/>
-        </p:nvSpPr>
-        <p:spPr>
-          <a:xfrm>
-            <a:off x="4708716" y="2129028"/>
-            <a:ext cx="3021152" cy="274320"/>
-          </a:xfrm>
-          <a:prstGeom prst="rect">
-            <a:avLst/>
-          </a:prstGeom>
-          <a:noFill/>
-          <a:ln/>
-        </p:spPr>
-        <p:txBody>
-          <a:bodyPr wrap="square" rtlCol="0" anchor="ctr"/>
-          <a:lstStyle/>
-          <a:p>
-            <a:pPr indent="0" marL="0">
-              <a:buNone/>
-            </a:pPr>
-            <a:r>
-              <a:rPr lang="en-US" sz="1600" b="1" dirty="0">
-                <a:solidFill>
-                  <a:srgbClr val="7DCFFF"/>
-                </a:solidFill>
-                <a:latin typeface="Trebuchet MS" pitchFamily="34" charset="0"/>
-                <a:ea typeface="Trebuchet MS" pitchFamily="34" charset="-122"/>
-                <a:cs typeface="Trebuchet MS" pitchFamily="34" charset="-120"/>
-              </a:rPr>
-              <a:t>2. Lavoro di Gruppo Live</a:t>
-            </a:r>
-            <a:endParaRPr lang="en-US" sz="1600" dirty="0"/>
-          </a:p>
-        </p:txBody>
-      </p:sp>
-      <p:sp>
-        <p:nvSpPr>
-          <p:cNvPr id="13" name="Text 9"/>
-          <p:cNvSpPr/>
-          <p:nvPr/>
-        </p:nvSpPr>
-        <p:spPr>
-          <a:xfrm>
-            <a:off x="4411023" y="2552700"/>
-            <a:ext cx="3369649" cy="482600"/>
-          </a:xfrm>
-          <a:prstGeom prst="rect">
-            <a:avLst/>
-          </a:prstGeom>
-          <a:noFill/>
-          <a:ln/>
-        </p:spPr>
-        <p:txBody>
-          <a:bodyPr wrap="square" lIns="0" tIns="0" rIns="0" bIns="0" rtlCol="0" anchor="t"/>
-          <a:lstStyle/>
-          <a:p>
-            <a:pPr algn="l" indent="0" marL="0">
-              <a:buNone/>
-            </a:pPr>
-            <a:r>
-              <a:rPr lang="en-US" sz="1300" dirty="0">
-                <a:solidFill>
-                  <a:srgbClr val="C0CAF5"/>
-                </a:solidFill>
-                <a:latin typeface="Segoe UI" pitchFamily="34" charset="0"/>
-                <a:ea typeface="Segoe UI" pitchFamily="34" charset="-122"/>
-                <a:cs typeface="Segoe UI" pitchFamily="34" charset="-120"/>
-              </a:rPr>
-              <a:t>Poter scrivere le slide insieme ai compagni in tempo reale sul web.</a:t>
-            </a:r>
-            <a:endParaRPr lang="en-US" sz="1300" dirty="0"/>
-          </a:p>
-        </p:txBody>
-      </p:sp>
-      <p:sp>
-        <p:nvSpPr>
-          <p:cNvPr id="14" name="Shape 10"/>
-          <p:cNvSpPr/>
-          <p:nvPr/>
-        </p:nvSpPr>
-        <p:spPr>
-          <a:xfrm>
-            <a:off x="8060065" y="2019300"/>
-            <a:ext cx="3725240" cy="1270000"/>
-          </a:xfrm>
-          <a:prstGeom prst="roundRect">
-            <a:avLst>
-              <a:gd name="adj" fmla="val 5760"/>
-            </a:avLst>
-          </a:prstGeom>
-          <a:solidFill>
-            <a:srgbClr val="24283B"/>
-          </a:solidFill>
-          <a:ln w="19050">
-            <a:solidFill>
-              <a:srgbClr val="9ECE6A"/>
-            </a:solidFill>
-            <a:prstDash val="solid"/>
-          </a:ln>
-        </p:spPr>
-      </p:sp>
-      <p:sp>
-        <p:nvSpPr>
-          <p:cNvPr id="15" name="Shape 11"/>
-          <p:cNvSpPr/>
-          <p:nvPr/>
-        </p:nvSpPr>
-        <p:spPr>
-          <a:xfrm>
-            <a:off x="8078353" y="2055876"/>
-            <a:ext cx="54864" cy="1196848"/>
-          </a:xfrm>
-          <a:prstGeom prst="roundRect">
-            <a:avLst>
-              <a:gd name="adj" fmla="val 50000"/>
-            </a:avLst>
-          </a:prstGeom>
-          <a:solidFill>
-            <a:srgbClr val="9ECE6A"/>
-          </a:solidFill>
-          <a:ln/>
-        </p:spPr>
-      </p:sp>
-      <p:pic>
-        <p:nvPicPr>
-          <p:cNvPr id="16" name="Image 2" descr="preencoded.png">    </p:cNvPr>
-          <p:cNvPicPr>
-            <a:picLocks noChangeAspect="1"/>
-          </p:cNvPicPr>
-          <p:nvPr/>
-        </p:nvPicPr>
-        <p:blipFill>
-          <a:blip r:embed="rId3"/>
-          <a:stretch>
-            <a:fillRect/>
-          </a:stretch>
-        </p:blipFill>
-        <p:spPr>
-          <a:xfrm>
-            <a:off x="8261233" y="2147316"/>
-            <a:ext cx="219456" cy="219456"/>
-          </a:xfrm>
-          <a:prstGeom prst="rect">
-            <a:avLst/>
-          </a:prstGeom>
-        </p:spPr>
-      </p:pic>
-      <p:sp>
-        <p:nvSpPr>
-          <p:cNvPr id="17" name="Text 12"/>
-          <p:cNvSpPr/>
-          <p:nvPr/>
-        </p:nvSpPr>
-        <p:spPr>
-          <a:xfrm>
-            <a:off x="8535553" y="2129028"/>
-            <a:ext cx="3021152" cy="274320"/>
-          </a:xfrm>
-          <a:prstGeom prst="rect">
-            <a:avLst/>
-          </a:prstGeom>
-          <a:noFill/>
-          <a:ln/>
-        </p:spPr>
-        <p:txBody>
-          <a:bodyPr wrap="square" rtlCol="0" anchor="ctr"/>
-          <a:lstStyle/>
-          <a:p>
-            <a:pPr indent="0" marL="0">
-              <a:buNone/>
-            </a:pPr>
-            <a:r>
-              <a:rPr lang="en-US" sz="1600" b="1" dirty="0">
-                <a:solidFill>
-                  <a:srgbClr val="9ECE6A"/>
-                </a:solidFill>
-                <a:latin typeface="Trebuchet MS" pitchFamily="34" charset="0"/>
-                <a:ea typeface="Trebuchet MS" pitchFamily="34" charset="-122"/>
-                <a:cs typeface="Trebuchet MS" pitchFamily="34" charset="-120"/>
-              </a:rPr>
-              <a:t>3. Anteprima dal Vivo</a:t>
-            </a:r>
-            <a:endParaRPr lang="en-US" sz="1600" dirty="0"/>
-          </a:p>
-        </p:txBody>
-      </p:sp>
-      <p:sp>
-        <p:nvSpPr>
-          <p:cNvPr id="18" name="Text 13"/>
-          <p:cNvSpPr/>
-          <p:nvPr/>
-        </p:nvSpPr>
-        <p:spPr>
-          <a:xfrm>
-            <a:off x="8237861" y="2552700"/>
-            <a:ext cx="3369649" cy="482600"/>
-          </a:xfrm>
-          <a:prstGeom prst="rect">
-            <a:avLst/>
-          </a:prstGeom>
-          <a:noFill/>
-          <a:ln/>
-        </p:spPr>
-        <p:txBody>
-          <a:bodyPr wrap="square" lIns="0" tIns="0" rIns="0" bIns="0" rtlCol="0" anchor="t"/>
-          <a:lstStyle/>
-          <a:p>
-            <a:pPr algn="l" indent="0" marL="0">
-              <a:buNone/>
-            </a:pPr>
-            <a:r>
-              <a:rPr lang="en-US" sz="1300" dirty="0">
-                <a:solidFill>
-                  <a:srgbClr val="C0CAF5"/>
-                </a:solidFill>
-                <a:latin typeface="Segoe UI" pitchFamily="34" charset="0"/>
-                <a:ea typeface="Segoe UI" pitchFamily="34" charset="-122"/>
-                <a:cs typeface="Segoe UI" pitchFamily="34" charset="-120"/>
-              </a:rPr>
-              <a:t>Vedere la slide che si aggiorna istantaneamente mentre scrivi il testo.</a:t>
-            </a:r>
-            <a:endParaRPr lang="en-US" sz="1300" dirty="0"/>
-          </a:p>
-        </p:txBody>
-      </p:sp>
-      <p:sp>
-        <p:nvSpPr>
-          <p:cNvPr id="19" name="Text 14"/>
+              <a:t>Un progetto in costante evoluzione per semplificare la vita a studenti e sviluppatori.</a:t>
+            </a:r>
+            <a:endParaRPr lang="en-US" sz="1200" dirty="0"/>
+          </a:p>
+        </p:txBody>
+      </p:sp>
+      <p:sp>
+        <p:nvSpPr>
+          <p:cNvPr id="18" name="Text 15"/>
           <p:cNvSpPr/>
           <p:nvPr/>
         </p:nvSpPr>
@@ -5435,11 +5787,11 @@
         <p:spPr>
           <a:xfrm>
             <a:off x="406390" y="2019300"/>
-            <a:ext cx="3725240" cy="1270000"/>
+            <a:ext cx="5376538" cy="1670050"/>
           </a:xfrm>
           <a:prstGeom prst="roundRect">
             <a:avLst>
-              <a:gd name="adj" fmla="val 5760"/>
+              <a:gd name="adj" fmla="val 4380"/>
             </a:avLst>
           </a:prstGeom>
           <a:solidFill>
@@ -5462,7 +5814,7 @@
         <p:spPr>
           <a:xfrm>
             <a:off x="424678" y="2055876"/>
-            <a:ext cx="54864" cy="1196848"/>
+            <a:ext cx="54864" cy="1596898"/>
           </a:xfrm>
           <a:prstGeom prst="roundRect">
             <a:avLst>
@@ -5508,7 +5860,7 @@
         <p:spPr>
           <a:xfrm>
             <a:off x="881878" y="2129028"/>
-            <a:ext cx="3021152" cy="274320"/>
+            <a:ext cx="4672450" cy="274320"/>
           </a:xfrm>
           <a:prstGeom prst="rect">
             <a:avLst/>
@@ -5532,7 +5884,7 @@
                 <a:ea typeface="Trebuchet MS" pitchFamily="34" charset="-122"/>
                 <a:cs typeface="Trebuchet MS" pitchFamily="34" charset="-120"/>
               </a:rPr>
-              <a:t>1. Scrittura Semplice</a:t>
+              <a:t>Separazione Intelligente</a:t>
             </a:r>
             <a:endParaRPr lang="en-US" sz="1600" dirty="0"/>
           </a:p>
@@ -5547,7 +5899,7 @@
         <p:spPr>
           <a:xfrm>
             <a:off x="584185" y="2552700"/>
-            <a:ext cx="3369649" cy="482600"/>
+            <a:ext cx="5020946" cy="482600"/>
           </a:xfrm>
           <a:prstGeom prst="rect">
             <a:avLst/>
@@ -5571,7 +5923,7 @@
                 <a:ea typeface="Segoe UI" pitchFamily="34" charset="-122"/>
                 <a:cs typeface="Segoe UI" pitchFamily="34" charset="-120"/>
               </a:rPr>
-              <a:t>Scrivi quello che vuoi dire in modo chiaro e pulito, come prendere appunti.</a:t>
+              <a:t>Tu scrivi solo le idee e i concetti in un semplice file di testo, come se prendessi appunti veloci.</a:t>
             </a:r>
             <a:endParaRPr lang="en-US" sz="1300" dirty="0"/>
           </a:p>
@@ -5585,12 +5937,12 @@
         </p:nvSpPr>
         <p:spPr>
           <a:xfrm>
-            <a:off x="4233228" y="2019300"/>
-            <a:ext cx="3725240" cy="1270000"/>
+            <a:off x="1814499" y="3105150"/>
+            <a:ext cx="2560320" cy="330200"/>
           </a:xfrm>
           <a:prstGeom prst="roundRect">
             <a:avLst>
-              <a:gd name="adj" fmla="val 5760"/>
+              <a:gd name="adj" fmla="val 41538"/>
             </a:avLst>
           </a:prstGeom>
           <a:solidFill>
@@ -5606,14 +5958,80 @@
       </p:sp>
       <p:sp>
         <p:nvSpPr>
-          <p:cNvPr id="10" name="Shape 7"/>
-          <p:cNvSpPr/>
-          <p:nvPr/>
-        </p:nvSpPr>
-        <p:spPr>
-          <a:xfrm>
-            <a:off x="4251516" y="2055876"/>
-            <a:ext cx="54864" cy="1196848"/>
+          <p:cNvPr id="10" name="Text 7"/>
+          <p:cNvSpPr/>
+          <p:nvPr/>
+        </p:nvSpPr>
+        <p:spPr>
+          <a:xfrm>
+            <a:off x="1814499" y="3105150"/>
+            <a:ext cx="2560320" cy="330200"/>
+          </a:xfrm>
+          <a:prstGeom prst="rect">
+            <a:avLst/>
+          </a:prstGeom>
+          <a:noFill/>
+          <a:ln/>
+        </p:spPr>
+        <p:txBody>
+          <a:bodyPr wrap="square" rtlCol="0" anchor="ctr"/>
+          <a:lstStyle/>
+          <a:p>
+            <a:pPr algn="ctr" indent="0" marL="0">
+              <a:buNone/>
+            </a:pPr>
+            <a:r>
+              <a:rPr lang="en-US" sz="1000" b="1" dirty="0">
+                <a:solidFill>
+                  <a:srgbClr val="7DCFFF"/>
+                </a:solidFill>
+                <a:latin typeface="Trebuchet MS" pitchFamily="34" charset="0"/>
+                <a:ea typeface="Trebuchet MS" pitchFamily="34" charset="-122"/>
+                <a:cs typeface="Trebuchet MS" pitchFamily="34" charset="-120"/>
+              </a:rPr>
+              <a:t>SEMPLICE DA SCRIVERE</a:t>
+            </a:r>
+            <a:endParaRPr lang="en-US" sz="1000" dirty="0"/>
+          </a:p>
+        </p:txBody>
+      </p:sp>
+      <p:sp>
+        <p:nvSpPr>
+          <p:cNvPr id="11" name="Shape 8"/>
+          <p:cNvSpPr/>
+          <p:nvPr/>
+        </p:nvSpPr>
+        <p:spPr>
+          <a:xfrm>
+            <a:off x="5960723" y="2019300"/>
+            <a:ext cx="5824582" cy="1670050"/>
+          </a:xfrm>
+          <a:prstGeom prst="roundRect">
+            <a:avLst>
+              <a:gd name="adj" fmla="val 4380"/>
+            </a:avLst>
+          </a:prstGeom>
+          <a:solidFill>
+            <a:srgbClr val="24283B"/>
+          </a:solidFill>
+          <a:ln w="19050">
+            <a:solidFill>
+              <a:srgbClr val="7DCFFF"/>
+            </a:solidFill>
+            <a:prstDash val="solid"/>
+          </a:ln>
+        </p:spPr>
+      </p:sp>
+      <p:sp>
+        <p:nvSpPr>
+          <p:cNvPr id="12" name="Shape 9"/>
+          <p:cNvSpPr/>
+          <p:nvPr/>
+        </p:nvSpPr>
+        <p:spPr>
+          <a:xfrm>
+            <a:off x="5979011" y="2055876"/>
+            <a:ext cx="54864" cy="1596898"/>
           </a:xfrm>
           <a:prstGeom prst="roundRect">
             <a:avLst>
@@ -5628,7 +6046,7 @@
       </p:sp>
       <p:pic>
         <p:nvPicPr>
-          <p:cNvPr id="11" name="Image 1" descr="preencoded.png">    </p:cNvPr>
+          <p:cNvPr id="13" name="Image 1" descr="preencoded.png">    </p:cNvPr>
           <p:cNvPicPr>
             <a:picLocks noChangeAspect="1"/>
           </p:cNvPicPr>
@@ -5642,7 +6060,7 @@
         </p:blipFill>
         <p:spPr>
           <a:xfrm>
-            <a:off x="4434396" y="2147316"/>
+            <a:off x="6161891" y="2147316"/>
             <a:ext cx="219456" cy="219456"/>
           </a:xfrm>
           <a:prstGeom prst="rect">
@@ -5652,14 +6070,14 @@
       </p:pic>
       <p:sp>
         <p:nvSpPr>
-          <p:cNvPr id="12" name="Text 8"/>
-          <p:cNvSpPr/>
-          <p:nvPr/>
-        </p:nvSpPr>
-        <p:spPr>
-          <a:xfrm>
-            <a:off x="4708716" y="2129028"/>
-            <a:ext cx="3021152" cy="274320"/>
+          <p:cNvPr id="14" name="Text 10"/>
+          <p:cNvSpPr/>
+          <p:nvPr/>
+        </p:nvSpPr>
+        <p:spPr>
+          <a:xfrm>
+            <a:off x="6436211" y="2129028"/>
+            <a:ext cx="5120494" cy="274320"/>
           </a:xfrm>
           <a:prstGeom prst="rect">
             <a:avLst/>
@@ -5683,7 +6101,7 @@
                 <a:ea typeface="Trebuchet MS" pitchFamily="34" charset="-122"/>
                 <a:cs typeface="Trebuchet MS" pitchFamily="34" charset="-120"/>
               </a:rPr>
-              <a:t>2. Grafica Automatica</a:t>
+              <a:t>Composizione Automatica</a:t>
             </a:r>
             <a:endParaRPr lang="en-US" sz="1600" dirty="0"/>
           </a:p>
@@ -5691,14 +6109,14 @@
       </p:sp>
       <p:sp>
         <p:nvSpPr>
-          <p:cNvPr id="13" name="Text 9"/>
-          <p:cNvSpPr/>
-          <p:nvPr/>
-        </p:nvSpPr>
-        <p:spPr>
-          <a:xfrm>
-            <a:off x="4411023" y="2552700"/>
-            <a:ext cx="3369649" cy="482600"/>
+          <p:cNvPr id="15" name="Text 11"/>
+          <p:cNvSpPr/>
+          <p:nvPr/>
+        </p:nvSpPr>
+        <p:spPr>
+          <a:xfrm>
+            <a:off x="6138519" y="2552700"/>
+            <a:ext cx="5468991" cy="482600"/>
           </a:xfrm>
           <a:prstGeom prst="rect">
             <a:avLst/>
@@ -5722,7 +6140,7 @@
                 <a:ea typeface="Segoe UI" pitchFamily="34" charset="-122"/>
                 <a:cs typeface="Segoe UI" pitchFamily="34" charset="-120"/>
               </a:rPr>
-              <a:t>Yumia posiziona automaticamente blocchi, colori, font e spazi perfetti.</a:t>
+              <a:t>Yumia posiziona automaticamente i blocchi, calcola i margini e sceglie i colori più armoniosi.</a:t>
             </a:r>
             <a:endParaRPr lang="en-US" sz="1300" dirty="0"/>
           </a:p>
@@ -5730,18 +6148,18 @@
       </p:sp>
       <p:sp>
         <p:nvSpPr>
-          <p:cNvPr id="14" name="Shape 10"/>
-          <p:cNvSpPr/>
-          <p:nvPr/>
-        </p:nvSpPr>
-        <p:spPr>
-          <a:xfrm>
-            <a:off x="8060065" y="2019300"/>
-            <a:ext cx="3725240" cy="1270000"/>
+          <p:cNvPr id="16" name="Shape 12"/>
+          <p:cNvSpPr/>
+          <p:nvPr/>
+        </p:nvSpPr>
+        <p:spPr>
+          <a:xfrm>
+            <a:off x="7794022" y="3105150"/>
+            <a:ext cx="2157984" cy="330200"/>
           </a:xfrm>
           <a:prstGeom prst="roundRect">
             <a:avLst>
-              <a:gd name="adj" fmla="val 5760"/>
+              <a:gd name="adj" fmla="val 41538"/>
             </a:avLst>
           </a:prstGeom>
           <a:solidFill>
@@ -5757,60 +6175,14 @@
       </p:sp>
       <p:sp>
         <p:nvSpPr>
-          <p:cNvPr id="15" name="Shape 11"/>
-          <p:cNvSpPr/>
-          <p:nvPr/>
-        </p:nvSpPr>
-        <p:spPr>
-          <a:xfrm>
-            <a:off x="8078353" y="2055876"/>
-            <a:ext cx="54864" cy="1196848"/>
-          </a:xfrm>
-          <a:prstGeom prst="roundRect">
-            <a:avLst>
-              <a:gd name="adj" fmla="val 50000"/>
-            </a:avLst>
-          </a:prstGeom>
-          <a:solidFill>
-            <a:srgbClr val="9ECE6A"/>
-          </a:solidFill>
-          <a:ln/>
-        </p:spPr>
-      </p:sp>
-      <p:pic>
-        <p:nvPicPr>
-          <p:cNvPr id="16" name="Image 2" descr="preencoded.png">    </p:cNvPr>
-          <p:cNvPicPr>
-            <a:picLocks noChangeAspect="1"/>
-          </p:cNvPicPr>
-          <p:nvPr/>
-        </p:nvPicPr>
-        <p:blipFill>
-          <a:blip r:embed="rId3"/>
-          <a:stretch>
-            <a:fillRect/>
-          </a:stretch>
-        </p:blipFill>
-        <p:spPr>
-          <a:xfrm>
-            <a:off x="8261233" y="2147316"/>
-            <a:ext cx="219456" cy="219456"/>
-          </a:xfrm>
-          <a:prstGeom prst="rect">
-            <a:avLst/>
-          </a:prstGeom>
-        </p:spPr>
-      </p:pic>
-      <p:sp>
-        <p:nvSpPr>
-          <p:cNvPr id="17" name="Text 12"/>
-          <p:cNvSpPr/>
-          <p:nvPr/>
-        </p:nvSpPr>
-        <p:spPr>
-          <a:xfrm>
-            <a:off x="8535553" y="2129028"/>
-            <a:ext cx="3021152" cy="274320"/>
+          <p:cNvPr id="17" name="Text 13"/>
+          <p:cNvSpPr/>
+          <p:nvPr/>
+        </p:nvSpPr>
+        <p:spPr>
+          <a:xfrm>
+            <a:off x="7794022" y="3105150"/>
+            <a:ext cx="2157984" cy="330200"/>
           </a:xfrm>
           <a:prstGeom prst="rect">
             <a:avLst/>
@@ -5822,11 +6194,11 @@
           <a:bodyPr wrap="square" rtlCol="0" anchor="ctr"/>
           <a:lstStyle/>
           <a:p>
-            <a:pPr indent="0" marL="0">
-              <a:buNone/>
-            </a:pPr>
-            <a:r>
-              <a:rPr lang="en-US" sz="1600" b="1" dirty="0">
+            <a:pPr algn="ctr" indent="0" marL="0">
+              <a:buNone/>
+            </a:pPr>
+            <a:r>
+              <a:rPr lang="en-US" sz="1000" b="1" dirty="0">
                 <a:solidFill>
                   <a:srgbClr val="9ECE6A"/>
                 </a:solidFill>
@@ -5834,60 +6206,21 @@
                 <a:ea typeface="Trebuchet MS" pitchFamily="34" charset="-122"/>
                 <a:cs typeface="Trebuchet MS" pitchFamily="34" charset="-120"/>
               </a:rPr>
-              <a:t>3. Risultato Immediato</a:t>
-            </a:r>
-            <a:endParaRPr lang="en-US" sz="1600" dirty="0"/>
-          </a:p>
-        </p:txBody>
-      </p:sp>
-      <p:sp>
-        <p:nvSpPr>
-          <p:cNvPr id="18" name="Text 13"/>
-          <p:cNvSpPr/>
-          <p:nvPr/>
-        </p:nvSpPr>
-        <p:spPr>
-          <a:xfrm>
-            <a:off x="8237861" y="2552700"/>
-            <a:ext cx="3369649" cy="482600"/>
-          </a:xfrm>
-          <a:prstGeom prst="rect">
-            <a:avLst/>
-          </a:prstGeom>
-          <a:noFill/>
-          <a:ln/>
-        </p:spPr>
-        <p:txBody>
-          <a:bodyPr wrap="square" lIns="0" tIns="0" rIns="0" bIns="0" rtlCol="0" anchor="t"/>
-          <a:lstStyle/>
-          <a:p>
-            <a:pPr algn="l" indent="0" marL="0">
-              <a:buNone/>
-            </a:pPr>
-            <a:r>
-              <a:rPr lang="en-US" sz="1300" dirty="0">
-                <a:solidFill>
-                  <a:srgbClr val="C0CAF5"/>
-                </a:solidFill>
-                <a:latin typeface="Segoe UI" pitchFamily="34" charset="0"/>
-                <a:ea typeface="Segoe UI" pitchFamily="34" charset="-122"/>
-                <a:cs typeface="Segoe UI" pitchFamily="34" charset="-120"/>
-              </a:rPr>
-              <a:t>In pochi secondi hai una presentazione pronta, ordinata e moderna.</a:t>
-            </a:r>
-            <a:endParaRPr lang="en-US" sz="1300" dirty="0"/>
-          </a:p>
-        </p:txBody>
-      </p:sp>
-      <p:sp>
-        <p:nvSpPr>
-          <p:cNvPr id="19" name="Shape 14"/>
-          <p:cNvSpPr/>
-          <p:nvPr/>
-        </p:nvSpPr>
-        <p:spPr>
-          <a:xfrm>
-            <a:off x="406390" y="3467100"/>
+              <a:t>DESIGN GARANTITO</a:t>
+            </a:r>
+            <a:endParaRPr lang="en-US" sz="1000" dirty="0"/>
+          </a:p>
+        </p:txBody>
+      </p:sp>
+      <p:sp>
+        <p:nvSpPr>
+          <p:cNvPr id="18" name="Shape 14"/>
+          <p:cNvSpPr/>
+          <p:nvPr/>
+        </p:nvSpPr>
+        <p:spPr>
+          <a:xfrm>
+            <a:off x="406390" y="3867150"/>
             <a:ext cx="11378916" cy="774700"/>
           </a:xfrm>
           <a:prstGeom prst="roundRect">
@@ -5908,21 +6241,21 @@
       </p:sp>
       <p:pic>
         <p:nvPicPr>
-          <p:cNvPr id="20" name="Image 3" descr="preencoded.png">    </p:cNvPr>
+          <p:cNvPr id="19" name="Image 2" descr="preencoded.png">    </p:cNvPr>
           <p:cNvPicPr>
             <a:picLocks noChangeAspect="1"/>
           </p:cNvPicPr>
           <p:nvPr/>
         </p:nvPicPr>
         <p:blipFill>
-          <a:blip r:embed="rId4"/>
+          <a:blip r:embed="rId3"/>
           <a:stretch>
             <a:fillRect/>
           </a:stretch>
         </p:blipFill>
         <p:spPr>
           <a:xfrm>
-            <a:off x="589270" y="3613404"/>
+            <a:off x="589270" y="4013454"/>
             <a:ext cx="201168" cy="201168"/>
           </a:xfrm>
           <a:prstGeom prst="rect">
@@ -5932,13 +6265,13 @@
       </p:pic>
       <p:sp>
         <p:nvSpPr>
-          <p:cNvPr id="21" name="Text 15"/>
-          <p:cNvSpPr/>
-          <p:nvPr/>
-        </p:nvSpPr>
-        <p:spPr>
-          <a:xfrm>
-            <a:off x="845302" y="3613404"/>
+          <p:cNvPr id="20" name="Text 15"/>
+          <p:cNvSpPr/>
+          <p:nvPr/>
+        </p:nvSpPr>
+        <p:spPr>
+          <a:xfrm>
+            <a:off x="845302" y="4013454"/>
             <a:ext cx="10757124" cy="274320"/>
           </a:xfrm>
           <a:prstGeom prst="rect">
@@ -5971,13 +6304,13 @@
       </p:sp>
       <p:sp>
         <p:nvSpPr>
-          <p:cNvPr id="22" name="Text 16"/>
-          <p:cNvSpPr/>
-          <p:nvPr/>
-        </p:nvSpPr>
-        <p:spPr>
-          <a:xfrm>
-            <a:off x="589270" y="3942588"/>
+          <p:cNvPr id="21" name="Text 16"/>
+          <p:cNvSpPr/>
+          <p:nvPr/>
+        </p:nvSpPr>
+        <p:spPr>
+          <a:xfrm>
+            <a:off x="589270" y="4342638"/>
             <a:ext cx="11013156" cy="182880"/>
           </a:xfrm>
           <a:prstGeom prst="rect">
@@ -6010,7 +6343,7 @@
       </p:sp>
       <p:sp>
         <p:nvSpPr>
-          <p:cNvPr id="23" name="Text 17"/>
+          <p:cNvPr id="22" name="Text 17"/>
           <p:cNvSpPr/>
           <p:nvPr/>
         </p:nvSpPr>
@@ -7041,7 +7374,7 @@
                 <a:ea typeface="Segoe UI" pitchFamily="34" charset="-122"/>
                 <a:cs typeface="Segoe UI" pitchFamily="34" charset="-120"/>
               </a:rPr>
-              <a:t>• Schermo intero e vista con le note per chi parla</a:t>
+              <a:t>• Schermo intero e vista note per chi parla</a:t>
             </a:r>
             <a:endParaRPr lang="en-US" sz="1300" dirty="0"/>
           </a:p>
@@ -7511,7 +7844,7 @@
                 <a:ea typeface="Segoe UI" pitchFamily="34" charset="-122"/>
                 <a:cs typeface="Segoe UI" pitchFamily="34" charset="-120"/>
               </a:rPr>
-              <a:t>• Si legge bene su qualsiasi smartphone o PC</a:t>
+              <a:t>• Si legge bene su qualsiasi dispositivo</a:t>
             </a:r>
             <a:endParaRPr lang="en-US" sz="1300" dirty="0"/>
           </a:p>
@@ -8311,7 +8644,7 @@
                 <a:ea typeface="Trebuchet MS" pitchFamily="34" charset="-122"/>
                 <a:cs typeface="Trebuchet MS" pitchFamily="34" charset="-120"/>
               </a:rPr>
-              <a:t>Tutto quello che serve per spiegare bene un argomento</a:t>
+              <a:t>Tutto quello che serve per spiegare bene qualsiasi argomento</a:t>
             </a:r>
             <a:endParaRPr lang="en-US" sz="2600" dirty="0"/>
           </a:p>
@@ -8574,7 +8907,7 @@
                 <a:ea typeface="Trebuchet MS" pitchFamily="34" charset="-122"/>
                 <a:cs typeface="Trebuchet MS" pitchFamily="34" charset="-120"/>
               </a:rPr>
-              <a:t>Numeri e Statistiche</a:t>
+              <a:t>Numeri in Evidenza</a:t>
             </a:r>
             <a:endParaRPr lang="en-US" sz="1600" dirty="0"/>
           </a:p>
@@ -8613,7 +8946,7 @@
                 <a:ea typeface="Segoe UI" pitchFamily="34" charset="-122"/>
                 <a:cs typeface="Segoe UI" pitchFamily="34" charset="-120"/>
               </a:rPr>
-              <a:t>Grandi numeri con etichette per mostrare subito dati importanti.</a:t>
+              <a:t>Grandi metriche con etichette per mostrare subito dati importanti.</a:t>
             </a:r>
             <a:endParaRPr lang="en-US" sz="1300" dirty="0"/>
           </a:p>
@@ -9180,7 +9513,7 @@
                 <a:ea typeface="Trebuchet MS" pitchFamily="34" charset="-122"/>
                 <a:cs typeface="Trebuchet MS" pitchFamily="34" charset="-120"/>
               </a:rPr>
-              <a:t>Icone Integrate</a:t>
+              <a:t>Grafici &amp; Icone</a:t>
             </a:r>
             <a:endParaRPr lang="en-US" sz="1600" dirty="0"/>
           </a:p>
@@ -9219,7 +9552,7 @@
                 <a:ea typeface="Segoe UI" pitchFamily="34" charset="-122"/>
                 <a:cs typeface="Segoe UI" pitchFamily="34" charset="-120"/>
               </a:rPr>
-              <a:t>Migliaia di icone moderne pronte senza dover scaricare immagini.</a:t>
+              <a:t>Grafici a barre, ciambelle e oltre 10.000 icone vettoriali integrate.</a:t>
             </a:r>
             <a:endParaRPr lang="en-US" sz="1300" dirty="0"/>
           </a:p>
@@ -9659,17 +9992,17 @@
         <p:spPr>
           <a:xfrm>
             <a:off x="6184745" y="2019300"/>
-            <a:ext cx="5600560" cy="1606550"/>
+            <a:ext cx="5600560" cy="1155700"/>
           </a:xfrm>
           <a:prstGeom prst="roundRect">
             <a:avLst>
-              <a:gd name="adj" fmla="val 4553"/>
+              <a:gd name="adj" fmla="val 6330"/>
             </a:avLst>
           </a:prstGeom>
           <a:solidFill>
             <a:srgbClr val="24283B"/>
           </a:solidFill>
-          <a:ln w="19050">
+          <a:ln w="25400">
             <a:solidFill>
               <a:srgbClr val="E0AF68"/>
             </a:solidFill>
@@ -9677,31 +10010,9 @@
           </a:ln>
         </p:spPr>
       </p:sp>
-      <p:sp>
-        <p:nvSpPr>
-          <p:cNvPr id="13" name="Shape 10"/>
-          <p:cNvSpPr/>
-          <p:nvPr/>
-        </p:nvSpPr>
-        <p:spPr>
-          <a:xfrm>
-            <a:off x="6203033" y="2055876"/>
-            <a:ext cx="54864" cy="1533398"/>
-          </a:xfrm>
-          <a:prstGeom prst="roundRect">
-            <a:avLst>
-              <a:gd name="adj" fmla="val 50000"/>
-            </a:avLst>
-          </a:prstGeom>
-          <a:solidFill>
-            <a:srgbClr val="E0AF68"/>
-          </a:solidFill>
-          <a:ln/>
-        </p:spPr>
-      </p:sp>
       <p:pic>
         <p:nvPicPr>
-          <p:cNvPr id="14" name="Image 1" descr="preencoded.png">    </p:cNvPr>
+          <p:cNvPr id="13" name="Image 1" descr="preencoded.png">    </p:cNvPr>
           <p:cNvPicPr>
             <a:picLocks noChangeAspect="1"/>
           </p:cNvPicPr>
@@ -9715,8 +10026,8 @@
         </p:blipFill>
         <p:spPr>
           <a:xfrm>
-            <a:off x="6385913" y="2147316"/>
-            <a:ext cx="219456" cy="219456"/>
+            <a:off x="6367625" y="2165604"/>
+            <a:ext cx="201168" cy="201168"/>
           </a:xfrm>
           <a:prstGeom prst="rect">
             <a:avLst/>
@@ -9725,14 +10036,14 @@
       </p:pic>
       <p:sp>
         <p:nvSpPr>
-          <p:cNvPr id="15" name="Text 11"/>
-          <p:cNvSpPr/>
-          <p:nvPr/>
-        </p:nvSpPr>
-        <p:spPr>
-          <a:xfrm>
-            <a:off x="6660233" y="2129028"/>
-            <a:ext cx="4896472" cy="274320"/>
+          <p:cNvPr id="14" name="Text 10"/>
+          <p:cNvSpPr/>
+          <p:nvPr/>
+        </p:nvSpPr>
+        <p:spPr>
+          <a:xfrm>
+            <a:off x="6623657" y="2165604"/>
+            <a:ext cx="4978768" cy="274320"/>
           </a:xfrm>
           <a:prstGeom prst="rect">
             <a:avLst/>
@@ -9748,7 +10059,7 @@
               <a:buNone/>
             </a:pPr>
             <a:r>
-              <a:rPr lang="en-US" sz="1600" b="1" dirty="0">
+              <a:rPr lang="en-US" sz="1300" b="1" dirty="0">
                 <a:solidFill>
                   <a:srgbClr val="E0AF68"/>
                 </a:solidFill>
@@ -9758,38 +10069,36 @@
               </a:rPr>
               <a:t>Esempio di Avviso Semplice</a:t>
             </a:r>
-            <a:endParaRPr lang="en-US" sz="1600" dirty="0"/>
-          </a:p>
-        </p:txBody>
-      </p:sp>
-      <p:sp>
-        <p:nvSpPr>
-          <p:cNvPr id="16" name="Text 12"/>
-          <p:cNvSpPr/>
-          <p:nvPr/>
-        </p:nvSpPr>
-        <p:spPr>
-          <a:xfrm>
-            <a:off x="6362541" y="2552700"/>
-            <a:ext cx="5244969" cy="266700"/>
-          </a:xfrm>
-          <a:prstGeom prst="rect">
-            <a:avLst/>
-          </a:prstGeom>
-          <a:noFill/>
-          <a:ln/>
-        </p:spPr>
-        <p:txBody>
-          <a:bodyPr wrap="square" lIns="0" tIns="0" rIns="0" bIns="0" rtlCol="0" anchor="t">
-            <a:normAutofit/>
-          </a:bodyPr>
-          <a:lstStyle/>
-          <a:p>
-            <a:pPr algn="l" indent="0" marL="0">
-              <a:buNone/>
-            </a:pPr>
-            <a:r>
-              <a:rPr lang="en-US" sz="1300" dirty="0">
+            <a:endParaRPr lang="en-US" sz="1300" dirty="0"/>
+          </a:p>
+        </p:txBody>
+      </p:sp>
+      <p:sp>
+        <p:nvSpPr>
+          <p:cNvPr id="15" name="Text 11"/>
+          <p:cNvSpPr/>
+          <p:nvPr/>
+        </p:nvSpPr>
+        <p:spPr>
+          <a:xfrm>
+            <a:off x="6367625" y="2494788"/>
+            <a:ext cx="5234800" cy="552196"/>
+          </a:xfrm>
+          <a:prstGeom prst="rect">
+            <a:avLst/>
+          </a:prstGeom>
+          <a:noFill/>
+          <a:ln/>
+        </p:spPr>
+        <p:txBody>
+          <a:bodyPr wrap="square" rtlCol="0" anchor="t"/>
+          <a:lstStyle/>
+          <a:p>
+            <a:pPr indent="0" marL="0">
+              <a:buNone/>
+            </a:pPr>
+            <a:r>
+              <a:rPr lang="en-US" sz="1200" dirty="0">
                 <a:solidFill>
                   <a:srgbClr val="C0CAF5"/>
                 </a:solidFill>
@@ -9797,11 +10106,38 @@
                 <a:ea typeface="Segoe UI" pitchFamily="34" charset="-122"/>
                 <a:cs typeface="Segoe UI" pitchFamily="34" charset="-120"/>
               </a:rPr>
-              <a:t>• Avviso: Hai inserito troppo testo in questa slide!</a:t>
-            </a:r>
-            <a:endParaRPr lang="en-US" sz="1300" dirty="0"/>
-          </a:p>
-        </p:txBody>
+              <a:t>Avviso: Hai inserito troppo testo in questa slide! Suggerimento: Dividi il contenuto in due schede o in una seconda slide per renderla più chiara.</a:t>
+            </a:r>
+            <a:endParaRPr lang="en-US" sz="1200" dirty="0"/>
+          </a:p>
+        </p:txBody>
+      </p:sp>
+      <p:sp>
+        <p:nvSpPr>
+          <p:cNvPr id="16" name="Shape 12"/>
+          <p:cNvSpPr/>
+          <p:nvPr/>
+        </p:nvSpPr>
+        <p:spPr>
+          <a:xfrm>
+            <a:off x="7384825" y="3352800"/>
+            <a:ext cx="3200400" cy="330200"/>
+          </a:xfrm>
+          <a:prstGeom prst="roundRect">
+            <a:avLst>
+              <a:gd name="adj" fmla="val 41538"/>
+            </a:avLst>
+          </a:prstGeom>
+          <a:solidFill>
+            <a:srgbClr val="24283B"/>
+          </a:solidFill>
+          <a:ln w="19050">
+            <a:solidFill>
+              <a:srgbClr val="9ECE6A"/>
+            </a:solidFill>
+            <a:prstDash val="solid"/>
+          </a:ln>
+        </p:spPr>
       </p:sp>
       <p:sp>
         <p:nvSpPr>
@@ -9811,34 +10147,34 @@
         </p:nvSpPr>
         <p:spPr>
           <a:xfrm>
-            <a:off x="6362541" y="2889250"/>
-            <a:ext cx="5244969" cy="482600"/>
-          </a:xfrm>
-          <a:prstGeom prst="rect">
-            <a:avLst/>
-          </a:prstGeom>
-          <a:noFill/>
-          <a:ln/>
-        </p:spPr>
-        <p:txBody>
-          <a:bodyPr wrap="square" lIns="0" tIns="0" rIns="0" bIns="0" rtlCol="0" anchor="t"/>
-          <a:lstStyle/>
-          <a:p>
-            <a:pPr algn="l" indent="0" marL="0">
-              <a:buNone/>
-            </a:pPr>
-            <a:r>
-              <a:rPr lang="en-US" sz="1300" dirty="0">
-                <a:solidFill>
-                  <a:srgbClr val="C0CAF5"/>
-                </a:solidFill>
-                <a:latin typeface="Segoe UI" pitchFamily="34" charset="0"/>
-                <a:ea typeface="Segoe UI" pitchFamily="34" charset="-122"/>
-                <a:cs typeface="Segoe UI" pitchFamily="34" charset="-120"/>
-              </a:rPr>
-              <a:t>• Suggerimento: Dividi il contenuto in due schede o in una seconda slide per renderla più chiara.</a:t>
-            </a:r>
-            <a:endParaRPr lang="en-US" sz="1300" dirty="0"/>
+            <a:off x="7384825" y="3352800"/>
+            <a:ext cx="3200400" cy="330200"/>
+          </a:xfrm>
+          <a:prstGeom prst="rect">
+            <a:avLst/>
+          </a:prstGeom>
+          <a:noFill/>
+          <a:ln/>
+        </p:spPr>
+        <p:txBody>
+          <a:bodyPr wrap="square" rtlCol="0" anchor="ctr"/>
+          <a:lstStyle/>
+          <a:p>
+            <a:pPr algn="ctr" indent="0" marL="0">
+              <a:buNone/>
+            </a:pPr>
+            <a:r>
+              <a:rPr lang="en-US" sz="1000" b="1" dirty="0">
+                <a:solidFill>
+                  <a:srgbClr val="9ECE6A"/>
+                </a:solidFill>
+                <a:latin typeface="Trebuchet MS" pitchFamily="34" charset="0"/>
+                <a:ea typeface="Trebuchet MS" pitchFamily="34" charset="-122"/>
+                <a:cs typeface="Trebuchet MS" pitchFamily="34" charset="-120"/>
+              </a:rPr>
+              <a:t>CONTROLLO WCAG E ACCESSIBILITÀ</a:t>
+            </a:r>
+            <a:endParaRPr lang="en-US" sz="1000" dirty="0"/>
           </a:p>
         </p:txBody>
       </p:sp>
